--- a/プレゼンテーション1.pptx
+++ b/プレゼンテーション1.pptx
@@ -4237,7 +4237,7 @@
                 <a:latin typeface="メイリオ" panose="020B0604030504040204" pitchFamily="50" charset="-128"/>
                 <a:ea typeface="メイリオ" panose="020B0604030504040204" pitchFamily="50" charset="-128"/>
               </a:rPr>
-              <a:t>Anthoropic</a:t>
+              <a:t>Anthropic</a:t>
             </a:r>
             <a:r>
               <a:rPr kumimoji="1" lang="ja-JP" altLang="en-US" b="1">

--- a/プレゼンテーション1.pptx
+++ b/プレゼンテーション1.pptx
@@ -3640,8 +3640,8 @@
           </a:xfrm>
           <a:prstGeom prst="wedgeRectCallout">
             <a:avLst>
-              <a:gd name="adj1" fmla="val -34679"/>
-              <a:gd name="adj2" fmla="val -78573"/>
+              <a:gd name="adj1" fmla="val -42182"/>
+              <a:gd name="adj2" fmla="val -118727"/>
             </a:avLst>
           </a:prstGeom>
           <a:solidFill>
@@ -5570,7 +5570,7 @@
         <p:spPr>
           <a:xfrm>
             <a:off x="4968968" y="4041788"/>
-            <a:ext cx="2002468" cy="1546577"/>
+            <a:ext cx="2002468" cy="2100575"/>
           </a:xfrm>
           <a:prstGeom prst="rect">
             <a:avLst/>
@@ -5607,7 +5607,7 @@
                 <a:latin typeface="メイリオ" panose="020B0604030504040204" pitchFamily="50" charset="-128"/>
                 <a:ea typeface="メイリオ" panose="020B0604030504040204" pitchFamily="50" charset="-128"/>
               </a:rPr>
-              <a:t>5</a:t>
+              <a:t>3</a:t>
             </a:r>
             <a:r>
               <a:rPr lang="ja-JP" altLang="en-US" sz="1400">
@@ -5691,6 +5691,45 @@
                 <a:ea typeface="メイリオ" panose="020B0604030504040204" pitchFamily="50" charset="-128"/>
               </a:rPr>
               <a:t>。</a:t>
+            </a:r>
+            <a:endParaRPr lang="en-US" altLang="ja-JP" sz="1200">
+              <a:latin typeface="メイリオ" panose="020B0604030504040204" pitchFamily="50" charset="-128"/>
+              <a:ea typeface="メイリオ" panose="020B0604030504040204" pitchFamily="50" charset="-128"/>
+            </a:endParaRPr>
+          </a:p>
+          <a:p>
+            <a:pPr>
+              <a:lnSpc>
+                <a:spcPct val="150000"/>
+              </a:lnSpc>
+            </a:pPr>
+            <a:r>
+              <a:rPr lang="en-US" altLang="ja-JP" sz="1200">
+                <a:latin typeface="メイリオ" panose="020B0604030504040204" pitchFamily="50" charset="-128"/>
+                <a:ea typeface="メイリオ" panose="020B0604030504040204" pitchFamily="50" charset="-128"/>
+              </a:rPr>
+              <a:t>2025</a:t>
+            </a:r>
+            <a:r>
+              <a:rPr lang="ja-JP" altLang="en-US" sz="1200">
+                <a:latin typeface="メイリオ" panose="020B0604030504040204" pitchFamily="50" charset="-128"/>
+                <a:ea typeface="メイリオ" panose="020B0604030504040204" pitchFamily="50" charset="-128"/>
+              </a:rPr>
+              <a:t>年</a:t>
+            </a:r>
+            <a:r>
+              <a:rPr lang="en-US" altLang="ja-JP" sz="1200">
+                <a:latin typeface="メイリオ" panose="020B0604030504040204" pitchFamily="50" charset="-128"/>
+                <a:ea typeface="メイリオ" panose="020B0604030504040204" pitchFamily="50" charset="-128"/>
+              </a:rPr>
+              <a:t>5</a:t>
+            </a:r>
+            <a:r>
+              <a:rPr lang="ja-JP" altLang="en-US" sz="1200">
+                <a:latin typeface="メイリオ" panose="020B0604030504040204" pitchFamily="50" charset="-128"/>
+                <a:ea typeface="メイリオ" panose="020B0604030504040204" pitchFamily="50" charset="-128"/>
+              </a:rPr>
+              <a:t>月に正式リリース。</a:t>
             </a:r>
             <a:endParaRPr lang="en-US" altLang="ja-JP" sz="1400">
               <a:latin typeface="メイリオ" panose="020B0604030504040204" pitchFamily="50" charset="-128"/>
@@ -6094,7 +6133,7 @@
                 <a:latin typeface="メイリオ" panose="020B0604030504040204" pitchFamily="50" charset="-128"/>
                 <a:ea typeface="メイリオ" panose="020B0604030504040204" pitchFamily="50" charset="-128"/>
               </a:rPr>
-              <a:t>2025</a:t>
+              <a:t>2026</a:t>
             </a:r>
             <a:r>
               <a:rPr lang="ja-JP" altLang="en-US" sz="1400">
@@ -6108,7 +6147,7 @@
                 <a:latin typeface="メイリオ" panose="020B0604030504040204" pitchFamily="50" charset="-128"/>
                 <a:ea typeface="メイリオ" panose="020B0604030504040204" pitchFamily="50" charset="-128"/>
               </a:rPr>
-              <a:t>12</a:t>
+              <a:t>1</a:t>
             </a:r>
             <a:r>
               <a:rPr lang="ja-JP" altLang="en-US" sz="1400">
@@ -8582,8 +8621,8 @@
         </p:nvSpPr>
         <p:spPr>
           <a:xfrm>
-            <a:off x="5495856" y="5831563"/>
-            <a:ext cx="6511092" cy="946413"/>
+            <a:off x="5495856" y="5783849"/>
+            <a:ext cx="6511092" cy="984885"/>
           </a:xfrm>
           <a:prstGeom prst="rect">
             <a:avLst/>
@@ -8596,115 +8635,104 @@
           </a:bodyPr>
           <a:lstStyle/>
           <a:p>
-            <a:pPr>
-              <a:lnSpc>
-                <a:spcPct val="150000"/>
-              </a:lnSpc>
-            </a:pPr>
-            <a:r>
-              <a:rPr lang="ja-JP" altLang="en-US" sz="1400" b="1">
+            <a:r>
+              <a:rPr lang="ja-JP" altLang="en-US" sz="1600" b="1">
                 <a:latin typeface="メイリオ" panose="020B0604030504040204" pitchFamily="50" charset="-128"/>
                 <a:ea typeface="メイリオ" panose="020B0604030504040204" pitchFamily="50" charset="-128"/>
               </a:rPr>
               <a:t>今までの</a:t>
             </a:r>
             <a:r>
-              <a:rPr lang="en-US" altLang="ja-JP" sz="1400" b="1">
+              <a:rPr lang="en-US" altLang="ja-JP" sz="1600" b="1">
                 <a:latin typeface="メイリオ" panose="020B0604030504040204" pitchFamily="50" charset="-128"/>
                 <a:ea typeface="メイリオ" panose="020B0604030504040204" pitchFamily="50" charset="-128"/>
               </a:rPr>
               <a:t>BPO</a:t>
             </a:r>
             <a:r>
-              <a:rPr lang="ja-JP" altLang="en-US" sz="1400" b="1">
+              <a:rPr lang="ja-JP" altLang="en-US" sz="1600" b="1">
                 <a:latin typeface="メイリオ" panose="020B0604030504040204" pitchFamily="50" charset="-128"/>
                 <a:ea typeface="メイリオ" panose="020B0604030504040204" pitchFamily="50" charset="-128"/>
               </a:rPr>
               <a:t>で扱っていた</a:t>
             </a:r>
             <a:r>
-              <a:rPr lang="en-US" altLang="ja-JP" sz="1400" b="1">
+              <a:rPr lang="en-US" altLang="ja-JP" sz="1600" b="1">
                 <a:latin typeface="メイリオ" panose="020B0604030504040204" pitchFamily="50" charset="-128"/>
                 <a:ea typeface="メイリオ" panose="020B0604030504040204" pitchFamily="50" charset="-128"/>
               </a:rPr>
               <a:t>RPA</a:t>
             </a:r>
             <a:r>
-              <a:rPr lang="ja-JP" altLang="en-US" sz="1400" b="1">
+              <a:rPr lang="ja-JP" altLang="en-US" sz="1600" b="1">
                 <a:latin typeface="メイリオ" panose="020B0604030504040204" pitchFamily="50" charset="-128"/>
                 <a:ea typeface="メイリオ" panose="020B0604030504040204" pitchFamily="50" charset="-128"/>
               </a:rPr>
               <a:t>の価値が変わる</a:t>
             </a:r>
-            <a:endParaRPr lang="en-US" altLang="ja-JP" sz="1400" b="1">
+            <a:endParaRPr lang="en-US" altLang="ja-JP" sz="1600" b="1">
               <a:latin typeface="メイリオ" panose="020B0604030504040204" pitchFamily="50" charset="-128"/>
               <a:ea typeface="メイリオ" panose="020B0604030504040204" pitchFamily="50" charset="-128"/>
             </a:endParaRPr>
           </a:p>
           <a:p>
             <a:pPr marL="171450" indent="-171450">
-              <a:lnSpc>
-                <a:spcPct val="150000"/>
-              </a:lnSpc>
               <a:buFont typeface="Arial" panose="020B0604020202020204" pitchFamily="34" charset="0"/>
               <a:buChar char="•"/>
             </a:pPr>
             <a:r>
-              <a:rPr lang="ja-JP" altLang="en-US" sz="1200">
+              <a:rPr lang="ja-JP" altLang="en-US" sz="1400">
                 <a:latin typeface="メイリオ" panose="020B0604030504040204" pitchFamily="50" charset="-128"/>
                 <a:ea typeface="メイリオ" panose="020B0604030504040204" pitchFamily="50" charset="-128"/>
               </a:rPr>
               <a:t>「</a:t>
             </a:r>
             <a:r>
-              <a:rPr lang="en-US" altLang="ja-JP" sz="1200">
+              <a:rPr lang="en-US" altLang="ja-JP" sz="1400">
                 <a:latin typeface="メイリオ" panose="020B0604030504040204" pitchFamily="50" charset="-128"/>
                 <a:ea typeface="メイリオ" panose="020B0604030504040204" pitchFamily="50" charset="-128"/>
               </a:rPr>
               <a:t>Web</a:t>
             </a:r>
             <a:r>
-              <a:rPr lang="ja-JP" altLang="en-US" sz="1200">
+              <a:rPr lang="ja-JP" altLang="en-US" sz="1400">
                 <a:latin typeface="メイリオ" panose="020B0604030504040204" pitchFamily="50" charset="-128"/>
                 <a:ea typeface="メイリオ" panose="020B0604030504040204" pitchFamily="50" charset="-128"/>
               </a:rPr>
               <a:t>システムへの入力作業」「定型的な</a:t>
             </a:r>
             <a:r>
-              <a:rPr lang="en-US" altLang="ja-JP" sz="1200">
+              <a:rPr lang="en-US" altLang="ja-JP" sz="1400">
                 <a:latin typeface="メイリオ" panose="020B0604030504040204" pitchFamily="50" charset="-128"/>
                 <a:ea typeface="メイリオ" panose="020B0604030504040204" pitchFamily="50" charset="-128"/>
               </a:rPr>
               <a:t>PC</a:t>
             </a:r>
             <a:r>
-              <a:rPr lang="ja-JP" altLang="en-US" sz="1200">
+              <a:rPr lang="ja-JP" altLang="en-US" sz="1400">
                 <a:latin typeface="メイリオ" panose="020B0604030504040204" pitchFamily="50" charset="-128"/>
                 <a:ea typeface="メイリオ" panose="020B0604030504040204" pitchFamily="50" charset="-128"/>
               </a:rPr>
               <a:t>操作」を、より柔軟に自動化できる。</a:t>
             </a:r>
-            <a:endParaRPr lang="en-US" altLang="ja-JP" sz="1200">
+            <a:endParaRPr lang="en-US" altLang="ja-JP" sz="1400">
               <a:latin typeface="メイリオ" panose="020B0604030504040204" pitchFamily="50" charset="-128"/>
               <a:ea typeface="メイリオ" panose="020B0604030504040204" pitchFamily="50" charset="-128"/>
             </a:endParaRPr>
           </a:p>
           <a:p>
             <a:pPr marL="171450" indent="-171450">
-              <a:lnSpc>
-                <a:spcPct val="150000"/>
-              </a:lnSpc>
               <a:buFont typeface="Arial" panose="020B0604020202020204" pitchFamily="34" charset="0"/>
               <a:buChar char="•"/>
             </a:pPr>
             <a:r>
-              <a:rPr kumimoji="1" lang="ja-JP" altLang="en-US" sz="1200">
+              <a:rPr kumimoji="1" lang="ja-JP" altLang="en-US" sz="1400">
                 <a:latin typeface="メイリオ" panose="020B0604030504040204" pitchFamily="50" charset="-128"/>
                 <a:ea typeface="メイリオ" panose="020B0604030504040204" pitchFamily="50" charset="-128"/>
               </a:rPr>
               <a:t>画面構成が変わっても止まらない。</a:t>
             </a:r>
-            <a:endParaRPr kumimoji="1" lang="en-US" altLang="ja-JP" sz="1200">
+            <a:endParaRPr kumimoji="1" lang="en-US" altLang="ja-JP" sz="1400">
               <a:latin typeface="メイリオ" panose="020B0604030504040204" pitchFamily="50" charset="-128"/>
               <a:ea typeface="メイリオ" panose="020B0604030504040204" pitchFamily="50" charset="-128"/>
             </a:endParaRPr>
@@ -8857,7 +8885,7 @@
         <p:spPr>
           <a:xfrm>
             <a:off x="5575852" y="4785777"/>
-            <a:ext cx="6431096" cy="1015663"/>
+            <a:ext cx="6431096" cy="900246"/>
           </a:xfrm>
           <a:prstGeom prst="rect">
             <a:avLst/>
@@ -8871,28 +8899,28 @@
           <a:lstStyle/>
           <a:p>
             <a:r>
-              <a:rPr kumimoji="1" lang="ja-JP" altLang="en-US" sz="1200">
+              <a:rPr kumimoji="1" lang="ja-JP" altLang="en-US" sz="1050">
                 <a:latin typeface="メイリオ" panose="020B0604030504040204" pitchFamily="50" charset="-128"/>
                 <a:ea typeface="メイリオ" panose="020B0604030504040204" pitchFamily="50" charset="-128"/>
               </a:rPr>
               <a:t>アプリの中で使うので個人の作業効率化には有効だが、</a:t>
             </a:r>
             <a:r>
-              <a:rPr kumimoji="1" lang="en-US" altLang="ja-JP" sz="1200">
+              <a:rPr kumimoji="1" lang="en-US" altLang="ja-JP" sz="1050">
                 <a:latin typeface="メイリオ" panose="020B0604030504040204" pitchFamily="50" charset="-128"/>
                 <a:ea typeface="メイリオ" panose="020B0604030504040204" pitchFamily="50" charset="-128"/>
               </a:rPr>
               <a:t>Microsoft</a:t>
             </a:r>
             <a:r>
-              <a:rPr kumimoji="1" lang="ja-JP" altLang="en-US" sz="1200">
+              <a:rPr kumimoji="1" lang="ja-JP" altLang="en-US" sz="1050">
                 <a:latin typeface="メイリオ" panose="020B0604030504040204" pitchFamily="50" charset="-128"/>
                 <a:ea typeface="メイリオ" panose="020B0604030504040204" pitchFamily="50" charset="-128"/>
               </a:rPr>
               <a:t>自身が「</a:t>
             </a:r>
             <a:r>
-              <a:rPr lang="en-US" altLang="ja-JP" sz="1200" b="1">
+              <a:rPr lang="en-US" altLang="ja-JP" sz="1050" b="1">
                 <a:latin typeface="メイリオ" panose="020B0604030504040204" pitchFamily="50" charset="-128"/>
                 <a:ea typeface="メイリオ" panose="020B0604030504040204" pitchFamily="50" charset="-128"/>
                 <a:hlinkClick r:id="rId12"/>
@@ -8900,7 +8928,7 @@
               <a:t>Copilot</a:t>
             </a:r>
             <a:r>
-              <a:rPr lang="ja-JP" altLang="en-US" sz="1200" b="1">
+              <a:rPr lang="ja-JP" altLang="en-US" sz="1050" b="1">
                 <a:latin typeface="メイリオ" panose="020B0604030504040204" pitchFamily="50" charset="-128"/>
                 <a:ea typeface="メイリオ" panose="020B0604030504040204" pitchFamily="50" charset="-128"/>
                 <a:hlinkClick r:id="rId12"/>
@@ -8908,41 +8936,41 @@
               <a:t>だけでは組織固有のワークフロー・自動化ニーズに完全対応できない</a:t>
             </a:r>
             <a:r>
-              <a:rPr lang="ja-JP" altLang="en-US" sz="1200">
+              <a:rPr lang="ja-JP" altLang="en-US" sz="1050">
                 <a:latin typeface="メイリオ" panose="020B0604030504040204" pitchFamily="50" charset="-128"/>
                 <a:ea typeface="メイリオ" panose="020B0604030504040204" pitchFamily="50" charset="-128"/>
               </a:rPr>
               <a:t>」と明記。</a:t>
             </a:r>
-            <a:endParaRPr lang="en-US" altLang="ja-JP" sz="1200">
+            <a:endParaRPr lang="en-US" altLang="ja-JP" sz="1050">
               <a:latin typeface="メイリオ" panose="020B0604030504040204" pitchFamily="50" charset="-128"/>
               <a:ea typeface="メイリオ" panose="020B0604030504040204" pitchFamily="50" charset="-128"/>
             </a:endParaRPr>
           </a:p>
           <a:p>
             <a:r>
-              <a:rPr lang="ja-JP" altLang="en-US" sz="1200">
+              <a:rPr lang="ja-JP" altLang="en-US" sz="1050">
                 <a:latin typeface="メイリオ" panose="020B0604030504040204" pitchFamily="50" charset="-128"/>
                 <a:ea typeface="メイリオ" panose="020B0604030504040204" pitchFamily="50" charset="-128"/>
               </a:rPr>
               <a:t>複数システムを横断する定型業務やデータ連携など、業務フロー全体の自動化には</a:t>
             </a:r>
             <a:r>
-              <a:rPr lang="en-US" altLang="ja-JP" sz="1200">
+              <a:rPr lang="en-US" altLang="ja-JP" sz="1050">
                 <a:latin typeface="メイリオ" panose="020B0604030504040204" pitchFamily="50" charset="-128"/>
                 <a:ea typeface="メイリオ" panose="020B0604030504040204" pitchFamily="50" charset="-128"/>
               </a:rPr>
               <a:t>AI</a:t>
             </a:r>
             <a:r>
-              <a:rPr lang="ja-JP" altLang="en-US" sz="1200">
+              <a:rPr lang="ja-JP" altLang="en-US" sz="1050">
                 <a:latin typeface="メイリオ" panose="020B0604030504040204" pitchFamily="50" charset="-128"/>
                 <a:ea typeface="メイリオ" panose="020B0604030504040204" pitchFamily="50" charset="-128"/>
               </a:rPr>
               <a:t>エージェントが必要。</a:t>
             </a:r>
             <a:r>
-              <a:rPr lang="en-US" altLang="ja-JP" sz="1200">
+              <a:rPr lang="en-US" altLang="ja-JP" sz="1050">
                 <a:latin typeface="メイリオ" panose="020B0604030504040204" pitchFamily="50" charset="-128"/>
                 <a:ea typeface="メイリオ" panose="020B0604030504040204" pitchFamily="50" charset="-128"/>
                 <a:hlinkClick r:id="rId13"/>
@@ -8950,7 +8978,7 @@
               <a:t>Anthropic</a:t>
             </a:r>
             <a:r>
-              <a:rPr lang="ja-JP" altLang="en-US" sz="1200">
+              <a:rPr lang="ja-JP" altLang="en-US" sz="1050">
                 <a:latin typeface="メイリオ" panose="020B0604030504040204" pitchFamily="50" charset="-128"/>
                 <a:ea typeface="メイリオ" panose="020B0604030504040204" pitchFamily="50" charset="-128"/>
                 <a:hlinkClick r:id="rId13"/>
@@ -8958,40 +8986,40 @@
               <a:t>社内では非技術部門でもワークフロー自動化を実現</a:t>
             </a:r>
             <a:r>
-              <a:rPr lang="ja-JP" altLang="en-US" sz="1200">
+              <a:rPr lang="ja-JP" altLang="en-US" sz="1050">
                 <a:latin typeface="メイリオ" panose="020B0604030504040204" pitchFamily="50" charset="-128"/>
                 <a:ea typeface="メイリオ" panose="020B0604030504040204" pitchFamily="50" charset="-128"/>
               </a:rPr>
               <a:t>。</a:t>
             </a:r>
-            <a:endParaRPr lang="en-US" altLang="ja-JP" sz="1200">
+            <a:endParaRPr lang="en-US" altLang="ja-JP" sz="1050">
               <a:latin typeface="メイリオ" panose="020B0604030504040204" pitchFamily="50" charset="-128"/>
               <a:ea typeface="メイリオ" panose="020B0604030504040204" pitchFamily="50" charset="-128"/>
             </a:endParaRPr>
           </a:p>
           <a:p>
             <a:r>
-              <a:rPr lang="ja-JP" altLang="en-US" sz="1200">
+              <a:rPr lang="ja-JP" altLang="en-US" sz="1050" b="1">
                 <a:latin typeface="メイリオ" panose="020B0604030504040204" pitchFamily="50" charset="-128"/>
                 <a:ea typeface="メイリオ" panose="020B0604030504040204" pitchFamily="50" charset="-128"/>
               </a:rPr>
               <a:t>→ </a:t>
             </a:r>
             <a:r>
-              <a:rPr lang="en-US" altLang="ja-JP" sz="1200">
+              <a:rPr lang="en-US" altLang="ja-JP" sz="1050" b="1">
                 <a:latin typeface="メイリオ" panose="020B0604030504040204" pitchFamily="50" charset="-128"/>
                 <a:ea typeface="メイリオ" panose="020B0604030504040204" pitchFamily="50" charset="-128"/>
               </a:rPr>
               <a:t>Copilot</a:t>
             </a:r>
             <a:r>
-              <a:rPr lang="ja-JP" altLang="en-US" sz="1200">
+              <a:rPr lang="ja-JP" altLang="en-US" sz="1050" b="1">
                 <a:latin typeface="メイリオ" panose="020B0604030504040204" pitchFamily="50" charset="-128"/>
                 <a:ea typeface="メイリオ" panose="020B0604030504040204" pitchFamily="50" charset="-128"/>
               </a:rPr>
               <a:t>は「今の仕事を速くする」、エージェントは「仕事の仕組みを変える」</a:t>
             </a:r>
-            <a:endParaRPr kumimoji="1" lang="en-US" altLang="ja-JP" sz="1200">
+            <a:endParaRPr kumimoji="1" lang="en-US" altLang="ja-JP" sz="1050" b="1">
               <a:latin typeface="メイリオ" panose="020B0604030504040204" pitchFamily="50" charset="-128"/>
               <a:ea typeface="メイリオ" panose="020B0604030504040204" pitchFamily="50" charset="-128"/>
             </a:endParaRPr>
@@ -10681,7 +10709,7 @@
         <p:spPr>
           <a:xfrm>
             <a:off x="5495856" y="5525729"/>
-            <a:ext cx="6511092" cy="1223412"/>
+            <a:ext cx="6511092" cy="1354217"/>
           </a:xfrm>
           <a:prstGeom prst="rect">
             <a:avLst/>
@@ -10694,107 +10722,93 @@
           </a:bodyPr>
           <a:lstStyle/>
           <a:p>
-            <a:pPr>
-              <a:lnSpc>
-                <a:spcPct val="150000"/>
-              </a:lnSpc>
-            </a:pPr>
-            <a:r>
-              <a:rPr lang="en-US" altLang="ja-JP" sz="1400" b="1">
+            <a:r>
+              <a:rPr lang="en-US" altLang="ja-JP" b="1">
                 <a:latin typeface="メイリオ" panose="020B0604030504040204" pitchFamily="50" charset="-128"/>
                 <a:ea typeface="メイリオ" panose="020B0604030504040204" pitchFamily="50" charset="-128"/>
               </a:rPr>
               <a:t>BPO</a:t>
             </a:r>
             <a:r>
-              <a:rPr lang="ja-JP" altLang="en-US" sz="1400" b="1">
+              <a:rPr lang="ja-JP" altLang="en-US" b="1">
                 <a:latin typeface="メイリオ" panose="020B0604030504040204" pitchFamily="50" charset="-128"/>
                 <a:ea typeface="メイリオ" panose="020B0604030504040204" pitchFamily="50" charset="-128"/>
               </a:rPr>
               <a:t>業務視点ではどう変化する？</a:t>
             </a:r>
-            <a:endParaRPr lang="en-US" altLang="ja-JP" sz="1400" b="1">
+            <a:endParaRPr lang="en-US" altLang="ja-JP" b="1">
               <a:latin typeface="メイリオ" panose="020B0604030504040204" pitchFamily="50" charset="-128"/>
               <a:ea typeface="メイリオ" panose="020B0604030504040204" pitchFamily="50" charset="-128"/>
             </a:endParaRPr>
           </a:p>
           <a:p>
             <a:pPr marL="171450" indent="-171450">
-              <a:lnSpc>
-                <a:spcPct val="150000"/>
-              </a:lnSpc>
               <a:buFont typeface="Arial" panose="020B0604020202020204" pitchFamily="34" charset="0"/>
               <a:buChar char="•"/>
             </a:pPr>
             <a:r>
-              <a:rPr kumimoji="1" lang="ja-JP" altLang="en-US" sz="1200">
+              <a:rPr kumimoji="1" lang="ja-JP" altLang="en-US" sz="1600">
                 <a:latin typeface="メイリオ" panose="020B0604030504040204" pitchFamily="50" charset="-128"/>
                 <a:ea typeface="メイリオ" panose="020B0604030504040204" pitchFamily="50" charset="-128"/>
               </a:rPr>
               <a:t>属人化した業務知識の継承</a:t>
             </a:r>
-            <a:endParaRPr kumimoji="1" lang="en-US" altLang="ja-JP" sz="1200">
+            <a:endParaRPr kumimoji="1" lang="en-US" altLang="ja-JP" sz="1600">
               <a:latin typeface="メイリオ" panose="020B0604030504040204" pitchFamily="50" charset="-128"/>
               <a:ea typeface="メイリオ" panose="020B0604030504040204" pitchFamily="50" charset="-128"/>
             </a:endParaRPr>
           </a:p>
           <a:p>
             <a:pPr marL="171450" indent="-171450">
-              <a:lnSpc>
-                <a:spcPct val="150000"/>
-              </a:lnSpc>
               <a:buFont typeface="Arial" panose="020B0604020202020204" pitchFamily="34" charset="0"/>
               <a:buChar char="•"/>
             </a:pPr>
             <a:r>
-              <a:rPr lang="ja-JP" altLang="en-US" sz="1200">
+              <a:rPr lang="ja-JP" altLang="en-US" sz="1600">
                 <a:latin typeface="メイリオ" panose="020B0604030504040204" pitchFamily="50" charset="-128"/>
                 <a:ea typeface="メイリオ" panose="020B0604030504040204" pitchFamily="50" charset="-128"/>
               </a:rPr>
               <a:t>引継ぎコストの削減</a:t>
             </a:r>
-            <a:endParaRPr lang="en-US" altLang="ja-JP" sz="1200">
+            <a:endParaRPr lang="en-US" altLang="ja-JP" sz="1600">
               <a:latin typeface="メイリオ" panose="020B0604030504040204" pitchFamily="50" charset="-128"/>
               <a:ea typeface="メイリオ" panose="020B0604030504040204" pitchFamily="50" charset="-128"/>
             </a:endParaRPr>
           </a:p>
           <a:p>
             <a:pPr marL="171450" indent="-171450">
-              <a:lnSpc>
-                <a:spcPct val="150000"/>
-              </a:lnSpc>
               <a:buFont typeface="Arial" panose="020B0604020202020204" pitchFamily="34" charset="0"/>
               <a:buChar char="•"/>
             </a:pPr>
             <a:r>
-              <a:rPr kumimoji="1" lang="ja-JP" altLang="en-US" sz="1200">
+              <a:rPr kumimoji="1" lang="ja-JP" altLang="en-US" sz="1600">
                 <a:latin typeface="メイリオ" panose="020B0604030504040204" pitchFamily="50" charset="-128"/>
                 <a:ea typeface="メイリオ" panose="020B0604030504040204" pitchFamily="50" charset="-128"/>
               </a:rPr>
               <a:t>クライアント提案の差別化（「</a:t>
             </a:r>
             <a:r>
-              <a:rPr kumimoji="1" lang="en-US" altLang="ja-JP" sz="1200">
+              <a:rPr kumimoji="1" lang="en-US" altLang="ja-JP" sz="1600">
                 <a:latin typeface="メイリオ" panose="020B0604030504040204" pitchFamily="50" charset="-128"/>
                 <a:ea typeface="メイリオ" panose="020B0604030504040204" pitchFamily="50" charset="-128"/>
               </a:rPr>
               <a:t>Skills</a:t>
             </a:r>
             <a:r>
-              <a:rPr lang="ja-JP" altLang="en-US" sz="1200">
+              <a:rPr lang="ja-JP" altLang="en-US" sz="1600">
                 <a:latin typeface="メイリオ" panose="020B0604030504040204" pitchFamily="50" charset="-128"/>
                 <a:ea typeface="メイリオ" panose="020B0604030504040204" pitchFamily="50" charset="-128"/>
               </a:rPr>
               <a:t>化した業務改善</a:t>
             </a:r>
             <a:r>
-              <a:rPr kumimoji="1" lang="ja-JP" altLang="en-US" sz="1200">
+              <a:rPr kumimoji="1" lang="ja-JP" altLang="en-US" sz="1600">
                 <a:latin typeface="メイリオ" panose="020B0604030504040204" pitchFamily="50" charset="-128"/>
                 <a:ea typeface="メイリオ" panose="020B0604030504040204" pitchFamily="50" charset="-128"/>
               </a:rPr>
               <a:t>」を提案に組み込める）</a:t>
             </a:r>
-            <a:endParaRPr kumimoji="1" lang="en-US" altLang="ja-JP" sz="1200">
+            <a:endParaRPr kumimoji="1" lang="en-US" altLang="ja-JP" sz="1600">
               <a:latin typeface="メイリオ" panose="020B0604030504040204" pitchFamily="50" charset="-128"/>
               <a:ea typeface="メイリオ" panose="020B0604030504040204" pitchFamily="50" charset="-128"/>
             </a:endParaRPr>

--- a/プレゼンテーション1.pptx
+++ b/プレゼンテーション1.pptx
@@ -4,12 +4,21 @@
   <p:sldMasterIdLst>
     <p:sldMasterId id="2147483648" r:id="rId1"/>
   </p:sldMasterIdLst>
+  <p:notesMasterIdLst>
+    <p:notesMasterId r:id="rId13"/>
+  </p:notesMasterIdLst>
   <p:sldIdLst>
     <p:sldId id="256" r:id="rId2"/>
     <p:sldId id="257" r:id="rId3"/>
     <p:sldId id="259" r:id="rId4"/>
     <p:sldId id="261" r:id="rId5"/>
     <p:sldId id="262" r:id="rId6"/>
+    <p:sldId id="263" r:id="rId7"/>
+    <p:sldId id="268" r:id="rId8"/>
+    <p:sldId id="264" r:id="rId9"/>
+    <p:sldId id="265" r:id="rId10"/>
+    <p:sldId id="266" r:id="rId11"/>
+    <p:sldId id="267" r:id="rId12"/>
   </p:sldIdLst>
   <p:sldSz cx="12192000" cy="6858000"/>
   <p:notesSz cx="6858000" cy="9144000"/>
@@ -108,7 +117,477 @@
       </a:defRPr>
     </a:lvl9pPr>
   </p:defaultTextStyle>
+  <p:extLst>
+    <p:ext uri="{EFAFB233-063F-42B5-8137-9DF3F51BA10A}">
+      <p15:sldGuideLst xmlns:p15="http://schemas.microsoft.com/office/powerpoint/2012/main"/>
+    </p:ext>
+  </p:extLst>
 </p:presentation>
+</file>
+
+<file path=ppt/notesMasters/notesMaster1.xml><?xml version="1.0" encoding="utf-8"?>
+<p:notesMaster xmlns:a="http://schemas.openxmlformats.org/drawingml/2006/main" xmlns:r="http://schemas.openxmlformats.org/officeDocument/2006/relationships" xmlns:p="http://schemas.openxmlformats.org/presentationml/2006/main">
+  <p:cSld>
+    <p:bg>
+      <p:bgRef idx="1001">
+        <a:schemeClr val="bg1"/>
+      </p:bgRef>
+    </p:bg>
+    <p:spTree>
+      <p:nvGrpSpPr>
+        <p:cNvPr id="1" name=""/>
+        <p:cNvGrpSpPr/>
+        <p:nvPr/>
+      </p:nvGrpSpPr>
+      <p:grpSpPr>
+        <a:xfrm>
+          <a:off x="0" y="0"/>
+          <a:ext cx="0" cy="0"/>
+          <a:chOff x="0" y="0"/>
+          <a:chExt cx="0" cy="0"/>
+        </a:xfrm>
+      </p:grpSpPr>
+      <p:sp>
+        <p:nvSpPr>
+          <p:cNvPr id="2" name="ヘッダー プレースホルダー 1"/>
+          <p:cNvSpPr>
+            <a:spLocks noGrp="1"/>
+          </p:cNvSpPr>
+          <p:nvPr>
+            <p:ph type="hdr" sz="quarter"/>
+          </p:nvPr>
+        </p:nvSpPr>
+        <p:spPr>
+          <a:xfrm>
+            <a:off x="0" y="0"/>
+            <a:ext cx="2971800" cy="458788"/>
+          </a:xfrm>
+          <a:prstGeom prst="rect">
+            <a:avLst/>
+          </a:prstGeom>
+        </p:spPr>
+        <p:txBody>
+          <a:bodyPr vert="horz" lIns="91440" tIns="45720" rIns="91440" bIns="45720" rtlCol="0"/>
+          <a:lstStyle>
+            <a:lvl1pPr algn="l">
+              <a:defRPr sz="1200"/>
+            </a:lvl1pPr>
+          </a:lstStyle>
+          <a:p>
+            <a:endParaRPr kumimoji="1" lang="ja-JP" altLang="en-US"/>
+          </a:p>
+        </p:txBody>
+      </p:sp>
+      <p:sp>
+        <p:nvSpPr>
+          <p:cNvPr id="3" name="日付プレースホルダー 2"/>
+          <p:cNvSpPr>
+            <a:spLocks noGrp="1"/>
+          </p:cNvSpPr>
+          <p:nvPr>
+            <p:ph type="dt" idx="1"/>
+          </p:nvPr>
+        </p:nvSpPr>
+        <p:spPr>
+          <a:xfrm>
+            <a:off x="3884613" y="0"/>
+            <a:ext cx="2971800" cy="458788"/>
+          </a:xfrm>
+          <a:prstGeom prst="rect">
+            <a:avLst/>
+          </a:prstGeom>
+        </p:spPr>
+        <p:txBody>
+          <a:bodyPr vert="horz" lIns="91440" tIns="45720" rIns="91440" bIns="45720" rtlCol="0"/>
+          <a:lstStyle>
+            <a:lvl1pPr algn="r">
+              <a:defRPr sz="1200"/>
+            </a:lvl1pPr>
+          </a:lstStyle>
+          <a:p>
+            <a:fld id="{D58F722D-2274-4A30-A214-7B03C3AD31F9}" type="datetimeFigureOut">
+              <a:rPr kumimoji="1" lang="ja-JP" altLang="en-US" smtClean="0"/>
+              <a:t>2026/3/5</a:t>
+            </a:fld>
+            <a:endParaRPr kumimoji="1" lang="ja-JP" altLang="en-US"/>
+          </a:p>
+        </p:txBody>
+      </p:sp>
+      <p:sp>
+        <p:nvSpPr>
+          <p:cNvPr id="4" name="スライド イメージ プレースホルダー 3"/>
+          <p:cNvSpPr>
+            <a:spLocks noGrp="1" noRot="1" noChangeAspect="1"/>
+          </p:cNvSpPr>
+          <p:nvPr>
+            <p:ph type="sldImg" idx="2"/>
+          </p:nvPr>
+        </p:nvSpPr>
+        <p:spPr>
+          <a:xfrm>
+            <a:off x="685800" y="1143000"/>
+            <a:ext cx="5486400" cy="3086100"/>
+          </a:xfrm>
+          <a:prstGeom prst="rect">
+            <a:avLst/>
+          </a:prstGeom>
+          <a:noFill/>
+          <a:ln w="12700">
+            <a:solidFill>
+              <a:prstClr val="black"/>
+            </a:solidFill>
+          </a:ln>
+        </p:spPr>
+        <p:txBody>
+          <a:bodyPr vert="horz" lIns="91440" tIns="45720" rIns="91440" bIns="45720" rtlCol="0" anchor="ctr"/>
+          <a:lstStyle/>
+          <a:p>
+            <a:endParaRPr lang="ja-JP" altLang="en-US"/>
+          </a:p>
+        </p:txBody>
+      </p:sp>
+      <p:sp>
+        <p:nvSpPr>
+          <p:cNvPr id="5" name="ノート プレースホルダー 4"/>
+          <p:cNvSpPr>
+            <a:spLocks noGrp="1"/>
+          </p:cNvSpPr>
+          <p:nvPr>
+            <p:ph type="body" sz="quarter" idx="3"/>
+          </p:nvPr>
+        </p:nvSpPr>
+        <p:spPr>
+          <a:xfrm>
+            <a:off x="685800" y="4400550"/>
+            <a:ext cx="5486400" cy="3600450"/>
+          </a:xfrm>
+          <a:prstGeom prst="rect">
+            <a:avLst/>
+          </a:prstGeom>
+        </p:spPr>
+        <p:txBody>
+          <a:bodyPr vert="horz" lIns="91440" tIns="45720" rIns="91440" bIns="45720" rtlCol="0"/>
+          <a:lstStyle/>
+          <a:p>
+            <a:pPr lvl="0"/>
+            <a:r>
+              <a:rPr kumimoji="1" lang="ja-JP" altLang="en-US"/>
+              <a:t>マスター テキストの書式設定</a:t>
+            </a:r>
+          </a:p>
+          <a:p>
+            <a:pPr lvl="1"/>
+            <a:r>
+              <a:rPr kumimoji="1" lang="ja-JP" altLang="en-US"/>
+              <a:t>第 </a:t>
+            </a:r>
+            <a:r>
+              <a:rPr kumimoji="1" lang="en-US" altLang="ja-JP"/>
+              <a:t>2 </a:t>
+            </a:r>
+            <a:r>
+              <a:rPr kumimoji="1" lang="ja-JP" altLang="en-US"/>
+              <a:t>レベル</a:t>
+            </a:r>
+          </a:p>
+          <a:p>
+            <a:pPr lvl="2"/>
+            <a:r>
+              <a:rPr kumimoji="1" lang="ja-JP" altLang="en-US"/>
+              <a:t>第 </a:t>
+            </a:r>
+            <a:r>
+              <a:rPr kumimoji="1" lang="en-US" altLang="ja-JP"/>
+              <a:t>3 </a:t>
+            </a:r>
+            <a:r>
+              <a:rPr kumimoji="1" lang="ja-JP" altLang="en-US"/>
+              <a:t>レベル</a:t>
+            </a:r>
+          </a:p>
+          <a:p>
+            <a:pPr lvl="3"/>
+            <a:r>
+              <a:rPr kumimoji="1" lang="ja-JP" altLang="en-US"/>
+              <a:t>第 </a:t>
+            </a:r>
+            <a:r>
+              <a:rPr kumimoji="1" lang="en-US" altLang="ja-JP"/>
+              <a:t>4 </a:t>
+            </a:r>
+            <a:r>
+              <a:rPr kumimoji="1" lang="ja-JP" altLang="en-US"/>
+              <a:t>レベル</a:t>
+            </a:r>
+          </a:p>
+          <a:p>
+            <a:pPr lvl="4"/>
+            <a:r>
+              <a:rPr kumimoji="1" lang="ja-JP" altLang="en-US"/>
+              <a:t>第 </a:t>
+            </a:r>
+            <a:r>
+              <a:rPr kumimoji="1" lang="en-US" altLang="ja-JP"/>
+              <a:t>5 </a:t>
+            </a:r>
+            <a:r>
+              <a:rPr kumimoji="1" lang="ja-JP" altLang="en-US"/>
+              <a:t>レベル</a:t>
+            </a:r>
+          </a:p>
+        </p:txBody>
+      </p:sp>
+      <p:sp>
+        <p:nvSpPr>
+          <p:cNvPr id="6" name="フッター プレースホルダー 5"/>
+          <p:cNvSpPr>
+            <a:spLocks noGrp="1"/>
+          </p:cNvSpPr>
+          <p:nvPr>
+            <p:ph type="ftr" sz="quarter" idx="4"/>
+          </p:nvPr>
+        </p:nvSpPr>
+        <p:spPr>
+          <a:xfrm>
+            <a:off x="0" y="8685213"/>
+            <a:ext cx="2971800" cy="458787"/>
+          </a:xfrm>
+          <a:prstGeom prst="rect">
+            <a:avLst/>
+          </a:prstGeom>
+        </p:spPr>
+        <p:txBody>
+          <a:bodyPr vert="horz" lIns="91440" tIns="45720" rIns="91440" bIns="45720" rtlCol="0" anchor="b"/>
+          <a:lstStyle>
+            <a:lvl1pPr algn="l">
+              <a:defRPr sz="1200"/>
+            </a:lvl1pPr>
+          </a:lstStyle>
+          <a:p>
+            <a:endParaRPr kumimoji="1" lang="ja-JP" altLang="en-US"/>
+          </a:p>
+        </p:txBody>
+      </p:sp>
+      <p:sp>
+        <p:nvSpPr>
+          <p:cNvPr id="7" name="スライド番号プレースホルダー 6"/>
+          <p:cNvSpPr>
+            <a:spLocks noGrp="1"/>
+          </p:cNvSpPr>
+          <p:nvPr>
+            <p:ph type="sldNum" sz="quarter" idx="5"/>
+          </p:nvPr>
+        </p:nvSpPr>
+        <p:spPr>
+          <a:xfrm>
+            <a:off x="3884613" y="8685213"/>
+            <a:ext cx="2971800" cy="458787"/>
+          </a:xfrm>
+          <a:prstGeom prst="rect">
+            <a:avLst/>
+          </a:prstGeom>
+        </p:spPr>
+        <p:txBody>
+          <a:bodyPr vert="horz" lIns="91440" tIns="45720" rIns="91440" bIns="45720" rtlCol="0" anchor="b"/>
+          <a:lstStyle>
+            <a:lvl1pPr algn="r">
+              <a:defRPr sz="1200"/>
+            </a:lvl1pPr>
+          </a:lstStyle>
+          <a:p>
+            <a:fld id="{EB30768A-7EDE-4A60-A3AD-7A6D00335ACD}" type="slidenum">
+              <a:rPr kumimoji="1" lang="ja-JP" altLang="en-US" smtClean="0"/>
+              <a:t>‹#›</a:t>
+            </a:fld>
+            <a:endParaRPr kumimoji="1" lang="ja-JP" altLang="en-US"/>
+          </a:p>
+        </p:txBody>
+      </p:sp>
+    </p:spTree>
+    <p:extLst>
+      <p:ext uri="{BB962C8B-B14F-4D97-AF65-F5344CB8AC3E}">
+        <p14:creationId xmlns:p14="http://schemas.microsoft.com/office/powerpoint/2010/main" val="1243882976"/>
+      </p:ext>
+    </p:extLst>
+  </p:cSld>
+  <p:clrMap bg1="lt1" tx1="dk1" bg2="lt2" tx2="dk2" accent1="accent1" accent2="accent2" accent3="accent3" accent4="accent4" accent5="accent5" accent6="accent6" hlink="hlink" folHlink="folHlink"/>
+  <p:notesStyle>
+    <a:lvl1pPr marL="0" algn="l" defTabSz="914400" rtl="0" eaLnBrk="1" latinLnBrk="0" hangingPunct="1">
+      <a:defRPr kumimoji="1" sz="1200" kern="1200">
+        <a:solidFill>
+          <a:schemeClr val="tx1"/>
+        </a:solidFill>
+        <a:latin typeface="+mn-lt"/>
+        <a:ea typeface="+mn-ea"/>
+        <a:cs typeface="+mn-cs"/>
+      </a:defRPr>
+    </a:lvl1pPr>
+    <a:lvl2pPr marL="457200" algn="l" defTabSz="914400" rtl="0" eaLnBrk="1" latinLnBrk="0" hangingPunct="1">
+      <a:defRPr kumimoji="1" sz="1200" kern="1200">
+        <a:solidFill>
+          <a:schemeClr val="tx1"/>
+        </a:solidFill>
+        <a:latin typeface="+mn-lt"/>
+        <a:ea typeface="+mn-ea"/>
+        <a:cs typeface="+mn-cs"/>
+      </a:defRPr>
+    </a:lvl2pPr>
+    <a:lvl3pPr marL="914400" algn="l" defTabSz="914400" rtl="0" eaLnBrk="1" latinLnBrk="0" hangingPunct="1">
+      <a:defRPr kumimoji="1" sz="1200" kern="1200">
+        <a:solidFill>
+          <a:schemeClr val="tx1"/>
+        </a:solidFill>
+        <a:latin typeface="+mn-lt"/>
+        <a:ea typeface="+mn-ea"/>
+        <a:cs typeface="+mn-cs"/>
+      </a:defRPr>
+    </a:lvl3pPr>
+    <a:lvl4pPr marL="1371600" algn="l" defTabSz="914400" rtl="0" eaLnBrk="1" latinLnBrk="0" hangingPunct="1">
+      <a:defRPr kumimoji="1" sz="1200" kern="1200">
+        <a:solidFill>
+          <a:schemeClr val="tx1"/>
+        </a:solidFill>
+        <a:latin typeface="+mn-lt"/>
+        <a:ea typeface="+mn-ea"/>
+        <a:cs typeface="+mn-cs"/>
+      </a:defRPr>
+    </a:lvl4pPr>
+    <a:lvl5pPr marL="1828800" algn="l" defTabSz="914400" rtl="0" eaLnBrk="1" latinLnBrk="0" hangingPunct="1">
+      <a:defRPr kumimoji="1" sz="1200" kern="1200">
+        <a:solidFill>
+          <a:schemeClr val="tx1"/>
+        </a:solidFill>
+        <a:latin typeface="+mn-lt"/>
+        <a:ea typeface="+mn-ea"/>
+        <a:cs typeface="+mn-cs"/>
+      </a:defRPr>
+    </a:lvl5pPr>
+    <a:lvl6pPr marL="2286000" algn="l" defTabSz="914400" rtl="0" eaLnBrk="1" latinLnBrk="0" hangingPunct="1">
+      <a:defRPr kumimoji="1" sz="1200" kern="1200">
+        <a:solidFill>
+          <a:schemeClr val="tx1"/>
+        </a:solidFill>
+        <a:latin typeface="+mn-lt"/>
+        <a:ea typeface="+mn-ea"/>
+        <a:cs typeface="+mn-cs"/>
+      </a:defRPr>
+    </a:lvl6pPr>
+    <a:lvl7pPr marL="2743200" algn="l" defTabSz="914400" rtl="0" eaLnBrk="1" latinLnBrk="0" hangingPunct="1">
+      <a:defRPr kumimoji="1" sz="1200" kern="1200">
+        <a:solidFill>
+          <a:schemeClr val="tx1"/>
+        </a:solidFill>
+        <a:latin typeface="+mn-lt"/>
+        <a:ea typeface="+mn-ea"/>
+        <a:cs typeface="+mn-cs"/>
+      </a:defRPr>
+    </a:lvl7pPr>
+    <a:lvl8pPr marL="3200400" algn="l" defTabSz="914400" rtl="0" eaLnBrk="1" latinLnBrk="0" hangingPunct="1">
+      <a:defRPr kumimoji="1" sz="1200" kern="1200">
+        <a:solidFill>
+          <a:schemeClr val="tx1"/>
+        </a:solidFill>
+        <a:latin typeface="+mn-lt"/>
+        <a:ea typeface="+mn-ea"/>
+        <a:cs typeface="+mn-cs"/>
+      </a:defRPr>
+    </a:lvl8pPr>
+    <a:lvl9pPr marL="3657600" algn="l" defTabSz="914400" rtl="0" eaLnBrk="1" latinLnBrk="0" hangingPunct="1">
+      <a:defRPr kumimoji="1" sz="1200" kern="1200">
+        <a:solidFill>
+          <a:schemeClr val="tx1"/>
+        </a:solidFill>
+        <a:latin typeface="+mn-lt"/>
+        <a:ea typeface="+mn-ea"/>
+        <a:cs typeface="+mn-cs"/>
+      </a:defRPr>
+    </a:lvl9pPr>
+  </p:notesStyle>
+</p:notesMaster>
+</file>
+
+<file path=ppt/notesSlides/notesSlide1.xml><?xml version="1.0" encoding="utf-8"?>
+<p:notes xmlns:a="http://schemas.openxmlformats.org/drawingml/2006/main" xmlns:r="http://schemas.openxmlformats.org/officeDocument/2006/relationships" xmlns:p="http://schemas.openxmlformats.org/presentationml/2006/main">
+  <p:cSld>
+    <p:spTree>
+      <p:nvGrpSpPr>
+        <p:cNvPr id="1" name=""/>
+        <p:cNvGrpSpPr/>
+        <p:nvPr/>
+      </p:nvGrpSpPr>
+      <p:grpSpPr>
+        <a:xfrm>
+          <a:off x="0" y="0"/>
+          <a:ext cx="0" cy="0"/>
+          <a:chOff x="0" y="0"/>
+          <a:chExt cx="0" cy="0"/>
+        </a:xfrm>
+      </p:grpSpPr>
+      <p:sp>
+        <p:nvSpPr>
+          <p:cNvPr id="2" name="スライド イメージ プレースホルダー 1"/>
+          <p:cNvSpPr>
+            <a:spLocks noGrp="1" noRot="1" noChangeAspect="1"/>
+          </p:cNvSpPr>
+          <p:nvPr>
+            <p:ph type="sldImg"/>
+          </p:nvPr>
+        </p:nvSpPr>
+        <p:spPr/>
+      </p:sp>
+      <p:sp>
+        <p:nvSpPr>
+          <p:cNvPr id="3" name="ノート プレースホルダー 2"/>
+          <p:cNvSpPr>
+            <a:spLocks noGrp="1"/>
+          </p:cNvSpPr>
+          <p:nvPr>
+            <p:ph type="body" idx="1"/>
+          </p:nvPr>
+        </p:nvSpPr>
+        <p:spPr/>
+        <p:txBody>
+          <a:bodyPr/>
+          <a:lstStyle/>
+          <a:p>
+            <a:endParaRPr kumimoji="1" lang="ja-JP" altLang="en-US"/>
+          </a:p>
+        </p:txBody>
+      </p:sp>
+      <p:sp>
+        <p:nvSpPr>
+          <p:cNvPr id="4" name="スライド番号プレースホルダー 3"/>
+          <p:cNvSpPr>
+            <a:spLocks noGrp="1"/>
+          </p:cNvSpPr>
+          <p:nvPr>
+            <p:ph type="sldNum" sz="quarter" idx="5"/>
+          </p:nvPr>
+        </p:nvSpPr>
+        <p:spPr/>
+        <p:txBody>
+          <a:bodyPr/>
+          <a:lstStyle/>
+          <a:p>
+            <a:fld id="{EB30768A-7EDE-4A60-A3AD-7A6D00335ACD}" type="slidenum">
+              <a:rPr kumimoji="1" lang="ja-JP" altLang="en-US" smtClean="0"/>
+              <a:t>7</a:t>
+            </a:fld>
+            <a:endParaRPr kumimoji="1" lang="ja-JP" altLang="en-US"/>
+          </a:p>
+        </p:txBody>
+      </p:sp>
+    </p:spTree>
+    <p:extLst>
+      <p:ext uri="{BB962C8B-B14F-4D97-AF65-F5344CB8AC3E}">
+        <p14:creationId xmlns:p14="http://schemas.microsoft.com/office/powerpoint/2010/main" val="43194171"/>
+      </p:ext>
+    </p:extLst>
+  </p:cSld>
+  <p:clrMapOvr>
+    <a:masterClrMapping/>
+  </p:clrMapOvr>
+</p:notes>
 </file>
 
 <file path=ppt/slideLayouts/slideLayout1.xml><?xml version="1.0" encoding="utf-8"?>
@@ -258,7 +737,7 @@
           <a:p>
             <a:fld id="{50C022C9-6362-4D7E-800D-CCB5DC9E42C2}" type="datetimeFigureOut">
               <a:rPr kumimoji="1" lang="ja-JP" altLang="en-US" smtClean="0"/>
-              <a:t>2026/2/4</a:t>
+              <a:t>2026/3/5</a:t>
             </a:fld>
             <a:endParaRPr kumimoji="1" lang="ja-JP" altLang="en-US"/>
           </a:p>
@@ -488,7 +967,7 @@
           <a:p>
             <a:fld id="{50C022C9-6362-4D7E-800D-CCB5DC9E42C2}" type="datetimeFigureOut">
               <a:rPr kumimoji="1" lang="ja-JP" altLang="en-US" smtClean="0"/>
-              <a:t>2026/2/4</a:t>
+              <a:t>2026/3/5</a:t>
             </a:fld>
             <a:endParaRPr kumimoji="1" lang="ja-JP" altLang="en-US"/>
           </a:p>
@@ -728,7 +1207,7 @@
           <a:p>
             <a:fld id="{50C022C9-6362-4D7E-800D-CCB5DC9E42C2}" type="datetimeFigureOut">
               <a:rPr kumimoji="1" lang="ja-JP" altLang="en-US" smtClean="0"/>
-              <a:t>2026/2/4</a:t>
+              <a:t>2026/3/5</a:t>
             </a:fld>
             <a:endParaRPr kumimoji="1" lang="ja-JP" altLang="en-US"/>
           </a:p>
@@ -958,7 +1437,7 @@
           <a:p>
             <a:fld id="{50C022C9-6362-4D7E-800D-CCB5DC9E42C2}" type="datetimeFigureOut">
               <a:rPr kumimoji="1" lang="ja-JP" altLang="en-US" smtClean="0"/>
-              <a:t>2026/2/4</a:t>
+              <a:t>2026/3/5</a:t>
             </a:fld>
             <a:endParaRPr kumimoji="1" lang="ja-JP" altLang="en-US"/>
           </a:p>
@@ -1233,7 +1712,7 @@
           <a:p>
             <a:fld id="{50C022C9-6362-4D7E-800D-CCB5DC9E42C2}" type="datetimeFigureOut">
               <a:rPr kumimoji="1" lang="ja-JP" altLang="en-US" smtClean="0"/>
-              <a:t>2026/2/4</a:t>
+              <a:t>2026/3/5</a:t>
             </a:fld>
             <a:endParaRPr kumimoji="1" lang="ja-JP" altLang="en-US"/>
           </a:p>
@@ -1562,7 +2041,7 @@
           <a:p>
             <a:fld id="{50C022C9-6362-4D7E-800D-CCB5DC9E42C2}" type="datetimeFigureOut">
               <a:rPr kumimoji="1" lang="ja-JP" altLang="en-US" smtClean="0"/>
-              <a:t>2026/2/4</a:t>
+              <a:t>2026/3/5</a:t>
             </a:fld>
             <a:endParaRPr kumimoji="1" lang="ja-JP" altLang="en-US"/>
           </a:p>
@@ -2038,7 +2517,7 @@
           <a:p>
             <a:fld id="{50C022C9-6362-4D7E-800D-CCB5DC9E42C2}" type="datetimeFigureOut">
               <a:rPr kumimoji="1" lang="ja-JP" altLang="en-US" smtClean="0"/>
-              <a:t>2026/2/4</a:t>
+              <a:t>2026/3/5</a:t>
             </a:fld>
             <a:endParaRPr kumimoji="1" lang="ja-JP" altLang="en-US"/>
           </a:p>
@@ -2179,7 +2658,7 @@
           <a:p>
             <a:fld id="{50C022C9-6362-4D7E-800D-CCB5DC9E42C2}" type="datetimeFigureOut">
               <a:rPr kumimoji="1" lang="ja-JP" altLang="en-US" smtClean="0"/>
-              <a:t>2026/2/4</a:t>
+              <a:t>2026/3/5</a:t>
             </a:fld>
             <a:endParaRPr kumimoji="1" lang="ja-JP" altLang="en-US"/>
           </a:p>
@@ -2292,7 +2771,7 @@
           <a:p>
             <a:fld id="{50C022C9-6362-4D7E-800D-CCB5DC9E42C2}" type="datetimeFigureOut">
               <a:rPr kumimoji="1" lang="ja-JP" altLang="en-US" smtClean="0"/>
-              <a:t>2026/2/4</a:t>
+              <a:t>2026/3/5</a:t>
             </a:fld>
             <a:endParaRPr kumimoji="1" lang="ja-JP" altLang="en-US"/>
           </a:p>
@@ -2635,7 +3114,7 @@
           <a:p>
             <a:fld id="{50C022C9-6362-4D7E-800D-CCB5DC9E42C2}" type="datetimeFigureOut">
               <a:rPr kumimoji="1" lang="ja-JP" altLang="en-US" smtClean="0"/>
-              <a:t>2026/2/4</a:t>
+              <a:t>2026/3/5</a:t>
             </a:fld>
             <a:endParaRPr kumimoji="1" lang="ja-JP" altLang="en-US"/>
           </a:p>
@@ -2923,7 +3402,7 @@
           <a:p>
             <a:fld id="{50C022C9-6362-4D7E-800D-CCB5DC9E42C2}" type="datetimeFigureOut">
               <a:rPr kumimoji="1" lang="ja-JP" altLang="en-US" smtClean="0"/>
-              <a:t>2026/2/4</a:t>
+              <a:t>2026/3/5</a:t>
             </a:fld>
             <a:endParaRPr kumimoji="1" lang="ja-JP" altLang="en-US"/>
           </a:p>
@@ -3199,7 +3678,7 @@
             <a:fld id="{50C022C9-6362-4D7E-800D-CCB5DC9E42C2}" type="datetimeFigureOut">
               <a:rPr lang="ja-JP" altLang="en-US" smtClean="0"/>
               <a:pPr/>
-              <a:t>2026/2/4</a:t>
+              <a:t>2026/3/5</a:t>
             </a:fld>
             <a:endParaRPr lang="ja-JP" altLang="en-US"/>
           </a:p>
@@ -6354,6 +6833,4080 @@
 </p:sld>
 </file>
 
+<file path=ppt/slides/slide10.xml><?xml version="1.0" encoding="utf-8"?>
+<p:sld xmlns:a="http://schemas.openxmlformats.org/drawingml/2006/main" xmlns:r="http://schemas.openxmlformats.org/officeDocument/2006/relationships" xmlns:p="http://schemas.openxmlformats.org/presentationml/2006/main">
+  <p:cSld>
+    <p:spTree>
+      <p:nvGrpSpPr>
+        <p:cNvPr id="1" name="">
+          <a:extLst>
+            <a:ext uri="{FF2B5EF4-FFF2-40B4-BE49-F238E27FC236}">
+              <a16:creationId xmlns:a16="http://schemas.microsoft.com/office/drawing/2014/main" id="{23A44D52-8375-685F-7713-D70322C3B933}"/>
+            </a:ext>
+          </a:extLst>
+        </p:cNvPr>
+        <p:cNvGrpSpPr/>
+        <p:nvPr/>
+      </p:nvGrpSpPr>
+      <p:grpSpPr>
+        <a:xfrm>
+          <a:off x="0" y="0"/>
+          <a:ext cx="0" cy="0"/>
+          <a:chOff x="0" y="0"/>
+          <a:chExt cx="0" cy="0"/>
+        </a:xfrm>
+      </p:grpSpPr>
+      <p:sp>
+        <p:nvSpPr>
+          <p:cNvPr id="4" name="テキスト ボックス 3">
+            <a:extLst>
+              <a:ext uri="{FF2B5EF4-FFF2-40B4-BE49-F238E27FC236}">
+                <a16:creationId xmlns:a16="http://schemas.microsoft.com/office/drawing/2014/main" id="{B49C5970-5273-1B31-8D54-D6D3986E7427}"/>
+              </a:ext>
+            </a:extLst>
+          </p:cNvPr>
+          <p:cNvSpPr txBox="1"/>
+          <p:nvPr/>
+        </p:nvSpPr>
+        <p:spPr>
+          <a:xfrm>
+            <a:off x="443466" y="317212"/>
+            <a:ext cx="11215133" cy="584775"/>
+          </a:xfrm>
+          <a:prstGeom prst="rect">
+            <a:avLst/>
+          </a:prstGeom>
+          <a:noFill/>
+        </p:spPr>
+        <p:txBody>
+          <a:bodyPr wrap="square" rtlCol="0">
+            <a:spAutoFit/>
+          </a:bodyPr>
+          <a:lstStyle/>
+          <a:p>
+            <a:r>
+              <a:rPr lang="en-US" altLang="ja-JP" sz="3200" b="1">
+                <a:latin typeface="メイリオ" panose="020B0604030504040204" pitchFamily="50" charset="-128"/>
+                <a:ea typeface="メイリオ" panose="020B0604030504040204" pitchFamily="50" charset="-128"/>
+              </a:rPr>
+              <a:t>4.</a:t>
+            </a:r>
+            <a:r>
+              <a:rPr lang="ja-JP" altLang="en-US" sz="3200" b="1">
+                <a:latin typeface="メイリオ" panose="020B0604030504040204" pitchFamily="50" charset="-128"/>
+                <a:ea typeface="メイリオ" panose="020B0604030504040204" pitchFamily="50" charset="-128"/>
+              </a:rPr>
+              <a:t>とはいえ便利 </a:t>
+            </a:r>
+            <a:r>
+              <a:rPr lang="en-US" altLang="ja-JP" sz="3200" b="1">
+                <a:latin typeface="メイリオ" panose="020B0604030504040204" pitchFamily="50" charset="-128"/>
+                <a:ea typeface="メイリオ" panose="020B0604030504040204" pitchFamily="50" charset="-128"/>
+              </a:rPr>
+              <a:t>– </a:t>
+            </a:r>
+            <a:r>
+              <a:rPr lang="ja-JP" altLang="en-US" sz="3200" b="1">
+                <a:latin typeface="メイリオ" panose="020B0604030504040204" pitchFamily="50" charset="-128"/>
+                <a:ea typeface="メイリオ" panose="020B0604030504040204" pitchFamily="50" charset="-128"/>
+              </a:rPr>
+              <a:t>ユースケース</a:t>
+            </a:r>
+            <a:endParaRPr kumimoji="1" lang="ja-JP" altLang="en-US" sz="3200" b="1">
+              <a:latin typeface="メイリオ" panose="020B0604030504040204" pitchFamily="50" charset="-128"/>
+              <a:ea typeface="メイリオ" panose="020B0604030504040204" pitchFamily="50" charset="-128"/>
+            </a:endParaRPr>
+          </a:p>
+        </p:txBody>
+      </p:sp>
+      <p:sp>
+        <p:nvSpPr>
+          <p:cNvPr id="2" name="テキスト ボックス 1">
+            <a:extLst>
+              <a:ext uri="{FF2B5EF4-FFF2-40B4-BE49-F238E27FC236}">
+                <a16:creationId xmlns:a16="http://schemas.microsoft.com/office/drawing/2014/main" id="{0E27C4BE-FB99-CED7-380F-FE899313DA94}"/>
+              </a:ext>
+            </a:extLst>
+          </p:cNvPr>
+          <p:cNvSpPr txBox="1"/>
+          <p:nvPr/>
+        </p:nvSpPr>
+        <p:spPr>
+          <a:xfrm>
+            <a:off x="354254" y="867978"/>
+            <a:ext cx="11483492" cy="711733"/>
+          </a:xfrm>
+          <a:prstGeom prst="rect">
+            <a:avLst/>
+          </a:prstGeom>
+          <a:noFill/>
+        </p:spPr>
+        <p:txBody>
+          <a:bodyPr wrap="square" rtlCol="0">
+            <a:spAutoFit/>
+          </a:bodyPr>
+          <a:lstStyle/>
+          <a:p>
+            <a:pPr>
+              <a:lnSpc>
+                <a:spcPct val="150000"/>
+              </a:lnSpc>
+            </a:pPr>
+            <a:r>
+              <a:rPr lang="ja-JP" altLang="en-US" sz="1400">
+                <a:latin typeface="メイリオ" panose="020B0604030504040204" pitchFamily="50" charset="-128"/>
+                <a:ea typeface="メイリオ" panose="020B0604030504040204" pitchFamily="50" charset="-128"/>
+              </a:rPr>
+              <a:t>セキュリティ対策は当然必要必須ですが、それさえ講じれば「人間が</a:t>
+            </a:r>
+            <a:r>
+              <a:rPr lang="en-US" altLang="ja-JP" sz="1400">
+                <a:latin typeface="メイリオ" panose="020B0604030504040204" pitchFamily="50" charset="-128"/>
+                <a:ea typeface="メイリオ" panose="020B0604030504040204" pitchFamily="50" charset="-128"/>
+              </a:rPr>
+              <a:t>PC</a:t>
+            </a:r>
+            <a:r>
+              <a:rPr lang="ja-JP" altLang="en-US" sz="1400">
+                <a:latin typeface="メイリオ" panose="020B0604030504040204" pitchFamily="50" charset="-128"/>
+                <a:ea typeface="メイリオ" panose="020B0604030504040204" pitchFamily="50" charset="-128"/>
+              </a:rPr>
+              <a:t>でできることのほとんど」が自動化できる可能性があります。</a:t>
+            </a:r>
+            <a:endParaRPr lang="en-US" altLang="ja-JP" sz="1400">
+              <a:latin typeface="メイリオ" panose="020B0604030504040204" pitchFamily="50" charset="-128"/>
+              <a:ea typeface="メイリオ" panose="020B0604030504040204" pitchFamily="50" charset="-128"/>
+            </a:endParaRPr>
+          </a:p>
+          <a:p>
+            <a:pPr>
+              <a:lnSpc>
+                <a:spcPct val="150000"/>
+              </a:lnSpc>
+            </a:pPr>
+            <a:r>
+              <a:rPr lang="en-US" altLang="ja-JP" sz="1400">
+                <a:latin typeface="メイリオ" panose="020B0604030504040204" pitchFamily="50" charset="-128"/>
+                <a:ea typeface="メイリオ" panose="020B0604030504040204" pitchFamily="50" charset="-128"/>
+              </a:rPr>
+              <a:t>OSS</a:t>
+            </a:r>
+            <a:r>
+              <a:rPr lang="ja-JP" altLang="en-US" sz="1400">
+                <a:latin typeface="メイリオ" panose="020B0604030504040204" pitchFamily="50" charset="-128"/>
+                <a:ea typeface="メイリオ" panose="020B0604030504040204" pitchFamily="50" charset="-128"/>
+              </a:rPr>
+              <a:t>なので自社環境向けにカスタマイズや参考実装も可能です。</a:t>
+            </a:r>
+            <a:endParaRPr kumimoji="1" lang="en-US" altLang="ja-JP" sz="1400">
+              <a:latin typeface="メイリオ" panose="020B0604030504040204" pitchFamily="50" charset="-128"/>
+              <a:ea typeface="メイリオ" panose="020B0604030504040204" pitchFamily="50" charset="-128"/>
+            </a:endParaRPr>
+          </a:p>
+        </p:txBody>
+      </p:sp>
+      <p:sp>
+        <p:nvSpPr>
+          <p:cNvPr id="3" name="正方形/長方形 2">
+            <a:extLst>
+              <a:ext uri="{FF2B5EF4-FFF2-40B4-BE49-F238E27FC236}">
+                <a16:creationId xmlns:a16="http://schemas.microsoft.com/office/drawing/2014/main" id="{5B6E47F9-F272-E347-7E1F-E09B5BBC915B}"/>
+              </a:ext>
+            </a:extLst>
+          </p:cNvPr>
+          <p:cNvSpPr/>
+          <p:nvPr/>
+        </p:nvSpPr>
+        <p:spPr>
+          <a:xfrm>
+            <a:off x="2502018" y="1673132"/>
+            <a:ext cx="2329186" cy="340403"/>
+          </a:xfrm>
+          <a:prstGeom prst="rect">
+            <a:avLst/>
+          </a:prstGeom>
+          <a:solidFill>
+            <a:schemeClr val="tx2">
+              <a:lumMod val="75000"/>
+              <a:lumOff val="25000"/>
+            </a:schemeClr>
+          </a:solidFill>
+          <a:ln>
+            <a:solidFill>
+              <a:schemeClr val="tx2">
+                <a:lumMod val="75000"/>
+                <a:lumOff val="25000"/>
+              </a:schemeClr>
+            </a:solidFill>
+          </a:ln>
+        </p:spPr>
+        <p:style>
+          <a:lnRef idx="2">
+            <a:schemeClr val="accent1">
+              <a:shade val="15000"/>
+            </a:schemeClr>
+          </a:lnRef>
+          <a:fillRef idx="1">
+            <a:schemeClr val="accent1"/>
+          </a:fillRef>
+          <a:effectRef idx="0">
+            <a:schemeClr val="accent1"/>
+          </a:effectRef>
+          <a:fontRef idx="minor">
+            <a:schemeClr val="lt1"/>
+          </a:fontRef>
+        </p:style>
+        <p:txBody>
+          <a:bodyPr rtlCol="0" anchor="ctr"/>
+          <a:lstStyle/>
+          <a:p>
+            <a:pPr algn="ctr"/>
+            <a:r>
+              <a:rPr lang="ja-JP" altLang="en-US" sz="1600">
+                <a:latin typeface="メイリオ" panose="020B0604030504040204" pitchFamily="50" charset="-128"/>
+                <a:ea typeface="メイリオ" panose="020B0604030504040204" pitchFamily="50" charset="-128"/>
+              </a:rPr>
+              <a:t>データ分析・レポート</a:t>
+            </a:r>
+            <a:endParaRPr kumimoji="1" lang="ja-JP" altLang="en-US" sz="1600">
+              <a:latin typeface="メイリオ" panose="020B0604030504040204" pitchFamily="50" charset="-128"/>
+              <a:ea typeface="メイリオ" panose="020B0604030504040204" pitchFamily="50" charset="-128"/>
+            </a:endParaRPr>
+          </a:p>
+        </p:txBody>
+      </p:sp>
+      <p:sp>
+        <p:nvSpPr>
+          <p:cNvPr id="5" name="テキスト ボックス 4">
+            <a:extLst>
+              <a:ext uri="{FF2B5EF4-FFF2-40B4-BE49-F238E27FC236}">
+                <a16:creationId xmlns:a16="http://schemas.microsoft.com/office/drawing/2014/main" id="{9867A04F-746B-A71A-EB92-EB75058FDCC6}"/>
+              </a:ext>
+            </a:extLst>
+          </p:cNvPr>
+          <p:cNvSpPr txBox="1"/>
+          <p:nvPr/>
+        </p:nvSpPr>
+        <p:spPr>
+          <a:xfrm>
+            <a:off x="2497732" y="2073010"/>
+            <a:ext cx="2329186" cy="1731243"/>
+          </a:xfrm>
+          <a:prstGeom prst="rect">
+            <a:avLst/>
+          </a:prstGeom>
+          <a:noFill/>
+        </p:spPr>
+        <p:txBody>
+          <a:bodyPr wrap="square" rtlCol="0">
+            <a:spAutoFit/>
+          </a:bodyPr>
+          <a:lstStyle/>
+          <a:p>
+            <a:pPr marL="171450" indent="-171450">
+              <a:lnSpc>
+                <a:spcPct val="150000"/>
+              </a:lnSpc>
+              <a:buFont typeface="Arial" panose="020B0604020202020204" pitchFamily="34" charset="0"/>
+              <a:buChar char="•"/>
+            </a:pPr>
+            <a:r>
+              <a:rPr lang="ja-JP" altLang="en-US" sz="1200">
+                <a:latin typeface="メイリオ" panose="020B0604030504040204" pitchFamily="50" charset="-128"/>
+                <a:ea typeface="メイリオ" panose="020B0604030504040204" pitchFamily="50" charset="-128"/>
+              </a:rPr>
+              <a:t>売上データの異常検知＆自動アラート</a:t>
+            </a:r>
+            <a:endParaRPr lang="en-US" altLang="ja-JP" sz="1200">
+              <a:latin typeface="メイリオ" panose="020B0604030504040204" pitchFamily="50" charset="-128"/>
+              <a:ea typeface="メイリオ" panose="020B0604030504040204" pitchFamily="50" charset="-128"/>
+            </a:endParaRPr>
+          </a:p>
+          <a:p>
+            <a:pPr marL="171450" indent="-171450">
+              <a:lnSpc>
+                <a:spcPct val="150000"/>
+              </a:lnSpc>
+              <a:buFont typeface="Arial" panose="020B0604020202020204" pitchFamily="34" charset="0"/>
+              <a:buChar char="•"/>
+            </a:pPr>
+            <a:r>
+              <a:rPr lang="ja-JP" altLang="en-US" sz="1200">
+                <a:latin typeface="メイリオ" panose="020B0604030504040204" pitchFamily="50" charset="-128"/>
+                <a:ea typeface="メイリオ" panose="020B0604030504040204" pitchFamily="50" charset="-128"/>
+              </a:rPr>
+              <a:t>顧客アンケート自由記述の感情分析＆カテゴリ分類</a:t>
+            </a:r>
+            <a:endParaRPr lang="en-US" altLang="ja-JP" sz="1200">
+              <a:latin typeface="メイリオ" panose="020B0604030504040204" pitchFamily="50" charset="-128"/>
+              <a:ea typeface="メイリオ" panose="020B0604030504040204" pitchFamily="50" charset="-128"/>
+            </a:endParaRPr>
+          </a:p>
+          <a:p>
+            <a:pPr marL="171450" indent="-171450">
+              <a:lnSpc>
+                <a:spcPct val="150000"/>
+              </a:lnSpc>
+              <a:buFont typeface="Arial" panose="020B0604020202020204" pitchFamily="34" charset="0"/>
+              <a:buChar char="•"/>
+            </a:pPr>
+            <a:r>
+              <a:rPr lang="ja-JP" altLang="en-US" sz="1200">
+                <a:latin typeface="メイリオ" panose="020B0604030504040204" pitchFamily="50" charset="-128"/>
+                <a:ea typeface="メイリオ" panose="020B0604030504040204" pitchFamily="50" charset="-128"/>
+              </a:rPr>
+              <a:t>月次</a:t>
+            </a:r>
+            <a:r>
+              <a:rPr lang="en-US" altLang="ja-JP" sz="1200">
+                <a:latin typeface="メイリオ" panose="020B0604030504040204" pitchFamily="50" charset="-128"/>
+                <a:ea typeface="メイリオ" panose="020B0604030504040204" pitchFamily="50" charset="-128"/>
+              </a:rPr>
+              <a:t>KPI</a:t>
+            </a:r>
+            <a:r>
+              <a:rPr lang="ja-JP" altLang="en-US" sz="1200">
+                <a:latin typeface="メイリオ" panose="020B0604030504040204" pitchFamily="50" charset="-128"/>
+                <a:ea typeface="メイリオ" panose="020B0604030504040204" pitchFamily="50" charset="-128"/>
+              </a:rPr>
+              <a:t>レポート自動生成＆配信</a:t>
+            </a:r>
+            <a:endParaRPr kumimoji="1" lang="en-US" altLang="ja-JP" sz="1200">
+              <a:latin typeface="メイリオ" panose="020B0604030504040204" pitchFamily="50" charset="-128"/>
+              <a:ea typeface="メイリオ" panose="020B0604030504040204" pitchFamily="50" charset="-128"/>
+            </a:endParaRPr>
+          </a:p>
+        </p:txBody>
+      </p:sp>
+      <p:sp>
+        <p:nvSpPr>
+          <p:cNvPr id="6" name="正方形/長方形 5">
+            <a:extLst>
+              <a:ext uri="{FF2B5EF4-FFF2-40B4-BE49-F238E27FC236}">
+                <a16:creationId xmlns:a16="http://schemas.microsoft.com/office/drawing/2014/main" id="{9D49334B-58EA-1739-A27E-40810DE09E57}"/>
+              </a:ext>
+            </a:extLst>
+          </p:cNvPr>
+          <p:cNvSpPr/>
+          <p:nvPr/>
+        </p:nvSpPr>
+        <p:spPr>
+          <a:xfrm>
+            <a:off x="2502019" y="2013535"/>
+            <a:ext cx="2329185" cy="2108672"/>
+          </a:xfrm>
+          <a:prstGeom prst="rect">
+            <a:avLst/>
+          </a:prstGeom>
+          <a:noFill/>
+          <a:ln>
+            <a:solidFill>
+              <a:schemeClr val="tx2">
+                <a:lumMod val="75000"/>
+                <a:lumOff val="25000"/>
+              </a:schemeClr>
+            </a:solidFill>
+          </a:ln>
+        </p:spPr>
+        <p:style>
+          <a:lnRef idx="2">
+            <a:schemeClr val="accent1">
+              <a:shade val="15000"/>
+            </a:schemeClr>
+          </a:lnRef>
+          <a:fillRef idx="1">
+            <a:schemeClr val="accent1"/>
+          </a:fillRef>
+          <a:effectRef idx="0">
+            <a:schemeClr val="accent1"/>
+          </a:effectRef>
+          <a:fontRef idx="minor">
+            <a:schemeClr val="lt1"/>
+          </a:fontRef>
+        </p:style>
+        <p:txBody>
+          <a:bodyPr rtlCol="0" anchor="ctr"/>
+          <a:lstStyle/>
+          <a:p>
+            <a:pPr algn="ctr"/>
+            <a:endParaRPr kumimoji="1" lang="ja-JP" altLang="en-US">
+              <a:latin typeface="メイリオ" panose="020B0604030504040204" pitchFamily="50" charset="-128"/>
+              <a:ea typeface="メイリオ" panose="020B0604030504040204" pitchFamily="50" charset="-128"/>
+            </a:endParaRPr>
+          </a:p>
+        </p:txBody>
+      </p:sp>
+      <p:sp>
+        <p:nvSpPr>
+          <p:cNvPr id="9" name="正方形/長方形 8">
+            <a:extLst>
+              <a:ext uri="{FF2B5EF4-FFF2-40B4-BE49-F238E27FC236}">
+                <a16:creationId xmlns:a16="http://schemas.microsoft.com/office/drawing/2014/main" id="{31E0082F-0D24-62D9-FE31-9CCCD3CC53FC}"/>
+              </a:ext>
+            </a:extLst>
+          </p:cNvPr>
+          <p:cNvSpPr/>
+          <p:nvPr/>
+        </p:nvSpPr>
+        <p:spPr>
+          <a:xfrm>
+            <a:off x="70488" y="1673132"/>
+            <a:ext cx="2329185" cy="340403"/>
+          </a:xfrm>
+          <a:prstGeom prst="rect">
+            <a:avLst/>
+          </a:prstGeom>
+          <a:solidFill>
+            <a:schemeClr val="tx2">
+              <a:lumMod val="75000"/>
+              <a:lumOff val="25000"/>
+            </a:schemeClr>
+          </a:solidFill>
+          <a:ln>
+            <a:solidFill>
+              <a:schemeClr val="tx2">
+                <a:lumMod val="75000"/>
+                <a:lumOff val="25000"/>
+              </a:schemeClr>
+            </a:solidFill>
+          </a:ln>
+        </p:spPr>
+        <p:style>
+          <a:lnRef idx="2">
+            <a:schemeClr val="accent1">
+              <a:shade val="15000"/>
+            </a:schemeClr>
+          </a:lnRef>
+          <a:fillRef idx="1">
+            <a:schemeClr val="accent1"/>
+          </a:fillRef>
+          <a:effectRef idx="0">
+            <a:schemeClr val="accent1"/>
+          </a:effectRef>
+          <a:fontRef idx="minor">
+            <a:schemeClr val="lt1"/>
+          </a:fontRef>
+        </p:style>
+        <p:txBody>
+          <a:bodyPr rtlCol="0" anchor="ctr"/>
+          <a:lstStyle/>
+          <a:p>
+            <a:pPr algn="ctr"/>
+            <a:r>
+              <a:rPr lang="ja-JP" altLang="en-US" sz="1600">
+                <a:latin typeface="メイリオ" panose="020B0604030504040204" pitchFamily="50" charset="-128"/>
+                <a:ea typeface="メイリオ" panose="020B0604030504040204" pitchFamily="50" charset="-128"/>
+              </a:rPr>
+              <a:t>情報収集・監視</a:t>
+            </a:r>
+            <a:endParaRPr kumimoji="1" lang="ja-JP" altLang="en-US" sz="1600">
+              <a:latin typeface="メイリオ" panose="020B0604030504040204" pitchFamily="50" charset="-128"/>
+              <a:ea typeface="メイリオ" panose="020B0604030504040204" pitchFamily="50" charset="-128"/>
+            </a:endParaRPr>
+          </a:p>
+        </p:txBody>
+      </p:sp>
+      <p:sp>
+        <p:nvSpPr>
+          <p:cNvPr id="10" name="テキスト ボックス 9">
+            <a:extLst>
+              <a:ext uri="{FF2B5EF4-FFF2-40B4-BE49-F238E27FC236}">
+                <a16:creationId xmlns:a16="http://schemas.microsoft.com/office/drawing/2014/main" id="{1EEE5FE2-F618-FA96-4DD0-ECE2ACC5B7DE}"/>
+              </a:ext>
+            </a:extLst>
+          </p:cNvPr>
+          <p:cNvSpPr txBox="1"/>
+          <p:nvPr/>
+        </p:nvSpPr>
+        <p:spPr>
+          <a:xfrm>
+            <a:off x="66201" y="2073010"/>
+            <a:ext cx="2329186" cy="1731243"/>
+          </a:xfrm>
+          <a:prstGeom prst="rect">
+            <a:avLst/>
+          </a:prstGeom>
+          <a:noFill/>
+        </p:spPr>
+        <p:txBody>
+          <a:bodyPr wrap="square" rtlCol="0">
+            <a:spAutoFit/>
+          </a:bodyPr>
+          <a:lstStyle/>
+          <a:p>
+            <a:pPr marL="171450" indent="-171450">
+              <a:lnSpc>
+                <a:spcPct val="150000"/>
+              </a:lnSpc>
+              <a:buFont typeface="Arial" panose="020B0604020202020204" pitchFamily="34" charset="0"/>
+              <a:buChar char="•"/>
+            </a:pPr>
+            <a:r>
+              <a:rPr lang="en-US" altLang="ja-JP" sz="1200">
+                <a:latin typeface="メイリオ" panose="020B0604030504040204" pitchFamily="50" charset="-128"/>
+                <a:ea typeface="メイリオ" panose="020B0604030504040204" pitchFamily="50" charset="-128"/>
+              </a:rPr>
+              <a:t>SNS</a:t>
+            </a:r>
+            <a:r>
+              <a:rPr lang="ja-JP" altLang="en-US" sz="1200">
+                <a:latin typeface="メイリオ" panose="020B0604030504040204" pitchFamily="50" charset="-128"/>
+                <a:ea typeface="メイリオ" panose="020B0604030504040204" pitchFamily="50" charset="-128"/>
+              </a:rPr>
+              <a:t>ブランドメンション監視＆ネガティブ即時検知</a:t>
+            </a:r>
+            <a:endParaRPr lang="en-US" altLang="ja-JP" sz="1200">
+              <a:latin typeface="メイリオ" panose="020B0604030504040204" pitchFamily="50" charset="-128"/>
+              <a:ea typeface="メイリオ" panose="020B0604030504040204" pitchFamily="50" charset="-128"/>
+            </a:endParaRPr>
+          </a:p>
+          <a:p>
+            <a:pPr marL="171450" indent="-171450">
+              <a:lnSpc>
+                <a:spcPct val="150000"/>
+              </a:lnSpc>
+              <a:buFont typeface="Arial" panose="020B0604020202020204" pitchFamily="34" charset="0"/>
+              <a:buChar char="•"/>
+            </a:pPr>
+            <a:r>
+              <a:rPr lang="ja-JP" altLang="en-US" sz="1200">
+                <a:latin typeface="メイリオ" panose="020B0604030504040204" pitchFamily="50" charset="-128"/>
+                <a:ea typeface="メイリオ" panose="020B0604030504040204" pitchFamily="50" charset="-128"/>
+              </a:rPr>
+              <a:t>法改正・規制変更の自動追跡＆影響分析</a:t>
+            </a:r>
+            <a:endParaRPr lang="en-US" altLang="ja-JP" sz="1200">
+              <a:latin typeface="メイリオ" panose="020B0604030504040204" pitchFamily="50" charset="-128"/>
+              <a:ea typeface="メイリオ" panose="020B0604030504040204" pitchFamily="50" charset="-128"/>
+            </a:endParaRPr>
+          </a:p>
+          <a:p>
+            <a:pPr marL="171450" indent="-171450">
+              <a:lnSpc>
+                <a:spcPct val="150000"/>
+              </a:lnSpc>
+              <a:buFont typeface="Arial" panose="020B0604020202020204" pitchFamily="34" charset="0"/>
+              <a:buChar char="•"/>
+            </a:pPr>
+            <a:r>
+              <a:rPr lang="ja-JP" altLang="en-US" sz="1200">
+                <a:latin typeface="メイリオ" panose="020B0604030504040204" pitchFamily="50" charset="-128"/>
+                <a:ea typeface="メイリオ" panose="020B0604030504040204" pitchFamily="50" charset="-128"/>
+              </a:rPr>
+              <a:t>競合プレスリリース自動監視＆日次サマリー</a:t>
+            </a:r>
+          </a:p>
+        </p:txBody>
+      </p:sp>
+      <p:sp>
+        <p:nvSpPr>
+          <p:cNvPr id="11" name="正方形/長方形 10">
+            <a:extLst>
+              <a:ext uri="{FF2B5EF4-FFF2-40B4-BE49-F238E27FC236}">
+                <a16:creationId xmlns:a16="http://schemas.microsoft.com/office/drawing/2014/main" id="{E4EA563D-A048-3415-43B2-C1C4655F2B18}"/>
+              </a:ext>
+            </a:extLst>
+          </p:cNvPr>
+          <p:cNvSpPr/>
+          <p:nvPr/>
+        </p:nvSpPr>
+        <p:spPr>
+          <a:xfrm>
+            <a:off x="70488" y="2013535"/>
+            <a:ext cx="2329185" cy="2108672"/>
+          </a:xfrm>
+          <a:prstGeom prst="rect">
+            <a:avLst/>
+          </a:prstGeom>
+          <a:noFill/>
+          <a:ln>
+            <a:solidFill>
+              <a:schemeClr val="tx2">
+                <a:lumMod val="75000"/>
+                <a:lumOff val="25000"/>
+              </a:schemeClr>
+            </a:solidFill>
+          </a:ln>
+        </p:spPr>
+        <p:style>
+          <a:lnRef idx="2">
+            <a:schemeClr val="accent1">
+              <a:shade val="15000"/>
+            </a:schemeClr>
+          </a:lnRef>
+          <a:fillRef idx="1">
+            <a:schemeClr val="accent1"/>
+          </a:fillRef>
+          <a:effectRef idx="0">
+            <a:schemeClr val="accent1"/>
+          </a:effectRef>
+          <a:fontRef idx="minor">
+            <a:schemeClr val="lt1"/>
+          </a:fontRef>
+        </p:style>
+        <p:txBody>
+          <a:bodyPr rtlCol="0" anchor="ctr"/>
+          <a:lstStyle/>
+          <a:p>
+            <a:pPr algn="ctr"/>
+            <a:endParaRPr kumimoji="1" lang="ja-JP" altLang="en-US">
+              <a:latin typeface="メイリオ" panose="020B0604030504040204" pitchFamily="50" charset="-128"/>
+              <a:ea typeface="メイリオ" panose="020B0604030504040204" pitchFamily="50" charset="-128"/>
+            </a:endParaRPr>
+          </a:p>
+        </p:txBody>
+      </p:sp>
+      <p:sp>
+        <p:nvSpPr>
+          <p:cNvPr id="13" name="正方形/長方形 12">
+            <a:extLst>
+              <a:ext uri="{FF2B5EF4-FFF2-40B4-BE49-F238E27FC236}">
+                <a16:creationId xmlns:a16="http://schemas.microsoft.com/office/drawing/2014/main" id="{823CCBB7-B542-EABA-96B2-E1D2B77FCB05}"/>
+              </a:ext>
+            </a:extLst>
+          </p:cNvPr>
+          <p:cNvSpPr/>
+          <p:nvPr/>
+        </p:nvSpPr>
+        <p:spPr>
+          <a:xfrm>
+            <a:off x="4929341" y="1673132"/>
+            <a:ext cx="2329185" cy="340403"/>
+          </a:xfrm>
+          <a:prstGeom prst="rect">
+            <a:avLst/>
+          </a:prstGeom>
+          <a:solidFill>
+            <a:schemeClr val="tx2">
+              <a:lumMod val="75000"/>
+              <a:lumOff val="25000"/>
+            </a:schemeClr>
+          </a:solidFill>
+          <a:ln>
+            <a:solidFill>
+              <a:schemeClr val="tx2">
+                <a:lumMod val="75000"/>
+                <a:lumOff val="25000"/>
+              </a:schemeClr>
+            </a:solidFill>
+          </a:ln>
+        </p:spPr>
+        <p:style>
+          <a:lnRef idx="2">
+            <a:schemeClr val="accent1">
+              <a:shade val="15000"/>
+            </a:schemeClr>
+          </a:lnRef>
+          <a:fillRef idx="1">
+            <a:schemeClr val="accent1"/>
+          </a:fillRef>
+          <a:effectRef idx="0">
+            <a:schemeClr val="accent1"/>
+          </a:effectRef>
+          <a:fontRef idx="minor">
+            <a:schemeClr val="lt1"/>
+          </a:fontRef>
+        </p:style>
+        <p:txBody>
+          <a:bodyPr rtlCol="0" anchor="ctr"/>
+          <a:lstStyle/>
+          <a:p>
+            <a:pPr algn="ctr"/>
+            <a:r>
+              <a:rPr lang="ja-JP" altLang="en-US" sz="1600">
+                <a:latin typeface="メイリオ" panose="020B0604030504040204" pitchFamily="50" charset="-128"/>
+                <a:ea typeface="メイリオ" panose="020B0604030504040204" pitchFamily="50" charset="-128"/>
+              </a:rPr>
+              <a:t>業務自動化</a:t>
+            </a:r>
+            <a:endParaRPr kumimoji="1" lang="ja-JP" altLang="en-US" sz="1600">
+              <a:latin typeface="メイリオ" panose="020B0604030504040204" pitchFamily="50" charset="-128"/>
+              <a:ea typeface="メイリオ" panose="020B0604030504040204" pitchFamily="50" charset="-128"/>
+            </a:endParaRPr>
+          </a:p>
+        </p:txBody>
+      </p:sp>
+      <p:sp>
+        <p:nvSpPr>
+          <p:cNvPr id="14" name="テキスト ボックス 13">
+            <a:extLst>
+              <a:ext uri="{FF2B5EF4-FFF2-40B4-BE49-F238E27FC236}">
+                <a16:creationId xmlns:a16="http://schemas.microsoft.com/office/drawing/2014/main" id="{B9AE62C7-23F0-B97E-9741-4E68605561E7}"/>
+              </a:ext>
+            </a:extLst>
+          </p:cNvPr>
+          <p:cNvSpPr txBox="1"/>
+          <p:nvPr/>
+        </p:nvSpPr>
+        <p:spPr>
+          <a:xfrm>
+            <a:off x="4925054" y="2073010"/>
+            <a:ext cx="2329185" cy="1454244"/>
+          </a:xfrm>
+          <a:prstGeom prst="rect">
+            <a:avLst/>
+          </a:prstGeom>
+          <a:noFill/>
+        </p:spPr>
+        <p:txBody>
+          <a:bodyPr wrap="square" rtlCol="0">
+            <a:spAutoFit/>
+          </a:bodyPr>
+          <a:lstStyle/>
+          <a:p>
+            <a:pPr marL="171450" indent="-171450">
+              <a:lnSpc>
+                <a:spcPct val="150000"/>
+              </a:lnSpc>
+              <a:buFont typeface="Arial" panose="020B0604020202020204" pitchFamily="34" charset="0"/>
+              <a:buChar char="•"/>
+            </a:pPr>
+            <a:r>
+              <a:rPr lang="ja-JP" altLang="en-US" sz="1200">
+                <a:latin typeface="メイリオ" panose="020B0604030504040204" pitchFamily="50" charset="-128"/>
+                <a:ea typeface="メイリオ" panose="020B0604030504040204" pitchFamily="50" charset="-128"/>
+              </a:rPr>
+              <a:t>社内</a:t>
+            </a:r>
+            <a:r>
+              <a:rPr lang="en-US" altLang="ja-JP" sz="1200">
+                <a:latin typeface="メイリオ" panose="020B0604030504040204" pitchFamily="50" charset="-128"/>
+                <a:ea typeface="メイリオ" panose="020B0604030504040204" pitchFamily="50" charset="-128"/>
+              </a:rPr>
+              <a:t>FAQ Bot</a:t>
+            </a:r>
+          </a:p>
+          <a:p>
+            <a:pPr marL="171450" indent="-171450">
+              <a:lnSpc>
+                <a:spcPct val="150000"/>
+              </a:lnSpc>
+              <a:buFont typeface="Arial" panose="020B0604020202020204" pitchFamily="34" charset="0"/>
+              <a:buChar char="•"/>
+            </a:pPr>
+            <a:r>
+              <a:rPr lang="ja-JP" altLang="en-US" sz="1200">
+                <a:latin typeface="メイリオ" panose="020B0604030504040204" pitchFamily="50" charset="-128"/>
+                <a:ea typeface="メイリオ" panose="020B0604030504040204" pitchFamily="50" charset="-128"/>
+              </a:rPr>
+              <a:t>経費精算の領収書</a:t>
+            </a:r>
+            <a:r>
+              <a:rPr lang="en-US" altLang="ja-JP" sz="1200">
+                <a:latin typeface="メイリオ" panose="020B0604030504040204" pitchFamily="50" charset="-128"/>
+                <a:ea typeface="メイリオ" panose="020B0604030504040204" pitchFamily="50" charset="-128"/>
+              </a:rPr>
+              <a:t>OCR</a:t>
+            </a:r>
+            <a:r>
+              <a:rPr lang="ja-JP" altLang="en-US" sz="1200">
+                <a:latin typeface="メイリオ" panose="020B0604030504040204" pitchFamily="50" charset="-128"/>
+                <a:ea typeface="メイリオ" panose="020B0604030504040204" pitchFamily="50" charset="-128"/>
+              </a:rPr>
+              <a:t>＆自動入力</a:t>
+            </a:r>
+            <a:endParaRPr lang="en-US" altLang="ja-JP" sz="1200">
+              <a:latin typeface="メイリオ" panose="020B0604030504040204" pitchFamily="50" charset="-128"/>
+              <a:ea typeface="メイリオ" panose="020B0604030504040204" pitchFamily="50" charset="-128"/>
+            </a:endParaRPr>
+          </a:p>
+          <a:p>
+            <a:pPr marL="171450" indent="-171450">
+              <a:lnSpc>
+                <a:spcPct val="150000"/>
+              </a:lnSpc>
+              <a:buFont typeface="Arial" panose="020B0604020202020204" pitchFamily="34" charset="0"/>
+              <a:buChar char="•"/>
+            </a:pPr>
+            <a:r>
+              <a:rPr lang="ja-JP" altLang="en-US" sz="1200">
+                <a:latin typeface="メイリオ" panose="020B0604030504040204" pitchFamily="50" charset="-128"/>
+                <a:ea typeface="メイリオ" panose="020B0604030504040204" pitchFamily="50" charset="-128"/>
+              </a:rPr>
+              <a:t>新入社員オンボーディング自動チェックリスト</a:t>
+            </a:r>
+            <a:endParaRPr kumimoji="1" lang="en-US" altLang="ja-JP" sz="1200">
+              <a:latin typeface="メイリオ" panose="020B0604030504040204" pitchFamily="50" charset="-128"/>
+              <a:ea typeface="メイリオ" panose="020B0604030504040204" pitchFamily="50" charset="-128"/>
+            </a:endParaRPr>
+          </a:p>
+        </p:txBody>
+      </p:sp>
+      <p:sp>
+        <p:nvSpPr>
+          <p:cNvPr id="15" name="正方形/長方形 14">
+            <a:extLst>
+              <a:ext uri="{FF2B5EF4-FFF2-40B4-BE49-F238E27FC236}">
+                <a16:creationId xmlns:a16="http://schemas.microsoft.com/office/drawing/2014/main" id="{B3F09396-101F-C6A8-AF15-3BCA9486FA43}"/>
+              </a:ext>
+            </a:extLst>
+          </p:cNvPr>
+          <p:cNvSpPr/>
+          <p:nvPr/>
+        </p:nvSpPr>
+        <p:spPr>
+          <a:xfrm>
+            <a:off x="4929341" y="2013535"/>
+            <a:ext cx="2329185" cy="2108672"/>
+          </a:xfrm>
+          <a:prstGeom prst="rect">
+            <a:avLst/>
+          </a:prstGeom>
+          <a:noFill/>
+          <a:ln>
+            <a:solidFill>
+              <a:schemeClr val="tx2">
+                <a:lumMod val="75000"/>
+                <a:lumOff val="25000"/>
+              </a:schemeClr>
+            </a:solidFill>
+          </a:ln>
+        </p:spPr>
+        <p:style>
+          <a:lnRef idx="2">
+            <a:schemeClr val="accent1">
+              <a:shade val="15000"/>
+            </a:schemeClr>
+          </a:lnRef>
+          <a:fillRef idx="1">
+            <a:schemeClr val="accent1"/>
+          </a:fillRef>
+          <a:effectRef idx="0">
+            <a:schemeClr val="accent1"/>
+          </a:effectRef>
+          <a:fontRef idx="minor">
+            <a:schemeClr val="lt1"/>
+          </a:fontRef>
+        </p:style>
+        <p:txBody>
+          <a:bodyPr rtlCol="0" anchor="ctr"/>
+          <a:lstStyle/>
+          <a:p>
+            <a:pPr algn="ctr"/>
+            <a:endParaRPr kumimoji="1" lang="ja-JP" altLang="en-US">
+              <a:latin typeface="メイリオ" panose="020B0604030504040204" pitchFamily="50" charset="-128"/>
+              <a:ea typeface="メイリオ" panose="020B0604030504040204" pitchFamily="50" charset="-128"/>
+            </a:endParaRPr>
+          </a:p>
+        </p:txBody>
+      </p:sp>
+      <p:sp>
+        <p:nvSpPr>
+          <p:cNvPr id="17" name="正方形/長方形 16">
+            <a:extLst>
+              <a:ext uri="{FF2B5EF4-FFF2-40B4-BE49-F238E27FC236}">
+                <a16:creationId xmlns:a16="http://schemas.microsoft.com/office/drawing/2014/main" id="{963E1A56-0811-DE5F-3854-68BA0E9922F8}"/>
+              </a:ext>
+            </a:extLst>
+          </p:cNvPr>
+          <p:cNvSpPr/>
+          <p:nvPr/>
+        </p:nvSpPr>
+        <p:spPr>
+          <a:xfrm>
+            <a:off x="7360872" y="1673132"/>
+            <a:ext cx="2329185" cy="340403"/>
+          </a:xfrm>
+          <a:prstGeom prst="rect">
+            <a:avLst/>
+          </a:prstGeom>
+          <a:solidFill>
+            <a:schemeClr val="tx2">
+              <a:lumMod val="75000"/>
+              <a:lumOff val="25000"/>
+            </a:schemeClr>
+          </a:solidFill>
+          <a:ln>
+            <a:solidFill>
+              <a:schemeClr val="tx2">
+                <a:lumMod val="75000"/>
+                <a:lumOff val="25000"/>
+              </a:schemeClr>
+            </a:solidFill>
+          </a:ln>
+        </p:spPr>
+        <p:style>
+          <a:lnRef idx="2">
+            <a:schemeClr val="accent1">
+              <a:shade val="15000"/>
+            </a:schemeClr>
+          </a:lnRef>
+          <a:fillRef idx="1">
+            <a:schemeClr val="accent1"/>
+          </a:fillRef>
+          <a:effectRef idx="0">
+            <a:schemeClr val="accent1"/>
+          </a:effectRef>
+          <a:fontRef idx="minor">
+            <a:schemeClr val="lt1"/>
+          </a:fontRef>
+        </p:style>
+        <p:txBody>
+          <a:bodyPr rtlCol="0" anchor="ctr"/>
+          <a:lstStyle/>
+          <a:p>
+            <a:pPr algn="ctr"/>
+            <a:r>
+              <a:rPr lang="ja-JP" altLang="en-US" sz="1600">
+                <a:latin typeface="メイリオ" panose="020B0604030504040204" pitchFamily="50" charset="-128"/>
+                <a:ea typeface="メイリオ" panose="020B0604030504040204" pitchFamily="50" charset="-128"/>
+              </a:rPr>
+              <a:t>コミュニケーション</a:t>
+            </a:r>
+            <a:endParaRPr kumimoji="1" lang="ja-JP" altLang="en-US" sz="1600">
+              <a:latin typeface="メイリオ" panose="020B0604030504040204" pitchFamily="50" charset="-128"/>
+              <a:ea typeface="メイリオ" panose="020B0604030504040204" pitchFamily="50" charset="-128"/>
+            </a:endParaRPr>
+          </a:p>
+        </p:txBody>
+      </p:sp>
+      <p:sp>
+        <p:nvSpPr>
+          <p:cNvPr id="18" name="テキスト ボックス 17">
+            <a:extLst>
+              <a:ext uri="{FF2B5EF4-FFF2-40B4-BE49-F238E27FC236}">
+                <a16:creationId xmlns:a16="http://schemas.microsoft.com/office/drawing/2014/main" id="{07DE7628-DB04-07C4-2623-27F1AAABEFA9}"/>
+              </a:ext>
+            </a:extLst>
+          </p:cNvPr>
+          <p:cNvSpPr txBox="1"/>
+          <p:nvPr/>
+        </p:nvSpPr>
+        <p:spPr>
+          <a:xfrm>
+            <a:off x="7356585" y="2073010"/>
+            <a:ext cx="2329186" cy="1731243"/>
+          </a:xfrm>
+          <a:prstGeom prst="rect">
+            <a:avLst/>
+          </a:prstGeom>
+          <a:noFill/>
+        </p:spPr>
+        <p:txBody>
+          <a:bodyPr wrap="square" rtlCol="0">
+            <a:spAutoFit/>
+          </a:bodyPr>
+          <a:lstStyle/>
+          <a:p>
+            <a:pPr marL="171450" indent="-171450">
+              <a:lnSpc>
+                <a:spcPct val="150000"/>
+              </a:lnSpc>
+              <a:buFont typeface="Arial" panose="020B0604020202020204" pitchFamily="34" charset="0"/>
+              <a:buChar char="•"/>
+            </a:pPr>
+            <a:r>
+              <a:rPr lang="ja-JP" altLang="en-US" sz="1200">
+                <a:latin typeface="メイリオ" panose="020B0604030504040204" pitchFamily="50" charset="-128"/>
+                <a:ea typeface="メイリオ" panose="020B0604030504040204" pitchFamily="50" charset="-128"/>
+              </a:rPr>
+              <a:t>会議議事録の自動要約＆アクションアイテム抽出</a:t>
+            </a:r>
+            <a:endParaRPr lang="en-US" altLang="ja-JP" sz="1200">
+              <a:latin typeface="メイリオ" panose="020B0604030504040204" pitchFamily="50" charset="-128"/>
+              <a:ea typeface="メイリオ" panose="020B0604030504040204" pitchFamily="50" charset="-128"/>
+            </a:endParaRPr>
+          </a:p>
+          <a:p>
+            <a:pPr marL="171450" indent="-171450">
+              <a:lnSpc>
+                <a:spcPct val="150000"/>
+              </a:lnSpc>
+              <a:buFont typeface="Arial" panose="020B0604020202020204" pitchFamily="34" charset="0"/>
+              <a:buChar char="•"/>
+            </a:pPr>
+            <a:r>
+              <a:rPr lang="ja-JP" altLang="en-US" sz="1200">
+                <a:latin typeface="メイリオ" panose="020B0604030504040204" pitchFamily="50" charset="-128"/>
+                <a:ea typeface="メイリオ" panose="020B0604030504040204" pitchFamily="50" charset="-128"/>
+              </a:rPr>
+              <a:t>障害発生時の全チャネル一斉通知</a:t>
+            </a:r>
+            <a:endParaRPr lang="en-US" altLang="ja-JP" sz="1200">
+              <a:latin typeface="メイリオ" panose="020B0604030504040204" pitchFamily="50" charset="-128"/>
+              <a:ea typeface="メイリオ" panose="020B0604030504040204" pitchFamily="50" charset="-128"/>
+            </a:endParaRPr>
+          </a:p>
+          <a:p>
+            <a:pPr marL="171450" indent="-171450">
+              <a:lnSpc>
+                <a:spcPct val="150000"/>
+              </a:lnSpc>
+              <a:buFont typeface="Arial" panose="020B0604020202020204" pitchFamily="34" charset="0"/>
+              <a:buChar char="•"/>
+            </a:pPr>
+            <a:r>
+              <a:rPr lang="ja-JP" altLang="en-US" sz="1200">
+                <a:latin typeface="メイリオ" panose="020B0604030504040204" pitchFamily="50" charset="-128"/>
+                <a:ea typeface="メイリオ" panose="020B0604030504040204" pitchFamily="50" charset="-128"/>
+              </a:rPr>
+              <a:t>音声メモの文字起こし＆要約配信</a:t>
+            </a:r>
+            <a:endParaRPr kumimoji="1" lang="en-US" altLang="ja-JP" sz="1200">
+              <a:latin typeface="メイリオ" panose="020B0604030504040204" pitchFamily="50" charset="-128"/>
+              <a:ea typeface="メイリオ" panose="020B0604030504040204" pitchFamily="50" charset="-128"/>
+            </a:endParaRPr>
+          </a:p>
+        </p:txBody>
+      </p:sp>
+      <p:sp>
+        <p:nvSpPr>
+          <p:cNvPr id="19" name="正方形/長方形 18">
+            <a:extLst>
+              <a:ext uri="{FF2B5EF4-FFF2-40B4-BE49-F238E27FC236}">
+                <a16:creationId xmlns:a16="http://schemas.microsoft.com/office/drawing/2014/main" id="{C4A26004-E79E-7B34-9F0C-710EBB86C624}"/>
+              </a:ext>
+            </a:extLst>
+          </p:cNvPr>
+          <p:cNvSpPr/>
+          <p:nvPr/>
+        </p:nvSpPr>
+        <p:spPr>
+          <a:xfrm>
+            <a:off x="7360872" y="2013535"/>
+            <a:ext cx="2329185" cy="2108672"/>
+          </a:xfrm>
+          <a:prstGeom prst="rect">
+            <a:avLst/>
+          </a:prstGeom>
+          <a:noFill/>
+          <a:ln>
+            <a:solidFill>
+              <a:schemeClr val="tx2">
+                <a:lumMod val="75000"/>
+                <a:lumOff val="25000"/>
+              </a:schemeClr>
+            </a:solidFill>
+          </a:ln>
+        </p:spPr>
+        <p:style>
+          <a:lnRef idx="2">
+            <a:schemeClr val="accent1">
+              <a:shade val="15000"/>
+            </a:schemeClr>
+          </a:lnRef>
+          <a:fillRef idx="1">
+            <a:schemeClr val="accent1"/>
+          </a:fillRef>
+          <a:effectRef idx="0">
+            <a:schemeClr val="accent1"/>
+          </a:effectRef>
+          <a:fontRef idx="minor">
+            <a:schemeClr val="lt1"/>
+          </a:fontRef>
+        </p:style>
+        <p:txBody>
+          <a:bodyPr rtlCol="0" anchor="ctr"/>
+          <a:lstStyle/>
+          <a:p>
+            <a:pPr algn="ctr"/>
+            <a:endParaRPr kumimoji="1" lang="ja-JP" altLang="en-US">
+              <a:latin typeface="メイリオ" panose="020B0604030504040204" pitchFamily="50" charset="-128"/>
+              <a:ea typeface="メイリオ" panose="020B0604030504040204" pitchFamily="50" charset="-128"/>
+            </a:endParaRPr>
+          </a:p>
+        </p:txBody>
+      </p:sp>
+      <p:sp>
+        <p:nvSpPr>
+          <p:cNvPr id="21" name="正方形/長方形 20">
+            <a:extLst>
+              <a:ext uri="{FF2B5EF4-FFF2-40B4-BE49-F238E27FC236}">
+                <a16:creationId xmlns:a16="http://schemas.microsoft.com/office/drawing/2014/main" id="{CD13A616-4FD7-9CEA-68C0-B71794268920}"/>
+              </a:ext>
+            </a:extLst>
+          </p:cNvPr>
+          <p:cNvSpPr/>
+          <p:nvPr/>
+        </p:nvSpPr>
+        <p:spPr>
+          <a:xfrm>
+            <a:off x="9796613" y="1673132"/>
+            <a:ext cx="2329185" cy="340403"/>
+          </a:xfrm>
+          <a:prstGeom prst="rect">
+            <a:avLst/>
+          </a:prstGeom>
+          <a:solidFill>
+            <a:schemeClr val="tx2">
+              <a:lumMod val="75000"/>
+              <a:lumOff val="25000"/>
+            </a:schemeClr>
+          </a:solidFill>
+          <a:ln>
+            <a:solidFill>
+              <a:schemeClr val="tx2">
+                <a:lumMod val="75000"/>
+                <a:lumOff val="25000"/>
+              </a:schemeClr>
+            </a:solidFill>
+          </a:ln>
+        </p:spPr>
+        <p:style>
+          <a:lnRef idx="2">
+            <a:schemeClr val="accent1">
+              <a:shade val="15000"/>
+            </a:schemeClr>
+          </a:lnRef>
+          <a:fillRef idx="1">
+            <a:schemeClr val="accent1"/>
+          </a:fillRef>
+          <a:effectRef idx="0">
+            <a:schemeClr val="accent1"/>
+          </a:effectRef>
+          <a:fontRef idx="minor">
+            <a:schemeClr val="lt1"/>
+          </a:fontRef>
+        </p:style>
+        <p:txBody>
+          <a:bodyPr rtlCol="0" anchor="ctr"/>
+          <a:lstStyle/>
+          <a:p>
+            <a:pPr algn="ctr"/>
+            <a:r>
+              <a:rPr lang="en-US" altLang="ja-JP" sz="1200">
+                <a:latin typeface="メイリオ" panose="020B0604030504040204" pitchFamily="50" charset="-128"/>
+                <a:ea typeface="メイリオ" panose="020B0604030504040204" pitchFamily="50" charset="-128"/>
+              </a:rPr>
+              <a:t>Web</a:t>
+            </a:r>
+            <a:r>
+              <a:rPr lang="ja-JP" altLang="en-US" sz="1200">
+                <a:latin typeface="メイリオ" panose="020B0604030504040204" pitchFamily="50" charset="-128"/>
+                <a:ea typeface="メイリオ" panose="020B0604030504040204" pitchFamily="50" charset="-128"/>
+              </a:rPr>
+              <a:t>操作・スクレイピング</a:t>
+            </a:r>
+            <a:endParaRPr kumimoji="1" lang="ja-JP" altLang="en-US" sz="1200">
+              <a:latin typeface="メイリオ" panose="020B0604030504040204" pitchFamily="50" charset="-128"/>
+              <a:ea typeface="メイリオ" panose="020B0604030504040204" pitchFamily="50" charset="-128"/>
+            </a:endParaRPr>
+          </a:p>
+        </p:txBody>
+      </p:sp>
+      <p:sp>
+        <p:nvSpPr>
+          <p:cNvPr id="22" name="テキスト ボックス 21">
+            <a:extLst>
+              <a:ext uri="{FF2B5EF4-FFF2-40B4-BE49-F238E27FC236}">
+                <a16:creationId xmlns:a16="http://schemas.microsoft.com/office/drawing/2014/main" id="{D236ABE6-FFEB-A767-53D9-5F223DB3D8A1}"/>
+              </a:ext>
+            </a:extLst>
+          </p:cNvPr>
+          <p:cNvSpPr txBox="1"/>
+          <p:nvPr/>
+        </p:nvSpPr>
+        <p:spPr>
+          <a:xfrm>
+            <a:off x="9792326" y="2073010"/>
+            <a:ext cx="2329186" cy="1454244"/>
+          </a:xfrm>
+          <a:prstGeom prst="rect">
+            <a:avLst/>
+          </a:prstGeom>
+          <a:noFill/>
+        </p:spPr>
+        <p:txBody>
+          <a:bodyPr wrap="square" rtlCol="0">
+            <a:spAutoFit/>
+          </a:bodyPr>
+          <a:lstStyle/>
+          <a:p>
+            <a:pPr marL="171450" indent="-171450">
+              <a:lnSpc>
+                <a:spcPct val="150000"/>
+              </a:lnSpc>
+              <a:buFont typeface="Arial" panose="020B0604020202020204" pitchFamily="34" charset="0"/>
+              <a:buChar char="•"/>
+            </a:pPr>
+            <a:r>
+              <a:rPr lang="ja-JP" altLang="en-US" sz="1200">
+                <a:latin typeface="メイリオ" panose="020B0604030504040204" pitchFamily="50" charset="-128"/>
+                <a:ea typeface="メイリオ" panose="020B0604030504040204" pitchFamily="50" charset="-128"/>
+              </a:rPr>
+              <a:t>官公庁の入札情報自動収集＆フィルタリング</a:t>
+            </a:r>
+            <a:endParaRPr lang="en-US" altLang="ja-JP" sz="1200">
+              <a:latin typeface="メイリオ" panose="020B0604030504040204" pitchFamily="50" charset="-128"/>
+              <a:ea typeface="メイリオ" panose="020B0604030504040204" pitchFamily="50" charset="-128"/>
+            </a:endParaRPr>
+          </a:p>
+          <a:p>
+            <a:pPr marL="171450" indent="-171450">
+              <a:lnSpc>
+                <a:spcPct val="150000"/>
+              </a:lnSpc>
+              <a:buFont typeface="Arial" panose="020B0604020202020204" pitchFamily="34" charset="0"/>
+              <a:buChar char="•"/>
+            </a:pPr>
+            <a:r>
+              <a:rPr lang="ja-JP" altLang="en-US" sz="1200">
+                <a:latin typeface="メイリオ" panose="020B0604030504040204" pitchFamily="50" charset="-128"/>
+                <a:ea typeface="メイリオ" panose="020B0604030504040204" pitchFamily="50" charset="-128"/>
+              </a:rPr>
+              <a:t>自社サイトのリンク切れ・表示崩れ自動検知</a:t>
+            </a:r>
+            <a:endParaRPr lang="en-US" altLang="ja-JP" sz="1200">
+              <a:latin typeface="メイリオ" panose="020B0604030504040204" pitchFamily="50" charset="-128"/>
+              <a:ea typeface="メイリオ" panose="020B0604030504040204" pitchFamily="50" charset="-128"/>
+            </a:endParaRPr>
+          </a:p>
+          <a:p>
+            <a:pPr marL="171450" indent="-171450">
+              <a:lnSpc>
+                <a:spcPct val="150000"/>
+              </a:lnSpc>
+              <a:buFont typeface="Arial" panose="020B0604020202020204" pitchFamily="34" charset="0"/>
+              <a:buChar char="•"/>
+            </a:pPr>
+            <a:r>
+              <a:rPr lang="ja-JP" altLang="en-US" sz="1200">
+                <a:latin typeface="メイリオ" panose="020B0604030504040204" pitchFamily="50" charset="-128"/>
+                <a:ea typeface="メイリオ" panose="020B0604030504040204" pitchFamily="50" charset="-128"/>
+              </a:rPr>
+              <a:t>複数求人媒体への同時掲載</a:t>
+            </a:r>
+            <a:endParaRPr kumimoji="1" lang="en-US" altLang="ja-JP" sz="1200">
+              <a:latin typeface="メイリオ" panose="020B0604030504040204" pitchFamily="50" charset="-128"/>
+              <a:ea typeface="メイリオ" panose="020B0604030504040204" pitchFamily="50" charset="-128"/>
+            </a:endParaRPr>
+          </a:p>
+        </p:txBody>
+      </p:sp>
+      <p:sp>
+        <p:nvSpPr>
+          <p:cNvPr id="23" name="正方形/長方形 22">
+            <a:extLst>
+              <a:ext uri="{FF2B5EF4-FFF2-40B4-BE49-F238E27FC236}">
+                <a16:creationId xmlns:a16="http://schemas.microsoft.com/office/drawing/2014/main" id="{CA6CD9D3-886E-1188-6DDB-96E88FCD0243}"/>
+              </a:ext>
+            </a:extLst>
+          </p:cNvPr>
+          <p:cNvSpPr/>
+          <p:nvPr/>
+        </p:nvSpPr>
+        <p:spPr>
+          <a:xfrm>
+            <a:off x="9796613" y="2013535"/>
+            <a:ext cx="2329185" cy="2108672"/>
+          </a:xfrm>
+          <a:prstGeom prst="rect">
+            <a:avLst/>
+          </a:prstGeom>
+          <a:noFill/>
+          <a:ln>
+            <a:solidFill>
+              <a:schemeClr val="tx2">
+                <a:lumMod val="75000"/>
+                <a:lumOff val="25000"/>
+              </a:schemeClr>
+            </a:solidFill>
+          </a:ln>
+        </p:spPr>
+        <p:style>
+          <a:lnRef idx="2">
+            <a:schemeClr val="accent1">
+              <a:shade val="15000"/>
+            </a:schemeClr>
+          </a:lnRef>
+          <a:fillRef idx="1">
+            <a:schemeClr val="accent1"/>
+          </a:fillRef>
+          <a:effectRef idx="0">
+            <a:schemeClr val="accent1"/>
+          </a:effectRef>
+          <a:fontRef idx="minor">
+            <a:schemeClr val="lt1"/>
+          </a:fontRef>
+        </p:style>
+        <p:txBody>
+          <a:bodyPr rtlCol="0" anchor="ctr"/>
+          <a:lstStyle/>
+          <a:p>
+            <a:pPr algn="ctr"/>
+            <a:endParaRPr kumimoji="1" lang="ja-JP" altLang="en-US">
+              <a:latin typeface="メイリオ" panose="020B0604030504040204" pitchFamily="50" charset="-128"/>
+              <a:ea typeface="メイリオ" panose="020B0604030504040204" pitchFamily="50" charset="-128"/>
+            </a:endParaRPr>
+          </a:p>
+        </p:txBody>
+      </p:sp>
+      <p:sp>
+        <p:nvSpPr>
+          <p:cNvPr id="26" name="正方形/長方形 25">
+            <a:extLst>
+              <a:ext uri="{FF2B5EF4-FFF2-40B4-BE49-F238E27FC236}">
+                <a16:creationId xmlns:a16="http://schemas.microsoft.com/office/drawing/2014/main" id="{CCE7ADDD-FDD5-8501-B45E-DCD9BD4A238D}"/>
+              </a:ext>
+            </a:extLst>
+          </p:cNvPr>
+          <p:cNvSpPr/>
+          <p:nvPr/>
+        </p:nvSpPr>
+        <p:spPr>
+          <a:xfrm>
+            <a:off x="2495664" y="4275103"/>
+            <a:ext cx="2329186" cy="340403"/>
+          </a:xfrm>
+          <a:prstGeom prst="rect">
+            <a:avLst/>
+          </a:prstGeom>
+          <a:solidFill>
+            <a:schemeClr val="tx2">
+              <a:lumMod val="75000"/>
+              <a:lumOff val="25000"/>
+            </a:schemeClr>
+          </a:solidFill>
+          <a:ln>
+            <a:solidFill>
+              <a:schemeClr val="tx2">
+                <a:lumMod val="75000"/>
+                <a:lumOff val="25000"/>
+              </a:schemeClr>
+            </a:solidFill>
+          </a:ln>
+        </p:spPr>
+        <p:style>
+          <a:lnRef idx="2">
+            <a:schemeClr val="accent1">
+              <a:shade val="15000"/>
+            </a:schemeClr>
+          </a:lnRef>
+          <a:fillRef idx="1">
+            <a:schemeClr val="accent1"/>
+          </a:fillRef>
+          <a:effectRef idx="0">
+            <a:schemeClr val="accent1"/>
+          </a:effectRef>
+          <a:fontRef idx="minor">
+            <a:schemeClr val="lt1"/>
+          </a:fontRef>
+        </p:style>
+        <p:txBody>
+          <a:bodyPr rtlCol="0" anchor="ctr"/>
+          <a:lstStyle/>
+          <a:p>
+            <a:pPr algn="ctr"/>
+            <a:r>
+              <a:rPr lang="ja-JP" altLang="en-US" sz="1600">
+                <a:latin typeface="メイリオ" panose="020B0604030504040204" pitchFamily="50" charset="-128"/>
+                <a:ea typeface="メイリオ" panose="020B0604030504040204" pitchFamily="50" charset="-128"/>
+              </a:rPr>
+              <a:t>営業・マーケ支援</a:t>
+            </a:r>
+            <a:endParaRPr kumimoji="1" lang="ja-JP" altLang="en-US" sz="1600">
+              <a:latin typeface="メイリオ" panose="020B0604030504040204" pitchFamily="50" charset="-128"/>
+              <a:ea typeface="メイリオ" panose="020B0604030504040204" pitchFamily="50" charset="-128"/>
+            </a:endParaRPr>
+          </a:p>
+        </p:txBody>
+      </p:sp>
+      <p:sp>
+        <p:nvSpPr>
+          <p:cNvPr id="27" name="テキスト ボックス 26">
+            <a:extLst>
+              <a:ext uri="{FF2B5EF4-FFF2-40B4-BE49-F238E27FC236}">
+                <a16:creationId xmlns:a16="http://schemas.microsoft.com/office/drawing/2014/main" id="{D0B18A97-E6D5-0AA7-74D8-FAF13D7FFDB2}"/>
+              </a:ext>
+            </a:extLst>
+          </p:cNvPr>
+          <p:cNvSpPr txBox="1"/>
+          <p:nvPr/>
+        </p:nvSpPr>
+        <p:spPr>
+          <a:xfrm>
+            <a:off x="2491378" y="4674981"/>
+            <a:ext cx="2329186" cy="1454244"/>
+          </a:xfrm>
+          <a:prstGeom prst="rect">
+            <a:avLst/>
+          </a:prstGeom>
+          <a:noFill/>
+        </p:spPr>
+        <p:txBody>
+          <a:bodyPr wrap="square" rtlCol="0">
+            <a:spAutoFit/>
+          </a:bodyPr>
+          <a:lstStyle/>
+          <a:p>
+            <a:pPr marL="171450" indent="-171450">
+              <a:lnSpc>
+                <a:spcPct val="150000"/>
+              </a:lnSpc>
+              <a:buFont typeface="Arial" panose="020B0604020202020204" pitchFamily="34" charset="0"/>
+              <a:buChar char="•"/>
+            </a:pPr>
+            <a:r>
+              <a:rPr lang="ja-JP" altLang="en-US" sz="1200">
+                <a:latin typeface="メイリオ" panose="020B0604030504040204" pitchFamily="50" charset="-128"/>
+                <a:ea typeface="メイリオ" panose="020B0604030504040204" pitchFamily="50" charset="-128"/>
+              </a:rPr>
+              <a:t>商談前の企業リサーチ自動パッケージ</a:t>
+            </a:r>
+            <a:endParaRPr lang="en-US" altLang="ja-JP" sz="1200">
+              <a:latin typeface="メイリオ" panose="020B0604030504040204" pitchFamily="50" charset="-128"/>
+              <a:ea typeface="メイリオ" panose="020B0604030504040204" pitchFamily="50" charset="-128"/>
+            </a:endParaRPr>
+          </a:p>
+          <a:p>
+            <a:pPr marL="171450" indent="-171450">
+              <a:lnSpc>
+                <a:spcPct val="150000"/>
+              </a:lnSpc>
+              <a:buFont typeface="Arial" panose="020B0604020202020204" pitchFamily="34" charset="0"/>
+              <a:buChar char="•"/>
+            </a:pPr>
+            <a:r>
+              <a:rPr lang="ja-JP" altLang="en-US" sz="1200">
+                <a:latin typeface="メイリオ" panose="020B0604030504040204" pitchFamily="50" charset="-128"/>
+                <a:ea typeface="メイリオ" panose="020B0604030504040204" pitchFamily="50" charset="-128"/>
+              </a:rPr>
+              <a:t>顧客の解約予兆検知＆アラート</a:t>
+            </a:r>
+            <a:endParaRPr lang="en-US" altLang="ja-JP" sz="1200">
+              <a:latin typeface="メイリオ" panose="020B0604030504040204" pitchFamily="50" charset="-128"/>
+              <a:ea typeface="メイリオ" panose="020B0604030504040204" pitchFamily="50" charset="-128"/>
+            </a:endParaRPr>
+          </a:p>
+          <a:p>
+            <a:pPr marL="171450" indent="-171450">
+              <a:lnSpc>
+                <a:spcPct val="150000"/>
+              </a:lnSpc>
+              <a:buFont typeface="Arial" panose="020B0604020202020204" pitchFamily="34" charset="0"/>
+              <a:buChar char="•"/>
+            </a:pPr>
+            <a:r>
+              <a:rPr lang="ja-JP" altLang="en-US" sz="1200">
+                <a:latin typeface="メイリオ" panose="020B0604030504040204" pitchFamily="50" charset="-128"/>
+                <a:ea typeface="メイリオ" panose="020B0604030504040204" pitchFamily="50" charset="-128"/>
+              </a:rPr>
+              <a:t>展示会名刺の</a:t>
+            </a:r>
+            <a:r>
+              <a:rPr lang="en-US" altLang="ja-JP" sz="1200">
+                <a:latin typeface="メイリオ" panose="020B0604030504040204" pitchFamily="50" charset="-128"/>
+                <a:ea typeface="メイリオ" panose="020B0604030504040204" pitchFamily="50" charset="-128"/>
+              </a:rPr>
+              <a:t>CRM</a:t>
+            </a:r>
+            <a:r>
+              <a:rPr lang="ja-JP" altLang="en-US" sz="1200">
+                <a:latin typeface="メイリオ" panose="020B0604030504040204" pitchFamily="50" charset="-128"/>
+                <a:ea typeface="メイリオ" panose="020B0604030504040204" pitchFamily="50" charset="-128"/>
+              </a:rPr>
+              <a:t>一括登録</a:t>
+            </a:r>
+            <a:endParaRPr kumimoji="1" lang="en-US" altLang="ja-JP" sz="1200">
+              <a:latin typeface="メイリオ" panose="020B0604030504040204" pitchFamily="50" charset="-128"/>
+              <a:ea typeface="メイリオ" panose="020B0604030504040204" pitchFamily="50" charset="-128"/>
+            </a:endParaRPr>
+          </a:p>
+        </p:txBody>
+      </p:sp>
+      <p:sp>
+        <p:nvSpPr>
+          <p:cNvPr id="28" name="正方形/長方形 27">
+            <a:extLst>
+              <a:ext uri="{FF2B5EF4-FFF2-40B4-BE49-F238E27FC236}">
+                <a16:creationId xmlns:a16="http://schemas.microsoft.com/office/drawing/2014/main" id="{2745FE9D-5826-0887-D3A0-ADBF948F859D}"/>
+              </a:ext>
+            </a:extLst>
+          </p:cNvPr>
+          <p:cNvSpPr/>
+          <p:nvPr/>
+        </p:nvSpPr>
+        <p:spPr>
+          <a:xfrm>
+            <a:off x="2495665" y="4615506"/>
+            <a:ext cx="2329185" cy="2108672"/>
+          </a:xfrm>
+          <a:prstGeom prst="rect">
+            <a:avLst/>
+          </a:prstGeom>
+          <a:noFill/>
+          <a:ln>
+            <a:solidFill>
+              <a:schemeClr val="tx2">
+                <a:lumMod val="75000"/>
+                <a:lumOff val="25000"/>
+              </a:schemeClr>
+            </a:solidFill>
+          </a:ln>
+        </p:spPr>
+        <p:style>
+          <a:lnRef idx="2">
+            <a:schemeClr val="accent1">
+              <a:shade val="15000"/>
+            </a:schemeClr>
+          </a:lnRef>
+          <a:fillRef idx="1">
+            <a:schemeClr val="accent1"/>
+          </a:fillRef>
+          <a:effectRef idx="0">
+            <a:schemeClr val="accent1"/>
+          </a:effectRef>
+          <a:fontRef idx="minor">
+            <a:schemeClr val="lt1"/>
+          </a:fontRef>
+        </p:style>
+        <p:txBody>
+          <a:bodyPr rtlCol="0" anchor="ctr"/>
+          <a:lstStyle/>
+          <a:p>
+            <a:pPr algn="ctr"/>
+            <a:endParaRPr kumimoji="1" lang="ja-JP" altLang="en-US">
+              <a:latin typeface="メイリオ" panose="020B0604030504040204" pitchFamily="50" charset="-128"/>
+              <a:ea typeface="メイリオ" panose="020B0604030504040204" pitchFamily="50" charset="-128"/>
+            </a:endParaRPr>
+          </a:p>
+        </p:txBody>
+      </p:sp>
+      <p:sp>
+        <p:nvSpPr>
+          <p:cNvPr id="29" name="正方形/長方形 28">
+            <a:extLst>
+              <a:ext uri="{FF2B5EF4-FFF2-40B4-BE49-F238E27FC236}">
+                <a16:creationId xmlns:a16="http://schemas.microsoft.com/office/drawing/2014/main" id="{038919E7-179D-8CC9-52EC-3DAADFE75057}"/>
+              </a:ext>
+            </a:extLst>
+          </p:cNvPr>
+          <p:cNvSpPr/>
+          <p:nvPr/>
+        </p:nvSpPr>
+        <p:spPr>
+          <a:xfrm>
+            <a:off x="64134" y="4275103"/>
+            <a:ext cx="2329185" cy="340403"/>
+          </a:xfrm>
+          <a:prstGeom prst="rect">
+            <a:avLst/>
+          </a:prstGeom>
+          <a:solidFill>
+            <a:schemeClr val="tx2">
+              <a:lumMod val="75000"/>
+              <a:lumOff val="25000"/>
+            </a:schemeClr>
+          </a:solidFill>
+          <a:ln>
+            <a:solidFill>
+              <a:schemeClr val="tx2">
+                <a:lumMod val="75000"/>
+                <a:lumOff val="25000"/>
+              </a:schemeClr>
+            </a:solidFill>
+          </a:ln>
+        </p:spPr>
+        <p:style>
+          <a:lnRef idx="2">
+            <a:schemeClr val="accent1">
+              <a:shade val="15000"/>
+            </a:schemeClr>
+          </a:lnRef>
+          <a:fillRef idx="1">
+            <a:schemeClr val="accent1"/>
+          </a:fillRef>
+          <a:effectRef idx="0">
+            <a:schemeClr val="accent1"/>
+          </a:effectRef>
+          <a:fontRef idx="minor">
+            <a:schemeClr val="lt1"/>
+          </a:fontRef>
+        </p:style>
+        <p:txBody>
+          <a:bodyPr rtlCol="0" anchor="ctr"/>
+          <a:lstStyle/>
+          <a:p>
+            <a:pPr algn="ctr"/>
+            <a:r>
+              <a:rPr lang="en-US" altLang="ja-JP" sz="1600">
+                <a:latin typeface="メイリオ" panose="020B0604030504040204" pitchFamily="50" charset="-128"/>
+                <a:ea typeface="メイリオ" panose="020B0604030504040204" pitchFamily="50" charset="-128"/>
+              </a:rPr>
+              <a:t>IoT</a:t>
+            </a:r>
+            <a:r>
+              <a:rPr lang="ja-JP" altLang="en-US" sz="1600">
+                <a:latin typeface="メイリオ" panose="020B0604030504040204" pitchFamily="50" charset="-128"/>
+                <a:ea typeface="メイリオ" panose="020B0604030504040204" pitchFamily="50" charset="-128"/>
+              </a:rPr>
+              <a:t>・デバイス連携</a:t>
+            </a:r>
+            <a:endParaRPr kumimoji="1" lang="ja-JP" altLang="en-US" sz="1600">
+              <a:latin typeface="メイリオ" panose="020B0604030504040204" pitchFamily="50" charset="-128"/>
+              <a:ea typeface="メイリオ" panose="020B0604030504040204" pitchFamily="50" charset="-128"/>
+            </a:endParaRPr>
+          </a:p>
+        </p:txBody>
+      </p:sp>
+      <p:sp>
+        <p:nvSpPr>
+          <p:cNvPr id="30" name="テキスト ボックス 29">
+            <a:extLst>
+              <a:ext uri="{FF2B5EF4-FFF2-40B4-BE49-F238E27FC236}">
+                <a16:creationId xmlns:a16="http://schemas.microsoft.com/office/drawing/2014/main" id="{49B309BF-F3B8-4DCA-773A-9FD459E8E56F}"/>
+              </a:ext>
+            </a:extLst>
+          </p:cNvPr>
+          <p:cNvSpPr txBox="1"/>
+          <p:nvPr/>
+        </p:nvSpPr>
+        <p:spPr>
+          <a:xfrm>
+            <a:off x="59847" y="4674981"/>
+            <a:ext cx="2329186" cy="1177245"/>
+          </a:xfrm>
+          <a:prstGeom prst="rect">
+            <a:avLst/>
+          </a:prstGeom>
+          <a:noFill/>
+        </p:spPr>
+        <p:txBody>
+          <a:bodyPr wrap="square" rtlCol="0">
+            <a:spAutoFit/>
+          </a:bodyPr>
+          <a:lstStyle/>
+          <a:p>
+            <a:pPr marL="171450" indent="-171450">
+              <a:lnSpc>
+                <a:spcPct val="150000"/>
+              </a:lnSpc>
+              <a:buFont typeface="Arial" panose="020B0604020202020204" pitchFamily="34" charset="0"/>
+              <a:buChar char="•"/>
+            </a:pPr>
+            <a:r>
+              <a:rPr lang="ja-JP" altLang="en-US" sz="1200">
+                <a:latin typeface="メイリオ" panose="020B0604030504040204" pitchFamily="50" charset="-128"/>
+                <a:ea typeface="メイリオ" panose="020B0604030504040204" pitchFamily="50" charset="-128"/>
+              </a:rPr>
+              <a:t>ホワイトボード定期撮影＆</a:t>
+            </a:r>
+            <a:r>
+              <a:rPr lang="en-US" altLang="ja-JP" sz="1200">
+                <a:latin typeface="メイリオ" panose="020B0604030504040204" pitchFamily="50" charset="-128"/>
+                <a:ea typeface="メイリオ" panose="020B0604030504040204" pitchFamily="50" charset="-128"/>
+              </a:rPr>
+              <a:t>OCR</a:t>
+            </a:r>
+            <a:r>
+              <a:rPr lang="ja-JP" altLang="en-US" sz="1200">
+                <a:latin typeface="メイリオ" panose="020B0604030504040204" pitchFamily="50" charset="-128"/>
+                <a:ea typeface="メイリオ" panose="020B0604030504040204" pitchFamily="50" charset="-128"/>
+              </a:rPr>
+              <a:t>議事録化</a:t>
+            </a:r>
+            <a:endParaRPr lang="en-US" altLang="ja-JP" sz="1200">
+              <a:latin typeface="メイリオ" panose="020B0604030504040204" pitchFamily="50" charset="-128"/>
+              <a:ea typeface="メイリオ" panose="020B0604030504040204" pitchFamily="50" charset="-128"/>
+            </a:endParaRPr>
+          </a:p>
+          <a:p>
+            <a:pPr marL="171450" indent="-171450">
+              <a:lnSpc>
+                <a:spcPct val="150000"/>
+              </a:lnSpc>
+              <a:buFont typeface="Arial" panose="020B0604020202020204" pitchFamily="34" charset="0"/>
+              <a:buChar char="•"/>
+            </a:pPr>
+            <a:r>
+              <a:rPr lang="ja-JP" altLang="en-US" sz="1200">
+                <a:latin typeface="メイリオ" panose="020B0604030504040204" pitchFamily="50" charset="-128"/>
+                <a:ea typeface="メイリオ" panose="020B0604030504040204" pitchFamily="50" charset="-128"/>
+              </a:rPr>
+              <a:t>現場写真の自動報告書生成</a:t>
+            </a:r>
+            <a:endParaRPr lang="en-US" altLang="ja-JP" sz="1200">
+              <a:latin typeface="メイリオ" panose="020B0604030504040204" pitchFamily="50" charset="-128"/>
+              <a:ea typeface="メイリオ" panose="020B0604030504040204" pitchFamily="50" charset="-128"/>
+            </a:endParaRPr>
+          </a:p>
+          <a:p>
+            <a:pPr marL="171450" indent="-171450">
+              <a:lnSpc>
+                <a:spcPct val="150000"/>
+              </a:lnSpc>
+              <a:buFont typeface="Arial" panose="020B0604020202020204" pitchFamily="34" charset="0"/>
+              <a:buChar char="•"/>
+            </a:pPr>
+            <a:r>
+              <a:rPr lang="ja-JP" altLang="en-US" sz="1200">
+                <a:latin typeface="メイリオ" panose="020B0604030504040204" pitchFamily="50" charset="-128"/>
+                <a:ea typeface="メイリオ" panose="020B0604030504040204" pitchFamily="50" charset="-128"/>
+              </a:rPr>
+              <a:t>店舗の陳列状態チェック</a:t>
+            </a:r>
+            <a:endParaRPr kumimoji="1" lang="en-US" altLang="ja-JP" sz="1200">
+              <a:latin typeface="メイリオ" panose="020B0604030504040204" pitchFamily="50" charset="-128"/>
+              <a:ea typeface="メイリオ" panose="020B0604030504040204" pitchFamily="50" charset="-128"/>
+            </a:endParaRPr>
+          </a:p>
+        </p:txBody>
+      </p:sp>
+      <p:sp>
+        <p:nvSpPr>
+          <p:cNvPr id="31" name="正方形/長方形 30">
+            <a:extLst>
+              <a:ext uri="{FF2B5EF4-FFF2-40B4-BE49-F238E27FC236}">
+                <a16:creationId xmlns:a16="http://schemas.microsoft.com/office/drawing/2014/main" id="{E71B211F-07BB-EE29-64A1-7FFAF43ED318}"/>
+              </a:ext>
+            </a:extLst>
+          </p:cNvPr>
+          <p:cNvSpPr/>
+          <p:nvPr/>
+        </p:nvSpPr>
+        <p:spPr>
+          <a:xfrm>
+            <a:off x="64134" y="4615506"/>
+            <a:ext cx="2329185" cy="2108672"/>
+          </a:xfrm>
+          <a:prstGeom prst="rect">
+            <a:avLst/>
+          </a:prstGeom>
+          <a:noFill/>
+          <a:ln>
+            <a:solidFill>
+              <a:schemeClr val="tx2">
+                <a:lumMod val="75000"/>
+                <a:lumOff val="25000"/>
+              </a:schemeClr>
+            </a:solidFill>
+          </a:ln>
+        </p:spPr>
+        <p:style>
+          <a:lnRef idx="2">
+            <a:schemeClr val="accent1">
+              <a:shade val="15000"/>
+            </a:schemeClr>
+          </a:lnRef>
+          <a:fillRef idx="1">
+            <a:schemeClr val="accent1"/>
+          </a:fillRef>
+          <a:effectRef idx="0">
+            <a:schemeClr val="accent1"/>
+          </a:effectRef>
+          <a:fontRef idx="minor">
+            <a:schemeClr val="lt1"/>
+          </a:fontRef>
+        </p:style>
+        <p:txBody>
+          <a:bodyPr rtlCol="0" anchor="ctr"/>
+          <a:lstStyle/>
+          <a:p>
+            <a:pPr algn="ctr"/>
+            <a:endParaRPr kumimoji="1" lang="ja-JP" altLang="en-US">
+              <a:latin typeface="メイリオ" panose="020B0604030504040204" pitchFamily="50" charset="-128"/>
+              <a:ea typeface="メイリオ" panose="020B0604030504040204" pitchFamily="50" charset="-128"/>
+            </a:endParaRPr>
+          </a:p>
+        </p:txBody>
+      </p:sp>
+      <p:sp>
+        <p:nvSpPr>
+          <p:cNvPr id="32" name="正方形/長方形 31">
+            <a:extLst>
+              <a:ext uri="{FF2B5EF4-FFF2-40B4-BE49-F238E27FC236}">
+                <a16:creationId xmlns:a16="http://schemas.microsoft.com/office/drawing/2014/main" id="{4843D99C-DB8D-C84D-DB50-4D932D8F9B5A}"/>
+              </a:ext>
+            </a:extLst>
+          </p:cNvPr>
+          <p:cNvSpPr/>
+          <p:nvPr/>
+        </p:nvSpPr>
+        <p:spPr>
+          <a:xfrm>
+            <a:off x="4922987" y="4275103"/>
+            <a:ext cx="2329185" cy="340403"/>
+          </a:xfrm>
+          <a:prstGeom prst="rect">
+            <a:avLst/>
+          </a:prstGeom>
+          <a:solidFill>
+            <a:schemeClr val="tx2">
+              <a:lumMod val="75000"/>
+              <a:lumOff val="25000"/>
+            </a:schemeClr>
+          </a:solidFill>
+          <a:ln>
+            <a:solidFill>
+              <a:schemeClr val="tx2">
+                <a:lumMod val="75000"/>
+                <a:lumOff val="25000"/>
+              </a:schemeClr>
+            </a:solidFill>
+          </a:ln>
+        </p:spPr>
+        <p:style>
+          <a:lnRef idx="2">
+            <a:schemeClr val="accent1">
+              <a:shade val="15000"/>
+            </a:schemeClr>
+          </a:lnRef>
+          <a:fillRef idx="1">
+            <a:schemeClr val="accent1"/>
+          </a:fillRef>
+          <a:effectRef idx="0">
+            <a:schemeClr val="accent1"/>
+          </a:effectRef>
+          <a:fontRef idx="minor">
+            <a:schemeClr val="lt1"/>
+          </a:fontRef>
+        </p:style>
+        <p:txBody>
+          <a:bodyPr rtlCol="0" anchor="ctr"/>
+          <a:lstStyle/>
+          <a:p>
+            <a:pPr algn="ctr"/>
+            <a:r>
+              <a:rPr lang="ja-JP" altLang="en-US" sz="1400">
+                <a:latin typeface="メイリオ" panose="020B0604030504040204" pitchFamily="50" charset="-128"/>
+                <a:ea typeface="メイリオ" panose="020B0604030504040204" pitchFamily="50" charset="-128"/>
+              </a:rPr>
+              <a:t>セキュリティ・運用監視</a:t>
+            </a:r>
+            <a:endParaRPr kumimoji="1" lang="ja-JP" altLang="en-US" sz="1400">
+              <a:latin typeface="メイリオ" panose="020B0604030504040204" pitchFamily="50" charset="-128"/>
+              <a:ea typeface="メイリオ" panose="020B0604030504040204" pitchFamily="50" charset="-128"/>
+            </a:endParaRPr>
+          </a:p>
+        </p:txBody>
+      </p:sp>
+      <p:sp>
+        <p:nvSpPr>
+          <p:cNvPr id="33" name="テキスト ボックス 32">
+            <a:extLst>
+              <a:ext uri="{FF2B5EF4-FFF2-40B4-BE49-F238E27FC236}">
+                <a16:creationId xmlns:a16="http://schemas.microsoft.com/office/drawing/2014/main" id="{AFFEF8C3-8E37-FB6B-5390-BA25915D4C29}"/>
+              </a:ext>
+            </a:extLst>
+          </p:cNvPr>
+          <p:cNvSpPr txBox="1"/>
+          <p:nvPr/>
+        </p:nvSpPr>
+        <p:spPr>
+          <a:xfrm>
+            <a:off x="4918700" y="4674981"/>
+            <a:ext cx="2329185" cy="1731243"/>
+          </a:xfrm>
+          <a:prstGeom prst="rect">
+            <a:avLst/>
+          </a:prstGeom>
+          <a:noFill/>
+        </p:spPr>
+        <p:txBody>
+          <a:bodyPr wrap="square" rtlCol="0">
+            <a:spAutoFit/>
+          </a:bodyPr>
+          <a:lstStyle/>
+          <a:p>
+            <a:pPr marL="171450" indent="-171450">
+              <a:lnSpc>
+                <a:spcPct val="150000"/>
+              </a:lnSpc>
+              <a:buFont typeface="Arial" panose="020B0604020202020204" pitchFamily="34" charset="0"/>
+              <a:buChar char="•"/>
+            </a:pPr>
+            <a:r>
+              <a:rPr lang="ja-JP" altLang="en-US" sz="1200">
+                <a:latin typeface="メイリオ" panose="020B0604030504040204" pitchFamily="50" charset="-128"/>
+                <a:ea typeface="メイリオ" panose="020B0604030504040204" pitchFamily="50" charset="-128"/>
+              </a:rPr>
+              <a:t>サーバーログ異常パターン検知＆通知</a:t>
+            </a:r>
+            <a:endParaRPr lang="en-US" altLang="ja-JP" sz="1200">
+              <a:latin typeface="メイリオ" panose="020B0604030504040204" pitchFamily="50" charset="-128"/>
+              <a:ea typeface="メイリオ" panose="020B0604030504040204" pitchFamily="50" charset="-128"/>
+            </a:endParaRPr>
+          </a:p>
+          <a:p>
+            <a:pPr marL="171450" indent="-171450">
+              <a:lnSpc>
+                <a:spcPct val="150000"/>
+              </a:lnSpc>
+              <a:buFont typeface="Arial" panose="020B0604020202020204" pitchFamily="34" charset="0"/>
+              <a:buChar char="•"/>
+            </a:pPr>
+            <a:r>
+              <a:rPr lang="en-US" altLang="ja-JP" sz="1200">
+                <a:latin typeface="メイリオ" panose="020B0604030504040204" pitchFamily="50" charset="-128"/>
+                <a:ea typeface="メイリオ" panose="020B0604030504040204" pitchFamily="50" charset="-128"/>
+              </a:rPr>
+              <a:t>SSL</a:t>
+            </a:r>
+            <a:r>
+              <a:rPr lang="ja-JP" altLang="en-US" sz="1200">
+                <a:latin typeface="メイリオ" panose="020B0604030504040204" pitchFamily="50" charset="-128"/>
+                <a:ea typeface="メイリオ" panose="020B0604030504040204" pitchFamily="50" charset="-128"/>
+              </a:rPr>
+              <a:t>証明書期限監視＆段階アラート</a:t>
+            </a:r>
+            <a:endParaRPr lang="en-US" altLang="ja-JP" sz="1200">
+              <a:latin typeface="メイリオ" panose="020B0604030504040204" pitchFamily="50" charset="-128"/>
+              <a:ea typeface="メイリオ" panose="020B0604030504040204" pitchFamily="50" charset="-128"/>
+            </a:endParaRPr>
+          </a:p>
+          <a:p>
+            <a:pPr marL="171450" indent="-171450">
+              <a:lnSpc>
+                <a:spcPct val="150000"/>
+              </a:lnSpc>
+              <a:buFont typeface="Arial" panose="020B0604020202020204" pitchFamily="34" charset="0"/>
+              <a:buChar char="•"/>
+            </a:pPr>
+            <a:r>
+              <a:rPr lang="ja-JP" altLang="en-US" sz="1200">
+                <a:latin typeface="メイリオ" panose="020B0604030504040204" pitchFamily="50" charset="-128"/>
+                <a:ea typeface="メイリオ" panose="020B0604030504040204" pitchFamily="50" charset="-128"/>
+              </a:rPr>
+              <a:t>クラウドリソースのコスト異常検知</a:t>
+            </a:r>
+            <a:endParaRPr kumimoji="1" lang="en-US" altLang="ja-JP" sz="1200">
+              <a:latin typeface="メイリオ" panose="020B0604030504040204" pitchFamily="50" charset="-128"/>
+              <a:ea typeface="メイリオ" panose="020B0604030504040204" pitchFamily="50" charset="-128"/>
+            </a:endParaRPr>
+          </a:p>
+        </p:txBody>
+      </p:sp>
+      <p:sp>
+        <p:nvSpPr>
+          <p:cNvPr id="34" name="正方形/長方形 33">
+            <a:extLst>
+              <a:ext uri="{FF2B5EF4-FFF2-40B4-BE49-F238E27FC236}">
+                <a16:creationId xmlns:a16="http://schemas.microsoft.com/office/drawing/2014/main" id="{243CB046-B0A4-EAD9-A2E2-E726F15B67A3}"/>
+              </a:ext>
+            </a:extLst>
+          </p:cNvPr>
+          <p:cNvSpPr/>
+          <p:nvPr/>
+        </p:nvSpPr>
+        <p:spPr>
+          <a:xfrm>
+            <a:off x="4922987" y="4615506"/>
+            <a:ext cx="2329185" cy="2108672"/>
+          </a:xfrm>
+          <a:prstGeom prst="rect">
+            <a:avLst/>
+          </a:prstGeom>
+          <a:noFill/>
+          <a:ln>
+            <a:solidFill>
+              <a:schemeClr val="tx2">
+                <a:lumMod val="75000"/>
+                <a:lumOff val="25000"/>
+              </a:schemeClr>
+            </a:solidFill>
+          </a:ln>
+        </p:spPr>
+        <p:style>
+          <a:lnRef idx="2">
+            <a:schemeClr val="accent1">
+              <a:shade val="15000"/>
+            </a:schemeClr>
+          </a:lnRef>
+          <a:fillRef idx="1">
+            <a:schemeClr val="accent1"/>
+          </a:fillRef>
+          <a:effectRef idx="0">
+            <a:schemeClr val="accent1"/>
+          </a:effectRef>
+          <a:fontRef idx="minor">
+            <a:schemeClr val="lt1"/>
+          </a:fontRef>
+        </p:style>
+        <p:txBody>
+          <a:bodyPr rtlCol="0" anchor="ctr"/>
+          <a:lstStyle/>
+          <a:p>
+            <a:pPr algn="ctr"/>
+            <a:endParaRPr kumimoji="1" lang="ja-JP" altLang="en-US">
+              <a:latin typeface="メイリオ" panose="020B0604030504040204" pitchFamily="50" charset="-128"/>
+              <a:ea typeface="メイリオ" panose="020B0604030504040204" pitchFamily="50" charset="-128"/>
+            </a:endParaRPr>
+          </a:p>
+        </p:txBody>
+      </p:sp>
+      <p:sp>
+        <p:nvSpPr>
+          <p:cNvPr id="35" name="正方形/長方形 34">
+            <a:extLst>
+              <a:ext uri="{FF2B5EF4-FFF2-40B4-BE49-F238E27FC236}">
+                <a16:creationId xmlns:a16="http://schemas.microsoft.com/office/drawing/2014/main" id="{A92F9711-434A-A014-4AB2-9CA804AFAE3E}"/>
+              </a:ext>
+            </a:extLst>
+          </p:cNvPr>
+          <p:cNvSpPr/>
+          <p:nvPr/>
+        </p:nvSpPr>
+        <p:spPr>
+          <a:xfrm>
+            <a:off x="7354518" y="4275103"/>
+            <a:ext cx="2329185" cy="340403"/>
+          </a:xfrm>
+          <a:prstGeom prst="rect">
+            <a:avLst/>
+          </a:prstGeom>
+          <a:solidFill>
+            <a:schemeClr val="tx2">
+              <a:lumMod val="75000"/>
+              <a:lumOff val="25000"/>
+            </a:schemeClr>
+          </a:solidFill>
+          <a:ln>
+            <a:solidFill>
+              <a:schemeClr val="tx2">
+                <a:lumMod val="75000"/>
+                <a:lumOff val="25000"/>
+              </a:schemeClr>
+            </a:solidFill>
+          </a:ln>
+        </p:spPr>
+        <p:style>
+          <a:lnRef idx="2">
+            <a:schemeClr val="accent1">
+              <a:shade val="15000"/>
+            </a:schemeClr>
+          </a:lnRef>
+          <a:fillRef idx="1">
+            <a:schemeClr val="accent1"/>
+          </a:fillRef>
+          <a:effectRef idx="0">
+            <a:schemeClr val="accent1"/>
+          </a:effectRef>
+          <a:fontRef idx="minor">
+            <a:schemeClr val="lt1"/>
+          </a:fontRef>
+        </p:style>
+        <p:txBody>
+          <a:bodyPr rtlCol="0" anchor="ctr"/>
+          <a:lstStyle/>
+          <a:p>
+            <a:pPr algn="ctr"/>
+            <a:r>
+              <a:rPr lang="ja-JP" altLang="en-US" sz="1600">
+                <a:latin typeface="メイリオ" panose="020B0604030504040204" pitchFamily="50" charset="-128"/>
+                <a:ea typeface="メイリオ" panose="020B0604030504040204" pitchFamily="50" charset="-128"/>
+              </a:rPr>
+              <a:t>コンテンツ制作</a:t>
+            </a:r>
+            <a:endParaRPr kumimoji="1" lang="ja-JP" altLang="en-US" sz="1600">
+              <a:latin typeface="メイリオ" panose="020B0604030504040204" pitchFamily="50" charset="-128"/>
+              <a:ea typeface="メイリオ" panose="020B0604030504040204" pitchFamily="50" charset="-128"/>
+            </a:endParaRPr>
+          </a:p>
+        </p:txBody>
+      </p:sp>
+      <p:sp>
+        <p:nvSpPr>
+          <p:cNvPr id="36" name="テキスト ボックス 35">
+            <a:extLst>
+              <a:ext uri="{FF2B5EF4-FFF2-40B4-BE49-F238E27FC236}">
+                <a16:creationId xmlns:a16="http://schemas.microsoft.com/office/drawing/2014/main" id="{C3D59A81-3411-F6DE-60F9-CA175C59C7C4}"/>
+              </a:ext>
+            </a:extLst>
+          </p:cNvPr>
+          <p:cNvSpPr txBox="1"/>
+          <p:nvPr/>
+        </p:nvSpPr>
+        <p:spPr>
+          <a:xfrm>
+            <a:off x="7350231" y="4674981"/>
+            <a:ext cx="2329186" cy="1731243"/>
+          </a:xfrm>
+          <a:prstGeom prst="rect">
+            <a:avLst/>
+          </a:prstGeom>
+          <a:noFill/>
+        </p:spPr>
+        <p:txBody>
+          <a:bodyPr wrap="square" rtlCol="0">
+            <a:spAutoFit/>
+          </a:bodyPr>
+          <a:lstStyle/>
+          <a:p>
+            <a:pPr marL="171450" indent="-171450">
+              <a:lnSpc>
+                <a:spcPct val="150000"/>
+              </a:lnSpc>
+              <a:buFont typeface="Arial" panose="020B0604020202020204" pitchFamily="34" charset="0"/>
+              <a:buChar char="•"/>
+            </a:pPr>
+            <a:r>
+              <a:rPr lang="ja-JP" altLang="en-US" sz="1200">
+                <a:latin typeface="メイリオ" panose="020B0604030504040204" pitchFamily="50" charset="-128"/>
+                <a:ea typeface="メイリオ" panose="020B0604030504040204" pitchFamily="50" charset="-128"/>
+              </a:rPr>
+              <a:t>プレゼン資料の構成案＆素材収集</a:t>
+            </a:r>
+            <a:endParaRPr lang="en-US" altLang="ja-JP" sz="1200">
+              <a:latin typeface="メイリオ" panose="020B0604030504040204" pitchFamily="50" charset="-128"/>
+              <a:ea typeface="メイリオ" panose="020B0604030504040204" pitchFamily="50" charset="-128"/>
+            </a:endParaRPr>
+          </a:p>
+          <a:p>
+            <a:pPr marL="171450" indent="-171450">
+              <a:lnSpc>
+                <a:spcPct val="150000"/>
+              </a:lnSpc>
+              <a:buFont typeface="Arial" panose="020B0604020202020204" pitchFamily="34" charset="0"/>
+              <a:buChar char="•"/>
+            </a:pPr>
+            <a:r>
+              <a:rPr lang="ja-JP" altLang="en-US" sz="1200">
+                <a:latin typeface="メイリオ" panose="020B0604030504040204" pitchFamily="50" charset="-128"/>
+                <a:ea typeface="メイリオ" panose="020B0604030504040204" pitchFamily="50" charset="-128"/>
+              </a:rPr>
+              <a:t>動画台本＆ナレーション音声の一括生成</a:t>
+            </a:r>
+            <a:endParaRPr lang="en-US" altLang="ja-JP" sz="1200">
+              <a:latin typeface="メイリオ" panose="020B0604030504040204" pitchFamily="50" charset="-128"/>
+              <a:ea typeface="メイリオ" panose="020B0604030504040204" pitchFamily="50" charset="-128"/>
+            </a:endParaRPr>
+          </a:p>
+          <a:p>
+            <a:pPr marL="171450" indent="-171450">
+              <a:lnSpc>
+                <a:spcPct val="150000"/>
+              </a:lnSpc>
+              <a:buFont typeface="Arial" panose="020B0604020202020204" pitchFamily="34" charset="0"/>
+              <a:buChar char="•"/>
+            </a:pPr>
+            <a:r>
+              <a:rPr lang="ja-JP" altLang="en-US" sz="1200">
+                <a:latin typeface="メイリオ" panose="020B0604030504040204" pitchFamily="50" charset="-128"/>
+                <a:ea typeface="メイリオ" panose="020B0604030504040204" pitchFamily="50" charset="-128"/>
+              </a:rPr>
+              <a:t>多言語コンテンツの並列ローカライズ</a:t>
+            </a:r>
+            <a:endParaRPr kumimoji="1" lang="en-US" altLang="ja-JP" sz="1200">
+              <a:latin typeface="メイリオ" panose="020B0604030504040204" pitchFamily="50" charset="-128"/>
+              <a:ea typeface="メイリオ" panose="020B0604030504040204" pitchFamily="50" charset="-128"/>
+            </a:endParaRPr>
+          </a:p>
+        </p:txBody>
+      </p:sp>
+      <p:sp>
+        <p:nvSpPr>
+          <p:cNvPr id="37" name="正方形/長方形 36">
+            <a:extLst>
+              <a:ext uri="{FF2B5EF4-FFF2-40B4-BE49-F238E27FC236}">
+                <a16:creationId xmlns:a16="http://schemas.microsoft.com/office/drawing/2014/main" id="{7E5D3249-C1C0-E59F-B8FA-5C09CD3B6876}"/>
+              </a:ext>
+            </a:extLst>
+          </p:cNvPr>
+          <p:cNvSpPr/>
+          <p:nvPr/>
+        </p:nvSpPr>
+        <p:spPr>
+          <a:xfrm>
+            <a:off x="7354518" y="4615506"/>
+            <a:ext cx="2329185" cy="2108672"/>
+          </a:xfrm>
+          <a:prstGeom prst="rect">
+            <a:avLst/>
+          </a:prstGeom>
+          <a:noFill/>
+          <a:ln>
+            <a:solidFill>
+              <a:schemeClr val="tx2">
+                <a:lumMod val="75000"/>
+                <a:lumOff val="25000"/>
+              </a:schemeClr>
+            </a:solidFill>
+          </a:ln>
+        </p:spPr>
+        <p:style>
+          <a:lnRef idx="2">
+            <a:schemeClr val="accent1">
+              <a:shade val="15000"/>
+            </a:schemeClr>
+          </a:lnRef>
+          <a:fillRef idx="1">
+            <a:schemeClr val="accent1"/>
+          </a:fillRef>
+          <a:effectRef idx="0">
+            <a:schemeClr val="accent1"/>
+          </a:effectRef>
+          <a:fontRef idx="minor">
+            <a:schemeClr val="lt1"/>
+          </a:fontRef>
+        </p:style>
+        <p:txBody>
+          <a:bodyPr rtlCol="0" anchor="ctr"/>
+          <a:lstStyle/>
+          <a:p>
+            <a:pPr algn="ctr"/>
+            <a:endParaRPr kumimoji="1" lang="ja-JP" altLang="en-US">
+              <a:latin typeface="メイリオ" panose="020B0604030504040204" pitchFamily="50" charset="-128"/>
+              <a:ea typeface="メイリオ" panose="020B0604030504040204" pitchFamily="50" charset="-128"/>
+            </a:endParaRPr>
+          </a:p>
+        </p:txBody>
+      </p:sp>
+      <p:sp>
+        <p:nvSpPr>
+          <p:cNvPr id="38" name="正方形/長方形 37">
+            <a:extLst>
+              <a:ext uri="{FF2B5EF4-FFF2-40B4-BE49-F238E27FC236}">
+                <a16:creationId xmlns:a16="http://schemas.microsoft.com/office/drawing/2014/main" id="{6DCF1029-6A89-FEE3-E360-C2C6040917D6}"/>
+              </a:ext>
+            </a:extLst>
+          </p:cNvPr>
+          <p:cNvSpPr/>
+          <p:nvPr/>
+        </p:nvSpPr>
+        <p:spPr>
+          <a:xfrm>
+            <a:off x="9790259" y="4275103"/>
+            <a:ext cx="2329185" cy="340403"/>
+          </a:xfrm>
+          <a:prstGeom prst="rect">
+            <a:avLst/>
+          </a:prstGeom>
+          <a:solidFill>
+            <a:schemeClr val="tx2">
+              <a:lumMod val="75000"/>
+              <a:lumOff val="25000"/>
+            </a:schemeClr>
+          </a:solidFill>
+          <a:ln>
+            <a:solidFill>
+              <a:schemeClr val="tx2">
+                <a:lumMod val="75000"/>
+                <a:lumOff val="25000"/>
+              </a:schemeClr>
+            </a:solidFill>
+          </a:ln>
+        </p:spPr>
+        <p:style>
+          <a:lnRef idx="2">
+            <a:schemeClr val="accent1">
+              <a:shade val="15000"/>
+            </a:schemeClr>
+          </a:lnRef>
+          <a:fillRef idx="1">
+            <a:schemeClr val="accent1"/>
+          </a:fillRef>
+          <a:effectRef idx="0">
+            <a:schemeClr val="accent1"/>
+          </a:effectRef>
+          <a:fontRef idx="minor">
+            <a:schemeClr val="lt1"/>
+          </a:fontRef>
+        </p:style>
+        <p:txBody>
+          <a:bodyPr rtlCol="0" anchor="ctr"/>
+          <a:lstStyle/>
+          <a:p>
+            <a:pPr algn="ctr"/>
+            <a:r>
+              <a:rPr lang="ja-JP" altLang="en-US" sz="1600">
+                <a:latin typeface="メイリオ" panose="020B0604030504040204" pitchFamily="50" charset="-128"/>
+                <a:ea typeface="メイリオ" panose="020B0604030504040204" pitchFamily="50" charset="-128"/>
+              </a:rPr>
+              <a:t>開発・</a:t>
+            </a:r>
+            <a:r>
+              <a:rPr lang="en-US" altLang="ja-JP" sz="1600">
+                <a:latin typeface="メイリオ" panose="020B0604030504040204" pitchFamily="50" charset="-128"/>
+                <a:ea typeface="メイリオ" panose="020B0604030504040204" pitchFamily="50" charset="-128"/>
+              </a:rPr>
+              <a:t>DevOps</a:t>
+            </a:r>
+            <a:endParaRPr kumimoji="1" lang="ja-JP" altLang="en-US" sz="1600">
+              <a:latin typeface="メイリオ" panose="020B0604030504040204" pitchFamily="50" charset="-128"/>
+              <a:ea typeface="メイリオ" panose="020B0604030504040204" pitchFamily="50" charset="-128"/>
+            </a:endParaRPr>
+          </a:p>
+        </p:txBody>
+      </p:sp>
+      <p:sp>
+        <p:nvSpPr>
+          <p:cNvPr id="39" name="テキスト ボックス 38">
+            <a:extLst>
+              <a:ext uri="{FF2B5EF4-FFF2-40B4-BE49-F238E27FC236}">
+                <a16:creationId xmlns:a16="http://schemas.microsoft.com/office/drawing/2014/main" id="{5702D217-210D-7CF8-EFAD-F9BA76AB2646}"/>
+              </a:ext>
+            </a:extLst>
+          </p:cNvPr>
+          <p:cNvSpPr txBox="1"/>
+          <p:nvPr/>
+        </p:nvSpPr>
+        <p:spPr>
+          <a:xfrm>
+            <a:off x="9785972" y="4674981"/>
+            <a:ext cx="2329186" cy="1731243"/>
+          </a:xfrm>
+          <a:prstGeom prst="rect">
+            <a:avLst/>
+          </a:prstGeom>
+          <a:noFill/>
+        </p:spPr>
+        <p:txBody>
+          <a:bodyPr wrap="square" rtlCol="0">
+            <a:spAutoFit/>
+          </a:bodyPr>
+          <a:lstStyle/>
+          <a:p>
+            <a:pPr marL="171450" indent="-171450">
+              <a:lnSpc>
+                <a:spcPct val="150000"/>
+              </a:lnSpc>
+              <a:buFont typeface="Arial" panose="020B0604020202020204" pitchFamily="34" charset="0"/>
+              <a:buChar char="•"/>
+            </a:pPr>
+            <a:r>
+              <a:rPr lang="ja-JP" altLang="en-US" sz="1200">
+                <a:latin typeface="メイリオ" panose="020B0604030504040204" pitchFamily="50" charset="-128"/>
+                <a:ea typeface="メイリオ" panose="020B0604030504040204" pitchFamily="50" charset="-128"/>
+              </a:rPr>
+              <a:t>ドキュメントの自動更新検知＆</a:t>
+            </a:r>
+            <a:r>
+              <a:rPr lang="en-US" altLang="ja-JP" sz="1200">
+                <a:latin typeface="メイリオ" panose="020B0604030504040204" pitchFamily="50" charset="-128"/>
+                <a:ea typeface="メイリオ" panose="020B0604030504040204" pitchFamily="50" charset="-128"/>
+              </a:rPr>
+              <a:t>Changelog</a:t>
+            </a:r>
+            <a:r>
+              <a:rPr lang="ja-JP" altLang="en-US" sz="1200">
+                <a:latin typeface="メイリオ" panose="020B0604030504040204" pitchFamily="50" charset="-128"/>
+                <a:ea typeface="メイリオ" panose="020B0604030504040204" pitchFamily="50" charset="-128"/>
+              </a:rPr>
+              <a:t>生成</a:t>
+            </a:r>
+            <a:endParaRPr lang="en-US" altLang="ja-JP" sz="1200">
+              <a:latin typeface="メイリオ" panose="020B0604030504040204" pitchFamily="50" charset="-128"/>
+              <a:ea typeface="メイリオ" panose="020B0604030504040204" pitchFamily="50" charset="-128"/>
+            </a:endParaRPr>
+          </a:p>
+          <a:p>
+            <a:pPr marL="171450" indent="-171450">
+              <a:lnSpc>
+                <a:spcPct val="150000"/>
+              </a:lnSpc>
+              <a:buFont typeface="Arial" panose="020B0604020202020204" pitchFamily="34" charset="0"/>
+              <a:buChar char="•"/>
+            </a:pPr>
+            <a:r>
+              <a:rPr lang="ja-JP" altLang="en-US" sz="1200">
+                <a:latin typeface="メイリオ" panose="020B0604030504040204" pitchFamily="50" charset="-128"/>
+                <a:ea typeface="メイリオ" panose="020B0604030504040204" pitchFamily="50" charset="-128"/>
+              </a:rPr>
+              <a:t>技術負債の定期スキャン＆レポート</a:t>
+            </a:r>
+            <a:endParaRPr lang="en-US" altLang="ja-JP" sz="1200">
+              <a:latin typeface="メイリオ" panose="020B0604030504040204" pitchFamily="50" charset="-128"/>
+              <a:ea typeface="メイリオ" panose="020B0604030504040204" pitchFamily="50" charset="-128"/>
+            </a:endParaRPr>
+          </a:p>
+          <a:p>
+            <a:pPr marL="171450" indent="-171450">
+              <a:lnSpc>
+                <a:spcPct val="150000"/>
+              </a:lnSpc>
+              <a:buFont typeface="Arial" panose="020B0604020202020204" pitchFamily="34" charset="0"/>
+              <a:buChar char="•"/>
+            </a:pPr>
+            <a:r>
+              <a:rPr lang="ja-JP" altLang="en-US" sz="1200">
+                <a:latin typeface="メイリオ" panose="020B0604030504040204" pitchFamily="50" charset="-128"/>
+                <a:ea typeface="メイリオ" panose="020B0604030504040204" pitchFamily="50" charset="-128"/>
+              </a:rPr>
+              <a:t>本番デプロイ後のスモークテスト</a:t>
+            </a:r>
+            <a:endParaRPr kumimoji="1" lang="en-US" altLang="ja-JP" sz="1200">
+              <a:latin typeface="メイリオ" panose="020B0604030504040204" pitchFamily="50" charset="-128"/>
+              <a:ea typeface="メイリオ" panose="020B0604030504040204" pitchFamily="50" charset="-128"/>
+            </a:endParaRPr>
+          </a:p>
+        </p:txBody>
+      </p:sp>
+      <p:sp>
+        <p:nvSpPr>
+          <p:cNvPr id="40" name="正方形/長方形 39">
+            <a:extLst>
+              <a:ext uri="{FF2B5EF4-FFF2-40B4-BE49-F238E27FC236}">
+                <a16:creationId xmlns:a16="http://schemas.microsoft.com/office/drawing/2014/main" id="{64BB39ED-4766-0227-9D25-8E4003FC521D}"/>
+              </a:ext>
+            </a:extLst>
+          </p:cNvPr>
+          <p:cNvSpPr/>
+          <p:nvPr/>
+        </p:nvSpPr>
+        <p:spPr>
+          <a:xfrm>
+            <a:off x="9790259" y="4615506"/>
+            <a:ext cx="2329185" cy="2108672"/>
+          </a:xfrm>
+          <a:prstGeom prst="rect">
+            <a:avLst/>
+          </a:prstGeom>
+          <a:noFill/>
+          <a:ln>
+            <a:solidFill>
+              <a:schemeClr val="tx2">
+                <a:lumMod val="75000"/>
+                <a:lumOff val="25000"/>
+              </a:schemeClr>
+            </a:solidFill>
+          </a:ln>
+        </p:spPr>
+        <p:style>
+          <a:lnRef idx="2">
+            <a:schemeClr val="accent1">
+              <a:shade val="15000"/>
+            </a:schemeClr>
+          </a:lnRef>
+          <a:fillRef idx="1">
+            <a:schemeClr val="accent1"/>
+          </a:fillRef>
+          <a:effectRef idx="0">
+            <a:schemeClr val="accent1"/>
+          </a:effectRef>
+          <a:fontRef idx="minor">
+            <a:schemeClr val="lt1"/>
+          </a:fontRef>
+        </p:style>
+        <p:txBody>
+          <a:bodyPr rtlCol="0" anchor="ctr"/>
+          <a:lstStyle/>
+          <a:p>
+            <a:pPr algn="ctr"/>
+            <a:endParaRPr kumimoji="1" lang="ja-JP" altLang="en-US">
+              <a:latin typeface="メイリオ" panose="020B0604030504040204" pitchFamily="50" charset="-128"/>
+              <a:ea typeface="メイリオ" panose="020B0604030504040204" pitchFamily="50" charset="-128"/>
+            </a:endParaRPr>
+          </a:p>
+        </p:txBody>
+      </p:sp>
+    </p:spTree>
+    <p:extLst>
+      <p:ext uri="{BB962C8B-B14F-4D97-AF65-F5344CB8AC3E}">
+        <p14:creationId xmlns:p14="http://schemas.microsoft.com/office/powerpoint/2010/main" val="2858564753"/>
+      </p:ext>
+    </p:extLst>
+  </p:cSld>
+  <p:clrMapOvr>
+    <a:masterClrMapping/>
+  </p:clrMapOvr>
+</p:sld>
+</file>
+
+<file path=ppt/slides/slide11.xml><?xml version="1.0" encoding="utf-8"?>
+<p:sld xmlns:a="http://schemas.openxmlformats.org/drawingml/2006/main" xmlns:r="http://schemas.openxmlformats.org/officeDocument/2006/relationships" xmlns:p="http://schemas.openxmlformats.org/presentationml/2006/main">
+  <p:cSld>
+    <p:spTree>
+      <p:nvGrpSpPr>
+        <p:cNvPr id="1" name="">
+          <a:extLst>
+            <a:ext uri="{FF2B5EF4-FFF2-40B4-BE49-F238E27FC236}">
+              <a16:creationId xmlns:a16="http://schemas.microsoft.com/office/drawing/2014/main" id="{E28E6E3F-598C-75F5-2523-9F1193EC9337}"/>
+            </a:ext>
+          </a:extLst>
+        </p:cNvPr>
+        <p:cNvGrpSpPr/>
+        <p:nvPr/>
+      </p:nvGrpSpPr>
+      <p:grpSpPr>
+        <a:xfrm>
+          <a:off x="0" y="0"/>
+          <a:ext cx="0" cy="0"/>
+          <a:chOff x="0" y="0"/>
+          <a:chExt cx="0" cy="0"/>
+        </a:xfrm>
+      </p:grpSpPr>
+      <p:sp>
+        <p:nvSpPr>
+          <p:cNvPr id="4" name="テキスト ボックス 3">
+            <a:extLst>
+              <a:ext uri="{FF2B5EF4-FFF2-40B4-BE49-F238E27FC236}">
+                <a16:creationId xmlns:a16="http://schemas.microsoft.com/office/drawing/2014/main" id="{A5C389BD-5F73-D4E0-FA57-3E5811BBDAEA}"/>
+              </a:ext>
+            </a:extLst>
+          </p:cNvPr>
+          <p:cNvSpPr txBox="1"/>
+          <p:nvPr/>
+        </p:nvSpPr>
+        <p:spPr>
+          <a:xfrm>
+            <a:off x="443466" y="317212"/>
+            <a:ext cx="11215133" cy="584775"/>
+          </a:xfrm>
+          <a:prstGeom prst="rect">
+            <a:avLst/>
+          </a:prstGeom>
+          <a:noFill/>
+        </p:spPr>
+        <p:txBody>
+          <a:bodyPr wrap="square" rtlCol="0">
+            <a:spAutoFit/>
+          </a:bodyPr>
+          <a:lstStyle/>
+          <a:p>
+            <a:r>
+              <a:rPr lang="en-US" altLang="ja-JP" sz="3200" b="1">
+                <a:latin typeface="メイリオ" panose="020B0604030504040204" pitchFamily="50" charset="-128"/>
+                <a:ea typeface="メイリオ" panose="020B0604030504040204" pitchFamily="50" charset="-128"/>
+              </a:rPr>
+              <a:t>5.</a:t>
+            </a:r>
+            <a:r>
+              <a:rPr lang="ja-JP" altLang="en-US" sz="3200" b="1">
+                <a:latin typeface="メイリオ" panose="020B0604030504040204" pitchFamily="50" charset="-128"/>
+                <a:ea typeface="メイリオ" panose="020B0604030504040204" pitchFamily="50" charset="-128"/>
+              </a:rPr>
+              <a:t>自律型</a:t>
+            </a:r>
+            <a:r>
+              <a:rPr lang="en-US" altLang="ja-JP" sz="3200" b="1">
+                <a:latin typeface="メイリオ" panose="020B0604030504040204" pitchFamily="50" charset="-128"/>
+                <a:ea typeface="メイリオ" panose="020B0604030504040204" pitchFamily="50" charset="-128"/>
+              </a:rPr>
+              <a:t>AI</a:t>
+            </a:r>
+            <a:r>
+              <a:rPr lang="ja-JP" altLang="en-US" sz="3200" b="1">
+                <a:latin typeface="メイリオ" panose="020B0604030504040204" pitchFamily="50" charset="-128"/>
+                <a:ea typeface="メイリオ" panose="020B0604030504040204" pitchFamily="50" charset="-128"/>
+              </a:rPr>
+              <a:t>は“判断する仕事”に手が届き始めた</a:t>
+            </a:r>
+            <a:endParaRPr kumimoji="1" lang="ja-JP" altLang="en-US" sz="3200" b="1">
+              <a:latin typeface="メイリオ" panose="020B0604030504040204" pitchFamily="50" charset="-128"/>
+              <a:ea typeface="メイリオ" panose="020B0604030504040204" pitchFamily="50" charset="-128"/>
+            </a:endParaRPr>
+          </a:p>
+        </p:txBody>
+      </p:sp>
+      <p:sp>
+        <p:nvSpPr>
+          <p:cNvPr id="2" name="正方形/長方形 1">
+            <a:extLst>
+              <a:ext uri="{FF2B5EF4-FFF2-40B4-BE49-F238E27FC236}">
+                <a16:creationId xmlns:a16="http://schemas.microsoft.com/office/drawing/2014/main" id="{34DD1D90-9A33-F73B-BE63-E3C5C23C7D96}"/>
+              </a:ext>
+            </a:extLst>
+          </p:cNvPr>
+          <p:cNvSpPr/>
+          <p:nvPr/>
+        </p:nvSpPr>
+        <p:spPr>
+          <a:xfrm>
+            <a:off x="348874" y="1158125"/>
+            <a:ext cx="3676589" cy="340403"/>
+          </a:xfrm>
+          <a:prstGeom prst="rect">
+            <a:avLst/>
+          </a:prstGeom>
+          <a:solidFill>
+            <a:schemeClr val="tx2">
+              <a:lumMod val="75000"/>
+              <a:lumOff val="25000"/>
+            </a:schemeClr>
+          </a:solidFill>
+          <a:ln>
+            <a:solidFill>
+              <a:schemeClr val="tx2">
+                <a:lumMod val="75000"/>
+                <a:lumOff val="25000"/>
+              </a:schemeClr>
+            </a:solidFill>
+          </a:ln>
+        </p:spPr>
+        <p:style>
+          <a:lnRef idx="2">
+            <a:schemeClr val="accent1">
+              <a:shade val="15000"/>
+            </a:schemeClr>
+          </a:lnRef>
+          <a:fillRef idx="1">
+            <a:schemeClr val="accent1"/>
+          </a:fillRef>
+          <a:effectRef idx="0">
+            <a:schemeClr val="accent1"/>
+          </a:effectRef>
+          <a:fontRef idx="minor">
+            <a:schemeClr val="lt1"/>
+          </a:fontRef>
+        </p:style>
+        <p:txBody>
+          <a:bodyPr rtlCol="0" anchor="ctr"/>
+          <a:lstStyle/>
+          <a:p>
+            <a:pPr algn="ctr">
+              <a:defRPr sz="1500" b="1">
+                <a:solidFill>
+                  <a:srgbClr val="FFFFFF"/>
+                </a:solidFill>
+                <a:latin typeface="メイリオ"/>
+              </a:defRPr>
+            </a:pPr>
+            <a:r>
+              <a:rPr lang="en-US" altLang="ja-JP" sz="1600">
+                <a:latin typeface="メイリオ" panose="020B0604030504040204" pitchFamily="50" charset="-128"/>
+                <a:ea typeface="メイリオ" panose="020B0604030504040204" pitchFamily="50" charset="-128"/>
+              </a:rPr>
+              <a:t>RPA</a:t>
+            </a:r>
+            <a:r>
+              <a:rPr lang="ja-JP" altLang="en-US" sz="1600">
+                <a:latin typeface="メイリオ" panose="020B0604030504040204" pitchFamily="50" charset="-128"/>
+                <a:ea typeface="メイリオ" panose="020B0604030504040204" pitchFamily="50" charset="-128"/>
+              </a:rPr>
+              <a:t>の限界</a:t>
+            </a:r>
+          </a:p>
+        </p:txBody>
+      </p:sp>
+      <p:sp>
+        <p:nvSpPr>
+          <p:cNvPr id="3" name="正方形/長方形 2">
+            <a:extLst>
+              <a:ext uri="{FF2B5EF4-FFF2-40B4-BE49-F238E27FC236}">
+                <a16:creationId xmlns:a16="http://schemas.microsoft.com/office/drawing/2014/main" id="{58575368-F400-B2ED-14CC-672789E3E594}"/>
+              </a:ext>
+            </a:extLst>
+          </p:cNvPr>
+          <p:cNvSpPr/>
+          <p:nvPr/>
+        </p:nvSpPr>
+        <p:spPr>
+          <a:xfrm>
+            <a:off x="348874" y="1498528"/>
+            <a:ext cx="3676589" cy="5042260"/>
+          </a:xfrm>
+          <a:prstGeom prst="rect">
+            <a:avLst/>
+          </a:prstGeom>
+          <a:noFill/>
+          <a:ln>
+            <a:solidFill>
+              <a:schemeClr val="tx2">
+                <a:lumMod val="75000"/>
+                <a:lumOff val="25000"/>
+              </a:schemeClr>
+            </a:solidFill>
+          </a:ln>
+        </p:spPr>
+        <p:style>
+          <a:lnRef idx="2">
+            <a:schemeClr val="accent1">
+              <a:shade val="15000"/>
+            </a:schemeClr>
+          </a:lnRef>
+          <a:fillRef idx="1">
+            <a:schemeClr val="accent1"/>
+          </a:fillRef>
+          <a:effectRef idx="0">
+            <a:schemeClr val="accent1"/>
+          </a:effectRef>
+          <a:fontRef idx="minor">
+            <a:schemeClr val="lt1"/>
+          </a:fontRef>
+        </p:style>
+        <p:txBody>
+          <a:bodyPr rtlCol="0" anchor="ctr"/>
+          <a:lstStyle/>
+          <a:p>
+            <a:pPr algn="ctr"/>
+            <a:endParaRPr kumimoji="1" lang="ja-JP" altLang="en-US">
+              <a:latin typeface="メイリオ" panose="020B0604030504040204" pitchFamily="50" charset="-128"/>
+              <a:ea typeface="メイリオ" panose="020B0604030504040204" pitchFamily="50" charset="-128"/>
+            </a:endParaRPr>
+          </a:p>
+        </p:txBody>
+      </p:sp>
+      <p:sp>
+        <p:nvSpPr>
+          <p:cNvPr id="5" name="正方形/長方形 4">
+            <a:extLst>
+              <a:ext uri="{FF2B5EF4-FFF2-40B4-BE49-F238E27FC236}">
+                <a16:creationId xmlns:a16="http://schemas.microsoft.com/office/drawing/2014/main" id="{CE86F425-1DEB-9C64-7041-95F96CA19F2B}"/>
+              </a:ext>
+            </a:extLst>
+          </p:cNvPr>
+          <p:cNvSpPr/>
+          <p:nvPr/>
+        </p:nvSpPr>
+        <p:spPr>
+          <a:xfrm>
+            <a:off x="4257706" y="1158125"/>
+            <a:ext cx="3676589" cy="340403"/>
+          </a:xfrm>
+          <a:prstGeom prst="rect">
+            <a:avLst/>
+          </a:prstGeom>
+          <a:solidFill>
+            <a:schemeClr val="tx2">
+              <a:lumMod val="75000"/>
+              <a:lumOff val="25000"/>
+            </a:schemeClr>
+          </a:solidFill>
+          <a:ln>
+            <a:solidFill>
+              <a:schemeClr val="tx2">
+                <a:lumMod val="75000"/>
+                <a:lumOff val="25000"/>
+              </a:schemeClr>
+            </a:solidFill>
+          </a:ln>
+        </p:spPr>
+        <p:style>
+          <a:lnRef idx="2">
+            <a:schemeClr val="accent1">
+              <a:shade val="15000"/>
+            </a:schemeClr>
+          </a:lnRef>
+          <a:fillRef idx="1">
+            <a:schemeClr val="accent1"/>
+          </a:fillRef>
+          <a:effectRef idx="0">
+            <a:schemeClr val="accent1"/>
+          </a:effectRef>
+          <a:fontRef idx="minor">
+            <a:schemeClr val="lt1"/>
+          </a:fontRef>
+        </p:style>
+        <p:txBody>
+          <a:bodyPr rtlCol="0" anchor="ctr"/>
+          <a:lstStyle/>
+          <a:p>
+            <a:pPr algn="ctr">
+              <a:defRPr sz="1500" b="1">
+                <a:solidFill>
+                  <a:srgbClr val="FFFFFF"/>
+                </a:solidFill>
+                <a:latin typeface="メイリオ"/>
+              </a:defRPr>
+            </a:pPr>
+            <a:r>
+              <a:rPr lang="en-US" altLang="ja-JP" sz="1600">
+                <a:latin typeface="メイリオ" panose="020B0604030504040204" pitchFamily="50" charset="-128"/>
+                <a:ea typeface="メイリオ" panose="020B0604030504040204" pitchFamily="50" charset="-128"/>
+              </a:rPr>
+              <a:t>OpenClaw</a:t>
+            </a:r>
+            <a:r>
+              <a:rPr lang="ja-JP" altLang="en-US" sz="1600">
+                <a:latin typeface="メイリオ" panose="020B0604030504040204" pitchFamily="50" charset="-128"/>
+                <a:ea typeface="メイリオ" panose="020B0604030504040204" pitchFamily="50" charset="-128"/>
+              </a:rPr>
+              <a:t>が実証した</a:t>
+            </a:r>
+            <a:r>
+              <a:rPr lang="en-US" altLang="ja-JP" sz="1600">
+                <a:latin typeface="メイリオ" panose="020B0604030504040204" pitchFamily="50" charset="-128"/>
+                <a:ea typeface="メイリオ" panose="020B0604030504040204" pitchFamily="50" charset="-128"/>
+              </a:rPr>
+              <a:t>3</a:t>
+            </a:r>
+            <a:r>
+              <a:rPr lang="ja-JP" altLang="en-US" sz="1600">
+                <a:latin typeface="メイリオ" panose="020B0604030504040204" pitchFamily="50" charset="-128"/>
+                <a:ea typeface="メイリオ" panose="020B0604030504040204" pitchFamily="50" charset="-128"/>
+              </a:rPr>
+              <a:t>つの能力</a:t>
+            </a:r>
+          </a:p>
+        </p:txBody>
+      </p:sp>
+      <p:sp>
+        <p:nvSpPr>
+          <p:cNvPr id="6" name="正方形/長方形 5">
+            <a:extLst>
+              <a:ext uri="{FF2B5EF4-FFF2-40B4-BE49-F238E27FC236}">
+                <a16:creationId xmlns:a16="http://schemas.microsoft.com/office/drawing/2014/main" id="{444833CD-CA95-0742-8C06-9815B57A5C17}"/>
+              </a:ext>
+            </a:extLst>
+          </p:cNvPr>
+          <p:cNvSpPr/>
+          <p:nvPr/>
+        </p:nvSpPr>
+        <p:spPr>
+          <a:xfrm>
+            <a:off x="4257706" y="1498528"/>
+            <a:ext cx="3676589" cy="5042260"/>
+          </a:xfrm>
+          <a:prstGeom prst="rect">
+            <a:avLst/>
+          </a:prstGeom>
+          <a:noFill/>
+          <a:ln>
+            <a:solidFill>
+              <a:schemeClr val="tx2">
+                <a:lumMod val="75000"/>
+                <a:lumOff val="25000"/>
+              </a:schemeClr>
+            </a:solidFill>
+          </a:ln>
+        </p:spPr>
+        <p:style>
+          <a:lnRef idx="2">
+            <a:schemeClr val="accent1">
+              <a:shade val="15000"/>
+            </a:schemeClr>
+          </a:lnRef>
+          <a:fillRef idx="1">
+            <a:schemeClr val="accent1"/>
+          </a:fillRef>
+          <a:effectRef idx="0">
+            <a:schemeClr val="accent1"/>
+          </a:effectRef>
+          <a:fontRef idx="minor">
+            <a:schemeClr val="lt1"/>
+          </a:fontRef>
+        </p:style>
+        <p:txBody>
+          <a:bodyPr rtlCol="0" anchor="ctr"/>
+          <a:lstStyle/>
+          <a:p>
+            <a:pPr algn="ctr"/>
+            <a:endParaRPr kumimoji="1" lang="ja-JP" altLang="en-US">
+              <a:latin typeface="メイリオ" panose="020B0604030504040204" pitchFamily="50" charset="-128"/>
+              <a:ea typeface="メイリオ" panose="020B0604030504040204" pitchFamily="50" charset="-128"/>
+            </a:endParaRPr>
+          </a:p>
+        </p:txBody>
+      </p:sp>
+      <p:sp>
+        <p:nvSpPr>
+          <p:cNvPr id="7" name="正方形/長方形 6">
+            <a:extLst>
+              <a:ext uri="{FF2B5EF4-FFF2-40B4-BE49-F238E27FC236}">
+                <a16:creationId xmlns:a16="http://schemas.microsoft.com/office/drawing/2014/main" id="{9983DDAB-1F22-E433-7F6A-5DB6A682F2E8}"/>
+              </a:ext>
+            </a:extLst>
+          </p:cNvPr>
+          <p:cNvSpPr/>
+          <p:nvPr/>
+        </p:nvSpPr>
+        <p:spPr>
+          <a:xfrm>
+            <a:off x="8166538" y="1158125"/>
+            <a:ext cx="3676589" cy="340403"/>
+          </a:xfrm>
+          <a:prstGeom prst="rect">
+            <a:avLst/>
+          </a:prstGeom>
+          <a:solidFill>
+            <a:schemeClr val="tx2">
+              <a:lumMod val="75000"/>
+              <a:lumOff val="25000"/>
+            </a:schemeClr>
+          </a:solidFill>
+          <a:ln>
+            <a:solidFill>
+              <a:schemeClr val="tx2">
+                <a:lumMod val="75000"/>
+                <a:lumOff val="25000"/>
+              </a:schemeClr>
+            </a:solidFill>
+          </a:ln>
+        </p:spPr>
+        <p:style>
+          <a:lnRef idx="2">
+            <a:schemeClr val="accent1">
+              <a:shade val="15000"/>
+            </a:schemeClr>
+          </a:lnRef>
+          <a:fillRef idx="1">
+            <a:schemeClr val="accent1"/>
+          </a:fillRef>
+          <a:effectRef idx="0">
+            <a:schemeClr val="accent1"/>
+          </a:effectRef>
+          <a:fontRef idx="minor">
+            <a:schemeClr val="lt1"/>
+          </a:fontRef>
+        </p:style>
+        <p:txBody>
+          <a:bodyPr rtlCol="0" anchor="ctr"/>
+          <a:lstStyle/>
+          <a:p>
+            <a:pPr algn="ctr">
+              <a:defRPr sz="1500" b="1">
+                <a:solidFill>
+                  <a:srgbClr val="FFFFFF"/>
+                </a:solidFill>
+                <a:latin typeface="メイリオ"/>
+              </a:defRPr>
+            </a:pPr>
+            <a:r>
+              <a:rPr lang="ja-JP" altLang="en-US" sz="1600">
+                <a:latin typeface="メイリオ" panose="020B0604030504040204" pitchFamily="50" charset="-128"/>
+                <a:ea typeface="メイリオ" panose="020B0604030504040204" pitchFamily="50" charset="-128"/>
+              </a:rPr>
+              <a:t>生成</a:t>
+            </a:r>
+            <a:r>
+              <a:rPr lang="en-US" altLang="ja-JP" sz="1600">
+                <a:latin typeface="メイリオ" panose="020B0604030504040204" pitchFamily="50" charset="-128"/>
+                <a:ea typeface="メイリオ" panose="020B0604030504040204" pitchFamily="50" charset="-128"/>
+              </a:rPr>
+              <a:t>AI</a:t>
+            </a:r>
+            <a:r>
+              <a:rPr lang="ja-JP" altLang="en-US" sz="1600">
+                <a:latin typeface="メイリオ" panose="020B0604030504040204" pitchFamily="50" charset="-128"/>
+                <a:ea typeface="メイリオ" panose="020B0604030504040204" pitchFamily="50" charset="-128"/>
+              </a:rPr>
+              <a:t>業界動向</a:t>
+            </a:r>
+          </a:p>
+        </p:txBody>
+      </p:sp>
+      <p:sp>
+        <p:nvSpPr>
+          <p:cNvPr id="8" name="正方形/長方形 7">
+            <a:extLst>
+              <a:ext uri="{FF2B5EF4-FFF2-40B4-BE49-F238E27FC236}">
+                <a16:creationId xmlns:a16="http://schemas.microsoft.com/office/drawing/2014/main" id="{7E4723E6-DC74-8008-1BA0-DF092296ED96}"/>
+              </a:ext>
+            </a:extLst>
+          </p:cNvPr>
+          <p:cNvSpPr/>
+          <p:nvPr/>
+        </p:nvSpPr>
+        <p:spPr>
+          <a:xfrm>
+            <a:off x="8166538" y="1498528"/>
+            <a:ext cx="3676589" cy="5042260"/>
+          </a:xfrm>
+          <a:prstGeom prst="rect">
+            <a:avLst/>
+          </a:prstGeom>
+          <a:noFill/>
+          <a:ln>
+            <a:solidFill>
+              <a:schemeClr val="tx2">
+                <a:lumMod val="75000"/>
+                <a:lumOff val="25000"/>
+              </a:schemeClr>
+            </a:solidFill>
+          </a:ln>
+        </p:spPr>
+        <p:style>
+          <a:lnRef idx="2">
+            <a:schemeClr val="accent1">
+              <a:shade val="15000"/>
+            </a:schemeClr>
+          </a:lnRef>
+          <a:fillRef idx="1">
+            <a:schemeClr val="accent1"/>
+          </a:fillRef>
+          <a:effectRef idx="0">
+            <a:schemeClr val="accent1"/>
+          </a:effectRef>
+          <a:fontRef idx="minor">
+            <a:schemeClr val="lt1"/>
+          </a:fontRef>
+        </p:style>
+        <p:txBody>
+          <a:bodyPr rtlCol="0" anchor="ctr"/>
+          <a:lstStyle/>
+          <a:p>
+            <a:pPr algn="ctr"/>
+            <a:endParaRPr kumimoji="1" lang="ja-JP" altLang="en-US">
+              <a:latin typeface="メイリオ" panose="020B0604030504040204" pitchFamily="50" charset="-128"/>
+              <a:ea typeface="メイリオ" panose="020B0604030504040204" pitchFamily="50" charset="-128"/>
+            </a:endParaRPr>
+          </a:p>
+        </p:txBody>
+      </p:sp>
+      <p:sp>
+        <p:nvSpPr>
+          <p:cNvPr id="11" name="テキスト ボックス 10">
+            <a:extLst>
+              <a:ext uri="{FF2B5EF4-FFF2-40B4-BE49-F238E27FC236}">
+                <a16:creationId xmlns:a16="http://schemas.microsoft.com/office/drawing/2014/main" id="{ED264FAC-B693-8C9D-4932-45F6AB0DDDF8}"/>
+              </a:ext>
+            </a:extLst>
+          </p:cNvPr>
+          <p:cNvSpPr txBox="1"/>
+          <p:nvPr/>
+        </p:nvSpPr>
+        <p:spPr>
+          <a:xfrm>
+            <a:off x="348875" y="1657564"/>
+            <a:ext cx="3676588" cy="1404231"/>
+          </a:xfrm>
+          <a:prstGeom prst="rect">
+            <a:avLst/>
+          </a:prstGeom>
+          <a:noFill/>
+        </p:spPr>
+        <p:txBody>
+          <a:bodyPr wrap="square" rtlCol="0">
+            <a:spAutoFit/>
+          </a:bodyPr>
+          <a:lstStyle/>
+          <a:p>
+            <a:pPr>
+              <a:lnSpc>
+                <a:spcPct val="150000"/>
+              </a:lnSpc>
+            </a:pPr>
+            <a:r>
+              <a:rPr lang="en-US" altLang="ja-JP" sz="1600" b="1">
+                <a:latin typeface="メイリオ" panose="020B0604030504040204" pitchFamily="50" charset="-128"/>
+                <a:ea typeface="メイリオ" panose="020B0604030504040204" pitchFamily="50" charset="-128"/>
+              </a:rPr>
+              <a:t>RPA</a:t>
+            </a:r>
+            <a:r>
+              <a:rPr lang="ja-JP" altLang="en-US" sz="1600" b="1">
+                <a:latin typeface="メイリオ" panose="020B0604030504040204" pitchFamily="50" charset="-128"/>
+                <a:ea typeface="メイリオ" panose="020B0604030504040204" pitchFamily="50" charset="-128"/>
+              </a:rPr>
+              <a:t>が置き換えたもの</a:t>
+            </a:r>
+          </a:p>
+          <a:p>
+            <a:pPr>
+              <a:lnSpc>
+                <a:spcPct val="150000"/>
+              </a:lnSpc>
+            </a:pPr>
+            <a:r>
+              <a:rPr lang="ja-JP" altLang="en-US" sz="1400">
+                <a:latin typeface="メイリオ" panose="020B0604030504040204" pitchFamily="50" charset="-128"/>
+                <a:ea typeface="メイリオ" panose="020B0604030504040204" pitchFamily="50" charset="-128"/>
+              </a:rPr>
+              <a:t>・簡単データ入力</a:t>
+            </a:r>
+          </a:p>
+          <a:p>
+            <a:pPr>
+              <a:lnSpc>
+                <a:spcPct val="150000"/>
+              </a:lnSpc>
+            </a:pPr>
+            <a:r>
+              <a:rPr lang="ja-JP" altLang="en-US" sz="1400">
+                <a:latin typeface="メイリオ" panose="020B0604030504040204" pitchFamily="50" charset="-128"/>
+                <a:ea typeface="メイリオ" panose="020B0604030504040204" pitchFamily="50" charset="-128"/>
+              </a:rPr>
+              <a:t>・アプリケーション操作</a:t>
+            </a:r>
+          </a:p>
+          <a:p>
+            <a:pPr>
+              <a:lnSpc>
+                <a:spcPct val="150000"/>
+              </a:lnSpc>
+            </a:pPr>
+            <a:r>
+              <a:rPr lang="ja-JP" altLang="en-US" sz="1400">
+                <a:latin typeface="メイリオ" panose="020B0604030504040204" pitchFamily="50" charset="-128"/>
+                <a:ea typeface="メイリオ" panose="020B0604030504040204" pitchFamily="50" charset="-128"/>
+              </a:rPr>
+              <a:t>→ 手順が決まった定型作業</a:t>
+            </a:r>
+            <a:endParaRPr lang="ja-JP" altLang="en-US" sz="1200">
+              <a:latin typeface="メイリオ" panose="020B0604030504040204" pitchFamily="50" charset="-128"/>
+              <a:ea typeface="メイリオ" panose="020B0604030504040204" pitchFamily="50" charset="-128"/>
+            </a:endParaRPr>
+          </a:p>
+        </p:txBody>
+      </p:sp>
+      <p:sp>
+        <p:nvSpPr>
+          <p:cNvPr id="12" name="テキスト ボックス 11">
+            <a:extLst>
+              <a:ext uri="{FF2B5EF4-FFF2-40B4-BE49-F238E27FC236}">
+                <a16:creationId xmlns:a16="http://schemas.microsoft.com/office/drawing/2014/main" id="{BF585F9C-22B5-66FB-6D53-61A89034EFC4}"/>
+              </a:ext>
+            </a:extLst>
+          </p:cNvPr>
+          <p:cNvSpPr txBox="1"/>
+          <p:nvPr/>
+        </p:nvSpPr>
+        <p:spPr>
+          <a:xfrm>
+            <a:off x="348874" y="3679712"/>
+            <a:ext cx="3676589" cy="1081065"/>
+          </a:xfrm>
+          <a:prstGeom prst="rect">
+            <a:avLst/>
+          </a:prstGeom>
+          <a:noFill/>
+        </p:spPr>
+        <p:txBody>
+          <a:bodyPr wrap="square" rtlCol="0">
+            <a:spAutoFit/>
+          </a:bodyPr>
+          <a:lstStyle/>
+          <a:p>
+            <a:pPr>
+              <a:lnSpc>
+                <a:spcPct val="150000"/>
+              </a:lnSpc>
+            </a:pPr>
+            <a:r>
+              <a:rPr lang="ja-JP" altLang="en-US" sz="1600" b="1">
+                <a:latin typeface="メイリオ" panose="020B0604030504040204" pitchFamily="50" charset="-128"/>
+                <a:ea typeface="メイリオ" panose="020B0604030504040204" pitchFamily="50" charset="-128"/>
+              </a:rPr>
+              <a:t>自律型エージェントが置き換えるもの</a:t>
+            </a:r>
+          </a:p>
+          <a:p>
+            <a:pPr>
+              <a:lnSpc>
+                <a:spcPct val="150000"/>
+              </a:lnSpc>
+            </a:pPr>
+            <a:r>
+              <a:rPr lang="ja-JP" altLang="en-US" sz="1400">
+                <a:latin typeface="メイリオ" panose="020B0604030504040204" pitchFamily="50" charset="-128"/>
+                <a:ea typeface="メイリオ" panose="020B0604030504040204" pitchFamily="50" charset="-128"/>
+              </a:rPr>
+              <a:t>・状況を見て判断し、次のアクションを選ぶ業務</a:t>
+            </a:r>
+          </a:p>
+        </p:txBody>
+      </p:sp>
+      <p:sp>
+        <p:nvSpPr>
+          <p:cNvPr id="13" name="テキスト ボックス 12">
+            <a:extLst>
+              <a:ext uri="{FF2B5EF4-FFF2-40B4-BE49-F238E27FC236}">
+                <a16:creationId xmlns:a16="http://schemas.microsoft.com/office/drawing/2014/main" id="{D47899A0-50EA-0F9B-C3FE-D6D93B6A5F67}"/>
+              </a:ext>
+            </a:extLst>
+          </p:cNvPr>
+          <p:cNvSpPr txBox="1"/>
+          <p:nvPr/>
+        </p:nvSpPr>
+        <p:spPr>
+          <a:xfrm>
+            <a:off x="348873" y="5034115"/>
+            <a:ext cx="3676588" cy="757900"/>
+          </a:xfrm>
+          <a:prstGeom prst="rect">
+            <a:avLst/>
+          </a:prstGeom>
+          <a:noFill/>
+        </p:spPr>
+        <p:txBody>
+          <a:bodyPr wrap="square" rtlCol="0">
+            <a:spAutoFit/>
+          </a:bodyPr>
+          <a:lstStyle/>
+          <a:p>
+            <a:pPr>
+              <a:lnSpc>
+                <a:spcPct val="150000"/>
+              </a:lnSpc>
+            </a:pPr>
+            <a:r>
+              <a:rPr lang="ja-JP" altLang="en-US" sz="1600" b="1">
+                <a:latin typeface="メイリオ" panose="020B0604030504040204" pitchFamily="50" charset="-128"/>
+                <a:ea typeface="メイリオ" panose="020B0604030504040204" pitchFamily="50" charset="-128"/>
+              </a:rPr>
+              <a:t>ポイント：</a:t>
+            </a:r>
+          </a:p>
+          <a:p>
+            <a:pPr>
+              <a:lnSpc>
+                <a:spcPct val="150000"/>
+              </a:lnSpc>
+            </a:pPr>
+            <a:r>
+              <a:rPr lang="ja-JP" altLang="en-US" sz="1400">
+                <a:latin typeface="メイリオ" panose="020B0604030504040204" pitchFamily="50" charset="-128"/>
+                <a:ea typeface="メイリオ" panose="020B0604030504040204" pitchFamily="50" charset="-128"/>
+              </a:rPr>
+              <a:t>自律性がある＝ </a:t>
+            </a:r>
+            <a:r>
+              <a:rPr lang="en-US" altLang="ja-JP" sz="1400" b="1">
+                <a:solidFill>
+                  <a:schemeClr val="accent2">
+                    <a:lumMod val="75000"/>
+                  </a:schemeClr>
+                </a:solidFill>
+                <a:latin typeface="メイリオ" panose="020B0604030504040204" pitchFamily="50" charset="-128"/>
+                <a:ea typeface="メイリオ" panose="020B0604030504040204" pitchFamily="50" charset="-128"/>
+              </a:rPr>
+              <a:t>"</a:t>
+            </a:r>
+            <a:r>
+              <a:rPr lang="ja-JP" altLang="en-US" sz="1400" b="1">
+                <a:solidFill>
+                  <a:schemeClr val="accent2">
+                    <a:lumMod val="75000"/>
+                  </a:schemeClr>
+                </a:solidFill>
+                <a:latin typeface="メイリオ" panose="020B0604030504040204" pitchFamily="50" charset="-128"/>
+                <a:ea typeface="メイリオ" panose="020B0604030504040204" pitchFamily="50" charset="-128"/>
+              </a:rPr>
+              <a:t>判断</a:t>
+            </a:r>
+            <a:r>
+              <a:rPr lang="en-US" altLang="ja-JP" sz="1400" b="1">
+                <a:solidFill>
+                  <a:schemeClr val="accent2">
+                    <a:lumMod val="75000"/>
+                  </a:schemeClr>
+                </a:solidFill>
+                <a:latin typeface="メイリオ" panose="020B0604030504040204" pitchFamily="50" charset="-128"/>
+                <a:ea typeface="メイリオ" panose="020B0604030504040204" pitchFamily="50" charset="-128"/>
+              </a:rPr>
+              <a:t>"</a:t>
+            </a:r>
+            <a:r>
+              <a:rPr lang="ja-JP" altLang="en-US" sz="1400" b="1">
+                <a:solidFill>
+                  <a:schemeClr val="accent2">
+                    <a:lumMod val="75000"/>
+                  </a:schemeClr>
+                </a:solidFill>
+                <a:latin typeface="メイリオ" panose="020B0604030504040204" pitchFamily="50" charset="-128"/>
+                <a:ea typeface="メイリオ" panose="020B0604030504040204" pitchFamily="50" charset="-128"/>
+              </a:rPr>
+              <a:t>が自動化される</a:t>
+            </a:r>
+          </a:p>
+        </p:txBody>
+      </p:sp>
+      <p:sp>
+        <p:nvSpPr>
+          <p:cNvPr id="14" name="二等辺三角形 13">
+            <a:extLst>
+              <a:ext uri="{FF2B5EF4-FFF2-40B4-BE49-F238E27FC236}">
+                <a16:creationId xmlns:a16="http://schemas.microsoft.com/office/drawing/2014/main" id="{8F9A5FD3-538F-D51E-DCA8-14739D395BD3}"/>
+              </a:ext>
+            </a:extLst>
+          </p:cNvPr>
+          <p:cNvSpPr/>
+          <p:nvPr/>
+        </p:nvSpPr>
+        <p:spPr>
+          <a:xfrm rot="10800000">
+            <a:off x="1804616" y="3294961"/>
+            <a:ext cx="765104" cy="214473"/>
+          </a:xfrm>
+          <a:prstGeom prst="triangle">
+            <a:avLst/>
+          </a:prstGeom>
+          <a:solidFill>
+            <a:srgbClr val="002060"/>
+          </a:solidFill>
+          <a:ln>
+            <a:noFill/>
+          </a:ln>
+        </p:spPr>
+        <p:style>
+          <a:lnRef idx="2">
+            <a:schemeClr val="accent1">
+              <a:shade val="15000"/>
+            </a:schemeClr>
+          </a:lnRef>
+          <a:fillRef idx="1">
+            <a:schemeClr val="accent1"/>
+          </a:fillRef>
+          <a:effectRef idx="0">
+            <a:schemeClr val="accent1"/>
+          </a:effectRef>
+          <a:fontRef idx="minor">
+            <a:schemeClr val="lt1"/>
+          </a:fontRef>
+        </p:style>
+        <p:txBody>
+          <a:bodyPr rtlCol="0" anchor="ctr"/>
+          <a:lstStyle/>
+          <a:p>
+            <a:pPr algn="ctr"/>
+            <a:endParaRPr kumimoji="1" lang="ja-JP" altLang="en-US"/>
+          </a:p>
+        </p:txBody>
+      </p:sp>
+      <p:sp>
+        <p:nvSpPr>
+          <p:cNvPr id="15" name="テキスト ボックス 14">
+            <a:extLst>
+              <a:ext uri="{FF2B5EF4-FFF2-40B4-BE49-F238E27FC236}">
+                <a16:creationId xmlns:a16="http://schemas.microsoft.com/office/drawing/2014/main" id="{1E11DECE-FFD7-B09F-7780-D48BBDB71A6B}"/>
+              </a:ext>
+            </a:extLst>
+          </p:cNvPr>
+          <p:cNvSpPr txBox="1"/>
+          <p:nvPr/>
+        </p:nvSpPr>
+        <p:spPr>
+          <a:xfrm>
+            <a:off x="4257707" y="1657564"/>
+            <a:ext cx="3676588" cy="1519647"/>
+          </a:xfrm>
+          <a:prstGeom prst="rect">
+            <a:avLst/>
+          </a:prstGeom>
+          <a:noFill/>
+        </p:spPr>
+        <p:txBody>
+          <a:bodyPr wrap="square" rtlCol="0">
+            <a:spAutoFit/>
+          </a:bodyPr>
+          <a:lstStyle/>
+          <a:p>
+            <a:pPr>
+              <a:lnSpc>
+                <a:spcPct val="150000"/>
+              </a:lnSpc>
+            </a:pPr>
+            <a:r>
+              <a:rPr lang="en-US" altLang="ja-JP" sz="1600" b="1">
+                <a:latin typeface="メイリオ" panose="020B0604030504040204" pitchFamily="50" charset="-128"/>
+                <a:ea typeface="メイリオ" panose="020B0604030504040204" pitchFamily="50" charset="-128"/>
+              </a:rPr>
+              <a:t>Heartbeat</a:t>
+            </a:r>
+            <a:r>
+              <a:rPr lang="ja-JP" altLang="en-US" sz="1600" b="1">
+                <a:latin typeface="メイリオ" panose="020B0604030504040204" pitchFamily="50" charset="-128"/>
+                <a:ea typeface="メイリオ" panose="020B0604030504040204" pitchFamily="50" charset="-128"/>
+              </a:rPr>
+              <a:t>（常時起動）</a:t>
+            </a:r>
+          </a:p>
+          <a:p>
+            <a:pPr>
+              <a:lnSpc>
+                <a:spcPct val="150000"/>
+              </a:lnSpc>
+            </a:pPr>
+            <a:r>
+              <a:rPr lang="en-US" altLang="ja-JP" sz="1400">
+                <a:latin typeface="メイリオ" panose="020B0604030504040204" pitchFamily="50" charset="-128"/>
+                <a:ea typeface="メイリオ" panose="020B0604030504040204" pitchFamily="50" charset="-128"/>
+              </a:rPr>
+              <a:t>30</a:t>
+            </a:r>
+            <a:r>
+              <a:rPr lang="ja-JP" altLang="en-US" sz="1400">
+                <a:latin typeface="メイリオ" panose="020B0604030504040204" pitchFamily="50" charset="-128"/>
+                <a:ea typeface="メイリオ" panose="020B0604030504040204" pitchFamily="50" charset="-128"/>
+              </a:rPr>
+              <a:t>分ごとに状況を確認し、</a:t>
+            </a:r>
+          </a:p>
+          <a:p>
+            <a:pPr>
+              <a:lnSpc>
+                <a:spcPct val="150000"/>
+              </a:lnSpc>
+            </a:pPr>
+            <a:r>
+              <a:rPr lang="ja-JP" altLang="en-US" sz="1400">
+                <a:latin typeface="メイリオ" panose="020B0604030504040204" pitchFamily="50" charset="-128"/>
+                <a:ea typeface="メイリオ" panose="020B0604030504040204" pitchFamily="50" charset="-128"/>
+              </a:rPr>
+              <a:t>自分で優先度を判断して動く</a:t>
+            </a:r>
+            <a:endParaRPr lang="en-US" altLang="ja-JP" sz="1400">
+              <a:latin typeface="メイリオ" panose="020B0604030504040204" pitchFamily="50" charset="-128"/>
+              <a:ea typeface="メイリオ" panose="020B0604030504040204" pitchFamily="50" charset="-128"/>
+            </a:endParaRPr>
+          </a:p>
+          <a:p>
+            <a:pPr>
+              <a:lnSpc>
+                <a:spcPct val="150000"/>
+              </a:lnSpc>
+            </a:pPr>
+            <a:endParaRPr lang="ja-JP" altLang="en-US" sz="400">
+              <a:latin typeface="メイリオ" panose="020B0604030504040204" pitchFamily="50" charset="-128"/>
+              <a:ea typeface="メイリオ" panose="020B0604030504040204" pitchFamily="50" charset="-128"/>
+            </a:endParaRPr>
+          </a:p>
+          <a:p>
+            <a:pPr>
+              <a:lnSpc>
+                <a:spcPct val="150000"/>
+              </a:lnSpc>
+            </a:pPr>
+            <a:r>
+              <a:rPr lang="ja-JP" altLang="en-US" sz="1400" b="1">
+                <a:solidFill>
+                  <a:srgbClr val="C00000"/>
+                </a:solidFill>
+                <a:latin typeface="メイリオ" panose="020B0604030504040204" pitchFamily="50" charset="-128"/>
+                <a:ea typeface="メイリオ" panose="020B0604030504040204" pitchFamily="50" charset="-128"/>
+              </a:rPr>
+              <a:t>➡ 管理者・オペレーターの仕事そのもの</a:t>
+            </a:r>
+          </a:p>
+        </p:txBody>
+      </p:sp>
+      <p:sp>
+        <p:nvSpPr>
+          <p:cNvPr id="16" name="テキスト ボックス 15">
+            <a:extLst>
+              <a:ext uri="{FF2B5EF4-FFF2-40B4-BE49-F238E27FC236}">
+                <a16:creationId xmlns:a16="http://schemas.microsoft.com/office/drawing/2014/main" id="{85068579-E637-503D-5662-602935B71C80}"/>
+              </a:ext>
+            </a:extLst>
+          </p:cNvPr>
+          <p:cNvSpPr txBox="1"/>
+          <p:nvPr/>
+        </p:nvSpPr>
+        <p:spPr>
+          <a:xfrm>
+            <a:off x="4257707" y="3321975"/>
+            <a:ext cx="3676588" cy="1496564"/>
+          </a:xfrm>
+          <a:prstGeom prst="rect">
+            <a:avLst/>
+          </a:prstGeom>
+          <a:noFill/>
+        </p:spPr>
+        <p:txBody>
+          <a:bodyPr wrap="square" rtlCol="0">
+            <a:spAutoFit/>
+          </a:bodyPr>
+          <a:lstStyle/>
+          <a:p>
+            <a:pPr>
+              <a:lnSpc>
+                <a:spcPct val="150000"/>
+              </a:lnSpc>
+            </a:pPr>
+            <a:r>
+              <a:rPr lang="ja-JP" altLang="en-US" sz="1600" b="1">
+                <a:latin typeface="メイリオ" panose="020B0604030504040204" pitchFamily="50" charset="-128"/>
+                <a:ea typeface="メイリオ" panose="020B0604030504040204" pitchFamily="50" charset="-128"/>
+              </a:rPr>
+              <a:t>記憶＋人格（</a:t>
+            </a:r>
+            <a:r>
+              <a:rPr lang="en-US" altLang="ja-JP" sz="1600" b="1">
+                <a:latin typeface="メイリオ" panose="020B0604030504040204" pitchFamily="50" charset="-128"/>
+                <a:ea typeface="メイリオ" panose="020B0604030504040204" pitchFamily="50" charset="-128"/>
+              </a:rPr>
+              <a:t>Main Agent</a:t>
+            </a:r>
+            <a:r>
+              <a:rPr lang="ja-JP" altLang="en-US" sz="1600" b="1">
+                <a:latin typeface="メイリオ" panose="020B0604030504040204" pitchFamily="50" charset="-128"/>
+                <a:ea typeface="メイリオ" panose="020B0604030504040204" pitchFamily="50" charset="-128"/>
+              </a:rPr>
+              <a:t>）</a:t>
+            </a:r>
+            <a:endParaRPr lang="en-US" altLang="ja-JP" sz="1600" b="1">
+              <a:latin typeface="メイリオ" panose="020B0604030504040204" pitchFamily="50" charset="-128"/>
+              <a:ea typeface="メイリオ" panose="020B0604030504040204" pitchFamily="50" charset="-128"/>
+            </a:endParaRPr>
+          </a:p>
+          <a:p>
+            <a:pPr>
+              <a:lnSpc>
+                <a:spcPct val="150000"/>
+              </a:lnSpc>
+            </a:pPr>
+            <a:r>
+              <a:rPr lang="ja-JP" altLang="en-US" sz="1400">
+                <a:latin typeface="メイリオ" panose="020B0604030504040204" pitchFamily="50" charset="-128"/>
+                <a:ea typeface="メイリオ" panose="020B0604030504040204" pitchFamily="50" charset="-128"/>
+              </a:rPr>
+              <a:t>文脈を蓄積し、ユーザーの好みに合わせて判断基準を調整</a:t>
+            </a:r>
+            <a:endParaRPr lang="en-US" altLang="ja-JP" sz="1400">
+              <a:latin typeface="メイリオ" panose="020B0604030504040204" pitchFamily="50" charset="-128"/>
+              <a:ea typeface="メイリオ" panose="020B0604030504040204" pitchFamily="50" charset="-128"/>
+            </a:endParaRPr>
+          </a:p>
+          <a:p>
+            <a:pPr>
+              <a:lnSpc>
+                <a:spcPct val="150000"/>
+              </a:lnSpc>
+            </a:pPr>
+            <a:endParaRPr lang="ja-JP" altLang="en-US" sz="400">
+              <a:latin typeface="メイリオ" panose="020B0604030504040204" pitchFamily="50" charset="-128"/>
+              <a:ea typeface="メイリオ" panose="020B0604030504040204" pitchFamily="50" charset="-128"/>
+            </a:endParaRPr>
+          </a:p>
+          <a:p>
+            <a:pPr>
+              <a:lnSpc>
+                <a:spcPct val="150000"/>
+              </a:lnSpc>
+            </a:pPr>
+            <a:r>
+              <a:rPr lang="ja-JP" altLang="en-US" sz="1400" b="1">
+                <a:solidFill>
+                  <a:srgbClr val="C00000"/>
+                </a:solidFill>
+                <a:latin typeface="メイリオ" panose="020B0604030504040204" pitchFamily="50" charset="-128"/>
+                <a:ea typeface="メイリオ" panose="020B0604030504040204" pitchFamily="50" charset="-128"/>
+              </a:rPr>
+              <a:t>➡ マニュアル外の対応ができる</a:t>
+            </a:r>
+          </a:p>
+        </p:txBody>
+      </p:sp>
+      <p:sp>
+        <p:nvSpPr>
+          <p:cNvPr id="17" name="テキスト ボックス 16">
+            <a:extLst>
+              <a:ext uri="{FF2B5EF4-FFF2-40B4-BE49-F238E27FC236}">
+                <a16:creationId xmlns:a16="http://schemas.microsoft.com/office/drawing/2014/main" id="{C36A9C59-50A6-32DF-5C49-81902F7B2E8B}"/>
+              </a:ext>
+            </a:extLst>
+          </p:cNvPr>
+          <p:cNvSpPr txBox="1"/>
+          <p:nvPr/>
+        </p:nvSpPr>
+        <p:spPr>
+          <a:xfrm>
+            <a:off x="4257704" y="4963303"/>
+            <a:ext cx="3676588" cy="1173398"/>
+          </a:xfrm>
+          <a:prstGeom prst="rect">
+            <a:avLst/>
+          </a:prstGeom>
+          <a:noFill/>
+        </p:spPr>
+        <p:txBody>
+          <a:bodyPr wrap="square" rtlCol="0">
+            <a:spAutoFit/>
+          </a:bodyPr>
+          <a:lstStyle/>
+          <a:p>
+            <a:pPr>
+              <a:lnSpc>
+                <a:spcPct val="150000"/>
+              </a:lnSpc>
+            </a:pPr>
+            <a:r>
+              <a:rPr lang="ja-JP" altLang="en-US" sz="1600" b="1">
+                <a:latin typeface="メイリオ" panose="020B0604030504040204" pitchFamily="50" charset="-128"/>
+                <a:ea typeface="メイリオ" panose="020B0604030504040204" pitchFamily="50" charset="-128"/>
+              </a:rPr>
+              <a:t>テキストによる振る舞い定義</a:t>
+            </a:r>
+            <a:endParaRPr lang="en-US" altLang="ja-JP" sz="1600" b="1">
+              <a:latin typeface="メイリオ" panose="020B0604030504040204" pitchFamily="50" charset="-128"/>
+              <a:ea typeface="メイリオ" panose="020B0604030504040204" pitchFamily="50" charset="-128"/>
+            </a:endParaRPr>
+          </a:p>
+          <a:p>
+            <a:pPr>
+              <a:lnSpc>
+                <a:spcPct val="150000"/>
+              </a:lnSpc>
+            </a:pPr>
+            <a:r>
+              <a:rPr lang="ja-JP" altLang="en-US" sz="1400">
+                <a:latin typeface="メイリオ" panose="020B0604030504040204" pitchFamily="50" charset="-128"/>
+                <a:ea typeface="メイリオ" panose="020B0604030504040204" pitchFamily="50" charset="-128"/>
+              </a:rPr>
+              <a:t>手順書を渡すだけで</a:t>
+            </a:r>
+            <a:r>
+              <a:rPr lang="en-US" altLang="ja-JP" sz="1400">
+                <a:latin typeface="メイリオ" panose="020B0604030504040204" pitchFamily="50" charset="-128"/>
+                <a:ea typeface="メイリオ" panose="020B0604030504040204" pitchFamily="50" charset="-128"/>
+              </a:rPr>
+              <a:t>AI</a:t>
+            </a:r>
+            <a:r>
+              <a:rPr lang="ja-JP" altLang="en-US" sz="1400">
+                <a:latin typeface="メイリオ" panose="020B0604030504040204" pitchFamily="50" charset="-128"/>
+                <a:ea typeface="メイリオ" panose="020B0604030504040204" pitchFamily="50" charset="-128"/>
+              </a:rPr>
+              <a:t>が判断込みで実行</a:t>
+            </a:r>
+            <a:endParaRPr lang="en-US" altLang="ja-JP" sz="1400">
+              <a:latin typeface="メイリオ" panose="020B0604030504040204" pitchFamily="50" charset="-128"/>
+              <a:ea typeface="メイリオ" panose="020B0604030504040204" pitchFamily="50" charset="-128"/>
+            </a:endParaRPr>
+          </a:p>
+          <a:p>
+            <a:pPr>
+              <a:lnSpc>
+                <a:spcPct val="150000"/>
+              </a:lnSpc>
+            </a:pPr>
+            <a:endParaRPr lang="ja-JP" altLang="en-US" sz="400">
+              <a:latin typeface="メイリオ" panose="020B0604030504040204" pitchFamily="50" charset="-128"/>
+              <a:ea typeface="メイリオ" panose="020B0604030504040204" pitchFamily="50" charset="-128"/>
+            </a:endParaRPr>
+          </a:p>
+          <a:p>
+            <a:pPr>
+              <a:lnSpc>
+                <a:spcPct val="150000"/>
+              </a:lnSpc>
+            </a:pPr>
+            <a:r>
+              <a:rPr lang="ja-JP" altLang="en-US" sz="1400" b="1">
+                <a:solidFill>
+                  <a:srgbClr val="C00000"/>
+                </a:solidFill>
+                <a:latin typeface="メイリオ" panose="020B0604030504040204" pitchFamily="50" charset="-128"/>
+                <a:ea typeface="メイリオ" panose="020B0604030504040204" pitchFamily="50" charset="-128"/>
+              </a:rPr>
+              <a:t>➡ 教育コスト・引き継ぎコストが消える</a:t>
+            </a:r>
+          </a:p>
+        </p:txBody>
+      </p:sp>
+      <p:sp>
+        <p:nvSpPr>
+          <p:cNvPr id="18" name="テキスト ボックス 17">
+            <a:extLst>
+              <a:ext uri="{FF2B5EF4-FFF2-40B4-BE49-F238E27FC236}">
+                <a16:creationId xmlns:a16="http://schemas.microsoft.com/office/drawing/2014/main" id="{E21F7325-BF53-B07C-8D37-EC5A63C2D486}"/>
+              </a:ext>
+            </a:extLst>
+          </p:cNvPr>
+          <p:cNvSpPr txBox="1"/>
+          <p:nvPr/>
+        </p:nvSpPr>
+        <p:spPr>
+          <a:xfrm>
+            <a:off x="8166538" y="1491109"/>
+            <a:ext cx="3676587" cy="1034899"/>
+          </a:xfrm>
+          <a:prstGeom prst="rect">
+            <a:avLst/>
+          </a:prstGeom>
+          <a:noFill/>
+        </p:spPr>
+        <p:txBody>
+          <a:bodyPr wrap="square" rtlCol="0">
+            <a:spAutoFit/>
+          </a:bodyPr>
+          <a:lstStyle/>
+          <a:p>
+            <a:pPr>
+              <a:lnSpc>
+                <a:spcPct val="150000"/>
+              </a:lnSpc>
+            </a:pPr>
+            <a:r>
+              <a:rPr lang="en-US" altLang="ja-JP" sz="1400">
+                <a:latin typeface="メイリオ" panose="020B0604030504040204" pitchFamily="50" charset="-128"/>
+                <a:ea typeface="メイリオ" panose="020B0604030504040204" pitchFamily="50" charset="-128"/>
+              </a:rPr>
+              <a:t>OpenAI</a:t>
+            </a:r>
+            <a:r>
+              <a:rPr lang="ja-JP" altLang="en-US" sz="1400">
+                <a:latin typeface="メイリオ" panose="020B0604030504040204" pitchFamily="50" charset="-128"/>
+                <a:ea typeface="メイリオ" panose="020B0604030504040204" pitchFamily="50" charset="-128"/>
+              </a:rPr>
+              <a:t>・</a:t>
+            </a:r>
+            <a:r>
+              <a:rPr lang="en-US" altLang="ja-JP" sz="1400">
+                <a:latin typeface="メイリオ" panose="020B0604030504040204" pitchFamily="50" charset="-128"/>
+                <a:ea typeface="メイリオ" panose="020B0604030504040204" pitchFamily="50" charset="-128"/>
+              </a:rPr>
+              <a:t>Anthropic</a:t>
+            </a:r>
+            <a:r>
+              <a:rPr lang="ja-JP" altLang="en-US" sz="1400">
+                <a:latin typeface="メイリオ" panose="020B0604030504040204" pitchFamily="50" charset="-128"/>
+                <a:ea typeface="メイリオ" panose="020B0604030504040204" pitchFamily="50" charset="-128"/>
+              </a:rPr>
+              <a:t>が「判断する常駐エージェント」を製品化中 </a:t>
+            </a:r>
+            <a:endParaRPr lang="en-US" altLang="ja-JP" sz="400">
+              <a:latin typeface="メイリオ" panose="020B0604030504040204" pitchFamily="50" charset="-128"/>
+              <a:ea typeface="メイリオ" panose="020B0604030504040204" pitchFamily="50" charset="-128"/>
+            </a:endParaRPr>
+          </a:p>
+          <a:p>
+            <a:pPr>
+              <a:lnSpc>
+                <a:spcPct val="150000"/>
+              </a:lnSpc>
+            </a:pPr>
+            <a:r>
+              <a:rPr lang="ja-JP" altLang="en-US" sz="1400">
+                <a:latin typeface="メイリオ" panose="020B0604030504040204" pitchFamily="50" charset="-128"/>
+                <a:ea typeface="メイリオ" panose="020B0604030504040204" pitchFamily="50" charset="-128"/>
+              </a:rPr>
+              <a:t>→ 導入障壁は急速に低下</a:t>
+            </a:r>
+            <a:endParaRPr lang="ja-JP" altLang="en-US" sz="1100">
+              <a:latin typeface="メイリオ" panose="020B0604030504040204" pitchFamily="50" charset="-128"/>
+              <a:ea typeface="メイリオ" panose="020B0604030504040204" pitchFamily="50" charset="-128"/>
+            </a:endParaRPr>
+          </a:p>
+        </p:txBody>
+      </p:sp>
+      <p:sp>
+        <p:nvSpPr>
+          <p:cNvPr id="19" name="二等辺三角形 18">
+            <a:extLst>
+              <a:ext uri="{FF2B5EF4-FFF2-40B4-BE49-F238E27FC236}">
+                <a16:creationId xmlns:a16="http://schemas.microsoft.com/office/drawing/2014/main" id="{97A32694-2016-62A2-F0D8-EBE21E26F329}"/>
+              </a:ext>
+            </a:extLst>
+          </p:cNvPr>
+          <p:cNvSpPr/>
+          <p:nvPr/>
+        </p:nvSpPr>
+        <p:spPr>
+          <a:xfrm rot="10800000">
+            <a:off x="9622281" y="2533427"/>
+            <a:ext cx="765104" cy="214473"/>
+          </a:xfrm>
+          <a:prstGeom prst="triangle">
+            <a:avLst/>
+          </a:prstGeom>
+          <a:solidFill>
+            <a:srgbClr val="002060"/>
+          </a:solidFill>
+          <a:ln>
+            <a:noFill/>
+          </a:ln>
+        </p:spPr>
+        <p:style>
+          <a:lnRef idx="2">
+            <a:schemeClr val="accent1">
+              <a:shade val="15000"/>
+            </a:schemeClr>
+          </a:lnRef>
+          <a:fillRef idx="1">
+            <a:schemeClr val="accent1"/>
+          </a:fillRef>
+          <a:effectRef idx="0">
+            <a:schemeClr val="accent1"/>
+          </a:effectRef>
+          <a:fontRef idx="minor">
+            <a:schemeClr val="lt1"/>
+          </a:fontRef>
+        </p:style>
+        <p:txBody>
+          <a:bodyPr rtlCol="0" anchor="ctr"/>
+          <a:lstStyle/>
+          <a:p>
+            <a:pPr algn="ctr"/>
+            <a:endParaRPr kumimoji="1" lang="ja-JP" altLang="en-US"/>
+          </a:p>
+        </p:txBody>
+      </p:sp>
+      <p:sp>
+        <p:nvSpPr>
+          <p:cNvPr id="20" name="テキスト ボックス 19">
+            <a:extLst>
+              <a:ext uri="{FF2B5EF4-FFF2-40B4-BE49-F238E27FC236}">
+                <a16:creationId xmlns:a16="http://schemas.microsoft.com/office/drawing/2014/main" id="{AAFCA287-D31F-C76F-E80E-F5E5625E7025}"/>
+              </a:ext>
+            </a:extLst>
+          </p:cNvPr>
+          <p:cNvSpPr txBox="1"/>
+          <p:nvPr/>
+        </p:nvSpPr>
+        <p:spPr>
+          <a:xfrm>
+            <a:off x="8166537" y="2707466"/>
+            <a:ext cx="3676587" cy="711733"/>
+          </a:xfrm>
+          <a:prstGeom prst="rect">
+            <a:avLst/>
+          </a:prstGeom>
+          <a:noFill/>
+        </p:spPr>
+        <p:txBody>
+          <a:bodyPr wrap="square" rtlCol="0">
+            <a:spAutoFit/>
+          </a:bodyPr>
+          <a:lstStyle/>
+          <a:p>
+            <a:pPr>
+              <a:lnSpc>
+                <a:spcPct val="150000"/>
+              </a:lnSpc>
+            </a:pPr>
+            <a:r>
+              <a:rPr lang="en-US" altLang="ja-JP" sz="1400" b="1">
+                <a:solidFill>
+                  <a:srgbClr val="C00000"/>
+                </a:solidFill>
+                <a:latin typeface="メイリオ" panose="020B0604030504040204" pitchFamily="50" charset="-128"/>
+                <a:ea typeface="メイリオ" panose="020B0604030504040204" pitchFamily="50" charset="-128"/>
+              </a:rPr>
+              <a:t>AI</a:t>
+            </a:r>
+            <a:r>
+              <a:rPr lang="ja-JP" altLang="en-US" sz="1400" b="1">
+                <a:solidFill>
+                  <a:srgbClr val="C00000"/>
+                </a:solidFill>
+                <a:latin typeface="メイリオ" panose="020B0604030504040204" pitchFamily="50" charset="-128"/>
+                <a:ea typeface="メイリオ" panose="020B0604030504040204" pitchFamily="50" charset="-128"/>
+              </a:rPr>
+              <a:t>の自律判断は、もはや実験ではなくビジネスの実用に乗るフェーズに来ている</a:t>
+            </a:r>
+            <a:endParaRPr lang="en-US" altLang="ja-JP" sz="1400" b="1">
+              <a:solidFill>
+                <a:srgbClr val="C00000"/>
+              </a:solidFill>
+              <a:latin typeface="メイリオ" panose="020B0604030504040204" pitchFamily="50" charset="-128"/>
+              <a:ea typeface="メイリオ" panose="020B0604030504040204" pitchFamily="50" charset="-128"/>
+            </a:endParaRPr>
+          </a:p>
+        </p:txBody>
+      </p:sp>
+      <p:sp>
+        <p:nvSpPr>
+          <p:cNvPr id="21" name="テキスト ボックス 20">
+            <a:extLst>
+              <a:ext uri="{FF2B5EF4-FFF2-40B4-BE49-F238E27FC236}">
+                <a16:creationId xmlns:a16="http://schemas.microsoft.com/office/drawing/2014/main" id="{78F7A71C-A76C-0123-5BB7-7912433462ED}"/>
+              </a:ext>
+            </a:extLst>
+          </p:cNvPr>
+          <p:cNvSpPr txBox="1"/>
+          <p:nvPr/>
+        </p:nvSpPr>
+        <p:spPr>
+          <a:xfrm>
+            <a:off x="8166533" y="3490738"/>
+            <a:ext cx="3676588" cy="3020058"/>
+          </a:xfrm>
+          <a:prstGeom prst="rect">
+            <a:avLst/>
+          </a:prstGeom>
+          <a:noFill/>
+        </p:spPr>
+        <p:txBody>
+          <a:bodyPr wrap="square" rtlCol="0">
+            <a:spAutoFit/>
+          </a:bodyPr>
+          <a:lstStyle/>
+          <a:p>
+            <a:pPr>
+              <a:lnSpc>
+                <a:spcPct val="150000"/>
+              </a:lnSpc>
+            </a:pPr>
+            <a:r>
+              <a:rPr lang="en-US" altLang="ja-JP" sz="1600" b="1">
+                <a:latin typeface="メイリオ" panose="020B0604030504040204" pitchFamily="50" charset="-128"/>
+                <a:ea typeface="メイリオ" panose="020B0604030504040204" pitchFamily="50" charset="-128"/>
+              </a:rPr>
+              <a:t>BPO</a:t>
+            </a:r>
+            <a:r>
+              <a:rPr lang="ja-JP" altLang="en-US" sz="1600" b="1">
+                <a:latin typeface="メイリオ" panose="020B0604030504040204" pitchFamily="50" charset="-128"/>
+                <a:ea typeface="メイリオ" panose="020B0604030504040204" pitchFamily="50" charset="-128"/>
+              </a:rPr>
+              <a:t>への影響</a:t>
+            </a:r>
+          </a:p>
+          <a:p>
+            <a:pPr marL="285750" indent="-285750">
+              <a:lnSpc>
+                <a:spcPct val="150000"/>
+              </a:lnSpc>
+              <a:buFont typeface="Arial" panose="020B0604020202020204" pitchFamily="34" charset="0"/>
+              <a:buChar char="•"/>
+            </a:pPr>
+            <a:r>
+              <a:rPr lang="ja-JP" altLang="en-US" sz="1400" b="1">
+                <a:latin typeface="メイリオ" panose="020B0604030504040204" pitchFamily="50" charset="-128"/>
+                <a:ea typeface="メイリオ" panose="020B0604030504040204" pitchFamily="50" charset="-128"/>
+              </a:rPr>
+              <a:t>マニュアル化しきれない</a:t>
+            </a:r>
+            <a:r>
+              <a:rPr lang="en-US" altLang="ja-JP" sz="1400" b="1">
+                <a:latin typeface="メイリオ" panose="020B0604030504040204" pitchFamily="50" charset="-128"/>
+                <a:ea typeface="メイリオ" panose="020B0604030504040204" pitchFamily="50" charset="-128"/>
+              </a:rPr>
+              <a:t>『</a:t>
+            </a:r>
+            <a:r>
+              <a:rPr lang="ja-JP" altLang="en-US" sz="1400" b="1">
+                <a:latin typeface="メイリオ" panose="020B0604030504040204" pitchFamily="50" charset="-128"/>
+                <a:ea typeface="メイリオ" panose="020B0604030504040204" pitchFamily="50" charset="-128"/>
+              </a:rPr>
+              <a:t>人間の判断・調整</a:t>
+            </a:r>
+            <a:r>
+              <a:rPr lang="en-US" altLang="ja-JP" sz="1400" b="1">
+                <a:latin typeface="メイリオ" panose="020B0604030504040204" pitchFamily="50" charset="-128"/>
+                <a:ea typeface="メイリオ" panose="020B0604030504040204" pitchFamily="50" charset="-128"/>
+              </a:rPr>
+              <a:t>』</a:t>
+            </a:r>
+            <a:r>
+              <a:rPr lang="ja-JP" altLang="en-US" sz="1400" b="1">
+                <a:latin typeface="メイリオ" panose="020B0604030504040204" pitchFamily="50" charset="-128"/>
+                <a:ea typeface="メイリオ" panose="020B0604030504040204" pitchFamily="50" charset="-128"/>
+              </a:rPr>
+              <a:t>の消失による需要減</a:t>
+            </a:r>
+            <a:endParaRPr lang="en-US" altLang="ja-JP" sz="1400" b="1">
+              <a:latin typeface="メイリオ" panose="020B0604030504040204" pitchFamily="50" charset="-128"/>
+              <a:ea typeface="メイリオ" panose="020B0604030504040204" pitchFamily="50" charset="-128"/>
+            </a:endParaRPr>
+          </a:p>
+          <a:p>
+            <a:pPr marL="285750" indent="-285750">
+              <a:lnSpc>
+                <a:spcPct val="150000"/>
+              </a:lnSpc>
+              <a:buFont typeface="Arial" panose="020B0604020202020204" pitchFamily="34" charset="0"/>
+              <a:buChar char="•"/>
+            </a:pPr>
+            <a:r>
+              <a:rPr lang="ja-JP" altLang="en-US" sz="1400" b="1">
+                <a:latin typeface="メイリオ" panose="020B0604030504040204" pitchFamily="50" charset="-128"/>
+                <a:ea typeface="メイリオ" panose="020B0604030504040204" pitchFamily="50" charset="-128"/>
+              </a:rPr>
+              <a:t>「</a:t>
+            </a:r>
+            <a:r>
+              <a:rPr lang="en-US" altLang="ja-JP" sz="1400" b="1">
+                <a:latin typeface="メイリオ" panose="020B0604030504040204" pitchFamily="50" charset="-128"/>
+                <a:ea typeface="メイリオ" panose="020B0604030504040204" pitchFamily="50" charset="-128"/>
+              </a:rPr>
+              <a:t>PMO</a:t>
+            </a:r>
+            <a:r>
+              <a:rPr lang="ja-JP" altLang="en-US" sz="1400" b="1">
+                <a:latin typeface="メイリオ" panose="020B0604030504040204" pitchFamily="50" charset="-128"/>
+                <a:ea typeface="メイリオ" panose="020B0604030504040204" pitchFamily="50" charset="-128"/>
+              </a:rPr>
+              <a:t>・提案業務」の自律化による需要減</a:t>
+            </a:r>
+            <a:endParaRPr lang="en-US" altLang="ja-JP" sz="1400" b="1">
+              <a:latin typeface="メイリオ" panose="020B0604030504040204" pitchFamily="50" charset="-128"/>
+              <a:ea typeface="メイリオ" panose="020B0604030504040204" pitchFamily="50" charset="-128"/>
+            </a:endParaRPr>
+          </a:p>
+          <a:p>
+            <a:pPr marL="285750" indent="-285750">
+              <a:lnSpc>
+                <a:spcPct val="150000"/>
+              </a:lnSpc>
+              <a:buFont typeface="Arial" panose="020B0604020202020204" pitchFamily="34" charset="0"/>
+              <a:buChar char="•"/>
+            </a:pPr>
+            <a:r>
+              <a:rPr lang="en-US" altLang="ja-JP" sz="1400" b="1">
+                <a:latin typeface="メイリオ" panose="020B0604030504040204" pitchFamily="50" charset="-128"/>
+                <a:ea typeface="メイリオ" panose="020B0604030504040204" pitchFamily="50" charset="-128"/>
+              </a:rPr>
+              <a:t>AI</a:t>
+            </a:r>
+            <a:r>
+              <a:rPr lang="ja-JP" altLang="en-US" sz="1400" b="1">
+                <a:latin typeface="メイリオ" panose="020B0604030504040204" pitchFamily="50" charset="-128"/>
+                <a:ea typeface="メイリオ" panose="020B0604030504040204" pitchFamily="50" charset="-128"/>
+              </a:rPr>
+              <a:t>活用が人間が起点じゃなくても動くので</a:t>
+            </a:r>
+            <a:r>
+              <a:rPr lang="en-US" altLang="ja-JP" sz="1400" b="1">
+                <a:latin typeface="メイリオ" panose="020B0604030504040204" pitchFamily="50" charset="-128"/>
+                <a:ea typeface="メイリオ" panose="020B0604030504040204" pitchFamily="50" charset="-128"/>
+              </a:rPr>
+              <a:t>AI</a:t>
+            </a:r>
+            <a:r>
+              <a:rPr lang="ja-JP" altLang="en-US" sz="1400" b="1">
+                <a:latin typeface="メイリオ" panose="020B0604030504040204" pitchFamily="50" charset="-128"/>
+                <a:ea typeface="メイリオ" panose="020B0604030504040204" pitchFamily="50" charset="-128"/>
+              </a:rPr>
+              <a:t>使えること自体の価値の需要減</a:t>
+            </a:r>
+            <a:endParaRPr lang="en-US" altLang="ja-JP" sz="1400" b="1">
+              <a:latin typeface="メイリオ" panose="020B0604030504040204" pitchFamily="50" charset="-128"/>
+              <a:ea typeface="メイリオ" panose="020B0604030504040204" pitchFamily="50" charset="-128"/>
+            </a:endParaRPr>
+          </a:p>
+          <a:p>
+            <a:pPr>
+              <a:lnSpc>
+                <a:spcPct val="150000"/>
+              </a:lnSpc>
+            </a:pPr>
+            <a:r>
+              <a:rPr lang="ja-JP" altLang="en-US" sz="1400" b="1">
+                <a:latin typeface="メイリオ" panose="020B0604030504040204" pitchFamily="50" charset="-128"/>
+                <a:ea typeface="メイリオ" panose="020B0604030504040204" pitchFamily="50" charset="-128"/>
+              </a:rPr>
+              <a:t>➡ 今後どういったアウトカムを提供できるかが市場価値になる</a:t>
+            </a:r>
+          </a:p>
+        </p:txBody>
+      </p:sp>
+      <p:sp>
+        <p:nvSpPr>
+          <p:cNvPr id="22" name="二等辺三角形 21">
+            <a:extLst>
+              <a:ext uri="{FF2B5EF4-FFF2-40B4-BE49-F238E27FC236}">
+                <a16:creationId xmlns:a16="http://schemas.microsoft.com/office/drawing/2014/main" id="{6F162E87-BF70-D5C5-F3FA-5E492D6A05BC}"/>
+              </a:ext>
+            </a:extLst>
+          </p:cNvPr>
+          <p:cNvSpPr/>
+          <p:nvPr/>
+        </p:nvSpPr>
+        <p:spPr>
+          <a:xfrm rot="10800000">
+            <a:off x="9622281" y="3492351"/>
+            <a:ext cx="765104" cy="214473"/>
+          </a:xfrm>
+          <a:prstGeom prst="triangle">
+            <a:avLst/>
+          </a:prstGeom>
+          <a:solidFill>
+            <a:srgbClr val="002060"/>
+          </a:solidFill>
+          <a:ln>
+            <a:noFill/>
+          </a:ln>
+        </p:spPr>
+        <p:style>
+          <a:lnRef idx="2">
+            <a:schemeClr val="accent1">
+              <a:shade val="15000"/>
+            </a:schemeClr>
+          </a:lnRef>
+          <a:fillRef idx="1">
+            <a:schemeClr val="accent1"/>
+          </a:fillRef>
+          <a:effectRef idx="0">
+            <a:schemeClr val="accent1"/>
+          </a:effectRef>
+          <a:fontRef idx="minor">
+            <a:schemeClr val="lt1"/>
+          </a:fontRef>
+        </p:style>
+        <p:txBody>
+          <a:bodyPr rtlCol="0" anchor="ctr"/>
+          <a:lstStyle/>
+          <a:p>
+            <a:pPr algn="ctr"/>
+            <a:endParaRPr kumimoji="1" lang="ja-JP" altLang="en-US"/>
+          </a:p>
+        </p:txBody>
+      </p:sp>
+    </p:spTree>
+    <p:extLst>
+      <p:ext uri="{BB962C8B-B14F-4D97-AF65-F5344CB8AC3E}">
+        <p14:creationId xmlns:p14="http://schemas.microsoft.com/office/powerpoint/2010/main" val="1391745214"/>
+      </p:ext>
+    </p:extLst>
+  </p:cSld>
+  <p:clrMapOvr>
+    <a:masterClrMapping/>
+  </p:clrMapOvr>
+</p:sld>
+</file>
+
 <file path=ppt/slides/slide2.xml><?xml version="1.0" encoding="utf-8"?>
 <p:sld xmlns:a="http://schemas.openxmlformats.org/drawingml/2006/main" xmlns:r="http://schemas.openxmlformats.org/officeDocument/2006/relationships" xmlns:p="http://schemas.openxmlformats.org/presentationml/2006/main">
   <p:cSld>
@@ -15882,6 +20435,4453 @@
     <p:extLst>
       <p:ext uri="{BB962C8B-B14F-4D97-AF65-F5344CB8AC3E}">
         <p14:creationId xmlns:p14="http://schemas.microsoft.com/office/powerpoint/2010/main" val="1570433502"/>
+      </p:ext>
+    </p:extLst>
+  </p:cSld>
+  <p:clrMapOvr>
+    <a:masterClrMapping/>
+  </p:clrMapOvr>
+</p:sld>
+</file>
+
+<file path=ppt/slides/slide6.xml><?xml version="1.0" encoding="utf-8"?>
+<p:sld xmlns:a="http://schemas.openxmlformats.org/drawingml/2006/main" xmlns:r="http://schemas.openxmlformats.org/officeDocument/2006/relationships" xmlns:p="http://schemas.openxmlformats.org/presentationml/2006/main">
+  <p:cSld>
+    <p:spTree>
+      <p:nvGrpSpPr>
+        <p:cNvPr id="1" name="">
+          <a:extLst>
+            <a:ext uri="{FF2B5EF4-FFF2-40B4-BE49-F238E27FC236}">
+              <a16:creationId xmlns:a16="http://schemas.microsoft.com/office/drawing/2014/main" id="{0F15891E-883A-E973-8F19-3EE5A2BBEF71}"/>
+            </a:ext>
+          </a:extLst>
+        </p:cNvPr>
+        <p:cNvGrpSpPr/>
+        <p:nvPr/>
+      </p:nvGrpSpPr>
+      <p:grpSpPr>
+        <a:xfrm>
+          <a:off x="0" y="0"/>
+          <a:ext cx="0" cy="0"/>
+          <a:chOff x="0" y="0"/>
+          <a:chExt cx="0" cy="0"/>
+        </a:xfrm>
+      </p:grpSpPr>
+    </p:spTree>
+    <p:extLst>
+      <p:ext uri="{BB962C8B-B14F-4D97-AF65-F5344CB8AC3E}">
+        <p14:creationId xmlns:p14="http://schemas.microsoft.com/office/powerpoint/2010/main" val="3629611786"/>
+      </p:ext>
+    </p:extLst>
+  </p:cSld>
+  <p:clrMapOvr>
+    <a:masterClrMapping/>
+  </p:clrMapOvr>
+</p:sld>
+</file>
+
+<file path=ppt/slides/slide7.xml><?xml version="1.0" encoding="utf-8"?>
+<p:sld xmlns:a="http://schemas.openxmlformats.org/drawingml/2006/main" xmlns:r="http://schemas.openxmlformats.org/officeDocument/2006/relationships" xmlns:p="http://schemas.openxmlformats.org/presentationml/2006/main">
+  <p:cSld>
+    <p:spTree>
+      <p:nvGrpSpPr>
+        <p:cNvPr id="1" name="">
+          <a:extLst>
+            <a:ext uri="{FF2B5EF4-FFF2-40B4-BE49-F238E27FC236}">
+              <a16:creationId xmlns:a16="http://schemas.microsoft.com/office/drawing/2014/main" id="{9AE515DD-C3F2-509E-73FC-D51D0FE18CE6}"/>
+            </a:ext>
+          </a:extLst>
+        </p:cNvPr>
+        <p:cNvGrpSpPr/>
+        <p:nvPr/>
+      </p:nvGrpSpPr>
+      <p:grpSpPr>
+        <a:xfrm>
+          <a:off x="0" y="0"/>
+          <a:ext cx="0" cy="0"/>
+          <a:chOff x="0" y="0"/>
+          <a:chExt cx="0" cy="0"/>
+        </a:xfrm>
+      </p:grpSpPr>
+      <p:sp>
+        <p:nvSpPr>
+          <p:cNvPr id="31" name="正方形/長方形 30">
+            <a:extLst>
+              <a:ext uri="{FF2B5EF4-FFF2-40B4-BE49-F238E27FC236}">
+                <a16:creationId xmlns:a16="http://schemas.microsoft.com/office/drawing/2014/main" id="{622C9CC9-63CD-523B-5D4F-D2504639D99A}"/>
+              </a:ext>
+            </a:extLst>
+          </p:cNvPr>
+          <p:cNvSpPr/>
+          <p:nvPr/>
+        </p:nvSpPr>
+        <p:spPr>
+          <a:xfrm>
+            <a:off x="2166251" y="4277238"/>
+            <a:ext cx="1732909" cy="2342340"/>
+          </a:xfrm>
+          <a:prstGeom prst="rect">
+            <a:avLst/>
+          </a:prstGeom>
+          <a:solidFill>
+            <a:schemeClr val="accent6">
+              <a:lumMod val="20000"/>
+              <a:lumOff val="80000"/>
+            </a:schemeClr>
+          </a:solidFill>
+          <a:ln>
+            <a:noFill/>
+          </a:ln>
+        </p:spPr>
+        <p:style>
+          <a:lnRef idx="2">
+            <a:schemeClr val="accent1">
+              <a:shade val="15000"/>
+            </a:schemeClr>
+          </a:lnRef>
+          <a:fillRef idx="1">
+            <a:schemeClr val="accent1"/>
+          </a:fillRef>
+          <a:effectRef idx="0">
+            <a:schemeClr val="accent1"/>
+          </a:effectRef>
+          <a:fontRef idx="minor">
+            <a:schemeClr val="lt1"/>
+          </a:fontRef>
+        </p:style>
+        <p:txBody>
+          <a:bodyPr rtlCol="0" anchor="ctr"/>
+          <a:lstStyle/>
+          <a:p>
+            <a:pPr algn="ctr"/>
+            <a:endParaRPr kumimoji="1" lang="ja-JP" altLang="en-US"/>
+          </a:p>
+        </p:txBody>
+      </p:sp>
+      <p:sp>
+        <p:nvSpPr>
+          <p:cNvPr id="30" name="正方形/長方形 29">
+            <a:extLst>
+              <a:ext uri="{FF2B5EF4-FFF2-40B4-BE49-F238E27FC236}">
+                <a16:creationId xmlns:a16="http://schemas.microsoft.com/office/drawing/2014/main" id="{4270E02C-2641-5591-D5F7-2E284B23014B}"/>
+              </a:ext>
+            </a:extLst>
+          </p:cNvPr>
+          <p:cNvSpPr/>
+          <p:nvPr/>
+        </p:nvSpPr>
+        <p:spPr>
+          <a:xfrm>
+            <a:off x="281300" y="4277238"/>
+            <a:ext cx="1732909" cy="2342340"/>
+          </a:xfrm>
+          <a:prstGeom prst="rect">
+            <a:avLst/>
+          </a:prstGeom>
+          <a:solidFill>
+            <a:schemeClr val="tx2">
+              <a:lumMod val="10000"/>
+              <a:lumOff val="90000"/>
+            </a:schemeClr>
+          </a:solidFill>
+          <a:ln>
+            <a:noFill/>
+          </a:ln>
+        </p:spPr>
+        <p:style>
+          <a:lnRef idx="2">
+            <a:schemeClr val="accent1">
+              <a:shade val="15000"/>
+            </a:schemeClr>
+          </a:lnRef>
+          <a:fillRef idx="1">
+            <a:schemeClr val="accent1"/>
+          </a:fillRef>
+          <a:effectRef idx="0">
+            <a:schemeClr val="accent1"/>
+          </a:effectRef>
+          <a:fontRef idx="minor">
+            <a:schemeClr val="lt1"/>
+          </a:fontRef>
+        </p:style>
+        <p:txBody>
+          <a:bodyPr rtlCol="0" anchor="ctr"/>
+          <a:lstStyle/>
+          <a:p>
+            <a:pPr algn="ctr"/>
+            <a:endParaRPr kumimoji="1" lang="ja-JP" altLang="en-US"/>
+          </a:p>
+        </p:txBody>
+      </p:sp>
+      <p:sp>
+        <p:nvSpPr>
+          <p:cNvPr id="4" name="テキスト ボックス 3">
+            <a:extLst>
+              <a:ext uri="{FF2B5EF4-FFF2-40B4-BE49-F238E27FC236}">
+                <a16:creationId xmlns:a16="http://schemas.microsoft.com/office/drawing/2014/main" id="{D5306D65-994D-1FB0-5C86-9BC458D0E9FE}"/>
+              </a:ext>
+            </a:extLst>
+          </p:cNvPr>
+          <p:cNvSpPr txBox="1"/>
+          <p:nvPr/>
+        </p:nvSpPr>
+        <p:spPr>
+          <a:xfrm>
+            <a:off x="443466" y="317212"/>
+            <a:ext cx="11215133" cy="584775"/>
+          </a:xfrm>
+          <a:prstGeom prst="rect">
+            <a:avLst/>
+          </a:prstGeom>
+          <a:noFill/>
+        </p:spPr>
+        <p:txBody>
+          <a:bodyPr wrap="square" rtlCol="0">
+            <a:spAutoFit/>
+          </a:bodyPr>
+          <a:lstStyle/>
+          <a:p>
+            <a:r>
+              <a:rPr lang="en-US" altLang="ja-JP" sz="3200" b="1">
+                <a:latin typeface="メイリオ" panose="020B0604030504040204" pitchFamily="50" charset="-128"/>
+                <a:ea typeface="メイリオ" panose="020B0604030504040204" pitchFamily="50" charset="-128"/>
+              </a:rPr>
+              <a:t>1. </a:t>
+            </a:r>
+            <a:r>
+              <a:rPr lang="en-US" altLang="ja-JP" sz="3200" b="1">
+                <a:latin typeface="メイリオ" panose="020B0604030504040204" pitchFamily="50" charset="-128"/>
+                <a:ea typeface="メイリオ" panose="020B0604030504040204" pitchFamily="50" charset="-128"/>
+                <a:hlinkClick r:id="rId3"/>
+              </a:rPr>
+              <a:t>OpenClaw</a:t>
+            </a:r>
+            <a:r>
+              <a:rPr lang="ja-JP" altLang="en-US" sz="3200" b="1">
+                <a:latin typeface="メイリオ" panose="020B0604030504040204" pitchFamily="50" charset="-128"/>
+                <a:ea typeface="メイリオ" panose="020B0604030504040204" pitchFamily="50" charset="-128"/>
+                <a:hlinkClick r:id="rId3"/>
+              </a:rPr>
+              <a:t>とは何か</a:t>
+            </a:r>
+            <a:endParaRPr kumimoji="1" lang="ja-JP" altLang="en-US" sz="3200" b="1">
+              <a:latin typeface="メイリオ" panose="020B0604030504040204" pitchFamily="50" charset="-128"/>
+              <a:ea typeface="メイリオ" panose="020B0604030504040204" pitchFamily="50" charset="-128"/>
+            </a:endParaRPr>
+          </a:p>
+        </p:txBody>
+      </p:sp>
+      <p:sp>
+        <p:nvSpPr>
+          <p:cNvPr id="3" name="テキスト ボックス 2">
+            <a:extLst>
+              <a:ext uri="{FF2B5EF4-FFF2-40B4-BE49-F238E27FC236}">
+                <a16:creationId xmlns:a16="http://schemas.microsoft.com/office/drawing/2014/main" id="{66C2D553-1674-CF48-48CD-83D7F41DDC1E}"/>
+              </a:ext>
+            </a:extLst>
+          </p:cNvPr>
+          <p:cNvSpPr txBox="1"/>
+          <p:nvPr/>
+        </p:nvSpPr>
+        <p:spPr>
+          <a:xfrm>
+            <a:off x="185049" y="2532834"/>
+            <a:ext cx="3816523" cy="1034899"/>
+          </a:xfrm>
+          <a:prstGeom prst="rect">
+            <a:avLst/>
+          </a:prstGeom>
+          <a:noFill/>
+        </p:spPr>
+        <p:txBody>
+          <a:bodyPr wrap="square" rtlCol="0" anchor="ctr">
+            <a:spAutoFit/>
+          </a:bodyPr>
+          <a:lstStyle/>
+          <a:p>
+            <a:pPr marL="285750" indent="-285750">
+              <a:lnSpc>
+                <a:spcPct val="150000"/>
+              </a:lnSpc>
+              <a:buFont typeface="Arial" panose="020B0604020202020204" pitchFamily="34" charset="0"/>
+              <a:buChar char="•"/>
+            </a:pPr>
+            <a:r>
+              <a:rPr lang="ja-JP" altLang="en-US" sz="1400" b="1">
+                <a:latin typeface="メイリオ" panose="020B0604030504040204" pitchFamily="50" charset="-128"/>
+                <a:ea typeface="メイリオ" panose="020B0604030504040204" pitchFamily="50" charset="-128"/>
+              </a:rPr>
+              <a:t>オープンソースの自律型</a:t>
+            </a:r>
+            <a:r>
+              <a:rPr lang="en-US" altLang="ja-JP" sz="1400" b="1">
+                <a:latin typeface="メイリオ" panose="020B0604030504040204" pitchFamily="50" charset="-128"/>
+                <a:ea typeface="メイリオ" panose="020B0604030504040204" pitchFamily="50" charset="-128"/>
+              </a:rPr>
+              <a:t>AI</a:t>
+            </a:r>
+            <a:r>
+              <a:rPr lang="ja-JP" altLang="en-US" sz="1400" b="1">
+                <a:latin typeface="メイリオ" panose="020B0604030504040204" pitchFamily="50" charset="-128"/>
+                <a:ea typeface="メイリオ" panose="020B0604030504040204" pitchFamily="50" charset="-128"/>
+              </a:rPr>
+              <a:t>エージェント</a:t>
+            </a:r>
+            <a:endParaRPr lang="en-US" altLang="ja-JP" sz="1400" b="1">
+              <a:latin typeface="メイリオ" panose="020B0604030504040204" pitchFamily="50" charset="-128"/>
+              <a:ea typeface="メイリオ" panose="020B0604030504040204" pitchFamily="50" charset="-128"/>
+            </a:endParaRPr>
+          </a:p>
+          <a:p>
+            <a:pPr marL="285750" indent="-285750">
+              <a:lnSpc>
+                <a:spcPct val="150000"/>
+              </a:lnSpc>
+              <a:buFont typeface="Arial" panose="020B0604020202020204" pitchFamily="34" charset="0"/>
+              <a:buChar char="•"/>
+            </a:pPr>
+            <a:r>
+              <a:rPr kumimoji="1" lang="en-US" altLang="ja-JP" sz="1400" b="1">
+                <a:latin typeface="メイリオ" panose="020B0604030504040204" pitchFamily="50" charset="-128"/>
+                <a:ea typeface="メイリオ" panose="020B0604030504040204" pitchFamily="50" charset="-128"/>
+              </a:rPr>
+              <a:t>LLM</a:t>
+            </a:r>
+            <a:r>
+              <a:rPr kumimoji="1" lang="ja-JP" altLang="en-US" sz="1400" b="1">
+                <a:latin typeface="メイリオ" panose="020B0604030504040204" pitchFamily="50" charset="-128"/>
+                <a:ea typeface="メイリオ" panose="020B0604030504040204" pitchFamily="50" charset="-128"/>
+              </a:rPr>
+              <a:t>に自分の</a:t>
+            </a:r>
+            <a:r>
+              <a:rPr kumimoji="1" lang="en-US" altLang="ja-JP" sz="1400" b="1">
+                <a:latin typeface="メイリオ" panose="020B0604030504040204" pitchFamily="50" charset="-128"/>
+                <a:ea typeface="メイリオ" panose="020B0604030504040204" pitchFamily="50" charset="-128"/>
+              </a:rPr>
+              <a:t>PC</a:t>
+            </a:r>
+            <a:r>
+              <a:rPr kumimoji="1" lang="ja-JP" altLang="en-US" sz="1400" b="1">
+                <a:latin typeface="メイリオ" panose="020B0604030504040204" pitchFamily="50" charset="-128"/>
+                <a:ea typeface="メイリオ" panose="020B0604030504040204" pitchFamily="50" charset="-128"/>
+              </a:rPr>
+              <a:t>の権限を渡して自動操縦させる仕組み</a:t>
+            </a:r>
+            <a:endParaRPr kumimoji="1" lang="en-US" altLang="ja-JP" sz="1400">
+              <a:latin typeface="メイリオ" panose="020B0604030504040204" pitchFamily="50" charset="-128"/>
+              <a:ea typeface="メイリオ" panose="020B0604030504040204" pitchFamily="50" charset="-128"/>
+            </a:endParaRPr>
+          </a:p>
+        </p:txBody>
+      </p:sp>
+      <p:sp>
+        <p:nvSpPr>
+          <p:cNvPr id="2" name="正方形/長方形 1">
+            <a:extLst>
+              <a:ext uri="{FF2B5EF4-FFF2-40B4-BE49-F238E27FC236}">
+                <a16:creationId xmlns:a16="http://schemas.microsoft.com/office/drawing/2014/main" id="{8750085F-0792-92A8-8173-201BC92F05CF}"/>
+              </a:ext>
+            </a:extLst>
+          </p:cNvPr>
+          <p:cNvSpPr/>
+          <p:nvPr/>
+        </p:nvSpPr>
+        <p:spPr>
+          <a:xfrm>
+            <a:off x="185049" y="1995076"/>
+            <a:ext cx="3816523" cy="457200"/>
+          </a:xfrm>
+          <a:prstGeom prst="rect">
+            <a:avLst/>
+          </a:prstGeom>
+          <a:solidFill>
+            <a:schemeClr val="accent1">
+              <a:lumMod val="20000"/>
+              <a:lumOff val="80000"/>
+            </a:schemeClr>
+          </a:solidFill>
+          <a:ln>
+            <a:noFill/>
+          </a:ln>
+        </p:spPr>
+        <p:style>
+          <a:lnRef idx="2">
+            <a:schemeClr val="accent1">
+              <a:shade val="15000"/>
+            </a:schemeClr>
+          </a:lnRef>
+          <a:fillRef idx="1">
+            <a:schemeClr val="accent1"/>
+          </a:fillRef>
+          <a:effectRef idx="0">
+            <a:schemeClr val="accent1"/>
+          </a:effectRef>
+          <a:fontRef idx="minor">
+            <a:schemeClr val="lt1"/>
+          </a:fontRef>
+        </p:style>
+        <p:txBody>
+          <a:bodyPr rtlCol="0" anchor="ctr"/>
+          <a:lstStyle/>
+          <a:p>
+            <a:pPr algn="ctr"/>
+            <a:r>
+              <a:rPr lang="en-US" altLang="ja-JP" b="1">
+                <a:solidFill>
+                  <a:schemeClr val="tx1"/>
+                </a:solidFill>
+                <a:latin typeface="メイリオ" panose="020B0604030504040204" pitchFamily="50" charset="-128"/>
+                <a:ea typeface="メイリオ" panose="020B0604030504040204" pitchFamily="50" charset="-128"/>
+              </a:rPr>
+              <a:t>OpenClaw</a:t>
+            </a:r>
+            <a:r>
+              <a:rPr lang="ja-JP" altLang="en-US" b="1">
+                <a:solidFill>
+                  <a:schemeClr val="tx1"/>
+                </a:solidFill>
+                <a:latin typeface="メイリオ" panose="020B0604030504040204" pitchFamily="50" charset="-128"/>
+                <a:ea typeface="メイリオ" panose="020B0604030504040204" pitchFamily="50" charset="-128"/>
+              </a:rPr>
+              <a:t>の定義</a:t>
+            </a:r>
+            <a:endParaRPr kumimoji="1" lang="ja-JP" altLang="en-US" b="1">
+              <a:solidFill>
+                <a:schemeClr val="tx1"/>
+              </a:solidFill>
+              <a:latin typeface="メイリオ" panose="020B0604030504040204" pitchFamily="50" charset="-128"/>
+              <a:ea typeface="メイリオ" panose="020B0604030504040204" pitchFamily="50" charset="-128"/>
+            </a:endParaRPr>
+          </a:p>
+        </p:txBody>
+      </p:sp>
+      <p:sp>
+        <p:nvSpPr>
+          <p:cNvPr id="6" name="正方形/長方形 5">
+            <a:extLst>
+              <a:ext uri="{FF2B5EF4-FFF2-40B4-BE49-F238E27FC236}">
+                <a16:creationId xmlns:a16="http://schemas.microsoft.com/office/drawing/2014/main" id="{2A086A69-30DE-CE30-B561-F090C923DF94}"/>
+              </a:ext>
+            </a:extLst>
+          </p:cNvPr>
+          <p:cNvSpPr/>
+          <p:nvPr/>
+        </p:nvSpPr>
+        <p:spPr>
+          <a:xfrm>
+            <a:off x="4373907" y="1995076"/>
+            <a:ext cx="7633044" cy="457200"/>
+          </a:xfrm>
+          <a:prstGeom prst="rect">
+            <a:avLst/>
+          </a:prstGeom>
+          <a:solidFill>
+            <a:schemeClr val="accent1">
+              <a:lumMod val="20000"/>
+              <a:lumOff val="80000"/>
+            </a:schemeClr>
+          </a:solidFill>
+          <a:ln>
+            <a:noFill/>
+          </a:ln>
+        </p:spPr>
+        <p:style>
+          <a:lnRef idx="2">
+            <a:schemeClr val="accent1">
+              <a:shade val="15000"/>
+            </a:schemeClr>
+          </a:lnRef>
+          <a:fillRef idx="1">
+            <a:schemeClr val="accent1"/>
+          </a:fillRef>
+          <a:effectRef idx="0">
+            <a:schemeClr val="accent1"/>
+          </a:effectRef>
+          <a:fontRef idx="minor">
+            <a:schemeClr val="lt1"/>
+          </a:fontRef>
+        </p:style>
+        <p:txBody>
+          <a:bodyPr rtlCol="0" anchor="ctr"/>
+          <a:lstStyle/>
+          <a:p>
+            <a:pPr algn="ctr"/>
+            <a:r>
+              <a:rPr lang="ja-JP" altLang="en-US" b="1">
+                <a:solidFill>
+                  <a:schemeClr val="tx1"/>
+                </a:solidFill>
+                <a:latin typeface="メイリオ" panose="020B0604030504040204" pitchFamily="50" charset="-128"/>
+                <a:ea typeface="メイリオ" panose="020B0604030504040204" pitchFamily="50" charset="-128"/>
+              </a:rPr>
+              <a:t>市場の影響とブーム</a:t>
+            </a:r>
+            <a:endParaRPr kumimoji="1" lang="ja-JP" altLang="en-US" b="1">
+              <a:solidFill>
+                <a:schemeClr val="tx1"/>
+              </a:solidFill>
+              <a:latin typeface="メイリオ" panose="020B0604030504040204" pitchFamily="50" charset="-128"/>
+              <a:ea typeface="メイリオ" panose="020B0604030504040204" pitchFamily="50" charset="-128"/>
+            </a:endParaRPr>
+          </a:p>
+        </p:txBody>
+      </p:sp>
+      <p:sp>
+        <p:nvSpPr>
+          <p:cNvPr id="8" name="テキスト ボックス 7">
+            <a:extLst>
+              <a:ext uri="{FF2B5EF4-FFF2-40B4-BE49-F238E27FC236}">
+                <a16:creationId xmlns:a16="http://schemas.microsoft.com/office/drawing/2014/main" id="{802BBA0E-BF4C-434A-9572-703275593202}"/>
+              </a:ext>
+            </a:extLst>
+          </p:cNvPr>
+          <p:cNvSpPr txBox="1"/>
+          <p:nvPr/>
+        </p:nvSpPr>
+        <p:spPr>
+          <a:xfrm>
+            <a:off x="354254" y="901987"/>
+            <a:ext cx="11483492" cy="1034899"/>
+          </a:xfrm>
+          <a:prstGeom prst="rect">
+            <a:avLst/>
+          </a:prstGeom>
+          <a:noFill/>
+        </p:spPr>
+        <p:txBody>
+          <a:bodyPr wrap="square" rtlCol="0">
+            <a:spAutoFit/>
+          </a:bodyPr>
+          <a:lstStyle/>
+          <a:p>
+            <a:pPr>
+              <a:lnSpc>
+                <a:spcPct val="150000"/>
+              </a:lnSpc>
+            </a:pPr>
+            <a:r>
+              <a:rPr kumimoji="1" lang="en-US" altLang="ja-JP" sz="1400" b="1">
+                <a:latin typeface="メイリオ" panose="020B0604030504040204" pitchFamily="50" charset="-128"/>
+                <a:ea typeface="メイリオ" panose="020B0604030504040204" pitchFamily="50" charset="-128"/>
+              </a:rPr>
+              <a:t>OpenClaw</a:t>
+            </a:r>
+            <a:r>
+              <a:rPr kumimoji="1" lang="ja-JP" altLang="en-US" sz="1400">
+                <a:latin typeface="メイリオ" panose="020B0604030504040204" pitchFamily="50" charset="-128"/>
+                <a:ea typeface="メイリオ" panose="020B0604030504040204" pitchFamily="50" charset="-128"/>
+              </a:rPr>
+              <a:t>（旧</a:t>
+            </a:r>
+            <a:r>
+              <a:rPr kumimoji="1" lang="en-US" altLang="ja-JP" sz="1400">
+                <a:latin typeface="メイリオ" panose="020B0604030504040204" pitchFamily="50" charset="-128"/>
+                <a:ea typeface="メイリオ" panose="020B0604030504040204" pitchFamily="50" charset="-128"/>
+              </a:rPr>
+              <a:t>Clawdbot / </a:t>
+            </a:r>
+            <a:r>
+              <a:rPr kumimoji="1" lang="ja-JP" altLang="en-US" sz="1400">
+                <a:latin typeface="メイリオ" panose="020B0604030504040204" pitchFamily="50" charset="-128"/>
+                <a:ea typeface="メイリオ" panose="020B0604030504040204" pitchFamily="50" charset="-128"/>
+              </a:rPr>
+              <a:t>旧</a:t>
+            </a:r>
+            <a:r>
+              <a:rPr kumimoji="1" lang="en-US" altLang="ja-JP" sz="1400">
+                <a:latin typeface="メイリオ" panose="020B0604030504040204" pitchFamily="50" charset="-128"/>
+                <a:ea typeface="メイリオ" panose="020B0604030504040204" pitchFamily="50" charset="-128"/>
+              </a:rPr>
+              <a:t>Moltbot</a:t>
+            </a:r>
+            <a:r>
+              <a:rPr kumimoji="1" lang="ja-JP" altLang="en-US" sz="1400">
+                <a:latin typeface="メイリオ" panose="020B0604030504040204" pitchFamily="50" charset="-128"/>
+                <a:ea typeface="メイリオ" panose="020B0604030504040204" pitchFamily="50" charset="-128"/>
+              </a:rPr>
+              <a:t>）：１月下旬ごろから話題になり始めた</a:t>
+            </a:r>
+            <a:r>
+              <a:rPr kumimoji="1" lang="en-US" altLang="ja-JP" sz="1400">
+                <a:latin typeface="メイリオ" panose="020B0604030504040204" pitchFamily="50" charset="-128"/>
+                <a:ea typeface="メイリオ" panose="020B0604030504040204" pitchFamily="50" charset="-128"/>
+              </a:rPr>
+              <a:t>AI</a:t>
+            </a:r>
+            <a:r>
+              <a:rPr kumimoji="1" lang="ja-JP" altLang="en-US" sz="1400">
+                <a:latin typeface="メイリオ" panose="020B0604030504040204" pitchFamily="50" charset="-128"/>
+                <a:ea typeface="メイリオ" panose="020B0604030504040204" pitchFamily="50" charset="-128"/>
+              </a:rPr>
+              <a:t>アシスタント。また、「</a:t>
+            </a:r>
+            <a:r>
+              <a:rPr kumimoji="1" lang="en-US" altLang="ja-JP" sz="1400">
+                <a:latin typeface="メイリオ" panose="020B0604030504040204" pitchFamily="50" charset="-128"/>
+                <a:ea typeface="メイリオ" panose="020B0604030504040204" pitchFamily="50" charset="-128"/>
+              </a:rPr>
+              <a:t>Moltbook</a:t>
+            </a:r>
+            <a:r>
+              <a:rPr kumimoji="1" lang="ja-JP" altLang="en-US" sz="1400">
+                <a:latin typeface="メイリオ" panose="020B0604030504040204" pitchFamily="50" charset="-128"/>
+                <a:ea typeface="メイリオ" panose="020B0604030504040204" pitchFamily="50" charset="-128"/>
+              </a:rPr>
+              <a:t>」という</a:t>
+            </a:r>
+            <a:r>
+              <a:rPr kumimoji="1" lang="en-US" altLang="ja-JP" sz="1400">
+                <a:latin typeface="メイリオ" panose="020B0604030504040204" pitchFamily="50" charset="-128"/>
+                <a:ea typeface="メイリオ" panose="020B0604030504040204" pitchFamily="50" charset="-128"/>
+              </a:rPr>
+              <a:t>AI</a:t>
+            </a:r>
+            <a:r>
+              <a:rPr kumimoji="1" lang="ja-JP" altLang="en-US" sz="1400">
+                <a:latin typeface="メイリオ" panose="020B0604030504040204" pitchFamily="50" charset="-128"/>
+                <a:ea typeface="メイリオ" panose="020B0604030504040204" pitchFamily="50" charset="-128"/>
+              </a:rPr>
+              <a:t>エージェント専用の</a:t>
+            </a:r>
+            <a:r>
+              <a:rPr kumimoji="1" lang="en-US" altLang="ja-JP" sz="1400">
+                <a:latin typeface="メイリオ" panose="020B0604030504040204" pitchFamily="50" charset="-128"/>
+                <a:ea typeface="メイリオ" panose="020B0604030504040204" pitchFamily="50" charset="-128"/>
+              </a:rPr>
+              <a:t>Reddit</a:t>
+            </a:r>
+            <a:r>
+              <a:rPr kumimoji="1" lang="ja-JP" altLang="en-US" sz="1400">
+                <a:latin typeface="メイリオ" panose="020B0604030504040204" pitchFamily="50" charset="-128"/>
+                <a:ea typeface="メイリオ" panose="020B0604030504040204" pitchFamily="50" charset="-128"/>
+              </a:rPr>
+              <a:t>（海外の掲示板サイト）風の</a:t>
+            </a:r>
+            <a:r>
+              <a:rPr kumimoji="1" lang="en-US" altLang="ja-JP" sz="1400">
+                <a:latin typeface="メイリオ" panose="020B0604030504040204" pitchFamily="50" charset="-128"/>
+                <a:ea typeface="メイリオ" panose="020B0604030504040204" pitchFamily="50" charset="-128"/>
+              </a:rPr>
+              <a:t>SNS</a:t>
+            </a:r>
+            <a:r>
+              <a:rPr kumimoji="1" lang="ja-JP" altLang="en-US" sz="1400">
+                <a:latin typeface="メイリオ" panose="020B0604030504040204" pitchFamily="50" charset="-128"/>
+                <a:ea typeface="メイリオ" panose="020B0604030504040204" pitchFamily="50" charset="-128"/>
+              </a:rPr>
+              <a:t>で、人間は投稿できず「観察のみ」という設計のサービスも話題となった。</a:t>
+            </a:r>
+            <a:endParaRPr kumimoji="1" lang="en-US" altLang="ja-JP" sz="1400">
+              <a:latin typeface="メイリオ" panose="020B0604030504040204" pitchFamily="50" charset="-128"/>
+              <a:ea typeface="メイリオ" panose="020B0604030504040204" pitchFamily="50" charset="-128"/>
+            </a:endParaRPr>
+          </a:p>
+          <a:p>
+            <a:pPr>
+              <a:lnSpc>
+                <a:spcPct val="150000"/>
+              </a:lnSpc>
+            </a:pPr>
+            <a:r>
+              <a:rPr lang="ja-JP" altLang="en-US" sz="1400">
+                <a:latin typeface="メイリオ" panose="020B0604030504040204" pitchFamily="50" charset="-128"/>
+                <a:ea typeface="メイリオ" panose="020B0604030504040204" pitchFamily="50" charset="-128"/>
+                <a:hlinkClick r:id="rId4"/>
+              </a:rPr>
+              <a:t>開発者が</a:t>
+            </a:r>
+            <a:r>
+              <a:rPr lang="en-US" altLang="ja-JP" sz="1400">
+                <a:latin typeface="メイリオ" panose="020B0604030504040204" pitchFamily="50" charset="-128"/>
+                <a:ea typeface="メイリオ" panose="020B0604030504040204" pitchFamily="50" charset="-128"/>
+                <a:hlinkClick r:id="rId4"/>
+              </a:rPr>
+              <a:t>2</a:t>
+            </a:r>
+            <a:r>
+              <a:rPr lang="ja-JP" altLang="en-US" sz="1400">
+                <a:latin typeface="メイリオ" panose="020B0604030504040204" pitchFamily="50" charset="-128"/>
+                <a:ea typeface="メイリオ" panose="020B0604030504040204" pitchFamily="50" charset="-128"/>
+                <a:hlinkClick r:id="rId4"/>
+              </a:rPr>
+              <a:t>月中旬に</a:t>
+            </a:r>
+            <a:r>
+              <a:rPr lang="en-US" altLang="ja-JP" sz="1400">
+                <a:latin typeface="メイリオ" panose="020B0604030504040204" pitchFamily="50" charset="-128"/>
+                <a:ea typeface="メイリオ" panose="020B0604030504040204" pitchFamily="50" charset="-128"/>
+                <a:hlinkClick r:id="rId4"/>
+              </a:rPr>
+              <a:t>OpenAI</a:t>
+            </a:r>
+            <a:r>
+              <a:rPr lang="ja-JP" altLang="en-US" sz="1400">
+                <a:latin typeface="メイリオ" panose="020B0604030504040204" pitchFamily="50" charset="-128"/>
+                <a:ea typeface="メイリオ" panose="020B0604030504040204" pitchFamily="50" charset="-128"/>
+                <a:hlinkClick r:id="rId4"/>
+              </a:rPr>
+              <a:t>に参加すると発表し、</a:t>
+            </a:r>
+            <a:r>
+              <a:rPr lang="en-US" altLang="ja-JP" sz="1400">
+                <a:latin typeface="メイリオ" panose="020B0604030504040204" pitchFamily="50" charset="-128"/>
+                <a:ea typeface="メイリオ" panose="020B0604030504040204" pitchFamily="50" charset="-128"/>
+                <a:hlinkClick r:id="rId4"/>
+              </a:rPr>
+              <a:t>OpenClaw</a:t>
+            </a:r>
+            <a:r>
+              <a:rPr lang="ja-JP" altLang="en-US" sz="1400">
+                <a:latin typeface="メイリオ" panose="020B0604030504040204" pitchFamily="50" charset="-128"/>
+                <a:ea typeface="メイリオ" panose="020B0604030504040204" pitchFamily="50" charset="-128"/>
+                <a:hlinkClick r:id="rId4"/>
+              </a:rPr>
+              <a:t>は引き続きオープンソースとして、</a:t>
+            </a:r>
+            <a:r>
+              <a:rPr lang="en-US" altLang="ja-JP" sz="1400">
+                <a:latin typeface="メイリオ" panose="020B0604030504040204" pitchFamily="50" charset="-128"/>
+                <a:ea typeface="メイリオ" panose="020B0604030504040204" pitchFamily="50" charset="-128"/>
+                <a:hlinkClick r:id="rId4"/>
+              </a:rPr>
+              <a:t>OpenAI</a:t>
+            </a:r>
+            <a:r>
+              <a:rPr lang="ja-JP" altLang="en-US" sz="1400">
+                <a:latin typeface="メイリオ" panose="020B0604030504040204" pitchFamily="50" charset="-128"/>
+                <a:ea typeface="メイリオ" panose="020B0604030504040204" pitchFamily="50" charset="-128"/>
+                <a:hlinkClick r:id="rId4"/>
+              </a:rPr>
+              <a:t>のプロダクトの中核になるとのこと。</a:t>
+            </a:r>
+            <a:endParaRPr kumimoji="1" lang="en-US" altLang="ja-JP" sz="1400">
+              <a:latin typeface="メイリオ" panose="020B0604030504040204" pitchFamily="50" charset="-128"/>
+              <a:ea typeface="メイリオ" panose="020B0604030504040204" pitchFamily="50" charset="-128"/>
+            </a:endParaRPr>
+          </a:p>
+        </p:txBody>
+      </p:sp>
+      <p:grpSp>
+        <p:nvGrpSpPr>
+          <p:cNvPr id="13" name="グループ化 12">
+            <a:extLst>
+              <a:ext uri="{FF2B5EF4-FFF2-40B4-BE49-F238E27FC236}">
+                <a16:creationId xmlns:a16="http://schemas.microsoft.com/office/drawing/2014/main" id="{5C714A4B-ED2B-136D-0093-49A2EDA18DC3}"/>
+              </a:ext>
+            </a:extLst>
+          </p:cNvPr>
+          <p:cNvGrpSpPr/>
+          <p:nvPr/>
+        </p:nvGrpSpPr>
+        <p:grpSpPr>
+          <a:xfrm>
+            <a:off x="8305237" y="170207"/>
+            <a:ext cx="3353361" cy="725098"/>
+            <a:chOff x="4140743" y="2092499"/>
+            <a:chExt cx="4158431" cy="899179"/>
+          </a:xfrm>
+        </p:grpSpPr>
+        <p:sp>
+          <p:nvSpPr>
+            <p:cNvPr id="12" name="正方形/長方形 11">
+              <a:extLst>
+                <a:ext uri="{FF2B5EF4-FFF2-40B4-BE49-F238E27FC236}">
+                  <a16:creationId xmlns:a16="http://schemas.microsoft.com/office/drawing/2014/main" id="{40BB1BAA-23D4-896B-F5BF-BF4A733731FB}"/>
+                </a:ext>
+              </a:extLst>
+            </p:cNvPr>
+            <p:cNvSpPr/>
+            <p:nvPr/>
+          </p:nvSpPr>
+          <p:spPr>
+            <a:xfrm>
+              <a:off x="4140743" y="2092499"/>
+              <a:ext cx="4158431" cy="899179"/>
+            </a:xfrm>
+            <a:prstGeom prst="rect">
+              <a:avLst/>
+            </a:prstGeom>
+            <a:solidFill>
+              <a:schemeClr val="accent1">
+                <a:lumMod val="75000"/>
+              </a:schemeClr>
+            </a:solidFill>
+            <a:ln>
+              <a:noFill/>
+            </a:ln>
+          </p:spPr>
+          <p:style>
+            <a:lnRef idx="2">
+              <a:schemeClr val="accent1">
+                <a:shade val="15000"/>
+              </a:schemeClr>
+            </a:lnRef>
+            <a:fillRef idx="1">
+              <a:schemeClr val="accent1"/>
+            </a:fillRef>
+            <a:effectRef idx="0">
+              <a:schemeClr val="accent1"/>
+            </a:effectRef>
+            <a:fontRef idx="minor">
+              <a:schemeClr val="lt1"/>
+            </a:fontRef>
+          </p:style>
+          <p:txBody>
+            <a:bodyPr rtlCol="0" anchor="ctr"/>
+            <a:lstStyle/>
+            <a:p>
+              <a:pPr algn="ctr"/>
+              <a:endParaRPr kumimoji="1" lang="ja-JP" altLang="en-US"/>
+            </a:p>
+          </p:txBody>
+        </p:sp>
+        <p:pic>
+          <p:nvPicPr>
+            <p:cNvPr id="10" name="図 9">
+              <a:extLst>
+                <a:ext uri="{FF2B5EF4-FFF2-40B4-BE49-F238E27FC236}">
+                  <a16:creationId xmlns:a16="http://schemas.microsoft.com/office/drawing/2014/main" id="{4D5F04F2-7794-9F82-819E-D24D03538E3A}"/>
+                </a:ext>
+              </a:extLst>
+            </p:cNvPr>
+            <p:cNvPicPr>
+              <a:picLocks noChangeAspect="1"/>
+            </p:cNvPicPr>
+            <p:nvPr/>
+          </p:nvPicPr>
+          <p:blipFill>
+            <a:blip r:embed="rId5">
+              <a:extLst>
+                <a:ext uri="{28A0092B-C50C-407E-A947-70E740481C1C}">
+                  <a14:useLocalDpi xmlns:a14="http://schemas.microsoft.com/office/drawing/2010/main" val="0"/>
+                </a:ext>
+              </a:extLst>
+            </a:blip>
+            <a:stretch>
+              <a:fillRect/>
+            </a:stretch>
+          </p:blipFill>
+          <p:spPr>
+            <a:xfrm>
+              <a:off x="4276219" y="2143006"/>
+              <a:ext cx="3887478" cy="798164"/>
+            </a:xfrm>
+            <a:prstGeom prst="rect">
+              <a:avLst/>
+            </a:prstGeom>
+          </p:spPr>
+        </p:pic>
+      </p:grpSp>
+      <p:sp>
+        <p:nvSpPr>
+          <p:cNvPr id="14" name="正方形/長方形 13">
+            <a:extLst>
+              <a:ext uri="{FF2B5EF4-FFF2-40B4-BE49-F238E27FC236}">
+                <a16:creationId xmlns:a16="http://schemas.microsoft.com/office/drawing/2014/main" id="{54E0347B-31C1-7E7C-1465-6E2BEE1614E3}"/>
+              </a:ext>
+            </a:extLst>
+          </p:cNvPr>
+          <p:cNvSpPr/>
+          <p:nvPr/>
+        </p:nvSpPr>
+        <p:spPr>
+          <a:xfrm>
+            <a:off x="185049" y="3737134"/>
+            <a:ext cx="3816523" cy="457200"/>
+          </a:xfrm>
+          <a:prstGeom prst="rect">
+            <a:avLst/>
+          </a:prstGeom>
+          <a:solidFill>
+            <a:schemeClr val="accent1">
+              <a:lumMod val="20000"/>
+              <a:lumOff val="80000"/>
+            </a:schemeClr>
+          </a:solidFill>
+          <a:ln>
+            <a:noFill/>
+          </a:ln>
+        </p:spPr>
+        <p:style>
+          <a:lnRef idx="2">
+            <a:schemeClr val="accent1">
+              <a:shade val="15000"/>
+            </a:schemeClr>
+          </a:lnRef>
+          <a:fillRef idx="1">
+            <a:schemeClr val="accent1"/>
+          </a:fillRef>
+          <a:effectRef idx="0">
+            <a:schemeClr val="accent1"/>
+          </a:effectRef>
+          <a:fontRef idx="minor">
+            <a:schemeClr val="lt1"/>
+          </a:fontRef>
+        </p:style>
+        <p:txBody>
+          <a:bodyPr rtlCol="0" anchor="ctr"/>
+          <a:lstStyle/>
+          <a:p>
+            <a:pPr algn="ctr"/>
+            <a:r>
+              <a:rPr lang="ja-JP" altLang="en-US" b="1">
+                <a:solidFill>
+                  <a:schemeClr val="tx1"/>
+                </a:solidFill>
+                <a:latin typeface="メイリオ" panose="020B0604030504040204" pitchFamily="50" charset="-128"/>
+                <a:ea typeface="メイリオ" panose="020B0604030504040204" pitchFamily="50" charset="-128"/>
+              </a:rPr>
+              <a:t>従来ツール </a:t>
+            </a:r>
+            <a:r>
+              <a:rPr lang="en-US" altLang="ja-JP" b="1">
+                <a:solidFill>
+                  <a:schemeClr val="tx1"/>
+                </a:solidFill>
+                <a:latin typeface="メイリオ" panose="020B0604030504040204" pitchFamily="50" charset="-128"/>
+                <a:ea typeface="メイリオ" panose="020B0604030504040204" pitchFamily="50" charset="-128"/>
+              </a:rPr>
+              <a:t>vs OpenClaw</a:t>
+            </a:r>
+            <a:endParaRPr kumimoji="1" lang="ja-JP" altLang="en-US" b="1">
+              <a:solidFill>
+                <a:schemeClr val="tx1"/>
+              </a:solidFill>
+              <a:latin typeface="メイリオ" panose="020B0604030504040204" pitchFamily="50" charset="-128"/>
+              <a:ea typeface="メイリオ" panose="020B0604030504040204" pitchFamily="50" charset="-128"/>
+            </a:endParaRPr>
+          </a:p>
+        </p:txBody>
+      </p:sp>
+      <p:sp>
+        <p:nvSpPr>
+          <p:cNvPr id="15" name="テキスト ボックス 14">
+            <a:extLst>
+              <a:ext uri="{FF2B5EF4-FFF2-40B4-BE49-F238E27FC236}">
+                <a16:creationId xmlns:a16="http://schemas.microsoft.com/office/drawing/2014/main" id="{81C991D8-9152-FD48-5302-2A30E8191A73}"/>
+              </a:ext>
+            </a:extLst>
+          </p:cNvPr>
+          <p:cNvSpPr txBox="1"/>
+          <p:nvPr/>
+        </p:nvSpPr>
+        <p:spPr>
+          <a:xfrm>
+            <a:off x="362175" y="4927945"/>
+            <a:ext cx="1571157" cy="1177245"/>
+          </a:xfrm>
+          <a:prstGeom prst="rect">
+            <a:avLst/>
+          </a:prstGeom>
+          <a:noFill/>
+        </p:spPr>
+        <p:txBody>
+          <a:bodyPr wrap="square" rtlCol="0" anchor="ctr">
+            <a:spAutoFit/>
+          </a:bodyPr>
+          <a:lstStyle/>
+          <a:p>
+            <a:pPr algn="ctr">
+              <a:lnSpc>
+                <a:spcPct val="150000"/>
+              </a:lnSpc>
+            </a:pPr>
+            <a:r>
+              <a:rPr lang="en-US" altLang="ja-JP" sz="1200" b="1">
+                <a:latin typeface="メイリオ" panose="020B0604030504040204" pitchFamily="50" charset="-128"/>
+                <a:ea typeface="メイリオ" panose="020B0604030504040204" pitchFamily="50" charset="-128"/>
+              </a:rPr>
+              <a:t>Claude Code / Codex</a:t>
+            </a:r>
+            <a:r>
+              <a:rPr lang="ja-JP" altLang="en-US" sz="1200" b="1">
+                <a:latin typeface="メイリオ" panose="020B0604030504040204" pitchFamily="50" charset="-128"/>
+                <a:ea typeface="メイリオ" panose="020B0604030504040204" pitchFamily="50" charset="-128"/>
+              </a:rPr>
+              <a:t>など：</a:t>
+            </a:r>
+            <a:endParaRPr lang="en-US" altLang="ja-JP" sz="1200" b="1">
+              <a:latin typeface="メイリオ" panose="020B0604030504040204" pitchFamily="50" charset="-128"/>
+              <a:ea typeface="メイリオ" panose="020B0604030504040204" pitchFamily="50" charset="-128"/>
+            </a:endParaRPr>
+          </a:p>
+          <a:p>
+            <a:pPr algn="ctr">
+              <a:lnSpc>
+                <a:spcPct val="150000"/>
+              </a:lnSpc>
+            </a:pPr>
+            <a:r>
+              <a:rPr lang="ja-JP" altLang="en-US" sz="1200" b="1">
+                <a:latin typeface="メイリオ" panose="020B0604030504040204" pitchFamily="50" charset="-128"/>
+                <a:ea typeface="メイリオ" panose="020B0604030504040204" pitchFamily="50" charset="-128"/>
+              </a:rPr>
+              <a:t>ユーザーが起動して</a:t>
+            </a:r>
+            <a:endParaRPr lang="en-US" altLang="ja-JP" sz="1200" b="1">
+              <a:latin typeface="メイリオ" panose="020B0604030504040204" pitchFamily="50" charset="-128"/>
+              <a:ea typeface="メイリオ" panose="020B0604030504040204" pitchFamily="50" charset="-128"/>
+            </a:endParaRPr>
+          </a:p>
+          <a:p>
+            <a:pPr algn="ctr">
+              <a:lnSpc>
+                <a:spcPct val="150000"/>
+              </a:lnSpc>
+            </a:pPr>
+            <a:r>
+              <a:rPr kumimoji="1" lang="ja-JP" altLang="en-US" sz="1200" b="1">
+                <a:latin typeface="メイリオ" panose="020B0604030504040204" pitchFamily="50" charset="-128"/>
+                <a:ea typeface="メイリオ" panose="020B0604030504040204" pitchFamily="50" charset="-128"/>
+              </a:rPr>
+              <a:t>対話するツール</a:t>
+            </a:r>
+            <a:endParaRPr kumimoji="1" lang="en-US" altLang="ja-JP" sz="1200">
+              <a:latin typeface="メイリオ" panose="020B0604030504040204" pitchFamily="50" charset="-128"/>
+              <a:ea typeface="メイリオ" panose="020B0604030504040204" pitchFamily="50" charset="-128"/>
+            </a:endParaRPr>
+          </a:p>
+        </p:txBody>
+      </p:sp>
+      <p:sp>
+        <p:nvSpPr>
+          <p:cNvPr id="16" name="テキスト ボックス 15">
+            <a:extLst>
+              <a:ext uri="{FF2B5EF4-FFF2-40B4-BE49-F238E27FC236}">
+                <a16:creationId xmlns:a16="http://schemas.microsoft.com/office/drawing/2014/main" id="{F6E011A8-3C3D-863B-5821-396C320A52E7}"/>
+              </a:ext>
+            </a:extLst>
+          </p:cNvPr>
+          <p:cNvSpPr txBox="1"/>
+          <p:nvPr/>
+        </p:nvSpPr>
+        <p:spPr>
+          <a:xfrm>
+            <a:off x="2247127" y="4868441"/>
+            <a:ext cx="1571157" cy="900246"/>
+          </a:xfrm>
+          <a:prstGeom prst="rect">
+            <a:avLst/>
+          </a:prstGeom>
+          <a:noFill/>
+        </p:spPr>
+        <p:txBody>
+          <a:bodyPr wrap="square" rtlCol="0" anchor="ctr">
+            <a:spAutoFit/>
+          </a:bodyPr>
+          <a:lstStyle/>
+          <a:p>
+            <a:pPr algn="ctr">
+              <a:lnSpc>
+                <a:spcPct val="150000"/>
+              </a:lnSpc>
+            </a:pPr>
+            <a:r>
+              <a:rPr lang="en-US" altLang="ja-JP" sz="1200" b="1">
+                <a:latin typeface="メイリオ" panose="020B0604030504040204" pitchFamily="50" charset="-128"/>
+                <a:ea typeface="メイリオ" panose="020B0604030504040204" pitchFamily="50" charset="-128"/>
+              </a:rPr>
+              <a:t>OpenClaw</a:t>
+            </a:r>
+            <a:r>
+              <a:rPr lang="ja-JP" altLang="en-US" sz="1200" b="1">
+                <a:latin typeface="メイリオ" panose="020B0604030504040204" pitchFamily="50" charset="-128"/>
+                <a:ea typeface="メイリオ" panose="020B0604030504040204" pitchFamily="50" charset="-128"/>
+              </a:rPr>
+              <a:t>：</a:t>
+            </a:r>
+            <a:endParaRPr lang="en-US" altLang="ja-JP" sz="1200" b="1">
+              <a:latin typeface="メイリオ" panose="020B0604030504040204" pitchFamily="50" charset="-128"/>
+              <a:ea typeface="メイリオ" panose="020B0604030504040204" pitchFamily="50" charset="-128"/>
+            </a:endParaRPr>
+          </a:p>
+          <a:p>
+            <a:pPr algn="ctr">
+              <a:lnSpc>
+                <a:spcPct val="150000"/>
+              </a:lnSpc>
+            </a:pPr>
+            <a:r>
+              <a:rPr kumimoji="1" lang="ja-JP" altLang="en-US" sz="1200" b="1">
+                <a:latin typeface="メイリオ" panose="020B0604030504040204" pitchFamily="50" charset="-128"/>
+                <a:ea typeface="メイリオ" panose="020B0604030504040204" pitchFamily="50" charset="-128"/>
+              </a:rPr>
+              <a:t>エージェントが常駐して自分から動く</a:t>
+            </a:r>
+            <a:endParaRPr kumimoji="1" lang="en-US" altLang="ja-JP" sz="1200">
+              <a:latin typeface="メイリオ" panose="020B0604030504040204" pitchFamily="50" charset="-128"/>
+              <a:ea typeface="メイリオ" panose="020B0604030504040204" pitchFamily="50" charset="-128"/>
+            </a:endParaRPr>
+          </a:p>
+        </p:txBody>
+      </p:sp>
+      <p:pic>
+        <p:nvPicPr>
+          <p:cNvPr id="21" name="図 20">
+            <a:extLst>
+              <a:ext uri="{FF2B5EF4-FFF2-40B4-BE49-F238E27FC236}">
+                <a16:creationId xmlns:a16="http://schemas.microsoft.com/office/drawing/2014/main" id="{E9A6E7BE-0AA1-5328-6471-F0AAB91D717C}"/>
+              </a:ext>
+            </a:extLst>
+          </p:cNvPr>
+          <p:cNvPicPr>
+            <a:picLocks noChangeAspect="1"/>
+          </p:cNvPicPr>
+          <p:nvPr/>
+        </p:nvPicPr>
+        <p:blipFill>
+          <a:blip r:embed="rId6"/>
+          <a:stretch>
+            <a:fillRect/>
+          </a:stretch>
+        </p:blipFill>
+        <p:spPr>
+          <a:xfrm>
+            <a:off x="2650153" y="4319517"/>
+            <a:ext cx="765105" cy="577371"/>
+          </a:xfrm>
+          <a:prstGeom prst="rect">
+            <a:avLst/>
+          </a:prstGeom>
+        </p:spPr>
+      </p:pic>
+      <p:pic>
+        <p:nvPicPr>
+          <p:cNvPr id="23" name="図 22">
+            <a:extLst>
+              <a:ext uri="{FF2B5EF4-FFF2-40B4-BE49-F238E27FC236}">
+                <a16:creationId xmlns:a16="http://schemas.microsoft.com/office/drawing/2014/main" id="{0EF22DC6-ACCD-A1E6-6FEA-20BA0578B094}"/>
+              </a:ext>
+            </a:extLst>
+          </p:cNvPr>
+          <p:cNvPicPr>
+            <a:picLocks noChangeAspect="1"/>
+          </p:cNvPicPr>
+          <p:nvPr/>
+        </p:nvPicPr>
+        <p:blipFill>
+          <a:blip r:embed="rId7">
+            <a:extLst>
+              <a:ext uri="{28A0092B-C50C-407E-A947-70E740481C1C}">
+                <a14:useLocalDpi xmlns:a14="http://schemas.microsoft.com/office/drawing/2010/main" val="0"/>
+              </a:ext>
+            </a:extLst>
+          </a:blip>
+          <a:stretch>
+            <a:fillRect/>
+          </a:stretch>
+        </p:blipFill>
+        <p:spPr>
+          <a:xfrm>
+            <a:off x="932643" y="4340567"/>
+            <a:ext cx="864822" cy="486462"/>
+          </a:xfrm>
+          <a:prstGeom prst="rect">
+            <a:avLst/>
+          </a:prstGeom>
+        </p:spPr>
+      </p:pic>
+      <p:pic>
+        <p:nvPicPr>
+          <p:cNvPr id="25" name="図 24">
+            <a:extLst>
+              <a:ext uri="{FF2B5EF4-FFF2-40B4-BE49-F238E27FC236}">
+                <a16:creationId xmlns:a16="http://schemas.microsoft.com/office/drawing/2014/main" id="{B3879B52-AA5F-DB7F-5CC7-EFB58AD72DEB}"/>
+              </a:ext>
+            </a:extLst>
+          </p:cNvPr>
+          <p:cNvPicPr>
+            <a:picLocks noChangeAspect="1"/>
+          </p:cNvPicPr>
+          <p:nvPr/>
+        </p:nvPicPr>
+        <p:blipFill>
+          <a:blip r:embed="rId8">
+            <a:extLst>
+              <a:ext uri="{28A0092B-C50C-407E-A947-70E740481C1C}">
+                <a14:useLocalDpi xmlns:a14="http://schemas.microsoft.com/office/drawing/2010/main" val="0"/>
+              </a:ext>
+            </a:extLst>
+          </a:blip>
+          <a:stretch>
+            <a:fillRect/>
+          </a:stretch>
+        </p:blipFill>
+        <p:spPr>
+          <a:xfrm>
+            <a:off x="443053" y="4406540"/>
+            <a:ext cx="375172" cy="375172"/>
+          </a:xfrm>
+          <a:prstGeom prst="rect">
+            <a:avLst/>
+          </a:prstGeom>
+        </p:spPr>
+      </p:pic>
+      <p:sp>
+        <p:nvSpPr>
+          <p:cNvPr id="26" name="二等辺三角形 25">
+            <a:extLst>
+              <a:ext uri="{FF2B5EF4-FFF2-40B4-BE49-F238E27FC236}">
+                <a16:creationId xmlns:a16="http://schemas.microsoft.com/office/drawing/2014/main" id="{F5584888-0C13-52DA-BB45-E6D6B536CF24}"/>
+              </a:ext>
+            </a:extLst>
+          </p:cNvPr>
+          <p:cNvSpPr/>
+          <p:nvPr/>
+        </p:nvSpPr>
+        <p:spPr>
+          <a:xfrm rot="10800000">
+            <a:off x="2650153" y="5781855"/>
+            <a:ext cx="765104" cy="214473"/>
+          </a:xfrm>
+          <a:prstGeom prst="triangle">
+            <a:avLst/>
+          </a:prstGeom>
+          <a:solidFill>
+            <a:srgbClr val="002060"/>
+          </a:solidFill>
+          <a:ln>
+            <a:noFill/>
+          </a:ln>
+        </p:spPr>
+        <p:style>
+          <a:lnRef idx="2">
+            <a:schemeClr val="accent1">
+              <a:shade val="15000"/>
+            </a:schemeClr>
+          </a:lnRef>
+          <a:fillRef idx="1">
+            <a:schemeClr val="accent1"/>
+          </a:fillRef>
+          <a:effectRef idx="0">
+            <a:schemeClr val="accent1"/>
+          </a:effectRef>
+          <a:fontRef idx="minor">
+            <a:schemeClr val="lt1"/>
+          </a:fontRef>
+        </p:style>
+        <p:txBody>
+          <a:bodyPr rtlCol="0" anchor="ctr"/>
+          <a:lstStyle/>
+          <a:p>
+            <a:pPr algn="ctr"/>
+            <a:endParaRPr kumimoji="1" lang="ja-JP" altLang="en-US"/>
+          </a:p>
+        </p:txBody>
+      </p:sp>
+      <p:sp>
+        <p:nvSpPr>
+          <p:cNvPr id="27" name="テキスト ボックス 26">
+            <a:extLst>
+              <a:ext uri="{FF2B5EF4-FFF2-40B4-BE49-F238E27FC236}">
+                <a16:creationId xmlns:a16="http://schemas.microsoft.com/office/drawing/2014/main" id="{91CD9176-726B-89BB-77D7-7D841AB820D3}"/>
+              </a:ext>
+            </a:extLst>
+          </p:cNvPr>
+          <p:cNvSpPr txBox="1"/>
+          <p:nvPr/>
+        </p:nvSpPr>
+        <p:spPr>
+          <a:xfrm>
+            <a:off x="2247127" y="5996329"/>
+            <a:ext cx="1571157" cy="623248"/>
+          </a:xfrm>
+          <a:prstGeom prst="rect">
+            <a:avLst/>
+          </a:prstGeom>
+          <a:noFill/>
+        </p:spPr>
+        <p:txBody>
+          <a:bodyPr wrap="square" rtlCol="0" anchor="ctr">
+            <a:spAutoFit/>
+          </a:bodyPr>
+          <a:lstStyle/>
+          <a:p>
+            <a:pPr algn="ctr">
+              <a:lnSpc>
+                <a:spcPct val="150000"/>
+              </a:lnSpc>
+            </a:pPr>
+            <a:r>
+              <a:rPr kumimoji="1" lang="ja-JP" altLang="en-US" sz="1200" b="1">
+                <a:latin typeface="メイリオ" panose="020B0604030504040204" pitchFamily="50" charset="-128"/>
+                <a:ea typeface="メイリオ" panose="020B0604030504040204" pitchFamily="50" charset="-128"/>
+              </a:rPr>
+              <a:t>常駐型・一段上の</a:t>
+            </a:r>
+            <a:endParaRPr kumimoji="1" lang="en-US" altLang="ja-JP" sz="1200" b="1">
+              <a:latin typeface="メイリオ" panose="020B0604030504040204" pitchFamily="50" charset="-128"/>
+              <a:ea typeface="メイリオ" panose="020B0604030504040204" pitchFamily="50" charset="-128"/>
+            </a:endParaRPr>
+          </a:p>
+          <a:p>
+            <a:pPr algn="ctr">
+              <a:lnSpc>
+                <a:spcPct val="150000"/>
+              </a:lnSpc>
+            </a:pPr>
+            <a:r>
+              <a:rPr kumimoji="1" lang="ja-JP" altLang="en-US" sz="1200" b="1">
+                <a:latin typeface="メイリオ" panose="020B0604030504040204" pitchFamily="50" charset="-128"/>
+                <a:ea typeface="メイリオ" panose="020B0604030504040204" pitchFamily="50" charset="-128"/>
+              </a:rPr>
+              <a:t>レイヤー</a:t>
+            </a:r>
+            <a:endParaRPr kumimoji="1" lang="en-US" altLang="ja-JP" sz="1200" b="1">
+              <a:latin typeface="メイリオ" panose="020B0604030504040204" pitchFamily="50" charset="-128"/>
+              <a:ea typeface="メイリオ" panose="020B0604030504040204" pitchFamily="50" charset="-128"/>
+            </a:endParaRPr>
+          </a:p>
+        </p:txBody>
+      </p:sp>
+      <p:sp>
+        <p:nvSpPr>
+          <p:cNvPr id="33" name="テキスト ボックス 32">
+            <a:extLst>
+              <a:ext uri="{FF2B5EF4-FFF2-40B4-BE49-F238E27FC236}">
+                <a16:creationId xmlns:a16="http://schemas.microsoft.com/office/drawing/2014/main" id="{92D61A21-E713-C0C1-4E39-C0E272DF3E18}"/>
+              </a:ext>
+            </a:extLst>
+          </p:cNvPr>
+          <p:cNvSpPr txBox="1"/>
+          <p:nvPr/>
+        </p:nvSpPr>
+        <p:spPr>
+          <a:xfrm>
+            <a:off x="4420650" y="2633901"/>
+            <a:ext cx="2931354" cy="2973891"/>
+          </a:xfrm>
+          <a:prstGeom prst="rect">
+            <a:avLst/>
+          </a:prstGeom>
+          <a:noFill/>
+        </p:spPr>
+        <p:txBody>
+          <a:bodyPr wrap="square" rtlCol="0">
+            <a:spAutoFit/>
+          </a:bodyPr>
+          <a:lstStyle/>
+          <a:p>
+            <a:pPr>
+              <a:lnSpc>
+                <a:spcPct val="150000"/>
+              </a:lnSpc>
+            </a:pPr>
+            <a:r>
+              <a:rPr kumimoji="1" lang="ja-JP" altLang="en-US" sz="1400" b="1">
+                <a:latin typeface="メイリオ" panose="020B0604030504040204" pitchFamily="50" charset="-128"/>
+                <a:ea typeface="メイリオ" panose="020B0604030504040204" pitchFamily="50" charset="-128"/>
+              </a:rPr>
+              <a:t>常時稼働させるための環境として、一部のユーザーが</a:t>
+            </a:r>
+            <a:r>
+              <a:rPr kumimoji="1" lang="en-US" altLang="ja-JP" sz="1400" b="1">
+                <a:latin typeface="メイリオ" panose="020B0604030504040204" pitchFamily="50" charset="-128"/>
+                <a:ea typeface="メイリオ" panose="020B0604030504040204" pitchFamily="50" charset="-128"/>
+              </a:rPr>
+              <a:t>Mac mini</a:t>
+            </a:r>
+            <a:r>
+              <a:rPr kumimoji="1" lang="ja-JP" altLang="en-US" sz="1400" b="1">
+                <a:latin typeface="メイリオ" panose="020B0604030504040204" pitchFamily="50" charset="-128"/>
+                <a:ea typeface="メイリオ" panose="020B0604030504040204" pitchFamily="50" charset="-128"/>
+              </a:rPr>
+              <a:t>を複数購入し、世界的に品薄となる。</a:t>
+            </a:r>
+            <a:endParaRPr kumimoji="1" lang="en-US" altLang="ja-JP" sz="1400" b="1">
+              <a:latin typeface="メイリオ" panose="020B0604030504040204" pitchFamily="50" charset="-128"/>
+              <a:ea typeface="メイリオ" panose="020B0604030504040204" pitchFamily="50" charset="-128"/>
+            </a:endParaRPr>
+          </a:p>
+          <a:p>
+            <a:pPr>
+              <a:lnSpc>
+                <a:spcPct val="150000"/>
+              </a:lnSpc>
+            </a:pPr>
+            <a:r>
+              <a:rPr kumimoji="1" lang="ja-JP" altLang="en-US" sz="1400">
+                <a:latin typeface="メイリオ" panose="020B0604030504040204" pitchFamily="50" charset="-128"/>
+                <a:ea typeface="メイリオ" panose="020B0604030504040204" pitchFamily="50" charset="-128"/>
+              </a:rPr>
+              <a:t>→ </a:t>
+            </a:r>
+            <a:r>
+              <a:rPr kumimoji="1" lang="en-US" altLang="ja-JP" sz="1400">
+                <a:latin typeface="メイリオ" panose="020B0604030504040204" pitchFamily="50" charset="-128"/>
+                <a:ea typeface="メイリオ" panose="020B0604030504040204" pitchFamily="50" charset="-128"/>
+              </a:rPr>
+              <a:t>Mac mini</a:t>
+            </a:r>
+            <a:r>
+              <a:rPr kumimoji="1" lang="ja-JP" altLang="en-US" sz="1400">
+                <a:latin typeface="メイリオ" panose="020B0604030504040204" pitchFamily="50" charset="-128"/>
+                <a:ea typeface="メイリオ" panose="020B0604030504040204" pitchFamily="50" charset="-128"/>
+              </a:rPr>
+              <a:t>じゃなくても動くが、</a:t>
+            </a:r>
+            <a:endParaRPr kumimoji="1" lang="en-US" altLang="ja-JP" sz="1400">
+              <a:latin typeface="メイリオ" panose="020B0604030504040204" pitchFamily="50" charset="-128"/>
+              <a:ea typeface="メイリオ" panose="020B0604030504040204" pitchFamily="50" charset="-128"/>
+            </a:endParaRPr>
+          </a:p>
+          <a:p>
+            <a:pPr marL="285750" indent="-285750">
+              <a:lnSpc>
+                <a:spcPct val="150000"/>
+              </a:lnSpc>
+              <a:buFont typeface="Arial" panose="020B0604020202020204" pitchFamily="34" charset="0"/>
+              <a:buChar char="•"/>
+            </a:pPr>
+            <a:r>
+              <a:rPr lang="ja-JP" altLang="en-US" sz="1400">
+                <a:latin typeface="メイリオ" panose="020B0604030504040204" pitchFamily="50" charset="-128"/>
+                <a:ea typeface="メイリオ" panose="020B0604030504040204" pitchFamily="50" charset="-128"/>
+              </a:rPr>
+              <a:t>メインの</a:t>
+            </a:r>
+            <a:r>
+              <a:rPr lang="en-US" altLang="ja-JP" sz="1400">
+                <a:latin typeface="メイリオ" panose="020B0604030504040204" pitchFamily="50" charset="-128"/>
+                <a:ea typeface="メイリオ" panose="020B0604030504040204" pitchFamily="50" charset="-128"/>
+              </a:rPr>
+              <a:t>PC</a:t>
+            </a:r>
+            <a:r>
+              <a:rPr lang="ja-JP" altLang="en-US" sz="1400">
+                <a:latin typeface="メイリオ" panose="020B0604030504040204" pitchFamily="50" charset="-128"/>
+                <a:ea typeface="メイリオ" panose="020B0604030504040204" pitchFamily="50" charset="-128"/>
+              </a:rPr>
+              <a:t>だとセキュリティ上入れたくない</a:t>
+            </a:r>
+            <a:endParaRPr lang="en-US" altLang="ja-JP" sz="1400">
+              <a:latin typeface="メイリオ" panose="020B0604030504040204" pitchFamily="50" charset="-128"/>
+              <a:ea typeface="メイリオ" panose="020B0604030504040204" pitchFamily="50" charset="-128"/>
+            </a:endParaRPr>
+          </a:p>
+          <a:p>
+            <a:pPr marL="285750" indent="-285750">
+              <a:lnSpc>
+                <a:spcPct val="150000"/>
+              </a:lnSpc>
+              <a:buFont typeface="Arial" panose="020B0604020202020204" pitchFamily="34" charset="0"/>
+              <a:buChar char="•"/>
+            </a:pPr>
+            <a:r>
+              <a:rPr kumimoji="1" lang="ja-JP" altLang="en-US" sz="1400">
+                <a:latin typeface="メイリオ" panose="020B0604030504040204" pitchFamily="50" charset="-128"/>
+                <a:ea typeface="メイリオ" panose="020B0604030504040204" pitchFamily="50" charset="-128"/>
+              </a:rPr>
+              <a:t>ローカル</a:t>
+            </a:r>
+            <a:r>
+              <a:rPr kumimoji="1" lang="en-US" altLang="ja-JP" sz="1400">
+                <a:latin typeface="メイリオ" panose="020B0604030504040204" pitchFamily="50" charset="-128"/>
+                <a:ea typeface="メイリオ" panose="020B0604030504040204" pitchFamily="50" charset="-128"/>
+              </a:rPr>
+              <a:t>LLM</a:t>
+            </a:r>
+            <a:r>
+              <a:rPr kumimoji="1" lang="ja-JP" altLang="en-US" sz="1400">
+                <a:latin typeface="メイリオ" panose="020B0604030504040204" pitchFamily="50" charset="-128"/>
+                <a:ea typeface="メイリオ" panose="020B0604030504040204" pitchFamily="50" charset="-128"/>
+              </a:rPr>
+              <a:t>を利用したいためある程度のスペックがある</a:t>
+            </a:r>
+            <a:r>
+              <a:rPr kumimoji="1" lang="en-US" altLang="ja-JP" sz="1400">
+                <a:latin typeface="メイリオ" panose="020B0604030504040204" pitchFamily="50" charset="-128"/>
+                <a:ea typeface="メイリオ" panose="020B0604030504040204" pitchFamily="50" charset="-128"/>
+              </a:rPr>
+              <a:t>PC</a:t>
+            </a:r>
+            <a:r>
+              <a:rPr kumimoji="1" lang="ja-JP" altLang="en-US" sz="1400">
+                <a:latin typeface="メイリオ" panose="020B0604030504040204" pitchFamily="50" charset="-128"/>
+                <a:ea typeface="メイリオ" panose="020B0604030504040204" pitchFamily="50" charset="-128"/>
+              </a:rPr>
+              <a:t>を利用したい等の需要あり。</a:t>
+            </a:r>
+            <a:endParaRPr kumimoji="1" lang="en-US" altLang="ja-JP" sz="1400">
+              <a:latin typeface="メイリオ" panose="020B0604030504040204" pitchFamily="50" charset="-128"/>
+              <a:ea typeface="メイリオ" panose="020B0604030504040204" pitchFamily="50" charset="-128"/>
+            </a:endParaRPr>
+          </a:p>
+        </p:txBody>
+      </p:sp>
+      <p:pic>
+        <p:nvPicPr>
+          <p:cNvPr id="35" name="図 34">
+            <a:hlinkClick r:id="rId9"/>
+            <a:extLst>
+              <a:ext uri="{FF2B5EF4-FFF2-40B4-BE49-F238E27FC236}">
+                <a16:creationId xmlns:a16="http://schemas.microsoft.com/office/drawing/2014/main" id="{9F351DE9-E676-ABA5-7FBB-9F0059A4BBF6}"/>
+              </a:ext>
+            </a:extLst>
+          </p:cNvPr>
+          <p:cNvPicPr>
+            <a:picLocks noChangeAspect="1"/>
+          </p:cNvPicPr>
+          <p:nvPr/>
+        </p:nvPicPr>
+        <p:blipFill>
+          <a:blip r:embed="rId10">
+            <a:extLst>
+              <a:ext uri="{28A0092B-C50C-407E-A947-70E740481C1C}">
+                <a14:useLocalDpi xmlns:a14="http://schemas.microsoft.com/office/drawing/2010/main" val="0"/>
+              </a:ext>
+            </a:extLst>
+          </a:blip>
+          <a:stretch>
+            <a:fillRect/>
+          </a:stretch>
+        </p:blipFill>
+        <p:spPr>
+          <a:xfrm>
+            <a:off x="7668670" y="2633901"/>
+            <a:ext cx="4161155" cy="3120866"/>
+          </a:xfrm>
+          <a:prstGeom prst="rect">
+            <a:avLst/>
+          </a:prstGeom>
+          <a:ln>
+            <a:noFill/>
+          </a:ln>
+          <a:effectLst>
+            <a:outerShdw blurRad="190500" algn="tl" rotWithShape="0">
+              <a:srgbClr val="000000">
+                <a:alpha val="70000"/>
+              </a:srgbClr>
+            </a:outerShdw>
+          </a:effectLst>
+        </p:spPr>
+      </p:pic>
+      <p:sp>
+        <p:nvSpPr>
+          <p:cNvPr id="37" name="テキスト ボックス 36">
+            <a:extLst>
+              <a:ext uri="{FF2B5EF4-FFF2-40B4-BE49-F238E27FC236}">
+                <a16:creationId xmlns:a16="http://schemas.microsoft.com/office/drawing/2014/main" id="{0170E085-7A8B-5943-9ABA-9A99C2FC7880}"/>
+              </a:ext>
+            </a:extLst>
+          </p:cNvPr>
+          <p:cNvSpPr txBox="1"/>
+          <p:nvPr/>
+        </p:nvSpPr>
+        <p:spPr>
+          <a:xfrm>
+            <a:off x="4438138" y="6046343"/>
+            <a:ext cx="7399608" cy="523220"/>
+          </a:xfrm>
+          <a:prstGeom prst="rect">
+            <a:avLst/>
+          </a:prstGeom>
+          <a:noFill/>
+        </p:spPr>
+        <p:txBody>
+          <a:bodyPr wrap="square">
+            <a:spAutoFit/>
+          </a:bodyPr>
+          <a:lstStyle/>
+          <a:p>
+            <a:r>
+              <a:rPr lang="ja-JP" altLang="en-US" sz="1400">
+                <a:latin typeface="メイリオ" panose="020B0604030504040204" pitchFamily="50" charset="-128"/>
+                <a:ea typeface="メイリオ" panose="020B0604030504040204" pitchFamily="50" charset="-128"/>
+              </a:rPr>
+              <a:t>参考：</a:t>
+            </a:r>
+            <a:r>
+              <a:rPr lang="ja-JP" altLang="en-US" sz="1400">
+                <a:latin typeface="メイリオ" panose="020B0604030504040204" pitchFamily="50" charset="-128"/>
+                <a:ea typeface="メイリオ" panose="020B0604030504040204" pitchFamily="50" charset="-128"/>
+                <a:hlinkClick r:id="rId11"/>
+              </a:rPr>
+              <a:t>パーソナル</a:t>
+            </a:r>
+            <a:r>
+              <a:rPr lang="en-US" altLang="ja-JP" sz="1400">
+                <a:latin typeface="メイリオ" panose="020B0604030504040204" pitchFamily="50" charset="-128"/>
+                <a:ea typeface="メイリオ" panose="020B0604030504040204" pitchFamily="50" charset="-128"/>
+                <a:hlinkClick r:id="rId11"/>
+              </a:rPr>
+              <a:t>AI</a:t>
+            </a:r>
+            <a:r>
+              <a:rPr lang="ja-JP" altLang="en-US" sz="1400">
+                <a:latin typeface="メイリオ" panose="020B0604030504040204" pitchFamily="50" charset="-128"/>
+                <a:ea typeface="メイリオ" panose="020B0604030504040204" pitchFamily="50" charset="-128"/>
+                <a:hlinkClick r:id="rId11"/>
+              </a:rPr>
+              <a:t>エージェントを作れる</a:t>
+            </a:r>
+            <a:r>
+              <a:rPr lang="en-US" altLang="ja-JP" sz="1400">
+                <a:latin typeface="メイリオ" panose="020B0604030504040204" pitchFamily="50" charset="-128"/>
+                <a:ea typeface="メイリオ" panose="020B0604030504040204" pitchFamily="50" charset="-128"/>
+                <a:hlinkClick r:id="rId11"/>
+              </a:rPr>
+              <a:t>OpenClaw</a:t>
+            </a:r>
+            <a:r>
+              <a:rPr lang="ja-JP" altLang="en-US" sz="1400">
+                <a:latin typeface="メイリオ" panose="020B0604030504040204" pitchFamily="50" charset="-128"/>
+                <a:ea typeface="メイリオ" panose="020B0604030504040204" pitchFamily="50" charset="-128"/>
+                <a:hlinkClick r:id="rId11"/>
+              </a:rPr>
+              <a:t>（旧</a:t>
+            </a:r>
+            <a:r>
+              <a:rPr lang="en-US" altLang="ja-JP" sz="1400">
+                <a:latin typeface="メイリオ" panose="020B0604030504040204" pitchFamily="50" charset="-128"/>
+                <a:ea typeface="メイリオ" panose="020B0604030504040204" pitchFamily="50" charset="-128"/>
+                <a:hlinkClick r:id="rId11"/>
+              </a:rPr>
+              <a:t>Clawdbot</a:t>
+            </a:r>
+            <a:r>
+              <a:rPr lang="ja-JP" altLang="en-US" sz="1400">
+                <a:latin typeface="メイリオ" panose="020B0604030504040204" pitchFamily="50" charset="-128"/>
+                <a:ea typeface="メイリオ" panose="020B0604030504040204" pitchFamily="50" charset="-128"/>
+                <a:hlinkClick r:id="rId11"/>
+              </a:rPr>
+              <a:t>）の人気拡大で、</a:t>
+            </a:r>
+            <a:r>
+              <a:rPr lang="en-US" altLang="ja-JP" sz="1400">
+                <a:latin typeface="メイリオ" panose="020B0604030504040204" pitchFamily="50" charset="-128"/>
+                <a:ea typeface="メイリオ" panose="020B0604030504040204" pitchFamily="50" charset="-128"/>
+                <a:hlinkClick r:id="rId11"/>
+              </a:rPr>
+              <a:t>Mac</a:t>
+            </a:r>
+            <a:r>
+              <a:rPr lang="ja-JP" altLang="en-US" sz="1400">
+                <a:latin typeface="メイリオ" panose="020B0604030504040204" pitchFamily="50" charset="-128"/>
+                <a:ea typeface="メイリオ" panose="020B0604030504040204" pitchFamily="50" charset="-128"/>
+                <a:hlinkClick r:id="rId11"/>
+              </a:rPr>
+              <a:t>が品薄に？ </a:t>
+            </a:r>
+            <a:r>
+              <a:rPr lang="en-US" altLang="ja-JP" sz="1400">
+                <a:latin typeface="メイリオ" panose="020B0604030504040204" pitchFamily="50" charset="-128"/>
+                <a:ea typeface="メイリオ" panose="020B0604030504040204" pitchFamily="50" charset="-128"/>
+                <a:hlinkClick r:id="rId11"/>
+              </a:rPr>
+              <a:t>| </a:t>
+            </a:r>
+            <a:r>
+              <a:rPr lang="ja-JP" altLang="en-US" sz="1400">
+                <a:latin typeface="メイリオ" panose="020B0604030504040204" pitchFamily="50" charset="-128"/>
+                <a:ea typeface="メイリオ" panose="020B0604030504040204" pitchFamily="50" charset="-128"/>
+                <a:hlinkClick r:id="rId11"/>
+              </a:rPr>
+              <a:t>テクノエッジ </a:t>
+            </a:r>
+            <a:r>
+              <a:rPr lang="en-US" altLang="ja-JP" sz="1400">
+                <a:latin typeface="メイリオ" panose="020B0604030504040204" pitchFamily="50" charset="-128"/>
+                <a:ea typeface="メイリオ" panose="020B0604030504040204" pitchFamily="50" charset="-128"/>
+                <a:hlinkClick r:id="rId11"/>
+              </a:rPr>
+              <a:t>TechnoEdge</a:t>
+            </a:r>
+            <a:endParaRPr lang="ja-JP" altLang="en-US" sz="1400">
+              <a:latin typeface="メイリオ" panose="020B0604030504040204" pitchFamily="50" charset="-128"/>
+              <a:ea typeface="メイリオ" panose="020B0604030504040204" pitchFamily="50" charset="-128"/>
+            </a:endParaRPr>
+          </a:p>
+        </p:txBody>
+      </p:sp>
+    </p:spTree>
+    <p:extLst>
+      <p:ext uri="{BB962C8B-B14F-4D97-AF65-F5344CB8AC3E}">
+        <p14:creationId xmlns:p14="http://schemas.microsoft.com/office/powerpoint/2010/main" val="124828738"/>
+      </p:ext>
+    </p:extLst>
+  </p:cSld>
+  <p:clrMapOvr>
+    <a:masterClrMapping/>
+  </p:clrMapOvr>
+</p:sld>
+</file>
+
+<file path=ppt/slides/slide8.xml><?xml version="1.0" encoding="utf-8"?>
+<p:sld xmlns:a="http://schemas.openxmlformats.org/drawingml/2006/main" xmlns:r="http://schemas.openxmlformats.org/officeDocument/2006/relationships" xmlns:p="http://schemas.openxmlformats.org/presentationml/2006/main">
+  <p:cSld>
+    <p:spTree>
+      <p:nvGrpSpPr>
+        <p:cNvPr id="1" name="">
+          <a:extLst>
+            <a:ext uri="{FF2B5EF4-FFF2-40B4-BE49-F238E27FC236}">
+              <a16:creationId xmlns:a16="http://schemas.microsoft.com/office/drawing/2014/main" id="{13EE8326-9BD6-ADCE-0D40-2FD8E7FDC19D}"/>
+            </a:ext>
+          </a:extLst>
+        </p:cNvPr>
+        <p:cNvGrpSpPr/>
+        <p:nvPr/>
+      </p:nvGrpSpPr>
+      <p:grpSpPr>
+        <a:xfrm>
+          <a:off x="0" y="0"/>
+          <a:ext cx="0" cy="0"/>
+          <a:chOff x="0" y="0"/>
+          <a:chExt cx="0" cy="0"/>
+        </a:xfrm>
+      </p:grpSpPr>
+      <p:sp>
+        <p:nvSpPr>
+          <p:cNvPr id="19" name="正方形/長方形 18">
+            <a:extLst>
+              <a:ext uri="{FF2B5EF4-FFF2-40B4-BE49-F238E27FC236}">
+                <a16:creationId xmlns:a16="http://schemas.microsoft.com/office/drawing/2014/main" id="{0D6F1FEC-BDD2-0E49-DC7D-DB88D03D002E}"/>
+              </a:ext>
+            </a:extLst>
+          </p:cNvPr>
+          <p:cNvSpPr/>
+          <p:nvPr/>
+        </p:nvSpPr>
+        <p:spPr>
+          <a:xfrm>
+            <a:off x="6643132" y="2100402"/>
+            <a:ext cx="5308793" cy="3207094"/>
+          </a:xfrm>
+          <a:prstGeom prst="rect">
+            <a:avLst/>
+          </a:prstGeom>
+          <a:solidFill>
+            <a:schemeClr val="accent6">
+              <a:lumMod val="20000"/>
+              <a:lumOff val="80000"/>
+            </a:schemeClr>
+          </a:solidFill>
+          <a:ln>
+            <a:noFill/>
+          </a:ln>
+        </p:spPr>
+        <p:style>
+          <a:lnRef idx="2">
+            <a:schemeClr val="accent1">
+              <a:shade val="15000"/>
+            </a:schemeClr>
+          </a:lnRef>
+          <a:fillRef idx="1">
+            <a:schemeClr val="accent1"/>
+          </a:fillRef>
+          <a:effectRef idx="0">
+            <a:schemeClr val="accent1"/>
+          </a:effectRef>
+          <a:fontRef idx="minor">
+            <a:schemeClr val="lt1"/>
+          </a:fontRef>
+        </p:style>
+        <p:txBody>
+          <a:bodyPr rtlCol="0" anchor="ctr"/>
+          <a:lstStyle/>
+          <a:p>
+            <a:pPr algn="ctr"/>
+            <a:endParaRPr kumimoji="1" lang="ja-JP" altLang="en-US"/>
+          </a:p>
+        </p:txBody>
+      </p:sp>
+      <p:sp>
+        <p:nvSpPr>
+          <p:cNvPr id="15" name="正方形/長方形 14">
+            <a:extLst>
+              <a:ext uri="{FF2B5EF4-FFF2-40B4-BE49-F238E27FC236}">
+                <a16:creationId xmlns:a16="http://schemas.microsoft.com/office/drawing/2014/main" id="{ACC96415-74CC-BD23-06AA-3669744B0936}"/>
+              </a:ext>
+            </a:extLst>
+          </p:cNvPr>
+          <p:cNvSpPr/>
+          <p:nvPr/>
+        </p:nvSpPr>
+        <p:spPr>
+          <a:xfrm>
+            <a:off x="240075" y="2105851"/>
+            <a:ext cx="6133500" cy="4721086"/>
+          </a:xfrm>
+          <a:prstGeom prst="rect">
+            <a:avLst/>
+          </a:prstGeom>
+          <a:solidFill>
+            <a:schemeClr val="tx2">
+              <a:lumMod val="10000"/>
+              <a:lumOff val="90000"/>
+            </a:schemeClr>
+          </a:solidFill>
+          <a:ln>
+            <a:noFill/>
+          </a:ln>
+        </p:spPr>
+        <p:style>
+          <a:lnRef idx="2">
+            <a:schemeClr val="accent1">
+              <a:shade val="15000"/>
+            </a:schemeClr>
+          </a:lnRef>
+          <a:fillRef idx="1">
+            <a:schemeClr val="accent1"/>
+          </a:fillRef>
+          <a:effectRef idx="0">
+            <a:schemeClr val="accent1"/>
+          </a:effectRef>
+          <a:fontRef idx="minor">
+            <a:schemeClr val="lt1"/>
+          </a:fontRef>
+        </p:style>
+        <p:txBody>
+          <a:bodyPr rtlCol="0" anchor="ctr"/>
+          <a:lstStyle/>
+          <a:p>
+            <a:pPr algn="ctr"/>
+            <a:endParaRPr kumimoji="1" lang="ja-JP" altLang="en-US"/>
+          </a:p>
+        </p:txBody>
+      </p:sp>
+      <p:sp>
+        <p:nvSpPr>
+          <p:cNvPr id="4" name="テキスト ボックス 3">
+            <a:extLst>
+              <a:ext uri="{FF2B5EF4-FFF2-40B4-BE49-F238E27FC236}">
+                <a16:creationId xmlns:a16="http://schemas.microsoft.com/office/drawing/2014/main" id="{BB0AD979-3409-5BEE-6A27-3DADC058B778}"/>
+              </a:ext>
+            </a:extLst>
+          </p:cNvPr>
+          <p:cNvSpPr txBox="1"/>
+          <p:nvPr/>
+        </p:nvSpPr>
+        <p:spPr>
+          <a:xfrm>
+            <a:off x="443466" y="317212"/>
+            <a:ext cx="11215133" cy="584775"/>
+          </a:xfrm>
+          <a:prstGeom prst="rect">
+            <a:avLst/>
+          </a:prstGeom>
+          <a:noFill/>
+        </p:spPr>
+        <p:txBody>
+          <a:bodyPr wrap="square" rtlCol="0">
+            <a:spAutoFit/>
+          </a:bodyPr>
+          <a:lstStyle/>
+          <a:p>
+            <a:r>
+              <a:rPr lang="en-US" altLang="ja-JP" sz="3200" b="1">
+                <a:latin typeface="メイリオ" panose="020B0604030504040204" pitchFamily="50" charset="-128"/>
+                <a:ea typeface="メイリオ" panose="020B0604030504040204" pitchFamily="50" charset="-128"/>
+              </a:rPr>
+              <a:t>2.Agent Skills </a:t>
+            </a:r>
+            <a:r>
+              <a:rPr lang="en-US" altLang="ja-JP" sz="2800" b="1">
+                <a:latin typeface="メイリオ" panose="020B0604030504040204" pitchFamily="50" charset="-128"/>
+                <a:ea typeface="メイリオ" panose="020B0604030504040204" pitchFamily="50" charset="-128"/>
+              </a:rPr>
+              <a:t>– OpenClaw</a:t>
+            </a:r>
+            <a:r>
+              <a:rPr lang="ja-JP" altLang="en-US" sz="2800" b="1">
+                <a:latin typeface="メイリオ" panose="020B0604030504040204" pitchFamily="50" charset="-128"/>
+                <a:ea typeface="メイリオ" panose="020B0604030504040204" pitchFamily="50" charset="-128"/>
+              </a:rPr>
+              <a:t>はなぜ「途中で止まらない」のか</a:t>
+            </a:r>
+            <a:endParaRPr kumimoji="1" lang="ja-JP" altLang="en-US" sz="3200" b="1">
+              <a:latin typeface="メイリオ" panose="020B0604030504040204" pitchFamily="50" charset="-128"/>
+              <a:ea typeface="メイリオ" panose="020B0604030504040204" pitchFamily="50" charset="-128"/>
+            </a:endParaRPr>
+          </a:p>
+        </p:txBody>
+      </p:sp>
+      <p:sp>
+        <p:nvSpPr>
+          <p:cNvPr id="2" name="テキスト ボックス 1">
+            <a:extLst>
+              <a:ext uri="{FF2B5EF4-FFF2-40B4-BE49-F238E27FC236}">
+                <a16:creationId xmlns:a16="http://schemas.microsoft.com/office/drawing/2014/main" id="{922A4142-C9C7-E5B6-171E-404E141835DB}"/>
+              </a:ext>
+            </a:extLst>
+          </p:cNvPr>
+          <p:cNvSpPr txBox="1"/>
+          <p:nvPr/>
+        </p:nvSpPr>
+        <p:spPr>
+          <a:xfrm>
+            <a:off x="354254" y="901987"/>
+            <a:ext cx="11483492" cy="1034899"/>
+          </a:xfrm>
+          <a:prstGeom prst="rect">
+            <a:avLst/>
+          </a:prstGeom>
+          <a:noFill/>
+        </p:spPr>
+        <p:txBody>
+          <a:bodyPr wrap="square" rtlCol="0">
+            <a:spAutoFit/>
+          </a:bodyPr>
+          <a:lstStyle/>
+          <a:p>
+            <a:pPr>
+              <a:lnSpc>
+                <a:spcPct val="150000"/>
+              </a:lnSpc>
+            </a:pPr>
+            <a:r>
+              <a:rPr kumimoji="1" lang="en-US" altLang="ja-JP" sz="1400">
+                <a:latin typeface="メイリオ" panose="020B0604030504040204" pitchFamily="50" charset="-128"/>
+                <a:ea typeface="メイリオ" panose="020B0604030504040204" pitchFamily="50" charset="-128"/>
+              </a:rPr>
+              <a:t>CHASSU</a:t>
+            </a:r>
+            <a:r>
+              <a:rPr kumimoji="1" lang="ja-JP" altLang="en-US" sz="1400">
+                <a:latin typeface="メイリオ" panose="020B0604030504040204" pitchFamily="50" charset="-128"/>
+                <a:ea typeface="メイリオ" panose="020B0604030504040204" pitchFamily="50" charset="-128"/>
+              </a:rPr>
+              <a:t>も</a:t>
+            </a:r>
+            <a:r>
+              <a:rPr kumimoji="1" lang="en-US" altLang="ja-JP" sz="1400">
+                <a:latin typeface="メイリオ" panose="020B0604030504040204" pitchFamily="50" charset="-128"/>
+                <a:ea typeface="メイリオ" panose="020B0604030504040204" pitchFamily="50" charset="-128"/>
+              </a:rPr>
+              <a:t>Copilot</a:t>
+            </a:r>
+            <a:r>
+              <a:rPr kumimoji="1" lang="ja-JP" altLang="en-US" sz="1400">
+                <a:latin typeface="メイリオ" panose="020B0604030504040204" pitchFamily="50" charset="-128"/>
+                <a:ea typeface="メイリオ" panose="020B0604030504040204" pitchFamily="50" charset="-128"/>
+              </a:rPr>
+              <a:t>も</a:t>
+            </a:r>
+            <a:r>
+              <a:rPr kumimoji="1" lang="en-US" altLang="ja-JP" sz="1400">
+                <a:latin typeface="メイリオ" panose="020B0604030504040204" pitchFamily="50" charset="-128"/>
+                <a:ea typeface="メイリオ" panose="020B0604030504040204" pitchFamily="50" charset="-128"/>
+              </a:rPr>
+              <a:t>ChatGPT</a:t>
+            </a:r>
+            <a:r>
+              <a:rPr kumimoji="1" lang="ja-JP" altLang="en-US" sz="1400">
+                <a:latin typeface="メイリオ" panose="020B0604030504040204" pitchFamily="50" charset="-128"/>
+                <a:ea typeface="メイリオ" panose="020B0604030504040204" pitchFamily="50" charset="-128"/>
+              </a:rPr>
+              <a:t>も</a:t>
+            </a:r>
+            <a:r>
+              <a:rPr kumimoji="1" lang="en-US" altLang="ja-JP" sz="1400">
+                <a:latin typeface="メイリオ" panose="020B0604030504040204" pitchFamily="50" charset="-128"/>
+                <a:ea typeface="メイリオ" panose="020B0604030504040204" pitchFamily="50" charset="-128"/>
+              </a:rPr>
+              <a:t>Gemini</a:t>
+            </a:r>
+            <a:r>
+              <a:rPr kumimoji="1" lang="ja-JP" altLang="en-US" sz="1400">
+                <a:latin typeface="メイリオ" panose="020B0604030504040204" pitchFamily="50" charset="-128"/>
+                <a:ea typeface="メイリオ" panose="020B0604030504040204" pitchFamily="50" charset="-128"/>
+              </a:rPr>
+              <a:t>も、基本は１回の会話毎に「毎回別人」です。</a:t>
+            </a:r>
+            <a:endParaRPr kumimoji="1" lang="en-US" altLang="ja-JP" sz="1400">
+              <a:latin typeface="メイリオ" panose="020B0604030504040204" pitchFamily="50" charset="-128"/>
+              <a:ea typeface="メイリオ" panose="020B0604030504040204" pitchFamily="50" charset="-128"/>
+            </a:endParaRPr>
+          </a:p>
+          <a:p>
+            <a:pPr>
+              <a:lnSpc>
+                <a:spcPct val="150000"/>
+              </a:lnSpc>
+            </a:pPr>
+            <a:r>
+              <a:rPr lang="ja-JP" altLang="en-US" sz="1400" b="1">
+                <a:latin typeface="メイリオ" panose="020B0604030504040204" pitchFamily="50" charset="-128"/>
+                <a:ea typeface="メイリオ" panose="020B0604030504040204" pitchFamily="50" charset="-128"/>
+              </a:rPr>
+              <a:t>解決策は毎回日記（記憶）を書き残して、次回に「司令塔」がその日記を含めた引継書を読みます。</a:t>
+            </a:r>
+            <a:endParaRPr lang="en-US" altLang="ja-JP" sz="1400" b="1">
+              <a:latin typeface="メイリオ" panose="020B0604030504040204" pitchFamily="50" charset="-128"/>
+              <a:ea typeface="メイリオ" panose="020B0604030504040204" pitchFamily="50" charset="-128"/>
+            </a:endParaRPr>
+          </a:p>
+          <a:p>
+            <a:pPr>
+              <a:lnSpc>
+                <a:spcPct val="150000"/>
+              </a:lnSpc>
+            </a:pPr>
+            <a:r>
+              <a:rPr kumimoji="1" lang="ja-JP" altLang="en-US" sz="1400">
+                <a:latin typeface="メイリオ" panose="020B0604030504040204" pitchFamily="50" charset="-128"/>
+                <a:ea typeface="メイリオ" panose="020B0604030504040204" pitchFamily="50" charset="-128"/>
+              </a:rPr>
+              <a:t>また、記憶しておける文字量も限りがあるので</a:t>
+            </a:r>
+            <a:r>
+              <a:rPr lang="ja-JP" altLang="en-US" sz="1400">
+                <a:latin typeface="メイリオ" panose="020B0604030504040204" pitchFamily="50" charset="-128"/>
+                <a:ea typeface="メイリオ" panose="020B0604030504040204" pitchFamily="50" charset="-128"/>
+              </a:rPr>
+              <a:t>「司令塔」はタスクを分解し、</a:t>
+            </a:r>
+            <a:r>
+              <a:rPr kumimoji="1" lang="ja-JP" altLang="en-US" sz="1400">
+                <a:latin typeface="メイリオ" panose="020B0604030504040204" pitchFamily="50" charset="-128"/>
+                <a:ea typeface="メイリオ" panose="020B0604030504040204" pitchFamily="50" charset="-128"/>
+              </a:rPr>
+              <a:t>作業自体は作業員に担当してもらい結果を受け取ります。</a:t>
+            </a:r>
+            <a:endParaRPr kumimoji="1" lang="en-US" altLang="ja-JP" sz="1400">
+              <a:latin typeface="メイリオ" panose="020B0604030504040204" pitchFamily="50" charset="-128"/>
+              <a:ea typeface="メイリオ" panose="020B0604030504040204" pitchFamily="50" charset="-128"/>
+            </a:endParaRPr>
+          </a:p>
+        </p:txBody>
+      </p:sp>
+      <p:sp>
+        <p:nvSpPr>
+          <p:cNvPr id="3" name="正方形/長方形 2">
+            <a:extLst>
+              <a:ext uri="{FF2B5EF4-FFF2-40B4-BE49-F238E27FC236}">
+                <a16:creationId xmlns:a16="http://schemas.microsoft.com/office/drawing/2014/main" id="{DC5336A0-F7C7-BB7B-EF67-D9B6D1BC110F}"/>
+              </a:ext>
+            </a:extLst>
+          </p:cNvPr>
+          <p:cNvSpPr/>
+          <p:nvPr/>
+        </p:nvSpPr>
+        <p:spPr>
+          <a:xfrm>
+            <a:off x="3614048" y="2308908"/>
+            <a:ext cx="1514542" cy="711732"/>
+          </a:xfrm>
+          <a:prstGeom prst="rect">
+            <a:avLst/>
+          </a:prstGeom>
+          <a:solidFill>
+            <a:schemeClr val="bg1"/>
+          </a:solidFill>
+          <a:ln>
+            <a:solidFill>
+              <a:srgbClr val="002060"/>
+            </a:solidFill>
+          </a:ln>
+        </p:spPr>
+        <p:style>
+          <a:lnRef idx="2">
+            <a:schemeClr val="accent1">
+              <a:shade val="15000"/>
+            </a:schemeClr>
+          </a:lnRef>
+          <a:fillRef idx="1">
+            <a:schemeClr val="accent1"/>
+          </a:fillRef>
+          <a:effectRef idx="0">
+            <a:schemeClr val="accent1"/>
+          </a:effectRef>
+          <a:fontRef idx="minor">
+            <a:schemeClr val="lt1"/>
+          </a:fontRef>
+        </p:style>
+        <p:txBody>
+          <a:bodyPr rtlCol="0" anchor="ctr"/>
+          <a:lstStyle/>
+          <a:p>
+            <a:pPr algn="ctr"/>
+            <a:r>
+              <a:rPr lang="ja-JP" altLang="en-US" sz="1600" b="1">
+                <a:solidFill>
+                  <a:schemeClr val="tx1"/>
+                </a:solidFill>
+                <a:latin typeface="メイリオ" panose="020B0604030504040204" pitchFamily="50" charset="-128"/>
+                <a:ea typeface="メイリオ" panose="020B0604030504040204" pitchFamily="50" charset="-128"/>
+              </a:rPr>
+              <a:t>司令塔</a:t>
+            </a:r>
+            <a:endParaRPr lang="en-US" altLang="ja-JP" sz="1600" b="1">
+              <a:solidFill>
+                <a:schemeClr val="tx1"/>
+              </a:solidFill>
+              <a:latin typeface="メイリオ" panose="020B0604030504040204" pitchFamily="50" charset="-128"/>
+              <a:ea typeface="メイリオ" panose="020B0604030504040204" pitchFamily="50" charset="-128"/>
+            </a:endParaRPr>
+          </a:p>
+          <a:p>
+            <a:pPr algn="ctr"/>
+            <a:r>
+              <a:rPr kumimoji="1" lang="en-US" altLang="ja-JP" sz="1400" b="1">
+                <a:solidFill>
+                  <a:schemeClr val="tx1"/>
+                </a:solidFill>
+                <a:latin typeface="メイリオ" panose="020B0604030504040204" pitchFamily="50" charset="-128"/>
+                <a:ea typeface="メイリオ" panose="020B0604030504040204" pitchFamily="50" charset="-128"/>
+              </a:rPr>
+              <a:t>Main Agent</a:t>
+            </a:r>
+            <a:endParaRPr kumimoji="1" lang="ja-JP" altLang="en-US" sz="1400" b="1">
+              <a:solidFill>
+                <a:schemeClr val="tx1"/>
+              </a:solidFill>
+              <a:latin typeface="メイリオ" panose="020B0604030504040204" pitchFamily="50" charset="-128"/>
+              <a:ea typeface="メイリオ" panose="020B0604030504040204" pitchFamily="50" charset="-128"/>
+            </a:endParaRPr>
+          </a:p>
+        </p:txBody>
+      </p:sp>
+      <p:sp>
+        <p:nvSpPr>
+          <p:cNvPr id="5" name="正方形/長方形 4">
+            <a:extLst>
+              <a:ext uri="{FF2B5EF4-FFF2-40B4-BE49-F238E27FC236}">
+                <a16:creationId xmlns:a16="http://schemas.microsoft.com/office/drawing/2014/main" id="{F1EC43EA-2418-EEFC-A905-81878294D754}"/>
+              </a:ext>
+            </a:extLst>
+          </p:cNvPr>
+          <p:cNvSpPr/>
+          <p:nvPr/>
+        </p:nvSpPr>
+        <p:spPr>
+          <a:xfrm>
+            <a:off x="6552721" y="2308908"/>
+            <a:ext cx="1514542" cy="711732"/>
+          </a:xfrm>
+          <a:prstGeom prst="rect">
+            <a:avLst/>
+          </a:prstGeom>
+          <a:solidFill>
+            <a:schemeClr val="bg1"/>
+          </a:solidFill>
+          <a:ln>
+            <a:solidFill>
+              <a:srgbClr val="002060"/>
+            </a:solidFill>
+          </a:ln>
+        </p:spPr>
+        <p:style>
+          <a:lnRef idx="2">
+            <a:schemeClr val="accent1">
+              <a:shade val="15000"/>
+            </a:schemeClr>
+          </a:lnRef>
+          <a:fillRef idx="1">
+            <a:schemeClr val="accent1"/>
+          </a:fillRef>
+          <a:effectRef idx="0">
+            <a:schemeClr val="accent1"/>
+          </a:effectRef>
+          <a:fontRef idx="minor">
+            <a:schemeClr val="lt1"/>
+          </a:fontRef>
+        </p:style>
+        <p:txBody>
+          <a:bodyPr rtlCol="0" anchor="ctr"/>
+          <a:lstStyle/>
+          <a:p>
+            <a:pPr algn="ctr"/>
+            <a:r>
+              <a:rPr lang="ja-JP" altLang="en-US" sz="1600" b="1">
+                <a:solidFill>
+                  <a:schemeClr val="tx1"/>
+                </a:solidFill>
+                <a:latin typeface="メイリオ" panose="020B0604030504040204" pitchFamily="50" charset="-128"/>
+                <a:ea typeface="メイリオ" panose="020B0604030504040204" pitchFamily="50" charset="-128"/>
+              </a:rPr>
+              <a:t>作業員</a:t>
+            </a:r>
+            <a:endParaRPr lang="en-US" altLang="ja-JP" sz="1600" b="1">
+              <a:solidFill>
+                <a:schemeClr val="tx1"/>
+              </a:solidFill>
+              <a:latin typeface="メイリオ" panose="020B0604030504040204" pitchFamily="50" charset="-128"/>
+              <a:ea typeface="メイリオ" panose="020B0604030504040204" pitchFamily="50" charset="-128"/>
+            </a:endParaRPr>
+          </a:p>
+          <a:p>
+            <a:pPr algn="ctr"/>
+            <a:r>
+              <a:rPr kumimoji="1" lang="en-US" altLang="ja-JP" sz="1400" b="1">
+                <a:solidFill>
+                  <a:schemeClr val="tx1"/>
+                </a:solidFill>
+                <a:latin typeface="メイリオ" panose="020B0604030504040204" pitchFamily="50" charset="-128"/>
+                <a:ea typeface="メイリオ" panose="020B0604030504040204" pitchFamily="50" charset="-128"/>
+              </a:rPr>
+              <a:t>Sub Agent</a:t>
+            </a:r>
+            <a:endParaRPr kumimoji="1" lang="ja-JP" altLang="en-US" sz="1400" b="1">
+              <a:solidFill>
+                <a:schemeClr val="tx1"/>
+              </a:solidFill>
+              <a:latin typeface="メイリオ" panose="020B0604030504040204" pitchFamily="50" charset="-128"/>
+              <a:ea typeface="メイリオ" panose="020B0604030504040204" pitchFamily="50" charset="-128"/>
+            </a:endParaRPr>
+          </a:p>
+        </p:txBody>
+      </p:sp>
+      <p:sp>
+        <p:nvSpPr>
+          <p:cNvPr id="8" name="矢印: 右 7">
+            <a:extLst>
+              <a:ext uri="{FF2B5EF4-FFF2-40B4-BE49-F238E27FC236}">
+                <a16:creationId xmlns:a16="http://schemas.microsoft.com/office/drawing/2014/main" id="{F6B37056-8B0E-C0AF-489A-0D4F2CB9F131}"/>
+              </a:ext>
+            </a:extLst>
+          </p:cNvPr>
+          <p:cNvSpPr/>
+          <p:nvPr/>
+        </p:nvSpPr>
+        <p:spPr>
+          <a:xfrm>
+            <a:off x="5128590" y="2376539"/>
+            <a:ext cx="1424131" cy="288235"/>
+          </a:xfrm>
+          <a:prstGeom prst="rightArrow">
+            <a:avLst>
+              <a:gd name="adj1" fmla="val 50000"/>
+              <a:gd name="adj2" fmla="val 84149"/>
+            </a:avLst>
+          </a:prstGeom>
+          <a:ln>
+            <a:noFill/>
+          </a:ln>
+        </p:spPr>
+        <p:style>
+          <a:lnRef idx="2">
+            <a:schemeClr val="accent1">
+              <a:shade val="15000"/>
+            </a:schemeClr>
+          </a:lnRef>
+          <a:fillRef idx="1">
+            <a:schemeClr val="accent1"/>
+          </a:fillRef>
+          <a:effectRef idx="0">
+            <a:schemeClr val="accent1"/>
+          </a:effectRef>
+          <a:fontRef idx="minor">
+            <a:schemeClr val="lt1"/>
+          </a:fontRef>
+        </p:style>
+        <p:txBody>
+          <a:bodyPr rtlCol="0" anchor="ctr"/>
+          <a:lstStyle/>
+          <a:p>
+            <a:pPr algn="ctr"/>
+            <a:endParaRPr kumimoji="1" lang="ja-JP" altLang="en-US"/>
+          </a:p>
+        </p:txBody>
+      </p:sp>
+      <p:sp>
+        <p:nvSpPr>
+          <p:cNvPr id="9" name="矢印: 右 8">
+            <a:extLst>
+              <a:ext uri="{FF2B5EF4-FFF2-40B4-BE49-F238E27FC236}">
+                <a16:creationId xmlns:a16="http://schemas.microsoft.com/office/drawing/2014/main" id="{BD366119-6E97-FEC3-F648-18DAA8839FA0}"/>
+              </a:ext>
+            </a:extLst>
+          </p:cNvPr>
+          <p:cNvSpPr/>
+          <p:nvPr/>
+        </p:nvSpPr>
+        <p:spPr>
+          <a:xfrm rot="10800000">
+            <a:off x="5128590" y="2664774"/>
+            <a:ext cx="1424131" cy="288235"/>
+          </a:xfrm>
+          <a:prstGeom prst="rightArrow">
+            <a:avLst>
+              <a:gd name="adj1" fmla="val 50000"/>
+              <a:gd name="adj2" fmla="val 84149"/>
+            </a:avLst>
+          </a:prstGeom>
+          <a:ln>
+            <a:noFill/>
+          </a:ln>
+        </p:spPr>
+        <p:style>
+          <a:lnRef idx="2">
+            <a:schemeClr val="accent1">
+              <a:shade val="15000"/>
+            </a:schemeClr>
+          </a:lnRef>
+          <a:fillRef idx="1">
+            <a:schemeClr val="accent1"/>
+          </a:fillRef>
+          <a:effectRef idx="0">
+            <a:schemeClr val="accent1"/>
+          </a:effectRef>
+          <a:fontRef idx="minor">
+            <a:schemeClr val="lt1"/>
+          </a:fontRef>
+        </p:style>
+        <p:txBody>
+          <a:bodyPr rtlCol="0" anchor="ctr"/>
+          <a:lstStyle/>
+          <a:p>
+            <a:pPr algn="ctr"/>
+            <a:endParaRPr kumimoji="1" lang="ja-JP" altLang="en-US"/>
+          </a:p>
+        </p:txBody>
+      </p:sp>
+      <p:sp>
+        <p:nvSpPr>
+          <p:cNvPr id="10" name="テキスト ボックス 9">
+            <a:extLst>
+              <a:ext uri="{FF2B5EF4-FFF2-40B4-BE49-F238E27FC236}">
+                <a16:creationId xmlns:a16="http://schemas.microsoft.com/office/drawing/2014/main" id="{F0017630-6D42-61D4-7219-D8E8831D4258}"/>
+              </a:ext>
+            </a:extLst>
+          </p:cNvPr>
+          <p:cNvSpPr txBox="1"/>
+          <p:nvPr/>
+        </p:nvSpPr>
+        <p:spPr>
+          <a:xfrm>
+            <a:off x="5487695" y="2105851"/>
+            <a:ext cx="705919" cy="388568"/>
+          </a:xfrm>
+          <a:prstGeom prst="rect">
+            <a:avLst/>
+          </a:prstGeom>
+          <a:noFill/>
+        </p:spPr>
+        <p:txBody>
+          <a:bodyPr wrap="square" rtlCol="0">
+            <a:spAutoFit/>
+          </a:bodyPr>
+          <a:lstStyle/>
+          <a:p>
+            <a:pPr algn="ctr">
+              <a:lnSpc>
+                <a:spcPct val="150000"/>
+              </a:lnSpc>
+            </a:pPr>
+            <a:r>
+              <a:rPr kumimoji="1" lang="ja-JP" altLang="en-US" sz="1400" b="1">
+                <a:latin typeface="メイリオ" panose="020B0604030504040204" pitchFamily="50" charset="-128"/>
+                <a:ea typeface="メイリオ" panose="020B0604030504040204" pitchFamily="50" charset="-128"/>
+              </a:rPr>
+              <a:t>指示</a:t>
+            </a:r>
+            <a:endParaRPr kumimoji="1" lang="en-US" altLang="ja-JP" sz="1400" b="1">
+              <a:latin typeface="メイリオ" panose="020B0604030504040204" pitchFamily="50" charset="-128"/>
+              <a:ea typeface="メイリオ" panose="020B0604030504040204" pitchFamily="50" charset="-128"/>
+            </a:endParaRPr>
+          </a:p>
+        </p:txBody>
+      </p:sp>
+      <p:sp>
+        <p:nvSpPr>
+          <p:cNvPr id="11" name="テキスト ボックス 10">
+            <a:extLst>
+              <a:ext uri="{FF2B5EF4-FFF2-40B4-BE49-F238E27FC236}">
+                <a16:creationId xmlns:a16="http://schemas.microsoft.com/office/drawing/2014/main" id="{567E8749-A7D1-9B5B-4518-BEE385684F1D}"/>
+              </a:ext>
+            </a:extLst>
+          </p:cNvPr>
+          <p:cNvSpPr txBox="1"/>
+          <p:nvPr/>
+        </p:nvSpPr>
+        <p:spPr>
+          <a:xfrm>
+            <a:off x="5487695" y="2788548"/>
+            <a:ext cx="705919" cy="388568"/>
+          </a:xfrm>
+          <a:prstGeom prst="rect">
+            <a:avLst/>
+          </a:prstGeom>
+          <a:noFill/>
+        </p:spPr>
+        <p:txBody>
+          <a:bodyPr wrap="square" rtlCol="0">
+            <a:spAutoFit/>
+          </a:bodyPr>
+          <a:lstStyle/>
+          <a:p>
+            <a:pPr algn="ctr">
+              <a:lnSpc>
+                <a:spcPct val="150000"/>
+              </a:lnSpc>
+            </a:pPr>
+            <a:r>
+              <a:rPr lang="ja-JP" altLang="en-US" sz="1400" b="1">
+                <a:latin typeface="メイリオ" panose="020B0604030504040204" pitchFamily="50" charset="-128"/>
+                <a:ea typeface="メイリオ" panose="020B0604030504040204" pitchFamily="50" charset="-128"/>
+              </a:rPr>
+              <a:t>成果</a:t>
+            </a:r>
+            <a:endParaRPr kumimoji="1" lang="en-US" altLang="ja-JP" sz="1400" b="1">
+              <a:latin typeface="メイリオ" panose="020B0604030504040204" pitchFamily="50" charset="-128"/>
+              <a:ea typeface="メイリオ" panose="020B0604030504040204" pitchFamily="50" charset="-128"/>
+            </a:endParaRPr>
+          </a:p>
+        </p:txBody>
+      </p:sp>
+      <p:sp>
+        <p:nvSpPr>
+          <p:cNvPr id="13" name="テキスト ボックス 12">
+            <a:extLst>
+              <a:ext uri="{FF2B5EF4-FFF2-40B4-BE49-F238E27FC236}">
+                <a16:creationId xmlns:a16="http://schemas.microsoft.com/office/drawing/2014/main" id="{A4D42807-2A4F-9B61-EF56-6B8D32C15C40}"/>
+              </a:ext>
+            </a:extLst>
+          </p:cNvPr>
+          <p:cNvSpPr txBox="1"/>
+          <p:nvPr/>
+        </p:nvSpPr>
+        <p:spPr>
+          <a:xfrm>
+            <a:off x="354253" y="2308908"/>
+            <a:ext cx="3174137" cy="715581"/>
+          </a:xfrm>
+          <a:prstGeom prst="rect">
+            <a:avLst/>
+          </a:prstGeom>
+          <a:noFill/>
+        </p:spPr>
+        <p:txBody>
+          <a:bodyPr wrap="square" rtlCol="0">
+            <a:spAutoFit/>
+          </a:bodyPr>
+          <a:lstStyle/>
+          <a:p>
+            <a:pPr>
+              <a:lnSpc>
+                <a:spcPct val="150000"/>
+              </a:lnSpc>
+            </a:pPr>
+            <a:r>
+              <a:rPr kumimoji="1" lang="en-US" altLang="ja-JP" sz="1600" b="1">
+                <a:latin typeface="メイリオ" panose="020B0604030504040204" pitchFamily="50" charset="-128"/>
+                <a:ea typeface="メイリオ" panose="020B0604030504040204" pitchFamily="50" charset="-128"/>
+              </a:rPr>
+              <a:t>Main Agent</a:t>
+            </a:r>
+            <a:r>
+              <a:rPr kumimoji="1" lang="ja-JP" altLang="en-US" sz="1600" b="1">
+                <a:latin typeface="メイリオ" panose="020B0604030504040204" pitchFamily="50" charset="-128"/>
+                <a:ea typeface="メイリオ" panose="020B0604030504040204" pitchFamily="50" charset="-128"/>
+              </a:rPr>
+              <a:t>が持っている情報</a:t>
+            </a:r>
+            <a:endParaRPr kumimoji="1" lang="en-US" altLang="ja-JP" sz="1600" b="1">
+              <a:latin typeface="メイリオ" panose="020B0604030504040204" pitchFamily="50" charset="-128"/>
+              <a:ea typeface="メイリオ" panose="020B0604030504040204" pitchFamily="50" charset="-128"/>
+            </a:endParaRPr>
+          </a:p>
+          <a:p>
+            <a:pPr>
+              <a:lnSpc>
+                <a:spcPct val="150000"/>
+              </a:lnSpc>
+            </a:pPr>
+            <a:r>
+              <a:rPr lang="ja-JP" altLang="en-US" sz="1200" b="1">
+                <a:latin typeface="メイリオ" panose="020B0604030504040204" pitchFamily="50" charset="-128"/>
+                <a:ea typeface="メイリオ" panose="020B0604030504040204" pitchFamily="50" charset="-128"/>
+              </a:rPr>
+              <a:t>（事前に読み込むテキストファイル）</a:t>
+            </a:r>
+            <a:endParaRPr kumimoji="1" lang="en-US" altLang="ja-JP" sz="1200" b="1">
+              <a:latin typeface="メイリオ" panose="020B0604030504040204" pitchFamily="50" charset="-128"/>
+              <a:ea typeface="メイリオ" panose="020B0604030504040204" pitchFamily="50" charset="-128"/>
+            </a:endParaRPr>
+          </a:p>
+        </p:txBody>
+      </p:sp>
+      <p:graphicFrame>
+        <p:nvGraphicFramePr>
+          <p:cNvPr id="14" name="表 13">
+            <a:extLst>
+              <a:ext uri="{FF2B5EF4-FFF2-40B4-BE49-F238E27FC236}">
+                <a16:creationId xmlns:a16="http://schemas.microsoft.com/office/drawing/2014/main" id="{3296209B-15BB-0DBF-2554-35017B7266C5}"/>
+              </a:ext>
+            </a:extLst>
+          </p:cNvPr>
+          <p:cNvGraphicFramePr>
+            <a:graphicFrameLocks noGrp="1"/>
+          </p:cNvGraphicFramePr>
+          <p:nvPr>
+            <p:extLst>
+              <p:ext uri="{D42A27DB-BD31-4B8C-83A1-F6EECF244321}">
+                <p14:modId xmlns:p14="http://schemas.microsoft.com/office/powerpoint/2010/main" val="3880084144"/>
+              </p:ext>
+            </p:extLst>
+          </p:nvPr>
+        </p:nvGraphicFramePr>
+        <p:xfrm>
+          <a:off x="387144" y="3119371"/>
+          <a:ext cx="5839361" cy="3637280"/>
+        </p:xfrm>
+        <a:graphic>
+          <a:graphicData uri="http://schemas.openxmlformats.org/drawingml/2006/table">
+            <a:tbl>
+              <a:tblPr bandRow="1">
+                <a:tableStyleId>{5C22544A-7EE6-4342-B048-85BDC9FD1C3A}</a:tableStyleId>
+              </a:tblPr>
+              <a:tblGrid>
+                <a:gridCol w="1888917">
+                  <a:extLst>
+                    <a:ext uri="{9D8B030D-6E8A-4147-A177-3AD203B41FA5}">
+                      <a16:colId xmlns:a16="http://schemas.microsoft.com/office/drawing/2014/main" val="2178145205"/>
+                    </a:ext>
+                  </a:extLst>
+                </a:gridCol>
+                <a:gridCol w="3950444">
+                  <a:extLst>
+                    <a:ext uri="{9D8B030D-6E8A-4147-A177-3AD203B41FA5}">
+                      <a16:colId xmlns:a16="http://schemas.microsoft.com/office/drawing/2014/main" val="724501695"/>
+                    </a:ext>
+                  </a:extLst>
+                </a:gridCol>
+              </a:tblGrid>
+              <a:tr h="370840">
+                <a:tc>
+                  <a:txBody>
+                    <a:bodyPr/>
+                    <a:lstStyle/>
+                    <a:p>
+                      <a:pPr algn="l"/>
+                      <a:r>
+                        <a:rPr kumimoji="1" lang="en-US" altLang="ja-JP" sz="1600">
+                          <a:latin typeface="メイリオ" panose="020B0604030504040204" pitchFamily="50" charset="-128"/>
+                          <a:ea typeface="メイリオ" panose="020B0604030504040204" pitchFamily="50" charset="-128"/>
+                        </a:rPr>
+                        <a:t>AGENTS.md</a:t>
+                      </a:r>
+                      <a:endParaRPr kumimoji="1" lang="ja-JP" altLang="en-US" sz="1600">
+                        <a:latin typeface="メイリオ" panose="020B0604030504040204" pitchFamily="50" charset="-128"/>
+                        <a:ea typeface="メイリオ" panose="020B0604030504040204" pitchFamily="50" charset="-128"/>
+                      </a:endParaRPr>
+                    </a:p>
+                  </a:txBody>
+                  <a:tcPr anchor="ctr"/>
+                </a:tc>
+                <a:tc>
+                  <a:txBody>
+                    <a:bodyPr/>
+                    <a:lstStyle/>
+                    <a:p>
+                      <a:pPr algn="l"/>
+                      <a:r>
+                        <a:rPr kumimoji="1" lang="ja-JP" altLang="en-US" sz="1600">
+                          <a:latin typeface="メイリオ" panose="020B0604030504040204" pitchFamily="50" charset="-128"/>
+                          <a:ea typeface="メイリオ" panose="020B0604030504040204" pitchFamily="50" charset="-128"/>
+                        </a:rPr>
+                        <a:t>全員共通の指示書</a:t>
+                      </a:r>
+                    </a:p>
+                  </a:txBody>
+                  <a:tcPr anchor="ctr"/>
+                </a:tc>
+                <a:extLst>
+                  <a:ext uri="{0D108BD9-81ED-4DB2-BD59-A6C34878D82A}">
+                    <a16:rowId xmlns:a16="http://schemas.microsoft.com/office/drawing/2014/main" val="4189117046"/>
+                  </a:ext>
+                </a:extLst>
+              </a:tr>
+              <a:tr h="370840">
+                <a:tc>
+                  <a:txBody>
+                    <a:bodyPr/>
+                    <a:lstStyle/>
+                    <a:p>
+                      <a:pPr algn="l"/>
+                      <a:r>
+                        <a:rPr kumimoji="1" lang="en-US" altLang="ja-JP" sz="1600">
+                          <a:latin typeface="メイリオ" panose="020B0604030504040204" pitchFamily="50" charset="-128"/>
+                          <a:ea typeface="メイリオ" panose="020B0604030504040204" pitchFamily="50" charset="-128"/>
+                        </a:rPr>
+                        <a:t>SOUL.md</a:t>
+                      </a:r>
+                      <a:endParaRPr kumimoji="1" lang="ja-JP" altLang="en-US" sz="1600">
+                        <a:latin typeface="メイリオ" panose="020B0604030504040204" pitchFamily="50" charset="-128"/>
+                        <a:ea typeface="メイリオ" panose="020B0604030504040204" pitchFamily="50" charset="-128"/>
+                      </a:endParaRPr>
+                    </a:p>
+                  </a:txBody>
+                  <a:tcPr anchor="ctr"/>
+                </a:tc>
+                <a:tc>
+                  <a:txBody>
+                    <a:bodyPr/>
+                    <a:lstStyle/>
+                    <a:p>
+                      <a:pPr algn="l"/>
+                      <a:r>
+                        <a:rPr kumimoji="1" lang="ja-JP" altLang="en-US" sz="1600">
+                          <a:latin typeface="メイリオ" panose="020B0604030504040204" pitchFamily="50" charset="-128"/>
+                          <a:ea typeface="メイリオ" panose="020B0604030504040204" pitchFamily="50" charset="-128"/>
+                        </a:rPr>
+                        <a:t>人格・ルール・関係性</a:t>
+                      </a:r>
+                    </a:p>
+                  </a:txBody>
+                  <a:tcPr anchor="ctr"/>
+                </a:tc>
+                <a:extLst>
+                  <a:ext uri="{0D108BD9-81ED-4DB2-BD59-A6C34878D82A}">
+                    <a16:rowId xmlns:a16="http://schemas.microsoft.com/office/drawing/2014/main" val="3260504193"/>
+                  </a:ext>
+                </a:extLst>
+              </a:tr>
+              <a:tr h="370840">
+                <a:tc>
+                  <a:txBody>
+                    <a:bodyPr/>
+                    <a:lstStyle/>
+                    <a:p>
+                      <a:pPr algn="l"/>
+                      <a:r>
+                        <a:rPr kumimoji="1" lang="en-US" altLang="ja-JP" sz="1600">
+                          <a:latin typeface="メイリオ" panose="020B0604030504040204" pitchFamily="50" charset="-128"/>
+                          <a:ea typeface="メイリオ" panose="020B0604030504040204" pitchFamily="50" charset="-128"/>
+                        </a:rPr>
+                        <a:t>TOOLS.md</a:t>
+                      </a:r>
+                      <a:endParaRPr kumimoji="1" lang="ja-JP" altLang="en-US" sz="1600">
+                        <a:latin typeface="メイリオ" panose="020B0604030504040204" pitchFamily="50" charset="-128"/>
+                        <a:ea typeface="メイリオ" panose="020B0604030504040204" pitchFamily="50" charset="-128"/>
+                      </a:endParaRPr>
+                    </a:p>
+                  </a:txBody>
+                  <a:tcPr anchor="ctr"/>
+                </a:tc>
+                <a:tc>
+                  <a:txBody>
+                    <a:bodyPr/>
+                    <a:lstStyle/>
+                    <a:p>
+                      <a:pPr algn="l"/>
+                      <a:r>
+                        <a:rPr kumimoji="1" lang="ja-JP" altLang="en-US" sz="1600">
+                          <a:latin typeface="メイリオ" panose="020B0604030504040204" pitchFamily="50" charset="-128"/>
+                          <a:ea typeface="メイリオ" panose="020B0604030504040204" pitchFamily="50" charset="-128"/>
+                        </a:rPr>
+                        <a:t>ツール定義</a:t>
+                      </a:r>
+                      <a:endParaRPr kumimoji="1" lang="en-US" altLang="ja-JP" sz="1600">
+                        <a:latin typeface="メイリオ" panose="020B0604030504040204" pitchFamily="50" charset="-128"/>
+                        <a:ea typeface="メイリオ" panose="020B0604030504040204" pitchFamily="50" charset="-128"/>
+                      </a:endParaRPr>
+                    </a:p>
+                    <a:p>
+                      <a:pPr algn="l"/>
+                      <a:r>
+                        <a:rPr kumimoji="1" lang="ja-JP" altLang="en-US" sz="1600">
+                          <a:latin typeface="メイリオ" panose="020B0604030504040204" pitchFamily="50" charset="-128"/>
+                          <a:ea typeface="メイリオ" panose="020B0604030504040204" pitchFamily="50" charset="-128"/>
+                        </a:rPr>
+                        <a:t>・何を使えるかの把握</a:t>
+                      </a:r>
+                    </a:p>
+                  </a:txBody>
+                  <a:tcPr anchor="ctr"/>
+                </a:tc>
+                <a:extLst>
+                  <a:ext uri="{0D108BD9-81ED-4DB2-BD59-A6C34878D82A}">
+                    <a16:rowId xmlns:a16="http://schemas.microsoft.com/office/drawing/2014/main" val="2735890957"/>
+                  </a:ext>
+                </a:extLst>
+              </a:tr>
+              <a:tr h="370840">
+                <a:tc>
+                  <a:txBody>
+                    <a:bodyPr/>
+                    <a:lstStyle/>
+                    <a:p>
+                      <a:pPr algn="l"/>
+                      <a:r>
+                        <a:rPr kumimoji="1" lang="en-US" altLang="ja-JP" sz="1600">
+                          <a:latin typeface="メイリオ" panose="020B0604030504040204" pitchFamily="50" charset="-128"/>
+                          <a:ea typeface="メイリオ" panose="020B0604030504040204" pitchFamily="50" charset="-128"/>
+                        </a:rPr>
+                        <a:t>IDENTITY.md</a:t>
+                      </a:r>
+                      <a:endParaRPr kumimoji="1" lang="ja-JP" altLang="en-US" sz="1600">
+                        <a:latin typeface="メイリオ" panose="020B0604030504040204" pitchFamily="50" charset="-128"/>
+                        <a:ea typeface="メイリオ" panose="020B0604030504040204" pitchFamily="50" charset="-128"/>
+                      </a:endParaRPr>
+                    </a:p>
+                  </a:txBody>
+                  <a:tcPr anchor="ctr"/>
+                </a:tc>
+                <a:tc>
+                  <a:txBody>
+                    <a:bodyPr/>
+                    <a:lstStyle/>
+                    <a:p>
+                      <a:pPr algn="l"/>
+                      <a:r>
+                        <a:rPr kumimoji="1" lang="ja-JP" altLang="en-US" sz="1600">
+                          <a:latin typeface="メイリオ" panose="020B0604030504040204" pitchFamily="50" charset="-128"/>
+                          <a:ea typeface="メイリオ" panose="020B0604030504040204" pitchFamily="50" charset="-128"/>
+                        </a:rPr>
+                        <a:t>自己紹介</a:t>
+                      </a:r>
+                      <a:endParaRPr kumimoji="1" lang="en-US" altLang="ja-JP" sz="1600">
+                        <a:latin typeface="メイリオ" panose="020B0604030504040204" pitchFamily="50" charset="-128"/>
+                        <a:ea typeface="メイリオ" panose="020B0604030504040204" pitchFamily="50" charset="-128"/>
+                      </a:endParaRPr>
+                    </a:p>
+                    <a:p>
+                      <a:pPr algn="l"/>
+                      <a:r>
+                        <a:rPr kumimoji="1" lang="ja-JP" altLang="en-US" sz="1600">
+                          <a:latin typeface="メイリオ" panose="020B0604030504040204" pitchFamily="50" charset="-128"/>
+                          <a:ea typeface="メイリオ" panose="020B0604030504040204" pitchFamily="50" charset="-128"/>
+                        </a:rPr>
+                        <a:t>・自分が何者かの自覚</a:t>
+                      </a:r>
+                    </a:p>
+                  </a:txBody>
+                  <a:tcPr anchor="ctr"/>
+                </a:tc>
+                <a:extLst>
+                  <a:ext uri="{0D108BD9-81ED-4DB2-BD59-A6C34878D82A}">
+                    <a16:rowId xmlns:a16="http://schemas.microsoft.com/office/drawing/2014/main" val="1008717600"/>
+                  </a:ext>
+                </a:extLst>
+              </a:tr>
+              <a:tr h="370840">
+                <a:tc>
+                  <a:txBody>
+                    <a:bodyPr/>
+                    <a:lstStyle/>
+                    <a:p>
+                      <a:pPr algn="l"/>
+                      <a:r>
+                        <a:rPr kumimoji="1" lang="en-US" altLang="ja-JP" sz="1600">
+                          <a:latin typeface="メイリオ" panose="020B0604030504040204" pitchFamily="50" charset="-128"/>
+                          <a:ea typeface="メイリオ" panose="020B0604030504040204" pitchFamily="50" charset="-128"/>
+                        </a:rPr>
+                        <a:t>USER.md</a:t>
+                      </a:r>
+                      <a:endParaRPr kumimoji="1" lang="ja-JP" altLang="en-US" sz="1600">
+                        <a:latin typeface="メイリオ" panose="020B0604030504040204" pitchFamily="50" charset="-128"/>
+                        <a:ea typeface="メイリオ" panose="020B0604030504040204" pitchFamily="50" charset="-128"/>
+                      </a:endParaRPr>
+                    </a:p>
+                  </a:txBody>
+                  <a:tcPr anchor="ctr"/>
+                </a:tc>
+                <a:tc>
+                  <a:txBody>
+                    <a:bodyPr/>
+                    <a:lstStyle/>
+                    <a:p>
+                      <a:pPr algn="l"/>
+                      <a:r>
+                        <a:rPr kumimoji="1" lang="ja-JP" altLang="en-US" sz="1600">
+                          <a:latin typeface="メイリオ" panose="020B0604030504040204" pitchFamily="50" charset="-128"/>
+                          <a:ea typeface="メイリオ" panose="020B0604030504040204" pitchFamily="50" charset="-128"/>
+                        </a:rPr>
+                        <a:t>ユーザー情報</a:t>
+                      </a:r>
+                      <a:endParaRPr kumimoji="1" lang="en-US" altLang="ja-JP" sz="1600">
+                        <a:latin typeface="メイリオ" panose="020B0604030504040204" pitchFamily="50" charset="-128"/>
+                        <a:ea typeface="メイリオ" panose="020B0604030504040204" pitchFamily="50" charset="-128"/>
+                      </a:endParaRPr>
+                    </a:p>
+                    <a:p>
+                      <a:pPr algn="l"/>
+                      <a:r>
+                        <a:rPr kumimoji="1" lang="ja-JP" altLang="en-US" sz="1600">
+                          <a:latin typeface="メイリオ" panose="020B0604030504040204" pitchFamily="50" charset="-128"/>
+                          <a:ea typeface="メイリオ" panose="020B0604030504040204" pitchFamily="50" charset="-128"/>
+                        </a:rPr>
+                        <a:t>・依頼者の好みや背景</a:t>
+                      </a:r>
+                    </a:p>
+                  </a:txBody>
+                  <a:tcPr anchor="ctr"/>
+                </a:tc>
+                <a:extLst>
+                  <a:ext uri="{0D108BD9-81ED-4DB2-BD59-A6C34878D82A}">
+                    <a16:rowId xmlns:a16="http://schemas.microsoft.com/office/drawing/2014/main" val="1720023439"/>
+                  </a:ext>
+                </a:extLst>
+              </a:tr>
+              <a:tr h="185420">
+                <a:tc>
+                  <a:txBody>
+                    <a:bodyPr/>
+                    <a:lstStyle/>
+                    <a:p>
+                      <a:pPr algn="l"/>
+                      <a:r>
+                        <a:rPr kumimoji="1" lang="en-US" altLang="ja-JP" sz="1600" b="1">
+                          <a:latin typeface="メイリオ" panose="020B0604030504040204" pitchFamily="50" charset="-128"/>
+                          <a:ea typeface="メイリオ" panose="020B0604030504040204" pitchFamily="50" charset="-128"/>
+                        </a:rPr>
+                        <a:t>HEARTBEAT.md</a:t>
+                      </a:r>
+                      <a:endParaRPr kumimoji="1" lang="ja-JP" altLang="en-US" sz="1600" b="1">
+                        <a:latin typeface="メイリオ" panose="020B0604030504040204" pitchFamily="50" charset="-128"/>
+                        <a:ea typeface="メイリオ" panose="020B0604030504040204" pitchFamily="50" charset="-128"/>
+                      </a:endParaRPr>
+                    </a:p>
+                  </a:txBody>
+                  <a:tcPr anchor="ctr"/>
+                </a:tc>
+                <a:tc>
+                  <a:txBody>
+                    <a:bodyPr/>
+                    <a:lstStyle/>
+                    <a:p>
+                      <a:pPr algn="l"/>
+                      <a:r>
+                        <a:rPr kumimoji="1" lang="ja-JP" altLang="en-US" sz="1600">
+                          <a:latin typeface="メイリオ" panose="020B0604030504040204" pitchFamily="50" charset="-128"/>
+                          <a:ea typeface="メイリオ" panose="020B0604030504040204" pitchFamily="50" charset="-128"/>
+                        </a:rPr>
+                        <a:t>定期チェック</a:t>
+                      </a:r>
+                      <a:endParaRPr kumimoji="1" lang="en-US" altLang="ja-JP" sz="1600">
+                        <a:latin typeface="メイリオ" panose="020B0604030504040204" pitchFamily="50" charset="-128"/>
+                        <a:ea typeface="メイリオ" panose="020B0604030504040204" pitchFamily="50" charset="-128"/>
+                      </a:endParaRPr>
+                    </a:p>
+                    <a:p>
+                      <a:pPr algn="l"/>
+                      <a:r>
+                        <a:rPr kumimoji="1" lang="ja-JP" altLang="en-US" sz="1600">
+                          <a:latin typeface="メイリオ" panose="020B0604030504040204" pitchFamily="50" charset="-128"/>
+                          <a:ea typeface="メイリオ" panose="020B0604030504040204" pitchFamily="50" charset="-128"/>
+                        </a:rPr>
+                        <a:t>・放っておいても自分で確認すべきこと</a:t>
+                      </a:r>
+                    </a:p>
+                  </a:txBody>
+                  <a:tcPr anchor="ctr"/>
+                </a:tc>
+                <a:extLst>
+                  <a:ext uri="{0D108BD9-81ED-4DB2-BD59-A6C34878D82A}">
+                    <a16:rowId xmlns:a16="http://schemas.microsoft.com/office/drawing/2014/main" val="1081932992"/>
+                  </a:ext>
+                </a:extLst>
+              </a:tr>
+              <a:tr h="185420">
+                <a:tc>
+                  <a:txBody>
+                    <a:bodyPr/>
+                    <a:lstStyle/>
+                    <a:p>
+                      <a:pPr algn="l"/>
+                      <a:r>
+                        <a:rPr kumimoji="1" lang="en-US" altLang="ja-JP" sz="1600">
+                          <a:latin typeface="メイリオ" panose="020B0604030504040204" pitchFamily="50" charset="-128"/>
+                          <a:ea typeface="メイリオ" panose="020B0604030504040204" pitchFamily="50" charset="-128"/>
+                        </a:rPr>
+                        <a:t>Memory/*.md</a:t>
+                      </a:r>
+                      <a:endParaRPr kumimoji="1" lang="ja-JP" altLang="en-US" sz="1600">
+                        <a:latin typeface="メイリオ" panose="020B0604030504040204" pitchFamily="50" charset="-128"/>
+                        <a:ea typeface="メイリオ" panose="020B0604030504040204" pitchFamily="50" charset="-128"/>
+                      </a:endParaRPr>
+                    </a:p>
+                  </a:txBody>
+                  <a:tcPr anchor="ctr"/>
+                </a:tc>
+                <a:tc>
+                  <a:txBody>
+                    <a:bodyPr/>
+                    <a:lstStyle/>
+                    <a:p>
+                      <a:pPr algn="l"/>
+                      <a:r>
+                        <a:rPr kumimoji="1" lang="ja-JP" altLang="en-US" sz="1600">
+                          <a:latin typeface="メイリオ" panose="020B0604030504040204" pitchFamily="50" charset="-128"/>
+                          <a:ea typeface="メイリオ" panose="020B0604030504040204" pitchFamily="50" charset="-128"/>
+                        </a:rPr>
+                        <a:t>記憶</a:t>
+                      </a:r>
+                      <a:endParaRPr kumimoji="1" lang="en-US" altLang="ja-JP" sz="1600">
+                        <a:latin typeface="メイリオ" panose="020B0604030504040204" pitchFamily="50" charset="-128"/>
+                        <a:ea typeface="メイリオ" panose="020B0604030504040204" pitchFamily="50" charset="-128"/>
+                      </a:endParaRPr>
+                    </a:p>
+                    <a:p>
+                      <a:pPr algn="l"/>
+                      <a:r>
+                        <a:rPr kumimoji="1" lang="ja-JP" altLang="en-US" sz="1600">
+                          <a:latin typeface="メイリオ" panose="020B0604030504040204" pitchFamily="50" charset="-128"/>
+                          <a:ea typeface="メイリオ" panose="020B0604030504040204" pitchFamily="50" charset="-128"/>
+                        </a:rPr>
+                        <a:t>・過去のやり取りな学び</a:t>
+                      </a:r>
+                    </a:p>
+                  </a:txBody>
+                  <a:tcPr anchor="ctr"/>
+                </a:tc>
+                <a:extLst>
+                  <a:ext uri="{0D108BD9-81ED-4DB2-BD59-A6C34878D82A}">
+                    <a16:rowId xmlns:a16="http://schemas.microsoft.com/office/drawing/2014/main" val="4070662332"/>
+                  </a:ext>
+                </a:extLst>
+              </a:tr>
+            </a:tbl>
+          </a:graphicData>
+        </a:graphic>
+      </p:graphicFrame>
+      <p:sp>
+        <p:nvSpPr>
+          <p:cNvPr id="17" name="テキスト ボックス 16">
+            <a:extLst>
+              <a:ext uri="{FF2B5EF4-FFF2-40B4-BE49-F238E27FC236}">
+                <a16:creationId xmlns:a16="http://schemas.microsoft.com/office/drawing/2014/main" id="{6F8A82CD-AE3C-D07B-9C30-C1C4232667EE}"/>
+              </a:ext>
+            </a:extLst>
+          </p:cNvPr>
+          <p:cNvSpPr txBox="1"/>
+          <p:nvPr/>
+        </p:nvSpPr>
+        <p:spPr>
+          <a:xfrm>
+            <a:off x="8169723" y="2308908"/>
+            <a:ext cx="3174137" cy="430887"/>
+          </a:xfrm>
+          <a:prstGeom prst="rect">
+            <a:avLst/>
+          </a:prstGeom>
+          <a:noFill/>
+        </p:spPr>
+        <p:txBody>
+          <a:bodyPr wrap="square" rtlCol="0">
+            <a:spAutoFit/>
+          </a:bodyPr>
+          <a:lstStyle/>
+          <a:p>
+            <a:pPr>
+              <a:lnSpc>
+                <a:spcPct val="150000"/>
+              </a:lnSpc>
+            </a:pPr>
+            <a:r>
+              <a:rPr kumimoji="1" lang="en-US" altLang="ja-JP" sz="1600" b="1">
+                <a:latin typeface="メイリオ" panose="020B0604030504040204" pitchFamily="50" charset="-128"/>
+                <a:ea typeface="メイリオ" panose="020B0604030504040204" pitchFamily="50" charset="-128"/>
+              </a:rPr>
+              <a:t>Sub Agent</a:t>
+            </a:r>
+            <a:r>
+              <a:rPr kumimoji="1" lang="ja-JP" altLang="en-US" sz="1600" b="1">
+                <a:latin typeface="メイリオ" panose="020B0604030504040204" pitchFamily="50" charset="-128"/>
+                <a:ea typeface="メイリオ" panose="020B0604030504040204" pitchFamily="50" charset="-128"/>
+              </a:rPr>
+              <a:t>が持っている情報</a:t>
+            </a:r>
+            <a:endParaRPr kumimoji="1" lang="en-US" altLang="ja-JP" sz="1600" b="1">
+              <a:latin typeface="メイリオ" panose="020B0604030504040204" pitchFamily="50" charset="-128"/>
+              <a:ea typeface="メイリオ" panose="020B0604030504040204" pitchFamily="50" charset="-128"/>
+            </a:endParaRPr>
+          </a:p>
+        </p:txBody>
+      </p:sp>
+      <p:graphicFrame>
+        <p:nvGraphicFramePr>
+          <p:cNvPr id="18" name="表 17">
+            <a:extLst>
+              <a:ext uri="{FF2B5EF4-FFF2-40B4-BE49-F238E27FC236}">
+                <a16:creationId xmlns:a16="http://schemas.microsoft.com/office/drawing/2014/main" id="{F7948501-F188-C235-9C44-FBA27488E9EA}"/>
+              </a:ext>
+            </a:extLst>
+          </p:cNvPr>
+          <p:cNvGraphicFramePr>
+            <a:graphicFrameLocks noGrp="1"/>
+          </p:cNvGraphicFramePr>
+          <p:nvPr>
+            <p:extLst>
+              <p:ext uri="{D42A27DB-BD31-4B8C-83A1-F6EECF244321}">
+                <p14:modId xmlns:p14="http://schemas.microsoft.com/office/powerpoint/2010/main" val="4102093851"/>
+              </p:ext>
+            </p:extLst>
+          </p:nvPr>
+        </p:nvGraphicFramePr>
+        <p:xfrm>
+          <a:off x="7072628" y="3104427"/>
+          <a:ext cx="4585971" cy="949960"/>
+        </p:xfrm>
+        <a:graphic>
+          <a:graphicData uri="http://schemas.openxmlformats.org/drawingml/2006/table">
+            <a:tbl>
+              <a:tblPr bandRow="1">
+                <a:tableStyleId>{5C22544A-7EE6-4342-B048-85BDC9FD1C3A}</a:tableStyleId>
+              </a:tblPr>
+              <a:tblGrid>
+                <a:gridCol w="1806396">
+                  <a:extLst>
+                    <a:ext uri="{9D8B030D-6E8A-4147-A177-3AD203B41FA5}">
+                      <a16:colId xmlns:a16="http://schemas.microsoft.com/office/drawing/2014/main" val="2178145205"/>
+                    </a:ext>
+                  </a:extLst>
+                </a:gridCol>
+                <a:gridCol w="2779575">
+                  <a:extLst>
+                    <a:ext uri="{9D8B030D-6E8A-4147-A177-3AD203B41FA5}">
+                      <a16:colId xmlns:a16="http://schemas.microsoft.com/office/drawing/2014/main" val="724501695"/>
+                    </a:ext>
+                  </a:extLst>
+                </a:gridCol>
+              </a:tblGrid>
+              <a:tr h="370840">
+                <a:tc>
+                  <a:txBody>
+                    <a:bodyPr/>
+                    <a:lstStyle/>
+                    <a:p>
+                      <a:pPr algn="l"/>
+                      <a:r>
+                        <a:rPr kumimoji="1" lang="en-US" altLang="ja-JP" sz="1600">
+                          <a:latin typeface="メイリオ" panose="020B0604030504040204" pitchFamily="50" charset="-128"/>
+                          <a:ea typeface="メイリオ" panose="020B0604030504040204" pitchFamily="50" charset="-128"/>
+                        </a:rPr>
+                        <a:t>AGENTS.md</a:t>
+                      </a:r>
+                      <a:endParaRPr kumimoji="1" lang="ja-JP" altLang="en-US" sz="1600">
+                        <a:latin typeface="メイリオ" panose="020B0604030504040204" pitchFamily="50" charset="-128"/>
+                        <a:ea typeface="メイリオ" panose="020B0604030504040204" pitchFamily="50" charset="-128"/>
+                      </a:endParaRPr>
+                    </a:p>
+                  </a:txBody>
+                  <a:tcPr anchor="ctr"/>
+                </a:tc>
+                <a:tc>
+                  <a:txBody>
+                    <a:bodyPr/>
+                    <a:lstStyle/>
+                    <a:p>
+                      <a:pPr algn="l"/>
+                      <a:r>
+                        <a:rPr kumimoji="1" lang="ja-JP" altLang="en-US" sz="1600">
+                          <a:latin typeface="メイリオ" panose="020B0604030504040204" pitchFamily="50" charset="-128"/>
+                          <a:ea typeface="メイリオ" panose="020B0604030504040204" pitchFamily="50" charset="-128"/>
+                        </a:rPr>
+                        <a:t>全員共通の指示書</a:t>
+                      </a:r>
+                    </a:p>
+                  </a:txBody>
+                  <a:tcPr anchor="ctr"/>
+                </a:tc>
+                <a:extLst>
+                  <a:ext uri="{0D108BD9-81ED-4DB2-BD59-A6C34878D82A}">
+                    <a16:rowId xmlns:a16="http://schemas.microsoft.com/office/drawing/2014/main" val="4189117046"/>
+                  </a:ext>
+                </a:extLst>
+              </a:tr>
+              <a:tr h="370840">
+                <a:tc>
+                  <a:txBody>
+                    <a:bodyPr/>
+                    <a:lstStyle/>
+                    <a:p>
+                      <a:pPr algn="l"/>
+                      <a:r>
+                        <a:rPr kumimoji="1" lang="en-US" altLang="ja-JP" sz="1600">
+                          <a:latin typeface="メイリオ" panose="020B0604030504040204" pitchFamily="50" charset="-128"/>
+                          <a:ea typeface="メイリオ" panose="020B0604030504040204" pitchFamily="50" charset="-128"/>
+                        </a:rPr>
+                        <a:t>TOOLS.md</a:t>
+                      </a:r>
+                      <a:endParaRPr kumimoji="1" lang="ja-JP" altLang="en-US" sz="1600">
+                        <a:latin typeface="メイリオ" panose="020B0604030504040204" pitchFamily="50" charset="-128"/>
+                        <a:ea typeface="メイリオ" panose="020B0604030504040204" pitchFamily="50" charset="-128"/>
+                      </a:endParaRPr>
+                    </a:p>
+                  </a:txBody>
+                  <a:tcPr anchor="ctr"/>
+                </a:tc>
+                <a:tc>
+                  <a:txBody>
+                    <a:bodyPr/>
+                    <a:lstStyle/>
+                    <a:p>
+                      <a:pPr algn="l"/>
+                      <a:r>
+                        <a:rPr kumimoji="1" lang="ja-JP" altLang="en-US" sz="1600">
+                          <a:latin typeface="メイリオ" panose="020B0604030504040204" pitchFamily="50" charset="-128"/>
+                          <a:ea typeface="メイリオ" panose="020B0604030504040204" pitchFamily="50" charset="-128"/>
+                        </a:rPr>
+                        <a:t>ツール定義</a:t>
+                      </a:r>
+                      <a:endParaRPr kumimoji="1" lang="en-US" altLang="ja-JP" sz="1600">
+                        <a:latin typeface="メイリオ" panose="020B0604030504040204" pitchFamily="50" charset="-128"/>
+                        <a:ea typeface="メイリオ" panose="020B0604030504040204" pitchFamily="50" charset="-128"/>
+                      </a:endParaRPr>
+                    </a:p>
+                    <a:p>
+                      <a:pPr marL="0" marR="0" lvl="0" indent="0" algn="l" defTabSz="914400" rtl="0" eaLnBrk="1" fontAlgn="auto" latinLnBrk="0" hangingPunct="1">
+                        <a:lnSpc>
+                          <a:spcPct val="100000"/>
+                        </a:lnSpc>
+                        <a:spcBef>
+                          <a:spcPts val="0"/>
+                        </a:spcBef>
+                        <a:spcAft>
+                          <a:spcPts val="0"/>
+                        </a:spcAft>
+                        <a:buClrTx/>
+                        <a:buSzTx/>
+                        <a:buFontTx/>
+                        <a:buNone/>
+                        <a:tabLst/>
+                        <a:defRPr/>
+                      </a:pPr>
+                      <a:r>
+                        <a:rPr kumimoji="1" lang="ja-JP" altLang="en-US" sz="1600">
+                          <a:latin typeface="メイリオ" panose="020B0604030504040204" pitchFamily="50" charset="-128"/>
+                          <a:ea typeface="メイリオ" panose="020B0604030504040204" pitchFamily="50" charset="-128"/>
+                        </a:rPr>
+                        <a:t>・何を使えるかの把握</a:t>
+                      </a:r>
+                    </a:p>
+                  </a:txBody>
+                  <a:tcPr anchor="ctr"/>
+                </a:tc>
+                <a:extLst>
+                  <a:ext uri="{0D108BD9-81ED-4DB2-BD59-A6C34878D82A}">
+                    <a16:rowId xmlns:a16="http://schemas.microsoft.com/office/drawing/2014/main" val="2735890957"/>
+                  </a:ext>
+                </a:extLst>
+              </a:tr>
+            </a:tbl>
+          </a:graphicData>
+        </a:graphic>
+      </p:graphicFrame>
+      <p:sp>
+        <p:nvSpPr>
+          <p:cNvPr id="20" name="テキスト ボックス 19">
+            <a:extLst>
+              <a:ext uri="{FF2B5EF4-FFF2-40B4-BE49-F238E27FC236}">
+                <a16:creationId xmlns:a16="http://schemas.microsoft.com/office/drawing/2014/main" id="{F962303D-58ED-4B1E-4E67-76698BB82D94}"/>
+              </a:ext>
+            </a:extLst>
+          </p:cNvPr>
+          <p:cNvSpPr txBox="1"/>
+          <p:nvPr/>
+        </p:nvSpPr>
+        <p:spPr>
+          <a:xfrm>
+            <a:off x="6676023" y="4138174"/>
+            <a:ext cx="5203255" cy="1034899"/>
+          </a:xfrm>
+          <a:prstGeom prst="rect">
+            <a:avLst/>
+          </a:prstGeom>
+          <a:noFill/>
+        </p:spPr>
+        <p:txBody>
+          <a:bodyPr wrap="square" rtlCol="0">
+            <a:spAutoFit/>
+          </a:bodyPr>
+          <a:lstStyle/>
+          <a:p>
+            <a:pPr>
+              <a:lnSpc>
+                <a:spcPct val="150000"/>
+              </a:lnSpc>
+            </a:pPr>
+            <a:r>
+              <a:rPr kumimoji="1" lang="ja-JP" altLang="en-US" sz="1400">
+                <a:latin typeface="メイリオ" panose="020B0604030504040204" pitchFamily="50" charset="-128"/>
+                <a:ea typeface="メイリオ" panose="020B0604030504040204" pitchFamily="50" charset="-128"/>
+              </a:rPr>
+              <a:t>作業に必要な情報だけあればいいので、人格も記憶もユーザー理解も必要ない。</a:t>
+            </a:r>
+            <a:endParaRPr kumimoji="1" lang="en-US" altLang="ja-JP" sz="1400">
+              <a:latin typeface="メイリオ" panose="020B0604030504040204" pitchFamily="50" charset="-128"/>
+              <a:ea typeface="メイリオ" panose="020B0604030504040204" pitchFamily="50" charset="-128"/>
+            </a:endParaRPr>
+          </a:p>
+          <a:p>
+            <a:pPr>
+              <a:lnSpc>
+                <a:spcPct val="150000"/>
+              </a:lnSpc>
+            </a:pPr>
+            <a:r>
+              <a:rPr lang="ja-JP" altLang="en-US" sz="1400">
+                <a:latin typeface="メイリオ" panose="020B0604030504040204" pitchFamily="50" charset="-128"/>
+                <a:ea typeface="メイリオ" panose="020B0604030504040204" pitchFamily="50" charset="-128"/>
+              </a:rPr>
+              <a:t>言われた作業をやって返すだけ。</a:t>
+            </a:r>
+            <a:endParaRPr kumimoji="1" lang="en-US" altLang="ja-JP" sz="1400">
+              <a:latin typeface="メイリオ" panose="020B0604030504040204" pitchFamily="50" charset="-128"/>
+              <a:ea typeface="メイリオ" panose="020B0604030504040204" pitchFamily="50" charset="-128"/>
+            </a:endParaRPr>
+          </a:p>
+        </p:txBody>
+      </p:sp>
+      <p:sp>
+        <p:nvSpPr>
+          <p:cNvPr id="21" name="テキスト ボックス 20">
+            <a:extLst>
+              <a:ext uri="{FF2B5EF4-FFF2-40B4-BE49-F238E27FC236}">
+                <a16:creationId xmlns:a16="http://schemas.microsoft.com/office/drawing/2014/main" id="{F30D0CD6-9356-153E-507D-13A37586FC37}"/>
+              </a:ext>
+            </a:extLst>
+          </p:cNvPr>
+          <p:cNvSpPr txBox="1"/>
+          <p:nvPr/>
+        </p:nvSpPr>
+        <p:spPr>
+          <a:xfrm>
+            <a:off x="6643132" y="5507383"/>
+            <a:ext cx="5308794" cy="1169551"/>
+          </a:xfrm>
+          <a:prstGeom prst="rect">
+            <a:avLst/>
+          </a:prstGeom>
+          <a:noFill/>
+        </p:spPr>
+        <p:txBody>
+          <a:bodyPr wrap="square" rtlCol="0">
+            <a:spAutoFit/>
+          </a:bodyPr>
+          <a:lstStyle/>
+          <a:p>
+            <a:r>
+              <a:rPr kumimoji="1" lang="ja-JP" altLang="en-US" sz="1400">
+                <a:latin typeface="メイリオ" panose="020B0604030504040204" pitchFamily="50" charset="-128"/>
+                <a:ea typeface="メイリオ" panose="020B0604030504040204" pitchFamily="50" charset="-128"/>
+              </a:rPr>
+              <a:t>会話をするとエージェントにテキストが貯まって毎回参照するので、結果として会話をしていくことで</a:t>
+            </a:r>
+            <a:r>
+              <a:rPr kumimoji="1" lang="ja-JP" altLang="en-US" sz="1400" b="1">
+                <a:solidFill>
+                  <a:schemeClr val="accent4">
+                    <a:lumMod val="75000"/>
+                  </a:schemeClr>
+                </a:solidFill>
+                <a:latin typeface="メイリオ" panose="020B0604030504040204" pitchFamily="50" charset="-128"/>
+                <a:ea typeface="メイリオ" panose="020B0604030504040204" pitchFamily="50" charset="-128"/>
+              </a:rPr>
+              <a:t>自分にパーソナライズされた</a:t>
+            </a:r>
+            <a:r>
+              <a:rPr kumimoji="1" lang="en-US" altLang="ja-JP" sz="1400" b="1">
+                <a:solidFill>
+                  <a:schemeClr val="accent4">
+                    <a:lumMod val="75000"/>
+                  </a:schemeClr>
+                </a:solidFill>
+                <a:latin typeface="メイリオ" panose="020B0604030504040204" pitchFamily="50" charset="-128"/>
+                <a:ea typeface="メイリオ" panose="020B0604030504040204" pitchFamily="50" charset="-128"/>
+              </a:rPr>
+              <a:t>AI</a:t>
+            </a:r>
+            <a:r>
+              <a:rPr kumimoji="1" lang="ja-JP" altLang="en-US" sz="1400" b="1">
+                <a:solidFill>
+                  <a:schemeClr val="accent4">
+                    <a:lumMod val="75000"/>
+                  </a:schemeClr>
+                </a:solidFill>
+                <a:latin typeface="メイリオ" panose="020B0604030504040204" pitchFamily="50" charset="-128"/>
+                <a:ea typeface="メイリオ" panose="020B0604030504040204" pitchFamily="50" charset="-128"/>
+              </a:rPr>
+              <a:t>が育っていきます。</a:t>
+            </a:r>
+            <a:endParaRPr kumimoji="1" lang="en-US" altLang="ja-JP" sz="1400" b="1">
+              <a:solidFill>
+                <a:schemeClr val="accent4">
+                  <a:lumMod val="75000"/>
+                </a:schemeClr>
+              </a:solidFill>
+              <a:latin typeface="メイリオ" panose="020B0604030504040204" pitchFamily="50" charset="-128"/>
+              <a:ea typeface="メイリオ" panose="020B0604030504040204" pitchFamily="50" charset="-128"/>
+            </a:endParaRPr>
+          </a:p>
+          <a:p>
+            <a:r>
+              <a:rPr lang="ja-JP" altLang="en-US" sz="1400">
+                <a:latin typeface="メイリオ" panose="020B0604030504040204" pitchFamily="50" charset="-128"/>
+                <a:ea typeface="メイリオ" panose="020B0604030504040204" pitchFamily="50" charset="-128"/>
+              </a:rPr>
+              <a:t>テキストファイルなので書き換えれば判断基準などもこちらで変更できます。</a:t>
+            </a:r>
+            <a:endParaRPr kumimoji="1" lang="en-US" altLang="ja-JP" sz="1400">
+              <a:latin typeface="メイリオ" panose="020B0604030504040204" pitchFamily="50" charset="-128"/>
+              <a:ea typeface="メイリオ" panose="020B0604030504040204" pitchFamily="50" charset="-128"/>
+            </a:endParaRPr>
+          </a:p>
+        </p:txBody>
+      </p:sp>
+    </p:spTree>
+    <p:extLst>
+      <p:ext uri="{BB962C8B-B14F-4D97-AF65-F5344CB8AC3E}">
+        <p14:creationId xmlns:p14="http://schemas.microsoft.com/office/powerpoint/2010/main" val="3005910584"/>
+      </p:ext>
+    </p:extLst>
+  </p:cSld>
+  <p:clrMapOvr>
+    <a:masterClrMapping/>
+  </p:clrMapOvr>
+</p:sld>
+</file>
+
+<file path=ppt/slides/slide9.xml><?xml version="1.0" encoding="utf-8"?>
+<p:sld xmlns:a="http://schemas.openxmlformats.org/drawingml/2006/main" xmlns:r="http://schemas.openxmlformats.org/officeDocument/2006/relationships" xmlns:p="http://schemas.openxmlformats.org/presentationml/2006/main">
+  <p:cSld>
+    <p:spTree>
+      <p:nvGrpSpPr>
+        <p:cNvPr id="1" name="">
+          <a:extLst>
+            <a:ext uri="{FF2B5EF4-FFF2-40B4-BE49-F238E27FC236}">
+              <a16:creationId xmlns:a16="http://schemas.microsoft.com/office/drawing/2014/main" id="{8F36EE38-7468-558A-D3EC-C204434AB1D4}"/>
+            </a:ext>
+          </a:extLst>
+        </p:cNvPr>
+        <p:cNvGrpSpPr/>
+        <p:nvPr/>
+      </p:nvGrpSpPr>
+      <p:grpSpPr>
+        <a:xfrm>
+          <a:off x="0" y="0"/>
+          <a:ext cx="0" cy="0"/>
+          <a:chOff x="0" y="0"/>
+          <a:chExt cx="0" cy="0"/>
+        </a:xfrm>
+      </p:grpSpPr>
+      <p:sp>
+        <p:nvSpPr>
+          <p:cNvPr id="4" name="テキスト ボックス 3">
+            <a:extLst>
+              <a:ext uri="{FF2B5EF4-FFF2-40B4-BE49-F238E27FC236}">
+                <a16:creationId xmlns:a16="http://schemas.microsoft.com/office/drawing/2014/main" id="{BDC9D1B5-4486-3549-1D3F-C8A709A94ECD}"/>
+              </a:ext>
+            </a:extLst>
+          </p:cNvPr>
+          <p:cNvSpPr txBox="1"/>
+          <p:nvPr/>
+        </p:nvSpPr>
+        <p:spPr>
+          <a:xfrm>
+            <a:off x="443466" y="317212"/>
+            <a:ext cx="11215133" cy="584775"/>
+          </a:xfrm>
+          <a:prstGeom prst="rect">
+            <a:avLst/>
+          </a:prstGeom>
+          <a:noFill/>
+        </p:spPr>
+        <p:txBody>
+          <a:bodyPr wrap="square" rtlCol="0">
+            <a:spAutoFit/>
+          </a:bodyPr>
+          <a:lstStyle/>
+          <a:p>
+            <a:r>
+              <a:rPr lang="en-US" altLang="ja-JP" sz="3200" b="1">
+                <a:latin typeface="メイリオ" panose="020B0604030504040204" pitchFamily="50" charset="-128"/>
+                <a:ea typeface="メイリオ" panose="020B0604030504040204" pitchFamily="50" charset="-128"/>
+              </a:rPr>
+              <a:t>3.HEARTBEAT - </a:t>
+            </a:r>
+            <a:r>
+              <a:rPr lang="ja-JP" altLang="en-US" sz="3200" b="1">
+                <a:latin typeface="メイリオ" panose="020B0604030504040204" pitchFamily="50" charset="-128"/>
+                <a:ea typeface="メイリオ" panose="020B0604030504040204" pitchFamily="50" charset="-128"/>
+              </a:rPr>
+              <a:t>常時起動で何が変わるか</a:t>
+            </a:r>
+            <a:endParaRPr kumimoji="1" lang="ja-JP" altLang="en-US" sz="3200" b="1">
+              <a:latin typeface="メイリオ" panose="020B0604030504040204" pitchFamily="50" charset="-128"/>
+              <a:ea typeface="メイリオ" panose="020B0604030504040204" pitchFamily="50" charset="-128"/>
+            </a:endParaRPr>
+          </a:p>
+        </p:txBody>
+      </p:sp>
+      <p:sp>
+        <p:nvSpPr>
+          <p:cNvPr id="5" name="テキスト ボックス 4">
+            <a:extLst>
+              <a:ext uri="{FF2B5EF4-FFF2-40B4-BE49-F238E27FC236}">
+                <a16:creationId xmlns:a16="http://schemas.microsoft.com/office/drawing/2014/main" id="{DD45656B-28E8-3F02-D6C4-F9155DC548CA}"/>
+              </a:ext>
+            </a:extLst>
+          </p:cNvPr>
+          <p:cNvSpPr txBox="1"/>
+          <p:nvPr/>
+        </p:nvSpPr>
+        <p:spPr>
+          <a:xfrm>
+            <a:off x="354254" y="867978"/>
+            <a:ext cx="11483492" cy="1358064"/>
+          </a:xfrm>
+          <a:prstGeom prst="rect">
+            <a:avLst/>
+          </a:prstGeom>
+          <a:noFill/>
+        </p:spPr>
+        <p:txBody>
+          <a:bodyPr wrap="square" rtlCol="0">
+            <a:spAutoFit/>
+          </a:bodyPr>
+          <a:lstStyle/>
+          <a:p>
+            <a:pPr>
+              <a:lnSpc>
+                <a:spcPct val="150000"/>
+              </a:lnSpc>
+            </a:pPr>
+            <a:r>
+              <a:rPr kumimoji="1" lang="en-US" altLang="ja-JP" sz="1400">
+                <a:latin typeface="メイリオ" panose="020B0604030504040204" pitchFamily="50" charset="-128"/>
+                <a:ea typeface="メイリオ" panose="020B0604030504040204" pitchFamily="50" charset="-128"/>
+              </a:rPr>
+              <a:t>OpenClaw</a:t>
+            </a:r>
+            <a:r>
+              <a:rPr kumimoji="1" lang="ja-JP" altLang="en-US" sz="1400">
+                <a:latin typeface="メイリオ" panose="020B0604030504040204" pitchFamily="50" charset="-128"/>
+                <a:ea typeface="メイリオ" panose="020B0604030504040204" pitchFamily="50" charset="-128"/>
+              </a:rPr>
+              <a:t>は常駐型なので、立ち上げてさえいれば当然チャットで話しかければすぐに返事がきます。</a:t>
+            </a:r>
+            <a:endParaRPr kumimoji="1" lang="en-US" altLang="ja-JP" sz="1400">
+              <a:latin typeface="メイリオ" panose="020B0604030504040204" pitchFamily="50" charset="-128"/>
+              <a:ea typeface="メイリオ" panose="020B0604030504040204" pitchFamily="50" charset="-128"/>
+            </a:endParaRPr>
+          </a:p>
+          <a:p>
+            <a:pPr>
+              <a:lnSpc>
+                <a:spcPct val="150000"/>
+              </a:lnSpc>
+            </a:pPr>
+            <a:r>
+              <a:rPr lang="en-US" altLang="ja-JP" sz="1400">
+                <a:latin typeface="メイリオ" panose="020B0604030504040204" pitchFamily="50" charset="-128"/>
+                <a:ea typeface="メイリオ" panose="020B0604030504040204" pitchFamily="50" charset="-128"/>
+              </a:rPr>
+              <a:t>HEARTBEAT</a:t>
+            </a:r>
+            <a:r>
+              <a:rPr lang="ja-JP" altLang="en-US" sz="1400">
+                <a:latin typeface="メイリオ" panose="020B0604030504040204" pitchFamily="50" charset="-128"/>
+                <a:ea typeface="メイリオ" panose="020B0604030504040204" pitchFamily="50" charset="-128"/>
+              </a:rPr>
+              <a:t>はそれに加え、</a:t>
+            </a:r>
+            <a:r>
+              <a:rPr lang="ja-JP" altLang="en-US" sz="1400" b="1">
+                <a:latin typeface="メイリオ" panose="020B0604030504040204" pitchFamily="50" charset="-128"/>
+                <a:ea typeface="メイリオ" panose="020B0604030504040204" pitchFamily="50" charset="-128"/>
+              </a:rPr>
+              <a:t>時間トリガーなどで定期的に起動し、</a:t>
+            </a:r>
+            <a:r>
+              <a:rPr lang="ja-JP" altLang="en-US" sz="1400">
+                <a:latin typeface="メイリオ" panose="020B0604030504040204" pitchFamily="50" charset="-128"/>
+                <a:ea typeface="メイリオ" panose="020B0604030504040204" pitchFamily="50" charset="-128"/>
+              </a:rPr>
+              <a:t>誰も話しかけなくても自分から動く仕組みです。</a:t>
+            </a:r>
+            <a:endParaRPr lang="en-US" altLang="ja-JP" sz="1400">
+              <a:latin typeface="メイリオ" panose="020B0604030504040204" pitchFamily="50" charset="-128"/>
+              <a:ea typeface="メイリオ" panose="020B0604030504040204" pitchFamily="50" charset="-128"/>
+            </a:endParaRPr>
+          </a:p>
+          <a:p>
+            <a:pPr>
+              <a:lnSpc>
+                <a:spcPct val="150000"/>
+              </a:lnSpc>
+            </a:pPr>
+            <a:r>
+              <a:rPr lang="ja-JP" altLang="en-US" sz="1400">
+                <a:latin typeface="メイリオ" panose="020B0604030504040204" pitchFamily="50" charset="-128"/>
+                <a:ea typeface="メイリオ" panose="020B0604030504040204" pitchFamily="50" charset="-128"/>
+              </a:rPr>
+              <a:t>「放っておいても自分で確認すべきこと」の一覧を確認し、やるべきことがあるかを判断します。</a:t>
+            </a:r>
+            <a:endParaRPr lang="en-US" altLang="ja-JP" sz="1400">
+              <a:latin typeface="メイリオ" panose="020B0604030504040204" pitchFamily="50" charset="-128"/>
+              <a:ea typeface="メイリオ" panose="020B0604030504040204" pitchFamily="50" charset="-128"/>
+            </a:endParaRPr>
+          </a:p>
+          <a:p>
+            <a:pPr>
+              <a:lnSpc>
+                <a:spcPct val="150000"/>
+              </a:lnSpc>
+            </a:pPr>
+            <a:r>
+              <a:rPr kumimoji="1" lang="ja-JP" altLang="en-US" sz="1400">
+                <a:latin typeface="メイリオ" panose="020B0604030504040204" pitchFamily="50" charset="-128"/>
+                <a:ea typeface="メイリオ" panose="020B0604030504040204" pitchFamily="50" charset="-128"/>
+              </a:rPr>
+              <a:t>各種ツールとの連携機能もあり、</a:t>
+            </a:r>
+            <a:r>
+              <a:rPr kumimoji="1" lang="en-US" altLang="ja-JP" sz="1400">
+                <a:latin typeface="メイリオ" panose="020B0604030504040204" pitchFamily="50" charset="-128"/>
+                <a:ea typeface="メイリオ" panose="020B0604030504040204" pitchFamily="50" charset="-128"/>
+              </a:rPr>
+              <a:t>Slack</a:t>
+            </a:r>
+            <a:r>
+              <a:rPr lang="ja-JP" altLang="en-US" sz="1400">
+                <a:latin typeface="メイリオ" panose="020B0604030504040204" pitchFamily="50" charset="-128"/>
+                <a:ea typeface="メイリオ" panose="020B0604030504040204" pitchFamily="50" charset="-128"/>
+              </a:rPr>
+              <a:t>・</a:t>
+            </a:r>
+            <a:r>
+              <a:rPr kumimoji="1" lang="en-US" altLang="ja-JP" sz="1400">
+                <a:latin typeface="メイリオ" panose="020B0604030504040204" pitchFamily="50" charset="-128"/>
+                <a:ea typeface="メイリオ" panose="020B0604030504040204" pitchFamily="50" charset="-128"/>
+              </a:rPr>
+              <a:t>Teams</a:t>
+            </a:r>
+            <a:r>
+              <a:rPr kumimoji="1" lang="ja-JP" altLang="en-US" sz="1400">
+                <a:latin typeface="メイリオ" panose="020B0604030504040204" pitchFamily="50" charset="-128"/>
+                <a:ea typeface="メイリオ" panose="020B0604030504040204" pitchFamily="50" charset="-128"/>
+              </a:rPr>
+              <a:t>・</a:t>
+            </a:r>
+            <a:r>
+              <a:rPr kumimoji="1" lang="en-US" altLang="ja-JP" sz="1400">
+                <a:latin typeface="メイリオ" panose="020B0604030504040204" pitchFamily="50" charset="-128"/>
+                <a:ea typeface="メイリオ" panose="020B0604030504040204" pitchFamily="50" charset="-128"/>
+              </a:rPr>
+              <a:t>Line</a:t>
+            </a:r>
+            <a:r>
+              <a:rPr kumimoji="1" lang="ja-JP" altLang="en-US" sz="1400">
+                <a:latin typeface="メイリオ" panose="020B0604030504040204" pitchFamily="50" charset="-128"/>
+                <a:ea typeface="メイリオ" panose="020B0604030504040204" pitchFamily="50" charset="-128"/>
+              </a:rPr>
+              <a:t>などからでもやり取りができます。</a:t>
+            </a:r>
+            <a:endParaRPr kumimoji="1" lang="en-US" altLang="ja-JP" sz="1400">
+              <a:latin typeface="メイリオ" panose="020B0604030504040204" pitchFamily="50" charset="-128"/>
+              <a:ea typeface="メイリオ" panose="020B0604030504040204" pitchFamily="50" charset="-128"/>
+            </a:endParaRPr>
+          </a:p>
+        </p:txBody>
+      </p:sp>
+      <p:sp>
+        <p:nvSpPr>
+          <p:cNvPr id="6" name="正方形/長方形 5">
+            <a:extLst>
+              <a:ext uri="{FF2B5EF4-FFF2-40B4-BE49-F238E27FC236}">
+                <a16:creationId xmlns:a16="http://schemas.microsoft.com/office/drawing/2014/main" id="{F7A03CE7-677A-A9D0-5AA0-D12638F1C95B}"/>
+              </a:ext>
+            </a:extLst>
+          </p:cNvPr>
+          <p:cNvSpPr/>
+          <p:nvPr/>
+        </p:nvSpPr>
+        <p:spPr>
+          <a:xfrm>
+            <a:off x="354254" y="2293320"/>
+            <a:ext cx="4476162" cy="457200"/>
+          </a:xfrm>
+          <a:prstGeom prst="rect">
+            <a:avLst/>
+          </a:prstGeom>
+          <a:solidFill>
+            <a:schemeClr val="accent1">
+              <a:lumMod val="20000"/>
+              <a:lumOff val="80000"/>
+            </a:schemeClr>
+          </a:solidFill>
+          <a:ln>
+            <a:noFill/>
+          </a:ln>
+        </p:spPr>
+        <p:style>
+          <a:lnRef idx="2">
+            <a:schemeClr val="accent1">
+              <a:shade val="15000"/>
+            </a:schemeClr>
+          </a:lnRef>
+          <a:fillRef idx="1">
+            <a:schemeClr val="accent1"/>
+          </a:fillRef>
+          <a:effectRef idx="0">
+            <a:schemeClr val="accent1"/>
+          </a:effectRef>
+          <a:fontRef idx="minor">
+            <a:schemeClr val="lt1"/>
+          </a:fontRef>
+        </p:style>
+        <p:txBody>
+          <a:bodyPr rtlCol="0" anchor="ctr"/>
+          <a:lstStyle/>
+          <a:p>
+            <a:pPr algn="ctr"/>
+            <a:r>
+              <a:rPr lang="ja-JP" altLang="en-US" b="1">
+                <a:solidFill>
+                  <a:schemeClr val="tx1"/>
+                </a:solidFill>
+                <a:latin typeface="メイリオ" panose="020B0604030504040204" pitchFamily="50" charset="-128"/>
+                <a:ea typeface="メイリオ" panose="020B0604030504040204" pitchFamily="50" charset="-128"/>
+              </a:rPr>
+              <a:t>記憶 </a:t>
+            </a:r>
+            <a:r>
+              <a:rPr lang="en-US" altLang="ja-JP" b="1">
+                <a:solidFill>
+                  <a:schemeClr val="tx1"/>
+                </a:solidFill>
+                <a:latin typeface="メイリオ" panose="020B0604030504040204" pitchFamily="50" charset="-128"/>
+                <a:ea typeface="メイリオ" panose="020B0604030504040204" pitchFamily="50" charset="-128"/>
+              </a:rPr>
+              <a:t>+ </a:t>
+            </a:r>
+            <a:r>
+              <a:rPr lang="ja-JP" altLang="en-US" b="1">
+                <a:solidFill>
+                  <a:schemeClr val="tx1"/>
+                </a:solidFill>
+                <a:latin typeface="メイリオ" panose="020B0604030504040204" pitchFamily="50" charset="-128"/>
+                <a:ea typeface="メイリオ" panose="020B0604030504040204" pitchFamily="50" charset="-128"/>
+              </a:rPr>
+              <a:t>定期起動 </a:t>
+            </a:r>
+            <a:r>
+              <a:rPr lang="en-US" altLang="ja-JP" b="1">
+                <a:solidFill>
+                  <a:schemeClr val="tx1"/>
+                </a:solidFill>
+                <a:latin typeface="メイリオ" panose="020B0604030504040204" pitchFamily="50" charset="-128"/>
+                <a:ea typeface="メイリオ" panose="020B0604030504040204" pitchFamily="50" charset="-128"/>
+              </a:rPr>
+              <a:t>= </a:t>
+            </a:r>
+            <a:r>
+              <a:rPr lang="ja-JP" altLang="en-US" b="1">
+                <a:solidFill>
+                  <a:schemeClr val="tx1"/>
+                </a:solidFill>
+                <a:latin typeface="メイリオ" panose="020B0604030504040204" pitchFamily="50" charset="-128"/>
+                <a:ea typeface="メイリオ" panose="020B0604030504040204" pitchFamily="50" charset="-128"/>
+              </a:rPr>
+              <a:t>継続的な自立行動</a:t>
+            </a:r>
+            <a:endParaRPr kumimoji="1" lang="ja-JP" altLang="en-US" b="1">
+              <a:solidFill>
+                <a:schemeClr val="tx1"/>
+              </a:solidFill>
+              <a:latin typeface="メイリオ" panose="020B0604030504040204" pitchFamily="50" charset="-128"/>
+              <a:ea typeface="メイリオ" panose="020B0604030504040204" pitchFamily="50" charset="-128"/>
+            </a:endParaRPr>
+          </a:p>
+        </p:txBody>
+      </p:sp>
+      <p:sp>
+        <p:nvSpPr>
+          <p:cNvPr id="7" name="テキスト ボックス 6">
+            <a:extLst>
+              <a:ext uri="{FF2B5EF4-FFF2-40B4-BE49-F238E27FC236}">
+                <a16:creationId xmlns:a16="http://schemas.microsoft.com/office/drawing/2014/main" id="{360F531A-2D90-C69F-A5C8-55C1A2AB1D96}"/>
+              </a:ext>
+            </a:extLst>
+          </p:cNvPr>
+          <p:cNvSpPr txBox="1"/>
+          <p:nvPr/>
+        </p:nvSpPr>
+        <p:spPr>
+          <a:xfrm>
+            <a:off x="354253" y="2845086"/>
+            <a:ext cx="4476163" cy="1384995"/>
+          </a:xfrm>
+          <a:prstGeom prst="rect">
+            <a:avLst/>
+          </a:prstGeom>
+          <a:noFill/>
+        </p:spPr>
+        <p:txBody>
+          <a:bodyPr wrap="square" rtlCol="0">
+            <a:spAutoFit/>
+          </a:bodyPr>
+          <a:lstStyle/>
+          <a:p>
+            <a:pPr marL="342900" indent="-342900">
+              <a:buFont typeface="+mj-lt"/>
+              <a:buAutoNum type="arabicPeriod"/>
+            </a:pPr>
+            <a:r>
+              <a:rPr lang="en-US" altLang="ja-JP" sz="1400">
+                <a:latin typeface="メイリオ" panose="020B0604030504040204" pitchFamily="50" charset="-128"/>
+                <a:ea typeface="メイリオ" panose="020B0604030504040204" pitchFamily="50" charset="-128"/>
+              </a:rPr>
+              <a:t>HEARTBEAT</a:t>
+            </a:r>
+            <a:r>
+              <a:rPr lang="ja-JP" altLang="en-US" sz="1400">
+                <a:latin typeface="メイリオ" panose="020B0604030504040204" pitchFamily="50" charset="-128"/>
+                <a:ea typeface="メイリオ" panose="020B0604030504040204" pitchFamily="50" charset="-128"/>
+              </a:rPr>
+              <a:t>で</a:t>
+            </a:r>
+            <a:r>
+              <a:rPr lang="en-US" altLang="ja-JP" sz="1400">
+                <a:latin typeface="メイリオ" panose="020B0604030504040204" pitchFamily="50" charset="-128"/>
+                <a:ea typeface="メイリオ" panose="020B0604030504040204" pitchFamily="50" charset="-128"/>
+              </a:rPr>
+              <a:t>30</a:t>
+            </a:r>
+            <a:r>
+              <a:rPr lang="ja-JP" altLang="en-US" sz="1400">
+                <a:latin typeface="メイリオ" panose="020B0604030504040204" pitchFamily="50" charset="-128"/>
+                <a:ea typeface="メイリオ" panose="020B0604030504040204" pitchFamily="50" charset="-128"/>
+              </a:rPr>
+              <a:t>分ごとに起動：毎回別人だが</a:t>
+            </a:r>
+            <a:r>
+              <a:rPr lang="en-US" altLang="ja-JP" sz="1400">
+                <a:latin typeface="メイリオ" panose="020B0604030504040204" pitchFamily="50" charset="-128"/>
+                <a:ea typeface="メイリオ" panose="020B0604030504040204" pitchFamily="50" charset="-128"/>
+              </a:rPr>
+              <a:t>…</a:t>
+            </a:r>
+          </a:p>
+          <a:p>
+            <a:pPr marL="342900" indent="-342900">
+              <a:buFont typeface="+mj-lt"/>
+              <a:buAutoNum type="arabicPeriod"/>
+            </a:pPr>
+            <a:r>
+              <a:rPr lang="ja-JP" altLang="en-US" sz="1400">
+                <a:latin typeface="メイリオ" panose="020B0604030504040204" pitchFamily="50" charset="-128"/>
+                <a:ea typeface="メイリオ" panose="020B0604030504040204" pitchFamily="50" charset="-128"/>
+              </a:rPr>
+              <a:t>続きから動く：引継書確認して何をやっていたかを思い出す</a:t>
+            </a:r>
+            <a:endParaRPr lang="en-US" altLang="ja-JP" sz="1400">
+              <a:latin typeface="メイリオ" panose="020B0604030504040204" pitchFamily="50" charset="-128"/>
+              <a:ea typeface="メイリオ" panose="020B0604030504040204" pitchFamily="50" charset="-128"/>
+            </a:endParaRPr>
+          </a:p>
+          <a:p>
+            <a:pPr marL="342900" indent="-342900">
+              <a:buFont typeface="+mj-lt"/>
+              <a:buAutoNum type="arabicPeriod"/>
+            </a:pPr>
+            <a:r>
+              <a:rPr lang="ja-JP" altLang="en-US" sz="1400">
+                <a:latin typeface="メイリオ" panose="020B0604030504040204" pitchFamily="50" charset="-128"/>
+                <a:ea typeface="メイリオ" panose="020B0604030504040204" pitchFamily="50" charset="-128"/>
+              </a:rPr>
+              <a:t>継続的な行動をする</a:t>
+            </a:r>
+            <a:endParaRPr lang="en-US" altLang="ja-JP" sz="1400">
+              <a:latin typeface="メイリオ" panose="020B0604030504040204" pitchFamily="50" charset="-128"/>
+              <a:ea typeface="メイリオ" panose="020B0604030504040204" pitchFamily="50" charset="-128"/>
+            </a:endParaRPr>
+          </a:p>
+          <a:p>
+            <a:pPr marL="342900" indent="-342900">
+              <a:buFont typeface="+mj-lt"/>
+              <a:buAutoNum type="arabicPeriod"/>
+            </a:pPr>
+            <a:r>
+              <a:rPr lang="ja-JP" altLang="en-US" sz="1400">
+                <a:latin typeface="メイリオ" panose="020B0604030504040204" pitchFamily="50" charset="-128"/>
+                <a:ea typeface="メイリオ" panose="020B0604030504040204" pitchFamily="50" charset="-128"/>
+              </a:rPr>
+              <a:t>自分が何をやったか記録する</a:t>
+            </a:r>
+            <a:endParaRPr lang="en-US" altLang="ja-JP" sz="1400">
+              <a:latin typeface="メイリオ" panose="020B0604030504040204" pitchFamily="50" charset="-128"/>
+              <a:ea typeface="メイリオ" panose="020B0604030504040204" pitchFamily="50" charset="-128"/>
+            </a:endParaRPr>
+          </a:p>
+          <a:p>
+            <a:r>
+              <a:rPr lang="ja-JP" altLang="en-US" sz="1400">
+                <a:latin typeface="メイリオ" panose="020B0604030504040204" pitchFamily="50" charset="-128"/>
+                <a:ea typeface="メイリオ" panose="020B0604030504040204" pitchFamily="50" charset="-128"/>
+              </a:rPr>
+              <a:t>のループ作業を行う</a:t>
+            </a:r>
+            <a:endParaRPr lang="en-US" altLang="ja-JP" sz="1400">
+              <a:latin typeface="メイリオ" panose="020B0604030504040204" pitchFamily="50" charset="-128"/>
+              <a:ea typeface="メイリオ" panose="020B0604030504040204" pitchFamily="50" charset="-128"/>
+            </a:endParaRPr>
+          </a:p>
+        </p:txBody>
+      </p:sp>
+      <p:sp>
+        <p:nvSpPr>
+          <p:cNvPr id="8" name="正方形/長方形 7">
+            <a:extLst>
+              <a:ext uri="{FF2B5EF4-FFF2-40B4-BE49-F238E27FC236}">
+                <a16:creationId xmlns:a16="http://schemas.microsoft.com/office/drawing/2014/main" id="{51580BFF-8CAF-C326-CCC4-5C76D09CBAB3}"/>
+              </a:ext>
+            </a:extLst>
+          </p:cNvPr>
+          <p:cNvSpPr/>
+          <p:nvPr/>
+        </p:nvSpPr>
+        <p:spPr>
+          <a:xfrm>
+            <a:off x="5600825" y="2297889"/>
+            <a:ext cx="6236921" cy="457200"/>
+          </a:xfrm>
+          <a:prstGeom prst="rect">
+            <a:avLst/>
+          </a:prstGeom>
+          <a:solidFill>
+            <a:schemeClr val="tx2">
+              <a:lumMod val="10000"/>
+              <a:lumOff val="90000"/>
+            </a:schemeClr>
+          </a:solidFill>
+          <a:ln>
+            <a:noFill/>
+          </a:ln>
+        </p:spPr>
+        <p:style>
+          <a:lnRef idx="2">
+            <a:schemeClr val="accent1">
+              <a:shade val="15000"/>
+            </a:schemeClr>
+          </a:lnRef>
+          <a:fillRef idx="1">
+            <a:schemeClr val="accent1"/>
+          </a:fillRef>
+          <a:effectRef idx="0">
+            <a:schemeClr val="accent1"/>
+          </a:effectRef>
+          <a:fontRef idx="minor">
+            <a:schemeClr val="lt1"/>
+          </a:fontRef>
+        </p:style>
+        <p:txBody>
+          <a:bodyPr rtlCol="0" anchor="ctr"/>
+          <a:lstStyle/>
+          <a:p>
+            <a:pPr algn="ctr"/>
+            <a:r>
+              <a:rPr lang="ja-JP" altLang="en-US" b="1">
+                <a:solidFill>
+                  <a:schemeClr val="tx1"/>
+                </a:solidFill>
+                <a:latin typeface="メイリオ" panose="020B0604030504040204" pitchFamily="50" charset="-128"/>
+                <a:ea typeface="メイリオ" panose="020B0604030504040204" pitchFamily="50" charset="-128"/>
+              </a:rPr>
+              <a:t>常時起動が可能にする利点</a:t>
+            </a:r>
+            <a:endParaRPr kumimoji="1" lang="ja-JP" altLang="en-US" b="1">
+              <a:solidFill>
+                <a:schemeClr val="tx1"/>
+              </a:solidFill>
+              <a:latin typeface="メイリオ" panose="020B0604030504040204" pitchFamily="50" charset="-128"/>
+              <a:ea typeface="メイリオ" panose="020B0604030504040204" pitchFamily="50" charset="-128"/>
+            </a:endParaRPr>
+          </a:p>
+        </p:txBody>
+      </p:sp>
+      <p:sp>
+        <p:nvSpPr>
+          <p:cNvPr id="9" name="テキスト ボックス 8">
+            <a:extLst>
+              <a:ext uri="{FF2B5EF4-FFF2-40B4-BE49-F238E27FC236}">
+                <a16:creationId xmlns:a16="http://schemas.microsoft.com/office/drawing/2014/main" id="{E80FB714-50E3-279E-627C-176756E83177}"/>
+              </a:ext>
+            </a:extLst>
+          </p:cNvPr>
+          <p:cNvSpPr txBox="1"/>
+          <p:nvPr/>
+        </p:nvSpPr>
+        <p:spPr>
+          <a:xfrm>
+            <a:off x="5600825" y="2755089"/>
+            <a:ext cx="6236922" cy="1681229"/>
+          </a:xfrm>
+          <a:prstGeom prst="rect">
+            <a:avLst/>
+          </a:prstGeom>
+          <a:noFill/>
+        </p:spPr>
+        <p:txBody>
+          <a:bodyPr wrap="square" rtlCol="0">
+            <a:spAutoFit/>
+          </a:bodyPr>
+          <a:lstStyle/>
+          <a:p>
+            <a:pPr marL="342900" indent="-342900">
+              <a:lnSpc>
+                <a:spcPct val="150000"/>
+              </a:lnSpc>
+              <a:buFont typeface="Arial" panose="020B0604020202020204" pitchFamily="34" charset="0"/>
+              <a:buChar char="•"/>
+            </a:pPr>
+            <a:r>
+              <a:rPr lang="ja-JP" altLang="en-US" sz="1400">
+                <a:latin typeface="メイリオ" panose="020B0604030504040204" pitchFamily="50" charset="-128"/>
+                <a:ea typeface="メイリオ" panose="020B0604030504040204" pitchFamily="50" charset="-128"/>
+              </a:rPr>
+              <a:t>メール・カレンダーの定期チェック</a:t>
+            </a:r>
+            <a:endParaRPr lang="en-US" altLang="ja-JP" sz="1400">
+              <a:latin typeface="メイリオ" panose="020B0604030504040204" pitchFamily="50" charset="-128"/>
+              <a:ea typeface="メイリオ" panose="020B0604030504040204" pitchFamily="50" charset="-128"/>
+            </a:endParaRPr>
+          </a:p>
+          <a:p>
+            <a:pPr marL="342900" indent="-342900">
+              <a:lnSpc>
+                <a:spcPct val="150000"/>
+              </a:lnSpc>
+              <a:buFont typeface="Arial" panose="020B0604020202020204" pitchFamily="34" charset="0"/>
+              <a:buChar char="•"/>
+            </a:pPr>
+            <a:r>
+              <a:rPr lang="ja-JP" altLang="en-US" sz="1400">
+                <a:latin typeface="メイリオ" panose="020B0604030504040204" pitchFamily="50" charset="-128"/>
+                <a:ea typeface="メイリオ" panose="020B0604030504040204" pitchFamily="50" charset="-128"/>
+              </a:rPr>
+              <a:t>レポート作成したらチャットで連絡</a:t>
+            </a:r>
+            <a:endParaRPr lang="en-US" altLang="ja-JP" sz="1400">
+              <a:latin typeface="メイリオ" panose="020B0604030504040204" pitchFamily="50" charset="-128"/>
+              <a:ea typeface="メイリオ" panose="020B0604030504040204" pitchFamily="50" charset="-128"/>
+            </a:endParaRPr>
+          </a:p>
+          <a:p>
+            <a:pPr marL="342900" indent="-342900">
+              <a:lnSpc>
+                <a:spcPct val="150000"/>
+              </a:lnSpc>
+              <a:buFont typeface="Arial" panose="020B0604020202020204" pitchFamily="34" charset="0"/>
+              <a:buChar char="•"/>
+            </a:pPr>
+            <a:r>
+              <a:rPr lang="ja-JP" altLang="en-US" sz="1400">
+                <a:latin typeface="メイリオ" panose="020B0604030504040204" pitchFamily="50" charset="-128"/>
+                <a:ea typeface="メイリオ" panose="020B0604030504040204" pitchFamily="50" charset="-128"/>
+              </a:rPr>
+              <a:t>記憶の自動整理（日記を自動で整理更新して大事なことは長期記憶へ）</a:t>
+            </a:r>
+            <a:endParaRPr lang="en-US" altLang="ja-JP" sz="1400">
+              <a:latin typeface="メイリオ" panose="020B0604030504040204" pitchFamily="50" charset="-128"/>
+              <a:ea typeface="メイリオ" panose="020B0604030504040204" pitchFamily="50" charset="-128"/>
+            </a:endParaRPr>
+          </a:p>
+          <a:p>
+            <a:pPr marL="342900" indent="-342900">
+              <a:lnSpc>
+                <a:spcPct val="150000"/>
+              </a:lnSpc>
+              <a:buFont typeface="Arial" panose="020B0604020202020204" pitchFamily="34" charset="0"/>
+              <a:buChar char="•"/>
+            </a:pPr>
+            <a:r>
+              <a:rPr lang="ja-JP" altLang="en-US" sz="1400">
+                <a:latin typeface="メイリオ" panose="020B0604030504040204" pitchFamily="50" charset="-128"/>
+                <a:ea typeface="メイリオ" panose="020B0604030504040204" pitchFamily="50" charset="-128"/>
+              </a:rPr>
+              <a:t>ローカル</a:t>
+            </a:r>
+            <a:r>
+              <a:rPr lang="en-US" altLang="ja-JP" sz="1400">
+                <a:latin typeface="メイリオ" panose="020B0604030504040204" pitchFamily="50" charset="-128"/>
+                <a:ea typeface="メイリオ" panose="020B0604030504040204" pitchFamily="50" charset="-128"/>
+              </a:rPr>
+              <a:t>PC</a:t>
+            </a:r>
+            <a:r>
+              <a:rPr lang="ja-JP" altLang="en-US" sz="1400">
+                <a:latin typeface="メイリオ" panose="020B0604030504040204" pitchFamily="50" charset="-128"/>
+                <a:ea typeface="メイリオ" panose="020B0604030504040204" pitchFamily="50" charset="-128"/>
+              </a:rPr>
+              <a:t>やブラウザ操作が自律的にできるので、スクレイピング／デバイス連携／セキュリティ・運用監視／コンテンツ制作なども可能</a:t>
+            </a:r>
+            <a:endParaRPr lang="en-US" altLang="ja-JP" sz="1400">
+              <a:latin typeface="メイリオ" panose="020B0604030504040204" pitchFamily="50" charset="-128"/>
+              <a:ea typeface="メイリオ" panose="020B0604030504040204" pitchFamily="50" charset="-128"/>
+            </a:endParaRPr>
+          </a:p>
+        </p:txBody>
+      </p:sp>
+      <p:sp>
+        <p:nvSpPr>
+          <p:cNvPr id="10" name="正方形/長方形 9">
+            <a:extLst>
+              <a:ext uri="{FF2B5EF4-FFF2-40B4-BE49-F238E27FC236}">
+                <a16:creationId xmlns:a16="http://schemas.microsoft.com/office/drawing/2014/main" id="{F7AE995F-8219-FB1D-64F9-9DFBB8955AB2}"/>
+              </a:ext>
+            </a:extLst>
+          </p:cNvPr>
+          <p:cNvSpPr/>
+          <p:nvPr/>
+        </p:nvSpPr>
+        <p:spPr>
+          <a:xfrm>
+            <a:off x="354253" y="4530884"/>
+            <a:ext cx="11483492" cy="457200"/>
+          </a:xfrm>
+          <a:prstGeom prst="rect">
+            <a:avLst/>
+          </a:prstGeom>
+          <a:solidFill>
+            <a:srgbClr val="C00000"/>
+          </a:solidFill>
+          <a:ln>
+            <a:noFill/>
+          </a:ln>
+        </p:spPr>
+        <p:style>
+          <a:lnRef idx="2">
+            <a:schemeClr val="accent1">
+              <a:shade val="15000"/>
+            </a:schemeClr>
+          </a:lnRef>
+          <a:fillRef idx="1">
+            <a:schemeClr val="accent1"/>
+          </a:fillRef>
+          <a:effectRef idx="0">
+            <a:schemeClr val="accent1"/>
+          </a:effectRef>
+          <a:fontRef idx="minor">
+            <a:schemeClr val="lt1"/>
+          </a:fontRef>
+        </p:style>
+        <p:txBody>
+          <a:bodyPr rtlCol="0" anchor="ctr"/>
+          <a:lstStyle/>
+          <a:p>
+            <a:pPr algn="ctr"/>
+            <a:r>
+              <a:rPr lang="ja-JP" altLang="en-US" b="1">
+                <a:solidFill>
+                  <a:schemeClr val="bg1"/>
+                </a:solidFill>
+                <a:latin typeface="メイリオ" panose="020B0604030504040204" pitchFamily="50" charset="-128"/>
+                <a:ea typeface="メイリオ" panose="020B0604030504040204" pitchFamily="50" charset="-128"/>
+              </a:rPr>
+              <a:t>セキュリティ面：「なんでもできる」の代償</a:t>
+            </a:r>
+            <a:endParaRPr kumimoji="1" lang="ja-JP" altLang="en-US" b="1">
+              <a:solidFill>
+                <a:schemeClr val="bg1"/>
+              </a:solidFill>
+              <a:latin typeface="メイリオ" panose="020B0604030504040204" pitchFamily="50" charset="-128"/>
+              <a:ea typeface="メイリオ" panose="020B0604030504040204" pitchFamily="50" charset="-128"/>
+            </a:endParaRPr>
+          </a:p>
+        </p:txBody>
+      </p:sp>
+      <p:sp>
+        <p:nvSpPr>
+          <p:cNvPr id="11" name="二等辺三角形 10">
+            <a:extLst>
+              <a:ext uri="{FF2B5EF4-FFF2-40B4-BE49-F238E27FC236}">
+                <a16:creationId xmlns:a16="http://schemas.microsoft.com/office/drawing/2014/main" id="{BFCBDD09-73C7-54DB-D033-103879030559}"/>
+              </a:ext>
+            </a:extLst>
+          </p:cNvPr>
+          <p:cNvSpPr/>
+          <p:nvPr/>
+        </p:nvSpPr>
+        <p:spPr>
+          <a:xfrm rot="5400000">
+            <a:off x="4833069" y="3340350"/>
+            <a:ext cx="765104" cy="214473"/>
+          </a:xfrm>
+          <a:prstGeom prst="triangle">
+            <a:avLst/>
+          </a:prstGeom>
+          <a:solidFill>
+            <a:srgbClr val="002060"/>
+          </a:solidFill>
+          <a:ln>
+            <a:noFill/>
+          </a:ln>
+        </p:spPr>
+        <p:style>
+          <a:lnRef idx="2">
+            <a:schemeClr val="accent1">
+              <a:shade val="15000"/>
+            </a:schemeClr>
+          </a:lnRef>
+          <a:fillRef idx="1">
+            <a:schemeClr val="accent1"/>
+          </a:fillRef>
+          <a:effectRef idx="0">
+            <a:schemeClr val="accent1"/>
+          </a:effectRef>
+          <a:fontRef idx="minor">
+            <a:schemeClr val="lt1"/>
+          </a:fontRef>
+        </p:style>
+        <p:txBody>
+          <a:bodyPr rtlCol="0" anchor="ctr"/>
+          <a:lstStyle/>
+          <a:p>
+            <a:pPr algn="ctr"/>
+            <a:endParaRPr kumimoji="1" lang="ja-JP" altLang="en-US"/>
+          </a:p>
+        </p:txBody>
+      </p:sp>
+      <p:sp>
+        <p:nvSpPr>
+          <p:cNvPr id="12" name="二等辺三角形 11">
+            <a:extLst>
+              <a:ext uri="{FF2B5EF4-FFF2-40B4-BE49-F238E27FC236}">
+                <a16:creationId xmlns:a16="http://schemas.microsoft.com/office/drawing/2014/main" id="{AF97AAC7-3D48-A225-3332-64D24A93CAF4}"/>
+              </a:ext>
+            </a:extLst>
+          </p:cNvPr>
+          <p:cNvSpPr/>
+          <p:nvPr/>
+        </p:nvSpPr>
+        <p:spPr>
+          <a:xfrm rot="10800000">
+            <a:off x="2209784" y="4230081"/>
+            <a:ext cx="765104" cy="214473"/>
+          </a:xfrm>
+          <a:prstGeom prst="triangle">
+            <a:avLst/>
+          </a:prstGeom>
+          <a:solidFill>
+            <a:srgbClr val="002060"/>
+          </a:solidFill>
+          <a:ln>
+            <a:noFill/>
+          </a:ln>
+        </p:spPr>
+        <p:style>
+          <a:lnRef idx="2">
+            <a:schemeClr val="accent1">
+              <a:shade val="15000"/>
+            </a:schemeClr>
+          </a:lnRef>
+          <a:fillRef idx="1">
+            <a:schemeClr val="accent1"/>
+          </a:fillRef>
+          <a:effectRef idx="0">
+            <a:schemeClr val="accent1"/>
+          </a:effectRef>
+          <a:fontRef idx="minor">
+            <a:schemeClr val="lt1"/>
+          </a:fontRef>
+        </p:style>
+        <p:txBody>
+          <a:bodyPr rtlCol="0" anchor="ctr"/>
+          <a:lstStyle/>
+          <a:p>
+            <a:pPr algn="ctr"/>
+            <a:endParaRPr kumimoji="1" lang="ja-JP" altLang="en-US"/>
+          </a:p>
+        </p:txBody>
+      </p:sp>
+      <p:sp>
+        <p:nvSpPr>
+          <p:cNvPr id="13" name="テキスト ボックス 12">
+            <a:extLst>
+              <a:ext uri="{FF2B5EF4-FFF2-40B4-BE49-F238E27FC236}">
+                <a16:creationId xmlns:a16="http://schemas.microsoft.com/office/drawing/2014/main" id="{3904A78C-711F-8139-4DDB-32701474D485}"/>
+              </a:ext>
+            </a:extLst>
+          </p:cNvPr>
+          <p:cNvSpPr txBox="1"/>
+          <p:nvPr/>
+        </p:nvSpPr>
+        <p:spPr>
+          <a:xfrm>
+            <a:off x="209682" y="5021656"/>
+            <a:ext cx="4968605" cy="1681229"/>
+          </a:xfrm>
+          <a:prstGeom prst="rect">
+            <a:avLst/>
+          </a:prstGeom>
+          <a:noFill/>
+        </p:spPr>
+        <p:txBody>
+          <a:bodyPr wrap="square" rtlCol="0">
+            <a:spAutoFit/>
+          </a:bodyPr>
+          <a:lstStyle/>
+          <a:p>
+            <a:pPr>
+              <a:lnSpc>
+                <a:spcPct val="150000"/>
+              </a:lnSpc>
+            </a:pPr>
+            <a:r>
+              <a:rPr lang="ja-JP" altLang="en-US" sz="1400" b="1">
+                <a:latin typeface="メイリオ" panose="020B0604030504040204" pitchFamily="50" charset="-128"/>
+                <a:ea typeface="メイリオ" panose="020B0604030504040204" pitchFamily="50" charset="-128"/>
+              </a:rPr>
+              <a:t>テキストファイルを</a:t>
+            </a:r>
+            <a:r>
+              <a:rPr lang="en-US" altLang="ja-JP" sz="1400" b="1">
+                <a:latin typeface="メイリオ" panose="020B0604030504040204" pitchFamily="50" charset="-128"/>
+                <a:ea typeface="メイリオ" panose="020B0604030504040204" pitchFamily="50" charset="-128"/>
+              </a:rPr>
+              <a:t>AI</a:t>
+            </a:r>
+            <a:r>
+              <a:rPr lang="ja-JP" altLang="en-US" sz="1400" b="1">
+                <a:latin typeface="メイリオ" panose="020B0604030504040204" pitchFamily="50" charset="-128"/>
+                <a:ea typeface="メイリオ" panose="020B0604030504040204" pitchFamily="50" charset="-128"/>
+              </a:rPr>
+              <a:t>に読ませて何でもやらせる</a:t>
+            </a:r>
+            <a:endParaRPr lang="en-US" altLang="ja-JP" sz="1400" b="1">
+              <a:latin typeface="メイリオ" panose="020B0604030504040204" pitchFamily="50" charset="-128"/>
+              <a:ea typeface="メイリオ" panose="020B0604030504040204" pitchFamily="50" charset="-128"/>
+            </a:endParaRPr>
+          </a:p>
+          <a:p>
+            <a:pPr marL="285750" indent="-285750">
+              <a:lnSpc>
+                <a:spcPct val="150000"/>
+              </a:lnSpc>
+              <a:buFont typeface="Arial" panose="020B0604020202020204" pitchFamily="34" charset="0"/>
+              <a:buChar char="•"/>
+            </a:pPr>
+            <a:r>
+              <a:rPr lang="ja-JP" altLang="en-US" sz="1400">
+                <a:latin typeface="メイリオ" panose="020B0604030504040204" pitchFamily="50" charset="-128"/>
+                <a:ea typeface="メイリオ" panose="020B0604030504040204" pitchFamily="50" charset="-128"/>
+              </a:rPr>
+              <a:t>悪意あるテキストが混ざっていたら悪意ある行動を行う</a:t>
+            </a:r>
+            <a:endParaRPr lang="en-US" altLang="ja-JP" sz="1400">
+              <a:latin typeface="メイリオ" panose="020B0604030504040204" pitchFamily="50" charset="-128"/>
+              <a:ea typeface="メイリオ" panose="020B0604030504040204" pitchFamily="50" charset="-128"/>
+            </a:endParaRPr>
+          </a:p>
+          <a:p>
+            <a:pPr marL="285750" indent="-285750">
+              <a:lnSpc>
+                <a:spcPct val="150000"/>
+              </a:lnSpc>
+              <a:buFont typeface="Arial" panose="020B0604020202020204" pitchFamily="34" charset="0"/>
+              <a:buChar char="•"/>
+            </a:pPr>
+            <a:r>
+              <a:rPr lang="ja-JP" altLang="en-US" sz="1400">
+                <a:latin typeface="メイリオ" panose="020B0604030504040204" pitchFamily="50" charset="-128"/>
+                <a:ea typeface="メイリオ" panose="020B0604030504040204" pitchFamily="50" charset="-128"/>
+              </a:rPr>
+              <a:t>スキルストアという、他の人が作ったスキルの配布場所にも悪意がある物が潜んでいる</a:t>
+            </a:r>
+            <a:endParaRPr lang="en-US" altLang="ja-JP" sz="1400">
+              <a:latin typeface="メイリオ" panose="020B0604030504040204" pitchFamily="50" charset="-128"/>
+              <a:ea typeface="メイリオ" panose="020B0604030504040204" pitchFamily="50" charset="-128"/>
+            </a:endParaRPr>
+          </a:p>
+          <a:p>
+            <a:pPr marL="742950" lvl="1" indent="-285750">
+              <a:lnSpc>
+                <a:spcPct val="150000"/>
+              </a:lnSpc>
+              <a:buFont typeface="Arial" panose="020B0604020202020204" pitchFamily="34" charset="0"/>
+              <a:buChar char="•"/>
+            </a:pPr>
+            <a:r>
+              <a:rPr lang="ja-JP" altLang="en-US" sz="1400">
+                <a:latin typeface="メイリオ" panose="020B0604030504040204" pitchFamily="50" charset="-128"/>
+                <a:ea typeface="メイリオ" panose="020B0604030504040204" pitchFamily="50" charset="-128"/>
+              </a:rPr>
+              <a:t>テキストファイルなのでウイルス検知もされない</a:t>
+            </a:r>
+            <a:endParaRPr lang="en-US" altLang="ja-JP" sz="1400">
+              <a:latin typeface="メイリオ" panose="020B0604030504040204" pitchFamily="50" charset="-128"/>
+              <a:ea typeface="メイリオ" panose="020B0604030504040204" pitchFamily="50" charset="-128"/>
+            </a:endParaRPr>
+          </a:p>
+        </p:txBody>
+      </p:sp>
+      <p:sp>
+        <p:nvSpPr>
+          <p:cNvPr id="14" name="テキスト ボックス 13">
+            <a:extLst>
+              <a:ext uri="{FF2B5EF4-FFF2-40B4-BE49-F238E27FC236}">
+                <a16:creationId xmlns:a16="http://schemas.microsoft.com/office/drawing/2014/main" id="{5A6AB5F9-DB83-3BF0-E078-A51E96F40489}"/>
+              </a:ext>
+            </a:extLst>
+          </p:cNvPr>
+          <p:cNvSpPr txBox="1"/>
+          <p:nvPr/>
+        </p:nvSpPr>
+        <p:spPr>
+          <a:xfrm>
+            <a:off x="5178287" y="5021655"/>
+            <a:ext cx="7013713" cy="1723549"/>
+          </a:xfrm>
+          <a:prstGeom prst="rect">
+            <a:avLst/>
+          </a:prstGeom>
+          <a:noFill/>
+        </p:spPr>
+        <p:txBody>
+          <a:bodyPr wrap="square" rtlCol="0">
+            <a:spAutoFit/>
+          </a:bodyPr>
+          <a:lstStyle/>
+          <a:p>
+            <a:pPr>
+              <a:lnSpc>
+                <a:spcPct val="150000"/>
+              </a:lnSpc>
+            </a:pPr>
+            <a:r>
+              <a:rPr lang="ja-JP" altLang="en-US" sz="1400" b="1">
+                <a:latin typeface="メイリオ" panose="020B0604030504040204" pitchFamily="50" charset="-128"/>
+                <a:ea typeface="メイリオ" panose="020B0604030504040204" pitchFamily="50" charset="-128"/>
+              </a:rPr>
+              <a:t>アプリ本体自体の虚弱性もある</a:t>
+            </a:r>
+            <a:endParaRPr lang="en-US" altLang="ja-JP" sz="1400" b="1">
+              <a:latin typeface="メイリオ" panose="020B0604030504040204" pitchFamily="50" charset="-128"/>
+              <a:ea typeface="メイリオ" panose="020B0604030504040204" pitchFamily="50" charset="-128"/>
+            </a:endParaRPr>
+          </a:p>
+          <a:p>
+            <a:pPr>
+              <a:lnSpc>
+                <a:spcPct val="150000"/>
+              </a:lnSpc>
+            </a:pPr>
+            <a:r>
+              <a:rPr lang="ja-JP" altLang="en-US" sz="1400">
+                <a:latin typeface="メイリオ" panose="020B0604030504040204" pitchFamily="50" charset="-128"/>
+                <a:ea typeface="メイリオ" panose="020B0604030504040204" pitchFamily="50" charset="-128"/>
+              </a:rPr>
+              <a:t>今後改善される部分もありますが、被害事例として</a:t>
+            </a:r>
+            <a:endParaRPr lang="en-US" altLang="ja-JP" sz="1400">
+              <a:latin typeface="メイリオ" panose="020B0604030504040204" pitchFamily="50" charset="-128"/>
+              <a:ea typeface="メイリオ" panose="020B0604030504040204" pitchFamily="50" charset="-128"/>
+            </a:endParaRPr>
+          </a:p>
+          <a:p>
+            <a:pPr marL="285750" indent="-285750">
+              <a:lnSpc>
+                <a:spcPct val="150000"/>
+              </a:lnSpc>
+              <a:buFont typeface="Arial" panose="020B0604020202020204" pitchFamily="34" charset="0"/>
+              <a:buChar char="•"/>
+            </a:pPr>
+            <a:r>
+              <a:rPr lang="ja-JP" altLang="en-US" sz="1400">
+                <a:latin typeface="メイリオ" panose="020B0604030504040204" pitchFamily="50" charset="-128"/>
+                <a:ea typeface="メイリオ" panose="020B0604030504040204" pitchFamily="50" charset="-128"/>
+              </a:rPr>
+              <a:t>攻撃者の</a:t>
+            </a:r>
+            <a:r>
+              <a:rPr lang="en-US" altLang="ja-JP" sz="1400">
+                <a:latin typeface="メイリオ" panose="020B0604030504040204" pitchFamily="50" charset="-128"/>
+                <a:ea typeface="メイリオ" panose="020B0604030504040204" pitchFamily="50" charset="-128"/>
+              </a:rPr>
+              <a:t>URL</a:t>
+            </a:r>
+            <a:r>
+              <a:rPr lang="ja-JP" altLang="en-US" sz="1400">
+                <a:latin typeface="メイリオ" panose="020B0604030504040204" pitchFamily="50" charset="-128"/>
+                <a:ea typeface="メイリオ" panose="020B0604030504040204" pitchFamily="50" charset="-128"/>
+              </a:rPr>
+              <a:t>を開くだけで各種情報が流出</a:t>
+            </a:r>
+            <a:endParaRPr lang="en-US" altLang="ja-JP" sz="1400">
+              <a:latin typeface="メイリオ" panose="020B0604030504040204" pitchFamily="50" charset="-128"/>
+              <a:ea typeface="メイリオ" panose="020B0604030504040204" pitchFamily="50" charset="-128"/>
+            </a:endParaRPr>
+          </a:p>
+          <a:p>
+            <a:pPr marL="285750" indent="-285750">
+              <a:lnSpc>
+                <a:spcPct val="150000"/>
+              </a:lnSpc>
+              <a:buFont typeface="Arial" panose="020B0604020202020204" pitchFamily="34" charset="0"/>
+              <a:buChar char="•"/>
+            </a:pPr>
+            <a:r>
+              <a:rPr lang="ja-JP" altLang="en-US" sz="1400">
+                <a:latin typeface="メイリオ" panose="020B0604030504040204" pitchFamily="50" charset="-128"/>
+                <a:ea typeface="メイリオ" panose="020B0604030504040204" pitchFamily="50" charset="-128"/>
+              </a:rPr>
+              <a:t>パスワード類がローカルにそのまま保存されていて</a:t>
+            </a:r>
+            <a:r>
+              <a:rPr lang="en-US" altLang="ja-JP" sz="1400">
+                <a:latin typeface="メイリオ" panose="020B0604030504040204" pitchFamily="50" charset="-128"/>
+                <a:ea typeface="メイリオ" panose="020B0604030504040204" pitchFamily="50" charset="-128"/>
+              </a:rPr>
+              <a:t>AI</a:t>
+            </a:r>
+            <a:r>
+              <a:rPr lang="ja-JP" altLang="en-US" sz="1400">
+                <a:latin typeface="メイリオ" panose="020B0604030504040204" pitchFamily="50" charset="-128"/>
+                <a:ea typeface="メイリオ" panose="020B0604030504040204" pitchFamily="50" charset="-128"/>
+              </a:rPr>
+              <a:t>が見れてしまう</a:t>
+            </a:r>
+            <a:endParaRPr lang="en-US" altLang="ja-JP" sz="1400">
+              <a:latin typeface="メイリオ" panose="020B0604030504040204" pitchFamily="50" charset="-128"/>
+              <a:ea typeface="メイリオ" panose="020B0604030504040204" pitchFamily="50" charset="-128"/>
+            </a:endParaRPr>
+          </a:p>
+          <a:p>
+            <a:pPr>
+              <a:lnSpc>
+                <a:spcPct val="150000"/>
+              </a:lnSpc>
+            </a:pPr>
+            <a:r>
+              <a:rPr lang="ja-JP" altLang="en-US" sz="1600" b="1">
+                <a:solidFill>
+                  <a:srgbClr val="C00000"/>
+                </a:solidFill>
+                <a:latin typeface="メイリオ" panose="020B0604030504040204" pitchFamily="50" charset="-128"/>
+                <a:ea typeface="メイリオ" panose="020B0604030504040204" pitchFamily="50" charset="-128"/>
+              </a:rPr>
+              <a:t>➡ </a:t>
+            </a:r>
+            <a:r>
+              <a:rPr lang="en-US" altLang="ja-JP" sz="1600" b="1">
+                <a:solidFill>
+                  <a:srgbClr val="C00000"/>
+                </a:solidFill>
+                <a:latin typeface="メイリオ" panose="020B0604030504040204" pitchFamily="50" charset="-128"/>
+                <a:ea typeface="メイリオ" panose="020B0604030504040204" pitchFamily="50" charset="-128"/>
+              </a:rPr>
+              <a:t>Gartner</a:t>
+            </a:r>
+            <a:r>
+              <a:rPr lang="ja-JP" altLang="en-US" sz="1600" b="1">
+                <a:solidFill>
+                  <a:srgbClr val="C00000"/>
+                </a:solidFill>
+                <a:latin typeface="メイリオ" panose="020B0604030504040204" pitchFamily="50" charset="-128"/>
+                <a:ea typeface="メイリオ" panose="020B0604030504040204" pitchFamily="50" charset="-128"/>
+              </a:rPr>
+              <a:t>社は企業利用には受け入れがたいリスクが多いとブロック推奨</a:t>
+            </a:r>
+            <a:endParaRPr lang="en-US" altLang="ja-JP" sz="1600" b="1">
+              <a:solidFill>
+                <a:srgbClr val="C00000"/>
+              </a:solidFill>
+              <a:latin typeface="メイリオ" panose="020B0604030504040204" pitchFamily="50" charset="-128"/>
+              <a:ea typeface="メイリオ" panose="020B0604030504040204" pitchFamily="50" charset="-128"/>
+            </a:endParaRPr>
+          </a:p>
+        </p:txBody>
+      </p:sp>
+    </p:spTree>
+    <p:extLst>
+      <p:ext uri="{BB962C8B-B14F-4D97-AF65-F5344CB8AC3E}">
+        <p14:creationId xmlns:p14="http://schemas.microsoft.com/office/powerpoint/2010/main" val="2330638757"/>
       </p:ext>
     </p:extLst>
   </p:cSld>
@@ -16204,4 +25204,339 @@
     </a:ext>
   </a:extLst>
 </a:theme>
+</file>
+
+<file path=ppt/theme/theme2.xml><?xml version="1.0" encoding="utf-8"?>
+<a:theme xmlns:a="http://schemas.openxmlformats.org/drawingml/2006/main" name="Office テーマ">
+  <a:themeElements>
+    <a:clrScheme name="Office">
+      <a:dk1>
+        <a:sysClr val="windowText" lastClr="000000"/>
+      </a:dk1>
+      <a:lt1>
+        <a:sysClr val="window" lastClr="FFFFFF"/>
+      </a:lt1>
+      <a:dk2>
+        <a:srgbClr val="0E2841"/>
+      </a:dk2>
+      <a:lt2>
+        <a:srgbClr val="E8E8E8"/>
+      </a:lt2>
+      <a:accent1>
+        <a:srgbClr val="156082"/>
+      </a:accent1>
+      <a:accent2>
+        <a:srgbClr val="E97132"/>
+      </a:accent2>
+      <a:accent3>
+        <a:srgbClr val="196B24"/>
+      </a:accent3>
+      <a:accent4>
+        <a:srgbClr val="0F9ED5"/>
+      </a:accent4>
+      <a:accent5>
+        <a:srgbClr val="A02B93"/>
+      </a:accent5>
+      <a:accent6>
+        <a:srgbClr val="4EA72E"/>
+      </a:accent6>
+      <a:hlink>
+        <a:srgbClr val="467886"/>
+      </a:hlink>
+      <a:folHlink>
+        <a:srgbClr val="96607D"/>
+      </a:folHlink>
+    </a:clrScheme>
+    <a:fontScheme name="Office">
+      <a:majorFont>
+        <a:latin typeface="游ゴシック Light" panose="02110004020202020204"/>
+        <a:ea typeface=""/>
+        <a:cs typeface=""/>
+        <a:font script="Jpan" typeface="游ゴシック Light"/>
+        <a:font script="Hang" typeface="맑은 고딕"/>
+        <a:font script="Hans" typeface="等线 Light"/>
+        <a:font script="Hant" typeface="新細明體"/>
+        <a:font script="Arab" typeface="Times New Roman"/>
+        <a:font script="Hebr" typeface="Times New Roman"/>
+        <a:font script="Thai" typeface="Angsana New"/>
+        <a:font script="Ethi" typeface="Nyala"/>
+        <a:font script="Beng" typeface="Vrinda"/>
+        <a:font script="Gujr" typeface="Shruti"/>
+        <a:font script="Khmr" typeface="MoolBoran"/>
+        <a:font script="Knda" typeface="Tunga"/>
+        <a:font script="Guru" typeface="Raavi"/>
+        <a:font script="Cans" typeface="Euphemia"/>
+        <a:font script="Cher" typeface="Plantagenet Cherokee"/>
+        <a:font script="Yiii" typeface="Microsoft Yi Baiti"/>
+        <a:font script="Tibt" typeface="Microsoft Himalaya"/>
+        <a:font script="Thaa" typeface="MV Boli"/>
+        <a:font script="Deva" typeface="Mangal"/>
+        <a:font script="Telu" typeface="Gautami"/>
+        <a:font script="Taml" typeface="Latha"/>
+        <a:font script="Syrc" typeface="Estrangelo Edessa"/>
+        <a:font script="Orya" typeface="Kalinga"/>
+        <a:font script="Mlym" typeface="Kartika"/>
+        <a:font script="Laoo" typeface="DokChampa"/>
+        <a:font script="Sinh" typeface="Iskoola Pota"/>
+        <a:font script="Mong" typeface="Mongolian Baiti"/>
+        <a:font script="Viet" typeface="Times New Roman"/>
+        <a:font script="Uigh" typeface="Microsoft Uighur"/>
+        <a:font script="Geor" typeface="Sylfaen"/>
+        <a:font script="Armn" typeface="Arial"/>
+        <a:font script="Bugi" typeface="Leelawadee UI"/>
+        <a:font script="Bopo" typeface="Microsoft JhengHei"/>
+        <a:font script="Java" typeface="Javanese Text"/>
+        <a:font script="Lisu" typeface="Segoe UI"/>
+        <a:font script="Mymr" typeface="Myanmar Text"/>
+        <a:font script="Nkoo" typeface="Ebrima"/>
+        <a:font script="Olck" typeface="Nirmala UI"/>
+        <a:font script="Osma" typeface="Ebrima"/>
+        <a:font script="Phag" typeface="Phagspa"/>
+        <a:font script="Syrn" typeface="Estrangelo Edessa"/>
+        <a:font script="Syrj" typeface="Estrangelo Edessa"/>
+        <a:font script="Syre" typeface="Estrangelo Edessa"/>
+        <a:font script="Sora" typeface="Nirmala UI"/>
+        <a:font script="Tale" typeface="Microsoft Tai Le"/>
+        <a:font script="Talu" typeface="Microsoft New Tai Lue"/>
+        <a:font script="Tfng" typeface="Ebrima"/>
+      </a:majorFont>
+      <a:minorFont>
+        <a:latin typeface="游ゴシック" panose="02110004020202020204"/>
+        <a:ea typeface=""/>
+        <a:cs typeface=""/>
+        <a:font script="Jpan" typeface="游ゴシック"/>
+        <a:font script="Hang" typeface="맑은 고딕"/>
+        <a:font script="Hans" typeface="等线"/>
+        <a:font script="Hant" typeface="新細明體"/>
+        <a:font script="Arab" typeface="Arial"/>
+        <a:font script="Hebr" typeface="Arial"/>
+        <a:font script="Thai" typeface="Cordia New"/>
+        <a:font script="Ethi" typeface="Nyala"/>
+        <a:font script="Beng" typeface="Vrinda"/>
+        <a:font script="Gujr" typeface="Shruti"/>
+        <a:font script="Khmr" typeface="DaunPenh"/>
+        <a:font script="Knda" typeface="Tunga"/>
+        <a:font script="Guru" typeface="Raavi"/>
+        <a:font script="Cans" typeface="Euphemia"/>
+        <a:font script="Cher" typeface="Plantagenet Cherokee"/>
+        <a:font script="Yiii" typeface="Microsoft Yi Baiti"/>
+        <a:font script="Tibt" typeface="Microsoft Himalaya"/>
+        <a:font script="Thaa" typeface="MV Boli"/>
+        <a:font script="Deva" typeface="Mangal"/>
+        <a:font script="Telu" typeface="Gautami"/>
+        <a:font script="Taml" typeface="Latha"/>
+        <a:font script="Syrc" typeface="Estrangelo Edessa"/>
+        <a:font script="Orya" typeface="Kalinga"/>
+        <a:font script="Mlym" typeface="Kartika"/>
+        <a:font script="Laoo" typeface="DokChampa"/>
+        <a:font script="Sinh" typeface="Iskoola Pota"/>
+        <a:font script="Mong" typeface="Mongolian Baiti"/>
+        <a:font script="Viet" typeface="Arial"/>
+        <a:font script="Uigh" typeface="Microsoft Uighur"/>
+        <a:font script="Geor" typeface="Sylfaen"/>
+        <a:font script="Armn" typeface="Arial"/>
+        <a:font script="Bugi" typeface="Leelawadee UI"/>
+        <a:font script="Bopo" typeface="Microsoft JhengHei"/>
+        <a:font script="Java" typeface="Javanese Text"/>
+        <a:font script="Lisu" typeface="Segoe UI"/>
+        <a:font script="Mymr" typeface="Myanmar Text"/>
+        <a:font script="Nkoo" typeface="Ebrima"/>
+        <a:font script="Olck" typeface="Nirmala UI"/>
+        <a:font script="Osma" typeface="Ebrima"/>
+        <a:font script="Phag" typeface="Phagspa"/>
+        <a:font script="Syrn" typeface="Estrangelo Edessa"/>
+        <a:font script="Syrj" typeface="Estrangelo Edessa"/>
+        <a:font script="Syre" typeface="Estrangelo Edessa"/>
+        <a:font script="Sora" typeface="Nirmala UI"/>
+        <a:font script="Tale" typeface="Microsoft Tai Le"/>
+        <a:font script="Talu" typeface="Microsoft New Tai Lue"/>
+        <a:font script="Tfng" typeface="Ebrima"/>
+      </a:minorFont>
+    </a:fontScheme>
+    <a:fmtScheme name="Office">
+      <a:fillStyleLst>
+        <a:solidFill>
+          <a:schemeClr val="phClr"/>
+        </a:solidFill>
+        <a:gradFill rotWithShape="1">
+          <a:gsLst>
+            <a:gs pos="0">
+              <a:schemeClr val="phClr">
+                <a:lumMod val="110000"/>
+                <a:satMod val="105000"/>
+                <a:tint val="67000"/>
+              </a:schemeClr>
+            </a:gs>
+            <a:gs pos="50000">
+              <a:schemeClr val="phClr">
+                <a:lumMod val="105000"/>
+                <a:satMod val="103000"/>
+                <a:tint val="73000"/>
+              </a:schemeClr>
+            </a:gs>
+            <a:gs pos="100000">
+              <a:schemeClr val="phClr">
+                <a:lumMod val="105000"/>
+                <a:satMod val="109000"/>
+                <a:tint val="81000"/>
+              </a:schemeClr>
+            </a:gs>
+          </a:gsLst>
+          <a:lin ang="5400000" scaled="0"/>
+        </a:gradFill>
+        <a:gradFill rotWithShape="1">
+          <a:gsLst>
+            <a:gs pos="0">
+              <a:schemeClr val="phClr">
+                <a:satMod val="103000"/>
+                <a:lumMod val="102000"/>
+                <a:tint val="94000"/>
+              </a:schemeClr>
+            </a:gs>
+            <a:gs pos="50000">
+              <a:schemeClr val="phClr">
+                <a:satMod val="110000"/>
+                <a:lumMod val="100000"/>
+                <a:shade val="100000"/>
+              </a:schemeClr>
+            </a:gs>
+            <a:gs pos="100000">
+              <a:schemeClr val="phClr">
+                <a:lumMod val="99000"/>
+                <a:satMod val="120000"/>
+                <a:shade val="78000"/>
+              </a:schemeClr>
+            </a:gs>
+          </a:gsLst>
+          <a:lin ang="5400000" scaled="0"/>
+        </a:gradFill>
+      </a:fillStyleLst>
+      <a:lnStyleLst>
+        <a:ln w="12700" cap="flat" cmpd="sng" algn="ctr">
+          <a:solidFill>
+            <a:schemeClr val="phClr"/>
+          </a:solidFill>
+          <a:prstDash val="solid"/>
+          <a:miter lim="800000"/>
+        </a:ln>
+        <a:ln w="19050" cap="flat" cmpd="sng" algn="ctr">
+          <a:solidFill>
+            <a:schemeClr val="phClr"/>
+          </a:solidFill>
+          <a:prstDash val="solid"/>
+          <a:miter lim="800000"/>
+        </a:ln>
+        <a:ln w="25400" cap="flat" cmpd="sng" algn="ctr">
+          <a:solidFill>
+            <a:schemeClr val="phClr"/>
+          </a:solidFill>
+          <a:prstDash val="solid"/>
+          <a:miter lim="800000"/>
+        </a:ln>
+      </a:lnStyleLst>
+      <a:effectStyleLst>
+        <a:effectStyle>
+          <a:effectLst/>
+        </a:effectStyle>
+        <a:effectStyle>
+          <a:effectLst/>
+        </a:effectStyle>
+        <a:effectStyle>
+          <a:effectLst>
+            <a:outerShdw blurRad="57150" dist="19050" dir="5400000" algn="ctr" rotWithShape="0">
+              <a:srgbClr val="000000">
+                <a:alpha val="63000"/>
+              </a:srgbClr>
+            </a:outerShdw>
+          </a:effectLst>
+        </a:effectStyle>
+      </a:effectStyleLst>
+      <a:bgFillStyleLst>
+        <a:solidFill>
+          <a:schemeClr val="phClr"/>
+        </a:solidFill>
+        <a:solidFill>
+          <a:schemeClr val="phClr">
+            <a:tint val="95000"/>
+            <a:satMod val="170000"/>
+          </a:schemeClr>
+        </a:solidFill>
+        <a:gradFill rotWithShape="1">
+          <a:gsLst>
+            <a:gs pos="0">
+              <a:schemeClr val="phClr">
+                <a:tint val="93000"/>
+                <a:satMod val="150000"/>
+                <a:shade val="98000"/>
+                <a:lumMod val="102000"/>
+              </a:schemeClr>
+            </a:gs>
+            <a:gs pos="50000">
+              <a:schemeClr val="phClr">
+                <a:tint val="98000"/>
+                <a:satMod val="130000"/>
+                <a:shade val="90000"/>
+                <a:lumMod val="103000"/>
+              </a:schemeClr>
+            </a:gs>
+            <a:gs pos="100000">
+              <a:schemeClr val="phClr">
+                <a:shade val="63000"/>
+                <a:satMod val="120000"/>
+              </a:schemeClr>
+            </a:gs>
+          </a:gsLst>
+          <a:lin ang="5400000" scaled="0"/>
+        </a:gradFill>
+      </a:bgFillStyleLst>
+    </a:fmtScheme>
+  </a:themeElements>
+  <a:objectDefaults>
+    <a:lnDef>
+      <a:spPr/>
+      <a:bodyPr/>
+      <a:lstStyle/>
+      <a:style>
+        <a:lnRef idx="2">
+          <a:schemeClr val="accent1"/>
+        </a:lnRef>
+        <a:fillRef idx="0">
+          <a:schemeClr val="accent1"/>
+        </a:fillRef>
+        <a:effectRef idx="1">
+          <a:schemeClr val="accent1"/>
+        </a:effectRef>
+        <a:fontRef idx="minor">
+          <a:schemeClr val="tx1"/>
+        </a:fontRef>
+      </a:style>
+    </a:lnDef>
+  </a:objectDefaults>
+  <a:extraClrSchemeLst/>
+  <a:extLst>
+    <a:ext uri="{05A4C25C-085E-4340-85A3-A5531E510DB2}">
+      <thm15:themeFamily xmlns:thm15="http://schemas.microsoft.com/office/thememl/2012/main" name="Office Theme" id="{2E142A2C-CD16-42D6-873A-C26D2A0506FA}" vid="{1BDDFF52-6CD6-40A5-AB3C-68EB2F1E4D0A}"/>
+    </a:ext>
+  </a:extLst>
+</a:theme>
+</file>
+
+<file path=ppt/webextensions/taskpanes.xml><?xml version="1.0" encoding="utf-8"?>
+<wetp:taskpanes xmlns:wetp="http://schemas.microsoft.com/office/webextensions/taskpanes/2010/11">
+  <wetp:taskpane dockstate="right" visibility="0" width="350" row="2">
+    <wetp:webextensionref xmlns:r="http://schemas.openxmlformats.org/officeDocument/2006/relationships" r:id="rId1"/>
+  </wetp:taskpane>
+</wetp:taskpanes>
+</file>
+
+<file path=ppt/webextensions/webextension1.xml><?xml version="1.0" encoding="utf-8"?>
+<we:webextension xmlns:we="http://schemas.microsoft.com/office/webextensions/webextension/2010/11" id="{13FB276B-C25D-46DD-BACC-F1C1E3FC6EF4}">
+  <we:reference id="wa200010001" version="1.0.0.0" store="en-US" storeType="OMEX"/>
+  <we:alternateReferences>
+    <we:reference id="WA200010001" version="1.0.0.0" store="" storeType="OMEX"/>
+  </we:alternateReferences>
+  <we:properties/>
+  <we:bindings/>
+  <we:snapshot xmlns:r="http://schemas.openxmlformats.org/officeDocument/2006/relationships"/>
+</we:webextension>
 </file>
--- a/プレゼンテーション1.pptx
+++ b/プレゼンテーション1.pptx
@@ -5,7 +5,7 @@
     <p:sldMasterId id="2147483648" r:id="rId1"/>
   </p:sldMasterIdLst>
   <p:notesMasterIdLst>
-    <p:notesMasterId r:id="rId13"/>
+    <p:notesMasterId r:id="rId18"/>
   </p:notesMasterIdLst>
   <p:sldIdLst>
     <p:sldId id="256" r:id="rId2"/>
@@ -19,6 +19,11 @@
     <p:sldId id="265" r:id="rId10"/>
     <p:sldId id="266" r:id="rId11"/>
     <p:sldId id="267" r:id="rId12"/>
+    <p:sldId id="269" r:id="rId13"/>
+    <p:sldId id="271" r:id="rId14"/>
+    <p:sldId id="272" r:id="rId15"/>
+    <p:sldId id="270" r:id="rId16"/>
+    <p:sldId id="273" r:id="rId17"/>
   </p:sldIdLst>
   <p:sldSz cx="12192000" cy="6858000"/>
   <p:notesSz cx="6858000" cy="9144000"/>
@@ -207,7 +212,7 @@
           <a:p>
             <a:fld id="{D58F722D-2274-4A30-A214-7B03C3AD31F9}" type="datetimeFigureOut">
               <a:rPr kumimoji="1" lang="ja-JP" altLang="en-US" smtClean="0"/>
-              <a:t>2026/3/5</a:t>
+              <a:t>2026/4/2</a:t>
             </a:fld>
             <a:endParaRPr kumimoji="1" lang="ja-JP" altLang="en-US"/>
           </a:p>
@@ -737,7 +742,7 @@
           <a:p>
             <a:fld id="{50C022C9-6362-4D7E-800D-CCB5DC9E42C2}" type="datetimeFigureOut">
               <a:rPr kumimoji="1" lang="ja-JP" altLang="en-US" smtClean="0"/>
-              <a:t>2026/3/5</a:t>
+              <a:t>2026/4/2</a:t>
             </a:fld>
             <a:endParaRPr kumimoji="1" lang="ja-JP" altLang="en-US"/>
           </a:p>
@@ -967,7 +972,7 @@
           <a:p>
             <a:fld id="{50C022C9-6362-4D7E-800D-CCB5DC9E42C2}" type="datetimeFigureOut">
               <a:rPr kumimoji="1" lang="ja-JP" altLang="en-US" smtClean="0"/>
-              <a:t>2026/3/5</a:t>
+              <a:t>2026/4/2</a:t>
             </a:fld>
             <a:endParaRPr kumimoji="1" lang="ja-JP" altLang="en-US"/>
           </a:p>
@@ -1207,7 +1212,7 @@
           <a:p>
             <a:fld id="{50C022C9-6362-4D7E-800D-CCB5DC9E42C2}" type="datetimeFigureOut">
               <a:rPr kumimoji="1" lang="ja-JP" altLang="en-US" smtClean="0"/>
-              <a:t>2026/3/5</a:t>
+              <a:t>2026/4/2</a:t>
             </a:fld>
             <a:endParaRPr kumimoji="1" lang="ja-JP" altLang="en-US"/>
           </a:p>
@@ -1437,7 +1442,7 @@
           <a:p>
             <a:fld id="{50C022C9-6362-4D7E-800D-CCB5DC9E42C2}" type="datetimeFigureOut">
               <a:rPr kumimoji="1" lang="ja-JP" altLang="en-US" smtClean="0"/>
-              <a:t>2026/3/5</a:t>
+              <a:t>2026/4/2</a:t>
             </a:fld>
             <a:endParaRPr kumimoji="1" lang="ja-JP" altLang="en-US"/>
           </a:p>
@@ -1712,7 +1717,7 @@
           <a:p>
             <a:fld id="{50C022C9-6362-4D7E-800D-CCB5DC9E42C2}" type="datetimeFigureOut">
               <a:rPr kumimoji="1" lang="ja-JP" altLang="en-US" smtClean="0"/>
-              <a:t>2026/3/5</a:t>
+              <a:t>2026/4/2</a:t>
             </a:fld>
             <a:endParaRPr kumimoji="1" lang="ja-JP" altLang="en-US"/>
           </a:p>
@@ -2041,7 +2046,7 @@
           <a:p>
             <a:fld id="{50C022C9-6362-4D7E-800D-CCB5DC9E42C2}" type="datetimeFigureOut">
               <a:rPr kumimoji="1" lang="ja-JP" altLang="en-US" smtClean="0"/>
-              <a:t>2026/3/5</a:t>
+              <a:t>2026/4/2</a:t>
             </a:fld>
             <a:endParaRPr kumimoji="1" lang="ja-JP" altLang="en-US"/>
           </a:p>
@@ -2517,7 +2522,7 @@
           <a:p>
             <a:fld id="{50C022C9-6362-4D7E-800D-CCB5DC9E42C2}" type="datetimeFigureOut">
               <a:rPr kumimoji="1" lang="ja-JP" altLang="en-US" smtClean="0"/>
-              <a:t>2026/3/5</a:t>
+              <a:t>2026/4/2</a:t>
             </a:fld>
             <a:endParaRPr kumimoji="1" lang="ja-JP" altLang="en-US"/>
           </a:p>
@@ -2658,7 +2663,7 @@
           <a:p>
             <a:fld id="{50C022C9-6362-4D7E-800D-CCB5DC9E42C2}" type="datetimeFigureOut">
               <a:rPr kumimoji="1" lang="ja-JP" altLang="en-US" smtClean="0"/>
-              <a:t>2026/3/5</a:t>
+              <a:t>2026/4/2</a:t>
             </a:fld>
             <a:endParaRPr kumimoji="1" lang="ja-JP" altLang="en-US"/>
           </a:p>
@@ -2771,7 +2776,7 @@
           <a:p>
             <a:fld id="{50C022C9-6362-4D7E-800D-CCB5DC9E42C2}" type="datetimeFigureOut">
               <a:rPr kumimoji="1" lang="ja-JP" altLang="en-US" smtClean="0"/>
-              <a:t>2026/3/5</a:t>
+              <a:t>2026/4/2</a:t>
             </a:fld>
             <a:endParaRPr kumimoji="1" lang="ja-JP" altLang="en-US"/>
           </a:p>
@@ -3114,7 +3119,7 @@
           <a:p>
             <a:fld id="{50C022C9-6362-4D7E-800D-CCB5DC9E42C2}" type="datetimeFigureOut">
               <a:rPr kumimoji="1" lang="ja-JP" altLang="en-US" smtClean="0"/>
-              <a:t>2026/3/5</a:t>
+              <a:t>2026/4/2</a:t>
             </a:fld>
             <a:endParaRPr kumimoji="1" lang="ja-JP" altLang="en-US"/>
           </a:p>
@@ -3402,7 +3407,7 @@
           <a:p>
             <a:fld id="{50C022C9-6362-4D7E-800D-CCB5DC9E42C2}" type="datetimeFigureOut">
               <a:rPr kumimoji="1" lang="ja-JP" altLang="en-US" smtClean="0"/>
-              <a:t>2026/3/5</a:t>
+              <a:t>2026/4/2</a:t>
             </a:fld>
             <a:endParaRPr kumimoji="1" lang="ja-JP" altLang="en-US"/>
           </a:p>
@@ -3678,7 +3683,7 @@
             <a:fld id="{50C022C9-6362-4D7E-800D-CCB5DC9E42C2}" type="datetimeFigureOut">
               <a:rPr lang="ja-JP" altLang="en-US" smtClean="0"/>
               <a:pPr/>
-              <a:t>2026/3/5</a:t>
+              <a:t>2026/4/2</a:t>
             </a:fld>
             <a:endParaRPr lang="ja-JP" altLang="en-US"/>
           </a:p>
@@ -10907,6 +10912,7816 @@
 </p:sld>
 </file>
 
+<file path=ppt/slides/slide12.xml><?xml version="1.0" encoding="utf-8"?>
+<p:sld xmlns:a="http://schemas.openxmlformats.org/drawingml/2006/main" xmlns:r="http://schemas.openxmlformats.org/officeDocument/2006/relationships" xmlns:p="http://schemas.openxmlformats.org/presentationml/2006/main">
+  <p:cSld>
+    <p:spTree>
+      <p:nvGrpSpPr>
+        <p:cNvPr id="1" name="">
+          <a:extLst>
+            <a:ext uri="{FF2B5EF4-FFF2-40B4-BE49-F238E27FC236}">
+              <a16:creationId xmlns:a16="http://schemas.microsoft.com/office/drawing/2014/main" id="{37F1AF7A-7256-2C77-32DA-C840D2A3E375}"/>
+            </a:ext>
+          </a:extLst>
+        </p:cNvPr>
+        <p:cNvGrpSpPr/>
+        <p:nvPr/>
+      </p:nvGrpSpPr>
+      <p:grpSpPr>
+        <a:xfrm>
+          <a:off x="0" y="0"/>
+          <a:ext cx="0" cy="0"/>
+          <a:chOff x="0" y="0"/>
+          <a:chExt cx="0" cy="0"/>
+        </a:xfrm>
+      </p:grpSpPr>
+    </p:spTree>
+    <p:extLst>
+      <p:ext uri="{BB962C8B-B14F-4D97-AF65-F5344CB8AC3E}">
+        <p14:creationId xmlns:p14="http://schemas.microsoft.com/office/powerpoint/2010/main" val="640500059"/>
+      </p:ext>
+    </p:extLst>
+  </p:cSld>
+  <p:clrMapOvr>
+    <a:masterClrMapping/>
+  </p:clrMapOvr>
+</p:sld>
+</file>
+
+<file path=ppt/slides/slide13.xml><?xml version="1.0" encoding="utf-8"?>
+<p:sld xmlns:a="http://schemas.openxmlformats.org/drawingml/2006/main" xmlns:r="http://schemas.openxmlformats.org/officeDocument/2006/relationships" xmlns:p="http://schemas.openxmlformats.org/presentationml/2006/main">
+  <p:cSld>
+    <p:spTree>
+      <p:nvGrpSpPr>
+        <p:cNvPr id="1" name="">
+          <a:extLst>
+            <a:ext uri="{FF2B5EF4-FFF2-40B4-BE49-F238E27FC236}">
+              <a16:creationId xmlns:a16="http://schemas.microsoft.com/office/drawing/2014/main" id="{22CD249C-C69F-2857-589E-B7EDE3AC52C7}"/>
+            </a:ext>
+          </a:extLst>
+        </p:cNvPr>
+        <p:cNvGrpSpPr/>
+        <p:nvPr/>
+      </p:nvGrpSpPr>
+      <p:grpSpPr>
+        <a:xfrm>
+          <a:off x="0" y="0"/>
+          <a:ext cx="0" cy="0"/>
+          <a:chOff x="0" y="0"/>
+          <a:chExt cx="0" cy="0"/>
+        </a:xfrm>
+      </p:grpSpPr>
+      <p:sp>
+        <p:nvSpPr>
+          <p:cNvPr id="4" name="テキスト ボックス 3">
+            <a:extLst>
+              <a:ext uri="{FF2B5EF4-FFF2-40B4-BE49-F238E27FC236}">
+                <a16:creationId xmlns:a16="http://schemas.microsoft.com/office/drawing/2014/main" id="{FA1892A0-CC92-352D-5AF2-AA2AB7BD5948}"/>
+              </a:ext>
+            </a:extLst>
+          </p:cNvPr>
+          <p:cNvSpPr txBox="1"/>
+          <p:nvPr/>
+        </p:nvSpPr>
+        <p:spPr>
+          <a:xfrm>
+            <a:off x="443466" y="317212"/>
+            <a:ext cx="11215133" cy="584775"/>
+          </a:xfrm>
+          <a:prstGeom prst="rect">
+            <a:avLst/>
+          </a:prstGeom>
+          <a:noFill/>
+        </p:spPr>
+        <p:txBody>
+          <a:bodyPr wrap="square" rtlCol="0">
+            <a:spAutoFit/>
+          </a:bodyPr>
+          <a:lstStyle/>
+          <a:p>
+            <a:r>
+              <a:rPr lang="en-US" altLang="ja-JP" sz="3200" b="1">
+                <a:latin typeface="メイリオ" panose="020B0604030504040204" pitchFamily="50" charset="-128"/>
+                <a:ea typeface="メイリオ" panose="020B0604030504040204" pitchFamily="50" charset="-128"/>
+              </a:rPr>
+              <a:t>Copilot Cowork</a:t>
+            </a:r>
+            <a:r>
+              <a:rPr lang="ja-JP" altLang="en-US" sz="3200" b="1">
+                <a:latin typeface="メイリオ" panose="020B0604030504040204" pitchFamily="50" charset="-128"/>
+                <a:ea typeface="メイリオ" panose="020B0604030504040204" pitchFamily="50" charset="-128"/>
+              </a:rPr>
+              <a:t>の登場 「参照」から「実行」へ</a:t>
+            </a:r>
+          </a:p>
+        </p:txBody>
+      </p:sp>
+      <p:sp>
+        <p:nvSpPr>
+          <p:cNvPr id="9" name="テキスト ボックス 8">
+            <a:extLst>
+              <a:ext uri="{FF2B5EF4-FFF2-40B4-BE49-F238E27FC236}">
+                <a16:creationId xmlns:a16="http://schemas.microsoft.com/office/drawing/2014/main" id="{0A264F2C-2979-D443-FD0E-9666251841E0}"/>
+              </a:ext>
+            </a:extLst>
+          </p:cNvPr>
+          <p:cNvSpPr txBox="1"/>
+          <p:nvPr/>
+        </p:nvSpPr>
+        <p:spPr>
+          <a:xfrm>
+            <a:off x="275099" y="867978"/>
+            <a:ext cx="11641803" cy="738664"/>
+          </a:xfrm>
+          <a:prstGeom prst="rect">
+            <a:avLst/>
+          </a:prstGeom>
+          <a:noFill/>
+        </p:spPr>
+        <p:txBody>
+          <a:bodyPr wrap="square" rtlCol="0">
+            <a:spAutoFit/>
+          </a:bodyPr>
+          <a:lstStyle/>
+          <a:p>
+            <a:r>
+              <a:rPr lang="ja-JP" altLang="en-US" sz="1400">
+                <a:latin typeface="メイリオ" panose="020B0604030504040204" pitchFamily="50" charset="-128"/>
+                <a:ea typeface="メイリオ" panose="020B0604030504040204" pitchFamily="50" charset="-128"/>
+              </a:rPr>
+              <a:t>今までの</a:t>
+            </a:r>
+            <a:r>
+              <a:rPr lang="en-US" altLang="ja-JP" sz="1400">
+                <a:latin typeface="メイリオ" panose="020B0604030504040204" pitchFamily="50" charset="-128"/>
+                <a:ea typeface="メイリオ" panose="020B0604030504040204" pitchFamily="50" charset="-128"/>
+              </a:rPr>
+              <a:t>Copilot</a:t>
+            </a:r>
+            <a:r>
+              <a:rPr lang="ja-JP" altLang="en-US" sz="1400">
+                <a:latin typeface="メイリオ" panose="020B0604030504040204" pitchFamily="50" charset="-128"/>
+                <a:ea typeface="メイリオ" panose="020B0604030504040204" pitchFamily="50" charset="-128"/>
+              </a:rPr>
+              <a:t>は「参照する」が強い一方、</a:t>
+            </a:r>
+            <a:r>
+              <a:rPr lang="ja-JP" altLang="en-US" sz="1400" b="1">
+                <a:solidFill>
+                  <a:schemeClr val="accent2"/>
+                </a:solidFill>
+                <a:latin typeface="メイリオ" panose="020B0604030504040204" pitchFamily="50" charset="-128"/>
+                <a:ea typeface="メイリオ" panose="020B0604030504040204" pitchFamily="50" charset="-128"/>
+              </a:rPr>
+              <a:t>そこから新たなアクションに繋げるのは人の手が必要でした</a:t>
+            </a:r>
+            <a:r>
+              <a:rPr lang="ja-JP" altLang="en-US" sz="1400">
+                <a:latin typeface="メイリオ" panose="020B0604030504040204" pitchFamily="50" charset="-128"/>
+                <a:ea typeface="メイリオ" panose="020B0604030504040204" pitchFamily="50" charset="-128"/>
+              </a:rPr>
+              <a:t>。社内では</a:t>
+            </a:r>
+            <a:r>
+              <a:rPr lang="en-US" altLang="ja-JP" sz="1400">
+                <a:latin typeface="メイリオ" panose="020B0604030504040204" pitchFamily="50" charset="-128"/>
+                <a:ea typeface="メイリオ" panose="020B0604030504040204" pitchFamily="50" charset="-128"/>
+              </a:rPr>
+              <a:t>4</a:t>
+            </a:r>
+            <a:r>
+              <a:rPr lang="ja-JP" altLang="en-US" sz="1400">
+                <a:latin typeface="メイリオ" panose="020B0604030504040204" pitchFamily="50" charset="-128"/>
+                <a:ea typeface="メイリオ" panose="020B0604030504040204" pitchFamily="50" charset="-128"/>
+              </a:rPr>
+              <a:t>月</a:t>
+            </a:r>
+            <a:r>
+              <a:rPr lang="en-US" altLang="ja-JP" sz="1400">
+                <a:latin typeface="メイリオ" panose="020B0604030504040204" pitchFamily="50" charset="-128"/>
+                <a:ea typeface="メイリオ" panose="020B0604030504040204" pitchFamily="50" charset="-128"/>
+              </a:rPr>
+              <a:t>2</a:t>
+            </a:r>
+            <a:r>
+              <a:rPr lang="ja-JP" altLang="en-US" sz="1400">
+                <a:latin typeface="メイリオ" panose="020B0604030504040204" pitchFamily="50" charset="-128"/>
+                <a:ea typeface="メイリオ" panose="020B0604030504040204" pitchFamily="50" charset="-128"/>
+              </a:rPr>
+              <a:t>日現在まだですが、早期アクセスプログラムで利用可能（</a:t>
+            </a:r>
+            <a:r>
+              <a:rPr lang="en-US" altLang="ja-JP" sz="1400">
+                <a:latin typeface="メイリオ" panose="020B0604030504040204" pitchFamily="50" charset="-128"/>
+                <a:ea typeface="メイリオ" panose="020B0604030504040204" pitchFamily="50" charset="-128"/>
+              </a:rPr>
+              <a:t>3/30</a:t>
+            </a:r>
+            <a:r>
+              <a:rPr lang="ja-JP" altLang="en-US" sz="1400">
+                <a:latin typeface="メイリオ" panose="020B0604030504040204" pitchFamily="50" charset="-128"/>
+                <a:ea typeface="メイリオ" panose="020B0604030504040204" pitchFamily="50" charset="-128"/>
+              </a:rPr>
+              <a:t>～）になっている</a:t>
+            </a:r>
+            <a:r>
+              <a:rPr lang="en-US" altLang="ja-JP" sz="1400" b="1">
+                <a:solidFill>
+                  <a:schemeClr val="accent2"/>
+                </a:solidFill>
+                <a:latin typeface="メイリオ" panose="020B0604030504040204" pitchFamily="50" charset="-128"/>
+                <a:ea typeface="メイリオ" panose="020B0604030504040204" pitchFamily="50" charset="-128"/>
+              </a:rPr>
+              <a:t>Cowork</a:t>
+            </a:r>
+            <a:r>
+              <a:rPr lang="ja-JP" altLang="en-US" sz="1400" b="1">
+                <a:solidFill>
+                  <a:schemeClr val="accent2"/>
+                </a:solidFill>
+                <a:latin typeface="メイリオ" panose="020B0604030504040204" pitchFamily="50" charset="-128"/>
+                <a:ea typeface="メイリオ" panose="020B0604030504040204" pitchFamily="50" charset="-128"/>
+              </a:rPr>
+              <a:t>はここを打破します</a:t>
+            </a:r>
+            <a:r>
+              <a:rPr lang="ja-JP" altLang="en-US" sz="1400">
+                <a:latin typeface="メイリオ" panose="020B0604030504040204" pitchFamily="50" charset="-128"/>
+                <a:ea typeface="メイリオ" panose="020B0604030504040204" pitchFamily="50" charset="-128"/>
+              </a:rPr>
+              <a:t>。参照した情報をそのまま次のアクションに繋げるなど、「指示を出したら</a:t>
+            </a:r>
+            <a:r>
+              <a:rPr lang="en-US" altLang="ja-JP" sz="1400">
+                <a:latin typeface="メイリオ" panose="020B0604030504040204" pitchFamily="50" charset="-128"/>
+                <a:ea typeface="メイリオ" panose="020B0604030504040204" pitchFamily="50" charset="-128"/>
+              </a:rPr>
+              <a:t>AI</a:t>
+            </a:r>
+            <a:r>
+              <a:rPr lang="ja-JP" altLang="en-US" sz="1400">
+                <a:latin typeface="メイリオ" panose="020B0604030504040204" pitchFamily="50" charset="-128"/>
+                <a:ea typeface="メイリオ" panose="020B0604030504040204" pitchFamily="50" charset="-128"/>
+              </a:rPr>
+              <a:t>が動く」が</a:t>
+            </a:r>
+            <a:r>
+              <a:rPr lang="en-US" altLang="ja-JP" sz="1400">
+                <a:latin typeface="メイリオ" panose="020B0604030504040204" pitchFamily="50" charset="-128"/>
+                <a:ea typeface="メイリオ" panose="020B0604030504040204" pitchFamily="50" charset="-128"/>
+              </a:rPr>
+              <a:t>Copilot</a:t>
+            </a:r>
+            <a:r>
+              <a:rPr lang="ja-JP" altLang="en-US" sz="1400">
+                <a:latin typeface="メイリオ" panose="020B0604030504040204" pitchFamily="50" charset="-128"/>
+                <a:ea typeface="メイリオ" panose="020B0604030504040204" pitchFamily="50" charset="-128"/>
+              </a:rPr>
+              <a:t>上でも可能になります。</a:t>
+            </a:r>
+            <a:r>
+              <a:rPr lang="ja-JP" altLang="en-US" sz="1400" b="1">
+                <a:solidFill>
+                  <a:schemeClr val="accent2"/>
+                </a:solidFill>
+                <a:latin typeface="メイリオ" panose="020B0604030504040204" pitchFamily="50" charset="-128"/>
+                <a:ea typeface="メイリオ" panose="020B0604030504040204" pitchFamily="50" charset="-128"/>
+              </a:rPr>
+              <a:t>今まで蓄積したデータをいかに使うかが</a:t>
+            </a:r>
+            <a:r>
+              <a:rPr lang="en-US" altLang="ja-JP" sz="1400" b="1">
+                <a:solidFill>
+                  <a:schemeClr val="accent2"/>
+                </a:solidFill>
+                <a:latin typeface="メイリオ" panose="020B0604030504040204" pitchFamily="50" charset="-128"/>
+                <a:ea typeface="メイリオ" panose="020B0604030504040204" pitchFamily="50" charset="-128"/>
+              </a:rPr>
+              <a:t>Copilot</a:t>
+            </a:r>
+            <a:r>
+              <a:rPr lang="ja-JP" altLang="en-US" sz="1400" b="1">
+                <a:solidFill>
+                  <a:schemeClr val="accent2"/>
+                </a:solidFill>
+                <a:latin typeface="メイリオ" panose="020B0604030504040204" pitchFamily="50" charset="-128"/>
+                <a:ea typeface="メイリオ" panose="020B0604030504040204" pitchFamily="50" charset="-128"/>
+              </a:rPr>
+              <a:t>の優位性</a:t>
+            </a:r>
+            <a:r>
+              <a:rPr lang="ja-JP" altLang="en-US" sz="1400">
+                <a:latin typeface="メイリオ" panose="020B0604030504040204" pitchFamily="50" charset="-128"/>
+                <a:ea typeface="メイリオ" panose="020B0604030504040204" pitchFamily="50" charset="-128"/>
+              </a:rPr>
+              <a:t>となっていきます。</a:t>
+            </a:r>
+            <a:endParaRPr kumimoji="1" lang="en-US" altLang="ja-JP" sz="1400">
+              <a:latin typeface="メイリオ" panose="020B0604030504040204" pitchFamily="50" charset="-128"/>
+              <a:ea typeface="メイリオ" panose="020B0604030504040204" pitchFamily="50" charset="-128"/>
+            </a:endParaRPr>
+          </a:p>
+        </p:txBody>
+      </p:sp>
+      <p:sp>
+        <p:nvSpPr>
+          <p:cNvPr id="10" name="正方形/長方形 9">
+            <a:extLst>
+              <a:ext uri="{FF2B5EF4-FFF2-40B4-BE49-F238E27FC236}">
+                <a16:creationId xmlns:a16="http://schemas.microsoft.com/office/drawing/2014/main" id="{EAF9C7D7-D8C4-5575-B0FB-24B6280992E4}"/>
+              </a:ext>
+            </a:extLst>
+          </p:cNvPr>
+          <p:cNvSpPr/>
+          <p:nvPr/>
+        </p:nvSpPr>
+        <p:spPr>
+          <a:xfrm>
+            <a:off x="282112" y="2138011"/>
+            <a:ext cx="2779198" cy="340403"/>
+          </a:xfrm>
+          <a:prstGeom prst="rect">
+            <a:avLst/>
+          </a:prstGeom>
+          <a:solidFill>
+            <a:schemeClr val="tx2">
+              <a:lumMod val="75000"/>
+              <a:lumOff val="25000"/>
+            </a:schemeClr>
+          </a:solidFill>
+          <a:ln>
+            <a:solidFill>
+              <a:schemeClr val="tx2">
+                <a:lumMod val="75000"/>
+                <a:lumOff val="25000"/>
+              </a:schemeClr>
+            </a:solidFill>
+          </a:ln>
+        </p:spPr>
+        <p:style>
+          <a:lnRef idx="2">
+            <a:schemeClr val="accent1">
+              <a:shade val="15000"/>
+            </a:schemeClr>
+          </a:lnRef>
+          <a:fillRef idx="1">
+            <a:schemeClr val="accent1"/>
+          </a:fillRef>
+          <a:effectRef idx="0">
+            <a:schemeClr val="accent1"/>
+          </a:effectRef>
+          <a:fontRef idx="minor">
+            <a:schemeClr val="lt1"/>
+          </a:fontRef>
+        </p:style>
+        <p:txBody>
+          <a:bodyPr rtlCol="0" anchor="ctr"/>
+          <a:lstStyle/>
+          <a:p>
+            <a:pPr algn="ctr">
+              <a:defRPr sz="1500" b="1">
+                <a:solidFill>
+                  <a:srgbClr val="FFFFFF"/>
+                </a:solidFill>
+                <a:latin typeface="メイリオ"/>
+              </a:defRPr>
+            </a:pPr>
+            <a:r>
+              <a:rPr lang="en-US" altLang="ja-JP" sz="1600">
+                <a:latin typeface="メイリオ" panose="020B0604030504040204" pitchFamily="50" charset="-128"/>
+                <a:ea typeface="メイリオ" panose="020B0604030504040204" pitchFamily="50" charset="-128"/>
+              </a:rPr>
+              <a:t>Copilot</a:t>
+            </a:r>
+            <a:r>
+              <a:rPr lang="ja-JP" altLang="en-US" sz="1600">
+                <a:latin typeface="メイリオ" panose="020B0604030504040204" pitchFamily="50" charset="-128"/>
+                <a:ea typeface="メイリオ" panose="020B0604030504040204" pitchFamily="50" charset="-128"/>
+              </a:rPr>
+              <a:t>（従来の参照）</a:t>
+            </a:r>
+          </a:p>
+        </p:txBody>
+      </p:sp>
+      <p:sp>
+        <p:nvSpPr>
+          <p:cNvPr id="23" name="正方形/長方形 22">
+            <a:extLst>
+              <a:ext uri="{FF2B5EF4-FFF2-40B4-BE49-F238E27FC236}">
+                <a16:creationId xmlns:a16="http://schemas.microsoft.com/office/drawing/2014/main" id="{A944B2B3-6295-0F9B-E2C0-036671B92428}"/>
+              </a:ext>
+            </a:extLst>
+          </p:cNvPr>
+          <p:cNvSpPr/>
+          <p:nvPr/>
+        </p:nvSpPr>
+        <p:spPr>
+          <a:xfrm>
+            <a:off x="282112" y="2478414"/>
+            <a:ext cx="2779198" cy="4062374"/>
+          </a:xfrm>
+          <a:prstGeom prst="rect">
+            <a:avLst/>
+          </a:prstGeom>
+          <a:noFill/>
+          <a:ln>
+            <a:solidFill>
+              <a:schemeClr val="tx2">
+                <a:lumMod val="75000"/>
+                <a:lumOff val="25000"/>
+              </a:schemeClr>
+            </a:solidFill>
+          </a:ln>
+        </p:spPr>
+        <p:style>
+          <a:lnRef idx="2">
+            <a:schemeClr val="accent1">
+              <a:shade val="15000"/>
+            </a:schemeClr>
+          </a:lnRef>
+          <a:fillRef idx="1">
+            <a:schemeClr val="accent1"/>
+          </a:fillRef>
+          <a:effectRef idx="0">
+            <a:schemeClr val="accent1"/>
+          </a:effectRef>
+          <a:fontRef idx="minor">
+            <a:schemeClr val="lt1"/>
+          </a:fontRef>
+        </p:style>
+        <p:txBody>
+          <a:bodyPr rtlCol="0" anchor="ctr"/>
+          <a:lstStyle/>
+          <a:p>
+            <a:pPr algn="ctr"/>
+            <a:endParaRPr kumimoji="1" lang="ja-JP" altLang="en-US">
+              <a:latin typeface="メイリオ" panose="020B0604030504040204" pitchFamily="50" charset="-128"/>
+              <a:ea typeface="メイリオ" panose="020B0604030504040204" pitchFamily="50" charset="-128"/>
+            </a:endParaRPr>
+          </a:p>
+        </p:txBody>
+      </p:sp>
+      <p:sp>
+        <p:nvSpPr>
+          <p:cNvPr id="24" name="正方形/長方形 23">
+            <a:extLst>
+              <a:ext uri="{FF2B5EF4-FFF2-40B4-BE49-F238E27FC236}">
+                <a16:creationId xmlns:a16="http://schemas.microsoft.com/office/drawing/2014/main" id="{30200741-2FC0-1954-033F-85D125BE1819}"/>
+              </a:ext>
+            </a:extLst>
+          </p:cNvPr>
+          <p:cNvSpPr/>
+          <p:nvPr/>
+        </p:nvSpPr>
+        <p:spPr>
+          <a:xfrm>
+            <a:off x="3576283" y="2138011"/>
+            <a:ext cx="2779198" cy="340403"/>
+          </a:xfrm>
+          <a:prstGeom prst="rect">
+            <a:avLst/>
+          </a:prstGeom>
+          <a:solidFill>
+            <a:schemeClr val="accent6">
+              <a:lumMod val="75000"/>
+            </a:schemeClr>
+          </a:solidFill>
+          <a:ln>
+            <a:solidFill>
+              <a:schemeClr val="accent6">
+                <a:lumMod val="75000"/>
+              </a:schemeClr>
+            </a:solidFill>
+          </a:ln>
+        </p:spPr>
+        <p:style>
+          <a:lnRef idx="2">
+            <a:schemeClr val="accent1">
+              <a:shade val="15000"/>
+            </a:schemeClr>
+          </a:lnRef>
+          <a:fillRef idx="1">
+            <a:schemeClr val="accent1"/>
+          </a:fillRef>
+          <a:effectRef idx="0">
+            <a:schemeClr val="accent1"/>
+          </a:effectRef>
+          <a:fontRef idx="minor">
+            <a:schemeClr val="lt1"/>
+          </a:fontRef>
+        </p:style>
+        <p:txBody>
+          <a:bodyPr rtlCol="0" anchor="ctr"/>
+          <a:lstStyle/>
+          <a:p>
+            <a:pPr algn="ctr">
+              <a:defRPr sz="1500" b="1">
+                <a:solidFill>
+                  <a:srgbClr val="FFFFFF"/>
+                </a:solidFill>
+                <a:latin typeface="メイリオ"/>
+              </a:defRPr>
+            </a:pPr>
+            <a:r>
+              <a:rPr lang="en-US" altLang="ja-JP" sz="1600">
+                <a:latin typeface="メイリオ" panose="020B0604030504040204" pitchFamily="50" charset="-128"/>
+                <a:ea typeface="メイリオ" panose="020B0604030504040204" pitchFamily="50" charset="-128"/>
+              </a:rPr>
+              <a:t>Cowork</a:t>
+            </a:r>
+            <a:r>
+              <a:rPr lang="ja-JP" altLang="en-US" sz="1600">
+                <a:latin typeface="メイリオ" panose="020B0604030504040204" pitchFamily="50" charset="-128"/>
+                <a:ea typeface="メイリオ" panose="020B0604030504040204" pitchFamily="50" charset="-128"/>
+              </a:rPr>
+              <a:t>（自律実行）</a:t>
+            </a:r>
+          </a:p>
+        </p:txBody>
+      </p:sp>
+      <p:sp>
+        <p:nvSpPr>
+          <p:cNvPr id="25" name="正方形/長方形 24">
+            <a:extLst>
+              <a:ext uri="{FF2B5EF4-FFF2-40B4-BE49-F238E27FC236}">
+                <a16:creationId xmlns:a16="http://schemas.microsoft.com/office/drawing/2014/main" id="{A65D48A9-F439-6E5D-BD84-80B02BE79F17}"/>
+              </a:ext>
+            </a:extLst>
+          </p:cNvPr>
+          <p:cNvSpPr/>
+          <p:nvPr/>
+        </p:nvSpPr>
+        <p:spPr>
+          <a:xfrm>
+            <a:off x="3576283" y="2478414"/>
+            <a:ext cx="2779198" cy="4062374"/>
+          </a:xfrm>
+          <a:prstGeom prst="rect">
+            <a:avLst/>
+          </a:prstGeom>
+          <a:noFill/>
+          <a:ln>
+            <a:solidFill>
+              <a:schemeClr val="accent6">
+                <a:lumMod val="75000"/>
+              </a:schemeClr>
+            </a:solidFill>
+          </a:ln>
+        </p:spPr>
+        <p:style>
+          <a:lnRef idx="2">
+            <a:schemeClr val="accent1">
+              <a:shade val="15000"/>
+            </a:schemeClr>
+          </a:lnRef>
+          <a:fillRef idx="1">
+            <a:schemeClr val="accent1"/>
+          </a:fillRef>
+          <a:effectRef idx="0">
+            <a:schemeClr val="accent1"/>
+          </a:effectRef>
+          <a:fontRef idx="minor">
+            <a:schemeClr val="lt1"/>
+          </a:fontRef>
+        </p:style>
+        <p:txBody>
+          <a:bodyPr rtlCol="0" anchor="ctr"/>
+          <a:lstStyle/>
+          <a:p>
+            <a:pPr algn="ctr"/>
+            <a:endParaRPr kumimoji="1" lang="ja-JP" altLang="en-US">
+              <a:latin typeface="メイリオ" panose="020B0604030504040204" pitchFamily="50" charset="-128"/>
+              <a:ea typeface="メイリオ" panose="020B0604030504040204" pitchFamily="50" charset="-128"/>
+            </a:endParaRPr>
+          </a:p>
+        </p:txBody>
+      </p:sp>
+      <p:sp>
+        <p:nvSpPr>
+          <p:cNvPr id="33" name="正方形/長方形 32">
+            <a:extLst>
+              <a:ext uri="{FF2B5EF4-FFF2-40B4-BE49-F238E27FC236}">
+                <a16:creationId xmlns:a16="http://schemas.microsoft.com/office/drawing/2014/main" id="{D5DBAC55-52C4-4184-150A-9A2803018E36}"/>
+              </a:ext>
+            </a:extLst>
+          </p:cNvPr>
+          <p:cNvSpPr/>
+          <p:nvPr/>
+        </p:nvSpPr>
+        <p:spPr>
+          <a:xfrm>
+            <a:off x="282112" y="1708163"/>
+            <a:ext cx="2779198" cy="340403"/>
+          </a:xfrm>
+          <a:prstGeom prst="rect">
+            <a:avLst/>
+          </a:prstGeom>
+          <a:solidFill>
+            <a:schemeClr val="tx2">
+              <a:lumMod val="75000"/>
+              <a:lumOff val="25000"/>
+            </a:schemeClr>
+          </a:solidFill>
+          <a:ln>
+            <a:solidFill>
+              <a:schemeClr val="tx2">
+                <a:lumMod val="75000"/>
+                <a:lumOff val="25000"/>
+              </a:schemeClr>
+            </a:solidFill>
+          </a:ln>
+        </p:spPr>
+        <p:style>
+          <a:lnRef idx="2">
+            <a:schemeClr val="accent1">
+              <a:shade val="15000"/>
+            </a:schemeClr>
+          </a:lnRef>
+          <a:fillRef idx="1">
+            <a:schemeClr val="accent1"/>
+          </a:fillRef>
+          <a:effectRef idx="0">
+            <a:schemeClr val="accent1"/>
+          </a:effectRef>
+          <a:fontRef idx="minor">
+            <a:schemeClr val="lt1"/>
+          </a:fontRef>
+        </p:style>
+        <p:txBody>
+          <a:bodyPr rtlCol="0" anchor="ctr"/>
+          <a:lstStyle/>
+          <a:p>
+            <a:pPr algn="ctr">
+              <a:defRPr sz="1500" b="1">
+                <a:solidFill>
+                  <a:srgbClr val="FFFFFF"/>
+                </a:solidFill>
+                <a:latin typeface="メイリオ"/>
+              </a:defRPr>
+            </a:pPr>
+            <a:r>
+              <a:rPr lang="en-US" altLang="ja-JP" sz="1600">
+                <a:latin typeface="メイリオ" panose="020B0604030504040204" pitchFamily="50" charset="-128"/>
+                <a:ea typeface="メイリオ" panose="020B0604030504040204" pitchFamily="50" charset="-128"/>
+              </a:rPr>
+              <a:t>Before</a:t>
+            </a:r>
+            <a:r>
+              <a:rPr lang="ja-JP" altLang="en-US" sz="1600">
+                <a:latin typeface="メイリオ" panose="020B0604030504040204" pitchFamily="50" charset="-128"/>
+                <a:ea typeface="メイリオ" panose="020B0604030504040204" pitchFamily="50" charset="-128"/>
+              </a:rPr>
+              <a:t>（従来の</a:t>
+            </a:r>
+            <a:r>
+              <a:rPr lang="en-US" altLang="ja-JP" sz="1600">
+                <a:latin typeface="メイリオ" panose="020B0604030504040204" pitchFamily="50" charset="-128"/>
+                <a:ea typeface="メイリオ" panose="020B0604030504040204" pitchFamily="50" charset="-128"/>
+              </a:rPr>
+              <a:t>Copilot</a:t>
+            </a:r>
+            <a:r>
+              <a:rPr lang="ja-JP" altLang="en-US" sz="1600">
+                <a:latin typeface="メイリオ" panose="020B0604030504040204" pitchFamily="50" charset="-128"/>
+                <a:ea typeface="メイリオ" panose="020B0604030504040204" pitchFamily="50" charset="-128"/>
+              </a:rPr>
+              <a:t>）</a:t>
+            </a:r>
+          </a:p>
+        </p:txBody>
+      </p:sp>
+      <p:sp>
+        <p:nvSpPr>
+          <p:cNvPr id="34" name="正方形/長方形 33">
+            <a:extLst>
+              <a:ext uri="{FF2B5EF4-FFF2-40B4-BE49-F238E27FC236}">
+                <a16:creationId xmlns:a16="http://schemas.microsoft.com/office/drawing/2014/main" id="{45625CCB-778D-F1D3-BCCB-C743C3A03BE9}"/>
+              </a:ext>
+            </a:extLst>
+          </p:cNvPr>
+          <p:cNvSpPr/>
+          <p:nvPr/>
+        </p:nvSpPr>
+        <p:spPr>
+          <a:xfrm>
+            <a:off x="3576283" y="1708163"/>
+            <a:ext cx="2779198" cy="340403"/>
+          </a:xfrm>
+          <a:prstGeom prst="rect">
+            <a:avLst/>
+          </a:prstGeom>
+          <a:solidFill>
+            <a:schemeClr val="accent6">
+              <a:lumMod val="75000"/>
+            </a:schemeClr>
+          </a:solidFill>
+          <a:ln>
+            <a:solidFill>
+              <a:schemeClr val="accent6">
+                <a:lumMod val="75000"/>
+              </a:schemeClr>
+            </a:solidFill>
+          </a:ln>
+        </p:spPr>
+        <p:style>
+          <a:lnRef idx="2">
+            <a:schemeClr val="accent1">
+              <a:shade val="15000"/>
+            </a:schemeClr>
+          </a:lnRef>
+          <a:fillRef idx="1">
+            <a:schemeClr val="accent1"/>
+          </a:fillRef>
+          <a:effectRef idx="0">
+            <a:schemeClr val="accent1"/>
+          </a:effectRef>
+          <a:fontRef idx="minor">
+            <a:schemeClr val="lt1"/>
+          </a:fontRef>
+        </p:style>
+        <p:txBody>
+          <a:bodyPr rtlCol="0" anchor="ctr"/>
+          <a:lstStyle/>
+          <a:p>
+            <a:pPr algn="ctr">
+              <a:defRPr sz="1500" b="1">
+                <a:solidFill>
+                  <a:srgbClr val="FFFFFF"/>
+                </a:solidFill>
+                <a:latin typeface="メイリオ"/>
+              </a:defRPr>
+            </a:pPr>
+            <a:r>
+              <a:rPr lang="en-US" altLang="ja-JP" sz="1600">
+                <a:latin typeface="メイリオ" panose="020B0604030504040204" pitchFamily="50" charset="-128"/>
+                <a:ea typeface="メイリオ" panose="020B0604030504040204" pitchFamily="50" charset="-128"/>
+              </a:rPr>
+              <a:t>After</a:t>
+            </a:r>
+            <a:r>
+              <a:rPr lang="ja-JP" altLang="en-US" sz="1600">
+                <a:latin typeface="メイリオ" panose="020B0604030504040204" pitchFamily="50" charset="-128"/>
+                <a:ea typeface="メイリオ" panose="020B0604030504040204" pitchFamily="50" charset="-128"/>
+              </a:rPr>
+              <a:t>（</a:t>
+            </a:r>
+            <a:r>
+              <a:rPr lang="en-US" altLang="ja-JP" sz="1600">
+                <a:latin typeface="メイリオ" panose="020B0604030504040204" pitchFamily="50" charset="-128"/>
+                <a:ea typeface="メイリオ" panose="020B0604030504040204" pitchFamily="50" charset="-128"/>
+              </a:rPr>
+              <a:t>Cowork</a:t>
+            </a:r>
+            <a:r>
+              <a:rPr lang="ja-JP" altLang="en-US" sz="1600">
+                <a:latin typeface="メイリオ" panose="020B0604030504040204" pitchFamily="50" charset="-128"/>
+                <a:ea typeface="メイリオ" panose="020B0604030504040204" pitchFamily="50" charset="-128"/>
+              </a:rPr>
+              <a:t>）</a:t>
+            </a:r>
+          </a:p>
+        </p:txBody>
+      </p:sp>
+      <p:sp>
+        <p:nvSpPr>
+          <p:cNvPr id="36" name="テキスト ボックス 35">
+            <a:extLst>
+              <a:ext uri="{FF2B5EF4-FFF2-40B4-BE49-F238E27FC236}">
+                <a16:creationId xmlns:a16="http://schemas.microsoft.com/office/drawing/2014/main" id="{0DD81FD9-073B-FE8E-A6A1-CFE434AD6316}"/>
+              </a:ext>
+            </a:extLst>
+          </p:cNvPr>
+          <p:cNvSpPr txBox="1"/>
+          <p:nvPr/>
+        </p:nvSpPr>
+        <p:spPr>
+          <a:xfrm>
+            <a:off x="3061309" y="1606642"/>
+            <a:ext cx="514974" cy="430887"/>
+          </a:xfrm>
+          <a:prstGeom prst="rect">
+            <a:avLst/>
+          </a:prstGeom>
+          <a:noFill/>
+        </p:spPr>
+        <p:txBody>
+          <a:bodyPr wrap="square" rtlCol="0">
+            <a:spAutoFit/>
+          </a:bodyPr>
+          <a:lstStyle/>
+          <a:p>
+            <a:pPr algn="ctr">
+              <a:lnSpc>
+                <a:spcPct val="150000"/>
+              </a:lnSpc>
+            </a:pPr>
+            <a:r>
+              <a:rPr lang="en-US" altLang="ja-JP" sz="1600" b="1">
+                <a:latin typeface="メイリオ" panose="020B0604030504040204" pitchFamily="50" charset="-128"/>
+                <a:ea typeface="メイリオ" panose="020B0604030504040204" pitchFamily="50" charset="-128"/>
+              </a:rPr>
+              <a:t>VS</a:t>
+            </a:r>
+            <a:endParaRPr lang="ja-JP" altLang="en-US" sz="1200">
+              <a:latin typeface="メイリオ" panose="020B0604030504040204" pitchFamily="50" charset="-128"/>
+              <a:ea typeface="メイリオ" panose="020B0604030504040204" pitchFamily="50" charset="-128"/>
+            </a:endParaRPr>
+          </a:p>
+        </p:txBody>
+      </p:sp>
+      <p:cxnSp>
+        <p:nvCxnSpPr>
+          <p:cNvPr id="38" name="直線コネクタ 37">
+            <a:extLst>
+              <a:ext uri="{FF2B5EF4-FFF2-40B4-BE49-F238E27FC236}">
+                <a16:creationId xmlns:a16="http://schemas.microsoft.com/office/drawing/2014/main" id="{AA89EE68-1767-9DA5-C78D-5170341B2F10}"/>
+              </a:ext>
+            </a:extLst>
+          </p:cNvPr>
+          <p:cNvCxnSpPr>
+            <a:cxnSpLocks/>
+          </p:cNvCxnSpPr>
+          <p:nvPr/>
+        </p:nvCxnSpPr>
+        <p:spPr>
+          <a:xfrm>
+            <a:off x="3318796" y="2126974"/>
+            <a:ext cx="0" cy="4442792"/>
+          </a:xfrm>
+          <a:prstGeom prst="line">
+            <a:avLst/>
+          </a:prstGeom>
+          <a:ln>
+            <a:solidFill>
+              <a:schemeClr val="tx1">
+                <a:lumMod val="50000"/>
+                <a:lumOff val="50000"/>
+              </a:schemeClr>
+            </a:solidFill>
+            <a:prstDash val="dash"/>
+          </a:ln>
+        </p:spPr>
+        <p:style>
+          <a:lnRef idx="2">
+            <a:schemeClr val="accent1"/>
+          </a:lnRef>
+          <a:fillRef idx="0">
+            <a:schemeClr val="accent1"/>
+          </a:fillRef>
+          <a:effectRef idx="1">
+            <a:schemeClr val="accent1"/>
+          </a:effectRef>
+          <a:fontRef idx="minor">
+            <a:schemeClr val="tx1"/>
+          </a:fontRef>
+        </p:style>
+      </p:cxnSp>
+      <p:pic>
+        <p:nvPicPr>
+          <p:cNvPr id="41" name="グラフィックス 40" descr="人工知能 単色塗りつぶし">
+            <a:extLst>
+              <a:ext uri="{FF2B5EF4-FFF2-40B4-BE49-F238E27FC236}">
+                <a16:creationId xmlns:a16="http://schemas.microsoft.com/office/drawing/2014/main" id="{8F9D7FAD-0C02-C97C-0BA7-B78B6A1F7677}"/>
+              </a:ext>
+            </a:extLst>
+          </p:cNvPr>
+          <p:cNvPicPr>
+            <a:picLocks noChangeAspect="1"/>
+          </p:cNvPicPr>
+          <p:nvPr/>
+        </p:nvPicPr>
+        <p:blipFill>
+          <a:blip>
+            <a:extLst>
+              <a:ext uri="{96DAC541-7B7A-43D3-8B79-37D633B846F1}">
+                <asvg:svgBlip xmlns:asvg="http://schemas.microsoft.com/office/drawing/2016/SVG/main" r:embed="rId2"/>
+              </a:ext>
+            </a:extLst>
+          </a:blip>
+          <a:stretch>
+            <a:fillRect/>
+          </a:stretch>
+        </p:blipFill>
+        <p:spPr>
+          <a:xfrm>
+            <a:off x="1913248" y="2652482"/>
+            <a:ext cx="552403" cy="552403"/>
+          </a:xfrm>
+          <a:prstGeom prst="rect">
+            <a:avLst/>
+          </a:prstGeom>
+        </p:spPr>
+      </p:pic>
+      <p:pic>
+        <p:nvPicPr>
+          <p:cNvPr id="43" name="グラフィックス 42" descr="男性のプロフィール 単色塗りつぶし">
+            <a:extLst>
+              <a:ext uri="{FF2B5EF4-FFF2-40B4-BE49-F238E27FC236}">
+                <a16:creationId xmlns:a16="http://schemas.microsoft.com/office/drawing/2014/main" id="{788B54D8-FF9D-1A09-7020-9404F7441399}"/>
+              </a:ext>
+            </a:extLst>
+          </p:cNvPr>
+          <p:cNvPicPr>
+            <a:picLocks noChangeAspect="1"/>
+          </p:cNvPicPr>
+          <p:nvPr/>
+        </p:nvPicPr>
+        <p:blipFill>
+          <a:blip>
+            <a:extLst>
+              <a:ext uri="{96DAC541-7B7A-43D3-8B79-37D633B846F1}">
+                <asvg:svgBlip xmlns:asvg="http://schemas.microsoft.com/office/drawing/2016/SVG/main" r:embed="rId3"/>
+              </a:ext>
+            </a:extLst>
+          </a:blip>
+          <a:stretch>
+            <a:fillRect/>
+          </a:stretch>
+        </p:blipFill>
+        <p:spPr>
+          <a:xfrm>
+            <a:off x="870581" y="2652482"/>
+            <a:ext cx="552403" cy="552403"/>
+          </a:xfrm>
+          <a:prstGeom prst="rect">
+            <a:avLst/>
+          </a:prstGeom>
+        </p:spPr>
+      </p:pic>
+      <p:pic>
+        <p:nvPicPr>
+          <p:cNvPr id="45" name="グラフィックス 44" descr="ドキュメント 単色塗りつぶし">
+            <a:extLst>
+              <a:ext uri="{FF2B5EF4-FFF2-40B4-BE49-F238E27FC236}">
+                <a16:creationId xmlns:a16="http://schemas.microsoft.com/office/drawing/2014/main" id="{E09D1EA5-9876-0E17-9E86-438B8EED6672}"/>
+              </a:ext>
+            </a:extLst>
+          </p:cNvPr>
+          <p:cNvPicPr>
+            <a:picLocks noChangeAspect="1"/>
+          </p:cNvPicPr>
+          <p:nvPr/>
+        </p:nvPicPr>
+        <p:blipFill>
+          <a:blip>
+            <a:extLst>
+              <a:ext uri="{96DAC541-7B7A-43D3-8B79-37D633B846F1}">
+                <asvg:svgBlip xmlns:asvg="http://schemas.microsoft.com/office/drawing/2016/SVG/main" r:embed="rId4"/>
+              </a:ext>
+            </a:extLst>
+          </a:blip>
+          <a:stretch>
+            <a:fillRect/>
+          </a:stretch>
+        </p:blipFill>
+        <p:spPr>
+          <a:xfrm>
+            <a:off x="2502995" y="4520804"/>
+            <a:ext cx="552403" cy="552403"/>
+          </a:xfrm>
+          <a:prstGeom prst="rect">
+            <a:avLst/>
+          </a:prstGeom>
+        </p:spPr>
+      </p:pic>
+      <p:pic>
+        <p:nvPicPr>
+          <p:cNvPr id="47" name="グラフィックス 46" descr="封筒 単色塗りつぶし">
+            <a:extLst>
+              <a:ext uri="{FF2B5EF4-FFF2-40B4-BE49-F238E27FC236}">
+                <a16:creationId xmlns:a16="http://schemas.microsoft.com/office/drawing/2014/main" id="{8CF42687-9368-707D-9E2A-A5EA3279BF28}"/>
+              </a:ext>
+            </a:extLst>
+          </p:cNvPr>
+          <p:cNvPicPr>
+            <a:picLocks noChangeAspect="1"/>
+          </p:cNvPicPr>
+          <p:nvPr/>
+        </p:nvPicPr>
+        <p:blipFill>
+          <a:blip>
+            <a:extLst>
+              <a:ext uri="{96DAC541-7B7A-43D3-8B79-37D633B846F1}">
+                <asvg:svgBlip xmlns:asvg="http://schemas.microsoft.com/office/drawing/2016/SVG/main" r:embed="rId5"/>
+              </a:ext>
+            </a:extLst>
+          </a:blip>
+          <a:stretch>
+            <a:fillRect/>
+          </a:stretch>
+        </p:blipFill>
+        <p:spPr>
+          <a:xfrm>
+            <a:off x="341817" y="4550206"/>
+            <a:ext cx="552403" cy="552403"/>
+          </a:xfrm>
+          <a:prstGeom prst="rect">
+            <a:avLst/>
+          </a:prstGeom>
+        </p:spPr>
+      </p:pic>
+      <p:pic>
+        <p:nvPicPr>
+          <p:cNvPr id="49" name="グラフィックス 48" descr="ノート PC 単色塗りつぶし">
+            <a:extLst>
+              <a:ext uri="{FF2B5EF4-FFF2-40B4-BE49-F238E27FC236}">
+                <a16:creationId xmlns:a16="http://schemas.microsoft.com/office/drawing/2014/main" id="{824114CD-AD29-485E-D33B-CC1B3C855482}"/>
+              </a:ext>
+            </a:extLst>
+          </p:cNvPr>
+          <p:cNvPicPr>
+            <a:picLocks noChangeAspect="1"/>
+          </p:cNvPicPr>
+          <p:nvPr/>
+        </p:nvPicPr>
+        <p:blipFill>
+          <a:blip>
+            <a:extLst>
+              <a:ext uri="{96DAC541-7B7A-43D3-8B79-37D633B846F1}">
+                <asvg:svgBlip xmlns:asvg="http://schemas.microsoft.com/office/drawing/2016/SVG/main" r:embed="rId6"/>
+              </a:ext>
+            </a:extLst>
+          </a:blip>
+          <a:stretch>
+            <a:fillRect/>
+          </a:stretch>
+        </p:blipFill>
+        <p:spPr>
+          <a:xfrm>
+            <a:off x="1634441" y="4550206"/>
+            <a:ext cx="552403" cy="552403"/>
+          </a:xfrm>
+          <a:prstGeom prst="rect">
+            <a:avLst/>
+          </a:prstGeom>
+        </p:spPr>
+      </p:pic>
+      <p:sp>
+        <p:nvSpPr>
+          <p:cNvPr id="50" name="テキスト ボックス 49">
+            <a:extLst>
+              <a:ext uri="{FF2B5EF4-FFF2-40B4-BE49-F238E27FC236}">
+                <a16:creationId xmlns:a16="http://schemas.microsoft.com/office/drawing/2014/main" id="{80C63AD5-806A-82EF-3A36-4C699C35B49A}"/>
+              </a:ext>
+            </a:extLst>
+          </p:cNvPr>
+          <p:cNvSpPr txBox="1"/>
+          <p:nvPr/>
+        </p:nvSpPr>
+        <p:spPr>
+          <a:xfrm rot="10800000">
+            <a:off x="1398275" y="2670920"/>
+            <a:ext cx="514974" cy="515526"/>
+          </a:xfrm>
+          <a:prstGeom prst="rect">
+            <a:avLst/>
+          </a:prstGeom>
+          <a:noFill/>
+        </p:spPr>
+        <p:txBody>
+          <a:bodyPr wrap="square" rtlCol="0">
+            <a:spAutoFit/>
+          </a:bodyPr>
+          <a:lstStyle/>
+          <a:p>
+            <a:pPr algn="ctr">
+              <a:lnSpc>
+                <a:spcPct val="150000"/>
+              </a:lnSpc>
+            </a:pPr>
+            <a:r>
+              <a:rPr lang="ja-JP" altLang="en-US" sz="2000">
+                <a:latin typeface="メイリオ" panose="020B0604030504040204" pitchFamily="50" charset="-128"/>
+                <a:ea typeface="メイリオ" panose="020B0604030504040204" pitchFamily="50" charset="-128"/>
+              </a:rPr>
+              <a:t>⇄</a:t>
+            </a:r>
+            <a:endParaRPr lang="ja-JP" altLang="en-US" sz="1600">
+              <a:latin typeface="メイリオ" panose="020B0604030504040204" pitchFamily="50" charset="-128"/>
+              <a:ea typeface="メイリオ" panose="020B0604030504040204" pitchFamily="50" charset="-128"/>
+            </a:endParaRPr>
+          </a:p>
+        </p:txBody>
+      </p:sp>
+      <p:sp>
+        <p:nvSpPr>
+          <p:cNvPr id="51" name="テキスト ボックス 50">
+            <a:extLst>
+              <a:ext uri="{FF2B5EF4-FFF2-40B4-BE49-F238E27FC236}">
+                <a16:creationId xmlns:a16="http://schemas.microsoft.com/office/drawing/2014/main" id="{93684BD2-DB28-5A1B-7DA9-CB6BFCF3FA89}"/>
+              </a:ext>
+            </a:extLst>
+          </p:cNvPr>
+          <p:cNvSpPr txBox="1"/>
+          <p:nvPr/>
+        </p:nvSpPr>
+        <p:spPr>
+          <a:xfrm>
+            <a:off x="2400070" y="2670920"/>
+            <a:ext cx="514974" cy="430887"/>
+          </a:xfrm>
+          <a:prstGeom prst="rect">
+            <a:avLst/>
+          </a:prstGeom>
+          <a:noFill/>
+        </p:spPr>
+        <p:txBody>
+          <a:bodyPr wrap="square" rtlCol="0">
+            <a:spAutoFit/>
+          </a:bodyPr>
+          <a:lstStyle/>
+          <a:p>
+            <a:pPr algn="ctr">
+              <a:lnSpc>
+                <a:spcPct val="150000"/>
+              </a:lnSpc>
+            </a:pPr>
+            <a:r>
+              <a:rPr lang="en-US" altLang="ja-JP" sz="1600" b="1">
+                <a:latin typeface="メイリオ" panose="020B0604030504040204" pitchFamily="50" charset="-128"/>
+                <a:ea typeface="メイリオ" panose="020B0604030504040204" pitchFamily="50" charset="-128"/>
+              </a:rPr>
+              <a:t>AI</a:t>
+            </a:r>
+            <a:endParaRPr lang="ja-JP" altLang="en-US" sz="1200">
+              <a:latin typeface="メイリオ" panose="020B0604030504040204" pitchFamily="50" charset="-128"/>
+              <a:ea typeface="メイリオ" panose="020B0604030504040204" pitchFamily="50" charset="-128"/>
+            </a:endParaRPr>
+          </a:p>
+        </p:txBody>
+      </p:sp>
+      <p:sp>
+        <p:nvSpPr>
+          <p:cNvPr id="68" name="矢印: 下 67">
+            <a:extLst>
+              <a:ext uri="{FF2B5EF4-FFF2-40B4-BE49-F238E27FC236}">
+                <a16:creationId xmlns:a16="http://schemas.microsoft.com/office/drawing/2014/main" id="{A3766EF4-BB34-1C8A-85DE-4DF7FDF01132}"/>
+              </a:ext>
+            </a:extLst>
+          </p:cNvPr>
+          <p:cNvSpPr/>
+          <p:nvPr/>
+        </p:nvSpPr>
+        <p:spPr>
+          <a:xfrm>
+            <a:off x="1739545" y="3262110"/>
+            <a:ext cx="288302" cy="1041533"/>
+          </a:xfrm>
+          <a:prstGeom prst="downArrow">
+            <a:avLst>
+              <a:gd name="adj1" fmla="val 50000"/>
+              <a:gd name="adj2" fmla="val 70685"/>
+            </a:avLst>
+          </a:prstGeom>
+          <a:ln>
+            <a:noFill/>
+          </a:ln>
+        </p:spPr>
+        <p:style>
+          <a:lnRef idx="2">
+            <a:schemeClr val="accent1">
+              <a:shade val="15000"/>
+            </a:schemeClr>
+          </a:lnRef>
+          <a:fillRef idx="1">
+            <a:schemeClr val="accent1"/>
+          </a:fillRef>
+          <a:effectRef idx="0">
+            <a:schemeClr val="accent1"/>
+          </a:effectRef>
+          <a:fontRef idx="minor">
+            <a:schemeClr val="lt1"/>
+          </a:fontRef>
+        </p:style>
+        <p:txBody>
+          <a:bodyPr rtlCol="0" anchor="ctr"/>
+          <a:lstStyle/>
+          <a:p>
+            <a:pPr algn="ctr"/>
+            <a:endParaRPr kumimoji="1" lang="ja-JP" altLang="en-US"/>
+          </a:p>
+        </p:txBody>
+      </p:sp>
+      <p:sp>
+        <p:nvSpPr>
+          <p:cNvPr id="69" name="矢印: 下 68">
+            <a:extLst>
+              <a:ext uri="{FF2B5EF4-FFF2-40B4-BE49-F238E27FC236}">
+                <a16:creationId xmlns:a16="http://schemas.microsoft.com/office/drawing/2014/main" id="{CEF7F8E5-D6E3-B167-A63B-ECA386447BA8}"/>
+              </a:ext>
+            </a:extLst>
+          </p:cNvPr>
+          <p:cNvSpPr/>
+          <p:nvPr/>
+        </p:nvSpPr>
+        <p:spPr>
+          <a:xfrm rot="10800000">
+            <a:off x="1325047" y="3262109"/>
+            <a:ext cx="288302" cy="1041533"/>
+          </a:xfrm>
+          <a:prstGeom prst="downArrow">
+            <a:avLst>
+              <a:gd name="adj1" fmla="val 50000"/>
+              <a:gd name="adj2" fmla="val 70685"/>
+            </a:avLst>
+          </a:prstGeom>
+          <a:ln>
+            <a:noFill/>
+          </a:ln>
+        </p:spPr>
+        <p:style>
+          <a:lnRef idx="2">
+            <a:schemeClr val="accent1">
+              <a:shade val="15000"/>
+            </a:schemeClr>
+          </a:lnRef>
+          <a:fillRef idx="1">
+            <a:schemeClr val="accent1"/>
+          </a:fillRef>
+          <a:effectRef idx="0">
+            <a:schemeClr val="accent1"/>
+          </a:effectRef>
+          <a:fontRef idx="minor">
+            <a:schemeClr val="lt1"/>
+          </a:fontRef>
+        </p:style>
+        <p:txBody>
+          <a:bodyPr rtlCol="0" anchor="ctr"/>
+          <a:lstStyle/>
+          <a:p>
+            <a:pPr algn="ctr"/>
+            <a:endParaRPr kumimoji="1" lang="ja-JP" altLang="en-US"/>
+          </a:p>
+        </p:txBody>
+      </p:sp>
+      <p:pic>
+        <p:nvPicPr>
+          <p:cNvPr id="70" name="グラフィックス 69" descr="男性のプロフィール 単色塗りつぶし">
+            <a:extLst>
+              <a:ext uri="{FF2B5EF4-FFF2-40B4-BE49-F238E27FC236}">
+                <a16:creationId xmlns:a16="http://schemas.microsoft.com/office/drawing/2014/main" id="{77086592-8C3E-B79A-0AA9-5490621D43B1}"/>
+              </a:ext>
+            </a:extLst>
+          </p:cNvPr>
+          <p:cNvPicPr>
+            <a:picLocks noChangeAspect="1"/>
+          </p:cNvPicPr>
+          <p:nvPr/>
+        </p:nvPicPr>
+        <p:blipFill>
+          <a:blip>
+            <a:extLst>
+              <a:ext uri="{96DAC541-7B7A-43D3-8B79-37D633B846F1}">
+                <asvg:svgBlip xmlns:asvg="http://schemas.microsoft.com/office/drawing/2016/SVG/main" r:embed="rId3"/>
+              </a:ext>
+            </a:extLst>
+          </a:blip>
+          <a:stretch>
+            <a:fillRect/>
+          </a:stretch>
+        </p:blipFill>
+        <p:spPr>
+          <a:xfrm>
+            <a:off x="1156363" y="4520804"/>
+            <a:ext cx="552403" cy="552403"/>
+          </a:xfrm>
+          <a:prstGeom prst="rect">
+            <a:avLst/>
+          </a:prstGeom>
+        </p:spPr>
+      </p:pic>
+      <p:sp>
+        <p:nvSpPr>
+          <p:cNvPr id="71" name="テキスト ボックス 70">
+            <a:extLst>
+              <a:ext uri="{FF2B5EF4-FFF2-40B4-BE49-F238E27FC236}">
+                <a16:creationId xmlns:a16="http://schemas.microsoft.com/office/drawing/2014/main" id="{ADD39835-6098-508A-4E13-85CBD837C78B}"/>
+              </a:ext>
+            </a:extLst>
+          </p:cNvPr>
+          <p:cNvSpPr txBox="1"/>
+          <p:nvPr/>
+        </p:nvSpPr>
+        <p:spPr>
+          <a:xfrm>
+            <a:off x="1965451" y="3560379"/>
+            <a:ext cx="1036815" cy="346249"/>
+          </a:xfrm>
+          <a:prstGeom prst="rect">
+            <a:avLst/>
+          </a:prstGeom>
+          <a:noFill/>
+        </p:spPr>
+        <p:txBody>
+          <a:bodyPr wrap="square" rtlCol="0">
+            <a:spAutoFit/>
+          </a:bodyPr>
+          <a:lstStyle/>
+          <a:p>
+            <a:pPr algn="ctr">
+              <a:lnSpc>
+                <a:spcPct val="150000"/>
+              </a:lnSpc>
+            </a:pPr>
+            <a:r>
+              <a:rPr lang="ja-JP" altLang="en-US" sz="1200" b="1">
+                <a:latin typeface="メイリオ" panose="020B0604030504040204" pitchFamily="50" charset="-128"/>
+                <a:ea typeface="メイリオ" panose="020B0604030504040204" pitchFamily="50" charset="-128"/>
+              </a:rPr>
+              <a:t>要約が出る</a:t>
+            </a:r>
+            <a:endParaRPr lang="ja-JP" altLang="en-US" sz="1050">
+              <a:latin typeface="メイリオ" panose="020B0604030504040204" pitchFamily="50" charset="-128"/>
+              <a:ea typeface="メイリオ" panose="020B0604030504040204" pitchFamily="50" charset="-128"/>
+            </a:endParaRPr>
+          </a:p>
+        </p:txBody>
+      </p:sp>
+      <p:sp>
+        <p:nvSpPr>
+          <p:cNvPr id="72" name="テキスト ボックス 71">
+            <a:extLst>
+              <a:ext uri="{FF2B5EF4-FFF2-40B4-BE49-F238E27FC236}">
+                <a16:creationId xmlns:a16="http://schemas.microsoft.com/office/drawing/2014/main" id="{8BB2B1A4-E2D5-3E66-6720-A967BC70FE45}"/>
+              </a:ext>
+            </a:extLst>
+          </p:cNvPr>
+          <p:cNvSpPr txBox="1"/>
+          <p:nvPr/>
+        </p:nvSpPr>
+        <p:spPr>
+          <a:xfrm>
+            <a:off x="352173" y="3560379"/>
+            <a:ext cx="1036815" cy="346249"/>
+          </a:xfrm>
+          <a:prstGeom prst="rect">
+            <a:avLst/>
+          </a:prstGeom>
+          <a:noFill/>
+        </p:spPr>
+        <p:txBody>
+          <a:bodyPr wrap="square" rtlCol="0">
+            <a:spAutoFit/>
+          </a:bodyPr>
+          <a:lstStyle/>
+          <a:p>
+            <a:pPr algn="ctr">
+              <a:lnSpc>
+                <a:spcPct val="150000"/>
+              </a:lnSpc>
+            </a:pPr>
+            <a:r>
+              <a:rPr lang="ja-JP" altLang="en-US" sz="1200" b="1">
+                <a:latin typeface="メイリオ" panose="020B0604030504040204" pitchFamily="50" charset="-128"/>
+                <a:ea typeface="メイリオ" panose="020B0604030504040204" pitchFamily="50" charset="-128"/>
+              </a:rPr>
+              <a:t>要約して</a:t>
+            </a:r>
+            <a:endParaRPr lang="ja-JP" altLang="en-US" sz="1050">
+              <a:latin typeface="メイリオ" panose="020B0604030504040204" pitchFamily="50" charset="-128"/>
+              <a:ea typeface="メイリオ" panose="020B0604030504040204" pitchFamily="50" charset="-128"/>
+            </a:endParaRPr>
+          </a:p>
+        </p:txBody>
+      </p:sp>
+      <p:sp>
+        <p:nvSpPr>
+          <p:cNvPr id="73" name="テキスト ボックス 72">
+            <a:extLst>
+              <a:ext uri="{FF2B5EF4-FFF2-40B4-BE49-F238E27FC236}">
+                <a16:creationId xmlns:a16="http://schemas.microsoft.com/office/drawing/2014/main" id="{92BE1D5D-0375-DED7-8B60-A22E51A53496}"/>
+              </a:ext>
+            </a:extLst>
+          </p:cNvPr>
+          <p:cNvSpPr txBox="1"/>
+          <p:nvPr/>
+        </p:nvSpPr>
+        <p:spPr>
+          <a:xfrm>
+            <a:off x="806398" y="4520804"/>
+            <a:ext cx="514974" cy="515526"/>
+          </a:xfrm>
+          <a:prstGeom prst="rect">
+            <a:avLst/>
+          </a:prstGeom>
+          <a:noFill/>
+        </p:spPr>
+        <p:txBody>
+          <a:bodyPr wrap="square" rtlCol="0">
+            <a:spAutoFit/>
+          </a:bodyPr>
+          <a:lstStyle/>
+          <a:p>
+            <a:pPr algn="ctr">
+              <a:lnSpc>
+                <a:spcPct val="150000"/>
+              </a:lnSpc>
+            </a:pPr>
+            <a:r>
+              <a:rPr lang="ja-JP" altLang="en-US" sz="2000">
+                <a:latin typeface="メイリオ" panose="020B0604030504040204" pitchFamily="50" charset="-128"/>
+                <a:ea typeface="メイリオ" panose="020B0604030504040204" pitchFamily="50" charset="-128"/>
+              </a:rPr>
+              <a:t>←</a:t>
+            </a:r>
+            <a:endParaRPr lang="ja-JP" altLang="en-US" sz="1600">
+              <a:latin typeface="メイリオ" panose="020B0604030504040204" pitchFamily="50" charset="-128"/>
+              <a:ea typeface="メイリオ" panose="020B0604030504040204" pitchFamily="50" charset="-128"/>
+            </a:endParaRPr>
+          </a:p>
+        </p:txBody>
+      </p:sp>
+      <p:sp>
+        <p:nvSpPr>
+          <p:cNvPr id="74" name="テキスト ボックス 73">
+            <a:extLst>
+              <a:ext uri="{FF2B5EF4-FFF2-40B4-BE49-F238E27FC236}">
+                <a16:creationId xmlns:a16="http://schemas.microsoft.com/office/drawing/2014/main" id="{48E8FEF7-5BAB-1186-A233-759B0F03A6BF}"/>
+              </a:ext>
+            </a:extLst>
+          </p:cNvPr>
+          <p:cNvSpPr txBox="1"/>
+          <p:nvPr/>
+        </p:nvSpPr>
+        <p:spPr>
+          <a:xfrm>
+            <a:off x="2124595" y="4520804"/>
+            <a:ext cx="514974" cy="515526"/>
+          </a:xfrm>
+          <a:prstGeom prst="rect">
+            <a:avLst/>
+          </a:prstGeom>
+          <a:noFill/>
+        </p:spPr>
+        <p:txBody>
+          <a:bodyPr wrap="square" rtlCol="0">
+            <a:spAutoFit/>
+          </a:bodyPr>
+          <a:lstStyle/>
+          <a:p>
+            <a:pPr algn="ctr">
+              <a:lnSpc>
+                <a:spcPct val="150000"/>
+              </a:lnSpc>
+            </a:pPr>
+            <a:r>
+              <a:rPr lang="ja-JP" altLang="en-US" sz="2000">
+                <a:latin typeface="メイリオ" panose="020B0604030504040204" pitchFamily="50" charset="-128"/>
+                <a:ea typeface="メイリオ" panose="020B0604030504040204" pitchFamily="50" charset="-128"/>
+              </a:rPr>
+              <a:t>→</a:t>
+            </a:r>
+            <a:endParaRPr lang="ja-JP" altLang="en-US" sz="1600">
+              <a:latin typeface="メイリオ" panose="020B0604030504040204" pitchFamily="50" charset="-128"/>
+              <a:ea typeface="メイリオ" panose="020B0604030504040204" pitchFamily="50" charset="-128"/>
+            </a:endParaRPr>
+          </a:p>
+        </p:txBody>
+      </p:sp>
+      <p:sp>
+        <p:nvSpPr>
+          <p:cNvPr id="75" name="テキスト ボックス 74">
+            <a:extLst>
+              <a:ext uri="{FF2B5EF4-FFF2-40B4-BE49-F238E27FC236}">
+                <a16:creationId xmlns:a16="http://schemas.microsoft.com/office/drawing/2014/main" id="{AFB8FA0E-5EB3-6F3E-F864-599B722D0AEA}"/>
+              </a:ext>
+            </a:extLst>
+          </p:cNvPr>
+          <p:cNvSpPr txBox="1"/>
+          <p:nvPr/>
+        </p:nvSpPr>
+        <p:spPr>
+          <a:xfrm>
+            <a:off x="898928" y="5065732"/>
+            <a:ext cx="1562505" cy="346249"/>
+          </a:xfrm>
+          <a:prstGeom prst="rect">
+            <a:avLst/>
+          </a:prstGeom>
+          <a:noFill/>
+        </p:spPr>
+        <p:txBody>
+          <a:bodyPr wrap="square" rtlCol="0">
+            <a:spAutoFit/>
+          </a:bodyPr>
+          <a:lstStyle/>
+          <a:p>
+            <a:pPr algn="ctr">
+              <a:lnSpc>
+                <a:spcPct val="150000"/>
+              </a:lnSpc>
+            </a:pPr>
+            <a:r>
+              <a:rPr lang="ja-JP" altLang="en-US" sz="1200" b="1">
+                <a:latin typeface="メイリオ" panose="020B0604030504040204" pitchFamily="50" charset="-128"/>
+                <a:ea typeface="メイリオ" panose="020B0604030504040204" pitchFamily="50" charset="-128"/>
+              </a:rPr>
+              <a:t>人がアクションする</a:t>
+            </a:r>
+            <a:endParaRPr lang="ja-JP" altLang="en-US" sz="1050">
+              <a:latin typeface="メイリオ" panose="020B0604030504040204" pitchFamily="50" charset="-128"/>
+              <a:ea typeface="メイリオ" panose="020B0604030504040204" pitchFamily="50" charset="-128"/>
+            </a:endParaRPr>
+          </a:p>
+        </p:txBody>
+      </p:sp>
+      <p:sp>
+        <p:nvSpPr>
+          <p:cNvPr id="76" name="テキスト ボックス 75">
+            <a:extLst>
+              <a:ext uri="{FF2B5EF4-FFF2-40B4-BE49-F238E27FC236}">
+                <a16:creationId xmlns:a16="http://schemas.microsoft.com/office/drawing/2014/main" id="{A44E206F-6C2D-428F-5E8D-E1B57A1AE7CA}"/>
+              </a:ext>
+            </a:extLst>
+          </p:cNvPr>
+          <p:cNvSpPr txBox="1"/>
+          <p:nvPr/>
+        </p:nvSpPr>
+        <p:spPr>
+          <a:xfrm>
+            <a:off x="1556077" y="4306800"/>
+            <a:ext cx="1562505" cy="303929"/>
+          </a:xfrm>
+          <a:prstGeom prst="rect">
+            <a:avLst/>
+          </a:prstGeom>
+          <a:noFill/>
+        </p:spPr>
+        <p:txBody>
+          <a:bodyPr wrap="square" rtlCol="0">
+            <a:spAutoFit/>
+          </a:bodyPr>
+          <a:lstStyle/>
+          <a:p>
+            <a:pPr algn="ctr">
+              <a:lnSpc>
+                <a:spcPct val="150000"/>
+              </a:lnSpc>
+            </a:pPr>
+            <a:r>
+              <a:rPr lang="ja-JP" altLang="en-US" sz="1000" b="1">
+                <a:latin typeface="メイリオ" panose="020B0604030504040204" pitchFamily="50" charset="-128"/>
+                <a:ea typeface="メイリオ" panose="020B0604030504040204" pitchFamily="50" charset="-128"/>
+              </a:rPr>
+              <a:t>レポート作成</a:t>
+            </a:r>
+            <a:endParaRPr lang="ja-JP" altLang="en-US" sz="800">
+              <a:latin typeface="メイリオ" panose="020B0604030504040204" pitchFamily="50" charset="-128"/>
+              <a:ea typeface="メイリオ" panose="020B0604030504040204" pitchFamily="50" charset="-128"/>
+            </a:endParaRPr>
+          </a:p>
+        </p:txBody>
+      </p:sp>
+      <p:sp>
+        <p:nvSpPr>
+          <p:cNvPr id="77" name="テキスト ボックス 76">
+            <a:extLst>
+              <a:ext uri="{FF2B5EF4-FFF2-40B4-BE49-F238E27FC236}">
+                <a16:creationId xmlns:a16="http://schemas.microsoft.com/office/drawing/2014/main" id="{EEED51B1-95EA-3527-F4BA-15CBD61C90EC}"/>
+              </a:ext>
+            </a:extLst>
+          </p:cNvPr>
+          <p:cNvSpPr txBox="1"/>
+          <p:nvPr/>
+        </p:nvSpPr>
+        <p:spPr>
+          <a:xfrm>
+            <a:off x="298768" y="4306800"/>
+            <a:ext cx="1562505" cy="303929"/>
+          </a:xfrm>
+          <a:prstGeom prst="rect">
+            <a:avLst/>
+          </a:prstGeom>
+          <a:noFill/>
+        </p:spPr>
+        <p:txBody>
+          <a:bodyPr wrap="square" rtlCol="0">
+            <a:spAutoFit/>
+          </a:bodyPr>
+          <a:lstStyle/>
+          <a:p>
+            <a:pPr algn="ctr">
+              <a:lnSpc>
+                <a:spcPct val="150000"/>
+              </a:lnSpc>
+            </a:pPr>
+            <a:r>
+              <a:rPr lang="ja-JP" altLang="en-US" sz="1000" b="1">
+                <a:latin typeface="メイリオ" panose="020B0604030504040204" pitchFamily="50" charset="-128"/>
+                <a:ea typeface="メイリオ" panose="020B0604030504040204" pitchFamily="50" charset="-128"/>
+              </a:rPr>
+              <a:t>メール作成</a:t>
+            </a:r>
+            <a:endParaRPr lang="ja-JP" altLang="en-US" sz="800">
+              <a:latin typeface="メイリオ" panose="020B0604030504040204" pitchFamily="50" charset="-128"/>
+              <a:ea typeface="メイリオ" panose="020B0604030504040204" pitchFamily="50" charset="-128"/>
+            </a:endParaRPr>
+          </a:p>
+        </p:txBody>
+      </p:sp>
+      <p:cxnSp>
+        <p:nvCxnSpPr>
+          <p:cNvPr id="79" name="直線コネクタ 78">
+            <a:extLst>
+              <a:ext uri="{FF2B5EF4-FFF2-40B4-BE49-F238E27FC236}">
+                <a16:creationId xmlns:a16="http://schemas.microsoft.com/office/drawing/2014/main" id="{DCC59298-2515-B33F-4080-794C27EE8A41}"/>
+              </a:ext>
+            </a:extLst>
+          </p:cNvPr>
+          <p:cNvCxnSpPr>
+            <a:cxnSpLocks/>
+          </p:cNvCxnSpPr>
+          <p:nvPr/>
+        </p:nvCxnSpPr>
+        <p:spPr>
+          <a:xfrm>
+            <a:off x="447301" y="5414974"/>
+            <a:ext cx="2448821" cy="0"/>
+          </a:xfrm>
+          <a:prstGeom prst="line">
+            <a:avLst/>
+          </a:prstGeom>
+          <a:ln>
+            <a:solidFill>
+              <a:schemeClr val="bg1">
+                <a:lumMod val="85000"/>
+              </a:schemeClr>
+            </a:solidFill>
+          </a:ln>
+        </p:spPr>
+        <p:style>
+          <a:lnRef idx="2">
+            <a:schemeClr val="accent1"/>
+          </a:lnRef>
+          <a:fillRef idx="0">
+            <a:schemeClr val="accent1"/>
+          </a:fillRef>
+          <a:effectRef idx="1">
+            <a:schemeClr val="accent1"/>
+          </a:effectRef>
+          <a:fontRef idx="minor">
+            <a:schemeClr val="tx1"/>
+          </a:fontRef>
+        </p:style>
+      </p:cxnSp>
+      <p:sp>
+        <p:nvSpPr>
+          <p:cNvPr id="80" name="テキスト ボックス 79">
+            <a:extLst>
+              <a:ext uri="{FF2B5EF4-FFF2-40B4-BE49-F238E27FC236}">
+                <a16:creationId xmlns:a16="http://schemas.microsoft.com/office/drawing/2014/main" id="{ECF92D82-B4B9-77AC-B3D5-34D8C9AD0729}"/>
+              </a:ext>
+            </a:extLst>
+          </p:cNvPr>
+          <p:cNvSpPr txBox="1"/>
+          <p:nvPr/>
+        </p:nvSpPr>
+        <p:spPr>
+          <a:xfrm>
+            <a:off x="447301" y="5634528"/>
+            <a:ext cx="2467741" cy="623248"/>
+          </a:xfrm>
+          <a:prstGeom prst="rect">
+            <a:avLst/>
+          </a:prstGeom>
+          <a:noFill/>
+        </p:spPr>
+        <p:txBody>
+          <a:bodyPr wrap="square" rtlCol="0">
+            <a:spAutoFit/>
+          </a:bodyPr>
+          <a:lstStyle/>
+          <a:p>
+            <a:pPr algn="ctr">
+              <a:lnSpc>
+                <a:spcPct val="150000"/>
+              </a:lnSpc>
+            </a:pPr>
+            <a:r>
+              <a:rPr lang="ja-JP" altLang="en-US" sz="1200" b="1">
+                <a:latin typeface="メイリオ" panose="020B0604030504040204" pitchFamily="50" charset="-128"/>
+                <a:ea typeface="メイリオ" panose="020B0604030504040204" pitchFamily="50" charset="-128"/>
+              </a:rPr>
+              <a:t>参照・生成は強い。実行は人。</a:t>
+            </a:r>
+            <a:endParaRPr lang="en-US" altLang="ja-JP" sz="1200" b="1">
+              <a:latin typeface="メイリオ" panose="020B0604030504040204" pitchFamily="50" charset="-128"/>
+              <a:ea typeface="メイリオ" panose="020B0604030504040204" pitchFamily="50" charset="-128"/>
+            </a:endParaRPr>
+          </a:p>
+          <a:p>
+            <a:pPr algn="ctr">
+              <a:lnSpc>
+                <a:spcPct val="150000"/>
+              </a:lnSpc>
+            </a:pPr>
+            <a:r>
+              <a:rPr lang="en-US" altLang="ja-JP" sz="1200" b="1">
+                <a:latin typeface="メイリオ" panose="020B0604030504040204" pitchFamily="50" charset="-128"/>
+                <a:ea typeface="メイリオ" panose="020B0604030504040204" pitchFamily="50" charset="-128"/>
+              </a:rPr>
+              <a:t>1</a:t>
+            </a:r>
+            <a:r>
+              <a:rPr lang="ja-JP" altLang="en-US" sz="1200" b="1">
+                <a:latin typeface="メイリオ" panose="020B0604030504040204" pitchFamily="50" charset="-128"/>
+                <a:ea typeface="メイリオ" panose="020B0604030504040204" pitchFamily="50" charset="-128"/>
+              </a:rPr>
+              <a:t>つの質問に</a:t>
+            </a:r>
+            <a:r>
+              <a:rPr lang="en-US" altLang="ja-JP" sz="1200" b="1">
+                <a:latin typeface="メイリオ" panose="020B0604030504040204" pitchFamily="50" charset="-128"/>
+                <a:ea typeface="メイリオ" panose="020B0604030504040204" pitchFamily="50" charset="-128"/>
+              </a:rPr>
+              <a:t>1</a:t>
+            </a:r>
+            <a:r>
+              <a:rPr lang="ja-JP" altLang="en-US" sz="1200" b="1">
+                <a:latin typeface="メイリオ" panose="020B0604030504040204" pitchFamily="50" charset="-128"/>
+                <a:ea typeface="メイリオ" panose="020B0604030504040204" pitchFamily="50" charset="-128"/>
+              </a:rPr>
+              <a:t>つの回答</a:t>
+            </a:r>
+            <a:endParaRPr lang="en-US" altLang="ja-JP" sz="1200" b="1">
+              <a:latin typeface="メイリオ" panose="020B0604030504040204" pitchFamily="50" charset="-128"/>
+              <a:ea typeface="メイリオ" panose="020B0604030504040204" pitchFamily="50" charset="-128"/>
+            </a:endParaRPr>
+          </a:p>
+        </p:txBody>
+      </p:sp>
+      <p:pic>
+        <p:nvPicPr>
+          <p:cNvPr id="82" name="図 81">
+            <a:extLst>
+              <a:ext uri="{FF2B5EF4-FFF2-40B4-BE49-F238E27FC236}">
+                <a16:creationId xmlns:a16="http://schemas.microsoft.com/office/drawing/2014/main" id="{57389FDD-15AE-A15F-ECDE-8BFBD595F41B}"/>
+              </a:ext>
+            </a:extLst>
+          </p:cNvPr>
+          <p:cNvPicPr>
+            <a:picLocks noChangeAspect="1"/>
+          </p:cNvPicPr>
+          <p:nvPr/>
+        </p:nvPicPr>
+        <p:blipFill>
+          <a:blip r:embed="rId7">
+            <a:extLst>
+              <a:ext uri="{28A0092B-C50C-407E-A947-70E740481C1C}">
+                <a14:useLocalDpi xmlns:a14="http://schemas.microsoft.com/office/drawing/2010/main" val="0"/>
+              </a:ext>
+            </a:extLst>
+          </a:blip>
+          <a:stretch>
+            <a:fillRect/>
+          </a:stretch>
+        </p:blipFill>
+        <p:spPr>
+          <a:xfrm>
+            <a:off x="4614979" y="2563252"/>
+            <a:ext cx="701807" cy="698858"/>
+          </a:xfrm>
+          <a:prstGeom prst="rect">
+            <a:avLst/>
+          </a:prstGeom>
+        </p:spPr>
+      </p:pic>
+      <p:sp>
+        <p:nvSpPr>
+          <p:cNvPr id="83" name="テキスト ボックス 82">
+            <a:extLst>
+              <a:ext uri="{FF2B5EF4-FFF2-40B4-BE49-F238E27FC236}">
+                <a16:creationId xmlns:a16="http://schemas.microsoft.com/office/drawing/2014/main" id="{3F77FE6E-8B7D-0007-01FA-2427D7BA9BDD}"/>
+              </a:ext>
+            </a:extLst>
+          </p:cNvPr>
+          <p:cNvSpPr txBox="1"/>
+          <p:nvPr/>
+        </p:nvSpPr>
+        <p:spPr>
+          <a:xfrm>
+            <a:off x="3480706" y="3609146"/>
+            <a:ext cx="1571025" cy="799258"/>
+          </a:xfrm>
+          <a:prstGeom prst="rect">
+            <a:avLst/>
+          </a:prstGeom>
+          <a:noFill/>
+        </p:spPr>
+        <p:txBody>
+          <a:bodyPr wrap="square" rtlCol="0">
+            <a:spAutoFit/>
+          </a:bodyPr>
+          <a:lstStyle/>
+          <a:p>
+            <a:pPr algn="ctr">
+              <a:lnSpc>
+                <a:spcPct val="150000"/>
+              </a:lnSpc>
+            </a:pPr>
+            <a:r>
+              <a:rPr lang="ja-JP" altLang="en-US" sz="1050" b="1">
+                <a:latin typeface="メイリオ" panose="020B0604030504040204" pitchFamily="50" charset="-128"/>
+                <a:ea typeface="メイリオ" panose="020B0604030504040204" pitchFamily="50" charset="-128"/>
+              </a:rPr>
+              <a:t>要約して</a:t>
+            </a:r>
+            <a:endParaRPr lang="en-US" altLang="ja-JP" sz="1050" b="1">
+              <a:latin typeface="メイリオ" panose="020B0604030504040204" pitchFamily="50" charset="-128"/>
+              <a:ea typeface="メイリオ" panose="020B0604030504040204" pitchFamily="50" charset="-128"/>
+            </a:endParaRPr>
+          </a:p>
+          <a:p>
+            <a:pPr algn="ctr">
+              <a:lnSpc>
+                <a:spcPct val="150000"/>
+              </a:lnSpc>
+            </a:pPr>
+            <a:r>
+              <a:rPr lang="ja-JP" altLang="en-US" sz="1050" b="1">
+                <a:latin typeface="メイリオ" panose="020B0604030504040204" pitchFamily="50" charset="-128"/>
+                <a:ea typeface="メイリオ" panose="020B0604030504040204" pitchFamily="50" charset="-128"/>
+              </a:rPr>
+              <a:t>レポートにまとめて</a:t>
+            </a:r>
+            <a:endParaRPr lang="en-US" altLang="ja-JP" sz="1050" b="1">
+              <a:latin typeface="メイリオ" panose="020B0604030504040204" pitchFamily="50" charset="-128"/>
+              <a:ea typeface="メイリオ" panose="020B0604030504040204" pitchFamily="50" charset="-128"/>
+            </a:endParaRPr>
+          </a:p>
+          <a:p>
+            <a:pPr algn="ctr">
+              <a:lnSpc>
+                <a:spcPct val="150000"/>
+              </a:lnSpc>
+            </a:pPr>
+            <a:r>
+              <a:rPr lang="ja-JP" altLang="en-US" sz="1050" b="1">
+                <a:latin typeface="メイリオ" panose="020B0604030504040204" pitchFamily="50" charset="-128"/>
+                <a:ea typeface="メイリオ" panose="020B0604030504040204" pitchFamily="50" charset="-128"/>
+              </a:rPr>
+              <a:t>メールで送って</a:t>
+            </a:r>
+            <a:endParaRPr lang="ja-JP" altLang="en-US" sz="900">
+              <a:latin typeface="メイリオ" panose="020B0604030504040204" pitchFamily="50" charset="-128"/>
+              <a:ea typeface="メイリオ" panose="020B0604030504040204" pitchFamily="50" charset="-128"/>
+            </a:endParaRPr>
+          </a:p>
+        </p:txBody>
+      </p:sp>
+      <p:sp>
+        <p:nvSpPr>
+          <p:cNvPr id="85" name="テキスト ボックス 84">
+            <a:extLst>
+              <a:ext uri="{FF2B5EF4-FFF2-40B4-BE49-F238E27FC236}">
+                <a16:creationId xmlns:a16="http://schemas.microsoft.com/office/drawing/2014/main" id="{E0CAA4B6-D17D-B752-C311-BEC2A8FD5AC2}"/>
+              </a:ext>
+            </a:extLst>
+          </p:cNvPr>
+          <p:cNvSpPr txBox="1"/>
+          <p:nvPr/>
+        </p:nvSpPr>
+        <p:spPr>
+          <a:xfrm>
+            <a:off x="4810930" y="3751012"/>
+            <a:ext cx="514974" cy="515526"/>
+          </a:xfrm>
+          <a:prstGeom prst="rect">
+            <a:avLst/>
+          </a:prstGeom>
+          <a:noFill/>
+        </p:spPr>
+        <p:txBody>
+          <a:bodyPr wrap="square" rtlCol="0">
+            <a:spAutoFit/>
+          </a:bodyPr>
+          <a:lstStyle/>
+          <a:p>
+            <a:pPr algn="ctr">
+              <a:lnSpc>
+                <a:spcPct val="150000"/>
+              </a:lnSpc>
+            </a:pPr>
+            <a:r>
+              <a:rPr lang="ja-JP" altLang="en-US" sz="2000">
+                <a:latin typeface="メイリオ" panose="020B0604030504040204" pitchFamily="50" charset="-128"/>
+                <a:ea typeface="メイリオ" panose="020B0604030504040204" pitchFamily="50" charset="-128"/>
+              </a:rPr>
+              <a:t>→</a:t>
+            </a:r>
+            <a:endParaRPr lang="ja-JP" altLang="en-US" sz="1600">
+              <a:latin typeface="メイリオ" panose="020B0604030504040204" pitchFamily="50" charset="-128"/>
+              <a:ea typeface="メイリオ" panose="020B0604030504040204" pitchFamily="50" charset="-128"/>
+            </a:endParaRPr>
+          </a:p>
+        </p:txBody>
+      </p:sp>
+      <p:sp>
+        <p:nvSpPr>
+          <p:cNvPr id="86" name="テキスト ボックス 85">
+            <a:extLst>
+              <a:ext uri="{FF2B5EF4-FFF2-40B4-BE49-F238E27FC236}">
+                <a16:creationId xmlns:a16="http://schemas.microsoft.com/office/drawing/2014/main" id="{6089CEA5-E444-1A4B-3F57-52617C2ECFAE}"/>
+              </a:ext>
+            </a:extLst>
+          </p:cNvPr>
+          <p:cNvSpPr txBox="1"/>
+          <p:nvPr/>
+        </p:nvSpPr>
+        <p:spPr>
+          <a:xfrm>
+            <a:off x="4888551" y="3110974"/>
+            <a:ext cx="1421196" cy="2285241"/>
+          </a:xfrm>
+          <a:prstGeom prst="rect">
+            <a:avLst/>
+          </a:prstGeom>
+          <a:noFill/>
+        </p:spPr>
+        <p:txBody>
+          <a:bodyPr wrap="square" rtlCol="0">
+            <a:spAutoFit/>
+          </a:bodyPr>
+          <a:lstStyle/>
+          <a:p>
+            <a:pPr algn="ctr">
+              <a:lnSpc>
+                <a:spcPct val="150000"/>
+              </a:lnSpc>
+            </a:pPr>
+            <a:r>
+              <a:rPr lang="ja-JP" altLang="en-US" sz="1200" b="1">
+                <a:latin typeface="メイリオ" panose="020B0604030504040204" pitchFamily="50" charset="-128"/>
+                <a:ea typeface="メイリオ" panose="020B0604030504040204" pitchFamily="50" charset="-128"/>
+              </a:rPr>
+              <a:t>要約</a:t>
+            </a:r>
+            <a:endParaRPr lang="en-US" altLang="ja-JP" sz="1200" b="1">
+              <a:latin typeface="メイリオ" panose="020B0604030504040204" pitchFamily="50" charset="-128"/>
+              <a:ea typeface="メイリオ" panose="020B0604030504040204" pitchFamily="50" charset="-128"/>
+            </a:endParaRPr>
+          </a:p>
+          <a:p>
+            <a:pPr algn="ctr">
+              <a:lnSpc>
+                <a:spcPct val="150000"/>
+              </a:lnSpc>
+            </a:pPr>
+            <a:r>
+              <a:rPr lang="ja-JP" altLang="en-US" sz="1200" b="1">
+                <a:latin typeface="メイリオ" panose="020B0604030504040204" pitchFamily="50" charset="-128"/>
+                <a:ea typeface="メイリオ" panose="020B0604030504040204" pitchFamily="50" charset="-128"/>
+              </a:rPr>
+              <a:t>↓</a:t>
+            </a:r>
+            <a:endParaRPr lang="en-US" altLang="ja-JP" sz="1200" b="1">
+              <a:latin typeface="メイリオ" panose="020B0604030504040204" pitchFamily="50" charset="-128"/>
+              <a:ea typeface="メイリオ" panose="020B0604030504040204" pitchFamily="50" charset="-128"/>
+            </a:endParaRPr>
+          </a:p>
+          <a:p>
+            <a:pPr algn="ctr">
+              <a:lnSpc>
+                <a:spcPct val="150000"/>
+              </a:lnSpc>
+            </a:pPr>
+            <a:r>
+              <a:rPr lang="ja-JP" altLang="en-US" sz="1200" b="1">
+                <a:latin typeface="メイリオ" panose="020B0604030504040204" pitchFamily="50" charset="-128"/>
+                <a:ea typeface="メイリオ" panose="020B0604030504040204" pitchFamily="50" charset="-128"/>
+              </a:rPr>
+              <a:t>判断</a:t>
+            </a:r>
+            <a:endParaRPr lang="en-US" altLang="ja-JP" sz="1200" b="1">
+              <a:latin typeface="メイリオ" panose="020B0604030504040204" pitchFamily="50" charset="-128"/>
+              <a:ea typeface="メイリオ" panose="020B0604030504040204" pitchFamily="50" charset="-128"/>
+            </a:endParaRPr>
+          </a:p>
+          <a:p>
+            <a:pPr algn="ctr">
+              <a:lnSpc>
+                <a:spcPct val="150000"/>
+              </a:lnSpc>
+            </a:pPr>
+            <a:r>
+              <a:rPr lang="ja-JP" altLang="en-US" sz="1200" b="1">
+                <a:latin typeface="メイリオ" panose="020B0604030504040204" pitchFamily="50" charset="-128"/>
+                <a:ea typeface="メイリオ" panose="020B0604030504040204" pitchFamily="50" charset="-128"/>
+              </a:rPr>
+              <a:t>↓</a:t>
+            </a:r>
+            <a:endParaRPr lang="en-US" altLang="ja-JP" sz="1200" b="1">
+              <a:latin typeface="メイリオ" panose="020B0604030504040204" pitchFamily="50" charset="-128"/>
+              <a:ea typeface="メイリオ" panose="020B0604030504040204" pitchFamily="50" charset="-128"/>
+            </a:endParaRPr>
+          </a:p>
+          <a:p>
+            <a:pPr algn="ctr">
+              <a:lnSpc>
+                <a:spcPct val="150000"/>
+              </a:lnSpc>
+            </a:pPr>
+            <a:r>
+              <a:rPr lang="ja-JP" altLang="en-US" sz="1200" b="1">
+                <a:latin typeface="メイリオ" panose="020B0604030504040204" pitchFamily="50" charset="-128"/>
+                <a:ea typeface="メイリオ" panose="020B0604030504040204" pitchFamily="50" charset="-128"/>
+              </a:rPr>
+              <a:t>レポート生成</a:t>
+            </a:r>
+            <a:endParaRPr lang="en-US" altLang="ja-JP" sz="1200" b="1">
+              <a:latin typeface="メイリオ" panose="020B0604030504040204" pitchFamily="50" charset="-128"/>
+              <a:ea typeface="メイリオ" panose="020B0604030504040204" pitchFamily="50" charset="-128"/>
+            </a:endParaRPr>
+          </a:p>
+          <a:p>
+            <a:pPr algn="ctr">
+              <a:lnSpc>
+                <a:spcPct val="150000"/>
+              </a:lnSpc>
+            </a:pPr>
+            <a:r>
+              <a:rPr lang="ja-JP" altLang="en-US" sz="1200" b="1">
+                <a:latin typeface="メイリオ" panose="020B0604030504040204" pitchFamily="50" charset="-128"/>
+                <a:ea typeface="メイリオ" panose="020B0604030504040204" pitchFamily="50" charset="-128"/>
+              </a:rPr>
+              <a:t>↓</a:t>
+            </a:r>
+            <a:endParaRPr lang="en-US" altLang="ja-JP" sz="1200" b="1">
+              <a:latin typeface="メイリオ" panose="020B0604030504040204" pitchFamily="50" charset="-128"/>
+              <a:ea typeface="メイリオ" panose="020B0604030504040204" pitchFamily="50" charset="-128"/>
+            </a:endParaRPr>
+          </a:p>
+          <a:p>
+            <a:pPr algn="ctr">
+              <a:lnSpc>
+                <a:spcPct val="150000"/>
+              </a:lnSpc>
+            </a:pPr>
+            <a:r>
+              <a:rPr lang="ja-JP" altLang="en-US" sz="1200" b="1">
+                <a:latin typeface="メイリオ" panose="020B0604030504040204" pitchFamily="50" charset="-128"/>
+                <a:ea typeface="メイリオ" panose="020B0604030504040204" pitchFamily="50" charset="-128"/>
+              </a:rPr>
+              <a:t>メール送信</a:t>
+            </a:r>
+            <a:endParaRPr lang="en-US" altLang="ja-JP" sz="1200" b="1">
+              <a:latin typeface="メイリオ" panose="020B0604030504040204" pitchFamily="50" charset="-128"/>
+              <a:ea typeface="メイリオ" panose="020B0604030504040204" pitchFamily="50" charset="-128"/>
+            </a:endParaRPr>
+          </a:p>
+          <a:p>
+            <a:pPr algn="ctr">
+              <a:lnSpc>
+                <a:spcPct val="150000"/>
+              </a:lnSpc>
+            </a:pPr>
+            <a:r>
+              <a:rPr lang="ja-JP" altLang="en-US" sz="1200" b="1">
+                <a:latin typeface="メイリオ" panose="020B0604030504040204" pitchFamily="50" charset="-128"/>
+                <a:ea typeface="メイリオ" panose="020B0604030504040204" pitchFamily="50" charset="-128"/>
+              </a:rPr>
+              <a:t>（人の承認あり）</a:t>
+            </a:r>
+            <a:endParaRPr lang="en-US" altLang="ja-JP" sz="1200" b="1">
+              <a:latin typeface="メイリオ" panose="020B0604030504040204" pitchFamily="50" charset="-128"/>
+              <a:ea typeface="メイリオ" panose="020B0604030504040204" pitchFamily="50" charset="-128"/>
+            </a:endParaRPr>
+          </a:p>
+        </p:txBody>
+      </p:sp>
+      <p:cxnSp>
+        <p:nvCxnSpPr>
+          <p:cNvPr id="87" name="直線コネクタ 86">
+            <a:extLst>
+              <a:ext uri="{FF2B5EF4-FFF2-40B4-BE49-F238E27FC236}">
+                <a16:creationId xmlns:a16="http://schemas.microsoft.com/office/drawing/2014/main" id="{23593767-313D-A1ED-370E-53FD8069383E}"/>
+              </a:ext>
+            </a:extLst>
+          </p:cNvPr>
+          <p:cNvCxnSpPr>
+            <a:cxnSpLocks/>
+          </p:cNvCxnSpPr>
+          <p:nvPr/>
+        </p:nvCxnSpPr>
+        <p:spPr>
+          <a:xfrm>
+            <a:off x="3741472" y="5414974"/>
+            <a:ext cx="2448821" cy="0"/>
+          </a:xfrm>
+          <a:prstGeom prst="line">
+            <a:avLst/>
+          </a:prstGeom>
+          <a:ln>
+            <a:solidFill>
+              <a:schemeClr val="bg1">
+                <a:lumMod val="85000"/>
+              </a:schemeClr>
+            </a:solidFill>
+          </a:ln>
+        </p:spPr>
+        <p:style>
+          <a:lnRef idx="2">
+            <a:schemeClr val="accent1"/>
+          </a:lnRef>
+          <a:fillRef idx="0">
+            <a:schemeClr val="accent1"/>
+          </a:fillRef>
+          <a:effectRef idx="1">
+            <a:schemeClr val="accent1"/>
+          </a:effectRef>
+          <a:fontRef idx="minor">
+            <a:schemeClr val="tx1"/>
+          </a:fontRef>
+        </p:style>
+      </p:cxnSp>
+      <p:sp>
+        <p:nvSpPr>
+          <p:cNvPr id="88" name="テキスト ボックス 87">
+            <a:extLst>
+              <a:ext uri="{FF2B5EF4-FFF2-40B4-BE49-F238E27FC236}">
+                <a16:creationId xmlns:a16="http://schemas.microsoft.com/office/drawing/2014/main" id="{857FB219-E9DB-850E-E4D1-221F97EBA624}"/>
+              </a:ext>
+            </a:extLst>
+          </p:cNvPr>
+          <p:cNvSpPr txBox="1"/>
+          <p:nvPr/>
+        </p:nvSpPr>
+        <p:spPr>
+          <a:xfrm>
+            <a:off x="3658257" y="5432173"/>
+            <a:ext cx="2615251" cy="1092607"/>
+          </a:xfrm>
+          <a:prstGeom prst="rect">
+            <a:avLst/>
+          </a:prstGeom>
+          <a:noFill/>
+        </p:spPr>
+        <p:txBody>
+          <a:bodyPr wrap="square" rtlCol="0">
+            <a:spAutoFit/>
+          </a:bodyPr>
+          <a:lstStyle/>
+          <a:p>
+            <a:pPr algn="ctr">
+              <a:lnSpc>
+                <a:spcPct val="150000"/>
+              </a:lnSpc>
+            </a:pPr>
+            <a:r>
+              <a:rPr lang="ja-JP" altLang="en-US" sz="1200" b="1">
+                <a:latin typeface="メイリオ" panose="020B0604030504040204" pitchFamily="50" charset="-128"/>
+                <a:ea typeface="メイリオ" panose="020B0604030504040204" pitchFamily="50" charset="-128"/>
+              </a:rPr>
+              <a:t>参照 → 判断 → 実行まで一気通貫</a:t>
+            </a:r>
+            <a:endParaRPr lang="en-US" altLang="ja-JP" sz="1200" b="1">
+              <a:latin typeface="メイリオ" panose="020B0604030504040204" pitchFamily="50" charset="-128"/>
+              <a:ea typeface="メイリオ" panose="020B0604030504040204" pitchFamily="50" charset="-128"/>
+            </a:endParaRPr>
+          </a:p>
+          <a:p>
+            <a:pPr algn="ctr">
+              <a:lnSpc>
+                <a:spcPct val="150000"/>
+              </a:lnSpc>
+            </a:pPr>
+            <a:r>
+              <a:rPr lang="en-US" altLang="ja-JP" sz="1200" b="1">
+                <a:latin typeface="メイリオ" panose="020B0604030504040204" pitchFamily="50" charset="-128"/>
+                <a:ea typeface="メイリオ" panose="020B0604030504040204" pitchFamily="50" charset="-128"/>
+              </a:rPr>
+              <a:t>1</a:t>
+            </a:r>
+            <a:r>
+              <a:rPr lang="ja-JP" altLang="en-US" sz="1200" b="1">
+                <a:latin typeface="メイリオ" panose="020B0604030504040204" pitchFamily="50" charset="-128"/>
+                <a:ea typeface="メイリオ" panose="020B0604030504040204" pitchFamily="50" charset="-128"/>
+              </a:rPr>
+              <a:t>つの</a:t>
+            </a:r>
+            <a:r>
+              <a:rPr lang="ja-JP" altLang="en-US" sz="1200" b="1">
+                <a:solidFill>
+                  <a:schemeClr val="accent6"/>
+                </a:solidFill>
+                <a:latin typeface="メイリオ" panose="020B0604030504040204" pitchFamily="50" charset="-128"/>
+                <a:ea typeface="メイリオ" panose="020B0604030504040204" pitchFamily="50" charset="-128"/>
+              </a:rPr>
+              <a:t>ゴール</a:t>
+            </a:r>
+            <a:r>
+              <a:rPr lang="ja-JP" altLang="en-US" sz="1200" b="1">
+                <a:latin typeface="メイリオ" panose="020B0604030504040204" pitchFamily="50" charset="-128"/>
+                <a:ea typeface="メイリオ" panose="020B0604030504040204" pitchFamily="50" charset="-128"/>
+              </a:rPr>
+              <a:t>に対して</a:t>
+            </a:r>
+            <a:endParaRPr lang="en-US" altLang="ja-JP" sz="1200" b="1">
+              <a:latin typeface="メイリオ" panose="020B0604030504040204" pitchFamily="50" charset="-128"/>
+              <a:ea typeface="メイリオ" panose="020B0604030504040204" pitchFamily="50" charset="-128"/>
+            </a:endParaRPr>
+          </a:p>
+          <a:p>
+            <a:pPr algn="ctr">
+              <a:lnSpc>
+                <a:spcPct val="150000"/>
+              </a:lnSpc>
+            </a:pPr>
+            <a:r>
+              <a:rPr lang="ja-JP" altLang="en-US" sz="1200" b="1">
+                <a:latin typeface="メイリオ" panose="020B0604030504040204" pitchFamily="50" charset="-128"/>
+                <a:ea typeface="メイリオ" panose="020B0604030504040204" pitchFamily="50" charset="-128"/>
+              </a:rPr>
+              <a:t>複数ステップを自立実行</a:t>
+            </a:r>
+            <a:endParaRPr lang="en-US" altLang="ja-JP" sz="1200" b="1">
+              <a:latin typeface="メイリオ" panose="020B0604030504040204" pitchFamily="50" charset="-128"/>
+              <a:ea typeface="メイリオ" panose="020B0604030504040204" pitchFamily="50" charset="-128"/>
+            </a:endParaRPr>
+          </a:p>
+          <a:p>
+            <a:pPr algn="ctr">
+              <a:lnSpc>
+                <a:spcPct val="150000"/>
+              </a:lnSpc>
+            </a:pPr>
+            <a:r>
+              <a:rPr lang="en-US" altLang="ja-JP" sz="800">
+                <a:latin typeface="メイリオ" panose="020B0604030504040204" pitchFamily="50" charset="-128"/>
+                <a:ea typeface="メイリオ" panose="020B0604030504040204" pitchFamily="50" charset="-128"/>
+              </a:rPr>
+              <a:t>※</a:t>
+            </a:r>
+            <a:r>
+              <a:rPr lang="ja-JP" altLang="en-US" sz="800">
+                <a:latin typeface="メイリオ" panose="020B0604030504040204" pitchFamily="50" charset="-128"/>
+                <a:ea typeface="メイリオ" panose="020B0604030504040204" pitchFamily="50" charset="-128"/>
+              </a:rPr>
+              <a:t>進捗確認・変更指示・一時停止はいつでも可能</a:t>
+            </a:r>
+            <a:endParaRPr lang="en-US" altLang="ja-JP" sz="800">
+              <a:latin typeface="メイリオ" panose="020B0604030504040204" pitchFamily="50" charset="-128"/>
+              <a:ea typeface="メイリオ" panose="020B0604030504040204" pitchFamily="50" charset="-128"/>
+            </a:endParaRPr>
+          </a:p>
+        </p:txBody>
+      </p:sp>
+      <p:sp>
+        <p:nvSpPr>
+          <p:cNvPr id="90" name="正方形/長方形 89">
+            <a:extLst>
+              <a:ext uri="{FF2B5EF4-FFF2-40B4-BE49-F238E27FC236}">
+                <a16:creationId xmlns:a16="http://schemas.microsoft.com/office/drawing/2014/main" id="{6364F1EE-BB86-7402-21C0-1B8F03730AC0}"/>
+              </a:ext>
+            </a:extLst>
+          </p:cNvPr>
+          <p:cNvSpPr/>
+          <p:nvPr/>
+        </p:nvSpPr>
+        <p:spPr>
+          <a:xfrm>
+            <a:off x="6613337" y="1708163"/>
+            <a:ext cx="5296551" cy="340403"/>
+          </a:xfrm>
+          <a:prstGeom prst="rect">
+            <a:avLst/>
+          </a:prstGeom>
+          <a:solidFill>
+            <a:srgbClr val="002060"/>
+          </a:solidFill>
+          <a:ln>
+            <a:solidFill>
+              <a:srgbClr val="002060"/>
+            </a:solidFill>
+          </a:ln>
+        </p:spPr>
+        <p:style>
+          <a:lnRef idx="2">
+            <a:schemeClr val="accent1">
+              <a:shade val="15000"/>
+            </a:schemeClr>
+          </a:lnRef>
+          <a:fillRef idx="1">
+            <a:schemeClr val="accent1"/>
+          </a:fillRef>
+          <a:effectRef idx="0">
+            <a:schemeClr val="accent1"/>
+          </a:effectRef>
+          <a:fontRef idx="minor">
+            <a:schemeClr val="lt1"/>
+          </a:fontRef>
+        </p:style>
+        <p:txBody>
+          <a:bodyPr rtlCol="0" anchor="ctr"/>
+          <a:lstStyle/>
+          <a:p>
+            <a:pPr algn="ctr">
+              <a:defRPr sz="1500" b="1">
+                <a:solidFill>
+                  <a:srgbClr val="FFFFFF"/>
+                </a:solidFill>
+                <a:latin typeface="メイリオ"/>
+              </a:defRPr>
+            </a:pPr>
+            <a:r>
+              <a:rPr lang="en-US" altLang="ja-JP" sz="1600">
+                <a:latin typeface="メイリオ" panose="020B0604030504040204" pitchFamily="50" charset="-128"/>
+                <a:ea typeface="メイリオ" panose="020B0604030504040204" pitchFamily="50" charset="-128"/>
+              </a:rPr>
+              <a:t>Cowork</a:t>
+            </a:r>
+            <a:r>
+              <a:rPr lang="ja-JP" altLang="en-US" sz="1600">
+                <a:latin typeface="メイリオ" panose="020B0604030504040204" pitchFamily="50" charset="-128"/>
+                <a:ea typeface="メイリオ" panose="020B0604030504040204" pitchFamily="50" charset="-128"/>
+              </a:rPr>
+              <a:t>の時系列</a:t>
+            </a:r>
+          </a:p>
+        </p:txBody>
+      </p:sp>
+      <p:sp>
+        <p:nvSpPr>
+          <p:cNvPr id="91" name="正方形/長方形 90">
+            <a:extLst>
+              <a:ext uri="{FF2B5EF4-FFF2-40B4-BE49-F238E27FC236}">
+                <a16:creationId xmlns:a16="http://schemas.microsoft.com/office/drawing/2014/main" id="{6A2B858B-1CEB-9FCD-BE8A-9A68AB0DE331}"/>
+              </a:ext>
+            </a:extLst>
+          </p:cNvPr>
+          <p:cNvSpPr/>
+          <p:nvPr/>
+        </p:nvSpPr>
+        <p:spPr>
+          <a:xfrm>
+            <a:off x="6608549" y="2049364"/>
+            <a:ext cx="5296551" cy="2870506"/>
+          </a:xfrm>
+          <a:prstGeom prst="rect">
+            <a:avLst/>
+          </a:prstGeom>
+          <a:noFill/>
+          <a:ln>
+            <a:solidFill>
+              <a:srgbClr val="002060"/>
+            </a:solidFill>
+          </a:ln>
+        </p:spPr>
+        <p:style>
+          <a:lnRef idx="2">
+            <a:schemeClr val="accent1">
+              <a:shade val="15000"/>
+            </a:schemeClr>
+          </a:lnRef>
+          <a:fillRef idx="1">
+            <a:schemeClr val="accent1"/>
+          </a:fillRef>
+          <a:effectRef idx="0">
+            <a:schemeClr val="accent1"/>
+          </a:effectRef>
+          <a:fontRef idx="minor">
+            <a:schemeClr val="lt1"/>
+          </a:fontRef>
+        </p:style>
+        <p:txBody>
+          <a:bodyPr rtlCol="0" anchor="ctr"/>
+          <a:lstStyle/>
+          <a:p>
+            <a:pPr algn="ctr"/>
+            <a:endParaRPr kumimoji="1" lang="ja-JP" altLang="en-US">
+              <a:latin typeface="メイリオ" panose="020B0604030504040204" pitchFamily="50" charset="-128"/>
+              <a:ea typeface="メイリオ" panose="020B0604030504040204" pitchFamily="50" charset="-128"/>
+            </a:endParaRPr>
+          </a:p>
+        </p:txBody>
+      </p:sp>
+      <p:sp>
+        <p:nvSpPr>
+          <p:cNvPr id="92" name="テキスト ボックス 91">
+            <a:extLst>
+              <a:ext uri="{FF2B5EF4-FFF2-40B4-BE49-F238E27FC236}">
+                <a16:creationId xmlns:a16="http://schemas.microsoft.com/office/drawing/2014/main" id="{B0D037EC-EC46-1513-8267-F771DB1A495C}"/>
+              </a:ext>
+            </a:extLst>
+          </p:cNvPr>
+          <p:cNvSpPr txBox="1"/>
+          <p:nvPr/>
+        </p:nvSpPr>
+        <p:spPr>
+          <a:xfrm>
+            <a:off x="7372198" y="2182057"/>
+            <a:ext cx="4482542" cy="738664"/>
+          </a:xfrm>
+          <a:prstGeom prst="rect">
+            <a:avLst/>
+          </a:prstGeom>
+          <a:noFill/>
+        </p:spPr>
+        <p:txBody>
+          <a:bodyPr wrap="square" rtlCol="0">
+            <a:spAutoFit/>
+          </a:bodyPr>
+          <a:lstStyle/>
+          <a:p>
+            <a:r>
+              <a:rPr lang="en-US" altLang="ja-JP" sz="1400">
+                <a:latin typeface="メイリオ" panose="020B0604030504040204" pitchFamily="50" charset="-128"/>
+                <a:ea typeface="メイリオ" panose="020B0604030504040204" pitchFamily="50" charset="-128"/>
+              </a:rPr>
+              <a:t>Anthropic</a:t>
+            </a:r>
+            <a:r>
+              <a:rPr lang="ja-JP" altLang="en-US" sz="1400">
+                <a:latin typeface="メイリオ" panose="020B0604030504040204" pitchFamily="50" charset="-128"/>
+                <a:ea typeface="メイリオ" panose="020B0604030504040204" pitchFamily="50" charset="-128"/>
+              </a:rPr>
+              <a:t>、</a:t>
+            </a:r>
+            <a:r>
+              <a:rPr lang="en-US" altLang="ja-JP" sz="1400" b="1">
+                <a:solidFill>
+                  <a:schemeClr val="accent2">
+                    <a:lumMod val="75000"/>
+                  </a:schemeClr>
+                </a:solidFill>
+                <a:latin typeface="メイリオ" panose="020B0604030504040204" pitchFamily="50" charset="-128"/>
+                <a:ea typeface="メイリオ" panose="020B0604030504040204" pitchFamily="50" charset="-128"/>
+              </a:rPr>
+              <a:t>Claude Cowork</a:t>
+            </a:r>
+            <a:r>
+              <a:rPr lang="ja-JP" altLang="en-US" sz="1400">
+                <a:latin typeface="メイリオ" panose="020B0604030504040204" pitchFamily="50" charset="-128"/>
+                <a:ea typeface="メイリオ" panose="020B0604030504040204" pitchFamily="50" charset="-128"/>
+              </a:rPr>
+              <a:t>を発表。</a:t>
+            </a:r>
+            <a:endParaRPr lang="en-US" altLang="ja-JP" sz="1400">
+              <a:latin typeface="メイリオ" panose="020B0604030504040204" pitchFamily="50" charset="-128"/>
+              <a:ea typeface="メイリオ" panose="020B0604030504040204" pitchFamily="50" charset="-128"/>
+            </a:endParaRPr>
+          </a:p>
+          <a:p>
+            <a:r>
+              <a:rPr kumimoji="1" lang="en-US" altLang="ja-JP" sz="1400">
+                <a:latin typeface="メイリオ" panose="020B0604030504040204" pitchFamily="50" charset="-128"/>
+                <a:ea typeface="メイリオ" panose="020B0604030504040204" pitchFamily="50" charset="-128"/>
+              </a:rPr>
+              <a:t>Claude Code</a:t>
+            </a:r>
+            <a:r>
+              <a:rPr kumimoji="1" lang="ja-JP" altLang="en-US" sz="1400">
+                <a:latin typeface="メイリオ" panose="020B0604030504040204" pitchFamily="50" charset="-128"/>
+                <a:ea typeface="メイリオ" panose="020B0604030504040204" pitchFamily="50" charset="-128"/>
+              </a:rPr>
+              <a:t>（開発者向け）の非エンジニア版。</a:t>
+            </a:r>
+            <a:endParaRPr kumimoji="1" lang="en-US" altLang="ja-JP" sz="1400">
+              <a:latin typeface="メイリオ" panose="020B0604030504040204" pitchFamily="50" charset="-128"/>
+              <a:ea typeface="メイリオ" panose="020B0604030504040204" pitchFamily="50" charset="-128"/>
+            </a:endParaRPr>
+          </a:p>
+          <a:p>
+            <a:r>
+              <a:rPr lang="ja-JP" altLang="en-US" sz="1400">
+                <a:latin typeface="メイリオ" panose="020B0604030504040204" pitchFamily="50" charset="-128"/>
+                <a:ea typeface="メイリオ" panose="020B0604030504040204" pitchFamily="50" charset="-128"/>
+              </a:rPr>
+              <a:t>ローカル</a:t>
+            </a:r>
+            <a:r>
+              <a:rPr lang="en-US" altLang="ja-JP" sz="1400">
+                <a:latin typeface="メイリオ" panose="020B0604030504040204" pitchFamily="50" charset="-128"/>
+                <a:ea typeface="メイリオ" panose="020B0604030504040204" pitchFamily="50" charset="-128"/>
+              </a:rPr>
+              <a:t>PC</a:t>
+            </a:r>
+            <a:r>
+              <a:rPr lang="ja-JP" altLang="en-US" sz="1400">
+                <a:latin typeface="メイリオ" panose="020B0604030504040204" pitchFamily="50" charset="-128"/>
+                <a:ea typeface="メイリオ" panose="020B0604030504040204" pitchFamily="50" charset="-128"/>
+              </a:rPr>
+              <a:t>で自律的にタスクを実行。</a:t>
+            </a:r>
+            <a:endParaRPr kumimoji="1" lang="en-US" altLang="ja-JP" sz="1400">
+              <a:latin typeface="メイリオ" panose="020B0604030504040204" pitchFamily="50" charset="-128"/>
+              <a:ea typeface="メイリオ" panose="020B0604030504040204" pitchFamily="50" charset="-128"/>
+            </a:endParaRPr>
+          </a:p>
+        </p:txBody>
+      </p:sp>
+      <p:cxnSp>
+        <p:nvCxnSpPr>
+          <p:cNvPr id="93" name="直線コネクタ 92">
+            <a:extLst>
+              <a:ext uri="{FF2B5EF4-FFF2-40B4-BE49-F238E27FC236}">
+                <a16:creationId xmlns:a16="http://schemas.microsoft.com/office/drawing/2014/main" id="{C424FD1D-038E-005B-C74E-C1CA7F4FDE66}"/>
+              </a:ext>
+            </a:extLst>
+          </p:cNvPr>
+          <p:cNvCxnSpPr>
+            <a:cxnSpLocks/>
+          </p:cNvCxnSpPr>
+          <p:nvPr/>
+        </p:nvCxnSpPr>
+        <p:spPr>
+          <a:xfrm>
+            <a:off x="7238034" y="2182057"/>
+            <a:ext cx="0" cy="2644350"/>
+          </a:xfrm>
+          <a:prstGeom prst="line">
+            <a:avLst/>
+          </a:prstGeom>
+          <a:ln>
+            <a:solidFill>
+              <a:schemeClr val="accent1"/>
+            </a:solidFill>
+            <a:prstDash val="solid"/>
+          </a:ln>
+        </p:spPr>
+        <p:style>
+          <a:lnRef idx="2">
+            <a:schemeClr val="accent1"/>
+          </a:lnRef>
+          <a:fillRef idx="0">
+            <a:schemeClr val="accent1"/>
+          </a:fillRef>
+          <a:effectRef idx="1">
+            <a:schemeClr val="accent1"/>
+          </a:effectRef>
+          <a:fontRef idx="minor">
+            <a:schemeClr val="tx1"/>
+          </a:fontRef>
+        </p:style>
+      </p:cxnSp>
+      <p:grpSp>
+        <p:nvGrpSpPr>
+          <p:cNvPr id="106" name="グループ化 105">
+            <a:extLst>
+              <a:ext uri="{FF2B5EF4-FFF2-40B4-BE49-F238E27FC236}">
+                <a16:creationId xmlns:a16="http://schemas.microsoft.com/office/drawing/2014/main" id="{0D8842BA-F0DD-29D3-59B6-D7CBF565C3F4}"/>
+              </a:ext>
+            </a:extLst>
+          </p:cNvPr>
+          <p:cNvGrpSpPr/>
+          <p:nvPr/>
+        </p:nvGrpSpPr>
+        <p:grpSpPr>
+          <a:xfrm>
+            <a:off x="6591863" y="2424752"/>
+            <a:ext cx="760766" cy="276999"/>
+            <a:chOff x="6658626" y="2424752"/>
+            <a:chExt cx="760766" cy="276999"/>
+          </a:xfrm>
+        </p:grpSpPr>
+        <p:sp>
+          <p:nvSpPr>
+            <p:cNvPr id="98" name="楕円 97">
+              <a:extLst>
+                <a:ext uri="{FF2B5EF4-FFF2-40B4-BE49-F238E27FC236}">
+                  <a16:creationId xmlns:a16="http://schemas.microsoft.com/office/drawing/2014/main" id="{5296E8DF-B3E9-2F22-5625-7A24A970830B}"/>
+                </a:ext>
+              </a:extLst>
+            </p:cNvPr>
+            <p:cNvSpPr/>
+            <p:nvPr/>
+          </p:nvSpPr>
+          <p:spPr>
+            <a:xfrm>
+              <a:off x="7190203" y="2436535"/>
+              <a:ext cx="229189" cy="215947"/>
+            </a:xfrm>
+            <a:prstGeom prst="ellipse">
+              <a:avLst/>
+            </a:prstGeom>
+            <a:ln>
+              <a:noFill/>
+            </a:ln>
+          </p:spPr>
+          <p:style>
+            <a:lnRef idx="2">
+              <a:schemeClr val="accent1">
+                <a:shade val="15000"/>
+              </a:schemeClr>
+            </a:lnRef>
+            <a:fillRef idx="1">
+              <a:schemeClr val="accent1"/>
+            </a:fillRef>
+            <a:effectRef idx="0">
+              <a:schemeClr val="accent1"/>
+            </a:effectRef>
+            <a:fontRef idx="minor">
+              <a:schemeClr val="lt1"/>
+            </a:fontRef>
+          </p:style>
+          <p:txBody>
+            <a:bodyPr rtlCol="0" anchor="ctr"/>
+            <a:lstStyle/>
+            <a:p>
+              <a:pPr algn="ctr"/>
+              <a:endParaRPr kumimoji="1" lang="ja-JP" altLang="en-US"/>
+            </a:p>
+          </p:txBody>
+        </p:sp>
+        <p:sp>
+          <p:nvSpPr>
+            <p:cNvPr id="99" name="テキスト ボックス 98">
+              <a:extLst>
+                <a:ext uri="{FF2B5EF4-FFF2-40B4-BE49-F238E27FC236}">
+                  <a16:creationId xmlns:a16="http://schemas.microsoft.com/office/drawing/2014/main" id="{05ADA287-3DDC-EB3E-7BF1-C14C43AAA075}"/>
+                </a:ext>
+              </a:extLst>
+            </p:cNvPr>
+            <p:cNvSpPr txBox="1"/>
+            <p:nvPr/>
+          </p:nvSpPr>
+          <p:spPr>
+            <a:xfrm>
+              <a:off x="6658626" y="2424752"/>
+              <a:ext cx="641383" cy="276999"/>
+            </a:xfrm>
+            <a:prstGeom prst="rect">
+              <a:avLst/>
+            </a:prstGeom>
+            <a:noFill/>
+          </p:spPr>
+          <p:txBody>
+            <a:bodyPr wrap="square" rtlCol="0">
+              <a:spAutoFit/>
+            </a:bodyPr>
+            <a:lstStyle/>
+            <a:p>
+              <a:r>
+                <a:rPr lang="en-US" altLang="ja-JP" sz="1200">
+                  <a:latin typeface="メイリオ" panose="020B0604030504040204" pitchFamily="50" charset="-128"/>
+                  <a:ea typeface="メイリオ" panose="020B0604030504040204" pitchFamily="50" charset="-128"/>
+                </a:rPr>
+                <a:t>1/12</a:t>
+              </a:r>
+              <a:endParaRPr kumimoji="1" lang="en-US" altLang="ja-JP" sz="1200">
+                <a:latin typeface="メイリオ" panose="020B0604030504040204" pitchFamily="50" charset="-128"/>
+                <a:ea typeface="メイリオ" panose="020B0604030504040204" pitchFamily="50" charset="-128"/>
+              </a:endParaRPr>
+            </a:p>
+          </p:txBody>
+        </p:sp>
+      </p:grpSp>
+      <p:pic>
+        <p:nvPicPr>
+          <p:cNvPr id="101" name="図 100">
+            <a:extLst>
+              <a:ext uri="{FF2B5EF4-FFF2-40B4-BE49-F238E27FC236}">
+                <a16:creationId xmlns:a16="http://schemas.microsoft.com/office/drawing/2014/main" id="{5DF7F067-0CAD-8E63-FACD-C2385771BBB7}"/>
+              </a:ext>
+            </a:extLst>
+          </p:cNvPr>
+          <p:cNvPicPr>
+            <a:picLocks noChangeAspect="1"/>
+          </p:cNvPicPr>
+          <p:nvPr/>
+        </p:nvPicPr>
+        <p:blipFill>
+          <a:blip r:embed="rId8">
+            <a:extLst>
+              <a:ext uri="{28A0092B-C50C-407E-A947-70E740481C1C}">
+                <a14:useLocalDpi xmlns:a14="http://schemas.microsoft.com/office/drawing/2010/main" val="0"/>
+              </a:ext>
+            </a:extLst>
+          </a:blip>
+          <a:stretch>
+            <a:fillRect/>
+          </a:stretch>
+        </p:blipFill>
+        <p:spPr>
+          <a:xfrm>
+            <a:off x="11295576" y="2258489"/>
+            <a:ext cx="609524" cy="609524"/>
+          </a:xfrm>
+          <a:prstGeom prst="rect">
+            <a:avLst/>
+          </a:prstGeom>
+        </p:spPr>
+      </p:pic>
+      <p:sp>
+        <p:nvSpPr>
+          <p:cNvPr id="102" name="テキスト ボックス 101">
+            <a:extLst>
+              <a:ext uri="{FF2B5EF4-FFF2-40B4-BE49-F238E27FC236}">
+                <a16:creationId xmlns:a16="http://schemas.microsoft.com/office/drawing/2014/main" id="{C97A852E-5B60-93B8-3BB0-7217904852F3}"/>
+              </a:ext>
+            </a:extLst>
+          </p:cNvPr>
+          <p:cNvSpPr txBox="1"/>
+          <p:nvPr/>
+        </p:nvSpPr>
+        <p:spPr>
+          <a:xfrm>
+            <a:off x="7372198" y="2981539"/>
+            <a:ext cx="4482542" cy="523220"/>
+          </a:xfrm>
+          <a:prstGeom prst="rect">
+            <a:avLst/>
+          </a:prstGeom>
+          <a:noFill/>
+        </p:spPr>
+        <p:txBody>
+          <a:bodyPr wrap="square" rtlCol="0">
+            <a:spAutoFit/>
+          </a:bodyPr>
+          <a:lstStyle/>
+          <a:p>
+            <a:r>
+              <a:rPr lang="en-US" altLang="ja-JP" sz="1400">
+                <a:latin typeface="メイリオ" panose="020B0604030504040204" pitchFamily="50" charset="-128"/>
+                <a:ea typeface="メイリオ" panose="020B0604030504040204" pitchFamily="50" charset="-128"/>
+              </a:rPr>
+              <a:t>Microsoft</a:t>
+            </a:r>
+            <a:r>
+              <a:rPr lang="ja-JP" altLang="en-US" sz="1400">
+                <a:latin typeface="メイリオ" panose="020B0604030504040204" pitchFamily="50" charset="-128"/>
+                <a:ea typeface="メイリオ" panose="020B0604030504040204" pitchFamily="50" charset="-128"/>
+              </a:rPr>
+              <a:t>、</a:t>
+            </a:r>
+            <a:r>
+              <a:rPr lang="en-US" altLang="ja-JP" sz="1400" b="1">
+                <a:solidFill>
+                  <a:schemeClr val="accent6"/>
+                </a:solidFill>
+                <a:latin typeface="メイリオ" panose="020B0604030504040204" pitchFamily="50" charset="-128"/>
+                <a:ea typeface="メイリオ" panose="020B0604030504040204" pitchFamily="50" charset="-128"/>
+              </a:rPr>
+              <a:t>Copilot Cowork</a:t>
+            </a:r>
+            <a:r>
+              <a:rPr lang="ja-JP" altLang="en-US" sz="1400">
+                <a:latin typeface="メイリオ" panose="020B0604030504040204" pitchFamily="50" charset="-128"/>
+                <a:ea typeface="メイリオ" panose="020B0604030504040204" pitchFamily="50" charset="-128"/>
+              </a:rPr>
+              <a:t>発表</a:t>
+            </a:r>
+            <a:endParaRPr lang="en-US" altLang="ja-JP" sz="1400">
+              <a:latin typeface="メイリオ" panose="020B0604030504040204" pitchFamily="50" charset="-128"/>
+              <a:ea typeface="メイリオ" panose="020B0604030504040204" pitchFamily="50" charset="-128"/>
+            </a:endParaRPr>
+          </a:p>
+          <a:p>
+            <a:r>
+              <a:rPr kumimoji="1" lang="ja-JP" altLang="en-US" sz="1400">
+                <a:latin typeface="メイリオ" panose="020B0604030504040204" pitchFamily="50" charset="-128"/>
+                <a:ea typeface="メイリオ" panose="020B0604030504040204" pitchFamily="50" charset="-128"/>
+              </a:rPr>
+              <a:t>（</a:t>
+            </a:r>
+            <a:r>
+              <a:rPr kumimoji="1" lang="en-US" altLang="ja-JP" sz="1400">
+                <a:latin typeface="メイリオ" panose="020B0604030504040204" pitchFamily="50" charset="-128"/>
+                <a:ea typeface="メイリオ" panose="020B0604030504040204" pitchFamily="50" charset="-128"/>
+              </a:rPr>
+              <a:t>Research Preview</a:t>
+            </a:r>
+            <a:r>
+              <a:rPr kumimoji="1" lang="ja-JP" altLang="en-US" sz="1400">
+                <a:latin typeface="メイリオ" panose="020B0604030504040204" pitchFamily="50" charset="-128"/>
+                <a:ea typeface="メイリオ" panose="020B0604030504040204" pitchFamily="50" charset="-128"/>
+              </a:rPr>
+              <a:t>）</a:t>
+            </a:r>
+            <a:endParaRPr kumimoji="1" lang="en-US" altLang="ja-JP" sz="1400">
+              <a:latin typeface="メイリオ" panose="020B0604030504040204" pitchFamily="50" charset="-128"/>
+              <a:ea typeface="メイリオ" panose="020B0604030504040204" pitchFamily="50" charset="-128"/>
+            </a:endParaRPr>
+          </a:p>
+        </p:txBody>
+      </p:sp>
+      <p:grpSp>
+        <p:nvGrpSpPr>
+          <p:cNvPr id="105" name="グループ化 104">
+            <a:extLst>
+              <a:ext uri="{FF2B5EF4-FFF2-40B4-BE49-F238E27FC236}">
+                <a16:creationId xmlns:a16="http://schemas.microsoft.com/office/drawing/2014/main" id="{A4C1FB66-A5A6-B701-A4EB-DB4E9E31FF34}"/>
+              </a:ext>
+            </a:extLst>
+          </p:cNvPr>
+          <p:cNvGrpSpPr/>
+          <p:nvPr/>
+        </p:nvGrpSpPr>
+        <p:grpSpPr>
+          <a:xfrm>
+            <a:off x="6562815" y="3077139"/>
+            <a:ext cx="789814" cy="276999"/>
+            <a:chOff x="6781978" y="2577152"/>
+            <a:chExt cx="789814" cy="276999"/>
+          </a:xfrm>
+        </p:grpSpPr>
+        <p:sp>
+          <p:nvSpPr>
+            <p:cNvPr id="103" name="楕円 102">
+              <a:extLst>
+                <a:ext uri="{FF2B5EF4-FFF2-40B4-BE49-F238E27FC236}">
+                  <a16:creationId xmlns:a16="http://schemas.microsoft.com/office/drawing/2014/main" id="{974C2211-97C5-020D-D7D8-0D01D072B19C}"/>
+                </a:ext>
+              </a:extLst>
+            </p:cNvPr>
+            <p:cNvSpPr/>
+            <p:nvPr/>
+          </p:nvSpPr>
+          <p:spPr>
+            <a:xfrm>
+              <a:off x="7342603" y="2588935"/>
+              <a:ext cx="229189" cy="215947"/>
+            </a:xfrm>
+            <a:prstGeom prst="ellipse">
+              <a:avLst/>
+            </a:prstGeom>
+            <a:ln>
+              <a:noFill/>
+            </a:ln>
+          </p:spPr>
+          <p:style>
+            <a:lnRef idx="2">
+              <a:schemeClr val="accent1">
+                <a:shade val="15000"/>
+              </a:schemeClr>
+            </a:lnRef>
+            <a:fillRef idx="1">
+              <a:schemeClr val="accent1"/>
+            </a:fillRef>
+            <a:effectRef idx="0">
+              <a:schemeClr val="accent1"/>
+            </a:effectRef>
+            <a:fontRef idx="minor">
+              <a:schemeClr val="lt1"/>
+            </a:fontRef>
+          </p:style>
+          <p:txBody>
+            <a:bodyPr rtlCol="0" anchor="ctr"/>
+            <a:lstStyle/>
+            <a:p>
+              <a:pPr algn="ctr"/>
+              <a:endParaRPr kumimoji="1" lang="ja-JP" altLang="en-US"/>
+            </a:p>
+          </p:txBody>
+        </p:sp>
+        <p:sp>
+          <p:nvSpPr>
+            <p:cNvPr id="104" name="テキスト ボックス 103">
+              <a:extLst>
+                <a:ext uri="{FF2B5EF4-FFF2-40B4-BE49-F238E27FC236}">
+                  <a16:creationId xmlns:a16="http://schemas.microsoft.com/office/drawing/2014/main" id="{AB52FDB6-75C6-5122-81CC-3D401EC91FFC}"/>
+                </a:ext>
+              </a:extLst>
+            </p:cNvPr>
+            <p:cNvSpPr txBox="1"/>
+            <p:nvPr/>
+          </p:nvSpPr>
+          <p:spPr>
+            <a:xfrm>
+              <a:off x="6781978" y="2577152"/>
+              <a:ext cx="641383" cy="276999"/>
+            </a:xfrm>
+            <a:prstGeom prst="rect">
+              <a:avLst/>
+            </a:prstGeom>
+            <a:noFill/>
+          </p:spPr>
+          <p:txBody>
+            <a:bodyPr wrap="square" rtlCol="0">
+              <a:spAutoFit/>
+            </a:bodyPr>
+            <a:lstStyle/>
+            <a:p>
+              <a:pPr algn="ctr"/>
+              <a:r>
+                <a:rPr lang="en-US" altLang="ja-JP" sz="1200">
+                  <a:latin typeface="メイリオ" panose="020B0604030504040204" pitchFamily="50" charset="-128"/>
+                  <a:ea typeface="メイリオ" panose="020B0604030504040204" pitchFamily="50" charset="-128"/>
+                </a:rPr>
+                <a:t>3/9</a:t>
+              </a:r>
+              <a:endParaRPr kumimoji="1" lang="en-US" altLang="ja-JP" sz="1200">
+                <a:latin typeface="メイリオ" panose="020B0604030504040204" pitchFamily="50" charset="-128"/>
+                <a:ea typeface="メイリオ" panose="020B0604030504040204" pitchFamily="50" charset="-128"/>
+              </a:endParaRPr>
+            </a:p>
+          </p:txBody>
+        </p:sp>
+      </p:grpSp>
+      <p:grpSp>
+        <p:nvGrpSpPr>
+          <p:cNvPr id="107" name="グループ化 106">
+            <a:extLst>
+              <a:ext uri="{FF2B5EF4-FFF2-40B4-BE49-F238E27FC236}">
+                <a16:creationId xmlns:a16="http://schemas.microsoft.com/office/drawing/2014/main" id="{54F93785-AF37-A7EB-1DEB-70BB4E067B46}"/>
+              </a:ext>
+            </a:extLst>
+          </p:cNvPr>
+          <p:cNvGrpSpPr/>
+          <p:nvPr/>
+        </p:nvGrpSpPr>
+        <p:grpSpPr>
+          <a:xfrm>
+            <a:off x="6591863" y="3701146"/>
+            <a:ext cx="760766" cy="276999"/>
+            <a:chOff x="6811026" y="2577152"/>
+            <a:chExt cx="760766" cy="276999"/>
+          </a:xfrm>
+        </p:grpSpPr>
+        <p:sp>
+          <p:nvSpPr>
+            <p:cNvPr id="108" name="楕円 107">
+              <a:extLst>
+                <a:ext uri="{FF2B5EF4-FFF2-40B4-BE49-F238E27FC236}">
+                  <a16:creationId xmlns:a16="http://schemas.microsoft.com/office/drawing/2014/main" id="{95210C44-66C3-1202-2F4F-FE61100FB6A4}"/>
+                </a:ext>
+              </a:extLst>
+            </p:cNvPr>
+            <p:cNvSpPr/>
+            <p:nvPr/>
+          </p:nvSpPr>
+          <p:spPr>
+            <a:xfrm>
+              <a:off x="7342603" y="2588935"/>
+              <a:ext cx="229189" cy="215947"/>
+            </a:xfrm>
+            <a:prstGeom prst="ellipse">
+              <a:avLst/>
+            </a:prstGeom>
+            <a:ln>
+              <a:noFill/>
+            </a:ln>
+          </p:spPr>
+          <p:style>
+            <a:lnRef idx="2">
+              <a:schemeClr val="accent1">
+                <a:shade val="15000"/>
+              </a:schemeClr>
+            </a:lnRef>
+            <a:fillRef idx="1">
+              <a:schemeClr val="accent1"/>
+            </a:fillRef>
+            <a:effectRef idx="0">
+              <a:schemeClr val="accent1"/>
+            </a:effectRef>
+            <a:fontRef idx="minor">
+              <a:schemeClr val="lt1"/>
+            </a:fontRef>
+          </p:style>
+          <p:txBody>
+            <a:bodyPr rtlCol="0" anchor="ctr"/>
+            <a:lstStyle/>
+            <a:p>
+              <a:pPr algn="ctr"/>
+              <a:endParaRPr kumimoji="1" lang="ja-JP" altLang="en-US"/>
+            </a:p>
+          </p:txBody>
+        </p:sp>
+        <p:sp>
+          <p:nvSpPr>
+            <p:cNvPr id="109" name="テキスト ボックス 108">
+              <a:extLst>
+                <a:ext uri="{FF2B5EF4-FFF2-40B4-BE49-F238E27FC236}">
+                  <a16:creationId xmlns:a16="http://schemas.microsoft.com/office/drawing/2014/main" id="{9A53294C-FA2F-C74A-FEAD-16CE664E39A4}"/>
+                </a:ext>
+              </a:extLst>
+            </p:cNvPr>
+            <p:cNvSpPr txBox="1"/>
+            <p:nvPr/>
+          </p:nvSpPr>
+          <p:spPr>
+            <a:xfrm>
+              <a:off x="6811026" y="2577152"/>
+              <a:ext cx="641383" cy="276999"/>
+            </a:xfrm>
+            <a:prstGeom prst="rect">
+              <a:avLst/>
+            </a:prstGeom>
+            <a:noFill/>
+          </p:spPr>
+          <p:txBody>
+            <a:bodyPr wrap="square" rtlCol="0">
+              <a:spAutoFit/>
+            </a:bodyPr>
+            <a:lstStyle/>
+            <a:p>
+              <a:r>
+                <a:rPr lang="en-US" altLang="ja-JP" sz="1200">
+                  <a:latin typeface="メイリオ" panose="020B0604030504040204" pitchFamily="50" charset="-128"/>
+                  <a:ea typeface="メイリオ" panose="020B0604030504040204" pitchFamily="50" charset="-128"/>
+                </a:rPr>
+                <a:t>3/24</a:t>
+              </a:r>
+              <a:endParaRPr kumimoji="1" lang="en-US" altLang="ja-JP" sz="1200">
+                <a:latin typeface="メイリオ" panose="020B0604030504040204" pitchFamily="50" charset="-128"/>
+                <a:ea typeface="メイリオ" panose="020B0604030504040204" pitchFamily="50" charset="-128"/>
+              </a:endParaRPr>
+            </a:p>
+          </p:txBody>
+        </p:sp>
+      </p:grpSp>
+      <p:grpSp>
+        <p:nvGrpSpPr>
+          <p:cNvPr id="110" name="グループ化 109">
+            <a:extLst>
+              <a:ext uri="{FF2B5EF4-FFF2-40B4-BE49-F238E27FC236}">
+                <a16:creationId xmlns:a16="http://schemas.microsoft.com/office/drawing/2014/main" id="{80362B75-40B1-C9CE-B236-73FB5A61F72F}"/>
+              </a:ext>
+            </a:extLst>
+          </p:cNvPr>
+          <p:cNvGrpSpPr/>
+          <p:nvPr/>
+        </p:nvGrpSpPr>
+        <p:grpSpPr>
+          <a:xfrm>
+            <a:off x="6591863" y="4328421"/>
+            <a:ext cx="760766" cy="276999"/>
+            <a:chOff x="6811026" y="2577152"/>
+            <a:chExt cx="760766" cy="276999"/>
+          </a:xfrm>
+        </p:grpSpPr>
+        <p:sp>
+          <p:nvSpPr>
+            <p:cNvPr id="111" name="楕円 110">
+              <a:extLst>
+                <a:ext uri="{FF2B5EF4-FFF2-40B4-BE49-F238E27FC236}">
+                  <a16:creationId xmlns:a16="http://schemas.microsoft.com/office/drawing/2014/main" id="{D78C1F5B-9F7C-0C76-A7BF-7D86C9A7E0EA}"/>
+                </a:ext>
+              </a:extLst>
+            </p:cNvPr>
+            <p:cNvSpPr/>
+            <p:nvPr/>
+          </p:nvSpPr>
+          <p:spPr>
+            <a:xfrm>
+              <a:off x="7342603" y="2588935"/>
+              <a:ext cx="229189" cy="215947"/>
+            </a:xfrm>
+            <a:prstGeom prst="ellipse">
+              <a:avLst/>
+            </a:prstGeom>
+            <a:ln>
+              <a:noFill/>
+            </a:ln>
+          </p:spPr>
+          <p:style>
+            <a:lnRef idx="2">
+              <a:schemeClr val="accent1">
+                <a:shade val="15000"/>
+              </a:schemeClr>
+            </a:lnRef>
+            <a:fillRef idx="1">
+              <a:schemeClr val="accent1"/>
+            </a:fillRef>
+            <a:effectRef idx="0">
+              <a:schemeClr val="accent1"/>
+            </a:effectRef>
+            <a:fontRef idx="minor">
+              <a:schemeClr val="lt1"/>
+            </a:fontRef>
+          </p:style>
+          <p:txBody>
+            <a:bodyPr rtlCol="0" anchor="ctr"/>
+            <a:lstStyle/>
+            <a:p>
+              <a:pPr algn="ctr"/>
+              <a:endParaRPr kumimoji="1" lang="ja-JP" altLang="en-US"/>
+            </a:p>
+          </p:txBody>
+        </p:sp>
+        <p:sp>
+          <p:nvSpPr>
+            <p:cNvPr id="112" name="テキスト ボックス 111">
+              <a:extLst>
+                <a:ext uri="{FF2B5EF4-FFF2-40B4-BE49-F238E27FC236}">
+                  <a16:creationId xmlns:a16="http://schemas.microsoft.com/office/drawing/2014/main" id="{B032B172-F56A-B315-F822-D7C1DC2DF90C}"/>
+                </a:ext>
+              </a:extLst>
+            </p:cNvPr>
+            <p:cNvSpPr txBox="1"/>
+            <p:nvPr/>
+          </p:nvSpPr>
+          <p:spPr>
+            <a:xfrm>
+              <a:off x="6811026" y="2577152"/>
+              <a:ext cx="641383" cy="276999"/>
+            </a:xfrm>
+            <a:prstGeom prst="rect">
+              <a:avLst/>
+            </a:prstGeom>
+            <a:noFill/>
+          </p:spPr>
+          <p:txBody>
+            <a:bodyPr wrap="square" rtlCol="0">
+              <a:spAutoFit/>
+            </a:bodyPr>
+            <a:lstStyle/>
+            <a:p>
+              <a:r>
+                <a:rPr lang="en-US" altLang="ja-JP" sz="1200">
+                  <a:latin typeface="メイリオ" panose="020B0604030504040204" pitchFamily="50" charset="-128"/>
+                  <a:ea typeface="メイリオ" panose="020B0604030504040204" pitchFamily="50" charset="-128"/>
+                </a:rPr>
+                <a:t>3/30</a:t>
+              </a:r>
+              <a:endParaRPr kumimoji="1" lang="en-US" altLang="ja-JP" sz="1200">
+                <a:latin typeface="メイリオ" panose="020B0604030504040204" pitchFamily="50" charset="-128"/>
+                <a:ea typeface="メイリオ" panose="020B0604030504040204" pitchFamily="50" charset="-128"/>
+              </a:endParaRPr>
+            </a:p>
+          </p:txBody>
+        </p:sp>
+      </p:grpSp>
+      <p:pic>
+        <p:nvPicPr>
+          <p:cNvPr id="115" name="図 114">
+            <a:extLst>
+              <a:ext uri="{FF2B5EF4-FFF2-40B4-BE49-F238E27FC236}">
+                <a16:creationId xmlns:a16="http://schemas.microsoft.com/office/drawing/2014/main" id="{7E2D563A-1032-05C6-2269-29FE32DBD384}"/>
+              </a:ext>
+            </a:extLst>
+          </p:cNvPr>
+          <p:cNvPicPr>
+            <a:picLocks noChangeAspect="1"/>
+          </p:cNvPicPr>
+          <p:nvPr/>
+        </p:nvPicPr>
+        <p:blipFill>
+          <a:blip r:embed="rId9">
+            <a:extLst>
+              <a:ext uri="{28A0092B-C50C-407E-A947-70E740481C1C}">
+                <a14:useLocalDpi xmlns:a14="http://schemas.microsoft.com/office/drawing/2010/main" val="0"/>
+              </a:ext>
+            </a:extLst>
+          </a:blip>
+          <a:stretch>
+            <a:fillRect/>
+          </a:stretch>
+        </p:blipFill>
+        <p:spPr>
+          <a:xfrm>
+            <a:off x="11372614" y="3015425"/>
+            <a:ext cx="455447" cy="455447"/>
+          </a:xfrm>
+          <a:prstGeom prst="rect">
+            <a:avLst/>
+          </a:prstGeom>
+        </p:spPr>
+      </p:pic>
+      <p:sp>
+        <p:nvSpPr>
+          <p:cNvPr id="116" name="テキスト ボックス 115">
+            <a:extLst>
+              <a:ext uri="{FF2B5EF4-FFF2-40B4-BE49-F238E27FC236}">
+                <a16:creationId xmlns:a16="http://schemas.microsoft.com/office/drawing/2014/main" id="{A52D6DDA-5971-6ED3-AC8D-C023C3405346}"/>
+              </a:ext>
+            </a:extLst>
+          </p:cNvPr>
+          <p:cNvSpPr txBox="1"/>
+          <p:nvPr/>
+        </p:nvSpPr>
+        <p:spPr>
+          <a:xfrm>
+            <a:off x="7372198" y="3675119"/>
+            <a:ext cx="4482542" cy="307777"/>
+          </a:xfrm>
+          <a:prstGeom prst="rect">
+            <a:avLst/>
+          </a:prstGeom>
+          <a:noFill/>
+        </p:spPr>
+        <p:txBody>
+          <a:bodyPr wrap="square" rtlCol="0">
+            <a:spAutoFit/>
+          </a:bodyPr>
+          <a:lstStyle/>
+          <a:p>
+            <a:r>
+              <a:rPr lang="en-US" altLang="ja-JP" sz="1400" b="1">
+                <a:solidFill>
+                  <a:schemeClr val="accent2">
+                    <a:lumMod val="75000"/>
+                  </a:schemeClr>
+                </a:solidFill>
+                <a:latin typeface="メイリオ" panose="020B0604030504040204" pitchFamily="50" charset="-128"/>
+                <a:ea typeface="メイリオ" panose="020B0604030504040204" pitchFamily="50" charset="-128"/>
+              </a:rPr>
+              <a:t>Claude Cowork</a:t>
+            </a:r>
+            <a:r>
+              <a:rPr lang="ja-JP" altLang="en-US" sz="1400">
+                <a:latin typeface="メイリオ" panose="020B0604030504040204" pitchFamily="50" charset="-128"/>
+                <a:ea typeface="メイリオ" panose="020B0604030504040204" pitchFamily="50" charset="-128"/>
+              </a:rPr>
+              <a:t>に</a:t>
+            </a:r>
+            <a:r>
+              <a:rPr lang="en-US" altLang="ja-JP" sz="1400">
+                <a:latin typeface="メイリオ" panose="020B0604030504040204" pitchFamily="50" charset="-128"/>
+                <a:ea typeface="メイリオ" panose="020B0604030504040204" pitchFamily="50" charset="-128"/>
+              </a:rPr>
+              <a:t>Computer Use</a:t>
+            </a:r>
+            <a:r>
+              <a:rPr lang="ja-JP" altLang="en-US" sz="1400">
+                <a:latin typeface="メイリオ" panose="020B0604030504040204" pitchFamily="50" charset="-128"/>
+                <a:ea typeface="メイリオ" panose="020B0604030504040204" pitchFamily="50" charset="-128"/>
+              </a:rPr>
+              <a:t>追加</a:t>
+            </a:r>
+            <a:endParaRPr kumimoji="1" lang="en-US" altLang="ja-JP" sz="1400">
+              <a:latin typeface="メイリオ" panose="020B0604030504040204" pitchFamily="50" charset="-128"/>
+              <a:ea typeface="メイリオ" panose="020B0604030504040204" pitchFamily="50" charset="-128"/>
+            </a:endParaRPr>
+          </a:p>
+        </p:txBody>
+      </p:sp>
+      <p:pic>
+        <p:nvPicPr>
+          <p:cNvPr id="117" name="グラフィックス 116" descr="ノート PC 単色塗りつぶし">
+            <a:extLst>
+              <a:ext uri="{FF2B5EF4-FFF2-40B4-BE49-F238E27FC236}">
+                <a16:creationId xmlns:a16="http://schemas.microsoft.com/office/drawing/2014/main" id="{068EA348-0337-1860-9A0F-555CD9B08DAB}"/>
+              </a:ext>
+            </a:extLst>
+          </p:cNvPr>
+          <p:cNvPicPr>
+            <a:picLocks noChangeAspect="1"/>
+          </p:cNvPicPr>
+          <p:nvPr/>
+        </p:nvPicPr>
+        <p:blipFill>
+          <a:blip>
+            <a:extLst>
+              <a:ext uri="{96DAC541-7B7A-43D3-8B79-37D633B846F1}">
+                <asvg:svgBlip xmlns:asvg="http://schemas.microsoft.com/office/drawing/2016/SVG/main" r:embed="rId6"/>
+              </a:ext>
+            </a:extLst>
+          </a:blip>
+          <a:stretch>
+            <a:fillRect/>
+          </a:stretch>
+        </p:blipFill>
+        <p:spPr>
+          <a:xfrm>
+            <a:off x="11330143" y="3587387"/>
+            <a:ext cx="552403" cy="552403"/>
+          </a:xfrm>
+          <a:prstGeom prst="rect">
+            <a:avLst/>
+          </a:prstGeom>
+        </p:spPr>
+      </p:pic>
+      <p:sp>
+        <p:nvSpPr>
+          <p:cNvPr id="118" name="テキスト ボックス 117">
+            <a:extLst>
+              <a:ext uri="{FF2B5EF4-FFF2-40B4-BE49-F238E27FC236}">
+                <a16:creationId xmlns:a16="http://schemas.microsoft.com/office/drawing/2014/main" id="{5FD25462-0464-ACF6-975B-E3284FD5482F}"/>
+              </a:ext>
+            </a:extLst>
+          </p:cNvPr>
+          <p:cNvSpPr txBox="1"/>
+          <p:nvPr/>
+        </p:nvSpPr>
+        <p:spPr>
+          <a:xfrm>
+            <a:off x="7372198" y="4205311"/>
+            <a:ext cx="4482542" cy="523220"/>
+          </a:xfrm>
+          <a:prstGeom prst="rect">
+            <a:avLst/>
+          </a:prstGeom>
+          <a:noFill/>
+        </p:spPr>
+        <p:txBody>
+          <a:bodyPr wrap="square" rtlCol="0">
+            <a:spAutoFit/>
+          </a:bodyPr>
+          <a:lstStyle/>
+          <a:p>
+            <a:r>
+              <a:rPr lang="en-US" altLang="ja-JP" sz="1400" b="1">
+                <a:solidFill>
+                  <a:schemeClr val="accent6"/>
+                </a:solidFill>
+                <a:latin typeface="メイリオ" panose="020B0604030504040204" pitchFamily="50" charset="-128"/>
+                <a:ea typeface="メイリオ" panose="020B0604030504040204" pitchFamily="50" charset="-128"/>
+              </a:rPr>
+              <a:t>Copilot Cowork</a:t>
+            </a:r>
+            <a:r>
+              <a:rPr lang="ja-JP" altLang="en-US" sz="1400">
+                <a:latin typeface="メイリオ" panose="020B0604030504040204" pitchFamily="50" charset="-128"/>
+                <a:ea typeface="メイリオ" panose="020B0604030504040204" pitchFamily="50" charset="-128"/>
+              </a:rPr>
+              <a:t>、</a:t>
+            </a:r>
+            <a:endParaRPr lang="en-US" altLang="ja-JP" sz="1400">
+              <a:latin typeface="メイリオ" panose="020B0604030504040204" pitchFamily="50" charset="-128"/>
+              <a:ea typeface="メイリオ" panose="020B0604030504040204" pitchFamily="50" charset="-128"/>
+            </a:endParaRPr>
+          </a:p>
+          <a:p>
+            <a:r>
+              <a:rPr lang="ja-JP" altLang="en-US" sz="1400">
+                <a:latin typeface="メイリオ" panose="020B0604030504040204" pitchFamily="50" charset="-128"/>
+                <a:ea typeface="メイリオ" panose="020B0604030504040204" pitchFamily="50" charset="-128"/>
+              </a:rPr>
+              <a:t>早期アクセスプログラムを開始（</a:t>
+            </a:r>
+            <a:r>
+              <a:rPr lang="en-US" altLang="ja-JP" sz="1400">
+                <a:latin typeface="メイリオ" panose="020B0604030504040204" pitchFamily="50" charset="-128"/>
+                <a:ea typeface="メイリオ" panose="020B0604030504040204" pitchFamily="50" charset="-128"/>
+              </a:rPr>
+              <a:t>Frontier</a:t>
+            </a:r>
+            <a:r>
+              <a:rPr lang="ja-JP" altLang="en-US" sz="1400">
+                <a:latin typeface="メイリオ" panose="020B0604030504040204" pitchFamily="50" charset="-128"/>
+                <a:ea typeface="メイリオ" panose="020B0604030504040204" pitchFamily="50" charset="-128"/>
+              </a:rPr>
+              <a:t>）</a:t>
+            </a:r>
+            <a:endParaRPr lang="en-US" altLang="ja-JP" sz="1400">
+              <a:latin typeface="メイリオ" panose="020B0604030504040204" pitchFamily="50" charset="-128"/>
+              <a:ea typeface="メイリオ" panose="020B0604030504040204" pitchFamily="50" charset="-128"/>
+            </a:endParaRPr>
+          </a:p>
+        </p:txBody>
+      </p:sp>
+      <p:pic>
+        <p:nvPicPr>
+          <p:cNvPr id="119" name="図 118">
+            <a:extLst>
+              <a:ext uri="{FF2B5EF4-FFF2-40B4-BE49-F238E27FC236}">
+                <a16:creationId xmlns:a16="http://schemas.microsoft.com/office/drawing/2014/main" id="{6485E9C7-A763-5929-17A6-6EF28C418406}"/>
+              </a:ext>
+            </a:extLst>
+          </p:cNvPr>
+          <p:cNvPicPr>
+            <a:picLocks noChangeAspect="1"/>
+          </p:cNvPicPr>
+          <p:nvPr/>
+        </p:nvPicPr>
+        <p:blipFill>
+          <a:blip r:embed="rId7">
+            <a:extLst>
+              <a:ext uri="{28A0092B-C50C-407E-A947-70E740481C1C}">
+                <a14:useLocalDpi xmlns:a14="http://schemas.microsoft.com/office/drawing/2010/main" val="0"/>
+              </a:ext>
+            </a:extLst>
+          </a:blip>
+          <a:stretch>
+            <a:fillRect/>
+          </a:stretch>
+        </p:blipFill>
+        <p:spPr>
+          <a:xfrm>
+            <a:off x="11366529" y="4222650"/>
+            <a:ext cx="490605" cy="488543"/>
+          </a:xfrm>
+          <a:prstGeom prst="rect">
+            <a:avLst/>
+          </a:prstGeom>
+        </p:spPr>
+      </p:pic>
+      <p:sp>
+        <p:nvSpPr>
+          <p:cNvPr id="122" name="正方形/長方形 121">
+            <a:extLst>
+              <a:ext uri="{FF2B5EF4-FFF2-40B4-BE49-F238E27FC236}">
+                <a16:creationId xmlns:a16="http://schemas.microsoft.com/office/drawing/2014/main" id="{D8FFCE42-CAFC-BB95-4531-602A52C5354E}"/>
+              </a:ext>
+            </a:extLst>
+          </p:cNvPr>
+          <p:cNvSpPr/>
+          <p:nvPr/>
+        </p:nvSpPr>
+        <p:spPr>
+          <a:xfrm>
+            <a:off x="6591862" y="5031593"/>
+            <a:ext cx="5313237" cy="1509195"/>
+          </a:xfrm>
+          <a:prstGeom prst="rect">
+            <a:avLst/>
+          </a:prstGeom>
+          <a:solidFill>
+            <a:schemeClr val="accent6">
+              <a:lumMod val="75000"/>
+              <a:alpha val="20000"/>
+            </a:schemeClr>
+          </a:solidFill>
+          <a:ln>
+            <a:noFill/>
+          </a:ln>
+        </p:spPr>
+        <p:style>
+          <a:lnRef idx="2">
+            <a:schemeClr val="accent1">
+              <a:shade val="15000"/>
+            </a:schemeClr>
+          </a:lnRef>
+          <a:fillRef idx="1">
+            <a:schemeClr val="accent1"/>
+          </a:fillRef>
+          <a:effectRef idx="0">
+            <a:schemeClr val="accent1"/>
+          </a:effectRef>
+          <a:fontRef idx="minor">
+            <a:schemeClr val="lt1"/>
+          </a:fontRef>
+        </p:style>
+        <p:txBody>
+          <a:bodyPr rtlCol="0" anchor="ctr"/>
+          <a:lstStyle/>
+          <a:p>
+            <a:pPr algn="ctr">
+              <a:defRPr sz="1500" b="1">
+                <a:solidFill>
+                  <a:srgbClr val="FFFFFF"/>
+                </a:solidFill>
+                <a:latin typeface="メイリオ"/>
+              </a:defRPr>
+            </a:pPr>
+            <a:endParaRPr lang="ja-JP" altLang="en-US" sz="1600">
+              <a:latin typeface="メイリオ" panose="020B0604030504040204" pitchFamily="50" charset="-128"/>
+              <a:ea typeface="メイリオ" panose="020B0604030504040204" pitchFamily="50" charset="-128"/>
+            </a:endParaRPr>
+          </a:p>
+        </p:txBody>
+      </p:sp>
+      <p:sp>
+        <p:nvSpPr>
+          <p:cNvPr id="124" name="テキスト ボックス 123">
+            <a:extLst>
+              <a:ext uri="{FF2B5EF4-FFF2-40B4-BE49-F238E27FC236}">
+                <a16:creationId xmlns:a16="http://schemas.microsoft.com/office/drawing/2014/main" id="{4592CFC5-F4AD-E4AD-3C10-709223202E56}"/>
+              </a:ext>
+            </a:extLst>
+          </p:cNvPr>
+          <p:cNvSpPr txBox="1"/>
+          <p:nvPr/>
+        </p:nvSpPr>
+        <p:spPr>
+          <a:xfrm>
+            <a:off x="6648954" y="5090230"/>
+            <a:ext cx="5179107" cy="1600438"/>
+          </a:xfrm>
+          <a:prstGeom prst="rect">
+            <a:avLst/>
+          </a:prstGeom>
+          <a:noFill/>
+        </p:spPr>
+        <p:txBody>
+          <a:bodyPr wrap="square" rtlCol="0">
+            <a:spAutoFit/>
+          </a:bodyPr>
+          <a:lstStyle/>
+          <a:p>
+            <a:r>
+              <a:rPr lang="en-US" altLang="ja-JP" sz="1400" b="1">
+                <a:solidFill>
+                  <a:schemeClr val="accent6"/>
+                </a:solidFill>
+                <a:latin typeface="メイリオ" panose="020B0604030504040204" pitchFamily="50" charset="-128"/>
+                <a:ea typeface="メイリオ" panose="020B0604030504040204" pitchFamily="50" charset="-128"/>
+              </a:rPr>
+              <a:t>Copilot Cowork</a:t>
+            </a:r>
+            <a:r>
+              <a:rPr lang="ja-JP" altLang="en-US" sz="1400">
+                <a:latin typeface="メイリオ" panose="020B0604030504040204" pitchFamily="50" charset="-128"/>
+                <a:ea typeface="メイリオ" panose="020B0604030504040204" pitchFamily="50" charset="-128"/>
+              </a:rPr>
+              <a:t>は</a:t>
+            </a:r>
+            <a:r>
+              <a:rPr lang="en-US" altLang="ja-JP" sz="1400">
+                <a:latin typeface="メイリオ" panose="020B0604030504040204" pitchFamily="50" charset="-128"/>
+                <a:ea typeface="メイリオ" panose="020B0604030504040204" pitchFamily="50" charset="-128"/>
+              </a:rPr>
+              <a:t>Anthropic</a:t>
+            </a:r>
+            <a:r>
+              <a:rPr lang="ja-JP" altLang="en-US" sz="1400">
+                <a:latin typeface="メイリオ" panose="020B0604030504040204" pitchFamily="50" charset="-128"/>
+                <a:ea typeface="メイリオ" panose="020B0604030504040204" pitchFamily="50" charset="-128"/>
+              </a:rPr>
+              <a:t>との協業で構築した</a:t>
+            </a:r>
+            <a:r>
+              <a:rPr lang="en-US" altLang="ja-JP" sz="1400" b="1">
+                <a:solidFill>
+                  <a:schemeClr val="accent2"/>
+                </a:solidFill>
+                <a:latin typeface="メイリオ" panose="020B0604030504040204" pitchFamily="50" charset="-128"/>
+                <a:ea typeface="メイリオ" panose="020B0604030504040204" pitchFamily="50" charset="-128"/>
+              </a:rPr>
+              <a:t>Claude Cowork</a:t>
+            </a:r>
+            <a:r>
+              <a:rPr lang="ja-JP" altLang="en-US" sz="1400">
+                <a:latin typeface="メイリオ" panose="020B0604030504040204" pitchFamily="50" charset="-128"/>
+                <a:ea typeface="メイリオ" panose="020B0604030504040204" pitchFamily="50" charset="-128"/>
+              </a:rPr>
+              <a:t>の技術を</a:t>
+            </a:r>
+            <a:r>
+              <a:rPr lang="en-US" altLang="ja-JP" sz="1400" b="1">
+                <a:latin typeface="メイリオ" panose="020B0604030504040204" pitchFamily="50" charset="-128"/>
+                <a:ea typeface="メイリオ" panose="020B0604030504040204" pitchFamily="50" charset="-128"/>
+              </a:rPr>
+              <a:t>M365</a:t>
+            </a:r>
+            <a:r>
+              <a:rPr lang="ja-JP" altLang="en-US" sz="1400">
+                <a:latin typeface="メイリオ" panose="020B0604030504040204" pitchFamily="50" charset="-128"/>
+                <a:ea typeface="メイリオ" panose="020B0604030504040204" pitchFamily="50" charset="-128"/>
+              </a:rPr>
+              <a:t>に組み込んだエンタープライズ版。</a:t>
+            </a:r>
+            <a:endParaRPr lang="en-US" altLang="ja-JP" sz="1400">
+              <a:latin typeface="メイリオ" panose="020B0604030504040204" pitchFamily="50" charset="-128"/>
+              <a:ea typeface="メイリオ" panose="020B0604030504040204" pitchFamily="50" charset="-128"/>
+            </a:endParaRPr>
+          </a:p>
+          <a:p>
+            <a:r>
+              <a:rPr lang="en-US" altLang="ja-JP" sz="1400">
+                <a:latin typeface="メイリオ" panose="020B0604030504040204" pitchFamily="50" charset="-128"/>
+                <a:ea typeface="メイリオ" panose="020B0604030504040204" pitchFamily="50" charset="-128"/>
+              </a:rPr>
+              <a:t>Claude</a:t>
+            </a:r>
+            <a:r>
+              <a:rPr lang="ja-JP" altLang="en-US" sz="1400">
+                <a:latin typeface="メイリオ" panose="020B0604030504040204" pitchFamily="50" charset="-128"/>
+                <a:ea typeface="メイリオ" panose="020B0604030504040204" pitchFamily="50" charset="-128"/>
+              </a:rPr>
+              <a:t>側と異なりローカル環境ではなく、</a:t>
+            </a:r>
+            <a:r>
+              <a:rPr lang="ja-JP" altLang="en-US" sz="1400" b="1">
+                <a:latin typeface="メイリオ" panose="020B0604030504040204" pitchFamily="50" charset="-128"/>
+                <a:ea typeface="メイリオ" panose="020B0604030504040204" pitchFamily="50" charset="-128"/>
+              </a:rPr>
+              <a:t>テナント内</a:t>
+            </a:r>
+            <a:r>
+              <a:rPr lang="en-US" altLang="ja-JP" sz="1400" b="1">
+                <a:latin typeface="メイリオ" panose="020B0604030504040204" pitchFamily="50" charset="-128"/>
+                <a:ea typeface="メイリオ" panose="020B0604030504040204" pitchFamily="50" charset="-128"/>
+              </a:rPr>
+              <a:t>M365</a:t>
+            </a:r>
+            <a:r>
+              <a:rPr lang="ja-JP" altLang="en-US" sz="1400" b="1">
+                <a:latin typeface="メイリオ" panose="020B0604030504040204" pitchFamily="50" charset="-128"/>
+                <a:ea typeface="メイリオ" panose="020B0604030504040204" pitchFamily="50" charset="-128"/>
+              </a:rPr>
+              <a:t>クラウドで実行</a:t>
+            </a:r>
+            <a:r>
+              <a:rPr lang="ja-JP" altLang="en-US" sz="1400">
+                <a:latin typeface="メイリオ" panose="020B0604030504040204" pitchFamily="50" charset="-128"/>
+                <a:ea typeface="メイリオ" panose="020B0604030504040204" pitchFamily="50" charset="-128"/>
+              </a:rPr>
+              <a:t>するため、各アプリを横断して</a:t>
+            </a:r>
+            <a:r>
+              <a:rPr lang="en-US" altLang="ja-JP" sz="1400">
+                <a:latin typeface="メイリオ" panose="020B0604030504040204" pitchFamily="50" charset="-128"/>
+                <a:ea typeface="メイリオ" panose="020B0604030504040204" pitchFamily="50" charset="-128"/>
+              </a:rPr>
+              <a:t>1</a:t>
+            </a:r>
+            <a:r>
+              <a:rPr lang="ja-JP" altLang="en-US" sz="1400">
+                <a:latin typeface="メイリオ" panose="020B0604030504040204" pitchFamily="50" charset="-128"/>
+                <a:ea typeface="メイリオ" panose="020B0604030504040204" pitchFamily="50" charset="-128"/>
+              </a:rPr>
+              <a:t>つの指示で複数ステップを回す。</a:t>
+            </a:r>
+            <a:r>
+              <a:rPr kumimoji="1" lang="en-US" altLang="ja-JP" sz="1400" b="1">
+                <a:latin typeface="メイリオ" panose="020B0604030504040204" pitchFamily="50" charset="-128"/>
+                <a:ea typeface="メイリオ" panose="020B0604030504040204" pitchFamily="50" charset="-128"/>
+              </a:rPr>
+              <a:t>M365</a:t>
+            </a:r>
+            <a:r>
+              <a:rPr kumimoji="1" lang="ja-JP" altLang="en-US" sz="1400" b="1">
+                <a:latin typeface="メイリオ" panose="020B0604030504040204" pitchFamily="50" charset="-128"/>
+                <a:ea typeface="メイリオ" panose="020B0604030504040204" pitchFamily="50" charset="-128"/>
+              </a:rPr>
+              <a:t>の</a:t>
+            </a:r>
+            <a:r>
+              <a:rPr kumimoji="1" lang="en-US" altLang="ja-JP" sz="1400" b="1">
+                <a:latin typeface="メイリオ" panose="020B0604030504040204" pitchFamily="50" charset="-128"/>
+                <a:ea typeface="メイリオ" panose="020B0604030504040204" pitchFamily="50" charset="-128"/>
+              </a:rPr>
+              <a:t>ID</a:t>
+            </a:r>
+            <a:r>
+              <a:rPr kumimoji="1" lang="ja-JP" altLang="en-US" sz="1400" b="1">
+                <a:latin typeface="メイリオ" panose="020B0604030504040204" pitchFamily="50" charset="-128"/>
+                <a:ea typeface="メイリオ" panose="020B0604030504040204" pitchFamily="50" charset="-128"/>
+              </a:rPr>
+              <a:t>・権限・</a:t>
+            </a:r>
+            <a:r>
+              <a:rPr kumimoji="1" lang="en-US" altLang="ja-JP" sz="1400" b="1">
+                <a:latin typeface="メイリオ" panose="020B0604030504040204" pitchFamily="50" charset="-128"/>
+                <a:ea typeface="メイリオ" panose="020B0604030504040204" pitchFamily="50" charset="-128"/>
+              </a:rPr>
+              <a:t>DLP</a:t>
+            </a:r>
+            <a:r>
+              <a:rPr kumimoji="1" lang="ja-JP" altLang="en-US" sz="1400" b="1">
+                <a:latin typeface="メイリオ" panose="020B0604030504040204" pitchFamily="50" charset="-128"/>
+                <a:ea typeface="メイリオ" panose="020B0604030504040204" pitchFamily="50" charset="-128"/>
+              </a:rPr>
+              <a:t>・コンプライアンスポリシーが自動適用される。</a:t>
+            </a:r>
+            <a:endParaRPr kumimoji="1" lang="en-US" altLang="ja-JP" sz="1400" b="1">
+              <a:latin typeface="メイリオ" panose="020B0604030504040204" pitchFamily="50" charset="-128"/>
+              <a:ea typeface="メイリオ" panose="020B0604030504040204" pitchFamily="50" charset="-128"/>
+            </a:endParaRPr>
+          </a:p>
+          <a:p>
+            <a:endParaRPr kumimoji="1" lang="en-US" altLang="ja-JP" sz="1400">
+              <a:latin typeface="メイリオ" panose="020B0604030504040204" pitchFamily="50" charset="-128"/>
+              <a:ea typeface="メイリオ" panose="020B0604030504040204" pitchFamily="50" charset="-128"/>
+            </a:endParaRPr>
+          </a:p>
+        </p:txBody>
+      </p:sp>
+    </p:spTree>
+    <p:extLst>
+      <p:ext uri="{BB962C8B-B14F-4D97-AF65-F5344CB8AC3E}">
+        <p14:creationId xmlns:p14="http://schemas.microsoft.com/office/powerpoint/2010/main" val="4186623271"/>
+      </p:ext>
+    </p:extLst>
+  </p:cSld>
+  <p:clrMapOvr>
+    <a:masterClrMapping/>
+  </p:clrMapOvr>
+</p:sld>
+</file>
+
+<file path=ppt/slides/slide14.xml><?xml version="1.0" encoding="utf-8"?>
+<p:sld xmlns:a="http://schemas.openxmlformats.org/drawingml/2006/main" xmlns:r="http://schemas.openxmlformats.org/officeDocument/2006/relationships" xmlns:p="http://schemas.openxmlformats.org/presentationml/2006/main">
+  <p:cSld>
+    <p:spTree>
+      <p:nvGrpSpPr>
+        <p:cNvPr id="1" name="">
+          <a:extLst>
+            <a:ext uri="{FF2B5EF4-FFF2-40B4-BE49-F238E27FC236}">
+              <a16:creationId xmlns:a16="http://schemas.microsoft.com/office/drawing/2014/main" id="{BE29D79C-9CEF-6C10-9A28-229BDB9847F7}"/>
+            </a:ext>
+          </a:extLst>
+        </p:cNvPr>
+        <p:cNvGrpSpPr/>
+        <p:nvPr/>
+      </p:nvGrpSpPr>
+      <p:grpSpPr>
+        <a:xfrm>
+          <a:off x="0" y="0"/>
+          <a:ext cx="0" cy="0"/>
+          <a:chOff x="0" y="0"/>
+          <a:chExt cx="0" cy="0"/>
+        </a:xfrm>
+      </p:grpSpPr>
+      <p:sp>
+        <p:nvSpPr>
+          <p:cNvPr id="4" name="テキスト ボックス 3">
+            <a:extLst>
+              <a:ext uri="{FF2B5EF4-FFF2-40B4-BE49-F238E27FC236}">
+                <a16:creationId xmlns:a16="http://schemas.microsoft.com/office/drawing/2014/main" id="{696AB77E-2D73-B357-A3DF-557F31D62D98}"/>
+              </a:ext>
+            </a:extLst>
+          </p:cNvPr>
+          <p:cNvSpPr txBox="1"/>
+          <p:nvPr/>
+        </p:nvSpPr>
+        <p:spPr>
+          <a:xfrm>
+            <a:off x="443466" y="317212"/>
+            <a:ext cx="11215133" cy="584775"/>
+          </a:xfrm>
+          <a:prstGeom prst="rect">
+            <a:avLst/>
+          </a:prstGeom>
+          <a:noFill/>
+        </p:spPr>
+        <p:txBody>
+          <a:bodyPr wrap="square" rtlCol="0">
+            <a:spAutoFit/>
+          </a:bodyPr>
+          <a:lstStyle/>
+          <a:p>
+            <a:r>
+              <a:rPr lang="en-US" altLang="ja-JP" sz="3200" b="1">
+                <a:latin typeface="メイリオ" panose="020B0604030504040204" pitchFamily="50" charset="-128"/>
+                <a:ea typeface="メイリオ" panose="020B0604030504040204" pitchFamily="50" charset="-128"/>
+              </a:rPr>
+              <a:t>Copilot Cowork</a:t>
+            </a:r>
+            <a:r>
+              <a:rPr lang="ja-JP" altLang="en-US" sz="3200" b="1">
+                <a:latin typeface="メイリオ" panose="020B0604030504040204" pitchFamily="50" charset="-128"/>
+                <a:ea typeface="メイリオ" panose="020B0604030504040204" pitchFamily="50" charset="-128"/>
+              </a:rPr>
+              <a:t>は何ができるか</a:t>
+            </a:r>
+          </a:p>
+        </p:txBody>
+      </p:sp>
+      <p:sp>
+        <p:nvSpPr>
+          <p:cNvPr id="131" name="テキスト ボックス 130">
+            <a:extLst>
+              <a:ext uri="{FF2B5EF4-FFF2-40B4-BE49-F238E27FC236}">
+                <a16:creationId xmlns:a16="http://schemas.microsoft.com/office/drawing/2014/main" id="{3DA2AA14-B5D3-E4F0-0161-8791B9EE43AE}"/>
+              </a:ext>
+            </a:extLst>
+          </p:cNvPr>
+          <p:cNvSpPr txBox="1"/>
+          <p:nvPr/>
+        </p:nvSpPr>
+        <p:spPr>
+          <a:xfrm>
+            <a:off x="354254" y="1001123"/>
+            <a:ext cx="5006960" cy="307777"/>
+          </a:xfrm>
+          <a:prstGeom prst="rect">
+            <a:avLst/>
+          </a:prstGeom>
+          <a:noFill/>
+        </p:spPr>
+        <p:txBody>
+          <a:bodyPr wrap="square" rtlCol="0">
+            <a:spAutoFit/>
+          </a:bodyPr>
+          <a:lstStyle/>
+          <a:p>
+            <a:r>
+              <a:rPr lang="ja-JP" altLang="en-US" sz="1400" b="1">
+                <a:latin typeface="メイリオ" panose="020B0604030504040204" pitchFamily="50" charset="-128"/>
+                <a:ea typeface="メイリオ" panose="020B0604030504040204" pitchFamily="50" charset="-128"/>
+              </a:rPr>
+              <a:t>ビルトインスキル（初期設定で利用可能）</a:t>
+            </a:r>
+            <a:endParaRPr kumimoji="1" lang="en-US" altLang="ja-JP" sz="1400" b="1">
+              <a:latin typeface="メイリオ" panose="020B0604030504040204" pitchFamily="50" charset="-128"/>
+              <a:ea typeface="メイリオ" panose="020B0604030504040204" pitchFamily="50" charset="-128"/>
+            </a:endParaRPr>
+          </a:p>
+        </p:txBody>
+      </p:sp>
+      <p:graphicFrame>
+        <p:nvGraphicFramePr>
+          <p:cNvPr id="132" name="表 131">
+            <a:extLst>
+              <a:ext uri="{FF2B5EF4-FFF2-40B4-BE49-F238E27FC236}">
+                <a16:creationId xmlns:a16="http://schemas.microsoft.com/office/drawing/2014/main" id="{06F79086-F400-41BC-D9F8-2344287BF318}"/>
+              </a:ext>
+            </a:extLst>
+          </p:cNvPr>
+          <p:cNvGraphicFramePr>
+            <a:graphicFrameLocks noGrp="1"/>
+          </p:cNvGraphicFramePr>
+          <p:nvPr/>
+        </p:nvGraphicFramePr>
+        <p:xfrm>
+          <a:off x="354254" y="1465339"/>
+          <a:ext cx="5660103" cy="3406140"/>
+        </p:xfrm>
+        <a:graphic>
+          <a:graphicData uri="http://schemas.openxmlformats.org/drawingml/2006/table">
+            <a:tbl>
+              <a:tblPr firstRow="1" bandRow="1">
+                <a:tableStyleId>{5C22544A-7EE6-4342-B048-85BDC9FD1C3A}</a:tableStyleId>
+              </a:tblPr>
+              <a:tblGrid>
+                <a:gridCol w="760890">
+                  <a:extLst>
+                    <a:ext uri="{9D8B030D-6E8A-4147-A177-3AD203B41FA5}">
+                      <a16:colId xmlns:a16="http://schemas.microsoft.com/office/drawing/2014/main" val="2237471391"/>
+                    </a:ext>
+                  </a:extLst>
+                </a:gridCol>
+                <a:gridCol w="1384800">
+                  <a:extLst>
+                    <a:ext uri="{9D8B030D-6E8A-4147-A177-3AD203B41FA5}">
+                      <a16:colId xmlns:a16="http://schemas.microsoft.com/office/drawing/2014/main" val="3898449142"/>
+                    </a:ext>
+                  </a:extLst>
+                </a:gridCol>
+                <a:gridCol w="3514413">
+                  <a:extLst>
+                    <a:ext uri="{9D8B030D-6E8A-4147-A177-3AD203B41FA5}">
+                      <a16:colId xmlns:a16="http://schemas.microsoft.com/office/drawing/2014/main" val="183463918"/>
+                    </a:ext>
+                  </a:extLst>
+                </a:gridCol>
+              </a:tblGrid>
+              <a:tr h="174637">
+                <a:tc>
+                  <a:txBody>
+                    <a:bodyPr/>
+                    <a:lstStyle/>
+                    <a:p>
+                      <a:pPr algn="ctr"/>
+                      <a:r>
+                        <a:rPr kumimoji="1" lang="ja-JP" altLang="en-US" sz="1050">
+                          <a:latin typeface="メイリオ" panose="020B0604030504040204" pitchFamily="50" charset="-128"/>
+                          <a:ea typeface="メイリオ" panose="020B0604030504040204" pitchFamily="50" charset="-128"/>
+                        </a:rPr>
+                        <a:t>カテゴリ</a:t>
+                      </a:r>
+                    </a:p>
+                  </a:txBody>
+                  <a:tcPr/>
+                </a:tc>
+                <a:tc>
+                  <a:txBody>
+                    <a:bodyPr/>
+                    <a:lstStyle/>
+                    <a:p>
+                      <a:pPr algn="ctr"/>
+                      <a:r>
+                        <a:rPr kumimoji="1" lang="ja-JP" altLang="en-US" sz="1050">
+                          <a:latin typeface="メイリオ" panose="020B0604030504040204" pitchFamily="50" charset="-128"/>
+                          <a:ea typeface="メイリオ" panose="020B0604030504040204" pitchFamily="50" charset="-128"/>
+                        </a:rPr>
+                        <a:t>スキル</a:t>
+                      </a:r>
+                    </a:p>
+                  </a:txBody>
+                  <a:tcPr/>
+                </a:tc>
+                <a:tc>
+                  <a:txBody>
+                    <a:bodyPr/>
+                    <a:lstStyle/>
+                    <a:p>
+                      <a:pPr algn="ctr"/>
+                      <a:r>
+                        <a:rPr kumimoji="1" lang="ja-JP" altLang="en-US" sz="1050">
+                          <a:latin typeface="メイリオ" panose="020B0604030504040204" pitchFamily="50" charset="-128"/>
+                          <a:ea typeface="メイリオ" panose="020B0604030504040204" pitchFamily="50" charset="-128"/>
+                        </a:rPr>
+                        <a:t>できること</a:t>
+                      </a:r>
+                    </a:p>
+                  </a:txBody>
+                  <a:tcPr/>
+                </a:tc>
+                <a:extLst>
+                  <a:ext uri="{0D108BD9-81ED-4DB2-BD59-A6C34878D82A}">
+                    <a16:rowId xmlns:a16="http://schemas.microsoft.com/office/drawing/2014/main" val="3878867932"/>
+                  </a:ext>
+                </a:extLst>
+              </a:tr>
+              <a:tr h="508036">
+                <a:tc>
+                  <a:txBody>
+                    <a:bodyPr/>
+                    <a:lstStyle/>
+                    <a:p>
+                      <a:r>
+                        <a:rPr kumimoji="1" lang="ja-JP" altLang="en-US" sz="1050" b="1" i="0" kern="1200">
+                          <a:solidFill>
+                            <a:schemeClr val="dk1"/>
+                          </a:solidFill>
+                          <a:effectLst/>
+                          <a:latin typeface="メイリオ" panose="020B0604030504040204" pitchFamily="50" charset="-128"/>
+                          <a:ea typeface="メイリオ" panose="020B0604030504040204" pitchFamily="50" charset="-128"/>
+                          <a:cs typeface="+mn-cs"/>
+                        </a:rPr>
+                        <a:t>ドキュメント</a:t>
+                      </a:r>
+                    </a:p>
+                  </a:txBody>
+                  <a:tcPr/>
+                </a:tc>
+                <a:tc>
+                  <a:txBody>
+                    <a:bodyPr/>
+                    <a:lstStyle/>
+                    <a:p>
+                      <a:r>
+                        <a:rPr lang="en-US" altLang="ja-JP" sz="1050">
+                          <a:latin typeface="メイリオ" panose="020B0604030504040204" pitchFamily="50" charset="-128"/>
+                          <a:ea typeface="メイリオ" panose="020B0604030504040204" pitchFamily="50" charset="-128"/>
+                        </a:rPr>
+                        <a:t>Word, </a:t>
+                      </a:r>
+                    </a:p>
+                    <a:p>
+                      <a:r>
+                        <a:rPr lang="en-US" altLang="ja-JP" sz="1050">
+                          <a:latin typeface="メイリオ" panose="020B0604030504040204" pitchFamily="50" charset="-128"/>
+                          <a:ea typeface="メイリオ" panose="020B0604030504040204" pitchFamily="50" charset="-128"/>
+                        </a:rPr>
+                        <a:t>Excel, </a:t>
+                      </a:r>
+                    </a:p>
+                    <a:p>
+                      <a:r>
+                        <a:rPr lang="en-US" altLang="ja-JP" sz="1050">
+                          <a:latin typeface="メイリオ" panose="020B0604030504040204" pitchFamily="50" charset="-128"/>
+                          <a:ea typeface="メイリオ" panose="020B0604030504040204" pitchFamily="50" charset="-128"/>
+                        </a:rPr>
+                        <a:t>PowerPoint, </a:t>
+                      </a:r>
+                    </a:p>
+                    <a:p>
+                      <a:r>
+                        <a:rPr lang="en-US" altLang="ja-JP" sz="1050">
+                          <a:latin typeface="メイリオ" panose="020B0604030504040204" pitchFamily="50" charset="-128"/>
+                          <a:ea typeface="メイリオ" panose="020B0604030504040204" pitchFamily="50" charset="-128"/>
+                        </a:rPr>
+                        <a:t>PDF</a:t>
+                      </a:r>
+                      <a:endParaRPr kumimoji="1" lang="ja-JP" altLang="en-US" sz="1050">
+                        <a:latin typeface="メイリオ" panose="020B0604030504040204" pitchFamily="50" charset="-128"/>
+                        <a:ea typeface="メイリオ" panose="020B0604030504040204" pitchFamily="50" charset="-128"/>
+                      </a:endParaRPr>
+                    </a:p>
+                  </a:txBody>
+                  <a:tcPr/>
+                </a:tc>
+                <a:tc>
+                  <a:txBody>
+                    <a:bodyPr/>
+                    <a:lstStyle/>
+                    <a:p>
+                      <a:pPr marL="171450" indent="-171450">
+                        <a:buFont typeface="Arial" panose="020B0604020202020204" pitchFamily="34" charset="0"/>
+                        <a:buChar char="•"/>
+                      </a:pPr>
+                      <a:r>
+                        <a:rPr kumimoji="1" lang="en-US" altLang="ja-JP" sz="1050">
+                          <a:latin typeface="メイリオ" panose="020B0604030504040204" pitchFamily="50" charset="-128"/>
+                          <a:ea typeface="メイリオ" panose="020B0604030504040204" pitchFamily="50" charset="-128"/>
+                        </a:rPr>
+                        <a:t>Word</a:t>
+                      </a:r>
+                      <a:r>
+                        <a:rPr kumimoji="1" lang="ja-JP" altLang="en-US" sz="1050">
+                          <a:latin typeface="メイリオ" panose="020B0604030504040204" pitchFamily="50" charset="-128"/>
+                          <a:ea typeface="メイリオ" panose="020B0604030504040204" pitchFamily="50" charset="-128"/>
+                        </a:rPr>
+                        <a:t>、</a:t>
+                      </a:r>
+                      <a:r>
+                        <a:rPr kumimoji="1" lang="en-US" altLang="ja-JP" sz="1050">
+                          <a:latin typeface="メイリオ" panose="020B0604030504040204" pitchFamily="50" charset="-128"/>
+                          <a:ea typeface="メイリオ" panose="020B0604030504040204" pitchFamily="50" charset="-128"/>
+                        </a:rPr>
+                        <a:t>Excel</a:t>
+                      </a:r>
+                      <a:r>
+                        <a:rPr kumimoji="1" lang="ja-JP" altLang="en-US" sz="1050">
+                          <a:latin typeface="メイリオ" panose="020B0604030504040204" pitchFamily="50" charset="-128"/>
+                          <a:ea typeface="メイリオ" panose="020B0604030504040204" pitchFamily="50" charset="-128"/>
+                        </a:rPr>
+                        <a:t>、</a:t>
+                      </a:r>
+                      <a:r>
+                        <a:rPr kumimoji="1" lang="en-US" altLang="ja-JP" sz="1050">
+                          <a:latin typeface="メイリオ" panose="020B0604030504040204" pitchFamily="50" charset="-128"/>
+                          <a:ea typeface="メイリオ" panose="020B0604030504040204" pitchFamily="50" charset="-128"/>
+                        </a:rPr>
+                        <a:t>PowerPoint</a:t>
+                      </a:r>
+                      <a:r>
+                        <a:rPr kumimoji="1" lang="ja-JP" altLang="en-US" sz="1050">
+                          <a:latin typeface="メイリオ" panose="020B0604030504040204" pitchFamily="50" charset="-128"/>
+                          <a:ea typeface="メイリオ" panose="020B0604030504040204" pitchFamily="50" charset="-128"/>
+                        </a:rPr>
+                        <a:t>、</a:t>
+                      </a:r>
+                      <a:r>
+                        <a:rPr kumimoji="1" lang="en-US" altLang="ja-JP" sz="1050">
+                          <a:latin typeface="メイリオ" panose="020B0604030504040204" pitchFamily="50" charset="-128"/>
+                          <a:ea typeface="メイリオ" panose="020B0604030504040204" pitchFamily="50" charset="-128"/>
+                        </a:rPr>
+                        <a:t>PDF </a:t>
+                      </a:r>
+                      <a:r>
+                        <a:rPr kumimoji="1" lang="ja-JP" altLang="en-US" sz="1050">
+                          <a:latin typeface="メイリオ" panose="020B0604030504040204" pitchFamily="50" charset="-128"/>
+                          <a:ea typeface="メイリオ" panose="020B0604030504040204" pitchFamily="50" charset="-128"/>
+                        </a:rPr>
+                        <a:t>をゼロから作成</a:t>
+                      </a:r>
+                      <a:endParaRPr kumimoji="1" lang="en-US" altLang="ja-JP" sz="1050">
+                        <a:latin typeface="メイリオ" panose="020B0604030504040204" pitchFamily="50" charset="-128"/>
+                        <a:ea typeface="メイリオ" panose="020B0604030504040204" pitchFamily="50" charset="-128"/>
+                      </a:endParaRPr>
+                    </a:p>
+                    <a:p>
+                      <a:pPr marL="171450" indent="-171450">
+                        <a:buFont typeface="Arial" panose="020B0604020202020204" pitchFamily="34" charset="0"/>
+                        <a:buChar char="•"/>
+                      </a:pPr>
+                      <a:r>
+                        <a:rPr kumimoji="1" lang="ja-JP" altLang="en-US" sz="1050">
+                          <a:latin typeface="メイリオ" panose="020B0604030504040204" pitchFamily="50" charset="-128"/>
+                          <a:ea typeface="メイリオ" panose="020B0604030504040204" pitchFamily="50" charset="-128"/>
+                        </a:rPr>
+                        <a:t>会話形式で、存のドキュメントを編集および調整</a:t>
+                      </a:r>
+                      <a:endParaRPr kumimoji="1" lang="en-US" altLang="ja-JP" sz="1050" b="1">
+                        <a:latin typeface="メイリオ" panose="020B0604030504040204" pitchFamily="50" charset="-128"/>
+                        <a:ea typeface="メイリオ" panose="020B0604030504040204" pitchFamily="50" charset="-128"/>
+                      </a:endParaRPr>
+                    </a:p>
+                    <a:p>
+                      <a:pPr marL="171450" indent="-171450">
+                        <a:buFont typeface="Arial" panose="020B0604020202020204" pitchFamily="34" charset="0"/>
+                        <a:buChar char="•"/>
+                      </a:pPr>
+                      <a:r>
+                        <a:rPr kumimoji="1" lang="en-US" altLang="ja-JP" sz="1050" b="1">
+                          <a:latin typeface="メイリオ" panose="020B0604030504040204" pitchFamily="50" charset="-128"/>
+                          <a:ea typeface="メイリオ" panose="020B0604030504040204" pitchFamily="50" charset="-128"/>
+                        </a:rPr>
+                        <a:t>Work IQ</a:t>
+                      </a:r>
+                      <a:r>
+                        <a:rPr kumimoji="1" lang="en-US" altLang="ja-JP" sz="1050">
+                          <a:latin typeface="メイリオ" panose="020B0604030504040204" pitchFamily="50" charset="-128"/>
+                          <a:ea typeface="メイリオ" panose="020B0604030504040204" pitchFamily="50" charset="-128"/>
+                        </a:rPr>
+                        <a:t> </a:t>
+                      </a:r>
+                      <a:r>
+                        <a:rPr kumimoji="1" lang="ja-JP" altLang="en-US" sz="1050">
+                          <a:latin typeface="メイリオ" panose="020B0604030504040204" pitchFamily="50" charset="-128"/>
+                          <a:ea typeface="メイリオ" panose="020B0604030504040204" pitchFamily="50" charset="-128"/>
+                        </a:rPr>
+                        <a:t>全体を参照して、必要なコンテンツを取り込む</a:t>
+                      </a:r>
+                      <a:endParaRPr kumimoji="1" lang="en-US" altLang="ja-JP" sz="1050">
+                        <a:latin typeface="メイリオ" panose="020B0604030504040204" pitchFamily="50" charset="-128"/>
+                        <a:ea typeface="メイリオ" panose="020B0604030504040204" pitchFamily="50" charset="-128"/>
+                      </a:endParaRPr>
+                    </a:p>
+                    <a:p>
+                      <a:pPr marL="0" indent="0">
+                        <a:buFont typeface="Arial" panose="020B0604020202020204" pitchFamily="34" charset="0"/>
+                        <a:buNone/>
+                      </a:pPr>
+                      <a:r>
+                        <a:rPr kumimoji="1" lang="en-US" altLang="ja-JP" sz="1050">
+                          <a:latin typeface="メイリオ" panose="020B0604030504040204" pitchFamily="50" charset="-128"/>
+                          <a:ea typeface="メイリオ" panose="020B0604030504040204" pitchFamily="50" charset="-128"/>
+                        </a:rPr>
+                        <a:t>※ </a:t>
+                      </a:r>
+                      <a:r>
+                        <a:rPr kumimoji="1" lang="en-US" altLang="ja-JP" sz="1050" b="1">
+                          <a:latin typeface="メイリオ" panose="020B0604030504040204" pitchFamily="50" charset="-128"/>
+                          <a:ea typeface="メイリオ" panose="020B0604030504040204" pitchFamily="50" charset="-128"/>
+                        </a:rPr>
+                        <a:t>Work IQ</a:t>
+                      </a:r>
+                      <a:r>
+                        <a:rPr kumimoji="1" lang="ja-JP" altLang="en-US" sz="1050">
+                          <a:latin typeface="メイリオ" panose="020B0604030504040204" pitchFamily="50" charset="-128"/>
+                          <a:ea typeface="メイリオ" panose="020B0604030504040204" pitchFamily="50" charset="-128"/>
+                        </a:rPr>
+                        <a:t>：</a:t>
+                      </a:r>
+                      <a:r>
+                        <a:rPr kumimoji="1" lang="en-US" altLang="ja-JP" sz="1050">
+                          <a:latin typeface="メイリオ" panose="020B0604030504040204" pitchFamily="50" charset="-128"/>
+                          <a:ea typeface="メイリオ" panose="020B0604030504040204" pitchFamily="50" charset="-128"/>
+                        </a:rPr>
+                        <a:t>M365</a:t>
+                      </a:r>
+                      <a:r>
+                        <a:rPr kumimoji="1" lang="ja-JP" altLang="en-US" sz="1050">
+                          <a:latin typeface="メイリオ" panose="020B0604030504040204" pitchFamily="50" charset="-128"/>
+                          <a:ea typeface="メイリオ" panose="020B0604030504040204" pitchFamily="50" charset="-128"/>
+                        </a:rPr>
+                        <a:t>上の業務知識を構造化し、</a:t>
+                      </a:r>
+                      <a:r>
+                        <a:rPr kumimoji="1" lang="en-US" altLang="ja-JP" sz="1050">
+                          <a:latin typeface="メイリオ" panose="020B0604030504040204" pitchFamily="50" charset="-128"/>
+                          <a:ea typeface="メイリオ" panose="020B0604030504040204" pitchFamily="50" charset="-128"/>
+                        </a:rPr>
+                        <a:t>AI</a:t>
+                      </a:r>
+                      <a:r>
+                        <a:rPr kumimoji="1" lang="ja-JP" altLang="en-US" sz="1050">
+                          <a:latin typeface="メイリオ" panose="020B0604030504040204" pitchFamily="50" charset="-128"/>
+                          <a:ea typeface="メイリオ" panose="020B0604030504040204" pitchFamily="50" charset="-128"/>
+                        </a:rPr>
+                        <a:t>に仕事の文脈を渡す機能</a:t>
+                      </a:r>
+                    </a:p>
+                  </a:txBody>
+                  <a:tcPr/>
+                </a:tc>
+                <a:extLst>
+                  <a:ext uri="{0D108BD9-81ED-4DB2-BD59-A6C34878D82A}">
+                    <a16:rowId xmlns:a16="http://schemas.microsoft.com/office/drawing/2014/main" val="1918060578"/>
+                  </a:ext>
+                </a:extLst>
+              </a:tr>
+              <a:tr h="952567">
+                <a:tc>
+                  <a:txBody>
+                    <a:bodyPr/>
+                    <a:lstStyle/>
+                    <a:p>
+                      <a:r>
+                        <a:rPr kumimoji="1" lang="ja-JP" altLang="en-US" sz="1050" b="1" i="0" kern="1200">
+                          <a:solidFill>
+                            <a:schemeClr val="dk1"/>
+                          </a:solidFill>
+                          <a:effectLst/>
+                          <a:latin typeface="メイリオ" panose="020B0604030504040204" pitchFamily="50" charset="-128"/>
+                          <a:ea typeface="メイリオ" panose="020B0604030504040204" pitchFamily="50" charset="-128"/>
+                          <a:cs typeface="+mn-cs"/>
+                        </a:rPr>
+                        <a:t>コミュニケーション</a:t>
+                      </a:r>
+                    </a:p>
+                  </a:txBody>
+                  <a:tcPr/>
+                </a:tc>
+                <a:tc>
+                  <a:txBody>
+                    <a:bodyPr/>
+                    <a:lstStyle/>
+                    <a:p>
+                      <a:r>
+                        <a:rPr lang="en-US" altLang="ja-JP" sz="1050">
+                          <a:latin typeface="メイリオ" panose="020B0604030504040204" pitchFamily="50" charset="-128"/>
+                          <a:ea typeface="メイリオ" panose="020B0604030504040204" pitchFamily="50" charset="-128"/>
+                        </a:rPr>
+                        <a:t>Email, </a:t>
+                      </a:r>
+                    </a:p>
+                    <a:p>
+                      <a:r>
+                        <a:rPr lang="en-US" altLang="ja-JP" sz="1050">
+                          <a:latin typeface="メイリオ" panose="020B0604030504040204" pitchFamily="50" charset="-128"/>
+                          <a:ea typeface="メイリオ" panose="020B0604030504040204" pitchFamily="50" charset="-128"/>
+                        </a:rPr>
+                        <a:t>Scheduling, </a:t>
+                      </a:r>
+                    </a:p>
+                    <a:p>
+                      <a:r>
+                        <a:rPr lang="en-US" altLang="ja-JP" sz="1050">
+                          <a:latin typeface="メイリオ" panose="020B0604030504040204" pitchFamily="50" charset="-128"/>
+                          <a:ea typeface="メイリオ" panose="020B0604030504040204" pitchFamily="50" charset="-128"/>
+                        </a:rPr>
+                        <a:t>Calendar Management, </a:t>
+                      </a:r>
+                    </a:p>
+                    <a:p>
+                      <a:r>
+                        <a:rPr lang="en-US" altLang="ja-JP" sz="1050">
+                          <a:latin typeface="メイリオ" panose="020B0604030504040204" pitchFamily="50" charset="-128"/>
+                          <a:ea typeface="メイリオ" panose="020B0604030504040204" pitchFamily="50" charset="-128"/>
+                        </a:rPr>
+                        <a:t>Meetings, </a:t>
+                      </a:r>
+                    </a:p>
+                    <a:p>
+                      <a:r>
+                        <a:rPr lang="en-US" altLang="ja-JP" sz="1050">
+                          <a:latin typeface="メイリオ" panose="020B0604030504040204" pitchFamily="50" charset="-128"/>
+                          <a:ea typeface="メイリオ" panose="020B0604030504040204" pitchFamily="50" charset="-128"/>
+                        </a:rPr>
+                        <a:t>Daily Briefing, </a:t>
+                      </a:r>
+                    </a:p>
+                    <a:p>
+                      <a:r>
+                        <a:rPr lang="en-US" altLang="ja-JP" sz="1050">
+                          <a:latin typeface="メイリオ" panose="020B0604030504040204" pitchFamily="50" charset="-128"/>
+                          <a:ea typeface="メイリオ" panose="020B0604030504040204" pitchFamily="50" charset="-128"/>
+                        </a:rPr>
+                        <a:t>Communications,</a:t>
+                      </a:r>
+                      <a:r>
+                        <a:rPr lang="ja-JP" altLang="en-US" sz="1050">
+                          <a:latin typeface="メイリオ" panose="020B0604030504040204" pitchFamily="50" charset="-128"/>
+                          <a:ea typeface="メイリオ" panose="020B0604030504040204" pitchFamily="50" charset="-128"/>
+                        </a:rPr>
+                        <a:t>　</a:t>
+                      </a:r>
+                      <a:endParaRPr lang="en-US" altLang="ja-JP" sz="1050">
+                        <a:latin typeface="メイリオ" panose="020B0604030504040204" pitchFamily="50" charset="-128"/>
+                        <a:ea typeface="メイリオ" panose="020B0604030504040204" pitchFamily="50" charset="-128"/>
+                      </a:endParaRPr>
+                    </a:p>
+                    <a:p>
+                      <a:r>
+                        <a:rPr lang="en-US" altLang="ja-JP" sz="1050">
+                          <a:latin typeface="メイリオ" panose="020B0604030504040204" pitchFamily="50" charset="-128"/>
+                          <a:ea typeface="メイリオ" panose="020B0604030504040204" pitchFamily="50" charset="-128"/>
+                        </a:rPr>
+                        <a:t>Adaptive Cards</a:t>
+                      </a:r>
+                      <a:endParaRPr kumimoji="1" lang="ja-JP" altLang="en-US" sz="1050">
+                        <a:latin typeface="メイリオ" panose="020B0604030504040204" pitchFamily="50" charset="-128"/>
+                        <a:ea typeface="メイリオ" panose="020B0604030504040204" pitchFamily="50" charset="-128"/>
+                      </a:endParaRPr>
+                    </a:p>
+                  </a:txBody>
+                  <a:tcPr/>
+                </a:tc>
+                <a:tc>
+                  <a:txBody>
+                    <a:bodyPr/>
+                    <a:lstStyle/>
+                    <a:p>
+                      <a:pPr marL="171450" indent="-171450">
+                        <a:buFont typeface="Arial" panose="020B0604020202020204" pitchFamily="34" charset="0"/>
+                        <a:buChar char="•"/>
+                      </a:pPr>
+                      <a:r>
+                        <a:rPr kumimoji="1" lang="ja-JP" altLang="en-US" sz="1050">
+                          <a:latin typeface="メイリオ" panose="020B0604030504040204" pitchFamily="50" charset="-128"/>
+                          <a:ea typeface="メイリオ" panose="020B0604030504040204" pitchFamily="50" charset="-128"/>
+                        </a:rPr>
+                        <a:t>メールの下書き、送信</a:t>
+                      </a:r>
+                    </a:p>
+                    <a:p>
+                      <a:pPr marL="171450" indent="-171450">
+                        <a:buFont typeface="Arial" panose="020B0604020202020204" pitchFamily="34" charset="0"/>
+                        <a:buChar char="•"/>
+                      </a:pPr>
+                      <a:r>
+                        <a:rPr kumimoji="1" lang="en-US" altLang="ja-JP" sz="1050">
+                          <a:latin typeface="メイリオ" panose="020B0604030504040204" pitchFamily="50" charset="-128"/>
+                          <a:ea typeface="メイリオ" panose="020B0604030504040204" pitchFamily="50" charset="-128"/>
+                        </a:rPr>
+                        <a:t>Teams </a:t>
+                      </a:r>
+                      <a:r>
+                        <a:rPr kumimoji="1" lang="ja-JP" altLang="en-US" sz="1050">
+                          <a:latin typeface="メイリオ" panose="020B0604030504040204" pitchFamily="50" charset="-128"/>
+                          <a:ea typeface="メイリオ" panose="020B0604030504040204" pitchFamily="50" charset="-128"/>
+                        </a:rPr>
+                        <a:t>チャネルで</a:t>
+                      </a:r>
+                      <a:r>
+                        <a:rPr kumimoji="1" lang="en-US" altLang="ja-JP" sz="1050">
+                          <a:latin typeface="メイリオ" panose="020B0604030504040204" pitchFamily="50" charset="-128"/>
+                          <a:ea typeface="メイリオ" panose="020B0604030504040204" pitchFamily="50" charset="-128"/>
+                        </a:rPr>
+                        <a:t>:1 </a:t>
+                      </a:r>
+                      <a:r>
+                        <a:rPr kumimoji="1" lang="ja-JP" altLang="en-US" sz="1050">
+                          <a:latin typeface="メイリオ" panose="020B0604030504040204" pitchFamily="50" charset="-128"/>
+                          <a:ea typeface="メイリオ" panose="020B0604030504040204" pitchFamily="50" charset="-128"/>
+                        </a:rPr>
+                        <a:t>またはグループ </a:t>
+                      </a:r>
+                      <a:r>
+                        <a:rPr kumimoji="1" lang="en-US" altLang="ja-JP" sz="1050">
+                          <a:latin typeface="メイリオ" panose="020B0604030504040204" pitchFamily="50" charset="-128"/>
+                          <a:ea typeface="メイリオ" panose="020B0604030504040204" pitchFamily="50" charset="-128"/>
+                        </a:rPr>
+                        <a:t>Teams </a:t>
+                      </a:r>
+                      <a:r>
+                        <a:rPr kumimoji="1" lang="ja-JP" altLang="en-US" sz="1050">
+                          <a:latin typeface="メイリオ" panose="020B0604030504040204" pitchFamily="50" charset="-128"/>
+                          <a:ea typeface="メイリオ" panose="020B0604030504040204" pitchFamily="50" charset="-128"/>
+                        </a:rPr>
+                        <a:t>チャットで直接メッセージを送信</a:t>
+                      </a:r>
+                      <a:endParaRPr kumimoji="1" lang="en-US" altLang="ja-JP" sz="1050">
+                        <a:latin typeface="メイリオ" panose="020B0604030504040204" pitchFamily="50" charset="-128"/>
+                        <a:ea typeface="メイリオ" panose="020B0604030504040204" pitchFamily="50" charset="-128"/>
+                      </a:endParaRPr>
+                    </a:p>
+                    <a:p>
+                      <a:pPr marL="171450" indent="-171450">
+                        <a:buFont typeface="Arial" panose="020B0604020202020204" pitchFamily="34" charset="0"/>
+                        <a:buChar char="•"/>
+                      </a:pPr>
+                      <a:r>
+                        <a:rPr kumimoji="1" lang="ja-JP" altLang="en-US" sz="1050">
+                          <a:latin typeface="メイリオ" panose="020B0604030504040204" pitchFamily="50" charset="-128"/>
+                          <a:ea typeface="メイリオ" panose="020B0604030504040204" pitchFamily="50" charset="-128"/>
+                        </a:rPr>
+                        <a:t>電子メールで </a:t>
+                      </a:r>
+                      <a:r>
+                        <a:rPr kumimoji="1" lang="en-US" altLang="ja-JP" sz="1050">
+                          <a:latin typeface="メイリオ" panose="020B0604030504040204" pitchFamily="50" charset="-128"/>
+                          <a:ea typeface="メイリオ" panose="020B0604030504040204" pitchFamily="50" charset="-128"/>
+                        </a:rPr>
+                        <a:t>HTML </a:t>
+                      </a:r>
+                      <a:r>
+                        <a:rPr kumimoji="1" lang="ja-JP" altLang="en-US" sz="1050">
+                          <a:latin typeface="メイリオ" panose="020B0604030504040204" pitchFamily="50" charset="-128"/>
+                          <a:ea typeface="メイリオ" panose="020B0604030504040204" pitchFamily="50" charset="-128"/>
+                        </a:rPr>
+                        <a:t>ニュースレターを作成して送信</a:t>
+                      </a:r>
+                    </a:p>
+                    <a:p>
+                      <a:pPr marL="171450" indent="-171450">
+                        <a:buFont typeface="Arial" panose="020B0604020202020204" pitchFamily="34" charset="0"/>
+                        <a:buChar char="•"/>
+                      </a:pPr>
+                      <a:r>
+                        <a:rPr kumimoji="1" lang="ja-JP" altLang="en-US" sz="1050">
+                          <a:latin typeface="メイリオ" panose="020B0604030504040204" pitchFamily="50" charset="-128"/>
+                          <a:ea typeface="メイリオ" panose="020B0604030504040204" pitchFamily="50" charset="-128"/>
+                        </a:rPr>
+                        <a:t>メールをフォルダーに並べ替え、メールを削除し、インラインで応答することで受信トレイを管理する</a:t>
+                      </a:r>
+                    </a:p>
+                    <a:p>
+                      <a:pPr marL="171450" indent="-171450">
+                        <a:buFont typeface="Arial" panose="020B0604020202020204" pitchFamily="34" charset="0"/>
+                        <a:buChar char="•"/>
+                      </a:pPr>
+                      <a:r>
+                        <a:rPr kumimoji="1" lang="ja-JP" altLang="en-US" sz="1050">
+                          <a:latin typeface="メイリオ" panose="020B0604030504040204" pitchFamily="50" charset="-128"/>
+                          <a:ea typeface="メイリオ" panose="020B0604030504040204" pitchFamily="50" charset="-128"/>
+                        </a:rPr>
+                        <a:t>状態の更新、お知らせ、フォローアップなど、洗練された利害関係者のコミュニケーションを準備</a:t>
+                      </a:r>
+                    </a:p>
+                  </a:txBody>
+                  <a:tcPr/>
+                </a:tc>
+                <a:extLst>
+                  <a:ext uri="{0D108BD9-81ED-4DB2-BD59-A6C34878D82A}">
+                    <a16:rowId xmlns:a16="http://schemas.microsoft.com/office/drawing/2014/main" val="3578563098"/>
+                  </a:ext>
+                </a:extLst>
+              </a:tr>
+              <a:tr h="508036">
+                <a:tc>
+                  <a:txBody>
+                    <a:bodyPr/>
+                    <a:lstStyle/>
+                    <a:p>
+                      <a:pPr marL="0" marR="0" lvl="0" indent="0" algn="l" defTabSz="914400" rtl="0" eaLnBrk="1" fontAlgn="auto" latinLnBrk="0" hangingPunct="1">
+                        <a:lnSpc>
+                          <a:spcPct val="100000"/>
+                        </a:lnSpc>
+                        <a:spcBef>
+                          <a:spcPts val="0"/>
+                        </a:spcBef>
+                        <a:spcAft>
+                          <a:spcPts val="0"/>
+                        </a:spcAft>
+                        <a:buClrTx/>
+                        <a:buSzTx/>
+                        <a:buFontTx/>
+                        <a:buNone/>
+                        <a:tabLst/>
+                        <a:defRPr/>
+                      </a:pPr>
+                      <a:r>
+                        <a:rPr kumimoji="1" lang="ja-JP" altLang="en-US" sz="1050" b="1" i="0" kern="1200">
+                          <a:solidFill>
+                            <a:schemeClr val="dk1"/>
+                          </a:solidFill>
+                          <a:effectLst/>
+                          <a:latin typeface="メイリオ" panose="020B0604030504040204" pitchFamily="50" charset="-128"/>
+                          <a:ea typeface="メイリオ" panose="020B0604030504040204" pitchFamily="50" charset="-128"/>
+                          <a:cs typeface="+mn-cs"/>
+                        </a:rPr>
+                        <a:t>調査と検索</a:t>
+                      </a:r>
+                    </a:p>
+                  </a:txBody>
+                  <a:tcPr/>
+                </a:tc>
+                <a:tc>
+                  <a:txBody>
+                    <a:bodyPr/>
+                    <a:lstStyle/>
+                    <a:p>
+                      <a:r>
+                        <a:rPr lang="en-US" altLang="ja-JP" sz="1050">
+                          <a:latin typeface="メイリオ" panose="020B0604030504040204" pitchFamily="50" charset="-128"/>
+                          <a:ea typeface="メイリオ" panose="020B0604030504040204" pitchFamily="50" charset="-128"/>
+                        </a:rPr>
+                        <a:t>Enterprise Search, </a:t>
+                      </a:r>
+                    </a:p>
+                    <a:p>
+                      <a:r>
+                        <a:rPr lang="en-US" altLang="ja-JP" sz="1050">
+                          <a:latin typeface="メイリオ" panose="020B0604030504040204" pitchFamily="50" charset="-128"/>
+                          <a:ea typeface="メイリオ" panose="020B0604030504040204" pitchFamily="50" charset="-128"/>
+                        </a:rPr>
+                        <a:t>Deep Research</a:t>
+                      </a:r>
+                      <a:endParaRPr kumimoji="1" lang="ja-JP" altLang="en-US" sz="1050">
+                        <a:latin typeface="メイリオ" panose="020B0604030504040204" pitchFamily="50" charset="-128"/>
+                        <a:ea typeface="メイリオ" panose="020B0604030504040204" pitchFamily="50" charset="-128"/>
+                      </a:endParaRPr>
+                    </a:p>
+                  </a:txBody>
+                  <a:tcPr/>
+                </a:tc>
+                <a:tc>
+                  <a:txBody>
+                    <a:bodyPr/>
+                    <a:lstStyle/>
+                    <a:p>
+                      <a:pPr marL="171450" indent="-171450">
+                        <a:buFont typeface="Arial" panose="020B0604020202020204" pitchFamily="34" charset="0"/>
+                        <a:buChar char="•"/>
+                      </a:pPr>
+                      <a:r>
+                        <a:rPr kumimoji="1" lang="ja-JP" altLang="en-US" sz="1050">
+                          <a:latin typeface="メイリオ" panose="020B0604030504040204" pitchFamily="50" charset="-128"/>
+                          <a:ea typeface="メイリオ" panose="020B0604030504040204" pitchFamily="50" charset="-128"/>
+                        </a:rPr>
+                        <a:t>組織全体で検索して、ドキュメント、メッセージ、および情報を検索</a:t>
+                      </a:r>
+                      <a:endParaRPr kumimoji="1" lang="en-US" altLang="ja-JP" sz="1050">
+                        <a:latin typeface="メイリオ" panose="020B0604030504040204" pitchFamily="50" charset="-128"/>
+                        <a:ea typeface="メイリオ" panose="020B0604030504040204" pitchFamily="50" charset="-128"/>
+                      </a:endParaRPr>
+                    </a:p>
+                    <a:p>
+                      <a:pPr marL="171450" indent="-171450">
+                        <a:buFont typeface="Arial" panose="020B0604020202020204" pitchFamily="34" charset="0"/>
+                        <a:buChar char="•"/>
+                      </a:pPr>
+                      <a:r>
+                        <a:rPr kumimoji="1" lang="ja-JP" altLang="en-US" sz="1050">
+                          <a:latin typeface="メイリオ" panose="020B0604030504040204" pitchFamily="50" charset="-128"/>
+                          <a:ea typeface="メイリオ" panose="020B0604030504040204" pitchFamily="50" charset="-128"/>
+                        </a:rPr>
+                        <a:t>複数のソースから包括的なレポートに情報を合成する詳細な調査を実行</a:t>
+                      </a:r>
+                      <a:endParaRPr kumimoji="1" lang="en-US" altLang="ja-JP" sz="1050">
+                        <a:latin typeface="メイリオ" panose="020B0604030504040204" pitchFamily="50" charset="-128"/>
+                        <a:ea typeface="メイリオ" panose="020B0604030504040204" pitchFamily="50" charset="-128"/>
+                      </a:endParaRPr>
+                    </a:p>
+                  </a:txBody>
+                  <a:tcPr/>
+                </a:tc>
+                <a:extLst>
+                  <a:ext uri="{0D108BD9-81ED-4DB2-BD59-A6C34878D82A}">
+                    <a16:rowId xmlns:a16="http://schemas.microsoft.com/office/drawing/2014/main" val="2769939081"/>
+                  </a:ext>
+                </a:extLst>
+              </a:tr>
+            </a:tbl>
+          </a:graphicData>
+        </a:graphic>
+      </p:graphicFrame>
+      <p:sp>
+        <p:nvSpPr>
+          <p:cNvPr id="133" name="二等辺三角形 132">
+            <a:extLst>
+              <a:ext uri="{FF2B5EF4-FFF2-40B4-BE49-F238E27FC236}">
+                <a16:creationId xmlns:a16="http://schemas.microsoft.com/office/drawing/2014/main" id="{2A9B4B56-BFEB-9019-0071-BEF83299ACA9}"/>
+              </a:ext>
+            </a:extLst>
+          </p:cNvPr>
+          <p:cNvSpPr/>
+          <p:nvPr/>
+        </p:nvSpPr>
+        <p:spPr>
+          <a:xfrm rot="10800000">
+            <a:off x="2801754" y="5101460"/>
+            <a:ext cx="765104" cy="214473"/>
+          </a:xfrm>
+          <a:prstGeom prst="triangle">
+            <a:avLst/>
+          </a:prstGeom>
+          <a:solidFill>
+            <a:srgbClr val="002060"/>
+          </a:solidFill>
+          <a:ln>
+            <a:noFill/>
+          </a:ln>
+        </p:spPr>
+        <p:style>
+          <a:lnRef idx="2">
+            <a:schemeClr val="accent1">
+              <a:shade val="15000"/>
+            </a:schemeClr>
+          </a:lnRef>
+          <a:fillRef idx="1">
+            <a:schemeClr val="accent1"/>
+          </a:fillRef>
+          <a:effectRef idx="0">
+            <a:schemeClr val="accent1"/>
+          </a:effectRef>
+          <a:fontRef idx="minor">
+            <a:schemeClr val="lt1"/>
+          </a:fontRef>
+        </p:style>
+        <p:txBody>
+          <a:bodyPr rtlCol="0" anchor="ctr"/>
+          <a:lstStyle/>
+          <a:p>
+            <a:pPr algn="ctr"/>
+            <a:endParaRPr kumimoji="1" lang="ja-JP" altLang="en-US"/>
+          </a:p>
+        </p:txBody>
+      </p:sp>
+      <p:sp>
+        <p:nvSpPr>
+          <p:cNvPr id="134" name="テキスト ボックス 133">
+            <a:extLst>
+              <a:ext uri="{FF2B5EF4-FFF2-40B4-BE49-F238E27FC236}">
+                <a16:creationId xmlns:a16="http://schemas.microsoft.com/office/drawing/2014/main" id="{572BBF63-6B1F-FD3B-B82B-06F3E110A4FF}"/>
+              </a:ext>
+            </a:extLst>
+          </p:cNvPr>
+          <p:cNvSpPr txBox="1"/>
+          <p:nvPr/>
+        </p:nvSpPr>
+        <p:spPr>
+          <a:xfrm>
+            <a:off x="294445" y="5392661"/>
+            <a:ext cx="5719912" cy="800219"/>
+          </a:xfrm>
+          <a:prstGeom prst="rect">
+            <a:avLst/>
+          </a:prstGeom>
+          <a:noFill/>
+        </p:spPr>
+        <p:txBody>
+          <a:bodyPr wrap="square" rtlCol="0">
+            <a:spAutoFit/>
+          </a:bodyPr>
+          <a:lstStyle/>
+          <a:p>
+            <a:pPr algn="ctr">
+              <a:lnSpc>
+                <a:spcPct val="150000"/>
+              </a:lnSpc>
+            </a:pPr>
+            <a:r>
+              <a:rPr lang="ja-JP" altLang="en-US" sz="1600">
+                <a:latin typeface="メイリオ" panose="020B0604030504040204" pitchFamily="50" charset="-128"/>
+                <a:ea typeface="メイリオ" panose="020B0604030504040204" pitchFamily="50" charset="-128"/>
+              </a:rPr>
+              <a:t>ゴールを渡したらこれらの部品を適切に組み合わせて、</a:t>
+            </a:r>
+            <a:endParaRPr lang="en-US" altLang="ja-JP" sz="1600">
+              <a:latin typeface="メイリオ" panose="020B0604030504040204" pitchFamily="50" charset="-128"/>
+              <a:ea typeface="メイリオ" panose="020B0604030504040204" pitchFamily="50" charset="-128"/>
+            </a:endParaRPr>
+          </a:p>
+          <a:p>
+            <a:pPr algn="ctr">
+              <a:lnSpc>
+                <a:spcPct val="150000"/>
+              </a:lnSpc>
+            </a:pPr>
+            <a:r>
+              <a:rPr lang="ja-JP" altLang="en-US" sz="1600">
+                <a:latin typeface="メイリオ" panose="020B0604030504040204" pitchFamily="50" charset="-128"/>
+                <a:ea typeface="メイリオ" panose="020B0604030504040204" pitchFamily="50" charset="-128"/>
+              </a:rPr>
+              <a:t>途中で確認を挟みながら完成まで持っていく</a:t>
+            </a:r>
+            <a:endParaRPr lang="ja-JP" altLang="en-US" sz="1400">
+              <a:latin typeface="メイリオ" panose="020B0604030504040204" pitchFamily="50" charset="-128"/>
+              <a:ea typeface="メイリオ" panose="020B0604030504040204" pitchFamily="50" charset="-128"/>
+            </a:endParaRPr>
+          </a:p>
+        </p:txBody>
+      </p:sp>
+      <p:sp>
+        <p:nvSpPr>
+          <p:cNvPr id="135" name="テキスト ボックス 134">
+            <a:extLst>
+              <a:ext uri="{FF2B5EF4-FFF2-40B4-BE49-F238E27FC236}">
+                <a16:creationId xmlns:a16="http://schemas.microsoft.com/office/drawing/2014/main" id="{8FB477FE-217F-1001-89E5-4C01851075E9}"/>
+              </a:ext>
+            </a:extLst>
+          </p:cNvPr>
+          <p:cNvSpPr txBox="1"/>
+          <p:nvPr/>
+        </p:nvSpPr>
+        <p:spPr>
+          <a:xfrm>
+            <a:off x="6140012" y="1001123"/>
+            <a:ext cx="5850602" cy="1223412"/>
+          </a:xfrm>
+          <a:prstGeom prst="rect">
+            <a:avLst/>
+          </a:prstGeom>
+          <a:noFill/>
+        </p:spPr>
+        <p:txBody>
+          <a:bodyPr wrap="square" rtlCol="0">
+            <a:spAutoFit/>
+          </a:bodyPr>
+          <a:lstStyle/>
+          <a:p>
+            <a:pPr>
+              <a:lnSpc>
+                <a:spcPct val="150000"/>
+              </a:lnSpc>
+            </a:pPr>
+            <a:r>
+              <a:rPr lang="ja-JP" altLang="en-US" sz="1400" b="1">
+                <a:latin typeface="メイリオ" panose="020B0604030504040204" pitchFamily="50" charset="-128"/>
+                <a:ea typeface="メイリオ" panose="020B0604030504040204" pitchFamily="50" charset="-128"/>
+              </a:rPr>
+              <a:t>スケジュール実行</a:t>
+            </a:r>
+            <a:endParaRPr lang="en-US" altLang="ja-JP" sz="1400" b="1">
+              <a:latin typeface="メイリオ" panose="020B0604030504040204" pitchFamily="50" charset="-128"/>
+              <a:ea typeface="メイリオ" panose="020B0604030504040204" pitchFamily="50" charset="-128"/>
+            </a:endParaRPr>
+          </a:p>
+          <a:p>
+            <a:pPr marL="285750" indent="-285750">
+              <a:lnSpc>
+                <a:spcPct val="150000"/>
+              </a:lnSpc>
+              <a:buFont typeface="Arial" panose="020B0604020202020204" pitchFamily="34" charset="0"/>
+              <a:buChar char="•"/>
+            </a:pPr>
+            <a:r>
+              <a:rPr kumimoji="1" lang="ja-JP" altLang="en-US" sz="1200">
+                <a:latin typeface="メイリオ" panose="020B0604030504040204" pitchFamily="50" charset="-128"/>
+                <a:ea typeface="メイリオ" panose="020B0604030504040204" pitchFamily="50" charset="-128"/>
+              </a:rPr>
+              <a:t>「毎朝</a:t>
+            </a:r>
+            <a:r>
+              <a:rPr kumimoji="1" lang="en-US" altLang="ja-JP" sz="1200">
+                <a:latin typeface="メイリオ" panose="020B0604030504040204" pitchFamily="50" charset="-128"/>
+                <a:ea typeface="メイリオ" panose="020B0604030504040204" pitchFamily="50" charset="-128"/>
+              </a:rPr>
+              <a:t>9</a:t>
+            </a:r>
+            <a:r>
+              <a:rPr kumimoji="1" lang="ja-JP" altLang="en-US" sz="1200">
+                <a:latin typeface="メイリオ" panose="020B0604030504040204" pitchFamily="50" charset="-128"/>
+                <a:ea typeface="メイリオ" panose="020B0604030504040204" pitchFamily="50" charset="-128"/>
+              </a:rPr>
+              <a:t>時に日次ブリーフィングを送る」「毎週レポートを準備する」のような定期実行を自然言語で設定可能</a:t>
+            </a:r>
+            <a:endParaRPr kumimoji="1" lang="en-US" altLang="ja-JP" sz="1200">
+              <a:latin typeface="メイリオ" panose="020B0604030504040204" pitchFamily="50" charset="-128"/>
+              <a:ea typeface="メイリオ" panose="020B0604030504040204" pitchFamily="50" charset="-128"/>
+            </a:endParaRPr>
+          </a:p>
+          <a:p>
+            <a:pPr marL="285750" indent="-285750">
+              <a:lnSpc>
+                <a:spcPct val="150000"/>
+              </a:lnSpc>
+              <a:buFont typeface="Arial" panose="020B0604020202020204" pitchFamily="34" charset="0"/>
+              <a:buChar char="•"/>
+            </a:pPr>
+            <a:r>
+              <a:rPr lang="ja-JP" altLang="en-US" sz="1200">
+                <a:latin typeface="メイリオ" panose="020B0604030504040204" pitchFamily="50" charset="-128"/>
+                <a:ea typeface="メイリオ" panose="020B0604030504040204" pitchFamily="50" charset="-128"/>
+              </a:rPr>
+              <a:t>スケジュールタブやサイドパネルから編集・一時停止・再開・削除が可能</a:t>
+            </a:r>
+            <a:endParaRPr lang="en-US" altLang="ja-JP" sz="1200">
+              <a:latin typeface="メイリオ" panose="020B0604030504040204" pitchFamily="50" charset="-128"/>
+              <a:ea typeface="メイリオ" panose="020B0604030504040204" pitchFamily="50" charset="-128"/>
+            </a:endParaRPr>
+          </a:p>
+        </p:txBody>
+      </p:sp>
+      <p:sp>
+        <p:nvSpPr>
+          <p:cNvPr id="137" name="テキスト ボックス 136">
+            <a:extLst>
+              <a:ext uri="{FF2B5EF4-FFF2-40B4-BE49-F238E27FC236}">
+                <a16:creationId xmlns:a16="http://schemas.microsoft.com/office/drawing/2014/main" id="{109C511B-E13D-FA31-23E4-C6D0C338602C}"/>
+              </a:ext>
+            </a:extLst>
+          </p:cNvPr>
+          <p:cNvSpPr txBox="1"/>
+          <p:nvPr/>
+        </p:nvSpPr>
+        <p:spPr>
+          <a:xfrm>
+            <a:off x="6140012" y="2234733"/>
+            <a:ext cx="5850602" cy="1223412"/>
+          </a:xfrm>
+          <a:prstGeom prst="rect">
+            <a:avLst/>
+          </a:prstGeom>
+          <a:noFill/>
+        </p:spPr>
+        <p:txBody>
+          <a:bodyPr wrap="square" rtlCol="0">
+            <a:spAutoFit/>
+          </a:bodyPr>
+          <a:lstStyle/>
+          <a:p>
+            <a:pPr>
+              <a:lnSpc>
+                <a:spcPct val="150000"/>
+              </a:lnSpc>
+            </a:pPr>
+            <a:r>
+              <a:rPr lang="ja-JP" altLang="en-US" sz="1400" b="1">
+                <a:latin typeface="メイリオ" panose="020B0604030504040204" pitchFamily="50" charset="-128"/>
+                <a:ea typeface="メイリオ" panose="020B0604030504040204" pitchFamily="50" charset="-128"/>
+              </a:rPr>
+              <a:t>制約</a:t>
+            </a:r>
+            <a:endParaRPr lang="en-US" altLang="ja-JP" sz="1400" b="1">
+              <a:latin typeface="メイリオ" panose="020B0604030504040204" pitchFamily="50" charset="-128"/>
+              <a:ea typeface="メイリオ" panose="020B0604030504040204" pitchFamily="50" charset="-128"/>
+            </a:endParaRPr>
+          </a:p>
+          <a:p>
+            <a:pPr marL="171450" indent="-171450">
+              <a:lnSpc>
+                <a:spcPct val="150000"/>
+              </a:lnSpc>
+              <a:buFont typeface="Arial" panose="020B0604020202020204" pitchFamily="34" charset="0"/>
+              <a:buChar char="•"/>
+            </a:pPr>
+            <a:r>
+              <a:rPr lang="en-US" altLang="ja-JP" sz="1200">
+                <a:latin typeface="メイリオ" panose="020B0604030504040204" pitchFamily="50" charset="-128"/>
+                <a:ea typeface="メイリオ" panose="020B0604030504040204" pitchFamily="50" charset="-128"/>
+              </a:rPr>
+              <a:t>Claude</a:t>
+            </a:r>
+            <a:r>
+              <a:rPr lang="ja-JP" altLang="en-US" sz="1200">
+                <a:latin typeface="メイリオ" panose="020B0604030504040204" pitchFamily="50" charset="-128"/>
+                <a:ea typeface="メイリオ" panose="020B0604030504040204" pitchFamily="50" charset="-128"/>
+              </a:rPr>
+              <a:t> </a:t>
+            </a:r>
+            <a:r>
+              <a:rPr lang="en-US" altLang="ja-JP" sz="1200">
+                <a:latin typeface="メイリオ" panose="020B0604030504040204" pitchFamily="50" charset="-128"/>
+                <a:ea typeface="メイリオ" panose="020B0604030504040204" pitchFamily="50" charset="-128"/>
+              </a:rPr>
+              <a:t>Cowork</a:t>
+            </a:r>
+            <a:r>
+              <a:rPr lang="ja-JP" altLang="en-US" sz="1200">
+                <a:latin typeface="メイリオ" panose="020B0604030504040204" pitchFamily="50" charset="-128"/>
+                <a:ea typeface="メイリオ" panose="020B0604030504040204" pitchFamily="50" charset="-128"/>
+              </a:rPr>
+              <a:t>とは異なりローカルファイルの操作は不可で、</a:t>
+            </a:r>
+            <a:r>
+              <a:rPr lang="en-US" altLang="ja-JP" sz="1200">
+                <a:latin typeface="メイリオ" panose="020B0604030504040204" pitchFamily="50" charset="-128"/>
+                <a:ea typeface="メイリオ" panose="020B0604030504040204" pitchFamily="50" charset="-128"/>
+              </a:rPr>
+              <a:t>SharePoint</a:t>
+            </a:r>
+            <a:r>
+              <a:rPr lang="ja-JP" altLang="en-US" sz="1200">
+                <a:latin typeface="メイリオ" panose="020B0604030504040204" pitchFamily="50" charset="-128"/>
+                <a:ea typeface="メイリオ" panose="020B0604030504040204" pitchFamily="50" charset="-128"/>
+              </a:rPr>
+              <a:t>や</a:t>
+            </a:r>
+            <a:r>
+              <a:rPr lang="en-US" altLang="ja-JP" sz="1200">
+                <a:latin typeface="メイリオ" panose="020B0604030504040204" pitchFamily="50" charset="-128"/>
+                <a:ea typeface="メイリオ" panose="020B0604030504040204" pitchFamily="50" charset="-128"/>
+              </a:rPr>
+              <a:t>OneDrive</a:t>
+            </a:r>
+            <a:r>
+              <a:rPr lang="ja-JP" altLang="en-US" sz="1200">
+                <a:latin typeface="メイリオ" panose="020B0604030504040204" pitchFamily="50" charset="-128"/>
+                <a:ea typeface="メイリオ" panose="020B0604030504040204" pitchFamily="50" charset="-128"/>
+              </a:rPr>
+              <a:t>上のファイルの操作のみとなる</a:t>
+            </a:r>
+            <a:endParaRPr lang="en-US" altLang="ja-JP" sz="1200">
+              <a:latin typeface="メイリオ" panose="020B0604030504040204" pitchFamily="50" charset="-128"/>
+              <a:ea typeface="メイリオ" panose="020B0604030504040204" pitchFamily="50" charset="-128"/>
+            </a:endParaRPr>
+          </a:p>
+          <a:p>
+            <a:pPr marL="171450" indent="-171450">
+              <a:lnSpc>
+                <a:spcPct val="150000"/>
+              </a:lnSpc>
+              <a:buFont typeface="Arial" panose="020B0604020202020204" pitchFamily="34" charset="0"/>
+              <a:buChar char="•"/>
+            </a:pPr>
+            <a:r>
+              <a:rPr lang="en-US" altLang="ja-JP" sz="1200">
+                <a:latin typeface="メイリオ" panose="020B0604030504040204" pitchFamily="50" charset="-128"/>
+                <a:ea typeface="メイリオ" panose="020B0604030504040204" pitchFamily="50" charset="-128"/>
+              </a:rPr>
+              <a:t>SharePoint</a:t>
+            </a:r>
+            <a:r>
+              <a:rPr lang="ja-JP" altLang="en-US" sz="1200">
+                <a:latin typeface="メイリオ" panose="020B0604030504040204" pitchFamily="50" charset="-128"/>
+                <a:ea typeface="メイリオ" panose="020B0604030504040204" pitchFamily="50" charset="-128"/>
+              </a:rPr>
+              <a:t>や</a:t>
+            </a:r>
+            <a:r>
+              <a:rPr lang="en-US" altLang="ja-JP" sz="1200">
+                <a:latin typeface="メイリオ" panose="020B0604030504040204" pitchFamily="50" charset="-128"/>
+                <a:ea typeface="メイリオ" panose="020B0604030504040204" pitchFamily="50" charset="-128"/>
+              </a:rPr>
+              <a:t>OneDrive</a:t>
+            </a:r>
+            <a:r>
+              <a:rPr lang="ja-JP" altLang="en-US" sz="1200">
+                <a:latin typeface="メイリオ" panose="020B0604030504040204" pitchFamily="50" charset="-128"/>
+                <a:ea typeface="メイリオ" panose="020B0604030504040204" pitchFamily="50" charset="-128"/>
+              </a:rPr>
+              <a:t>上のファイル・フォルダの削除は行わない</a:t>
+            </a:r>
+            <a:endParaRPr lang="en-US" altLang="ja-JP" sz="1200">
+              <a:latin typeface="メイリオ" panose="020B0604030504040204" pitchFamily="50" charset="-128"/>
+              <a:ea typeface="メイリオ" panose="020B0604030504040204" pitchFamily="50" charset="-128"/>
+            </a:endParaRPr>
+          </a:p>
+        </p:txBody>
+      </p:sp>
+      <p:pic>
+        <p:nvPicPr>
+          <p:cNvPr id="140" name="オンライン メディア 139" title="Copilot Cowork 概要解説｜チームで AI が「一緒に働く」新しい Copilot の形">
+            <a:hlinkClick r:id="" action="ppaction://media"/>
+            <a:extLst>
+              <a:ext uri="{FF2B5EF4-FFF2-40B4-BE49-F238E27FC236}">
+                <a16:creationId xmlns:a16="http://schemas.microsoft.com/office/drawing/2014/main" id="{8E09B155-AD88-6FFE-6563-E43C53589ACB}"/>
+              </a:ext>
+            </a:extLst>
+          </p:cNvPr>
+          <p:cNvPicPr>
+            <a:picLocks noRot="1" noChangeAspect="1"/>
+          </p:cNvPicPr>
+          <p:nvPr>
+            <a:videoFile r:link="rId1"/>
+          </p:nvPr>
+        </p:nvPicPr>
+        <p:blipFill>
+          <a:blip r:embed="rId3"/>
+          <a:stretch>
+            <a:fillRect/>
+          </a:stretch>
+        </p:blipFill>
+        <p:spPr>
+          <a:xfrm>
+            <a:off x="6564781" y="3973642"/>
+            <a:ext cx="5023062" cy="2838037"/>
+          </a:xfrm>
+          <a:prstGeom prst="rect">
+            <a:avLst/>
+          </a:prstGeom>
+          <a:ln>
+            <a:noFill/>
+          </a:ln>
+          <a:effectLst>
+            <a:outerShdw blurRad="190500" algn="tl" rotWithShape="0">
+              <a:srgbClr val="000000">
+                <a:alpha val="70000"/>
+              </a:srgbClr>
+            </a:outerShdw>
+          </a:effectLst>
+        </p:spPr>
+      </p:pic>
+      <p:sp>
+        <p:nvSpPr>
+          <p:cNvPr id="141" name="テキスト ボックス 140">
+            <a:extLst>
+              <a:ext uri="{FF2B5EF4-FFF2-40B4-BE49-F238E27FC236}">
+                <a16:creationId xmlns:a16="http://schemas.microsoft.com/office/drawing/2014/main" id="{0B6F9ED8-4DDB-64C3-FC02-CB8B3B7BA40A}"/>
+              </a:ext>
+            </a:extLst>
+          </p:cNvPr>
+          <p:cNvSpPr txBox="1"/>
+          <p:nvPr/>
+        </p:nvSpPr>
+        <p:spPr>
+          <a:xfrm>
+            <a:off x="6140012" y="3528109"/>
+            <a:ext cx="5447831" cy="388568"/>
+          </a:xfrm>
+          <a:prstGeom prst="rect">
+            <a:avLst/>
+          </a:prstGeom>
+          <a:noFill/>
+        </p:spPr>
+        <p:txBody>
+          <a:bodyPr wrap="square" rtlCol="0">
+            <a:spAutoFit/>
+          </a:bodyPr>
+          <a:lstStyle/>
+          <a:p>
+            <a:pPr>
+              <a:lnSpc>
+                <a:spcPct val="150000"/>
+              </a:lnSpc>
+            </a:pPr>
+            <a:r>
+              <a:rPr lang="ja-JP" altLang="en-US" sz="1400" b="1">
+                <a:latin typeface="メイリオ" panose="020B0604030504040204" pitchFamily="50" charset="-128"/>
+                <a:ea typeface="メイリオ" panose="020B0604030504040204" pitchFamily="50" charset="-128"/>
+              </a:rPr>
+              <a:t>参考：</a:t>
+            </a:r>
+            <a:r>
+              <a:rPr lang="en-US" altLang="ja-JP" sz="1400" b="1">
+                <a:latin typeface="メイリオ" panose="020B0604030504040204" pitchFamily="50" charset="-128"/>
+                <a:ea typeface="メイリオ" panose="020B0604030504040204" pitchFamily="50" charset="-128"/>
+              </a:rPr>
+              <a:t>Copilot Cowork</a:t>
+            </a:r>
+            <a:r>
+              <a:rPr lang="ja-JP" altLang="en-US" sz="1400" b="1">
+                <a:latin typeface="メイリオ" panose="020B0604030504040204" pitchFamily="50" charset="-128"/>
+                <a:ea typeface="メイリオ" panose="020B0604030504040204" pitchFamily="50" charset="-128"/>
+              </a:rPr>
+              <a:t>概要解説</a:t>
+            </a:r>
+            <a:endParaRPr lang="en-US" altLang="ja-JP" sz="1200">
+              <a:latin typeface="メイリオ" panose="020B0604030504040204" pitchFamily="50" charset="-128"/>
+              <a:ea typeface="メイリオ" panose="020B0604030504040204" pitchFamily="50" charset="-128"/>
+            </a:endParaRPr>
+          </a:p>
+        </p:txBody>
+      </p:sp>
+    </p:spTree>
+    <p:extLst>
+      <p:ext uri="{BB962C8B-B14F-4D97-AF65-F5344CB8AC3E}">
+        <p14:creationId xmlns:p14="http://schemas.microsoft.com/office/powerpoint/2010/main" val="3925149194"/>
+      </p:ext>
+    </p:extLst>
+  </p:cSld>
+  <p:clrMapOvr>
+    <a:masterClrMapping/>
+  </p:clrMapOvr>
+  <p:timing>
+    <p:tnLst>
+      <p:par>
+        <p:cTn id="1" dur="indefinite" restart="never" nodeType="tmRoot">
+          <p:childTnLst>
+            <p:seq concurrent="1" nextAc="seek">
+              <p:cTn id="2" dur="indefinite" nodeType="mainSeq">
+                <p:childTnLst>
+                  <p:par>
+                    <p:cTn id="3" fill="hold">
+                      <p:stCondLst>
+                        <p:cond delay="indefinite"/>
+                      </p:stCondLst>
+                      <p:childTnLst>
+                        <p:par>
+                          <p:cTn id="4" fill="hold">
+                            <p:stCondLst>
+                              <p:cond delay="0"/>
+                            </p:stCondLst>
+                            <p:childTnLst>
+                              <p:par>
+                                <p:cTn id="5" presetID="1" presetClass="mediacall" presetSubtype="0" fill="hold" nodeType="clickEffect">
+                                  <p:stCondLst>
+                                    <p:cond delay="0"/>
+                                  </p:stCondLst>
+                                  <p:childTnLst>
+                                    <p:cmd type="call" cmd="playFrom(0.0)">
+                                      <p:cBhvr>
+                                        <p:cTn id="6" dur="1" fill="hold"/>
+                                        <p:tgtEl>
+                                          <p:spTgt spid="140"/>
+                                        </p:tgtEl>
+                                      </p:cBhvr>
+                                    </p:cmd>
+                                  </p:childTnLst>
+                                </p:cTn>
+                              </p:par>
+                            </p:childTnLst>
+                          </p:cTn>
+                        </p:par>
+                      </p:childTnLst>
+                    </p:cTn>
+                  </p:par>
+                </p:childTnLst>
+              </p:cTn>
+              <p:prevCondLst>
+                <p:cond evt="onPrev" delay="0">
+                  <p:tgtEl>
+                    <p:sldTgt/>
+                  </p:tgtEl>
+                </p:cond>
+              </p:prevCondLst>
+              <p:nextCondLst>
+                <p:cond evt="onNext" delay="0">
+                  <p:tgtEl>
+                    <p:sldTgt/>
+                  </p:tgtEl>
+                </p:cond>
+              </p:nextCondLst>
+            </p:seq>
+            <p:video>
+              <p:cMediaNode vol="80000">
+                <p:cTn id="7" fill="hold" display="0">
+                  <p:stCondLst>
+                    <p:cond delay="indefinite"/>
+                  </p:stCondLst>
+                </p:cTn>
+                <p:tgtEl>
+                  <p:spTgt spid="140"/>
+                </p:tgtEl>
+              </p:cMediaNode>
+            </p:video>
+            <p:seq concurrent="1" nextAc="seek">
+              <p:cTn id="8" restart="whenNotActive" fill="hold" evtFilter="cancelBubble" nodeType="interactiveSeq">
+                <p:stCondLst>
+                  <p:cond evt="onClick" delay="0">
+                    <p:tgtEl>
+                      <p:spTgt spid="140"/>
+                    </p:tgtEl>
+                  </p:cond>
+                </p:stCondLst>
+                <p:endSync evt="end" delay="0">
+                  <p:rtn val="all"/>
+                </p:endSync>
+                <p:childTnLst>
+                  <p:par>
+                    <p:cTn id="9" fill="hold">
+                      <p:stCondLst>
+                        <p:cond delay="0"/>
+                      </p:stCondLst>
+                      <p:childTnLst>
+                        <p:par>
+                          <p:cTn id="10" fill="hold">
+                            <p:stCondLst>
+                              <p:cond delay="0"/>
+                            </p:stCondLst>
+                            <p:childTnLst>
+                              <p:par>
+                                <p:cTn id="11" presetID="2" presetClass="mediacall" presetSubtype="0" fill="hold" nodeType="clickEffect">
+                                  <p:stCondLst>
+                                    <p:cond delay="0"/>
+                                  </p:stCondLst>
+                                  <p:childTnLst>
+                                    <p:cmd type="call" cmd="togglePause">
+                                      <p:cBhvr>
+                                        <p:cTn id="12" dur="1" fill="hold"/>
+                                        <p:tgtEl>
+                                          <p:spTgt spid="140"/>
+                                        </p:tgtEl>
+                                      </p:cBhvr>
+                                    </p:cmd>
+                                  </p:childTnLst>
+                                </p:cTn>
+                              </p:par>
+                            </p:childTnLst>
+                          </p:cTn>
+                        </p:par>
+                      </p:childTnLst>
+                    </p:cTn>
+                  </p:par>
+                </p:childTnLst>
+              </p:cTn>
+              <p:nextCondLst>
+                <p:cond evt="onClick" delay="0">
+                  <p:tgtEl>
+                    <p:spTgt spid="140"/>
+                  </p:tgtEl>
+                </p:cond>
+              </p:nextCondLst>
+            </p:seq>
+          </p:childTnLst>
+        </p:cTn>
+      </p:par>
+    </p:tnLst>
+  </p:timing>
+</p:sld>
+</file>
+
+<file path=ppt/slides/slide15.xml><?xml version="1.0" encoding="utf-8"?>
+<p:sld xmlns:a="http://schemas.openxmlformats.org/drawingml/2006/main" xmlns:r="http://schemas.openxmlformats.org/officeDocument/2006/relationships" xmlns:p="http://schemas.openxmlformats.org/presentationml/2006/main">
+  <p:cSld>
+    <p:spTree>
+      <p:nvGrpSpPr>
+        <p:cNvPr id="1" name="">
+          <a:extLst>
+            <a:ext uri="{FF2B5EF4-FFF2-40B4-BE49-F238E27FC236}">
+              <a16:creationId xmlns:a16="http://schemas.microsoft.com/office/drawing/2014/main" id="{8DB59152-CA0A-52AB-7D28-ACD54A4EBC86}"/>
+            </a:ext>
+          </a:extLst>
+        </p:cNvPr>
+        <p:cNvGrpSpPr/>
+        <p:nvPr/>
+      </p:nvGrpSpPr>
+      <p:grpSpPr>
+        <a:xfrm>
+          <a:off x="0" y="0"/>
+          <a:ext cx="0" cy="0"/>
+          <a:chOff x="0" y="0"/>
+          <a:chExt cx="0" cy="0"/>
+        </a:xfrm>
+      </p:grpSpPr>
+      <p:sp>
+        <p:nvSpPr>
+          <p:cNvPr id="4" name="テキスト ボックス 3">
+            <a:extLst>
+              <a:ext uri="{FF2B5EF4-FFF2-40B4-BE49-F238E27FC236}">
+                <a16:creationId xmlns:a16="http://schemas.microsoft.com/office/drawing/2014/main" id="{F5F4FDBF-FCBE-8668-6D6E-FCEA8A9BE889}"/>
+              </a:ext>
+            </a:extLst>
+          </p:cNvPr>
+          <p:cNvSpPr txBox="1"/>
+          <p:nvPr/>
+        </p:nvSpPr>
+        <p:spPr>
+          <a:xfrm>
+            <a:off x="443466" y="317212"/>
+            <a:ext cx="11215133" cy="584775"/>
+          </a:xfrm>
+          <a:prstGeom prst="rect">
+            <a:avLst/>
+          </a:prstGeom>
+          <a:noFill/>
+        </p:spPr>
+        <p:txBody>
+          <a:bodyPr wrap="square" rtlCol="0">
+            <a:spAutoFit/>
+          </a:bodyPr>
+          <a:lstStyle/>
+          <a:p>
+            <a:r>
+              <a:rPr lang="ja-JP" altLang="en-US" sz="3200" b="1">
+                <a:latin typeface="メイリオ" panose="020B0604030504040204" pitchFamily="50" charset="-128"/>
+                <a:ea typeface="メイリオ" panose="020B0604030504040204" pitchFamily="50" charset="-128"/>
+              </a:rPr>
+              <a:t>さらに強くする仕組み　カスタムスキルとサブエージェント</a:t>
+            </a:r>
+          </a:p>
+        </p:txBody>
+      </p:sp>
+      <p:pic>
+        <p:nvPicPr>
+          <p:cNvPr id="143" name="図 142">
+            <a:extLst>
+              <a:ext uri="{FF2B5EF4-FFF2-40B4-BE49-F238E27FC236}">
+                <a16:creationId xmlns:a16="http://schemas.microsoft.com/office/drawing/2014/main" id="{52E64528-134A-ECC7-CD15-0CDB397F15E8}"/>
+              </a:ext>
+            </a:extLst>
+          </p:cNvPr>
+          <p:cNvPicPr>
+            <a:picLocks noChangeAspect="1"/>
+          </p:cNvPicPr>
+          <p:nvPr/>
+        </p:nvPicPr>
+        <p:blipFill>
+          <a:blip r:embed="rId2">
+            <a:extLst>
+              <a:ext uri="{28A0092B-C50C-407E-A947-70E740481C1C}">
+                <a14:useLocalDpi xmlns:a14="http://schemas.microsoft.com/office/drawing/2010/main" val="0"/>
+              </a:ext>
+            </a:extLst>
+          </a:blip>
+          <a:stretch>
+            <a:fillRect/>
+          </a:stretch>
+        </p:blipFill>
+        <p:spPr>
+          <a:xfrm>
+            <a:off x="2310474" y="1685796"/>
+            <a:ext cx="1375408" cy="1375408"/>
+          </a:xfrm>
+          <a:prstGeom prst="rect">
+            <a:avLst/>
+          </a:prstGeom>
+        </p:spPr>
+      </p:pic>
+      <p:sp>
+        <p:nvSpPr>
+          <p:cNvPr id="144" name="正方形/長方形 143">
+            <a:extLst>
+              <a:ext uri="{FF2B5EF4-FFF2-40B4-BE49-F238E27FC236}">
+                <a16:creationId xmlns:a16="http://schemas.microsoft.com/office/drawing/2014/main" id="{D2FA5A1E-0DE7-D0D1-D5A5-8B43BAD42140}"/>
+              </a:ext>
+            </a:extLst>
+          </p:cNvPr>
+          <p:cNvSpPr/>
+          <p:nvPr/>
+        </p:nvSpPr>
+        <p:spPr>
+          <a:xfrm>
+            <a:off x="255145" y="1186023"/>
+            <a:ext cx="5687506" cy="340403"/>
+          </a:xfrm>
+          <a:prstGeom prst="rect">
+            <a:avLst/>
+          </a:prstGeom>
+          <a:solidFill>
+            <a:schemeClr val="tx2">
+              <a:lumMod val="75000"/>
+              <a:lumOff val="25000"/>
+            </a:schemeClr>
+          </a:solidFill>
+          <a:ln>
+            <a:solidFill>
+              <a:schemeClr val="tx2">
+                <a:lumMod val="75000"/>
+                <a:lumOff val="25000"/>
+              </a:schemeClr>
+            </a:solidFill>
+          </a:ln>
+        </p:spPr>
+        <p:style>
+          <a:lnRef idx="2">
+            <a:schemeClr val="accent1">
+              <a:shade val="15000"/>
+            </a:schemeClr>
+          </a:lnRef>
+          <a:fillRef idx="1">
+            <a:schemeClr val="accent1"/>
+          </a:fillRef>
+          <a:effectRef idx="0">
+            <a:schemeClr val="accent1"/>
+          </a:effectRef>
+          <a:fontRef idx="minor">
+            <a:schemeClr val="lt1"/>
+          </a:fontRef>
+        </p:style>
+        <p:txBody>
+          <a:bodyPr rtlCol="0" anchor="ctr"/>
+          <a:lstStyle/>
+          <a:p>
+            <a:pPr algn="ctr">
+              <a:defRPr sz="1500" b="1">
+                <a:solidFill>
+                  <a:srgbClr val="FFFFFF"/>
+                </a:solidFill>
+                <a:latin typeface="メイリオ"/>
+              </a:defRPr>
+            </a:pPr>
+            <a:r>
+              <a:rPr lang="en-US" altLang="ja-JP" sz="1600">
+                <a:latin typeface="メイリオ" panose="020B0604030504040204" pitchFamily="50" charset="-128"/>
+                <a:ea typeface="メイリオ" panose="020B0604030504040204" pitchFamily="50" charset="-128"/>
+              </a:rPr>
+              <a:t>Skill</a:t>
+            </a:r>
+            <a:r>
+              <a:rPr lang="ja-JP" altLang="en-US" sz="1600">
+                <a:latin typeface="メイリオ" panose="020B0604030504040204" pitchFamily="50" charset="-128"/>
+                <a:ea typeface="メイリオ" panose="020B0604030504040204" pitchFamily="50" charset="-128"/>
+              </a:rPr>
+              <a:t>（スキル） </a:t>
+            </a:r>
+            <a:r>
+              <a:rPr lang="en-US" altLang="ja-JP" sz="1600">
+                <a:latin typeface="メイリオ" panose="020B0604030504040204" pitchFamily="50" charset="-128"/>
+                <a:ea typeface="メイリオ" panose="020B0604030504040204" pitchFamily="50" charset="-128"/>
+              </a:rPr>
+              <a:t>= </a:t>
+            </a:r>
+            <a:r>
+              <a:rPr lang="ja-JP" altLang="en-US" sz="1600">
+                <a:latin typeface="メイリオ" panose="020B0604030504040204" pitchFamily="50" charset="-128"/>
+                <a:ea typeface="メイリオ" panose="020B0604030504040204" pitchFamily="50" charset="-128"/>
+              </a:rPr>
+              <a:t>事前に書いておく指示書</a:t>
+            </a:r>
+          </a:p>
+        </p:txBody>
+      </p:sp>
+      <p:sp>
+        <p:nvSpPr>
+          <p:cNvPr id="145" name="正方形/長方形 144">
+            <a:extLst>
+              <a:ext uri="{FF2B5EF4-FFF2-40B4-BE49-F238E27FC236}">
+                <a16:creationId xmlns:a16="http://schemas.microsoft.com/office/drawing/2014/main" id="{7B98D4F7-1D89-D509-38E9-EA17BA54C68A}"/>
+              </a:ext>
+            </a:extLst>
+          </p:cNvPr>
+          <p:cNvSpPr/>
+          <p:nvPr/>
+        </p:nvSpPr>
+        <p:spPr>
+          <a:xfrm>
+            <a:off x="6249350" y="1186022"/>
+            <a:ext cx="5687505" cy="340403"/>
+          </a:xfrm>
+          <a:prstGeom prst="rect">
+            <a:avLst/>
+          </a:prstGeom>
+          <a:solidFill>
+            <a:schemeClr val="accent6">
+              <a:lumMod val="75000"/>
+            </a:schemeClr>
+          </a:solidFill>
+          <a:ln>
+            <a:solidFill>
+              <a:schemeClr val="accent6">
+                <a:lumMod val="75000"/>
+              </a:schemeClr>
+            </a:solidFill>
+          </a:ln>
+        </p:spPr>
+        <p:style>
+          <a:lnRef idx="2">
+            <a:schemeClr val="accent1">
+              <a:shade val="15000"/>
+            </a:schemeClr>
+          </a:lnRef>
+          <a:fillRef idx="1">
+            <a:schemeClr val="accent1"/>
+          </a:fillRef>
+          <a:effectRef idx="0">
+            <a:schemeClr val="accent1"/>
+          </a:effectRef>
+          <a:fontRef idx="minor">
+            <a:schemeClr val="lt1"/>
+          </a:fontRef>
+        </p:style>
+        <p:txBody>
+          <a:bodyPr rtlCol="0" anchor="ctr"/>
+          <a:lstStyle/>
+          <a:p>
+            <a:pPr algn="ctr">
+              <a:defRPr sz="1500" b="1">
+                <a:solidFill>
+                  <a:srgbClr val="FFFFFF"/>
+                </a:solidFill>
+                <a:latin typeface="メイリオ"/>
+              </a:defRPr>
+            </a:pPr>
+            <a:r>
+              <a:rPr lang="ja-JP" altLang="en-US" sz="1600">
+                <a:latin typeface="メイリオ" panose="020B0604030504040204" pitchFamily="50" charset="-128"/>
+                <a:ea typeface="メイリオ" panose="020B0604030504040204" pitchFamily="50" charset="-128"/>
+              </a:rPr>
+              <a:t>サブエージェント </a:t>
+            </a:r>
+            <a:r>
+              <a:rPr lang="en-US" altLang="ja-JP" sz="1600">
+                <a:latin typeface="メイリオ" panose="020B0604030504040204" pitchFamily="50" charset="-128"/>
+                <a:ea typeface="メイリオ" panose="020B0604030504040204" pitchFamily="50" charset="-128"/>
+              </a:rPr>
+              <a:t>= </a:t>
+            </a:r>
+            <a:r>
+              <a:rPr lang="ja-JP" altLang="en-US" sz="1600">
+                <a:latin typeface="メイリオ" panose="020B0604030504040204" pitchFamily="50" charset="-128"/>
+                <a:ea typeface="メイリオ" panose="020B0604030504040204" pitchFamily="50" charset="-128"/>
+              </a:rPr>
+              <a:t>並列で動く分身</a:t>
+            </a:r>
+          </a:p>
+        </p:txBody>
+      </p:sp>
+      <p:pic>
+        <p:nvPicPr>
+          <p:cNvPr id="147" name="グラフィックス 146" descr="ドキュメント 単色塗りつぶし">
+            <a:extLst>
+              <a:ext uri="{FF2B5EF4-FFF2-40B4-BE49-F238E27FC236}">
+                <a16:creationId xmlns:a16="http://schemas.microsoft.com/office/drawing/2014/main" id="{2785398F-5B36-6EDE-4D31-C0AE5404F6FB}"/>
+              </a:ext>
+            </a:extLst>
+          </p:cNvPr>
+          <p:cNvPicPr>
+            <a:picLocks noChangeAspect="1"/>
+          </p:cNvPicPr>
+          <p:nvPr/>
+        </p:nvPicPr>
+        <p:blipFill>
+          <a:blip>
+            <a:extLst>
+              <a:ext uri="{96DAC541-7B7A-43D3-8B79-37D633B846F1}">
+                <asvg:svgBlip xmlns:asvg="http://schemas.microsoft.com/office/drawing/2016/SVG/main" r:embed="rId3"/>
+              </a:ext>
+            </a:extLst>
+          </a:blip>
+          <a:stretch>
+            <a:fillRect/>
+          </a:stretch>
+        </p:blipFill>
+        <p:spPr>
+          <a:xfrm>
+            <a:off x="4067845" y="1630530"/>
+            <a:ext cx="552403" cy="552403"/>
+          </a:xfrm>
+          <a:prstGeom prst="rect">
+            <a:avLst/>
+          </a:prstGeom>
+        </p:spPr>
+      </p:pic>
+      <p:sp>
+        <p:nvSpPr>
+          <p:cNvPr id="148" name="矢印: 下 147">
+            <a:extLst>
+              <a:ext uri="{FF2B5EF4-FFF2-40B4-BE49-F238E27FC236}">
+                <a16:creationId xmlns:a16="http://schemas.microsoft.com/office/drawing/2014/main" id="{9B79A6D9-7C4A-0F9F-91D2-076E40318B22}"/>
+              </a:ext>
+            </a:extLst>
+          </p:cNvPr>
+          <p:cNvSpPr/>
+          <p:nvPr/>
+        </p:nvSpPr>
+        <p:spPr>
+          <a:xfrm rot="3054614">
+            <a:off x="3668993" y="1993483"/>
+            <a:ext cx="288302" cy="535318"/>
+          </a:xfrm>
+          <a:prstGeom prst="downArrow">
+            <a:avLst>
+              <a:gd name="adj1" fmla="val 50000"/>
+              <a:gd name="adj2" fmla="val 70685"/>
+            </a:avLst>
+          </a:prstGeom>
+          <a:ln>
+            <a:noFill/>
+          </a:ln>
+        </p:spPr>
+        <p:style>
+          <a:lnRef idx="2">
+            <a:schemeClr val="accent1">
+              <a:shade val="15000"/>
+            </a:schemeClr>
+          </a:lnRef>
+          <a:fillRef idx="1">
+            <a:schemeClr val="accent1"/>
+          </a:fillRef>
+          <a:effectRef idx="0">
+            <a:schemeClr val="accent1"/>
+          </a:effectRef>
+          <a:fontRef idx="minor">
+            <a:schemeClr val="lt1"/>
+          </a:fontRef>
+        </p:style>
+        <p:txBody>
+          <a:bodyPr rtlCol="0" anchor="ctr"/>
+          <a:lstStyle/>
+          <a:p>
+            <a:pPr algn="ctr"/>
+            <a:endParaRPr kumimoji="1" lang="ja-JP" altLang="en-US"/>
+          </a:p>
+        </p:txBody>
+      </p:sp>
+      <p:sp>
+        <p:nvSpPr>
+          <p:cNvPr id="149" name="テキスト ボックス 148">
+            <a:extLst>
+              <a:ext uri="{FF2B5EF4-FFF2-40B4-BE49-F238E27FC236}">
+                <a16:creationId xmlns:a16="http://schemas.microsoft.com/office/drawing/2014/main" id="{D0D1ACBB-E381-2A9E-28EA-A8953A8FFD6C}"/>
+              </a:ext>
+            </a:extLst>
+          </p:cNvPr>
+          <p:cNvSpPr txBox="1"/>
+          <p:nvPr/>
+        </p:nvSpPr>
+        <p:spPr>
+          <a:xfrm>
+            <a:off x="356340" y="3062968"/>
+            <a:ext cx="5586311" cy="1754326"/>
+          </a:xfrm>
+          <a:prstGeom prst="rect">
+            <a:avLst/>
+          </a:prstGeom>
+          <a:noFill/>
+        </p:spPr>
+        <p:txBody>
+          <a:bodyPr wrap="square" rtlCol="0">
+            <a:spAutoFit/>
+          </a:bodyPr>
+          <a:lstStyle/>
+          <a:p>
+            <a:pPr marL="285750" indent="-285750">
+              <a:buFont typeface="Arial" panose="020B0604020202020204" pitchFamily="34" charset="0"/>
+              <a:buChar char="•"/>
+            </a:pPr>
+            <a:r>
+              <a:rPr lang="en-US" altLang="ja-JP" sz="1200">
+                <a:latin typeface="メイリオ" panose="020B0604030504040204" pitchFamily="50" charset="-128"/>
+                <a:ea typeface="メイリオ" panose="020B0604030504040204" pitchFamily="50" charset="-128"/>
+              </a:rPr>
+              <a:t>SKILL.md</a:t>
+            </a:r>
+            <a:r>
+              <a:rPr lang="ja-JP" altLang="en-US" sz="1200">
+                <a:latin typeface="メイリオ" panose="020B0604030504040204" pitchFamily="50" charset="-128"/>
+                <a:ea typeface="メイリオ" panose="020B0604030504040204" pitchFamily="50" charset="-128"/>
+              </a:rPr>
+              <a:t>というファイルに業務手順を書いて</a:t>
+            </a:r>
+            <a:r>
+              <a:rPr lang="en-US" altLang="ja-JP" sz="1200">
+                <a:latin typeface="メイリオ" panose="020B0604030504040204" pitchFamily="50" charset="-128"/>
+                <a:ea typeface="メイリオ" panose="020B0604030504040204" pitchFamily="50" charset="-128"/>
+              </a:rPr>
+              <a:t>OneDrive</a:t>
+            </a:r>
+            <a:r>
+              <a:rPr lang="ja-JP" altLang="en-US" sz="1200">
+                <a:latin typeface="メイリオ" panose="020B0604030504040204" pitchFamily="50" charset="-128"/>
+                <a:ea typeface="メイリオ" panose="020B0604030504040204" pitchFamily="50" charset="-128"/>
+              </a:rPr>
+              <a:t>に置くことで利用</a:t>
+            </a:r>
+            <a:endParaRPr lang="en-US" altLang="ja-JP" sz="1200">
+              <a:latin typeface="メイリオ" panose="020B0604030504040204" pitchFamily="50" charset="-128"/>
+              <a:ea typeface="メイリオ" panose="020B0604030504040204" pitchFamily="50" charset="-128"/>
+            </a:endParaRPr>
+          </a:p>
+          <a:p>
+            <a:pPr marL="285750" indent="-285750">
+              <a:buFont typeface="Arial" panose="020B0604020202020204" pitchFamily="34" charset="0"/>
+              <a:buChar char="•"/>
+            </a:pPr>
+            <a:r>
+              <a:rPr lang="ja-JP" altLang="en-US" sz="1200">
+                <a:latin typeface="メイリオ" panose="020B0604030504040204" pitchFamily="50" charset="-128"/>
+                <a:ea typeface="メイリオ" panose="020B0604030504040204" pitchFamily="50" charset="-128"/>
+              </a:rPr>
+              <a:t>「こういう仕事はこのルールでやる」と事前に教えておく指示書であり、手順に限らずルール・品質基準などを書いておくことで毎回プロンプトで説明する必要がなくなる</a:t>
+            </a:r>
+            <a:endParaRPr lang="en-US" altLang="ja-JP" sz="1200">
+              <a:latin typeface="メイリオ" panose="020B0604030504040204" pitchFamily="50" charset="-128"/>
+              <a:ea typeface="メイリオ" panose="020B0604030504040204" pitchFamily="50" charset="-128"/>
+            </a:endParaRPr>
+          </a:p>
+          <a:p>
+            <a:pPr marL="285750" indent="-285750">
+              <a:buFont typeface="Arial" panose="020B0604020202020204" pitchFamily="34" charset="0"/>
+              <a:buChar char="•"/>
+            </a:pPr>
+            <a:r>
+              <a:rPr lang="ja-JP" altLang="en-US" sz="1200">
+                <a:latin typeface="メイリオ" panose="020B0604030504040204" pitchFamily="50" charset="-128"/>
+                <a:ea typeface="メイリオ" panose="020B0604030504040204" pitchFamily="50" charset="-128"/>
+              </a:rPr>
+              <a:t>クライアント別の書式ルール、定型レポートのデザインフォーマット、受信トレイの振分ルールなど、独自のやり方を定義しておける</a:t>
+            </a:r>
+            <a:endParaRPr lang="en-US" altLang="ja-JP" sz="1200">
+              <a:latin typeface="メイリオ" panose="020B0604030504040204" pitchFamily="50" charset="-128"/>
+              <a:ea typeface="メイリオ" panose="020B0604030504040204" pitchFamily="50" charset="-128"/>
+            </a:endParaRPr>
+          </a:p>
+          <a:p>
+            <a:pPr marL="285750" indent="-285750">
+              <a:buFont typeface="Arial" panose="020B0604020202020204" pitchFamily="34" charset="0"/>
+              <a:buChar char="•"/>
+            </a:pPr>
+            <a:r>
+              <a:rPr lang="ja-JP" altLang="en-US" sz="1200">
+                <a:latin typeface="メイリオ" panose="020B0604030504040204" pitchFamily="50" charset="-128"/>
+                <a:ea typeface="メイリオ" panose="020B0604030504040204" pitchFamily="50" charset="-128"/>
+              </a:rPr>
+              <a:t>スケジュール実行との組み合わせも可能</a:t>
+            </a:r>
+            <a:endParaRPr lang="en-US" altLang="ja-JP" sz="1200">
+              <a:latin typeface="メイリオ" panose="020B0604030504040204" pitchFamily="50" charset="-128"/>
+              <a:ea typeface="メイリオ" panose="020B0604030504040204" pitchFamily="50" charset="-128"/>
+            </a:endParaRPr>
+          </a:p>
+          <a:p>
+            <a:pPr marL="285750" indent="-285750">
+              <a:buFont typeface="Arial" panose="020B0604020202020204" pitchFamily="34" charset="0"/>
+              <a:buChar char="•"/>
+            </a:pPr>
+            <a:r>
+              <a:rPr lang="ja-JP" altLang="en-US" sz="1200">
+                <a:latin typeface="メイリオ" panose="020B0604030504040204" pitchFamily="50" charset="-128"/>
+                <a:ea typeface="メイリオ" panose="020B0604030504040204" pitchFamily="50" charset="-128"/>
+              </a:rPr>
+              <a:t>スキルファイルをチームで共有すれば、誰が実行しても同じ手順・同じ品質で出力される</a:t>
+            </a:r>
+            <a:endParaRPr lang="en-US" altLang="ja-JP" sz="1200">
+              <a:latin typeface="メイリオ" panose="020B0604030504040204" pitchFamily="50" charset="-128"/>
+              <a:ea typeface="メイリオ" panose="020B0604030504040204" pitchFamily="50" charset="-128"/>
+            </a:endParaRPr>
+          </a:p>
+        </p:txBody>
+      </p:sp>
+      <p:sp>
+        <p:nvSpPr>
+          <p:cNvPr id="157" name="テキスト ボックス 156">
+            <a:extLst>
+              <a:ext uri="{FF2B5EF4-FFF2-40B4-BE49-F238E27FC236}">
+                <a16:creationId xmlns:a16="http://schemas.microsoft.com/office/drawing/2014/main" id="{2226D14E-989E-D937-E9A5-81E3A0525D03}"/>
+              </a:ext>
+            </a:extLst>
+          </p:cNvPr>
+          <p:cNvSpPr txBox="1"/>
+          <p:nvPr/>
+        </p:nvSpPr>
+        <p:spPr>
+          <a:xfrm>
+            <a:off x="6370309" y="3062968"/>
+            <a:ext cx="5465351" cy="1731243"/>
+          </a:xfrm>
+          <a:prstGeom prst="rect">
+            <a:avLst/>
+          </a:prstGeom>
+          <a:noFill/>
+        </p:spPr>
+        <p:txBody>
+          <a:bodyPr wrap="square" rtlCol="0">
+            <a:spAutoFit/>
+          </a:bodyPr>
+          <a:lstStyle/>
+          <a:p>
+            <a:pPr marL="285750" indent="-285750">
+              <a:lnSpc>
+                <a:spcPct val="150000"/>
+              </a:lnSpc>
+              <a:buFont typeface="Arial" panose="020B0604020202020204" pitchFamily="34" charset="0"/>
+              <a:buChar char="•"/>
+            </a:pPr>
+            <a:r>
+              <a:rPr lang="ja-JP" altLang="en-US" sz="1200">
+                <a:latin typeface="メイリオ" panose="020B0604030504040204" pitchFamily="50" charset="-128"/>
+                <a:ea typeface="メイリオ" panose="020B0604030504040204" pitchFamily="50" charset="-128"/>
+              </a:rPr>
+              <a:t>「</a:t>
+            </a:r>
+            <a:r>
+              <a:rPr lang="en-US" altLang="ja-JP" sz="1200">
+                <a:latin typeface="メイリオ" panose="020B0604030504040204" pitchFamily="50" charset="-128"/>
+                <a:ea typeface="メイリオ" panose="020B0604030504040204" pitchFamily="50" charset="-128"/>
+              </a:rPr>
+              <a:t>5</a:t>
+            </a:r>
+            <a:r>
+              <a:rPr lang="ja-JP" altLang="en-US" sz="1200">
+                <a:latin typeface="メイリオ" panose="020B0604030504040204" pitchFamily="50" charset="-128"/>
+                <a:ea typeface="メイリオ" panose="020B0604030504040204" pitchFamily="50" charset="-128"/>
+              </a:rPr>
+              <a:t>社を調べて」のような依頼なら</a:t>
+            </a:r>
+            <a:r>
+              <a:rPr lang="en-US" altLang="ja-JP" sz="1200">
+                <a:latin typeface="メイリオ" panose="020B0604030504040204" pitchFamily="50" charset="-128"/>
+                <a:ea typeface="メイリオ" panose="020B0604030504040204" pitchFamily="50" charset="-128"/>
+              </a:rPr>
+              <a:t>5</a:t>
+            </a:r>
+            <a:r>
+              <a:rPr lang="ja-JP" altLang="en-US" sz="1200">
+                <a:latin typeface="メイリオ" panose="020B0604030504040204" pitchFamily="50" charset="-128"/>
+                <a:ea typeface="メイリオ" panose="020B0604030504040204" pitchFamily="50" charset="-128"/>
+              </a:rPr>
+              <a:t>体のサブエージェントが同時に起動して各社を調査し、メインの</a:t>
+            </a:r>
+            <a:r>
+              <a:rPr lang="en-US" altLang="ja-JP" sz="1200">
+                <a:latin typeface="メイリオ" panose="020B0604030504040204" pitchFamily="50" charset="-128"/>
+                <a:ea typeface="メイリオ" panose="020B0604030504040204" pitchFamily="50" charset="-128"/>
+              </a:rPr>
+              <a:t>Cowork</a:t>
+            </a:r>
+            <a:r>
+              <a:rPr lang="ja-JP" altLang="en-US" sz="1200">
+                <a:latin typeface="メイリオ" panose="020B0604030504040204" pitchFamily="50" charset="-128"/>
+                <a:ea typeface="メイリオ" panose="020B0604030504040204" pitchFamily="50" charset="-128"/>
+              </a:rPr>
+              <a:t>が結果を統合する。直列作業と比べると時短になり、精度向上にもつながる</a:t>
+            </a:r>
+            <a:endParaRPr lang="en-US" altLang="ja-JP" sz="1200">
+              <a:latin typeface="メイリオ" panose="020B0604030504040204" pitchFamily="50" charset="-128"/>
+              <a:ea typeface="メイリオ" panose="020B0604030504040204" pitchFamily="50" charset="-128"/>
+            </a:endParaRPr>
+          </a:p>
+          <a:p>
+            <a:pPr marL="285750" indent="-285750">
+              <a:lnSpc>
+                <a:spcPct val="150000"/>
+              </a:lnSpc>
+              <a:buFont typeface="Arial" panose="020B0604020202020204" pitchFamily="34" charset="0"/>
+              <a:buChar char="•"/>
+            </a:pPr>
+            <a:r>
+              <a:rPr lang="ja-JP" altLang="en-US" sz="1200">
+                <a:latin typeface="メイリオ" panose="020B0604030504040204" pitchFamily="50" charset="-128"/>
+                <a:ea typeface="メイリオ" panose="020B0604030504040204" pitchFamily="50" charset="-128"/>
+              </a:rPr>
+              <a:t>「</a:t>
+            </a:r>
+            <a:r>
+              <a:rPr lang="en-US" altLang="ja-JP" sz="1200">
+                <a:latin typeface="メイリオ" panose="020B0604030504040204" pitchFamily="50" charset="-128"/>
+                <a:ea typeface="メイリオ" panose="020B0604030504040204" pitchFamily="50" charset="-128"/>
+              </a:rPr>
+              <a:t>for each</a:t>
+            </a:r>
+            <a:r>
+              <a:rPr lang="ja-JP" altLang="en-US" sz="1200">
+                <a:latin typeface="メイリオ" panose="020B0604030504040204" pitchFamily="50" charset="-128"/>
+                <a:ea typeface="メイリオ" panose="020B0604030504040204" pitchFamily="50" charset="-128"/>
+              </a:rPr>
+              <a:t>」「それぞれ」「各社」のような表現が含まれていると並列が実行することもあるが確実ではない為、「並列でサブエージェントを使って」「</a:t>
+            </a:r>
+            <a:r>
+              <a:rPr lang="en-US" altLang="ja-JP" sz="1200">
+                <a:latin typeface="メイリオ" panose="020B0604030504040204" pitchFamily="50" charset="-128"/>
+                <a:ea typeface="メイリオ" panose="020B0604030504040204" pitchFamily="50" charset="-128"/>
+              </a:rPr>
+              <a:t>use parallel sub-agents</a:t>
+            </a:r>
+            <a:r>
+              <a:rPr lang="ja-JP" altLang="en-US" sz="1200">
+                <a:latin typeface="メイリオ" panose="020B0604030504040204" pitchFamily="50" charset="-128"/>
+                <a:ea typeface="メイリオ" panose="020B0604030504040204" pitchFamily="50" charset="-128"/>
+              </a:rPr>
+              <a:t>」などと明示するほうがよい</a:t>
+            </a:r>
+            <a:endParaRPr lang="en-US" altLang="ja-JP" sz="1200">
+              <a:latin typeface="メイリオ" panose="020B0604030504040204" pitchFamily="50" charset="-128"/>
+              <a:ea typeface="メイリオ" panose="020B0604030504040204" pitchFamily="50" charset="-128"/>
+            </a:endParaRPr>
+          </a:p>
+        </p:txBody>
+      </p:sp>
+      <p:grpSp>
+        <p:nvGrpSpPr>
+          <p:cNvPr id="165" name="グループ化 164">
+            <a:extLst>
+              <a:ext uri="{FF2B5EF4-FFF2-40B4-BE49-F238E27FC236}">
+                <a16:creationId xmlns:a16="http://schemas.microsoft.com/office/drawing/2014/main" id="{7A141B3A-B3B3-87B8-8BB1-70768F9568C7}"/>
+              </a:ext>
+            </a:extLst>
+          </p:cNvPr>
+          <p:cNvGrpSpPr/>
+          <p:nvPr/>
+        </p:nvGrpSpPr>
+        <p:grpSpPr>
+          <a:xfrm>
+            <a:off x="8456563" y="1650797"/>
+            <a:ext cx="1273078" cy="1350278"/>
+            <a:chOff x="7016394" y="1549314"/>
+            <a:chExt cx="1273078" cy="1350278"/>
+          </a:xfrm>
+        </p:grpSpPr>
+        <p:pic>
+          <p:nvPicPr>
+            <p:cNvPr id="150" name="グラフィックス 149" descr="人工知能 単色塗りつぶし">
+              <a:extLst>
+                <a:ext uri="{FF2B5EF4-FFF2-40B4-BE49-F238E27FC236}">
+                  <a16:creationId xmlns:a16="http://schemas.microsoft.com/office/drawing/2014/main" id="{41CDAEFF-3728-AA97-7C17-6514A322D1E2}"/>
+                </a:ext>
+              </a:extLst>
+            </p:cNvPr>
+            <p:cNvPicPr>
+              <a:picLocks noChangeAspect="1"/>
+            </p:cNvPicPr>
+            <p:nvPr/>
+          </p:nvPicPr>
+          <p:blipFill>
+            <a:blip>
+              <a:extLst>
+                <a:ext uri="{96DAC541-7B7A-43D3-8B79-37D633B846F1}">
+                  <asvg:svgBlip xmlns:asvg="http://schemas.microsoft.com/office/drawing/2016/SVG/main" r:embed="rId4"/>
+                </a:ext>
+              </a:extLst>
+            </a:blip>
+            <a:stretch>
+              <a:fillRect/>
+            </a:stretch>
+          </p:blipFill>
+          <p:spPr>
+            <a:xfrm>
+              <a:off x="7016394" y="2040291"/>
+              <a:ext cx="427644" cy="427644"/>
+            </a:xfrm>
+            <a:prstGeom prst="rect">
+              <a:avLst/>
+            </a:prstGeom>
+          </p:spPr>
+        </p:pic>
+        <p:pic>
+          <p:nvPicPr>
+            <p:cNvPr id="151" name="グラフィックス 150" descr="人工知能 単色塗りつぶし">
+              <a:extLst>
+                <a:ext uri="{FF2B5EF4-FFF2-40B4-BE49-F238E27FC236}">
+                  <a16:creationId xmlns:a16="http://schemas.microsoft.com/office/drawing/2014/main" id="{3BFC94ED-878F-A34A-53E0-5A28CD0C295E}"/>
+                </a:ext>
+              </a:extLst>
+            </p:cNvPr>
+            <p:cNvPicPr>
+              <a:picLocks noChangeAspect="1"/>
+            </p:cNvPicPr>
+            <p:nvPr/>
+          </p:nvPicPr>
+          <p:blipFill>
+            <a:blip>
+              <a:extLst>
+                <a:ext uri="{96DAC541-7B7A-43D3-8B79-37D633B846F1}">
+                  <asvg:svgBlip xmlns:asvg="http://schemas.microsoft.com/office/drawing/2016/SVG/main" r:embed="rId4"/>
+                </a:ext>
+              </a:extLst>
+            </a:blip>
+            <a:stretch>
+              <a:fillRect/>
+            </a:stretch>
+          </p:blipFill>
+          <p:spPr>
+            <a:xfrm>
+              <a:off x="8039344" y="1824352"/>
+              <a:ext cx="250128" cy="250128"/>
+            </a:xfrm>
+            <a:prstGeom prst="rect">
+              <a:avLst/>
+            </a:prstGeom>
+          </p:spPr>
+        </p:pic>
+        <p:pic>
+          <p:nvPicPr>
+            <p:cNvPr id="152" name="グラフィックス 151" descr="人工知能 単色塗りつぶし">
+              <a:extLst>
+                <a:ext uri="{FF2B5EF4-FFF2-40B4-BE49-F238E27FC236}">
+                  <a16:creationId xmlns:a16="http://schemas.microsoft.com/office/drawing/2014/main" id="{E5467CF6-9E97-A49A-592E-2017C7970749}"/>
+                </a:ext>
+              </a:extLst>
+            </p:cNvPr>
+            <p:cNvPicPr>
+              <a:picLocks noChangeAspect="1"/>
+            </p:cNvPicPr>
+            <p:nvPr/>
+          </p:nvPicPr>
+          <p:blipFill>
+            <a:blip>
+              <a:extLst>
+                <a:ext uri="{96DAC541-7B7A-43D3-8B79-37D633B846F1}">
+                  <asvg:svgBlip xmlns:asvg="http://schemas.microsoft.com/office/drawing/2016/SVG/main" r:embed="rId4"/>
+                </a:ext>
+              </a:extLst>
+            </a:blip>
+            <a:stretch>
+              <a:fillRect/>
+            </a:stretch>
+          </p:blipFill>
+          <p:spPr>
+            <a:xfrm>
+              <a:off x="8039344" y="2099390"/>
+              <a:ext cx="250128" cy="250128"/>
+            </a:xfrm>
+            <a:prstGeom prst="rect">
+              <a:avLst/>
+            </a:prstGeom>
+          </p:spPr>
+        </p:pic>
+        <p:pic>
+          <p:nvPicPr>
+            <p:cNvPr id="153" name="グラフィックス 152" descr="人工知能 単色塗りつぶし">
+              <a:extLst>
+                <a:ext uri="{FF2B5EF4-FFF2-40B4-BE49-F238E27FC236}">
+                  <a16:creationId xmlns:a16="http://schemas.microsoft.com/office/drawing/2014/main" id="{E4FD3FCF-6EE0-7892-0666-C88832807A06}"/>
+                </a:ext>
+              </a:extLst>
+            </p:cNvPr>
+            <p:cNvPicPr>
+              <a:picLocks noChangeAspect="1"/>
+            </p:cNvPicPr>
+            <p:nvPr/>
+          </p:nvPicPr>
+          <p:blipFill>
+            <a:blip>
+              <a:extLst>
+                <a:ext uri="{96DAC541-7B7A-43D3-8B79-37D633B846F1}">
+                  <asvg:svgBlip xmlns:asvg="http://schemas.microsoft.com/office/drawing/2016/SVG/main" r:embed="rId4"/>
+                </a:ext>
+              </a:extLst>
+            </a:blip>
+            <a:stretch>
+              <a:fillRect/>
+            </a:stretch>
+          </p:blipFill>
+          <p:spPr>
+            <a:xfrm>
+              <a:off x="8039344" y="2374428"/>
+              <a:ext cx="250128" cy="250128"/>
+            </a:xfrm>
+            <a:prstGeom prst="rect">
+              <a:avLst/>
+            </a:prstGeom>
+          </p:spPr>
+        </p:pic>
+        <p:pic>
+          <p:nvPicPr>
+            <p:cNvPr id="158" name="グラフィックス 157" descr="人工知能 単色塗りつぶし">
+              <a:extLst>
+                <a:ext uri="{FF2B5EF4-FFF2-40B4-BE49-F238E27FC236}">
+                  <a16:creationId xmlns:a16="http://schemas.microsoft.com/office/drawing/2014/main" id="{F2C0A4D1-52C7-65D2-0668-9E2BE10977EC}"/>
+                </a:ext>
+              </a:extLst>
+            </p:cNvPr>
+            <p:cNvPicPr>
+              <a:picLocks noChangeAspect="1"/>
+            </p:cNvPicPr>
+            <p:nvPr/>
+          </p:nvPicPr>
+          <p:blipFill>
+            <a:blip>
+              <a:extLst>
+                <a:ext uri="{96DAC541-7B7A-43D3-8B79-37D633B846F1}">
+                  <asvg:svgBlip xmlns:asvg="http://schemas.microsoft.com/office/drawing/2016/SVG/main" r:embed="rId4"/>
+                </a:ext>
+              </a:extLst>
+            </a:blip>
+            <a:stretch>
+              <a:fillRect/>
+            </a:stretch>
+          </p:blipFill>
+          <p:spPr>
+            <a:xfrm>
+              <a:off x="8039344" y="1549314"/>
+              <a:ext cx="250128" cy="250128"/>
+            </a:xfrm>
+            <a:prstGeom prst="rect">
+              <a:avLst/>
+            </a:prstGeom>
+          </p:spPr>
+        </p:pic>
+        <p:pic>
+          <p:nvPicPr>
+            <p:cNvPr id="159" name="グラフィックス 158" descr="人工知能 単色塗りつぶし">
+              <a:extLst>
+                <a:ext uri="{FF2B5EF4-FFF2-40B4-BE49-F238E27FC236}">
+                  <a16:creationId xmlns:a16="http://schemas.microsoft.com/office/drawing/2014/main" id="{317AFCFB-C862-5DEB-D630-1FB7B6C6C0B1}"/>
+                </a:ext>
+              </a:extLst>
+            </p:cNvPr>
+            <p:cNvPicPr>
+              <a:picLocks noChangeAspect="1"/>
+            </p:cNvPicPr>
+            <p:nvPr/>
+          </p:nvPicPr>
+          <p:blipFill>
+            <a:blip>
+              <a:extLst>
+                <a:ext uri="{96DAC541-7B7A-43D3-8B79-37D633B846F1}">
+                  <asvg:svgBlip xmlns:asvg="http://schemas.microsoft.com/office/drawing/2016/SVG/main" r:embed="rId4"/>
+                </a:ext>
+              </a:extLst>
+            </a:blip>
+            <a:stretch>
+              <a:fillRect/>
+            </a:stretch>
+          </p:blipFill>
+          <p:spPr>
+            <a:xfrm>
+              <a:off x="8039344" y="2649464"/>
+              <a:ext cx="250128" cy="250128"/>
+            </a:xfrm>
+            <a:prstGeom prst="rect">
+              <a:avLst/>
+            </a:prstGeom>
+          </p:spPr>
+        </p:pic>
+        <p:sp>
+          <p:nvSpPr>
+            <p:cNvPr id="160" name="矢印: 下 159">
+              <a:extLst>
+                <a:ext uri="{FF2B5EF4-FFF2-40B4-BE49-F238E27FC236}">
+                  <a16:creationId xmlns:a16="http://schemas.microsoft.com/office/drawing/2014/main" id="{A96DC0F5-3C62-5267-511F-62331BF89955}"/>
+                </a:ext>
+              </a:extLst>
+            </p:cNvPr>
+            <p:cNvSpPr/>
+            <p:nvPr/>
+          </p:nvSpPr>
+          <p:spPr>
+            <a:xfrm rot="16200000">
+              <a:off x="7670511" y="1758297"/>
+              <a:ext cx="142360" cy="421628"/>
+            </a:xfrm>
+            <a:prstGeom prst="downArrow">
+              <a:avLst>
+                <a:gd name="adj1" fmla="val 50000"/>
+                <a:gd name="adj2" fmla="val 103794"/>
+              </a:avLst>
+            </a:prstGeom>
+            <a:ln>
+              <a:noFill/>
+            </a:ln>
+          </p:spPr>
+          <p:style>
+            <a:lnRef idx="2">
+              <a:schemeClr val="accent1">
+                <a:shade val="15000"/>
+              </a:schemeClr>
+            </a:lnRef>
+            <a:fillRef idx="1">
+              <a:schemeClr val="accent1"/>
+            </a:fillRef>
+            <a:effectRef idx="0">
+              <a:schemeClr val="accent1"/>
+            </a:effectRef>
+            <a:fontRef idx="minor">
+              <a:schemeClr val="lt1"/>
+            </a:fontRef>
+          </p:style>
+          <p:txBody>
+            <a:bodyPr rtlCol="0" anchor="ctr"/>
+            <a:lstStyle/>
+            <a:p>
+              <a:pPr algn="ctr"/>
+              <a:endParaRPr kumimoji="1" lang="ja-JP" altLang="en-US"/>
+            </a:p>
+          </p:txBody>
+        </p:sp>
+        <p:sp>
+          <p:nvSpPr>
+            <p:cNvPr id="161" name="矢印: 下 160">
+              <a:extLst>
+                <a:ext uri="{FF2B5EF4-FFF2-40B4-BE49-F238E27FC236}">
+                  <a16:creationId xmlns:a16="http://schemas.microsoft.com/office/drawing/2014/main" id="{47C8242D-0AD8-3585-7D60-D59C405266D7}"/>
+                </a:ext>
+              </a:extLst>
+            </p:cNvPr>
+            <p:cNvSpPr/>
+            <p:nvPr/>
+          </p:nvSpPr>
+          <p:spPr>
+            <a:xfrm rot="16200000">
+              <a:off x="7670511" y="2043299"/>
+              <a:ext cx="142360" cy="421628"/>
+            </a:xfrm>
+            <a:prstGeom prst="downArrow">
+              <a:avLst>
+                <a:gd name="adj1" fmla="val 50000"/>
+                <a:gd name="adj2" fmla="val 103794"/>
+              </a:avLst>
+            </a:prstGeom>
+            <a:ln>
+              <a:noFill/>
+            </a:ln>
+          </p:spPr>
+          <p:style>
+            <a:lnRef idx="2">
+              <a:schemeClr val="accent1">
+                <a:shade val="15000"/>
+              </a:schemeClr>
+            </a:lnRef>
+            <a:fillRef idx="1">
+              <a:schemeClr val="accent1"/>
+            </a:fillRef>
+            <a:effectRef idx="0">
+              <a:schemeClr val="accent1"/>
+            </a:effectRef>
+            <a:fontRef idx="minor">
+              <a:schemeClr val="lt1"/>
+            </a:fontRef>
+          </p:style>
+          <p:txBody>
+            <a:bodyPr rtlCol="0" anchor="ctr"/>
+            <a:lstStyle/>
+            <a:p>
+              <a:pPr algn="ctr"/>
+              <a:endParaRPr kumimoji="1" lang="ja-JP" altLang="en-US"/>
+            </a:p>
+          </p:txBody>
+        </p:sp>
+        <p:sp>
+          <p:nvSpPr>
+            <p:cNvPr id="162" name="矢印: 下 161">
+              <a:extLst>
+                <a:ext uri="{FF2B5EF4-FFF2-40B4-BE49-F238E27FC236}">
+                  <a16:creationId xmlns:a16="http://schemas.microsoft.com/office/drawing/2014/main" id="{350C34B7-6873-4873-8A9B-5FF6742EFCB7}"/>
+                </a:ext>
+              </a:extLst>
+            </p:cNvPr>
+            <p:cNvSpPr/>
+            <p:nvPr/>
+          </p:nvSpPr>
+          <p:spPr>
+            <a:xfrm rot="16200000">
+              <a:off x="7670511" y="1473295"/>
+              <a:ext cx="142360" cy="421628"/>
+            </a:xfrm>
+            <a:prstGeom prst="downArrow">
+              <a:avLst>
+                <a:gd name="adj1" fmla="val 50000"/>
+                <a:gd name="adj2" fmla="val 103794"/>
+              </a:avLst>
+            </a:prstGeom>
+            <a:ln>
+              <a:noFill/>
+            </a:ln>
+          </p:spPr>
+          <p:style>
+            <a:lnRef idx="2">
+              <a:schemeClr val="accent1">
+                <a:shade val="15000"/>
+              </a:schemeClr>
+            </a:lnRef>
+            <a:fillRef idx="1">
+              <a:schemeClr val="accent1"/>
+            </a:fillRef>
+            <a:effectRef idx="0">
+              <a:schemeClr val="accent1"/>
+            </a:effectRef>
+            <a:fontRef idx="minor">
+              <a:schemeClr val="lt1"/>
+            </a:fontRef>
+          </p:style>
+          <p:txBody>
+            <a:bodyPr rtlCol="0" anchor="ctr"/>
+            <a:lstStyle/>
+            <a:p>
+              <a:pPr algn="ctr"/>
+              <a:endParaRPr kumimoji="1" lang="ja-JP" altLang="en-US"/>
+            </a:p>
+          </p:txBody>
+        </p:sp>
+        <p:sp>
+          <p:nvSpPr>
+            <p:cNvPr id="163" name="矢印: 下 162">
+              <a:extLst>
+                <a:ext uri="{FF2B5EF4-FFF2-40B4-BE49-F238E27FC236}">
+                  <a16:creationId xmlns:a16="http://schemas.microsoft.com/office/drawing/2014/main" id="{5FF8A932-050C-EC52-7CD9-36EDB43B6218}"/>
+                </a:ext>
+              </a:extLst>
+            </p:cNvPr>
+            <p:cNvSpPr/>
+            <p:nvPr/>
+          </p:nvSpPr>
+          <p:spPr>
+            <a:xfrm rot="16200000">
+              <a:off x="7670511" y="2288301"/>
+              <a:ext cx="142360" cy="421628"/>
+            </a:xfrm>
+            <a:prstGeom prst="downArrow">
+              <a:avLst>
+                <a:gd name="adj1" fmla="val 50000"/>
+                <a:gd name="adj2" fmla="val 103794"/>
+              </a:avLst>
+            </a:prstGeom>
+            <a:ln>
+              <a:noFill/>
+            </a:ln>
+          </p:spPr>
+          <p:style>
+            <a:lnRef idx="2">
+              <a:schemeClr val="accent1">
+                <a:shade val="15000"/>
+              </a:schemeClr>
+            </a:lnRef>
+            <a:fillRef idx="1">
+              <a:schemeClr val="accent1"/>
+            </a:fillRef>
+            <a:effectRef idx="0">
+              <a:schemeClr val="accent1"/>
+            </a:effectRef>
+            <a:fontRef idx="minor">
+              <a:schemeClr val="lt1"/>
+            </a:fontRef>
+          </p:style>
+          <p:txBody>
+            <a:bodyPr rtlCol="0" anchor="ctr"/>
+            <a:lstStyle/>
+            <a:p>
+              <a:pPr algn="ctr"/>
+              <a:endParaRPr kumimoji="1" lang="ja-JP" altLang="en-US"/>
+            </a:p>
+          </p:txBody>
+        </p:sp>
+        <p:sp>
+          <p:nvSpPr>
+            <p:cNvPr id="164" name="矢印: 下 163">
+              <a:extLst>
+                <a:ext uri="{FF2B5EF4-FFF2-40B4-BE49-F238E27FC236}">
+                  <a16:creationId xmlns:a16="http://schemas.microsoft.com/office/drawing/2014/main" id="{0585F926-DFB5-9DFC-8BE2-AA474539B7EF}"/>
+                </a:ext>
+              </a:extLst>
+            </p:cNvPr>
+            <p:cNvSpPr/>
+            <p:nvPr/>
+          </p:nvSpPr>
+          <p:spPr>
+            <a:xfrm rot="16200000">
+              <a:off x="7670511" y="2573303"/>
+              <a:ext cx="142360" cy="421628"/>
+            </a:xfrm>
+            <a:prstGeom prst="downArrow">
+              <a:avLst>
+                <a:gd name="adj1" fmla="val 50000"/>
+                <a:gd name="adj2" fmla="val 103794"/>
+              </a:avLst>
+            </a:prstGeom>
+            <a:ln>
+              <a:noFill/>
+            </a:ln>
+          </p:spPr>
+          <p:style>
+            <a:lnRef idx="2">
+              <a:schemeClr val="accent1">
+                <a:shade val="15000"/>
+              </a:schemeClr>
+            </a:lnRef>
+            <a:fillRef idx="1">
+              <a:schemeClr val="accent1"/>
+            </a:fillRef>
+            <a:effectRef idx="0">
+              <a:schemeClr val="accent1"/>
+            </a:effectRef>
+            <a:fontRef idx="minor">
+              <a:schemeClr val="lt1"/>
+            </a:fontRef>
+          </p:style>
+          <p:txBody>
+            <a:bodyPr rtlCol="0" anchor="ctr"/>
+            <a:lstStyle/>
+            <a:p>
+              <a:pPr algn="ctr"/>
+              <a:endParaRPr kumimoji="1" lang="ja-JP" altLang="en-US"/>
+            </a:p>
+          </p:txBody>
+        </p:sp>
+      </p:grpSp>
+      <p:sp>
+        <p:nvSpPr>
+          <p:cNvPr id="167" name="正方形/長方形 166">
+            <a:extLst>
+              <a:ext uri="{FF2B5EF4-FFF2-40B4-BE49-F238E27FC236}">
+                <a16:creationId xmlns:a16="http://schemas.microsoft.com/office/drawing/2014/main" id="{3AEB2BA1-179D-802A-AB51-4E7D90C546EE}"/>
+              </a:ext>
+            </a:extLst>
+          </p:cNvPr>
+          <p:cNvSpPr/>
+          <p:nvPr/>
+        </p:nvSpPr>
+        <p:spPr>
+          <a:xfrm>
+            <a:off x="255145" y="4876637"/>
+            <a:ext cx="11681710" cy="1845291"/>
+          </a:xfrm>
+          <a:prstGeom prst="rect">
+            <a:avLst/>
+          </a:prstGeom>
+          <a:solidFill>
+            <a:schemeClr val="bg1">
+              <a:lumMod val="65000"/>
+              <a:alpha val="20000"/>
+            </a:schemeClr>
+          </a:solidFill>
+          <a:ln>
+            <a:noFill/>
+          </a:ln>
+        </p:spPr>
+        <p:style>
+          <a:lnRef idx="2">
+            <a:schemeClr val="accent1">
+              <a:shade val="15000"/>
+            </a:schemeClr>
+          </a:lnRef>
+          <a:fillRef idx="1">
+            <a:schemeClr val="accent1"/>
+          </a:fillRef>
+          <a:effectRef idx="0">
+            <a:schemeClr val="accent1"/>
+          </a:effectRef>
+          <a:fontRef idx="minor">
+            <a:schemeClr val="lt1"/>
+          </a:fontRef>
+        </p:style>
+        <p:txBody>
+          <a:bodyPr rtlCol="0" anchor="ctr"/>
+          <a:lstStyle/>
+          <a:p>
+            <a:pPr algn="ctr">
+              <a:defRPr sz="1500" b="1">
+                <a:solidFill>
+                  <a:srgbClr val="FFFFFF"/>
+                </a:solidFill>
+                <a:latin typeface="メイリオ"/>
+              </a:defRPr>
+            </a:pPr>
+            <a:endParaRPr lang="ja-JP" altLang="en-US" sz="1600">
+              <a:latin typeface="メイリオ" panose="020B0604030504040204" pitchFamily="50" charset="-128"/>
+              <a:ea typeface="メイリオ" panose="020B0604030504040204" pitchFamily="50" charset="-128"/>
+            </a:endParaRPr>
+          </a:p>
+        </p:txBody>
+      </p:sp>
+      <p:sp>
+        <p:nvSpPr>
+          <p:cNvPr id="168" name="正方形/長方形 167">
+            <a:extLst>
+              <a:ext uri="{FF2B5EF4-FFF2-40B4-BE49-F238E27FC236}">
+                <a16:creationId xmlns:a16="http://schemas.microsoft.com/office/drawing/2014/main" id="{956485AA-3BF3-42B1-A98F-7689F9F59CC0}"/>
+              </a:ext>
+            </a:extLst>
+          </p:cNvPr>
+          <p:cNvSpPr/>
+          <p:nvPr/>
+        </p:nvSpPr>
+        <p:spPr>
+          <a:xfrm>
+            <a:off x="543616" y="5356066"/>
+            <a:ext cx="2618684" cy="1287133"/>
+          </a:xfrm>
+          <a:prstGeom prst="rect">
+            <a:avLst/>
+          </a:prstGeom>
+          <a:solidFill>
+            <a:schemeClr val="bg1"/>
+          </a:solidFill>
+          <a:ln>
+            <a:solidFill>
+              <a:schemeClr val="tx1"/>
+            </a:solidFill>
+          </a:ln>
+        </p:spPr>
+        <p:style>
+          <a:lnRef idx="2">
+            <a:schemeClr val="accent1">
+              <a:shade val="15000"/>
+            </a:schemeClr>
+          </a:lnRef>
+          <a:fillRef idx="1">
+            <a:schemeClr val="accent1"/>
+          </a:fillRef>
+          <a:effectRef idx="0">
+            <a:schemeClr val="accent1"/>
+          </a:effectRef>
+          <a:fontRef idx="minor">
+            <a:schemeClr val="lt1"/>
+          </a:fontRef>
+        </p:style>
+        <p:txBody>
+          <a:bodyPr rtlCol="0" anchor="ctr"/>
+          <a:lstStyle/>
+          <a:p>
+            <a:pPr algn="ctr">
+              <a:defRPr sz="1500" b="1">
+                <a:solidFill>
+                  <a:srgbClr val="FFFFFF"/>
+                </a:solidFill>
+                <a:latin typeface="メイリオ"/>
+              </a:defRPr>
+            </a:pPr>
+            <a:r>
+              <a:rPr lang="ja-JP" altLang="en-US" sz="1600">
+                <a:solidFill>
+                  <a:schemeClr val="tx1"/>
+                </a:solidFill>
+                <a:latin typeface="メイリオ" panose="020B0604030504040204" pitchFamily="50" charset="-128"/>
+                <a:ea typeface="メイリオ" panose="020B0604030504040204" pitchFamily="50" charset="-128"/>
+              </a:rPr>
+              <a:t>ビルドインスキル</a:t>
+            </a:r>
+            <a:endParaRPr lang="en-US" altLang="ja-JP" sz="1600">
+              <a:solidFill>
+                <a:schemeClr val="tx1"/>
+              </a:solidFill>
+              <a:latin typeface="メイリオ" panose="020B0604030504040204" pitchFamily="50" charset="-128"/>
+              <a:ea typeface="メイリオ" panose="020B0604030504040204" pitchFamily="50" charset="-128"/>
+            </a:endParaRPr>
+          </a:p>
+          <a:p>
+            <a:pPr algn="ctr">
+              <a:defRPr sz="1500" b="1">
+                <a:solidFill>
+                  <a:srgbClr val="FFFFFF"/>
+                </a:solidFill>
+                <a:latin typeface="メイリオ"/>
+              </a:defRPr>
+            </a:pPr>
+            <a:r>
+              <a:rPr lang="ja-JP" altLang="en-US" sz="1600">
+                <a:solidFill>
+                  <a:schemeClr val="tx1"/>
+                </a:solidFill>
+                <a:latin typeface="メイリオ" panose="020B0604030504040204" pitchFamily="50" charset="-128"/>
+                <a:ea typeface="メイリオ" panose="020B0604030504040204" pitchFamily="50" charset="-128"/>
+              </a:rPr>
+              <a:t>スケジュール実行</a:t>
+            </a:r>
+            <a:endParaRPr lang="en-US" altLang="ja-JP" sz="1600">
+              <a:solidFill>
+                <a:schemeClr val="tx1"/>
+              </a:solidFill>
+              <a:latin typeface="メイリオ" panose="020B0604030504040204" pitchFamily="50" charset="-128"/>
+              <a:ea typeface="メイリオ" panose="020B0604030504040204" pitchFamily="50" charset="-128"/>
+            </a:endParaRPr>
+          </a:p>
+          <a:p>
+            <a:pPr algn="ctr">
+              <a:defRPr sz="1500" b="1">
+                <a:solidFill>
+                  <a:srgbClr val="FFFFFF"/>
+                </a:solidFill>
+                <a:latin typeface="メイリオ"/>
+              </a:defRPr>
+            </a:pPr>
+            <a:r>
+              <a:rPr lang="ja-JP" altLang="en-US" sz="1600">
+                <a:solidFill>
+                  <a:schemeClr val="tx1"/>
+                </a:solidFill>
+                <a:latin typeface="メイリオ" panose="020B0604030504040204" pitchFamily="50" charset="-128"/>
+                <a:ea typeface="メイリオ" panose="020B0604030504040204" pitchFamily="50" charset="-128"/>
+              </a:rPr>
+              <a:t>などの初期機能</a:t>
+            </a:r>
+          </a:p>
+        </p:txBody>
+      </p:sp>
+      <p:sp>
+        <p:nvSpPr>
+          <p:cNvPr id="169" name="正方形/長方形 168">
+            <a:extLst>
+              <a:ext uri="{FF2B5EF4-FFF2-40B4-BE49-F238E27FC236}">
+                <a16:creationId xmlns:a16="http://schemas.microsoft.com/office/drawing/2014/main" id="{8B40A4FC-49F4-EC87-8C8D-5C4AE7B49EFF}"/>
+              </a:ext>
+            </a:extLst>
+          </p:cNvPr>
+          <p:cNvSpPr/>
+          <p:nvPr/>
+        </p:nvSpPr>
+        <p:spPr>
+          <a:xfrm>
+            <a:off x="3754781" y="5356066"/>
+            <a:ext cx="2618684" cy="1287133"/>
+          </a:xfrm>
+          <a:prstGeom prst="rect">
+            <a:avLst/>
+          </a:prstGeom>
+          <a:solidFill>
+            <a:schemeClr val="bg1"/>
+          </a:solidFill>
+          <a:ln>
+            <a:solidFill>
+              <a:schemeClr val="tx1"/>
+            </a:solidFill>
+          </a:ln>
+        </p:spPr>
+        <p:style>
+          <a:lnRef idx="2">
+            <a:schemeClr val="accent1">
+              <a:shade val="15000"/>
+            </a:schemeClr>
+          </a:lnRef>
+          <a:fillRef idx="1">
+            <a:schemeClr val="accent1"/>
+          </a:fillRef>
+          <a:effectRef idx="0">
+            <a:schemeClr val="accent1"/>
+          </a:effectRef>
+          <a:fontRef idx="minor">
+            <a:schemeClr val="lt1"/>
+          </a:fontRef>
+        </p:style>
+        <p:txBody>
+          <a:bodyPr rtlCol="0" anchor="ctr"/>
+          <a:lstStyle/>
+          <a:p>
+            <a:pPr algn="ctr">
+              <a:defRPr sz="1500" b="1">
+                <a:solidFill>
+                  <a:srgbClr val="FFFFFF"/>
+                </a:solidFill>
+                <a:latin typeface="メイリオ"/>
+              </a:defRPr>
+            </a:pPr>
+            <a:r>
+              <a:rPr lang="ja-JP" altLang="en-US" sz="1600">
+                <a:solidFill>
+                  <a:schemeClr val="tx1"/>
+                </a:solidFill>
+                <a:latin typeface="メイリオ" panose="020B0604030504040204" pitchFamily="50" charset="-128"/>
+                <a:ea typeface="メイリオ" panose="020B0604030504040204" pitchFamily="50" charset="-128"/>
+              </a:rPr>
+              <a:t>カスタムスキル</a:t>
+            </a:r>
+            <a:endParaRPr lang="en-US" altLang="ja-JP" sz="1600">
+              <a:solidFill>
+                <a:schemeClr val="tx1"/>
+              </a:solidFill>
+              <a:latin typeface="メイリオ" panose="020B0604030504040204" pitchFamily="50" charset="-128"/>
+              <a:ea typeface="メイリオ" panose="020B0604030504040204" pitchFamily="50" charset="-128"/>
+            </a:endParaRPr>
+          </a:p>
+          <a:p>
+            <a:pPr algn="ctr">
+              <a:defRPr sz="1500" b="1">
+                <a:solidFill>
+                  <a:srgbClr val="FFFFFF"/>
+                </a:solidFill>
+                <a:latin typeface="メイリオ"/>
+              </a:defRPr>
+            </a:pPr>
+            <a:r>
+              <a:rPr lang="ja-JP" altLang="en-US" sz="1600">
+                <a:solidFill>
+                  <a:schemeClr val="tx1"/>
+                </a:solidFill>
+                <a:latin typeface="メイリオ" panose="020B0604030504040204" pitchFamily="50" charset="-128"/>
+                <a:ea typeface="メイリオ" panose="020B0604030504040204" pitchFamily="50" charset="-128"/>
+              </a:rPr>
+              <a:t>手順の定型化</a:t>
+            </a:r>
+          </a:p>
+        </p:txBody>
+      </p:sp>
+      <p:sp>
+        <p:nvSpPr>
+          <p:cNvPr id="170" name="正方形/長方形 169">
+            <a:extLst>
+              <a:ext uri="{FF2B5EF4-FFF2-40B4-BE49-F238E27FC236}">
+                <a16:creationId xmlns:a16="http://schemas.microsoft.com/office/drawing/2014/main" id="{6A4BDFF6-6CB5-0C41-93BD-3D4CF8B8E651}"/>
+              </a:ext>
+            </a:extLst>
+          </p:cNvPr>
+          <p:cNvSpPr/>
+          <p:nvPr/>
+        </p:nvSpPr>
+        <p:spPr>
+          <a:xfrm>
+            <a:off x="6965946" y="5356066"/>
+            <a:ext cx="2618684" cy="1287133"/>
+          </a:xfrm>
+          <a:prstGeom prst="rect">
+            <a:avLst/>
+          </a:prstGeom>
+          <a:solidFill>
+            <a:schemeClr val="bg1"/>
+          </a:solidFill>
+          <a:ln>
+            <a:solidFill>
+              <a:schemeClr val="tx1"/>
+            </a:solidFill>
+          </a:ln>
+        </p:spPr>
+        <p:style>
+          <a:lnRef idx="2">
+            <a:schemeClr val="accent1">
+              <a:shade val="15000"/>
+            </a:schemeClr>
+          </a:lnRef>
+          <a:fillRef idx="1">
+            <a:schemeClr val="accent1"/>
+          </a:fillRef>
+          <a:effectRef idx="0">
+            <a:schemeClr val="accent1"/>
+          </a:effectRef>
+          <a:fontRef idx="minor">
+            <a:schemeClr val="lt1"/>
+          </a:fontRef>
+        </p:style>
+        <p:txBody>
+          <a:bodyPr rtlCol="0" anchor="ctr"/>
+          <a:lstStyle/>
+          <a:p>
+            <a:pPr algn="ctr">
+              <a:defRPr sz="1500" b="1">
+                <a:solidFill>
+                  <a:srgbClr val="FFFFFF"/>
+                </a:solidFill>
+                <a:latin typeface="メイリオ"/>
+              </a:defRPr>
+            </a:pPr>
+            <a:r>
+              <a:rPr lang="ja-JP" altLang="en-US" sz="1600">
+                <a:solidFill>
+                  <a:schemeClr val="tx1"/>
+                </a:solidFill>
+                <a:latin typeface="メイリオ" panose="020B0604030504040204" pitchFamily="50" charset="-128"/>
+                <a:ea typeface="メイリオ" panose="020B0604030504040204" pitchFamily="50" charset="-128"/>
+              </a:rPr>
+              <a:t>サブエージェント</a:t>
+            </a:r>
+            <a:endParaRPr lang="en-US" altLang="ja-JP" sz="1600">
+              <a:solidFill>
+                <a:schemeClr val="tx1"/>
+              </a:solidFill>
+              <a:latin typeface="メイリオ" panose="020B0604030504040204" pitchFamily="50" charset="-128"/>
+              <a:ea typeface="メイリオ" panose="020B0604030504040204" pitchFamily="50" charset="-128"/>
+            </a:endParaRPr>
+          </a:p>
+          <a:p>
+            <a:pPr algn="ctr">
+              <a:defRPr sz="1500" b="1">
+                <a:solidFill>
+                  <a:srgbClr val="FFFFFF"/>
+                </a:solidFill>
+                <a:latin typeface="メイリオ"/>
+              </a:defRPr>
+            </a:pPr>
+            <a:r>
+              <a:rPr lang="ja-JP" altLang="en-US" sz="1600">
+                <a:solidFill>
+                  <a:schemeClr val="tx1"/>
+                </a:solidFill>
+                <a:latin typeface="メイリオ" panose="020B0604030504040204" pitchFamily="50" charset="-128"/>
+                <a:ea typeface="メイリオ" panose="020B0604030504040204" pitchFamily="50" charset="-128"/>
+              </a:rPr>
+              <a:t>並列実行：時短</a:t>
+            </a:r>
+            <a:r>
+              <a:rPr lang="en-US" altLang="ja-JP" sz="1600">
+                <a:solidFill>
+                  <a:schemeClr val="tx1"/>
+                </a:solidFill>
+                <a:latin typeface="メイリオ" panose="020B0604030504040204" pitchFamily="50" charset="-128"/>
+                <a:ea typeface="メイリオ" panose="020B0604030504040204" pitchFamily="50" charset="-128"/>
+              </a:rPr>
+              <a:t>/</a:t>
+            </a:r>
+            <a:r>
+              <a:rPr lang="ja-JP" altLang="en-US" sz="1600">
+                <a:solidFill>
+                  <a:schemeClr val="tx1"/>
+                </a:solidFill>
+                <a:latin typeface="メイリオ" panose="020B0604030504040204" pitchFamily="50" charset="-128"/>
+                <a:ea typeface="メイリオ" panose="020B0604030504040204" pitchFamily="50" charset="-128"/>
+              </a:rPr>
+              <a:t>精度向上</a:t>
+            </a:r>
+          </a:p>
+        </p:txBody>
+      </p:sp>
+      <p:sp>
+        <p:nvSpPr>
+          <p:cNvPr id="171" name="乗算記号 170">
+            <a:extLst>
+              <a:ext uri="{FF2B5EF4-FFF2-40B4-BE49-F238E27FC236}">
+                <a16:creationId xmlns:a16="http://schemas.microsoft.com/office/drawing/2014/main" id="{062F6C3A-D0AD-6A3D-4DA7-0F126664582D}"/>
+              </a:ext>
+            </a:extLst>
+          </p:cNvPr>
+          <p:cNvSpPr/>
+          <p:nvPr/>
+        </p:nvSpPr>
+        <p:spPr>
+          <a:xfrm>
+            <a:off x="3255271" y="5768388"/>
+            <a:ext cx="406539" cy="534308"/>
+          </a:xfrm>
+          <a:prstGeom prst="mathMultiply">
+            <a:avLst/>
+          </a:prstGeom>
+          <a:ln>
+            <a:noFill/>
+          </a:ln>
+        </p:spPr>
+        <p:style>
+          <a:lnRef idx="2">
+            <a:schemeClr val="accent1">
+              <a:shade val="15000"/>
+            </a:schemeClr>
+          </a:lnRef>
+          <a:fillRef idx="1">
+            <a:schemeClr val="accent1"/>
+          </a:fillRef>
+          <a:effectRef idx="0">
+            <a:schemeClr val="accent1"/>
+          </a:effectRef>
+          <a:fontRef idx="minor">
+            <a:schemeClr val="lt1"/>
+          </a:fontRef>
+        </p:style>
+        <p:txBody>
+          <a:bodyPr rtlCol="0" anchor="ctr"/>
+          <a:lstStyle/>
+          <a:p>
+            <a:pPr algn="ctr"/>
+            <a:endParaRPr kumimoji="1" lang="ja-JP" altLang="en-US"/>
+          </a:p>
+        </p:txBody>
+      </p:sp>
+      <p:sp>
+        <p:nvSpPr>
+          <p:cNvPr id="172" name="乗算記号 171">
+            <a:extLst>
+              <a:ext uri="{FF2B5EF4-FFF2-40B4-BE49-F238E27FC236}">
+                <a16:creationId xmlns:a16="http://schemas.microsoft.com/office/drawing/2014/main" id="{F92E064A-D7E6-3638-6C05-1289D48332A1}"/>
+              </a:ext>
+            </a:extLst>
+          </p:cNvPr>
+          <p:cNvSpPr/>
+          <p:nvPr/>
+        </p:nvSpPr>
+        <p:spPr>
+          <a:xfrm>
+            <a:off x="6466436" y="5768388"/>
+            <a:ext cx="406539" cy="534308"/>
+          </a:xfrm>
+          <a:prstGeom prst="mathMultiply">
+            <a:avLst/>
+          </a:prstGeom>
+          <a:ln>
+            <a:noFill/>
+          </a:ln>
+        </p:spPr>
+        <p:style>
+          <a:lnRef idx="2">
+            <a:schemeClr val="accent1">
+              <a:shade val="15000"/>
+            </a:schemeClr>
+          </a:lnRef>
+          <a:fillRef idx="1">
+            <a:schemeClr val="accent1"/>
+          </a:fillRef>
+          <a:effectRef idx="0">
+            <a:schemeClr val="accent1"/>
+          </a:effectRef>
+          <a:fontRef idx="minor">
+            <a:schemeClr val="lt1"/>
+          </a:fontRef>
+        </p:style>
+        <p:txBody>
+          <a:bodyPr rtlCol="0" anchor="ctr"/>
+          <a:lstStyle/>
+          <a:p>
+            <a:pPr algn="ctr"/>
+            <a:endParaRPr kumimoji="1" lang="ja-JP" altLang="en-US"/>
+          </a:p>
+        </p:txBody>
+      </p:sp>
+      <p:sp>
+        <p:nvSpPr>
+          <p:cNvPr id="173" name="二等辺三角形 172">
+            <a:extLst>
+              <a:ext uri="{FF2B5EF4-FFF2-40B4-BE49-F238E27FC236}">
+                <a16:creationId xmlns:a16="http://schemas.microsoft.com/office/drawing/2014/main" id="{F8104E63-B1FC-CE91-FCAE-08347F7FC624}"/>
+              </a:ext>
+            </a:extLst>
+          </p:cNvPr>
+          <p:cNvSpPr/>
+          <p:nvPr/>
+        </p:nvSpPr>
+        <p:spPr>
+          <a:xfrm rot="5400000">
+            <a:off x="9619515" y="5945963"/>
+            <a:ext cx="639140" cy="179163"/>
+          </a:xfrm>
+          <a:prstGeom prst="triangle">
+            <a:avLst/>
+          </a:prstGeom>
+          <a:solidFill>
+            <a:schemeClr val="accent1"/>
+          </a:solidFill>
+          <a:ln>
+            <a:noFill/>
+          </a:ln>
+        </p:spPr>
+        <p:style>
+          <a:lnRef idx="2">
+            <a:schemeClr val="accent1">
+              <a:shade val="15000"/>
+            </a:schemeClr>
+          </a:lnRef>
+          <a:fillRef idx="1">
+            <a:schemeClr val="accent1"/>
+          </a:fillRef>
+          <a:effectRef idx="0">
+            <a:schemeClr val="accent1"/>
+          </a:effectRef>
+          <a:fontRef idx="minor">
+            <a:schemeClr val="lt1"/>
+          </a:fontRef>
+        </p:style>
+        <p:txBody>
+          <a:bodyPr rtlCol="0" anchor="ctr"/>
+          <a:lstStyle/>
+          <a:p>
+            <a:pPr algn="ctr"/>
+            <a:endParaRPr kumimoji="1" lang="ja-JP" altLang="en-US"/>
+          </a:p>
+        </p:txBody>
+      </p:sp>
+      <p:sp>
+        <p:nvSpPr>
+          <p:cNvPr id="174" name="テキスト ボックス 173">
+            <a:extLst>
+              <a:ext uri="{FF2B5EF4-FFF2-40B4-BE49-F238E27FC236}">
+                <a16:creationId xmlns:a16="http://schemas.microsoft.com/office/drawing/2014/main" id="{14358752-8C28-5E99-C98C-339DA37C2B40}"/>
+              </a:ext>
+            </a:extLst>
+          </p:cNvPr>
+          <p:cNvSpPr txBox="1"/>
+          <p:nvPr/>
+        </p:nvSpPr>
+        <p:spPr>
+          <a:xfrm>
+            <a:off x="10038394" y="5689081"/>
+            <a:ext cx="1576662" cy="738664"/>
+          </a:xfrm>
+          <a:prstGeom prst="rect">
+            <a:avLst/>
+          </a:prstGeom>
+          <a:noFill/>
+        </p:spPr>
+        <p:txBody>
+          <a:bodyPr wrap="square" rtlCol="0">
+            <a:spAutoFit/>
+          </a:bodyPr>
+          <a:lstStyle/>
+          <a:p>
+            <a:pPr algn="ctr"/>
+            <a:r>
+              <a:rPr lang="en-US" altLang="ja-JP" sz="1400" b="1">
+                <a:latin typeface="メイリオ" panose="020B0604030504040204" pitchFamily="50" charset="-128"/>
+                <a:ea typeface="メイリオ" panose="020B0604030504040204" pitchFamily="50" charset="-128"/>
+              </a:rPr>
+              <a:t>AI</a:t>
+            </a:r>
+            <a:r>
+              <a:rPr lang="ja-JP" altLang="en-US" sz="1400" b="1">
+                <a:latin typeface="メイリオ" panose="020B0604030504040204" pitchFamily="50" charset="-128"/>
+                <a:ea typeface="メイリオ" panose="020B0604030504040204" pitchFamily="50" charset="-128"/>
+              </a:rPr>
+              <a:t>の業務への</a:t>
+            </a:r>
+            <a:endParaRPr lang="en-US" altLang="ja-JP" sz="1400" b="1">
+              <a:latin typeface="メイリオ" panose="020B0604030504040204" pitchFamily="50" charset="-128"/>
+              <a:ea typeface="メイリオ" panose="020B0604030504040204" pitchFamily="50" charset="-128"/>
+            </a:endParaRPr>
+          </a:p>
+          <a:p>
+            <a:pPr algn="ctr"/>
+            <a:r>
+              <a:rPr lang="ja-JP" altLang="en-US" sz="1400" b="1">
+                <a:latin typeface="メイリオ" panose="020B0604030504040204" pitchFamily="50" charset="-128"/>
+                <a:ea typeface="メイリオ" panose="020B0604030504040204" pitchFamily="50" charset="-128"/>
+              </a:rPr>
+              <a:t>食い込み方が</a:t>
+            </a:r>
+            <a:endParaRPr lang="en-US" altLang="ja-JP" sz="1400" b="1">
+              <a:latin typeface="メイリオ" panose="020B0604030504040204" pitchFamily="50" charset="-128"/>
+              <a:ea typeface="メイリオ" panose="020B0604030504040204" pitchFamily="50" charset="-128"/>
+            </a:endParaRPr>
+          </a:p>
+          <a:p>
+            <a:pPr algn="ctr"/>
+            <a:r>
+              <a:rPr lang="ja-JP" altLang="en-US" sz="1400" b="1">
+                <a:latin typeface="メイリオ" panose="020B0604030504040204" pitchFamily="50" charset="-128"/>
+                <a:ea typeface="メイリオ" panose="020B0604030504040204" pitchFamily="50" charset="-128"/>
+              </a:rPr>
+              <a:t>変わる</a:t>
+            </a:r>
+            <a:endParaRPr lang="en-US" altLang="ja-JP" sz="1400" b="1">
+              <a:latin typeface="メイリオ" panose="020B0604030504040204" pitchFamily="50" charset="-128"/>
+              <a:ea typeface="メイリオ" panose="020B0604030504040204" pitchFamily="50" charset="-128"/>
+            </a:endParaRPr>
+          </a:p>
+        </p:txBody>
+      </p:sp>
+      <p:sp>
+        <p:nvSpPr>
+          <p:cNvPr id="176" name="テキスト ボックス 175">
+            <a:extLst>
+              <a:ext uri="{FF2B5EF4-FFF2-40B4-BE49-F238E27FC236}">
+                <a16:creationId xmlns:a16="http://schemas.microsoft.com/office/drawing/2014/main" id="{DADC1B43-CD2E-1167-9E97-63DA87031ACF}"/>
+              </a:ext>
+            </a:extLst>
+          </p:cNvPr>
+          <p:cNvSpPr txBox="1"/>
+          <p:nvPr/>
+        </p:nvSpPr>
+        <p:spPr>
+          <a:xfrm>
+            <a:off x="4297444" y="4941772"/>
+            <a:ext cx="3510027" cy="369332"/>
+          </a:xfrm>
+          <a:prstGeom prst="rect">
+            <a:avLst/>
+          </a:prstGeom>
+          <a:noFill/>
+        </p:spPr>
+        <p:txBody>
+          <a:bodyPr wrap="square" rtlCol="0">
+            <a:spAutoFit/>
+          </a:bodyPr>
+          <a:lstStyle/>
+          <a:p>
+            <a:pPr algn="ctr"/>
+            <a:r>
+              <a:rPr lang="ja-JP" altLang="en-US" b="1">
+                <a:latin typeface="メイリオ" panose="020B0604030504040204" pitchFamily="50" charset="-128"/>
+                <a:ea typeface="メイリオ" panose="020B0604030504040204" pitchFamily="50" charset="-128"/>
+              </a:rPr>
+              <a:t>掛け算で回る</a:t>
+            </a:r>
+            <a:endParaRPr lang="en-US" altLang="ja-JP" b="1">
+              <a:latin typeface="メイリオ" panose="020B0604030504040204" pitchFamily="50" charset="-128"/>
+              <a:ea typeface="メイリオ" panose="020B0604030504040204" pitchFamily="50" charset="-128"/>
+            </a:endParaRPr>
+          </a:p>
+        </p:txBody>
+      </p:sp>
+    </p:spTree>
+    <p:extLst>
+      <p:ext uri="{BB962C8B-B14F-4D97-AF65-F5344CB8AC3E}">
+        <p14:creationId xmlns:p14="http://schemas.microsoft.com/office/powerpoint/2010/main" val="3381146630"/>
+      </p:ext>
+    </p:extLst>
+  </p:cSld>
+  <p:clrMapOvr>
+    <a:masterClrMapping/>
+  </p:clrMapOvr>
+</p:sld>
+</file>
+
+<file path=ppt/slides/slide16.xml><?xml version="1.0" encoding="utf-8"?>
+<p:sld xmlns:a="http://schemas.openxmlformats.org/drawingml/2006/main" xmlns:r="http://schemas.openxmlformats.org/officeDocument/2006/relationships" xmlns:p="http://schemas.openxmlformats.org/presentationml/2006/main">
+  <p:cSld>
+    <p:spTree>
+      <p:nvGrpSpPr>
+        <p:cNvPr id="1" name="">
+          <a:extLst>
+            <a:ext uri="{FF2B5EF4-FFF2-40B4-BE49-F238E27FC236}">
+              <a16:creationId xmlns:a16="http://schemas.microsoft.com/office/drawing/2014/main" id="{23339CDA-98E2-BC75-3E35-A1A980C09CD3}"/>
+            </a:ext>
+          </a:extLst>
+        </p:cNvPr>
+        <p:cNvGrpSpPr/>
+        <p:nvPr/>
+      </p:nvGrpSpPr>
+      <p:grpSpPr>
+        <a:xfrm>
+          <a:off x="0" y="0"/>
+          <a:ext cx="0" cy="0"/>
+          <a:chOff x="0" y="0"/>
+          <a:chExt cx="0" cy="0"/>
+        </a:xfrm>
+      </p:grpSpPr>
+      <p:sp>
+        <p:nvSpPr>
+          <p:cNvPr id="4" name="テキスト ボックス 3">
+            <a:extLst>
+              <a:ext uri="{FF2B5EF4-FFF2-40B4-BE49-F238E27FC236}">
+                <a16:creationId xmlns:a16="http://schemas.microsoft.com/office/drawing/2014/main" id="{DE9AF31B-5730-8FD8-7DD5-E73F3010B6B2}"/>
+              </a:ext>
+            </a:extLst>
+          </p:cNvPr>
+          <p:cNvSpPr txBox="1"/>
+          <p:nvPr/>
+        </p:nvSpPr>
+        <p:spPr>
+          <a:xfrm>
+            <a:off x="443466" y="317212"/>
+            <a:ext cx="11215133" cy="584775"/>
+          </a:xfrm>
+          <a:prstGeom prst="rect">
+            <a:avLst/>
+          </a:prstGeom>
+          <a:noFill/>
+        </p:spPr>
+        <p:txBody>
+          <a:bodyPr wrap="square" rtlCol="0">
+            <a:spAutoFit/>
+          </a:bodyPr>
+          <a:lstStyle/>
+          <a:p>
+            <a:r>
+              <a:rPr lang="ja-JP" altLang="en-US" sz="3200" b="1">
+                <a:latin typeface="メイリオ" panose="020B0604030504040204" pitchFamily="50" charset="-128"/>
+                <a:ea typeface="メイリオ" panose="020B0604030504040204" pitchFamily="50" charset="-128"/>
+              </a:rPr>
+              <a:t>できることの例</a:t>
+            </a:r>
+          </a:p>
+        </p:txBody>
+      </p:sp>
+      <p:graphicFrame>
+        <p:nvGraphicFramePr>
+          <p:cNvPr id="2" name="表 1">
+            <a:extLst>
+              <a:ext uri="{FF2B5EF4-FFF2-40B4-BE49-F238E27FC236}">
+                <a16:creationId xmlns:a16="http://schemas.microsoft.com/office/drawing/2014/main" id="{1209DCA6-61E0-9267-4353-95BC5F61D7E1}"/>
+              </a:ext>
+            </a:extLst>
+          </p:cNvPr>
+          <p:cNvGraphicFramePr>
+            <a:graphicFrameLocks noGrp="1"/>
+          </p:cNvGraphicFramePr>
+          <p:nvPr>
+            <p:extLst>
+              <p:ext uri="{D42A27DB-BD31-4B8C-83A1-F6EECF244321}">
+                <p14:modId xmlns:p14="http://schemas.microsoft.com/office/powerpoint/2010/main" val="1673098839"/>
+              </p:ext>
+            </p:extLst>
+          </p:nvPr>
+        </p:nvGraphicFramePr>
+        <p:xfrm>
+          <a:off x="443466" y="963023"/>
+          <a:ext cx="11280448" cy="3937000"/>
+        </p:xfrm>
+        <a:graphic>
+          <a:graphicData uri="http://schemas.openxmlformats.org/drawingml/2006/table">
+            <a:tbl>
+              <a:tblPr firstRow="1" bandRow="1">
+                <a:tableStyleId>{5C22544A-7EE6-4342-B048-85BDC9FD1C3A}</a:tableStyleId>
+              </a:tblPr>
+              <a:tblGrid>
+                <a:gridCol w="2479348">
+                  <a:extLst>
+                    <a:ext uri="{9D8B030D-6E8A-4147-A177-3AD203B41FA5}">
+                      <a16:colId xmlns:a16="http://schemas.microsoft.com/office/drawing/2014/main" val="2988868055"/>
+                    </a:ext>
+                  </a:extLst>
+                </a:gridCol>
+                <a:gridCol w="8801100">
+                  <a:extLst>
+                    <a:ext uri="{9D8B030D-6E8A-4147-A177-3AD203B41FA5}">
+                      <a16:colId xmlns:a16="http://schemas.microsoft.com/office/drawing/2014/main" val="1436398538"/>
+                    </a:ext>
+                  </a:extLst>
+                </a:gridCol>
+              </a:tblGrid>
+              <a:tr h="370840">
+                <a:tc>
+                  <a:txBody>
+                    <a:bodyPr/>
+                    <a:lstStyle/>
+                    <a:p>
+                      <a:pPr algn="ctr"/>
+                      <a:r>
+                        <a:rPr kumimoji="1" lang="ja-JP" altLang="en-US" sz="1400">
+                          <a:latin typeface="メイリオ" panose="020B0604030504040204" pitchFamily="50" charset="-128"/>
+                          <a:ea typeface="メイリオ" panose="020B0604030504040204" pitchFamily="50" charset="-128"/>
+                        </a:rPr>
+                        <a:t>できること</a:t>
+                      </a:r>
+                    </a:p>
+                  </a:txBody>
+                  <a:tcPr anchor="ctr"/>
+                </a:tc>
+                <a:tc>
+                  <a:txBody>
+                    <a:bodyPr/>
+                    <a:lstStyle/>
+                    <a:p>
+                      <a:pPr algn="ctr"/>
+                      <a:r>
+                        <a:rPr kumimoji="1" lang="ja-JP" altLang="en-US" sz="1400">
+                          <a:latin typeface="メイリオ" panose="020B0604030504040204" pitchFamily="50" charset="-128"/>
+                          <a:ea typeface="メイリオ" panose="020B0604030504040204" pitchFamily="50" charset="-128"/>
+                        </a:rPr>
+                        <a:t>概要</a:t>
+                      </a:r>
+                    </a:p>
+                  </a:txBody>
+                  <a:tcPr anchor="ctr"/>
+                </a:tc>
+                <a:extLst>
+                  <a:ext uri="{0D108BD9-81ED-4DB2-BD59-A6C34878D82A}">
+                    <a16:rowId xmlns:a16="http://schemas.microsoft.com/office/drawing/2014/main" val="2284807591"/>
+                  </a:ext>
+                </a:extLst>
+              </a:tr>
+              <a:tr h="370840">
+                <a:tc>
+                  <a:txBody>
+                    <a:bodyPr/>
+                    <a:lstStyle/>
+                    <a:p>
+                      <a:r>
+                        <a:rPr kumimoji="1" lang="ja-JP" altLang="en-US" sz="1400">
+                          <a:latin typeface="メイリオ" panose="020B0604030504040204" pitchFamily="50" charset="-128"/>
+                          <a:ea typeface="メイリオ" panose="020B0604030504040204" pitchFamily="50" charset="-128"/>
+                        </a:rPr>
+                        <a:t>レシート</a:t>
+                      </a:r>
+                      <a:r>
+                        <a:rPr kumimoji="1" lang="en-US" altLang="ja-JP" sz="1400">
+                          <a:latin typeface="メイリオ" panose="020B0604030504040204" pitchFamily="50" charset="-128"/>
+                          <a:ea typeface="メイリオ" panose="020B0604030504040204" pitchFamily="50" charset="-128"/>
+                        </a:rPr>
+                        <a:t>40</a:t>
+                      </a:r>
+                      <a:r>
+                        <a:rPr kumimoji="1" lang="ja-JP" altLang="en-US" sz="1400">
+                          <a:latin typeface="メイリオ" panose="020B0604030504040204" pitchFamily="50" charset="-128"/>
+                          <a:ea typeface="メイリオ" panose="020B0604030504040204" pitchFamily="50" charset="-128"/>
+                        </a:rPr>
+                        <a:t>枚 → 経費精算</a:t>
+                      </a:r>
+                      <a:r>
+                        <a:rPr kumimoji="1" lang="en-US" altLang="ja-JP" sz="1400">
+                          <a:latin typeface="メイリオ" panose="020B0604030504040204" pitchFamily="50" charset="-128"/>
+                          <a:ea typeface="メイリオ" panose="020B0604030504040204" pitchFamily="50" charset="-128"/>
+                        </a:rPr>
+                        <a:t>Excel</a:t>
+                      </a:r>
+                      <a:endParaRPr kumimoji="1" lang="ja-JP" altLang="en-US" sz="1400">
+                        <a:latin typeface="メイリオ" panose="020B0604030504040204" pitchFamily="50" charset="-128"/>
+                        <a:ea typeface="メイリオ" panose="020B0604030504040204" pitchFamily="50" charset="-128"/>
+                      </a:endParaRPr>
+                    </a:p>
+                  </a:txBody>
+                  <a:tcPr/>
+                </a:tc>
+                <a:tc>
+                  <a:txBody>
+                    <a:bodyPr/>
+                    <a:lstStyle/>
+                    <a:p>
+                      <a:pPr marL="285750" indent="-285750">
+                        <a:buFont typeface="Arial" panose="020B0604020202020204" pitchFamily="34" charset="0"/>
+                        <a:buChar char="•"/>
+                      </a:pPr>
+                      <a:r>
+                        <a:rPr kumimoji="1" lang="ja-JP" altLang="en-US" sz="1400">
+                          <a:latin typeface="メイリオ" panose="020B0604030504040204" pitchFamily="50" charset="-128"/>
+                          <a:ea typeface="メイリオ" panose="020B0604030504040204" pitchFamily="50" charset="-128"/>
+                        </a:rPr>
+                        <a:t>「</a:t>
+                      </a:r>
+                      <a:r>
+                        <a:rPr kumimoji="1" lang="en-US" altLang="ja-JP" sz="1400">
+                          <a:latin typeface="メイリオ" panose="020B0604030504040204" pitchFamily="50" charset="-128"/>
+                          <a:ea typeface="メイリオ" panose="020B0604030504040204" pitchFamily="50" charset="-128"/>
+                        </a:rPr>
+                        <a:t>40</a:t>
+                      </a:r>
+                      <a:r>
+                        <a:rPr kumimoji="1" lang="ja-JP" altLang="en-US" sz="1400">
+                          <a:latin typeface="メイリオ" panose="020B0604030504040204" pitchFamily="50" charset="-128"/>
+                          <a:ea typeface="メイリオ" panose="020B0604030504040204" pitchFamily="50" charset="-128"/>
+                        </a:rPr>
+                        <a:t>枚のレシートから経費精算</a:t>
+                      </a:r>
+                      <a:r>
+                        <a:rPr kumimoji="1" lang="en-US" altLang="ja-JP" sz="1400">
+                          <a:latin typeface="メイリオ" panose="020B0604030504040204" pitchFamily="50" charset="-128"/>
+                          <a:ea typeface="メイリオ" panose="020B0604030504040204" pitchFamily="50" charset="-128"/>
+                        </a:rPr>
+                        <a:t>Excel</a:t>
+                      </a:r>
+                      <a:r>
+                        <a:rPr kumimoji="1" lang="ja-JP" altLang="en-US" sz="1400">
+                          <a:latin typeface="メイリオ" panose="020B0604030504040204" pitchFamily="50" charset="-128"/>
+                          <a:ea typeface="メイリオ" panose="020B0604030504040204" pitchFamily="50" charset="-128"/>
+                        </a:rPr>
+                        <a:t>にして」 </a:t>
+                      </a:r>
+                      <a:r>
+                        <a:rPr kumimoji="1" lang="en-US" altLang="ja-JP" sz="1400">
+                          <a:latin typeface="メイリオ" panose="020B0604030504040204" pitchFamily="50" charset="-128"/>
+                          <a:ea typeface="メイリオ" panose="020B0604030504040204" pitchFamily="50" charset="-128"/>
+                        </a:rPr>
+                        <a:t>※</a:t>
+                      </a:r>
+                      <a:r>
+                        <a:rPr kumimoji="1" lang="ja-JP" altLang="en-US" sz="1400">
+                          <a:latin typeface="メイリオ" panose="020B0604030504040204" pitchFamily="50" charset="-128"/>
+                          <a:ea typeface="メイリオ" panose="020B0604030504040204" pitchFamily="50" charset="-128"/>
+                        </a:rPr>
+                        <a:t>あらかじめレシート画像をフォルダに入れておく</a:t>
+                      </a:r>
+                      <a:endParaRPr kumimoji="1" lang="en-US" altLang="ja-JP" sz="1400">
+                        <a:latin typeface="メイリオ" panose="020B0604030504040204" pitchFamily="50" charset="-128"/>
+                        <a:ea typeface="メイリオ" panose="020B0604030504040204" pitchFamily="50" charset="-128"/>
+                      </a:endParaRPr>
+                    </a:p>
+                    <a:p>
+                      <a:pPr marL="285750" indent="-285750">
+                        <a:buFont typeface="Arial" panose="020B0604020202020204" pitchFamily="34" charset="0"/>
+                        <a:buChar char="•"/>
+                      </a:pPr>
+                      <a:r>
+                        <a:rPr kumimoji="1" lang="en-US" altLang="ja-JP" sz="1400">
+                          <a:latin typeface="メイリオ" panose="020B0604030504040204" pitchFamily="50" charset="-128"/>
+                          <a:ea typeface="メイリオ" panose="020B0604030504040204" pitchFamily="50" charset="-128"/>
+                        </a:rPr>
+                        <a:t>Agent</a:t>
+                      </a:r>
+                      <a:r>
+                        <a:rPr kumimoji="1" lang="ja-JP" altLang="en-US" sz="1400">
+                          <a:latin typeface="メイリオ" panose="020B0604030504040204" pitchFamily="50" charset="-128"/>
+                          <a:ea typeface="メイリオ" panose="020B0604030504040204" pitchFamily="50" charset="-128"/>
+                        </a:rPr>
+                        <a:t>上の</a:t>
+                      </a:r>
+                      <a:r>
+                        <a:rPr kumimoji="1" lang="en-US" altLang="ja-JP" sz="1400">
+                          <a:latin typeface="メイリオ" panose="020B0604030504040204" pitchFamily="50" charset="-128"/>
+                          <a:ea typeface="メイリオ" panose="020B0604030504040204" pitchFamily="50" charset="-128"/>
+                        </a:rPr>
+                        <a:t>OCR</a:t>
+                      </a:r>
+                      <a:r>
+                        <a:rPr kumimoji="1" lang="ja-JP" altLang="en-US" sz="1400">
+                          <a:latin typeface="メイリオ" panose="020B0604030504040204" pitchFamily="50" charset="-128"/>
+                          <a:ea typeface="メイリオ" panose="020B0604030504040204" pitchFamily="50" charset="-128"/>
+                        </a:rPr>
+                        <a:t>でデータを抽出</a:t>
+                      </a:r>
+                      <a:endParaRPr kumimoji="1" lang="en-US" altLang="ja-JP" sz="1400">
+                        <a:latin typeface="メイリオ" panose="020B0604030504040204" pitchFamily="50" charset="-128"/>
+                        <a:ea typeface="メイリオ" panose="020B0604030504040204" pitchFamily="50" charset="-128"/>
+                      </a:endParaRPr>
+                    </a:p>
+                    <a:p>
+                      <a:pPr marL="285750" indent="-285750">
+                        <a:buFont typeface="Arial" panose="020B0604020202020204" pitchFamily="34" charset="0"/>
+                        <a:buChar char="•"/>
+                      </a:pPr>
+                      <a:r>
+                        <a:rPr kumimoji="1" lang="ja-JP" altLang="en-US" sz="1400">
+                          <a:latin typeface="メイリオ" panose="020B0604030504040204" pitchFamily="50" charset="-128"/>
+                          <a:ea typeface="メイリオ" panose="020B0604030504040204" pitchFamily="50" charset="-128"/>
+                        </a:rPr>
+                        <a:t>関数入り</a:t>
+                      </a:r>
+                      <a:r>
+                        <a:rPr kumimoji="1" lang="en-US" altLang="ja-JP" sz="1400">
+                          <a:latin typeface="メイリオ" panose="020B0604030504040204" pitchFamily="50" charset="-128"/>
+                          <a:ea typeface="メイリオ" panose="020B0604030504040204" pitchFamily="50" charset="-128"/>
+                        </a:rPr>
+                        <a:t>Excel</a:t>
+                      </a:r>
+                      <a:r>
+                        <a:rPr kumimoji="1" lang="ja-JP" altLang="en-US" sz="1400">
+                          <a:latin typeface="メイリオ" panose="020B0604030504040204" pitchFamily="50" charset="-128"/>
+                          <a:ea typeface="メイリオ" panose="020B0604030504040204" pitchFamily="50" charset="-128"/>
+                        </a:rPr>
+                        <a:t>に転記していく</a:t>
+                      </a:r>
+                      <a:endParaRPr kumimoji="1" lang="en-US" altLang="ja-JP" sz="1400">
+                        <a:latin typeface="メイリオ" panose="020B0604030504040204" pitchFamily="50" charset="-128"/>
+                        <a:ea typeface="メイリオ" panose="020B0604030504040204" pitchFamily="50" charset="-128"/>
+                      </a:endParaRPr>
+                    </a:p>
+                    <a:p>
+                      <a:pPr marL="285750" indent="-285750">
+                        <a:buFont typeface="Arial" panose="020B0604020202020204" pitchFamily="34" charset="0"/>
+                        <a:buChar char="•"/>
+                      </a:pPr>
+                      <a:r>
+                        <a:rPr kumimoji="1" lang="ja-JP" altLang="en-US" sz="1400">
+                          <a:latin typeface="メイリオ" panose="020B0604030504040204" pitchFamily="50" charset="-128"/>
+                          <a:ea typeface="メイリオ" panose="020B0604030504040204" pitchFamily="50" charset="-128"/>
+                        </a:rPr>
+                        <a:t>読み取れなかった部分は「</a:t>
+                      </a:r>
+                      <a:r>
+                        <a:rPr kumimoji="1" lang="en-US" altLang="ja-JP" sz="1400">
+                          <a:latin typeface="メイリオ" panose="020B0604030504040204" pitchFamily="50" charset="-128"/>
+                          <a:ea typeface="メイリオ" panose="020B0604030504040204" pitchFamily="50" charset="-128"/>
+                        </a:rPr>
+                        <a:t>Verify</a:t>
+                      </a:r>
+                      <a:r>
+                        <a:rPr kumimoji="1" lang="ja-JP" altLang="en-US" sz="1400">
+                          <a:latin typeface="メイリオ" panose="020B0604030504040204" pitchFamily="50" charset="-128"/>
+                          <a:ea typeface="メイリオ" panose="020B0604030504040204" pitchFamily="50" charset="-128"/>
+                        </a:rPr>
+                        <a:t>」と表示する</a:t>
+                      </a:r>
+                      <a:endParaRPr kumimoji="1" lang="en-US" altLang="ja-JP" sz="1400">
+                        <a:latin typeface="メイリオ" panose="020B0604030504040204" pitchFamily="50" charset="-128"/>
+                        <a:ea typeface="メイリオ" panose="020B0604030504040204" pitchFamily="50" charset="-128"/>
+                      </a:endParaRPr>
+                    </a:p>
+                  </a:txBody>
+                  <a:tcPr/>
+                </a:tc>
+                <a:extLst>
+                  <a:ext uri="{0D108BD9-81ED-4DB2-BD59-A6C34878D82A}">
+                    <a16:rowId xmlns:a16="http://schemas.microsoft.com/office/drawing/2014/main" val="1024406141"/>
+                  </a:ext>
+                </a:extLst>
+              </a:tr>
+              <a:tr h="370840">
+                <a:tc>
+                  <a:txBody>
+                    <a:bodyPr/>
+                    <a:lstStyle/>
+                    <a:p>
+                      <a:r>
+                        <a:rPr kumimoji="1" lang="ja-JP" altLang="en-US" sz="1400">
+                          <a:latin typeface="メイリオ" panose="020B0604030504040204" pitchFamily="50" charset="-128"/>
+                          <a:ea typeface="メイリオ" panose="020B0604030504040204" pitchFamily="50" charset="-128"/>
+                        </a:rPr>
+                        <a:t>デザインルールを</a:t>
+                      </a:r>
+                      <a:r>
+                        <a:rPr kumimoji="1" lang="en-US" altLang="ja-JP" sz="1400">
+                          <a:latin typeface="メイリオ" panose="020B0604030504040204" pitchFamily="50" charset="-128"/>
+                          <a:ea typeface="メイリオ" panose="020B0604030504040204" pitchFamily="50" charset="-128"/>
+                        </a:rPr>
+                        <a:t>Skill</a:t>
+                      </a:r>
+                      <a:r>
+                        <a:rPr kumimoji="1" lang="ja-JP" altLang="en-US" sz="1400">
+                          <a:latin typeface="メイリオ" panose="020B0604030504040204" pitchFamily="50" charset="-128"/>
+                          <a:ea typeface="メイリオ" panose="020B0604030504040204" pitchFamily="50" charset="-128"/>
+                        </a:rPr>
+                        <a:t>化して、定型フォーマットで資料作成</a:t>
+                      </a:r>
+                    </a:p>
+                  </a:txBody>
+                  <a:tcPr/>
+                </a:tc>
+                <a:tc>
+                  <a:txBody>
+                    <a:bodyPr/>
+                    <a:lstStyle/>
+                    <a:p>
+                      <a:pPr marL="285750" indent="-285750">
+                        <a:buFont typeface="Arial" panose="020B0604020202020204" pitchFamily="34" charset="0"/>
+                        <a:buChar char="•"/>
+                      </a:pPr>
+                      <a:r>
+                        <a:rPr kumimoji="1" lang="ja-JP" altLang="en-US" sz="1400">
+                          <a:latin typeface="メイリオ" panose="020B0604030504040204" pitchFamily="50" charset="-128"/>
+                          <a:ea typeface="メイリオ" panose="020B0604030504040204" pitchFamily="50" charset="-128"/>
+                        </a:rPr>
+                        <a:t>「この資料をスライドにして」</a:t>
+                      </a:r>
+                      <a:endParaRPr kumimoji="1" lang="en-US" altLang="ja-JP" sz="1400">
+                        <a:latin typeface="メイリオ" panose="020B0604030504040204" pitchFamily="50" charset="-128"/>
+                        <a:ea typeface="メイリオ" panose="020B0604030504040204" pitchFamily="50" charset="-128"/>
+                      </a:endParaRPr>
+                    </a:p>
+                    <a:p>
+                      <a:pPr marL="285750" indent="-285750">
+                        <a:buFont typeface="Arial" panose="020B0604020202020204" pitchFamily="34" charset="0"/>
+                        <a:buChar char="•"/>
+                      </a:pPr>
+                      <a:r>
+                        <a:rPr kumimoji="1" lang="en-US" altLang="ja-JP" sz="1400">
+                          <a:latin typeface="メイリオ" panose="020B0604030504040204" pitchFamily="50" charset="-128"/>
+                          <a:ea typeface="メイリオ" panose="020B0604030504040204" pitchFamily="50" charset="-128"/>
+                        </a:rPr>
+                        <a:t>SKILL.md</a:t>
+                      </a:r>
+                      <a:r>
+                        <a:rPr kumimoji="1" lang="ja-JP" altLang="en-US" sz="1400">
+                          <a:latin typeface="メイリオ" panose="020B0604030504040204" pitchFamily="50" charset="-128"/>
+                          <a:ea typeface="メイリオ" panose="020B0604030504040204" pitchFamily="50" charset="-128"/>
+                        </a:rPr>
+                        <a:t>に色・フォント・ロゴ・パターン定義などを記載しておく</a:t>
+                      </a:r>
+                      <a:endParaRPr kumimoji="1" lang="en-US" altLang="ja-JP" sz="1400">
+                        <a:latin typeface="メイリオ" panose="020B0604030504040204" pitchFamily="50" charset="-128"/>
+                        <a:ea typeface="メイリオ" panose="020B0604030504040204" pitchFamily="50" charset="-128"/>
+                      </a:endParaRPr>
+                    </a:p>
+                    <a:p>
+                      <a:pPr marL="285750" indent="-285750">
+                        <a:buFont typeface="Arial" panose="020B0604020202020204" pitchFamily="34" charset="0"/>
+                        <a:buChar char="•"/>
+                      </a:pPr>
+                      <a:r>
+                        <a:rPr kumimoji="1" lang="ja-JP" altLang="en-US" sz="1400">
+                          <a:latin typeface="メイリオ" panose="020B0604030504040204" pitchFamily="50" charset="-128"/>
+                          <a:ea typeface="メイリオ" panose="020B0604030504040204" pitchFamily="50" charset="-128"/>
+                        </a:rPr>
+                        <a:t>人によって品質が変わらず、属人化を防いだブランド基準の資料が完成</a:t>
+                      </a:r>
+                    </a:p>
+                  </a:txBody>
+                  <a:tcPr/>
+                </a:tc>
+                <a:extLst>
+                  <a:ext uri="{0D108BD9-81ED-4DB2-BD59-A6C34878D82A}">
+                    <a16:rowId xmlns:a16="http://schemas.microsoft.com/office/drawing/2014/main" val="3578875982"/>
+                  </a:ext>
+                </a:extLst>
+              </a:tr>
+              <a:tr h="370840">
+                <a:tc>
+                  <a:txBody>
+                    <a:bodyPr/>
+                    <a:lstStyle/>
+                    <a:p>
+                      <a:r>
+                        <a:rPr kumimoji="1" lang="ja-JP" altLang="en-US" sz="1400">
+                          <a:latin typeface="メイリオ" panose="020B0604030504040204" pitchFamily="50" charset="-128"/>
+                          <a:ea typeface="メイリオ" panose="020B0604030504040204" pitchFamily="50" charset="-128"/>
+                        </a:rPr>
+                        <a:t>ニュースモニタリング → スコアリング → </a:t>
+                      </a:r>
+                      <a:r>
+                        <a:rPr kumimoji="1" lang="en-US" altLang="ja-JP" sz="1400">
+                          <a:latin typeface="メイリオ" panose="020B0604030504040204" pitchFamily="50" charset="-128"/>
+                          <a:ea typeface="メイリオ" panose="020B0604030504040204" pitchFamily="50" charset="-128"/>
+                        </a:rPr>
+                        <a:t>HTML</a:t>
+                      </a:r>
+                      <a:r>
+                        <a:rPr kumimoji="1" lang="ja-JP" altLang="en-US" sz="1400">
+                          <a:latin typeface="メイリオ" panose="020B0604030504040204" pitchFamily="50" charset="-128"/>
+                          <a:ea typeface="メイリオ" panose="020B0604030504040204" pitchFamily="50" charset="-128"/>
+                        </a:rPr>
+                        <a:t>ニュースレター</a:t>
+                      </a:r>
+                    </a:p>
+                  </a:txBody>
+                  <a:tcPr/>
+                </a:tc>
+                <a:tc>
+                  <a:txBody>
+                    <a:bodyPr/>
+                    <a:lstStyle/>
+                    <a:p>
+                      <a:pPr marL="171450" indent="-171450">
+                        <a:buFont typeface="Arial" panose="020B0604020202020204" pitchFamily="34" charset="0"/>
+                        <a:buChar char="•"/>
+                      </a:pPr>
+                      <a:r>
+                        <a:rPr kumimoji="1" lang="ja-JP" altLang="en-US" sz="1400">
+                          <a:latin typeface="メイリオ" panose="020B0604030504040204" pitchFamily="50" charset="-128"/>
+                          <a:ea typeface="メイリオ" panose="020B0604030504040204" pitchFamily="50" charset="-128"/>
+                        </a:rPr>
+                        <a:t>「毎朝ニュースを集めて」をスケジュール実行</a:t>
+                      </a:r>
+                      <a:endParaRPr kumimoji="1" lang="en-US" altLang="ja-JP" sz="1400">
+                        <a:latin typeface="メイリオ" panose="020B0604030504040204" pitchFamily="50" charset="-128"/>
+                        <a:ea typeface="メイリオ" panose="020B0604030504040204" pitchFamily="50" charset="-128"/>
+                      </a:endParaRPr>
+                    </a:p>
+                    <a:p>
+                      <a:pPr marL="171450" indent="-171450">
+                        <a:buFont typeface="Arial" panose="020B0604020202020204" pitchFamily="34" charset="0"/>
+                        <a:buChar char="•"/>
+                      </a:pPr>
+                      <a:r>
+                        <a:rPr kumimoji="1" lang="ja-JP" altLang="en-US" sz="1400">
+                          <a:latin typeface="メイリオ" panose="020B0604030504040204" pitchFamily="50" charset="-128"/>
+                          <a:ea typeface="メイリオ" panose="020B0604030504040204" pitchFamily="50" charset="-128"/>
+                        </a:rPr>
+                        <a:t>定義した関連度スコアリングで優先度の高いものだけ抽出 → おしゃれな</a:t>
+                      </a:r>
+                      <a:r>
+                        <a:rPr kumimoji="1" lang="en-US" altLang="ja-JP" sz="1400">
+                          <a:latin typeface="メイリオ" panose="020B0604030504040204" pitchFamily="50" charset="-128"/>
+                          <a:ea typeface="メイリオ" panose="020B0604030504040204" pitchFamily="50" charset="-128"/>
+                        </a:rPr>
+                        <a:t>HTML</a:t>
+                      </a:r>
+                      <a:r>
+                        <a:rPr kumimoji="1" lang="ja-JP" altLang="en-US" sz="1400">
+                          <a:latin typeface="メイリオ" panose="020B0604030504040204" pitchFamily="50" charset="-128"/>
+                          <a:ea typeface="メイリオ" panose="020B0604030504040204" pitchFamily="50" charset="-128"/>
+                        </a:rPr>
+                        <a:t>ニュースレターにまとめてメールで配信するところまで一気通貫で回せる</a:t>
+                      </a:r>
+                    </a:p>
+                  </a:txBody>
+                  <a:tcPr/>
+                </a:tc>
+                <a:extLst>
+                  <a:ext uri="{0D108BD9-81ED-4DB2-BD59-A6C34878D82A}">
+                    <a16:rowId xmlns:a16="http://schemas.microsoft.com/office/drawing/2014/main" val="917245462"/>
+                  </a:ext>
+                </a:extLst>
+              </a:tr>
+              <a:tr h="370840">
+                <a:tc>
+                  <a:txBody>
+                    <a:bodyPr/>
+                    <a:lstStyle/>
+                    <a:p>
+                      <a:r>
+                        <a:rPr kumimoji="1" lang="ja-JP" altLang="en-US" sz="1400">
+                          <a:latin typeface="メイリオ" panose="020B0604030504040204" pitchFamily="50" charset="-128"/>
+                          <a:ea typeface="メイリオ" panose="020B0604030504040204" pitchFamily="50" charset="-128"/>
+                        </a:rPr>
+                        <a:t>レビュー結果を</a:t>
+                      </a:r>
+                      <a:r>
+                        <a:rPr kumimoji="1" lang="en-US" altLang="ja-JP" sz="1400">
+                          <a:latin typeface="メイリオ" panose="020B0604030504040204" pitchFamily="50" charset="-128"/>
+                          <a:ea typeface="メイリオ" panose="020B0604030504040204" pitchFamily="50" charset="-128"/>
+                        </a:rPr>
+                        <a:t>OneDrive</a:t>
+                      </a:r>
+                      <a:r>
+                        <a:rPr kumimoji="1" lang="ja-JP" altLang="en-US" sz="1400">
+                          <a:latin typeface="メイリオ" panose="020B0604030504040204" pitchFamily="50" charset="-128"/>
+                          <a:ea typeface="メイリオ" panose="020B0604030504040204" pitchFamily="50" charset="-128"/>
+                        </a:rPr>
+                        <a:t>に蓄積 → ダッシュボード</a:t>
+                      </a:r>
+                    </a:p>
+                  </a:txBody>
+                  <a:tcPr/>
+                </a:tc>
+                <a:tc>
+                  <a:txBody>
+                    <a:bodyPr/>
+                    <a:lstStyle/>
+                    <a:p>
+                      <a:pPr marL="171450" indent="-171450">
+                        <a:buFont typeface="Arial" panose="020B0604020202020204" pitchFamily="34" charset="0"/>
+                        <a:buChar char="•"/>
+                      </a:pPr>
+                      <a:r>
+                        <a:rPr kumimoji="1" lang="ja-JP" altLang="en-US" sz="1400">
+                          <a:latin typeface="メイリオ" panose="020B0604030504040204" pitchFamily="50" charset="-128"/>
+                          <a:ea typeface="メイリオ" panose="020B0604030504040204" pitchFamily="50" charset="-128"/>
+                        </a:rPr>
+                        <a:t>「部長</a:t>
+                      </a:r>
+                      <a:r>
+                        <a:rPr kumimoji="1" lang="en-US" altLang="ja-JP" sz="1400">
+                          <a:latin typeface="メイリオ" panose="020B0604030504040204" pitchFamily="50" charset="-128"/>
+                          <a:ea typeface="メイリオ" panose="020B0604030504040204" pitchFamily="50" charset="-128"/>
+                        </a:rPr>
+                        <a:t>AI</a:t>
+                      </a:r>
+                      <a:r>
+                        <a:rPr kumimoji="1" lang="ja-JP" altLang="en-US" sz="1400">
+                          <a:latin typeface="メイリオ" panose="020B0604030504040204" pitchFamily="50" charset="-128"/>
+                          <a:ea typeface="メイリオ" panose="020B0604030504040204" pitchFamily="50" charset="-128"/>
+                        </a:rPr>
+                        <a:t>」や「レビュー</a:t>
+                      </a:r>
+                      <a:r>
+                        <a:rPr kumimoji="1" lang="en-US" altLang="ja-JP" sz="1400">
+                          <a:latin typeface="メイリオ" panose="020B0604030504040204" pitchFamily="50" charset="-128"/>
+                          <a:ea typeface="メイリオ" panose="020B0604030504040204" pitchFamily="50" charset="-128"/>
+                        </a:rPr>
+                        <a:t>AI</a:t>
+                      </a:r>
+                      <a:r>
+                        <a:rPr kumimoji="1" lang="ja-JP" altLang="en-US" sz="1400">
+                          <a:latin typeface="メイリオ" panose="020B0604030504040204" pitchFamily="50" charset="-128"/>
+                          <a:ea typeface="メイリオ" panose="020B0604030504040204" pitchFamily="50" charset="-128"/>
+                        </a:rPr>
+                        <a:t>」のようなものがあったとして、その結果を</a:t>
+                      </a:r>
+                      <a:r>
+                        <a:rPr kumimoji="1" lang="en-US" altLang="ja-JP" sz="1400">
+                          <a:latin typeface="メイリオ" panose="020B0604030504040204" pitchFamily="50" charset="-128"/>
+                          <a:ea typeface="メイリオ" panose="020B0604030504040204" pitchFamily="50" charset="-128"/>
+                        </a:rPr>
+                        <a:t>OneDrive</a:t>
+                      </a:r>
+                      <a:r>
+                        <a:rPr kumimoji="1" lang="ja-JP" altLang="en-US" sz="1400">
+                          <a:latin typeface="メイリオ" panose="020B0604030504040204" pitchFamily="50" charset="-128"/>
+                          <a:ea typeface="メイリオ" panose="020B0604030504040204" pitchFamily="50" charset="-128"/>
+                        </a:rPr>
+                        <a:t>の特定のフォルダに集約する処理を</a:t>
+                      </a:r>
+                      <a:r>
+                        <a:rPr kumimoji="1" lang="en-US" altLang="ja-JP" sz="1400">
+                          <a:latin typeface="メイリオ" panose="020B0604030504040204" pitchFamily="50" charset="-128"/>
+                          <a:ea typeface="メイリオ" panose="020B0604030504040204" pitchFamily="50" charset="-128"/>
+                        </a:rPr>
+                        <a:t>Skills</a:t>
+                      </a:r>
+                      <a:r>
+                        <a:rPr kumimoji="1" lang="ja-JP" altLang="en-US" sz="1400">
+                          <a:latin typeface="メイリオ" panose="020B0604030504040204" pitchFamily="50" charset="-128"/>
+                          <a:ea typeface="メイリオ" panose="020B0604030504040204" pitchFamily="50" charset="-128"/>
+                        </a:rPr>
+                        <a:t>の手順に入れておくことで、過去のレビュー結果を自動蓄積</a:t>
+                      </a:r>
+                      <a:endParaRPr kumimoji="1" lang="en-US" altLang="ja-JP" sz="1400">
+                        <a:latin typeface="メイリオ" panose="020B0604030504040204" pitchFamily="50" charset="-128"/>
+                        <a:ea typeface="メイリオ" panose="020B0604030504040204" pitchFamily="50" charset="-128"/>
+                      </a:endParaRPr>
+                    </a:p>
+                    <a:p>
+                      <a:pPr marL="171450" indent="-171450">
+                        <a:buFont typeface="Arial" panose="020B0604020202020204" pitchFamily="34" charset="0"/>
+                        <a:buChar char="•"/>
+                      </a:pPr>
+                      <a:r>
+                        <a:rPr kumimoji="1" lang="ja-JP" altLang="en-US" sz="1400">
+                          <a:latin typeface="メイリオ" panose="020B0604030504040204" pitchFamily="50" charset="-128"/>
+                          <a:ea typeface="メイリオ" panose="020B0604030504040204" pitchFamily="50" charset="-128"/>
+                        </a:rPr>
+                        <a:t>そのフォルダ内で分析</a:t>
+                      </a:r>
+                      <a:r>
+                        <a:rPr kumimoji="1" lang="en-US" altLang="ja-JP" sz="1400">
+                          <a:latin typeface="メイリオ" panose="020B0604030504040204" pitchFamily="50" charset="-128"/>
+                          <a:ea typeface="メイリオ" panose="020B0604030504040204" pitchFamily="50" charset="-128"/>
+                        </a:rPr>
+                        <a:t>Skill</a:t>
+                      </a:r>
+                      <a:r>
+                        <a:rPr kumimoji="1" lang="ja-JP" altLang="en-US" sz="1400">
+                          <a:latin typeface="メイリオ" panose="020B0604030504040204" pitchFamily="50" charset="-128"/>
+                          <a:ea typeface="メイリオ" panose="020B0604030504040204" pitchFamily="50" charset="-128"/>
+                        </a:rPr>
+                        <a:t>を実行する</a:t>
+                      </a:r>
+                      <a:endParaRPr kumimoji="1" lang="en-US" altLang="ja-JP" sz="1400">
+                        <a:latin typeface="メイリオ" panose="020B0604030504040204" pitchFamily="50" charset="-128"/>
+                        <a:ea typeface="メイリオ" panose="020B0604030504040204" pitchFamily="50" charset="-128"/>
+                      </a:endParaRPr>
+                    </a:p>
+                    <a:p>
+                      <a:pPr marL="171450" indent="-171450">
+                        <a:buFont typeface="Arial" panose="020B0604020202020204" pitchFamily="34" charset="0"/>
+                        <a:buChar char="•"/>
+                      </a:pPr>
+                      <a:r>
+                        <a:rPr kumimoji="1" lang="ja-JP" altLang="en-US" sz="1400">
+                          <a:latin typeface="メイリオ" panose="020B0604030504040204" pitchFamily="50" charset="-128"/>
+                          <a:ea typeface="メイリオ" panose="020B0604030504040204" pitchFamily="50" charset="-128"/>
+                        </a:rPr>
+                        <a:t>追加で、見た目・配色などを定義した</a:t>
+                      </a:r>
+                      <a:r>
+                        <a:rPr kumimoji="1" lang="en-US" altLang="ja-JP" sz="1400">
+                          <a:latin typeface="メイリオ" panose="020B0604030504040204" pitchFamily="50" charset="-128"/>
+                          <a:ea typeface="メイリオ" panose="020B0604030504040204" pitchFamily="50" charset="-128"/>
+                        </a:rPr>
+                        <a:t>Skill</a:t>
+                      </a:r>
+                      <a:r>
+                        <a:rPr kumimoji="1" lang="ja-JP" altLang="en-US" sz="1400">
+                          <a:latin typeface="メイリオ" panose="020B0604030504040204" pitchFamily="50" charset="-128"/>
+                          <a:ea typeface="メイリオ" panose="020B0604030504040204" pitchFamily="50" charset="-128"/>
+                        </a:rPr>
+                        <a:t>を用意することで自分の用途に特化したダッシュボードを生成するなどができる</a:t>
+                      </a:r>
+                    </a:p>
+                  </a:txBody>
+                  <a:tcPr/>
+                </a:tc>
+                <a:extLst>
+                  <a:ext uri="{0D108BD9-81ED-4DB2-BD59-A6C34878D82A}">
+                    <a16:rowId xmlns:a16="http://schemas.microsoft.com/office/drawing/2014/main" val="2779978115"/>
+                  </a:ext>
+                </a:extLst>
+              </a:tr>
+            </a:tbl>
+          </a:graphicData>
+        </a:graphic>
+      </p:graphicFrame>
+      <p:sp>
+        <p:nvSpPr>
+          <p:cNvPr id="3" name="二等辺三角形 2">
+            <a:extLst>
+              <a:ext uri="{FF2B5EF4-FFF2-40B4-BE49-F238E27FC236}">
+                <a16:creationId xmlns:a16="http://schemas.microsoft.com/office/drawing/2014/main" id="{1BC0DFC6-F7B5-0963-8722-06AD63E99360}"/>
+              </a:ext>
+            </a:extLst>
+          </p:cNvPr>
+          <p:cNvSpPr/>
+          <p:nvPr/>
+        </p:nvSpPr>
+        <p:spPr>
+          <a:xfrm rot="10800000">
+            <a:off x="5713449" y="5101460"/>
+            <a:ext cx="765104" cy="214473"/>
+          </a:xfrm>
+          <a:prstGeom prst="triangle">
+            <a:avLst/>
+          </a:prstGeom>
+          <a:solidFill>
+            <a:srgbClr val="002060"/>
+          </a:solidFill>
+          <a:ln>
+            <a:noFill/>
+          </a:ln>
+        </p:spPr>
+        <p:style>
+          <a:lnRef idx="2">
+            <a:schemeClr val="accent1">
+              <a:shade val="15000"/>
+            </a:schemeClr>
+          </a:lnRef>
+          <a:fillRef idx="1">
+            <a:schemeClr val="accent1"/>
+          </a:fillRef>
+          <a:effectRef idx="0">
+            <a:schemeClr val="accent1"/>
+          </a:effectRef>
+          <a:fontRef idx="minor">
+            <a:schemeClr val="lt1"/>
+          </a:fontRef>
+        </p:style>
+        <p:txBody>
+          <a:bodyPr rtlCol="0" anchor="ctr"/>
+          <a:lstStyle/>
+          <a:p>
+            <a:pPr algn="ctr"/>
+            <a:endParaRPr kumimoji="1" lang="ja-JP" altLang="en-US"/>
+          </a:p>
+        </p:txBody>
+      </p:sp>
+      <p:sp>
+        <p:nvSpPr>
+          <p:cNvPr id="5" name="テキスト ボックス 4">
+            <a:extLst>
+              <a:ext uri="{FF2B5EF4-FFF2-40B4-BE49-F238E27FC236}">
+                <a16:creationId xmlns:a16="http://schemas.microsoft.com/office/drawing/2014/main" id="{5B05FC33-64BD-3EEA-8A37-8987E9EF21C7}"/>
+              </a:ext>
+            </a:extLst>
+          </p:cNvPr>
+          <p:cNvSpPr txBox="1"/>
+          <p:nvPr/>
+        </p:nvSpPr>
+        <p:spPr>
+          <a:xfrm>
+            <a:off x="3236044" y="5392661"/>
+            <a:ext cx="5719912" cy="800219"/>
+          </a:xfrm>
+          <a:prstGeom prst="rect">
+            <a:avLst/>
+          </a:prstGeom>
+          <a:noFill/>
+        </p:spPr>
+        <p:txBody>
+          <a:bodyPr wrap="square" rtlCol="0">
+            <a:spAutoFit/>
+          </a:bodyPr>
+          <a:lstStyle/>
+          <a:p>
+            <a:pPr algn="ctr">
+              <a:lnSpc>
+                <a:spcPct val="150000"/>
+              </a:lnSpc>
+            </a:pPr>
+            <a:r>
+              <a:rPr lang="ja-JP" altLang="en-US" sz="1600">
+                <a:latin typeface="メイリオ" panose="020B0604030504040204" pitchFamily="50" charset="-128"/>
+                <a:ea typeface="メイリオ" panose="020B0604030504040204" pitchFamily="50" charset="-128"/>
+              </a:rPr>
+              <a:t>今まで</a:t>
+            </a:r>
+            <a:r>
+              <a:rPr lang="en-US" altLang="ja-JP" sz="1600">
+                <a:latin typeface="メイリオ" panose="020B0604030504040204" pitchFamily="50" charset="-128"/>
+                <a:ea typeface="メイリオ" panose="020B0604030504040204" pitchFamily="50" charset="-128"/>
+              </a:rPr>
+              <a:t>PC</a:t>
+            </a:r>
+            <a:r>
+              <a:rPr lang="ja-JP" altLang="en-US" sz="1600">
+                <a:latin typeface="メイリオ" panose="020B0604030504040204" pitchFamily="50" charset="-128"/>
+                <a:ea typeface="メイリオ" panose="020B0604030504040204" pitchFamily="50" charset="-128"/>
+              </a:rPr>
+              <a:t>上で行っていた多くの作業が、</a:t>
+            </a:r>
+            <a:endParaRPr lang="en-US" altLang="ja-JP" sz="1600">
+              <a:latin typeface="メイリオ" panose="020B0604030504040204" pitchFamily="50" charset="-128"/>
+              <a:ea typeface="メイリオ" panose="020B0604030504040204" pitchFamily="50" charset="-128"/>
+            </a:endParaRPr>
+          </a:p>
+          <a:p>
+            <a:pPr algn="ctr">
+              <a:lnSpc>
+                <a:spcPct val="150000"/>
+              </a:lnSpc>
+            </a:pPr>
+            <a:r>
+              <a:rPr lang="en-US" altLang="ja-JP" sz="1600">
+                <a:latin typeface="メイリオ" panose="020B0604030504040204" pitchFamily="50" charset="-128"/>
+                <a:ea typeface="メイリオ" panose="020B0604030504040204" pitchFamily="50" charset="-128"/>
+              </a:rPr>
+              <a:t>Cowork</a:t>
+            </a:r>
+            <a:r>
+              <a:rPr lang="ja-JP" altLang="en-US" sz="1600">
+                <a:latin typeface="メイリオ" panose="020B0604030504040204" pitchFamily="50" charset="-128"/>
+                <a:ea typeface="メイリオ" panose="020B0604030504040204" pitchFamily="50" charset="-128"/>
+              </a:rPr>
+              <a:t>、スキルを用いることで代替できる可能性がある</a:t>
+            </a:r>
+            <a:endParaRPr lang="ja-JP" altLang="en-US" sz="1400">
+              <a:latin typeface="メイリオ" panose="020B0604030504040204" pitchFamily="50" charset="-128"/>
+              <a:ea typeface="メイリオ" panose="020B0604030504040204" pitchFamily="50" charset="-128"/>
+            </a:endParaRPr>
+          </a:p>
+        </p:txBody>
+      </p:sp>
+    </p:spTree>
+    <p:extLst>
+      <p:ext uri="{BB962C8B-B14F-4D97-AF65-F5344CB8AC3E}">
+        <p14:creationId xmlns:p14="http://schemas.microsoft.com/office/powerpoint/2010/main" val="2524802772"/>
+      </p:ext>
+    </p:extLst>
+  </p:cSld>
+  <p:clrMapOvr>
+    <a:masterClrMapping/>
+  </p:clrMapOvr>
+</p:sld>
+</file>
+
 <file path=ppt/slides/slide2.xml><?xml version="1.0" encoding="utf-8"?>
 <p:sld xmlns:a="http://schemas.openxmlformats.org/drawingml/2006/main" xmlns:r="http://schemas.openxmlformats.org/officeDocument/2006/relationships" xmlns:p="http://schemas.openxmlformats.org/presentationml/2006/main">
   <p:cSld>
@@ -12876,10 +20691,10 @@
           <p:nvPr/>
         </p:nvPicPr>
         <p:blipFill>
-          <a:blip r:embed="rId7">
+          <a:blip>
             <a:extLst>
               <a:ext uri="{96DAC541-7B7A-43D3-8B79-37D633B846F1}">
-                <asvg:svgBlip xmlns:asvg="http://schemas.microsoft.com/office/drawing/2016/SVG/main" r:embed="rId8"/>
+                <asvg:svgBlip xmlns:asvg="http://schemas.microsoft.com/office/drawing/2016/SVG/main" r:embed="rId7"/>
               </a:ext>
             </a:extLst>
           </a:blip>
@@ -12912,10 +20727,10 @@
           <p:nvPr/>
         </p:nvPicPr>
         <p:blipFill>
-          <a:blip r:embed="rId9">
+          <a:blip>
             <a:extLst>
               <a:ext uri="{96DAC541-7B7A-43D3-8B79-37D633B846F1}">
-                <asvg:svgBlip xmlns:asvg="http://schemas.microsoft.com/office/drawing/2016/SVG/main" r:embed="rId10"/>
+                <asvg:svgBlip xmlns:asvg="http://schemas.microsoft.com/office/drawing/2016/SVG/main" r:embed="rId8"/>
               </a:ext>
             </a:extLst>
           </a:blip>
@@ -12948,7 +20763,7 @@
           <p:nvPr/>
         </p:nvPicPr>
         <p:blipFill>
-          <a:blip r:embed="rId11">
+          <a:blip r:embed="rId9">
             <a:extLst>
               <a:ext uri="{28A0092B-C50C-407E-A947-70E740481C1C}">
                 <a14:useLocalDpi xmlns:a14="http://schemas.microsoft.com/office/drawing/2010/main" val="0"/>
@@ -13476,7 +21291,7 @@
               <a:rPr lang="en-US" altLang="ja-JP" sz="1050" b="1">
                 <a:latin typeface="メイリオ" panose="020B0604030504040204" pitchFamily="50" charset="-128"/>
                 <a:ea typeface="メイリオ" panose="020B0604030504040204" pitchFamily="50" charset="-128"/>
-                <a:hlinkClick r:id="rId12"/>
+                <a:hlinkClick r:id="rId10"/>
               </a:rPr>
               <a:t>Copilot</a:t>
             </a:r>
@@ -13484,7 +21299,7 @@
               <a:rPr lang="ja-JP" altLang="en-US" sz="1050" b="1">
                 <a:latin typeface="メイリオ" panose="020B0604030504040204" pitchFamily="50" charset="-128"/>
                 <a:ea typeface="メイリオ" panose="020B0604030504040204" pitchFamily="50" charset="-128"/>
-                <a:hlinkClick r:id="rId12"/>
+                <a:hlinkClick r:id="rId10"/>
               </a:rPr>
               <a:t>だけでは組織固有のワークフロー・自動化ニーズに完全対応できない</a:t>
             </a:r>
@@ -13526,7 +21341,7 @@
               <a:rPr lang="en-US" altLang="ja-JP" sz="1050">
                 <a:latin typeface="メイリオ" panose="020B0604030504040204" pitchFamily="50" charset="-128"/>
                 <a:ea typeface="メイリオ" panose="020B0604030504040204" pitchFamily="50" charset="-128"/>
-                <a:hlinkClick r:id="rId13"/>
+                <a:hlinkClick r:id="rId11"/>
               </a:rPr>
               <a:t>Anthropic</a:t>
             </a:r>
@@ -13534,7 +21349,7 @@
               <a:rPr lang="ja-JP" altLang="en-US" sz="1050">
                 <a:latin typeface="メイリオ" panose="020B0604030504040204" pitchFamily="50" charset="-128"/>
                 <a:ea typeface="メイリオ" panose="020B0604030504040204" pitchFamily="50" charset="-128"/>
-                <a:hlinkClick r:id="rId13"/>
+                <a:hlinkClick r:id="rId11"/>
               </a:rPr>
               <a:t>社内では非技術部門でもワークフロー自動化を実現</a:t>
             </a:r>
